--- a/blocks/B_robot_build/M08_gazebo_world_spawn/M08_Gazebo_World와_Robot_Spawn.pptx
+++ b/blocks/B_robot_build/M08_gazebo_world_spawn/M08_Gazebo_World와_Robot_Spawn.pptx
@@ -34,6 +34,7 @@
     <p:sldId id="282" r:id="rId34"/>
     <p:sldId id="283" r:id="rId35"/>
     <p:sldId id="284" r:id="rId36"/>
+    <p:sldId id="285" r:id="rId37"/>
   </p:sldIdLst>
   <p:sldSz cx="12191999" cy="6858000" type="screen4x3"/>
   <p:notesSz cx="6858000" cy="9144000"/>
@@ -620,7 +621,7 @@
           <a:lstStyle/>
           <a:p>
             <a:r>
-              <a:t>[설명] ~/agv_ws/src/agv_gazebo/worlds/warehouse.sdf의 전체 파일을 2/10 구간으로 작성한다.</a:t>
+              <a:t>[설명] ~/agv_ws/src/agv_gazebo/worlds/warehouse.sdf의 전체 파일을 2/11 구간으로 작성한다.</a:t>
             </a:r>
           </a:p>
           <a:p>
@@ -710,7 +711,7 @@
           <a:lstStyle/>
           <a:p>
             <a:r>
-              <a:t>[설명] ~/agv_ws/src/agv_gazebo/worlds/warehouse.sdf의 전체 파일을 3/10 구간으로 작성한다.</a:t>
+              <a:t>[설명] ~/agv_ws/src/agv_gazebo/worlds/warehouse.sdf의 전체 파일을 3/11 구간으로 작성한다.</a:t>
             </a:r>
           </a:p>
           <a:p>
@@ -800,7 +801,7 @@
           <a:lstStyle/>
           <a:p>
             <a:r>
-              <a:t>[설명] ~/agv_ws/src/agv_gazebo/worlds/warehouse.sdf의 전체 파일을 4/10 구간으로 작성한다.</a:t>
+              <a:t>[설명] ~/agv_ws/src/agv_gazebo/worlds/warehouse.sdf의 전체 파일을 4/11 구간으로 작성한다.</a:t>
             </a:r>
           </a:p>
           <a:p>
@@ -890,7 +891,7 @@
           <a:lstStyle/>
           <a:p>
             <a:r>
-              <a:t>[설명] ~/agv_ws/src/agv_gazebo/worlds/warehouse.sdf의 전체 파일을 5/10 구간으로 작성한다.</a:t>
+              <a:t>[설명] ~/agv_ws/src/agv_gazebo/worlds/warehouse.sdf의 전체 파일을 5/11 구간으로 작성한다.</a:t>
             </a:r>
           </a:p>
           <a:p>
@@ -980,7 +981,7 @@
           <a:lstStyle/>
           <a:p>
             <a:r>
-              <a:t>[설명] ~/agv_ws/src/agv_gazebo/worlds/warehouse.sdf의 전체 파일을 6/10 구간으로 작성한다.</a:t>
+              <a:t>[설명] ~/agv_ws/src/agv_gazebo/worlds/warehouse.sdf의 전체 파일을 6/11 구간으로 작성한다.</a:t>
             </a:r>
           </a:p>
           <a:p>
@@ -1070,7 +1071,7 @@
           <a:lstStyle/>
           <a:p>
             <a:r>
-              <a:t>[설명] ~/agv_ws/src/agv_gazebo/worlds/warehouse.sdf의 전체 파일을 7/10 구간으로 작성한다.</a:t>
+              <a:t>[설명] ~/agv_ws/src/agv_gazebo/worlds/warehouse.sdf의 전체 파일을 7/11 구간으로 작성한다.</a:t>
             </a:r>
           </a:p>
           <a:p>
@@ -1160,7 +1161,7 @@
           <a:lstStyle/>
           <a:p>
             <a:r>
-              <a:t>[설명] ~/agv_ws/src/agv_gazebo/worlds/warehouse.sdf의 전체 파일을 8/10 구간으로 작성한다.</a:t>
+              <a:t>[설명] ~/agv_ws/src/agv_gazebo/worlds/warehouse.sdf의 전체 파일을 8/11 구간으로 작성한다.</a:t>
             </a:r>
           </a:p>
           <a:p>
@@ -1250,7 +1251,7 @@
           <a:lstStyle/>
           <a:p>
             <a:r>
-              <a:t>[설명] ~/agv_ws/src/agv_gazebo/worlds/warehouse.sdf의 전체 파일을 9/10 구간으로 작성한다.</a:t>
+              <a:t>[설명] ~/agv_ws/src/agv_gazebo/worlds/warehouse.sdf의 전체 파일을 9/11 구간으로 작성한다.</a:t>
             </a:r>
           </a:p>
           <a:p>
@@ -1340,7 +1341,7 @@
           <a:lstStyle/>
           <a:p>
             <a:r>
-              <a:t>[설명] ~/agv_ws/src/agv_gazebo/worlds/warehouse.sdf의 전체 파일을 10/10 구간으로 작성한다.</a:t>
+              <a:t>[설명] ~/agv_ws/src/agv_gazebo/worlds/warehouse.sdf의 전체 파일을 10/11 구간으로 작성한다.</a:t>
             </a:r>
           </a:p>
           <a:p>
@@ -1430,12 +1431,12 @@
           <a:lstStyle/>
           <a:p>
             <a:r>
-              <a:t>[설명] ~/agv_ws/src/agv_gazebo/models/agv/model.config의 전체 파일을 1/1 구간으로 작성한다.</a:t>
-            </a:r>
-          </a:p>
-          <a:p>
-            <a:r>
-              <a:t>[실행] nano ~/agv_ws/src/agv_gazebo/models/agv/model.config</a:t>
+              <a:t>[설명] ~/agv_ws/src/agv_gazebo/worlds/warehouse.sdf의 전체 파일을 11/11 구간으로 작성한다.</a:t>
+            </a:r>
+          </a:p>
+          <a:p>
+            <a:r>
+              <a:t>[실행] nano ~/agv_ws/src/agv_gazebo/worlds/warehouse.sdf</a:t>
             </a:r>
           </a:p>
           <a:p>
@@ -1610,12 +1611,12 @@
           <a:lstStyle/>
           <a:p>
             <a:r>
-              <a:t>[설명] ~/agv_ws/src/agv_gazebo/launch/gazebo.launch.py의 전체 파일을 1/2 구간으로 작성한다.</a:t>
-            </a:r>
-          </a:p>
-          <a:p>
-            <a:r>
-              <a:t>[실행] nano ~/agv_ws/src/agv_gazebo/launch/gazebo.launch.py</a:t>
+              <a:t>[설명] ~/agv_ws/src/agv_gazebo/models/agv/model.config의 전체 파일을 1/1 구간으로 작성한다.</a:t>
+            </a:r>
+          </a:p>
+          <a:p>
+            <a:r>
+              <a:t>[실행] nano ~/agv_ws/src/agv_gazebo/models/agv/model.config</a:t>
             </a:r>
           </a:p>
           <a:p>
@@ -1700,7 +1701,7 @@
           <a:lstStyle/>
           <a:p>
             <a:r>
-              <a:t>[설명] ~/agv_ws/src/agv_gazebo/launch/gazebo.launch.py의 전체 파일을 2/2 구간으로 작성한다.</a:t>
+              <a:t>[설명] ~/agv_ws/src/agv_gazebo/launch/gazebo.launch.py의 전체 파일을 1/2 구간으로 작성한다.</a:t>
             </a:r>
           </a:p>
           <a:p>
@@ -1790,22 +1791,17 @@
           <a:lstStyle/>
           <a:p>
             <a:r>
-              <a:t>[설명] build/source/run을 생략 없이 실행한다.</a:t>
-            </a:r>
-          </a:p>
-          <a:p>
-            <a:r>
-              <a:t>[실행] cd ~/agv_ws &amp;&amp; source install/setup.bash</a:t>
-            </a:r>
-          </a:p>
-          <a:p>
-            <a:r>
-              <a:t>ros2 launch agv_gazebo gazebo.launch.py</a:t>
-            </a:r>
-          </a:p>
-          <a:p>
-            <a:r>
-              <a:t>[확인] ground·벽·박스가 있는 World에 AGV가 spawn되어 있는 Gazebo 화면을 확인한다.</a:t>
+              <a:t>[설명] ~/agv_ws/src/agv_gazebo/launch/gazebo.launch.py의 전체 파일을 2/2 구간으로 작성한다.</a:t>
+            </a:r>
+          </a:p>
+          <a:p>
+            <a:r>
+              <a:t>[실행] nano ~/agv_ws/src/agv_gazebo/launch/gazebo.launch.py</a:t>
+            </a:r>
+          </a:p>
+          <a:p>
+            <a:r>
+              <a:t>[확인] 코드를 저장하고 다음 코드 슬라이드 또는 build 단계로 이동한다.</a:t>
             </a:r>
           </a:p>
           <a:p>
@@ -1815,7 +1811,7 @@
           </a:p>
           <a:p>
             <a:r>
-              <a:t>[오류] 오류가 나면 현재 폴더, source, 파일 경로를 먼저 확인한다.</a:t>
+              <a:t>[오류] 들여쓰기·XML 태그·따옴표가 슬라이드와 정확히 같은지 확인한다.</a:t>
             </a:r>
           </a:p>
         </p:txBody>
@@ -1885,17 +1881,22 @@
           <a:lstStyle/>
           <a:p>
             <a:r>
-              <a:t>[설명] 실제 Ubuntu/ROS 2 환경에서 생성한 검증 화면이다.</a:t>
-            </a:r>
-          </a:p>
-          <a:p>
-            <a:r>
-              <a:t>[실행] 슬라이드의 명령 또는 파일 작성 단계를 진행한다.</a:t>
-            </a:r>
-          </a:p>
-          <a:p>
-            <a:r>
-              <a:t>[확인] 캡처의 명령과 다음 슬라이드의 검증 명령을 비교한다.</a:t>
+              <a:t>[설명] build/source/run을 생략 없이 실행한다.</a:t>
+            </a:r>
+          </a:p>
+          <a:p>
+            <a:r>
+              <a:t>[실행] cd ~/agv_ws &amp;&amp; source install/setup.bash</a:t>
+            </a:r>
+          </a:p>
+          <a:p>
+            <a:r>
+              <a:t>ros2 launch agv_gazebo gazebo.launch.py</a:t>
+            </a:r>
+          </a:p>
+          <a:p>
+            <a:r>
+              <a:t>[확인] ground·벽·박스가 있는 World에 AGV가 spawn되어 있는 Gazebo 화면을 확인한다.</a:t>
             </a:r>
           </a:p>
           <a:p>
@@ -2065,27 +2066,17 @@
           <a:lstStyle/>
           <a:p>
             <a:r>
-              <a:t>[설명] 검증 명령은 GUI 결과와 별도로 실행해 재현 가능한 완료 기준을 만든다.</a:t>
-            </a:r>
-          </a:p>
-          <a:p>
-            <a:r>
-              <a:t>[실행] gz sdf -k ~/agv_ws/src/agv_gazebo/models/agv/model.sdf</a:t>
-            </a:r>
-          </a:p>
-          <a:p>
-            <a:r>
-              <a:t>rg -n 'model://agv|&lt;world name=' ~/agv_ws/src/agv_gazebo/worlds/warehouse.sdf</a:t>
-            </a:r>
-          </a:p>
-          <a:p>
-            <a:r>
-              <a:t># 이어서 ros2 launch agv_gazebo gazebo.launch.py로 World를 연다.</a:t>
-            </a:r>
-          </a:p>
-          <a:p>
-            <a:r>
-              <a:t>[확인] ground·벽·박스가 있는 World에 AGV가 spawn되어 있는 Gazebo 화면을 확인한다.</a:t>
+              <a:t>[설명] 실제 Ubuntu/ROS 2 환경에서 생성한 검증 화면이다.</a:t>
+            </a:r>
+          </a:p>
+          <a:p>
+            <a:r>
+              <a:t>[실행] 슬라이드의 명령 또는 파일 작성 단계를 진행한다.</a:t>
+            </a:r>
+          </a:p>
+          <a:p>
+            <a:r>
+              <a:t>[확인] 캡처의 명령과 다음 슬라이드의 검증 명령을 비교한다.</a:t>
             </a:r>
           </a:p>
           <a:p>
@@ -2165,17 +2156,27 @@
           <a:lstStyle/>
           <a:p>
             <a:r>
-              <a:t>[설명] 오류를 대신 해결하지 말고 증상부터 우선 확인 순서대로 교육생이 실행하게 한다.</a:t>
-            </a:r>
-          </a:p>
-          <a:p>
-            <a:r>
-              <a:t>[실행] 슬라이드의 명령 또는 파일 작성 단계를 진행한다.</a:t>
-            </a:r>
-          </a:p>
-          <a:p>
-            <a:r>
-              <a:t>[확인] 수정 뒤 첫 검증 명령을 다시 실행한다.</a:t>
+              <a:t>[설명] 검증 명령은 GUI 결과와 별도로 실행해 재현 가능한 완료 기준을 만든다.</a:t>
+            </a:r>
+          </a:p>
+          <a:p>
+            <a:r>
+              <a:t>[실행] gz sdf -k ~/agv_ws/src/agv_gazebo/models/agv/model.sdf</a:t>
+            </a:r>
+          </a:p>
+          <a:p>
+            <a:r>
+              <a:t>rg -n 'model://agv|&lt;world name=' ~/agv_ws/src/agv_gazebo/worlds/warehouse.sdf</a:t>
+            </a:r>
+          </a:p>
+          <a:p>
+            <a:r>
+              <a:t># 이어서 ros2 launch agv_gazebo gazebo.launch.py로 World를 연다.</a:t>
+            </a:r>
+          </a:p>
+          <a:p>
+            <a:r>
+              <a:t>[확인] ground·벽·박스가 있는 World에 AGV가 spawn되어 있는 Gazebo 화면을 확인한다.</a:t>
             </a:r>
           </a:p>
           <a:p>
@@ -2185,7 +2186,7 @@
           </a:p>
           <a:p>
             <a:r>
-              <a:t>[오류] 슬라이드의 두 대표 오류를 먼저 사용한다.</a:t>
+              <a:t>[오류] 오류가 나면 현재 폴더, source, 파일 경로를 먼저 확인한다.</a:t>
             </a:r>
           </a:p>
         </p:txBody>
@@ -2255,7 +2256,7 @@
           <a:lstStyle/>
           <a:p>
             <a:r>
-              <a:t>[설명] 교육생이 직접 한 값만 바꿔 원인과 결과를 연결하게 한다.</a:t>
+              <a:t>[설명] 오류를 대신 해결하지 말고 증상부터 우선 확인 순서대로 교육생이 실행하게 한다.</a:t>
             </a:r>
           </a:p>
           <a:p>
@@ -2265,7 +2266,7 @@
           </a:p>
           <a:p>
             <a:r>
-              <a:t>[확인] 원래 값과 변경 값을 모두 기록한다.</a:t>
+              <a:t>[확인] 수정 뒤 첫 검증 명령을 다시 실행한다.</a:t>
             </a:r>
           </a:p>
           <a:p>
@@ -2275,7 +2276,7 @@
           </a:p>
           <a:p>
             <a:r>
-              <a:t>[오류] 오류가 나면 현재 폴더, source, 파일 경로를 먼저 확인한다.</a:t>
+              <a:t>[오류] 슬라이드의 두 대표 오류를 먼저 사용한다.</a:t>
             </a:r>
           </a:p>
         </p:txBody>
@@ -2345,7 +2346,7 @@
           <a:lstStyle/>
           <a:p>
             <a:r>
-              <a:t>[설명] 교육생이 Complete·캡처·로그를 저장했는지 확인하고 다음 모듈의 시작 상태를 읽는다.</a:t>
+              <a:t>[설명] 교육생이 직접 한 값만 바꿔 원인과 결과를 연결하게 한다.</a:t>
             </a:r>
           </a:p>
           <a:p>
@@ -2355,7 +2356,7 @@
           </a:p>
           <a:p>
             <a:r>
-              <a:t>[확인] M09 Differential Drive 시작 조건을 말할 수 있다.</a:t>
+              <a:t>[확인] 원래 값과 변경 값을 모두 기록한다.</a:t>
             </a:r>
           </a:p>
           <a:p>
@@ -2435,7 +2436,7 @@
           <a:lstStyle/>
           <a:p>
             <a:r>
-              <a:t>[설명] 공식 문서는 버전 차이와 확장 학습을 확인할 때 사용한다.</a:t>
+              <a:t>[설명] 교육생이 Complete·캡처·로그를 저장했는지 확인하고 다음 모듈의 시작 상태를 읽는다.</a:t>
             </a:r>
           </a:p>
           <a:p>
@@ -2445,7 +2446,7 @@
           </a:p>
           <a:p>
             <a:r>
-              <a:t>[확인] 학습자는 본문만으로 현재 모듈을 완료한 상태여야 한다.</a:t>
+              <a:t>[확인] M09 Differential Drive 시작 조건을 말할 수 있다.</a:t>
             </a:r>
           </a:p>
           <a:p>
@@ -2570,6 +2571,96 @@
 </p:notes>
 </file>
 
+<file path=ppt/notesSlides/notesSlide30.xml><?xml version="1.0" encoding="utf-8"?>
+<p:notes xmlns:a="http://schemas.openxmlformats.org/drawingml/2006/main" xmlns:p="http://schemas.openxmlformats.org/presentationml/2006/main" xmlns:r="http://schemas.openxmlformats.org/officeDocument/2006/relationships">
+  <p:cSld>
+    <p:spTree>
+      <p:nvGrpSpPr>
+        <p:cNvPr id="1" name=""/>
+        <p:cNvGrpSpPr/>
+        <p:nvPr/>
+      </p:nvGrpSpPr>
+      <p:grpSpPr>
+        <a:xfrm>
+          <a:off x="0" y="0"/>
+          <a:ext cx="0" cy="0"/>
+          <a:chOff x="0" y="0"/>
+          <a:chExt cx="0" cy="0"/>
+        </a:xfrm>
+      </p:grpSpPr>
+      <p:sp>
+        <p:nvSpPr>
+          <p:cNvPr id="2" name="Slide Image Placeholder 1"/>
+          <p:cNvSpPr>
+            <a:spLocks noGrp="1"/>
+          </p:cNvSpPr>
+          <p:nvPr>
+            <p:ph type="sldImg" idx="2"/>
+          </p:nvPr>
+        </p:nvSpPr>
+        <p:spPr/>
+      </p:sp>
+      <p:sp>
+        <p:nvSpPr>
+          <p:cNvPr id="3" name="Notes Placeholder 2"/>
+          <p:cNvSpPr>
+            <a:spLocks noGrp="1"/>
+          </p:cNvSpPr>
+          <p:nvPr>
+            <p:ph type="body" idx="3" sz="quarter"/>
+          </p:nvPr>
+        </p:nvSpPr>
+        <p:spPr/>
+        <p:txBody>
+          <a:bodyPr/>
+          <a:lstStyle/>
+          <a:p>
+            <a:r>
+              <a:t>[설명] 공식 문서는 버전 차이와 확장 학습을 확인할 때 사용한다.</a:t>
+            </a:r>
+          </a:p>
+          <a:p>
+            <a:r>
+              <a:t>[실행] 슬라이드의 명령 또는 파일 작성 단계를 진행한다.</a:t>
+            </a:r>
+          </a:p>
+          <a:p>
+            <a:r>
+              <a:t>[확인] 학습자는 본문만으로 현재 모듈을 완료한 상태여야 한다.</a:t>
+            </a:r>
+          </a:p>
+          <a:p>
+            <a:r>
+              <a:t>[멈춤] 교육생이 현재 체크포인트를 통과할 때까지 기다린다.</a:t>
+            </a:r>
+          </a:p>
+          <a:p>
+            <a:r>
+              <a:t>[오류] 오류가 나면 현재 폴더, source, 파일 경로를 먼저 확인한다.</a:t>
+            </a:r>
+          </a:p>
+        </p:txBody>
+      </p:sp>
+      <p:sp>
+        <p:nvSpPr>
+          <p:cNvPr id="4" name="Slide Number Placeholder 3"/>
+          <p:cNvSpPr>
+            <a:spLocks noGrp="1"/>
+          </p:cNvSpPr>
+          <p:nvPr>
+            <p:ph type="sldNum" idx="5" sz="quarter"/>
+          </p:nvPr>
+        </p:nvSpPr>
+        <p:spPr/>
+      </p:sp>
+    </p:spTree>
+  </p:cSld>
+  <p:clrMapOvr>
+    <a:masterClrMapping/>
+  </p:clrMapOvr>
+</p:notes>
+</file>
+
 <file path=ppt/notesSlides/notesSlide4.xml><?xml version="1.0" encoding="utf-8"?>
 <p:notes xmlns:a="http://schemas.openxmlformats.org/drawingml/2006/main" xmlns:p="http://schemas.openxmlformats.org/presentationml/2006/main" xmlns:r="http://schemas.openxmlformats.org/officeDocument/2006/relationships">
   <p:cSld>
@@ -3080,7 +3171,7 @@
           <a:lstStyle/>
           <a:p>
             <a:r>
-              <a:t>[설명] ~/agv_ws/src/agv_gazebo/worlds/warehouse.sdf의 전체 파일을 1/10 구간으로 작성한다.</a:t>
+              <a:t>[설명] ~/agv_ws/src/agv_gazebo/worlds/warehouse.sdf의 전체 파일을 1/11 구간으로 작성한다.</a:t>
             </a:r>
           </a:p>
           <a:p>
@@ -6473,7 +6564,7 @@
               </a:defRPr>
             </a:pPr>
             <a:r>
-              <a:t>파일을 계속 작성하고 저장한다 (2/10)</a:t>
+              <a:t>파일을 계속 작성하고 저장한다 (2/11)</a:t>
             </a:r>
           </a:p>
         </p:txBody>
@@ -6648,7 +6739,7 @@
               </a:defRPr>
             </a:pPr>
             <a:r>
-              <a:t>현재 단계 4/13    |    현재 폴더 ~/agv_ws    |    현재 터미널</a:t>
+              <a:t>현재 단계 4/14    |    현재 폴더 ~/agv_ws    |    현재 터미널</a:t>
             </a:r>
           </a:p>
         </p:txBody>
@@ -6661,8 +6752,8 @@
         </p:nvSpPr>
         <p:spPr>
           <a:xfrm>
-            <a:off x="658368" y="1682496"/>
-            <a:ext cx="10972800" cy="347472"/>
+            <a:off x="658368" y="1627632"/>
+            <a:ext cx="10972800" cy="256032"/>
           </a:xfrm>
           <a:prstGeom prst="rect">
             <a:avLst/>
@@ -6679,7 +6770,7 @@
               <a:spcAft>
                 <a:spcPts val="0"/>
               </a:spcAft>
-              <a:defRPr sz="1700" b="1">
+              <a:defRPr sz="1500" b="1">
                 <a:solidFill>
                   <a:srgbClr val="122C4E"/>
                 </a:solidFill>
@@ -6700,8 +6791,8 @@
         </p:nvSpPr>
         <p:spPr>
           <a:xfrm>
-            <a:off x="658368" y="2103120"/>
-            <a:ext cx="10972800" cy="493776"/>
+            <a:off x="658368" y="1956816"/>
+            <a:ext cx="10972800" cy="603504"/>
           </a:xfrm>
           <a:prstGeom prst="rect">
             <a:avLst/>
@@ -6745,7 +6836,11 @@
               </a:defRPr>
             </a:pPr>
             <a:r>
-              <a:t>파일 생성/열기: mkdir -p ~/agv_ws/src/agv_gazebo/worlds    &amp;&amp;    nano ~/agv_ws/src/agv_gazebo/worlds/warehouse.sdf</a:t>
+              <a:t>파일 생성: mkdir -p ~/agv_ws/src/agv_gazebo/worlds</a:t>
+            </a:r>
+            <a:br/>
+            <a:r>
+              <a:t>파일 열기: nano ~/agv_ws/src/agv_gazebo/worlds/warehouse.sdf</a:t>
             </a:r>
           </a:p>
         </p:txBody>
@@ -6758,8 +6853,8 @@
         </p:nvSpPr>
         <p:spPr>
           <a:xfrm>
-            <a:off x="658368" y="2761488"/>
-            <a:ext cx="10972800" cy="3383280"/>
+            <a:off x="658368" y="2706624"/>
+            <a:ext cx="10972800" cy="3364992"/>
           </a:xfrm>
           <a:prstGeom prst="rect">
             <a:avLst/>
@@ -6803,6 +6898,14 @@
               </a:defRPr>
             </a:pPr>
             <a:r>
+              <a:t>      name="gz::sim::systems::SceneBroadcaster"/&gt;</a:t>
+            </a:r>
+            <a:br/>
+            <a:r>
+              <a:t>    &lt;plugin filename="gz-sim-sensors-system" name="gz::sim::systems::Sensors"/&gt;</a:t>
+            </a:r>
+            <a:br/>
+            <a:r>
               <a:t>    </a:t>
             </a:r>
             <a:br/>
@@ -6840,22 +6943,6 @@
             <a:br/>
             <a:r>
               <a:t>    &lt;model name="ground"&gt;</a:t>
-            </a:r>
-            <a:br/>
-            <a:r>
-              <a:t>      &lt;static&gt;true&lt;/static&gt;</a:t>
-            </a:r>
-            <a:br/>
-            <a:r>
-              <a:t>      &lt;link name="link"&gt;</a:t>
-            </a:r>
-            <a:br/>
-            <a:r>
-              <a:t>        &lt;collision name="collision"&gt;</a:t>
-            </a:r>
-            <a:br/>
-            <a:r>
-              <a:t>          &lt;geometry&gt;</a:t>
             </a:r>
           </a:p>
         </p:txBody>
@@ -6868,7 +6955,7 @@
         </p:nvSpPr>
         <p:spPr>
           <a:xfrm>
-            <a:off x="749808" y="6199632"/>
+            <a:off x="749808" y="6181344"/>
             <a:ext cx="10789920" cy="201168"/>
           </a:xfrm>
           <a:prstGeom prst="rect">
@@ -6894,7 +6981,7 @@
               </a:defRPr>
             </a:pPr>
             <a:r>
-              <a:t>파일 전체 2/10 · 이 슬라이드 다음에 같은 파일의 나머지 줄이 이어집니다.</a:t>
+              <a:t>파일 전체 2/11 · 이 슬라이드 다음에 같은 파일의 나머지 줄이 이어집니다.</a:t>
             </a:r>
           </a:p>
         </p:txBody>
@@ -6951,7 +7038,7 @@
               </a:defRPr>
             </a:pPr>
             <a:r>
-              <a:t>파일을 계속 작성하고 저장한다 (3/10)</a:t>
+              <a:t>파일을 계속 작성하고 저장한다 (3/11)</a:t>
             </a:r>
           </a:p>
         </p:txBody>
@@ -7126,7 +7213,7 @@
               </a:defRPr>
             </a:pPr>
             <a:r>
-              <a:t>현재 단계 5/13    |    현재 폴더 ~/agv_ws    |    현재 터미널</a:t>
+              <a:t>현재 단계 5/14    |    현재 폴더 ~/agv_ws    |    현재 터미널</a:t>
             </a:r>
           </a:p>
         </p:txBody>
@@ -7139,8 +7226,8 @@
         </p:nvSpPr>
         <p:spPr>
           <a:xfrm>
-            <a:off x="658368" y="1682496"/>
-            <a:ext cx="10972800" cy="347472"/>
+            <a:off x="658368" y="1627632"/>
+            <a:ext cx="10972800" cy="256032"/>
           </a:xfrm>
           <a:prstGeom prst="rect">
             <a:avLst/>
@@ -7157,7 +7244,7 @@
               <a:spcAft>
                 <a:spcPts val="0"/>
               </a:spcAft>
-              <a:defRPr sz="1700" b="1">
+              <a:defRPr sz="1500" b="1">
                 <a:solidFill>
                   <a:srgbClr val="122C4E"/>
                 </a:solidFill>
@@ -7178,8 +7265,8 @@
         </p:nvSpPr>
         <p:spPr>
           <a:xfrm>
-            <a:off x="658368" y="2103120"/>
-            <a:ext cx="10972800" cy="493776"/>
+            <a:off x="658368" y="1956816"/>
+            <a:ext cx="10972800" cy="603504"/>
           </a:xfrm>
           <a:prstGeom prst="rect">
             <a:avLst/>
@@ -7223,7 +7310,11 @@
               </a:defRPr>
             </a:pPr>
             <a:r>
-              <a:t>파일 생성/열기: mkdir -p ~/agv_ws/src/agv_gazebo/worlds    &amp;&amp;    nano ~/agv_ws/src/agv_gazebo/worlds/warehouse.sdf</a:t>
+              <a:t>파일 생성: mkdir -p ~/agv_ws/src/agv_gazebo/worlds</a:t>
+            </a:r>
+            <a:br/>
+            <a:r>
+              <a:t>파일 열기: nano ~/agv_ws/src/agv_gazebo/worlds/warehouse.sdf</a:t>
             </a:r>
           </a:p>
         </p:txBody>
@@ -7236,8 +7327,8 @@
         </p:nvSpPr>
         <p:spPr>
           <a:xfrm>
-            <a:off x="658368" y="2761488"/>
-            <a:ext cx="10972800" cy="3383280"/>
+            <a:off x="658368" y="2706624"/>
+            <a:ext cx="10972800" cy="3364992"/>
           </a:xfrm>
           <a:prstGeom prst="rect">
             <a:avLst/>
@@ -7281,6 +7372,22 @@
               </a:defRPr>
             </a:pPr>
             <a:r>
+              <a:t>      &lt;static&gt;true&lt;/static&gt;</a:t>
+            </a:r>
+            <a:br/>
+            <a:r>
+              <a:t>      &lt;link name="link"&gt;</a:t>
+            </a:r>
+            <a:br/>
+            <a:r>
+              <a:t>        &lt;collision name="collision"&gt;</a:t>
+            </a:r>
+            <a:br/>
+            <a:r>
+              <a:t>          &lt;geometry&gt;</a:t>
+            </a:r>
+            <a:br/>
+            <a:r>
               <a:t>            &lt;plane&gt;</a:t>
             </a:r>
             <a:br/>
@@ -7310,30 +7417,6 @@
             <a:br/>
             <a:r>
               <a:t>          &lt;geometry&gt;</a:t>
-            </a:r>
-            <a:br/>
-            <a:r>
-              <a:t>            &lt;plane&gt;</a:t>
-            </a:r>
-            <a:br/>
-            <a:r>
-              <a:t>              &lt;normal&gt;0 0 1&lt;/normal&gt;</a:t>
-            </a:r>
-            <a:br/>
-            <a:r>
-              <a:t>              &lt;size&gt;30 30&lt;/size&gt;</a:t>
-            </a:r>
-            <a:br/>
-            <a:r>
-              <a:t>            &lt;/plane&gt;</a:t>
-            </a:r>
-            <a:br/>
-            <a:r>
-              <a:t>          &lt;/geometry&gt;</a:t>
-            </a:r>
-            <a:br/>
-            <a:r>
-              <a:t>          &lt;material&gt;</a:t>
             </a:r>
           </a:p>
         </p:txBody>
@@ -7346,7 +7429,7 @@
         </p:nvSpPr>
         <p:spPr>
           <a:xfrm>
-            <a:off x="749808" y="6199632"/>
+            <a:off x="749808" y="6181344"/>
             <a:ext cx="10789920" cy="201168"/>
           </a:xfrm>
           <a:prstGeom prst="rect">
@@ -7372,7 +7455,7 @@
               </a:defRPr>
             </a:pPr>
             <a:r>
-              <a:t>파일 전체 3/10 · 이 슬라이드 다음에 같은 파일의 나머지 줄이 이어집니다.</a:t>
+              <a:t>파일 전체 3/11 · 이 슬라이드 다음에 같은 파일의 나머지 줄이 이어집니다.</a:t>
             </a:r>
           </a:p>
         </p:txBody>
@@ -7429,7 +7512,7 @@
               </a:defRPr>
             </a:pPr>
             <a:r>
-              <a:t>파일을 계속 작성하고 저장한다 (4/10)</a:t>
+              <a:t>파일을 계속 작성하고 저장한다 (4/11)</a:t>
             </a:r>
           </a:p>
         </p:txBody>
@@ -7604,7 +7687,7 @@
               </a:defRPr>
             </a:pPr>
             <a:r>
-              <a:t>현재 단계 6/13    |    현재 폴더 ~/agv_ws    |    현재 터미널</a:t>
+              <a:t>현재 단계 6/14    |    현재 폴더 ~/agv_ws    |    현재 터미널</a:t>
             </a:r>
           </a:p>
         </p:txBody>
@@ -7617,8 +7700,8 @@
         </p:nvSpPr>
         <p:spPr>
           <a:xfrm>
-            <a:off x="658368" y="1682496"/>
-            <a:ext cx="10972800" cy="347472"/>
+            <a:off x="658368" y="1627632"/>
+            <a:ext cx="10972800" cy="256032"/>
           </a:xfrm>
           <a:prstGeom prst="rect">
             <a:avLst/>
@@ -7635,7 +7718,7 @@
               <a:spcAft>
                 <a:spcPts val="0"/>
               </a:spcAft>
-              <a:defRPr sz="1700" b="1">
+              <a:defRPr sz="1500" b="1">
                 <a:solidFill>
                   <a:srgbClr val="122C4E"/>
                 </a:solidFill>
@@ -7656,8 +7739,8 @@
         </p:nvSpPr>
         <p:spPr>
           <a:xfrm>
-            <a:off x="658368" y="2103120"/>
-            <a:ext cx="10972800" cy="493776"/>
+            <a:off x="658368" y="1956816"/>
+            <a:ext cx="10972800" cy="603504"/>
           </a:xfrm>
           <a:prstGeom prst="rect">
             <a:avLst/>
@@ -7701,7 +7784,11 @@
               </a:defRPr>
             </a:pPr>
             <a:r>
-              <a:t>파일 생성/열기: mkdir -p ~/agv_ws/src/agv_gazebo/worlds    &amp;&amp;    nano ~/agv_ws/src/agv_gazebo/worlds/warehouse.sdf</a:t>
+              <a:t>파일 생성: mkdir -p ~/agv_ws/src/agv_gazebo/worlds</a:t>
+            </a:r>
+            <a:br/>
+            <a:r>
+              <a:t>파일 열기: nano ~/agv_ws/src/agv_gazebo/worlds/warehouse.sdf</a:t>
             </a:r>
           </a:p>
         </p:txBody>
@@ -7714,8 +7801,8 @@
         </p:nvSpPr>
         <p:spPr>
           <a:xfrm>
-            <a:off x="658368" y="2761488"/>
-            <a:ext cx="10972800" cy="3383280"/>
+            <a:off x="658368" y="2706624"/>
+            <a:ext cx="10972800" cy="3364992"/>
           </a:xfrm>
           <a:prstGeom prst="rect">
             <a:avLst/>
@@ -7759,6 +7846,30 @@
               </a:defRPr>
             </a:pPr>
             <a:r>
+              <a:t>            &lt;plane&gt;</a:t>
+            </a:r>
+            <a:br/>
+            <a:r>
+              <a:t>              &lt;normal&gt;0 0 1&lt;/normal&gt;</a:t>
+            </a:r>
+            <a:br/>
+            <a:r>
+              <a:t>              &lt;size&gt;30 30&lt;/size&gt;</a:t>
+            </a:r>
+            <a:br/>
+            <a:r>
+              <a:t>            &lt;/plane&gt;</a:t>
+            </a:r>
+            <a:br/>
+            <a:r>
+              <a:t>          &lt;/geometry&gt;</a:t>
+            </a:r>
+            <a:br/>
+            <a:r>
+              <a:t>          &lt;material&gt;</a:t>
+            </a:r>
+            <a:br/>
+            <a:r>
               <a:t>            &lt;diffuse&gt;0.65 0.65 0.65 1&lt;/diffuse&gt;</a:t>
             </a:r>
             <a:br/>
@@ -7780,38 +7891,6 @@
             <a:br/>
             <a:r>
               <a:t>    </a:t>
-            </a:r>
-            <a:br/>
-            <a:r>
-              <a:t>  </a:t>
-            </a:r>
-            <a:br/>
-            <a:r>
-              <a:t>    &lt;model name="wall_north"&gt;</a:t>
-            </a:r>
-            <a:br/>
-            <a:r>
-              <a:t>      &lt;static&gt;true&lt;/static&gt;</a:t>
-            </a:r>
-            <a:br/>
-            <a:r>
-              <a:t>      &lt;pose&gt;0 4 1 0 0 0&lt;/pose&gt;</a:t>
-            </a:r>
-            <a:br/>
-            <a:r>
-              <a:t>      &lt;link name="link"&gt;</a:t>
-            </a:r>
-            <a:br/>
-            <a:r>
-              <a:t>        &lt;collision name="c"&gt;</a:t>
-            </a:r>
-            <a:br/>
-            <a:r>
-              <a:t>          &lt;geometry&gt;</a:t>
-            </a:r>
-            <a:br/>
-            <a:r>
-              <a:t>            &lt;box&gt;</a:t>
             </a:r>
           </a:p>
         </p:txBody>
@@ -7824,7 +7903,7 @@
         </p:nvSpPr>
         <p:spPr>
           <a:xfrm>
-            <a:off x="749808" y="6199632"/>
+            <a:off x="749808" y="6181344"/>
             <a:ext cx="10789920" cy="201168"/>
           </a:xfrm>
           <a:prstGeom prst="rect">
@@ -7850,7 +7929,7 @@
               </a:defRPr>
             </a:pPr>
             <a:r>
-              <a:t>파일 전체 4/10 · 이 슬라이드 다음에 같은 파일의 나머지 줄이 이어집니다.</a:t>
+              <a:t>파일 전체 4/11 · 이 슬라이드 다음에 같은 파일의 나머지 줄이 이어집니다.</a:t>
             </a:r>
           </a:p>
         </p:txBody>
@@ -7907,7 +7986,7 @@
               </a:defRPr>
             </a:pPr>
             <a:r>
-              <a:t>파일을 계속 작성하고 저장한다 (5/10)</a:t>
+              <a:t>파일을 계속 작성하고 저장한다 (5/11)</a:t>
             </a:r>
           </a:p>
         </p:txBody>
@@ -8082,7 +8161,7 @@
               </a:defRPr>
             </a:pPr>
             <a:r>
-              <a:t>현재 단계 7/13    |    현재 폴더 ~/agv_ws    |    현재 터미널</a:t>
+              <a:t>현재 단계 7/14    |    현재 폴더 ~/agv_ws    |    현재 터미널</a:t>
             </a:r>
           </a:p>
         </p:txBody>
@@ -8095,8 +8174,8 @@
         </p:nvSpPr>
         <p:spPr>
           <a:xfrm>
-            <a:off x="658368" y="1682496"/>
-            <a:ext cx="10972800" cy="347472"/>
+            <a:off x="658368" y="1627632"/>
+            <a:ext cx="10972800" cy="256032"/>
           </a:xfrm>
           <a:prstGeom prst="rect">
             <a:avLst/>
@@ -8113,7 +8192,7 @@
               <a:spcAft>
                 <a:spcPts val="0"/>
               </a:spcAft>
-              <a:defRPr sz="1700" b="1">
+              <a:defRPr sz="1500" b="1">
                 <a:solidFill>
                   <a:srgbClr val="122C4E"/>
                 </a:solidFill>
@@ -8134,8 +8213,8 @@
         </p:nvSpPr>
         <p:spPr>
           <a:xfrm>
-            <a:off x="658368" y="2103120"/>
-            <a:ext cx="10972800" cy="493776"/>
+            <a:off x="658368" y="1956816"/>
+            <a:ext cx="10972800" cy="603504"/>
           </a:xfrm>
           <a:prstGeom prst="rect">
             <a:avLst/>
@@ -8179,7 +8258,11 @@
               </a:defRPr>
             </a:pPr>
             <a:r>
-              <a:t>파일 생성/열기: mkdir -p ~/agv_ws/src/agv_gazebo/worlds    &amp;&amp;    nano ~/agv_ws/src/agv_gazebo/worlds/warehouse.sdf</a:t>
+              <a:t>파일 생성: mkdir -p ~/agv_ws/src/agv_gazebo/worlds</a:t>
+            </a:r>
+            <a:br/>
+            <a:r>
+              <a:t>파일 열기: nano ~/agv_ws/src/agv_gazebo/worlds/warehouse.sdf</a:t>
             </a:r>
           </a:p>
         </p:txBody>
@@ -8192,8 +8275,8 @@
         </p:nvSpPr>
         <p:spPr>
           <a:xfrm>
-            <a:off x="658368" y="2761488"/>
-            <a:ext cx="10972800" cy="3383280"/>
+            <a:off x="658368" y="2706624"/>
+            <a:ext cx="10972800" cy="3364992"/>
           </a:xfrm>
           <a:prstGeom prst="rect">
             <a:avLst/>
@@ -8237,6 +8320,38 @@
               </a:defRPr>
             </a:pPr>
             <a:r>
+              <a:t>  </a:t>
+            </a:r>
+            <a:br/>
+            <a:r>
+              <a:t>    &lt;model name="wall_north"&gt;</a:t>
+            </a:r>
+            <a:br/>
+            <a:r>
+              <a:t>      &lt;static&gt;true&lt;/static&gt;</a:t>
+            </a:r>
+            <a:br/>
+            <a:r>
+              <a:t>      &lt;pose&gt;0 4 1 0 0 0&lt;/pose&gt;</a:t>
+            </a:r>
+            <a:br/>
+            <a:r>
+              <a:t>      &lt;link name="link"&gt;</a:t>
+            </a:r>
+            <a:br/>
+            <a:r>
+              <a:t>        &lt;collision name="c"&gt;</a:t>
+            </a:r>
+            <a:br/>
+            <a:r>
+              <a:t>          &lt;geometry&gt;</a:t>
+            </a:r>
+            <a:br/>
+            <a:r>
+              <a:t>            &lt;box&gt;</a:t>
+            </a:r>
+            <a:br/>
+            <a:r>
               <a:t>              &lt;size&gt;8 0.15 2&lt;/size&gt;</a:t>
             </a:r>
             <a:br/>
@@ -8250,46 +8365,6 @@
             <a:br/>
             <a:r>
               <a:t>        &lt;/collision&gt;</a:t>
-            </a:r>
-            <a:br/>
-            <a:r>
-              <a:t>        &lt;visual name="v"&gt;</a:t>
-            </a:r>
-            <a:br/>
-            <a:r>
-              <a:t>          &lt;geometry&gt;</a:t>
-            </a:r>
-            <a:br/>
-            <a:r>
-              <a:t>            &lt;box&gt;</a:t>
-            </a:r>
-            <a:br/>
-            <a:r>
-              <a:t>              &lt;size&gt;8 0.15 2&lt;/size&gt;</a:t>
-            </a:r>
-            <a:br/>
-            <a:r>
-              <a:t>            &lt;/box&gt;</a:t>
-            </a:r>
-            <a:br/>
-            <a:r>
-              <a:t>          &lt;/geometry&gt;</a:t>
-            </a:r>
-            <a:br/>
-            <a:r>
-              <a:t>        &lt;/visual&gt;</a:t>
-            </a:r>
-            <a:br/>
-            <a:r>
-              <a:t>      &lt;/link&gt;</a:t>
-            </a:r>
-            <a:br/>
-            <a:r>
-              <a:t>    &lt;/model&gt;</a:t>
-            </a:r>
-            <a:br/>
-            <a:r>
-              <a:t>    </a:t>
             </a:r>
           </a:p>
         </p:txBody>
@@ -8302,7 +8377,7 @@
         </p:nvSpPr>
         <p:spPr>
           <a:xfrm>
-            <a:off x="749808" y="6199632"/>
+            <a:off x="749808" y="6181344"/>
             <a:ext cx="10789920" cy="201168"/>
           </a:xfrm>
           <a:prstGeom prst="rect">
@@ -8328,7 +8403,7 @@
               </a:defRPr>
             </a:pPr>
             <a:r>
-              <a:t>파일 전체 5/10 · 이 슬라이드 다음에 같은 파일의 나머지 줄이 이어집니다.</a:t>
+              <a:t>파일 전체 5/11 · 이 슬라이드 다음에 같은 파일의 나머지 줄이 이어집니다.</a:t>
             </a:r>
           </a:p>
         </p:txBody>
@@ -8385,7 +8460,7 @@
               </a:defRPr>
             </a:pPr>
             <a:r>
-              <a:t>파일을 계속 작성하고 저장한다 (6/10)</a:t>
+              <a:t>파일을 계속 작성하고 저장한다 (6/11)</a:t>
             </a:r>
           </a:p>
         </p:txBody>
@@ -8560,7 +8635,7 @@
               </a:defRPr>
             </a:pPr>
             <a:r>
-              <a:t>현재 단계 8/13    |    현재 폴더 ~/agv_ws    |    현재 터미널</a:t>
+              <a:t>현재 단계 8/14    |    현재 폴더 ~/agv_ws    |    현재 터미널</a:t>
             </a:r>
           </a:p>
         </p:txBody>
@@ -8573,8 +8648,8 @@
         </p:nvSpPr>
         <p:spPr>
           <a:xfrm>
-            <a:off x="658368" y="1682496"/>
-            <a:ext cx="10972800" cy="347472"/>
+            <a:off x="658368" y="1627632"/>
+            <a:ext cx="10972800" cy="256032"/>
           </a:xfrm>
           <a:prstGeom prst="rect">
             <a:avLst/>
@@ -8591,7 +8666,7 @@
               <a:spcAft>
                 <a:spcPts val="0"/>
               </a:spcAft>
-              <a:defRPr sz="1700" b="1">
+              <a:defRPr sz="1500" b="1">
                 <a:solidFill>
                   <a:srgbClr val="122C4E"/>
                 </a:solidFill>
@@ -8612,8 +8687,8 @@
         </p:nvSpPr>
         <p:spPr>
           <a:xfrm>
-            <a:off x="658368" y="2103120"/>
-            <a:ext cx="10972800" cy="493776"/>
+            <a:off x="658368" y="1956816"/>
+            <a:ext cx="10972800" cy="603504"/>
           </a:xfrm>
           <a:prstGeom prst="rect">
             <a:avLst/>
@@ -8657,7 +8732,11 @@
               </a:defRPr>
             </a:pPr>
             <a:r>
-              <a:t>파일 생성/열기: mkdir -p ~/agv_ws/src/agv_gazebo/worlds    &amp;&amp;    nano ~/agv_ws/src/agv_gazebo/worlds/warehouse.sdf</a:t>
+              <a:t>파일 생성: mkdir -p ~/agv_ws/src/agv_gazebo/worlds</a:t>
+            </a:r>
+            <a:br/>
+            <a:r>
+              <a:t>파일 열기: nano ~/agv_ws/src/agv_gazebo/worlds/warehouse.sdf</a:t>
             </a:r>
           </a:p>
         </p:txBody>
@@ -8670,8 +8749,8 @@
         </p:nvSpPr>
         <p:spPr>
           <a:xfrm>
-            <a:off x="658368" y="2761488"/>
-            <a:ext cx="10972800" cy="3383280"/>
+            <a:off x="658368" y="2706624"/>
+            <a:ext cx="10972800" cy="3364992"/>
           </a:xfrm>
           <a:prstGeom prst="rect">
             <a:avLst/>
@@ -8715,59 +8794,51 @@
               </a:defRPr>
             </a:pPr>
             <a:r>
+              <a:t>        &lt;visual name="v"&gt;</a:t>
+            </a:r>
+            <a:br/>
+            <a:r>
+              <a:t>          &lt;geometry&gt;</a:t>
+            </a:r>
+            <a:br/>
+            <a:r>
+              <a:t>            &lt;box&gt;</a:t>
+            </a:r>
+            <a:br/>
+            <a:r>
+              <a:t>              &lt;size&gt;8 0.15 2&lt;/size&gt;</a:t>
+            </a:r>
+            <a:br/>
+            <a:r>
+              <a:t>            &lt;/box&gt;</a:t>
+            </a:r>
+            <a:br/>
+            <a:r>
+              <a:t>          &lt;/geometry&gt;</a:t>
+            </a:r>
+            <a:br/>
+            <a:r>
+              <a:t>        &lt;/visual&gt;</a:t>
+            </a:r>
+            <a:br/>
+            <a:r>
+              <a:t>      &lt;/link&gt;</a:t>
+            </a:r>
+            <a:br/>
+            <a:r>
+              <a:t>    &lt;/model&gt;</a:t>
+            </a:r>
+            <a:br/>
+            <a:r>
+              <a:t>    </a:t>
+            </a:r>
+            <a:br/>
+            <a:r>
               <a:t>  </a:t>
             </a:r>
             <a:br/>
             <a:r>
               <a:t>    &lt;model name="obstacle"&gt;</a:t>
-            </a:r>
-            <a:br/>
-            <a:r>
-              <a:t>      &lt;static&gt;true&lt;/static&gt;</a:t>
-            </a:r>
-            <a:br/>
-            <a:r>
-              <a:t>      &lt;pose&gt;1.5 0 0.4 0 0 0&lt;/pose&gt;</a:t>
-            </a:r>
-            <a:br/>
-            <a:r>
-              <a:t>      &lt;link name="link"&gt;</a:t>
-            </a:r>
-            <a:br/>
-            <a:r>
-              <a:t>        &lt;collision name="c"&gt;</a:t>
-            </a:r>
-            <a:br/>
-            <a:r>
-              <a:t>          &lt;geometry&gt;</a:t>
-            </a:r>
-            <a:br/>
-            <a:r>
-              <a:t>            &lt;box&gt;</a:t>
-            </a:r>
-            <a:br/>
-            <a:r>
-              <a:t>              &lt;size&gt;0.5 0.5 0.8&lt;/size&gt;</a:t>
-            </a:r>
-            <a:br/>
-            <a:r>
-              <a:t>            &lt;/box&gt;</a:t>
-            </a:r>
-            <a:br/>
-            <a:r>
-              <a:t>          &lt;/geometry&gt;</a:t>
-            </a:r>
-            <a:br/>
-            <a:r>
-              <a:t>        &lt;/collision&gt;</a:t>
-            </a:r>
-            <a:br/>
-            <a:r>
-              <a:t>        &lt;visual name="v"&gt;</a:t>
-            </a:r>
-            <a:br/>
-            <a:r>
-              <a:t>          &lt;geometry&gt;</a:t>
             </a:r>
           </a:p>
         </p:txBody>
@@ -8780,7 +8851,7 @@
         </p:nvSpPr>
         <p:spPr>
           <a:xfrm>
-            <a:off x="749808" y="6199632"/>
+            <a:off x="749808" y="6181344"/>
             <a:ext cx="10789920" cy="201168"/>
           </a:xfrm>
           <a:prstGeom prst="rect">
@@ -8806,7 +8877,7 @@
               </a:defRPr>
             </a:pPr>
             <a:r>
-              <a:t>파일 전체 6/10 · 이 슬라이드 다음에 같은 파일의 나머지 줄이 이어집니다.</a:t>
+              <a:t>파일 전체 6/11 · 이 슬라이드 다음에 같은 파일의 나머지 줄이 이어집니다.</a:t>
             </a:r>
           </a:p>
         </p:txBody>
@@ -8863,7 +8934,7 @@
               </a:defRPr>
             </a:pPr>
             <a:r>
-              <a:t>파일을 계속 작성하고 저장한다 (7/10)</a:t>
+              <a:t>파일을 계속 작성하고 저장한다 (7/11)</a:t>
             </a:r>
           </a:p>
         </p:txBody>
@@ -9038,7 +9109,7 @@
               </a:defRPr>
             </a:pPr>
             <a:r>
-              <a:t>현재 단계 9/13    |    현재 폴더 ~/agv_ws    |    현재 터미널</a:t>
+              <a:t>현재 단계 9/14    |    현재 폴더 ~/agv_ws    |    현재 터미널</a:t>
             </a:r>
           </a:p>
         </p:txBody>
@@ -9051,8 +9122,8 @@
         </p:nvSpPr>
         <p:spPr>
           <a:xfrm>
-            <a:off x="658368" y="1682496"/>
-            <a:ext cx="10972800" cy="347472"/>
+            <a:off x="658368" y="1627632"/>
+            <a:ext cx="10972800" cy="256032"/>
           </a:xfrm>
           <a:prstGeom prst="rect">
             <a:avLst/>
@@ -9069,7 +9140,7 @@
               <a:spcAft>
                 <a:spcPts val="0"/>
               </a:spcAft>
-              <a:defRPr sz="1700" b="1">
+              <a:defRPr sz="1500" b="1">
                 <a:solidFill>
                   <a:srgbClr val="122C4E"/>
                 </a:solidFill>
@@ -9090,8 +9161,8 @@
         </p:nvSpPr>
         <p:spPr>
           <a:xfrm>
-            <a:off x="658368" y="2103120"/>
-            <a:ext cx="10972800" cy="493776"/>
+            <a:off x="658368" y="1956816"/>
+            <a:ext cx="10972800" cy="603504"/>
           </a:xfrm>
           <a:prstGeom prst="rect">
             <a:avLst/>
@@ -9135,7 +9206,11 @@
               </a:defRPr>
             </a:pPr>
             <a:r>
-              <a:t>파일 생성/열기: mkdir -p ~/agv_ws/src/agv_gazebo/worlds    &amp;&amp;    nano ~/agv_ws/src/agv_gazebo/worlds/warehouse.sdf</a:t>
+              <a:t>파일 생성: mkdir -p ~/agv_ws/src/agv_gazebo/worlds</a:t>
+            </a:r>
+            <a:br/>
+            <a:r>
+              <a:t>파일 열기: nano ~/agv_ws/src/agv_gazebo/worlds/warehouse.sdf</a:t>
             </a:r>
           </a:p>
         </p:txBody>
@@ -9148,8 +9223,8 @@
         </p:nvSpPr>
         <p:spPr>
           <a:xfrm>
-            <a:off x="658368" y="2761488"/>
-            <a:ext cx="10972800" cy="3383280"/>
+            <a:off x="658368" y="2706624"/>
+            <a:ext cx="10972800" cy="3364992"/>
           </a:xfrm>
           <a:prstGeom prst="rect">
             <a:avLst/>
@@ -9193,6 +9268,26 @@
               </a:defRPr>
             </a:pPr>
             <a:r>
+              <a:t>      &lt;static&gt;true&lt;/static&gt;</a:t>
+            </a:r>
+            <a:br/>
+            <a:r>
+              <a:t>      &lt;pose&gt;1.5 0 0.4 0 0 0&lt;/pose&gt;</a:t>
+            </a:r>
+            <a:br/>
+            <a:r>
+              <a:t>      &lt;link name="link"&gt;</a:t>
+            </a:r>
+            <a:br/>
+            <a:r>
+              <a:t>        &lt;collision name="c"&gt;</a:t>
+            </a:r>
+            <a:br/>
+            <a:r>
+              <a:t>          &lt;geometry&gt;</a:t>
+            </a:r>
+            <a:br/>
+            <a:r>
               <a:t>            &lt;box&gt;</a:t>
             </a:r>
             <a:br/>
@@ -9209,43 +9304,15 @@
             </a:r>
             <a:br/>
             <a:r>
-              <a:t>          &lt;material&gt;</a:t>
+              <a:t>        &lt;/collision&gt;</a:t>
             </a:r>
             <a:br/>
             <a:r>
-              <a:t>            &lt;diffuse&gt;0.9 0.7 0.1 1&lt;/diffuse&gt;</a:t>
+              <a:t>        &lt;visual name="v"&gt;</a:t>
             </a:r>
             <a:br/>
             <a:r>
-              <a:t>          &lt;/material&gt;</a:t>
-            </a:r>
-            <a:br/>
-            <a:r>
-              <a:t>        &lt;/visual&gt;</a:t>
-            </a:r>
-            <a:br/>
-            <a:r>
-              <a:t>      &lt;/link&gt;</a:t>
-            </a:r>
-            <a:br/>
-            <a:r>
-              <a:t>    &lt;/model&gt;</a:t>
-            </a:r>
-            <a:br/>
-            <a:r>
-              <a:t>    </a:t>
-            </a:r>
-            <a:br/>
-            <a:r>
-              <a:t>  </a:t>
-            </a:r>
-            <a:br/>
-            <a:r>
-              <a:t>    &lt;model name="target"&gt;</a:t>
-            </a:r>
-            <a:br/>
-            <a:r>
-              <a:t>      &lt;static&gt;true&lt;/static&gt;</a:t>
+              <a:t>          &lt;geometry&gt;</a:t>
             </a:r>
           </a:p>
         </p:txBody>
@@ -9258,7 +9325,7 @@
         </p:nvSpPr>
         <p:spPr>
           <a:xfrm>
-            <a:off x="749808" y="6199632"/>
+            <a:off x="749808" y="6181344"/>
             <a:ext cx="10789920" cy="201168"/>
           </a:xfrm>
           <a:prstGeom prst="rect">
@@ -9284,7 +9351,7 @@
               </a:defRPr>
             </a:pPr>
             <a:r>
-              <a:t>파일 전체 7/10 · 이 슬라이드 다음에 같은 파일의 나머지 줄이 이어집니다.</a:t>
+              <a:t>파일 전체 7/11 · 이 슬라이드 다음에 같은 파일의 나머지 줄이 이어집니다.</a:t>
             </a:r>
           </a:p>
         </p:txBody>
@@ -9341,7 +9408,7 @@
               </a:defRPr>
             </a:pPr>
             <a:r>
-              <a:t>파일을 계속 작성하고 저장한다 (8/10)</a:t>
+              <a:t>파일을 계속 작성하고 저장한다 (8/11)</a:t>
             </a:r>
           </a:p>
         </p:txBody>
@@ -9516,7 +9583,7 @@
               </a:defRPr>
             </a:pPr>
             <a:r>
-              <a:t>현재 단계 10/13    |    현재 폴더 ~/agv_ws    |    현재 터미널</a:t>
+              <a:t>현재 단계 10/14    |    현재 폴더 ~/agv_ws    |    현재 터미널</a:t>
             </a:r>
           </a:p>
         </p:txBody>
@@ -9529,8 +9596,8 @@
         </p:nvSpPr>
         <p:spPr>
           <a:xfrm>
-            <a:off x="658368" y="1682496"/>
-            <a:ext cx="10972800" cy="347472"/>
+            <a:off x="658368" y="1627632"/>
+            <a:ext cx="10972800" cy="256032"/>
           </a:xfrm>
           <a:prstGeom prst="rect">
             <a:avLst/>
@@ -9547,7 +9614,7 @@
               <a:spcAft>
                 <a:spcPts val="0"/>
               </a:spcAft>
-              <a:defRPr sz="1700" b="1">
+              <a:defRPr sz="1500" b="1">
                 <a:solidFill>
                   <a:srgbClr val="122C4E"/>
                 </a:solidFill>
@@ -9568,8 +9635,8 @@
         </p:nvSpPr>
         <p:spPr>
           <a:xfrm>
-            <a:off x="658368" y="2103120"/>
-            <a:ext cx="10972800" cy="493776"/>
+            <a:off x="658368" y="1956816"/>
+            <a:ext cx="10972800" cy="603504"/>
           </a:xfrm>
           <a:prstGeom prst="rect">
             <a:avLst/>
@@ -9613,7 +9680,11 @@
               </a:defRPr>
             </a:pPr>
             <a:r>
-              <a:t>파일 생성/열기: mkdir -p ~/agv_ws/src/agv_gazebo/worlds    &amp;&amp;    nano ~/agv_ws/src/agv_gazebo/worlds/warehouse.sdf</a:t>
+              <a:t>파일 생성: mkdir -p ~/agv_ws/src/agv_gazebo/worlds</a:t>
+            </a:r>
+            <a:br/>
+            <a:r>
+              <a:t>파일 열기: nano ~/agv_ws/src/agv_gazebo/worlds/warehouse.sdf</a:t>
             </a:r>
           </a:p>
         </p:txBody>
@@ -9626,8 +9697,8 @@
         </p:nvSpPr>
         <p:spPr>
           <a:xfrm>
-            <a:off x="658368" y="2761488"/>
-            <a:ext cx="10972800" cy="3383280"/>
+            <a:off x="658368" y="2706624"/>
+            <a:ext cx="10972800" cy="3364992"/>
           </a:xfrm>
           <a:prstGeom prst="rect">
             <a:avLst/>
@@ -9671,59 +9742,51 @@
               </a:defRPr>
             </a:pPr>
             <a:r>
-              <a:t>      &lt;pose&gt;3 1 0.5 0 0 0&lt;/pose&gt;</a:t>
+              <a:t>            &lt;box&gt;</a:t>
             </a:r>
             <a:br/>
             <a:r>
-              <a:t>      &lt;link name="link"&gt;</a:t>
+              <a:t>              &lt;size&gt;0.5 0.5 0.8&lt;/size&gt;</a:t>
             </a:r>
             <a:br/>
             <a:r>
-              <a:t>        &lt;collision name="c"&gt;</a:t>
+              <a:t>            &lt;/box&gt;</a:t>
             </a:r>
             <a:br/>
             <a:r>
-              <a:t>          &lt;geometry&gt;</a:t>
+              <a:t>          &lt;/geometry&gt;</a:t>
             </a:r>
             <a:br/>
             <a:r>
-              <a:t>            &lt;box&gt;</a:t>
+              <a:t>          &lt;material&gt;</a:t>
             </a:r>
             <a:br/>
             <a:r>
-              <a:t>              &lt;size&gt;0.25 0.25 1&lt;/size&gt;</a:t>
+              <a:t>            &lt;diffuse&gt;0.9 0.7 0.1 1&lt;/diffuse&gt;</a:t>
             </a:r>
             <a:br/>
             <a:r>
-              <a:t>            &lt;/box&gt;</a:t>
+              <a:t>          &lt;/material&gt;</a:t>
             </a:r>
             <a:br/>
             <a:r>
-              <a:t>          &lt;/geometry&gt;</a:t>
+              <a:t>        &lt;/visual&gt;</a:t>
             </a:r>
             <a:br/>
             <a:r>
-              <a:t>        &lt;/collision&gt;</a:t>
+              <a:t>      &lt;/link&gt;</a:t>
             </a:r>
             <a:br/>
             <a:r>
-              <a:t>        &lt;visual name="v"&gt;</a:t>
+              <a:t>    &lt;/model&gt;</a:t>
             </a:r>
             <a:br/>
             <a:r>
-              <a:t>          &lt;geometry&gt;</a:t>
+              <a:t>    </a:t>
             </a:r>
             <a:br/>
             <a:r>
-              <a:t>            &lt;box&gt;</a:t>
-            </a:r>
-            <a:br/>
-            <a:r>
-              <a:t>              &lt;size&gt;0.25 0.25 1&lt;/size&gt;</a:t>
-            </a:r>
-            <a:br/>
-            <a:r>
-              <a:t>            &lt;/box&gt;</a:t>
+              <a:t>  </a:t>
             </a:r>
           </a:p>
         </p:txBody>
@@ -9736,7 +9799,7 @@
         </p:nvSpPr>
         <p:spPr>
           <a:xfrm>
-            <a:off x="749808" y="6199632"/>
+            <a:off x="749808" y="6181344"/>
             <a:ext cx="10789920" cy="201168"/>
           </a:xfrm>
           <a:prstGeom prst="rect">
@@ -9762,7 +9825,7 @@
               </a:defRPr>
             </a:pPr>
             <a:r>
-              <a:t>파일 전체 8/10 · 이 슬라이드 다음에 같은 파일의 나머지 줄이 이어집니다.</a:t>
+              <a:t>파일 전체 8/11 · 이 슬라이드 다음에 같은 파일의 나머지 줄이 이어집니다.</a:t>
             </a:r>
           </a:p>
         </p:txBody>
@@ -9819,7 +9882,7 @@
               </a:defRPr>
             </a:pPr>
             <a:r>
-              <a:t>파일을 계속 작성하고 저장한다 (9/10)</a:t>
+              <a:t>파일을 계속 작성하고 저장한다 (9/11)</a:t>
             </a:r>
           </a:p>
         </p:txBody>
@@ -9994,7 +10057,7 @@
               </a:defRPr>
             </a:pPr>
             <a:r>
-              <a:t>현재 단계 11/13    |    현재 폴더 ~/agv_ws    |    현재 터미널</a:t>
+              <a:t>현재 단계 11/14    |    현재 폴더 ~/agv_ws    |    현재 터미널</a:t>
             </a:r>
           </a:p>
         </p:txBody>
@@ -10007,8 +10070,8 @@
         </p:nvSpPr>
         <p:spPr>
           <a:xfrm>
-            <a:off x="658368" y="1682496"/>
-            <a:ext cx="10972800" cy="347472"/>
+            <a:off x="658368" y="1627632"/>
+            <a:ext cx="10972800" cy="256032"/>
           </a:xfrm>
           <a:prstGeom prst="rect">
             <a:avLst/>
@@ -10025,7 +10088,7 @@
               <a:spcAft>
                 <a:spcPts val="0"/>
               </a:spcAft>
-              <a:defRPr sz="1700" b="1">
+              <a:defRPr sz="1500" b="1">
                 <a:solidFill>
                   <a:srgbClr val="122C4E"/>
                 </a:solidFill>
@@ -10046,8 +10109,8 @@
         </p:nvSpPr>
         <p:spPr>
           <a:xfrm>
-            <a:off x="658368" y="2103120"/>
-            <a:ext cx="10972800" cy="493776"/>
+            <a:off x="658368" y="1956816"/>
+            <a:ext cx="10972800" cy="603504"/>
           </a:xfrm>
           <a:prstGeom prst="rect">
             <a:avLst/>
@@ -10091,7 +10154,11 @@
               </a:defRPr>
             </a:pPr>
             <a:r>
-              <a:t>파일 생성/열기: mkdir -p ~/agv_ws/src/agv_gazebo/worlds    &amp;&amp;    nano ~/agv_ws/src/agv_gazebo/worlds/warehouse.sdf</a:t>
+              <a:t>파일 생성: mkdir -p ~/agv_ws/src/agv_gazebo/worlds</a:t>
+            </a:r>
+            <a:br/>
+            <a:r>
+              <a:t>파일 열기: nano ~/agv_ws/src/agv_gazebo/worlds/warehouse.sdf</a:t>
             </a:r>
           </a:p>
         </p:txBody>
@@ -10104,8 +10171,8 @@
         </p:nvSpPr>
         <p:spPr>
           <a:xfrm>
-            <a:off x="658368" y="2761488"/>
-            <a:ext cx="10972800" cy="3383280"/>
+            <a:off x="658368" y="2706624"/>
+            <a:ext cx="10972800" cy="3364992"/>
           </a:xfrm>
           <a:prstGeom prst="rect">
             <a:avLst/>
@@ -10149,59 +10216,51 @@
               </a:defRPr>
             </a:pPr>
             <a:r>
+              <a:t>    &lt;model name="target"&gt;</a:t>
+            </a:r>
+            <a:br/>
+            <a:r>
+              <a:t>      &lt;static&gt;true&lt;/static&gt;</a:t>
+            </a:r>
+            <a:br/>
+            <a:r>
+              <a:t>      &lt;pose&gt;3 1 0.5 0 0 0&lt;/pose&gt;</a:t>
+            </a:r>
+            <a:br/>
+            <a:r>
+              <a:t>      &lt;link name="link"&gt;</a:t>
+            </a:r>
+            <a:br/>
+            <a:r>
+              <a:t>        &lt;collision name="c"&gt;</a:t>
+            </a:r>
+            <a:br/>
+            <a:r>
+              <a:t>          &lt;geometry&gt;</a:t>
+            </a:r>
+            <a:br/>
+            <a:r>
+              <a:t>            &lt;box&gt;</a:t>
+            </a:r>
+            <a:br/>
+            <a:r>
+              <a:t>              &lt;size&gt;0.25 0.25 1&lt;/size&gt;</a:t>
+            </a:r>
+            <a:br/>
+            <a:r>
+              <a:t>            &lt;/box&gt;</a:t>
+            </a:r>
+            <a:br/>
+            <a:r>
               <a:t>          &lt;/geometry&gt;</a:t>
             </a:r>
             <a:br/>
             <a:r>
-              <a:t>          &lt;material&gt;</a:t>
+              <a:t>        &lt;/collision&gt;</a:t>
             </a:r>
             <a:br/>
             <a:r>
-              <a:t>            &lt;diffuse&gt;0.9 0.05 0.05 1&lt;/diffuse&gt;</a:t>
-            </a:r>
-            <a:br/>
-            <a:r>
-              <a:t>          &lt;/material&gt;</a:t>
-            </a:r>
-            <a:br/>
-            <a:r>
-              <a:t>        &lt;/visual&gt;</a:t>
-            </a:r>
-            <a:br/>
-            <a:r>
-              <a:t>      &lt;/link&gt;</a:t>
-            </a:r>
-            <a:br/>
-            <a:r>
-              <a:t>    &lt;/model&gt;</a:t>
-            </a:r>
-            <a:br/>
-            <a:r>
-              <a:t>    </a:t>
-            </a:r>
-            <a:br/>
-            <a:r>
-              <a:t>  </a:t>
-            </a:r>
-            <a:br/>
-            <a:r>
-              <a:t>    &lt;include&gt;</a:t>
-            </a:r>
-            <a:br/>
-            <a:r>
-              <a:t>      &lt;uri&gt;model://agv&lt;/uri&gt;</a:t>
-            </a:r>
-            <a:br/>
-            <a:r>
-              <a:t>      &lt;name&gt;agv&lt;/name&gt;</a:t>
-            </a:r>
-            <a:br/>
-            <a:r>
-              <a:t>      &lt;pose&gt;0 0 0.08 0 0 0&lt;/pose&gt;</a:t>
-            </a:r>
-            <a:br/>
-            <a:r>
-              <a:t>    &lt;/include&gt;</a:t>
+              <a:t>        &lt;visual name="v"&gt;</a:t>
             </a:r>
           </a:p>
         </p:txBody>
@@ -10214,7 +10273,7 @@
         </p:nvSpPr>
         <p:spPr>
           <a:xfrm>
-            <a:off x="749808" y="6199632"/>
+            <a:off x="749808" y="6181344"/>
             <a:ext cx="10789920" cy="201168"/>
           </a:xfrm>
           <a:prstGeom prst="rect">
@@ -10240,7 +10299,7 @@
               </a:defRPr>
             </a:pPr>
             <a:r>
-              <a:t>파일 전체 9/10 · 이 슬라이드 다음에 같은 파일의 나머지 줄이 이어집니다.</a:t>
+              <a:t>파일 전체 9/11 · 이 슬라이드 다음에 같은 파일의 나머지 줄이 이어집니다.</a:t>
             </a:r>
           </a:p>
         </p:txBody>
@@ -10297,7 +10356,7 @@
               </a:defRPr>
             </a:pPr>
             <a:r>
-              <a:t>파일을 계속 작성하고 저장한다 (10/10)</a:t>
+              <a:t>파일을 계속 작성하고 저장한다 (10/11)</a:t>
             </a:r>
           </a:p>
         </p:txBody>
@@ -10472,7 +10531,7 @@
               </a:defRPr>
             </a:pPr>
             <a:r>
-              <a:t>현재 단계 12/13    |    현재 폴더 ~/agv_ws    |    현재 터미널</a:t>
+              <a:t>현재 단계 12/14    |    현재 폴더 ~/agv_ws    |    현재 터미널</a:t>
             </a:r>
           </a:p>
         </p:txBody>
@@ -10485,8 +10544,8 @@
         </p:nvSpPr>
         <p:spPr>
           <a:xfrm>
-            <a:off x="658368" y="1682496"/>
-            <a:ext cx="10972800" cy="347472"/>
+            <a:off x="658368" y="1627632"/>
+            <a:ext cx="10972800" cy="256032"/>
           </a:xfrm>
           <a:prstGeom prst="rect">
             <a:avLst/>
@@ -10503,7 +10562,7 @@
               <a:spcAft>
                 <a:spcPts val="0"/>
               </a:spcAft>
-              <a:defRPr sz="1700" b="1">
+              <a:defRPr sz="1500" b="1">
                 <a:solidFill>
                   <a:srgbClr val="122C4E"/>
                 </a:solidFill>
@@ -10524,8 +10583,8 @@
         </p:nvSpPr>
         <p:spPr>
           <a:xfrm>
-            <a:off x="658368" y="2103120"/>
-            <a:ext cx="10972800" cy="493776"/>
+            <a:off x="658368" y="1956816"/>
+            <a:ext cx="10972800" cy="603504"/>
           </a:xfrm>
           <a:prstGeom prst="rect">
             <a:avLst/>
@@ -10569,7 +10628,11 @@
               </a:defRPr>
             </a:pPr>
             <a:r>
-              <a:t>파일 생성/열기: mkdir -p ~/agv_ws/src/agv_gazebo/worlds    &amp;&amp;    nano ~/agv_ws/src/agv_gazebo/worlds/warehouse.sdf</a:t>
+              <a:t>파일 생성: mkdir -p ~/agv_ws/src/agv_gazebo/worlds</a:t>
+            </a:r>
+            <a:br/>
+            <a:r>
+              <a:t>파일 열기: nano ~/agv_ws/src/agv_gazebo/worlds/warehouse.sdf</a:t>
             </a:r>
           </a:p>
         </p:txBody>
@@ -10582,8 +10645,8 @@
         </p:nvSpPr>
         <p:spPr>
           <a:xfrm>
-            <a:off x="658368" y="2761488"/>
-            <a:ext cx="10972800" cy="3383280"/>
+            <a:off x="658368" y="2706624"/>
+            <a:ext cx="10972800" cy="3364992"/>
           </a:xfrm>
           <a:prstGeom prst="rect">
             <a:avLst/>
@@ -10627,16 +10690,51 @@
               </a:defRPr>
             </a:pPr>
             <a:r>
+              <a:t>          &lt;geometry&gt;</a:t>
+            </a:r>
+            <a:br/>
+            <a:r>
+              <a:t>            &lt;box&gt;</a:t>
+            </a:r>
+            <a:br/>
+            <a:r>
+              <a:t>              &lt;size&gt;0.25 0.25 1&lt;/size&gt;</a:t>
+            </a:r>
+            <a:br/>
+            <a:r>
+              <a:t>            &lt;/box&gt;</a:t>
+            </a:r>
+            <a:br/>
+            <a:r>
+              <a:t>          &lt;/geometry&gt;</a:t>
+            </a:r>
+            <a:br/>
+            <a:r>
+              <a:t>          &lt;material&gt;</a:t>
+            </a:r>
+            <a:br/>
+            <a:r>
+              <a:t>            &lt;diffuse&gt;0.9 0.05 0.05 1&lt;/diffuse&gt;</a:t>
+            </a:r>
+            <a:br/>
+            <a:r>
+              <a:t>          &lt;/material&gt;</a:t>
+            </a:r>
+            <a:br/>
+            <a:r>
+              <a:t>        &lt;/visual&gt;</a:t>
+            </a:r>
+            <a:br/>
+            <a:r>
+              <a:t>      &lt;/link&gt;</a:t>
+            </a:r>
+            <a:br/>
+            <a:r>
+              <a:t>    &lt;/model&gt;</a:t>
+            </a:r>
+            <a:br/>
+            <a:r>
               <a:t>    </a:t>
-            </a:r>
-            <a:br/>
-            <a:br/>
-            <a:r>
-              <a:t>  &lt;/world&gt;</a:t>
-            </a:r>
-            <a:br/>
-            <a:r>
-              <a:t>&lt;/sdf&gt;</a:t>
             </a:r>
           </a:p>
         </p:txBody>
@@ -10649,7 +10747,7 @@
         </p:nvSpPr>
         <p:spPr>
           <a:xfrm>
-            <a:off x="749808" y="6199632"/>
+            <a:off x="749808" y="6181344"/>
             <a:ext cx="10789920" cy="201168"/>
           </a:xfrm>
           <a:prstGeom prst="rect">
@@ -10675,7 +10773,7 @@
               </a:defRPr>
             </a:pPr>
             <a:r>
-              <a:t>파일 전체 10/10 · 이 슬라이드 다음에 같은 파일의 나머지 줄이 이어집니다.</a:t>
+              <a:t>파일 전체 10/11 · 이 슬라이드 다음에 같은 파일의 나머지 줄이 이어집니다.</a:t>
             </a:r>
           </a:p>
         </p:txBody>
@@ -10732,7 +10830,7 @@
               </a:defRPr>
             </a:pPr>
             <a:r>
-              <a:t>파일을 새로 만들고 저장한다 (1/1)</a:t>
+              <a:t>파일을 계속 작성하고 저장한다 (11/11)</a:t>
             </a:r>
           </a:p>
         </p:txBody>
@@ -10771,7 +10869,7 @@
               </a:defRPr>
             </a:pPr>
             <a:r>
-              <a:t>~/agv_ws/src/agv_gazebo/models/agv/model.config</a:t>
+              <a:t>~/agv_ws/src/agv_gazebo/worlds/warehouse.sdf</a:t>
             </a:r>
           </a:p>
         </p:txBody>
@@ -10920,8 +11018,8 @@
         </p:nvSpPr>
         <p:spPr>
           <a:xfrm>
-            <a:off x="658368" y="1682496"/>
-            <a:ext cx="10972800" cy="347472"/>
+            <a:off x="658368" y="1627632"/>
+            <a:ext cx="10972800" cy="256032"/>
           </a:xfrm>
           <a:prstGeom prst="rect">
             <a:avLst/>
@@ -10938,7 +11036,7 @@
               <a:spcAft>
                 <a:spcPts val="0"/>
               </a:spcAft>
-              <a:defRPr sz="1700" b="1">
+              <a:defRPr sz="1500" b="1">
                 <a:solidFill>
                   <a:srgbClr val="122C4E"/>
                 </a:solidFill>
@@ -10959,8 +11057,8 @@
         </p:nvSpPr>
         <p:spPr>
           <a:xfrm>
-            <a:off x="658368" y="2103120"/>
-            <a:ext cx="10972800" cy="493776"/>
+            <a:off x="658368" y="1956816"/>
+            <a:ext cx="10972800" cy="603504"/>
           </a:xfrm>
           <a:prstGeom prst="rect">
             <a:avLst/>
@@ -11004,7 +11102,11 @@
               </a:defRPr>
             </a:pPr>
             <a:r>
-              <a:t>파일 생성/열기: mkdir -p ~/agv_ws/src/agv_gazebo/models/agv    &amp;&amp;    nano ~/agv_ws/src/agv_gazebo/models/agv/model.config</a:t>
+              <a:t>파일 생성: mkdir -p ~/agv_ws/src/agv_gazebo/worlds</a:t>
+            </a:r>
+            <a:br/>
+            <a:r>
+              <a:t>파일 열기: nano ~/agv_ws/src/agv_gazebo/worlds/warehouse.sdf</a:t>
             </a:r>
           </a:p>
         </p:txBody>
@@ -11017,8 +11119,8 @@
         </p:nvSpPr>
         <p:spPr>
           <a:xfrm>
-            <a:off x="658368" y="2761488"/>
-            <a:ext cx="10972800" cy="3383280"/>
+            <a:off x="658368" y="2706624"/>
+            <a:ext cx="10972800" cy="3364992"/>
           </a:xfrm>
           <a:prstGeom prst="rect">
             <a:avLst/>
@@ -11062,43 +11164,40 @@
               </a:defRPr>
             </a:pPr>
             <a:r>
-              <a:t>&lt;?xml version="1.0" ?&gt;</a:t>
+              <a:t>  </a:t>
             </a:r>
             <a:br/>
             <a:r>
-              <a:t>&lt;model&gt;</a:t>
+              <a:t>    &lt;include&gt;</a:t>
             </a:r>
             <a:br/>
             <a:r>
-              <a:t>  &lt;name&gt;agv&lt;/name&gt;</a:t>
+              <a:t>      &lt;uri&gt;model://agv&lt;/uri&gt;</a:t>
             </a:r>
             <a:br/>
             <a:r>
-              <a:t>  &lt;version&gt;1.0&lt;/version&gt;</a:t>
+              <a:t>      &lt;name&gt;agv&lt;/name&gt;</a:t>
             </a:r>
             <a:br/>
             <a:r>
-              <a:t>  &lt;sdf version="1.10"&gt;model.sdf&lt;/sdf&gt;</a:t>
+              <a:t>      &lt;pose&gt;0 0 0.08 0 0 0&lt;/pose&gt;</a:t>
             </a:r>
             <a:br/>
             <a:r>
-              <a:t>  &lt;author&gt;</a:t>
+              <a:t>    &lt;/include&gt;</a:t>
             </a:r>
             <a:br/>
             <a:r>
-              <a:t>    &lt;name&gt;AGV course&lt;/name&gt;</a:t>
+              <a:t>    </a:t>
             </a:r>
             <a:br/>
-            <a:r>
-              <a:t>  &lt;/author&gt;</a:t>
-            </a:r>
             <a:br/>
             <a:r>
-              <a:t>  &lt;description&gt;Two-wheel educational AGV.&lt;/description&gt;</a:t>
+              <a:t>  &lt;/world&gt;</a:t>
             </a:r>
             <a:br/>
             <a:r>
-              <a:t>&lt;/model&gt;</a:t>
+              <a:t>&lt;/sdf&gt;</a:t>
             </a:r>
           </a:p>
         </p:txBody>
@@ -11111,7 +11210,7 @@
         </p:nvSpPr>
         <p:spPr>
           <a:xfrm>
-            <a:off x="749808" y="6199632"/>
+            <a:off x="749808" y="6181344"/>
             <a:ext cx="10789920" cy="201168"/>
           </a:xfrm>
           <a:prstGeom prst="rect">
@@ -11137,7 +11236,7 @@
               </a:defRPr>
             </a:pPr>
             <a:r>
-              <a:t>파일 전체 1/1 · 이 슬라이드 다음에 같은 파일의 나머지 줄이 이어집니다.</a:t>
+              <a:t>파일 전체 11/11 · 이 슬라이드 다음에 같은 파일의 나머지 줄이 이어집니다.</a:t>
             </a:r>
           </a:p>
         </p:txBody>
@@ -11655,7 +11754,7 @@
               </a:defRPr>
             </a:pPr>
             <a:r>
-              <a:t>파일을 새로 만들고 저장한다 (1/2)</a:t>
+              <a:t>파일을 새로 만들고 저장한다 (1/1)</a:t>
             </a:r>
           </a:p>
         </p:txBody>
@@ -11694,7 +11793,7 @@
               </a:defRPr>
             </a:pPr>
             <a:r>
-              <a:t>~/agv_ws/src/agv_gazebo/launch/gazebo.launch.py</a:t>
+              <a:t>~/agv_ws/src/agv_gazebo/models/agv/model.config</a:t>
             </a:r>
           </a:p>
         </p:txBody>
@@ -11830,7 +11929,7 @@
               </a:defRPr>
             </a:pPr>
             <a:r>
-              <a:t>현재 단계 14/16    |    현재 폴더 ~/agv_ws    |    현재 터미널</a:t>
+              <a:t>현재 단계 14/15    |    현재 폴더 ~/agv_ws    |    현재 터미널</a:t>
             </a:r>
           </a:p>
         </p:txBody>
@@ -11843,8 +11942,8 @@
         </p:nvSpPr>
         <p:spPr>
           <a:xfrm>
-            <a:off x="658368" y="1682496"/>
-            <a:ext cx="10972800" cy="347472"/>
+            <a:off x="658368" y="1627632"/>
+            <a:ext cx="10972800" cy="256032"/>
           </a:xfrm>
           <a:prstGeom prst="rect">
             <a:avLst/>
@@ -11861,7 +11960,7 @@
               <a:spcAft>
                 <a:spcPts val="0"/>
               </a:spcAft>
-              <a:defRPr sz="1700" b="1">
+              <a:defRPr sz="1500" b="1">
                 <a:solidFill>
                   <a:srgbClr val="122C4E"/>
                 </a:solidFill>
@@ -11882,8 +11981,8 @@
         </p:nvSpPr>
         <p:spPr>
           <a:xfrm>
-            <a:off x="658368" y="2103120"/>
-            <a:ext cx="10972800" cy="493776"/>
+            <a:off x="658368" y="1956816"/>
+            <a:ext cx="10972800" cy="603504"/>
           </a:xfrm>
           <a:prstGeom prst="rect">
             <a:avLst/>
@@ -11927,7 +12026,11 @@
               </a:defRPr>
             </a:pPr>
             <a:r>
-              <a:t>파일 생성/열기: mkdir -p ~/agv_ws/src/agv_gazebo/launch    &amp;&amp;    nano ~/agv_ws/src/agv_gazebo/launch/gazebo.launch.py</a:t>
+              <a:t>파일 생성: mkdir -p ~/agv_ws/src/agv_gazebo/models/agv</a:t>
+            </a:r>
+            <a:br/>
+            <a:r>
+              <a:t>파일 열기: nano ~/agv_ws/src/agv_gazebo/models/agv/model.config</a:t>
             </a:r>
           </a:p>
         </p:txBody>
@@ -11940,8 +12043,8 @@
         </p:nvSpPr>
         <p:spPr>
           <a:xfrm>
-            <a:off x="658368" y="2761488"/>
-            <a:ext cx="10972800" cy="3383280"/>
+            <a:off x="658368" y="2706624"/>
+            <a:ext cx="10972800" cy="3364992"/>
           </a:xfrm>
           <a:prstGeom prst="rect">
             <a:avLst/>
@@ -11985,56 +12088,43 @@
               </a:defRPr>
             </a:pPr>
             <a:r>
-              <a:t>import os</a:t>
+              <a:t>&lt;?xml version="1.0" ?&gt;</a:t>
             </a:r>
             <a:br/>
             <a:r>
-              <a:t>from ament_index_python.packages import get_package_share_directory</a:t>
+              <a:t>&lt;model&gt;</a:t>
             </a:r>
             <a:br/>
             <a:r>
-              <a:t>from launch import LaunchDescription</a:t>
+              <a:t>  &lt;name&gt;agv&lt;/name&gt;</a:t>
             </a:r>
             <a:br/>
             <a:r>
-              <a:t>from launch.actions import IncludeLaunchDescription, SetEnvironmentVariable</a:t>
+              <a:t>  &lt;version&gt;1.0&lt;/version&gt;</a:t>
             </a:r>
             <a:br/>
             <a:r>
-              <a:t>from launch.launch_description_sources import PythonLaunchDescriptionSource</a:t>
+              <a:t>  &lt;sdf version="1.10"&gt;model.sdf&lt;/sdf&gt;</a:t>
             </a:r>
             <a:br/>
             <a:r>
-              <a:t>from launch_ros.actions import Node</a:t>
+              <a:t>  &lt;author&gt;</a:t>
             </a:r>
             <a:br/>
+            <a:r>
+              <a:t>    &lt;name&gt;AGV course&lt;/name&gt;</a:t>
+            </a:r>
             <a:br/>
             <a:r>
-              <a:t>def generate_launch_description():</a:t>
+              <a:t>  &lt;/author&gt;</a:t>
             </a:r>
             <a:br/>
             <a:r>
-              <a:t>    share = get_package_share_directory('agv_gazebo')</a:t>
+              <a:t>  &lt;description&gt;Two-wheel educational AGV.&lt;/description&gt;</a:t>
             </a:r>
             <a:br/>
             <a:r>
-              <a:t>    world = os.path.join(share, 'worlds', 'warehouse.sdf')</a:t>
-            </a:r>
-            <a:br/>
-            <a:r>
-              <a:t>    models = os.path.join(share, 'models')</a:t>
-            </a:r>
-            <a:br/>
-            <a:r>
-              <a:t>    previous = os.environ.get('GZ_SIM_RESOURCE_PATH', '')</a:t>
-            </a:r>
-            <a:br/>
-            <a:r>
-              <a:t>    gz_launch = os.path.join(get_package_share_directory('ros_gz_sim'), 'launch', 'gz_sim.launch.py')</a:t>
-            </a:r>
-            <a:br/>
-            <a:r>
-              <a:t>    return LaunchDescription([SetEnvironmentVariable('GZ_SIM_RESOURCE_PATH',</a:t>
+              <a:t>&lt;/model&gt;</a:t>
             </a:r>
           </a:p>
         </p:txBody>
@@ -12047,7 +12137,7 @@
         </p:nvSpPr>
         <p:spPr>
           <a:xfrm>
-            <a:off x="749808" y="6199632"/>
+            <a:off x="749808" y="6181344"/>
             <a:ext cx="10789920" cy="201168"/>
           </a:xfrm>
           <a:prstGeom prst="rect">
@@ -12073,7 +12163,7 @@
               </a:defRPr>
             </a:pPr>
             <a:r>
-              <a:t>파일 전체 1/2 · 이 슬라이드 다음에 같은 파일의 나머지 줄이 이어집니다.</a:t>
+              <a:t>파일 전체 1/1 · 이 슬라이드 다음에 같은 파일의 나머지 줄이 이어집니다.</a:t>
             </a:r>
           </a:p>
         </p:txBody>
@@ -12130,7 +12220,7 @@
               </a:defRPr>
             </a:pPr>
             <a:r>
-              <a:t>파일을 계속 작성하고 저장한다 (2/2)</a:t>
+              <a:t>파일을 새로 만들고 저장한다 (1/2)</a:t>
             </a:r>
           </a:p>
         </p:txBody>
@@ -12305,7 +12395,7 @@
               </a:defRPr>
             </a:pPr>
             <a:r>
-              <a:t>현재 단계 15/16    |    현재 폴더 ~/agv_ws    |    현재 터미널</a:t>
+              <a:t>현재 단계 15/17    |    현재 폴더 ~/agv_ws    |    현재 터미널</a:t>
             </a:r>
           </a:p>
         </p:txBody>
@@ -12318,8 +12408,8 @@
         </p:nvSpPr>
         <p:spPr>
           <a:xfrm>
-            <a:off x="658368" y="1682496"/>
-            <a:ext cx="10972800" cy="347472"/>
+            <a:off x="658368" y="1627632"/>
+            <a:ext cx="10972800" cy="256032"/>
           </a:xfrm>
           <a:prstGeom prst="rect">
             <a:avLst/>
@@ -12336,7 +12426,7 @@
               <a:spcAft>
                 <a:spcPts val="0"/>
               </a:spcAft>
-              <a:defRPr sz="1700" b="1">
+              <a:defRPr sz="1500" b="1">
                 <a:solidFill>
                   <a:srgbClr val="122C4E"/>
                 </a:solidFill>
@@ -12357,8 +12447,8 @@
         </p:nvSpPr>
         <p:spPr>
           <a:xfrm>
-            <a:off x="658368" y="2103120"/>
-            <a:ext cx="10972800" cy="493776"/>
+            <a:off x="658368" y="1956816"/>
+            <a:ext cx="10972800" cy="603504"/>
           </a:xfrm>
           <a:prstGeom prst="rect">
             <a:avLst/>
@@ -12402,7 +12492,11 @@
               </a:defRPr>
             </a:pPr>
             <a:r>
-              <a:t>파일 생성/열기: mkdir -p ~/agv_ws/src/agv_gazebo/launch    &amp;&amp;    nano ~/agv_ws/src/agv_gazebo/launch/gazebo.launch.py</a:t>
+              <a:t>파일 생성: mkdir -p ~/agv_ws/src/agv_gazebo/launch</a:t>
+            </a:r>
+            <a:br/>
+            <a:r>
+              <a:t>파일 열기: nano ~/agv_ws/src/agv_gazebo/launch/gazebo.launch.py</a:t>
             </a:r>
           </a:p>
         </p:txBody>
@@ -12415,8 +12509,8 @@
         </p:nvSpPr>
         <p:spPr>
           <a:xfrm>
-            <a:off x="658368" y="2761488"/>
-            <a:ext cx="10972800" cy="3383280"/>
+            <a:off x="658368" y="2706624"/>
+            <a:ext cx="10972800" cy="3364992"/>
           </a:xfrm>
           <a:prstGeom prst="rect">
             <a:avLst/>
@@ -12460,23 +12554,48 @@
               </a:defRPr>
             </a:pPr>
             <a:r>
-              <a:t>        models + (':' + previous if previous else '')),</a:t>
+              <a:t>import os</a:t>
             </a:r>
             <a:br/>
             <a:r>
-              <a:t>        IncludeLaunchDescription(PythonLaunchDescriptionSource(gz_launch),</a:t>
+              <a:t>from ament_index_python.packages import get_package_share_directory</a:t>
             </a:r>
             <a:br/>
             <a:r>
-              <a:t>        launch_arguments={'gz_args': '-r ' + world}.items()), Node(package='ros_gz_bridge',</a:t>
+              <a:t>from launch import LaunchDescription</a:t>
             </a:r>
             <a:br/>
             <a:r>
-              <a:t>         executable='parameter_bridge', parameters=[{'config_file': os.path.join(share,</a:t>
+              <a:t>from launch.actions import IncludeLaunchDescription, SetEnvironmentVariable</a:t>
             </a:r>
             <a:br/>
             <a:r>
-              <a:t>        'config', 'bridge.yaml')}], output='screen')])</a:t>
+              <a:t>from launch.launch_description_sources import PythonLaunchDescriptionSource</a:t>
+            </a:r>
+            <a:br/>
+            <a:r>
+              <a:t>from launch_ros.actions import Node</a:t>
+            </a:r>
+            <a:br/>
+            <a:br/>
+            <a:r>
+              <a:t>def generate_launch_description():</a:t>
+            </a:r>
+            <a:br/>
+            <a:r>
+              <a:t>    share = get_package_share_directory('agv_gazebo')</a:t>
+            </a:r>
+            <a:br/>
+            <a:r>
+              <a:t>    world = os.path.join(share, 'worlds', 'warehouse.sdf')</a:t>
+            </a:r>
+            <a:br/>
+            <a:r>
+              <a:t>    models = os.path.join(share, 'models')</a:t>
+            </a:r>
+            <a:br/>
+            <a:r>
+              <a:t>    previous = os.environ.get('GZ_SIM_RESOURCE_PATH', '')</a:t>
             </a:r>
           </a:p>
         </p:txBody>
@@ -12489,7 +12608,7 @@
         </p:nvSpPr>
         <p:spPr>
           <a:xfrm>
-            <a:off x="749808" y="6199632"/>
+            <a:off x="749808" y="6181344"/>
             <a:ext cx="10789920" cy="201168"/>
           </a:xfrm>
           <a:prstGeom prst="rect">
@@ -12515,7 +12634,7 @@
               </a:defRPr>
             </a:pPr>
             <a:r>
-              <a:t>파일 전체 2/2 · 이 슬라이드 다음에 같은 파일의 나머지 줄이 이어집니다.</a:t>
+              <a:t>파일 전체 1/2 · 이 슬라이드 다음에 같은 파일의 나머지 줄이 이어집니다.</a:t>
             </a:r>
           </a:p>
         </p:txBody>
@@ -12572,7 +12691,7 @@
               </a:defRPr>
             </a:pPr>
             <a:r>
-              <a:t>build → source → run 순서로 실행한다</a:t>
+              <a:t>파일을 계속 작성하고 저장한다 (2/2)</a:t>
             </a:r>
           </a:p>
         </p:txBody>
@@ -12611,7 +12730,7 @@
               </a:defRPr>
             </a:pPr>
             <a:r>
-              <a:t>새 파일 또는 수정 파일은 build와 source 뒤에만 실행 이름·설정에 반영됩니다.</a:t>
+              <a:t>~/agv_ws/src/agv_gazebo/launch/gazebo.launch.py</a:t>
             </a:r>
           </a:p>
         </p:txBody>
@@ -12747,23 +12866,124 @@
               </a:defRPr>
             </a:pPr>
             <a:r>
-              <a:t>현재 단계 실행    |    현재 폴더 ~/agv_ws    |    현재 터미널</a:t>
-            </a:r>
-          </a:p>
-        </p:txBody>
-      </p:sp>
-      <p:sp>
-        <p:nvSpPr>
-          <p:cNvPr id="7" name="Rounded Rectangle 6"/>
+              <a:t>현재 단계 16/17    |    현재 폴더 ~/agv_ws    |    현재 터미널</a:t>
+            </a:r>
+          </a:p>
+        </p:txBody>
+      </p:sp>
+      <p:sp>
+        <p:nvSpPr>
+          <p:cNvPr id="7" name="TextBox 6"/>
+          <p:cNvSpPr txBox="1"/>
+          <p:nvPr/>
+        </p:nvSpPr>
+        <p:spPr>
+          <a:xfrm>
+            <a:off x="658368" y="1627632"/>
+            <a:ext cx="10972800" cy="256032"/>
+          </a:xfrm>
+          <a:prstGeom prst="rect">
+            <a:avLst/>
+          </a:prstGeom>
+          <a:noFill/>
+        </p:spPr>
+        <p:txBody>
+          <a:bodyPr wrap="square" lIns="73152" rIns="73152" tIns="36576" bIns="36576">
+            <a:spAutoFit/>
+          </a:bodyPr>
+          <a:lstStyle/>
+          <a:p>
+            <a:pPr algn="l">
+              <a:spcAft>
+                <a:spcPts val="0"/>
+              </a:spcAft>
+              <a:defRPr sz="1500" b="1">
+                <a:solidFill>
+                  <a:srgbClr val="122C4E"/>
+                </a:solidFill>
+                <a:latin typeface="Noto Sans CJK KR"/>
+              </a:defRPr>
+            </a:pPr>
+            <a:r>
+              <a:t>이번 단계: 파일의 전체 내용을 중간 생략 없이 작성합니다. 아래 줄 범위를 끝까지 입력하세요.</a:t>
+            </a:r>
+          </a:p>
+        </p:txBody>
+      </p:sp>
+      <p:sp>
+        <p:nvSpPr>
+          <p:cNvPr id="8" name="Rectangle 7"/>
           <p:cNvSpPr/>
           <p:nvPr/>
         </p:nvSpPr>
         <p:spPr>
           <a:xfrm>
-            <a:off x="658368" y="1700784"/>
-            <a:ext cx="10972800" cy="3182112"/>
-          </a:xfrm>
-          <a:prstGeom prst="roundRect">
+            <a:off x="658368" y="1956816"/>
+            <a:ext cx="10972800" cy="603504"/>
+          </a:xfrm>
+          <a:prstGeom prst="rect">
+            <a:avLst/>
+          </a:prstGeom>
+          <a:solidFill>
+            <a:srgbClr val="F4F7FB"/>
+          </a:solidFill>
+          <a:ln>
+            <a:solidFill>
+              <a:srgbClr val="F4F7FB"/>
+            </a:solidFill>
+          </a:ln>
+        </p:spPr>
+        <p:style>
+          <a:lnRef idx="1">
+            <a:schemeClr val="accent1"/>
+          </a:lnRef>
+          <a:fillRef idx="3">
+            <a:schemeClr val="accent1"/>
+          </a:fillRef>
+          <a:effectRef idx="2">
+            <a:schemeClr val="accent1"/>
+          </a:effectRef>
+          <a:fontRef idx="minor">
+            <a:schemeClr val="lt1"/>
+          </a:fontRef>
+        </p:style>
+        <p:txBody>
+          <a:bodyPr rtlCol="0" anchor="ctr" wrap="square" lIns="73152" rIns="73152" tIns="36576" bIns="36576"/>
+          <a:lstStyle/>
+          <a:p>
+            <a:pPr algn="l">
+              <a:spcAft>
+                <a:spcPts val="0"/>
+              </a:spcAft>
+              <a:defRPr sz="1400" b="0">
+                <a:solidFill>
+                  <a:srgbClr val="122C4E"/>
+                </a:solidFill>
+                <a:latin typeface="DejaVu Sans Mono"/>
+              </a:defRPr>
+            </a:pPr>
+            <a:r>
+              <a:t>파일 생성: mkdir -p ~/agv_ws/src/agv_gazebo/launch</a:t>
+            </a:r>
+            <a:br/>
+            <a:r>
+              <a:t>파일 열기: nano ~/agv_ws/src/agv_gazebo/launch/gazebo.launch.py</a:t>
+            </a:r>
+          </a:p>
+        </p:txBody>
+      </p:sp>
+      <p:sp>
+        <p:nvSpPr>
+          <p:cNvPr id="9" name="Rectangle 8"/>
+          <p:cNvSpPr/>
+          <p:nvPr/>
+        </p:nvSpPr>
+        <p:spPr>
+          <a:xfrm>
+            <a:off x="658368" y="2706624"/>
+            <a:ext cx="10972800" cy="3364992"/>
+          </a:xfrm>
+          <a:prstGeom prst="rect">
             <a:avLst/>
           </a:prstGeom>
           <a:solidFill>
@@ -12790,14 +13010,14 @@
           </a:fontRef>
         </p:style>
         <p:txBody>
-          <a:bodyPr rtlCol="0" anchor="ctr" wrap="square" lIns="73152" rIns="73152" tIns="36576" bIns="36576"/>
+          <a:bodyPr rtlCol="0" anchor="ctr" wrap="square" lIns="164592" rIns="164592" tIns="109728" bIns="36576"/>
           <a:lstStyle/>
           <a:p>
             <a:pPr algn="l">
               <a:spcAft>
                 <a:spcPts val="0"/>
               </a:spcAft>
-              <a:defRPr sz="1600" b="0">
+              <a:defRPr sz="1400" b="0">
                 <a:solidFill>
                   <a:srgbClr val="FFFFFF"/>
                 </a:solidFill>
@@ -12805,25 +13025,45 @@
               </a:defRPr>
             </a:pPr>
             <a:r>
-              <a:t>cd ~/agv_ws &amp;&amp; source install/setup.bash</a:t>
+              <a:t>    gz_launch = os.path.join(get_package_share_directory('ros_gz_sim'), 'launch', 'gz_sim.launch.py')</a:t>
             </a:r>
             <a:br/>
             <a:r>
-              <a:t>ros2 launch agv_gazebo gazebo.launch.py</a:t>
-            </a:r>
-          </a:p>
-        </p:txBody>
-      </p:sp>
-      <p:sp>
-        <p:nvSpPr>
-          <p:cNvPr id="8" name="TextBox 7"/>
+              <a:t>    return LaunchDescription([SetEnvironmentVariable('GZ_SIM_RESOURCE_PATH',</a:t>
+            </a:r>
+            <a:br/>
+            <a:r>
+              <a:t>        models + (':' + previous if previous else '')),</a:t>
+            </a:r>
+            <a:br/>
+            <a:r>
+              <a:t>        IncludeLaunchDescription(PythonLaunchDescriptionSource(gz_launch),</a:t>
+            </a:r>
+            <a:br/>
+            <a:r>
+              <a:t>        launch_arguments={'gz_args': '-r ' + world}.items()), Node(package='ros_gz_bridge',</a:t>
+            </a:r>
+            <a:br/>
+            <a:r>
+              <a:t>         executable='parameter_bridge', parameters=[{'config_file': os.path.join(share,</a:t>
+            </a:r>
+            <a:br/>
+            <a:r>
+              <a:t>        'config', 'bridge.yaml')}], output='screen')])</a:t>
+            </a:r>
+          </a:p>
+        </p:txBody>
+      </p:sp>
+      <p:sp>
+        <p:nvSpPr>
+          <p:cNvPr id="10" name="TextBox 9"/>
           <p:cNvSpPr txBox="1"/>
           <p:nvPr/>
         </p:nvSpPr>
         <p:spPr>
           <a:xfrm>
-            <a:off x="786384" y="5239512"/>
-            <a:ext cx="1261872" cy="237744"/>
+            <a:off x="749808" y="6181344"/>
+            <a:ext cx="10789920" cy="201168"/>
           </a:xfrm>
           <a:prstGeom prst="rect">
             <a:avLst/>
@@ -12840,54 +13080,15 @@
               <a:spcAft>
                 <a:spcPts val="0"/>
               </a:spcAft>
-              <a:defRPr sz="1800" b="1">
-                <a:solidFill>
-                  <a:srgbClr val="2A8B5A"/>
-                </a:solidFill>
-                <a:latin typeface="Noto Sans CJK KR"/>
-              </a:defRPr>
-            </a:pPr>
-            <a:r>
-              <a:t>확인 기준</a:t>
-            </a:r>
-          </a:p>
-        </p:txBody>
-      </p:sp>
-      <p:sp>
-        <p:nvSpPr>
-          <p:cNvPr id="9" name="TextBox 8"/>
-          <p:cNvSpPr txBox="1"/>
-          <p:nvPr/>
-        </p:nvSpPr>
-        <p:spPr>
-          <a:xfrm>
-            <a:off x="786384" y="5532120"/>
-            <a:ext cx="10469880" cy="420624"/>
-          </a:xfrm>
-          <a:prstGeom prst="rect">
-            <a:avLst/>
-          </a:prstGeom>
-          <a:noFill/>
-        </p:spPr>
-        <p:txBody>
-          <a:bodyPr wrap="square" lIns="73152" rIns="73152" tIns="36576" bIns="36576">
-            <a:spAutoFit/>
-          </a:bodyPr>
-          <a:lstStyle/>
-          <a:p>
-            <a:pPr algn="l">
-              <a:spcAft>
-                <a:spcPts val="0"/>
-              </a:spcAft>
-              <a:defRPr sz="1800" b="0">
-                <a:solidFill>
-                  <a:srgbClr val="122C4E"/>
-                </a:solidFill>
-                <a:latin typeface="Noto Sans CJK KR"/>
-              </a:defRPr>
-            </a:pPr>
-            <a:r>
-              <a:t>ground·벽·박스가 있는 World에 AGV가 spawn되어 있는 Gazebo 화면을 확인한다.</a:t>
+              <a:defRPr sz="1000" b="0">
+                <a:solidFill>
+                  <a:srgbClr val="5C6672"/>
+                </a:solidFill>
+                <a:latin typeface="Noto Sans CJK KR"/>
+              </a:defRPr>
+            </a:pPr>
+            <a:r>
+              <a:t>파일 전체 2/2 · 이 슬라이드 다음에 같은 파일의 나머지 줄이 이어집니다.</a:t>
             </a:r>
           </a:p>
         </p:txBody>
@@ -12944,7 +13145,7 @@
               </a:defRPr>
             </a:pPr>
             <a:r>
-              <a:t>정상 결과: 실제 환경에서 확인한 출력</a:t>
+              <a:t>build → source → run 순서로 실행한다</a:t>
             </a:r>
           </a:p>
         </p:txBody>
@@ -12983,7 +13184,7 @@
               </a:defRPr>
             </a:pPr>
             <a:r>
-              <a:t>실제 ROS 2 환경의 파일·패키지·구성 검증 로그</a:t>
+              <a:t>새 파일 또는 수정 파일은 build와 source 뒤에만 실행 이름·설정에 반영됩니다.</a:t>
             </a:r>
           </a:p>
         </p:txBody>
@@ -13066,40 +13267,136 @@
           </a:p>
         </p:txBody>
       </p:sp>
-      <p:pic>
-        <p:nvPicPr>
-          <p:cNvPr id="6" name="Picture 5" descr="validation_terminal.png"/>
-          <p:cNvPicPr>
-            <a:picLocks noChangeAspect="1"/>
-          </p:cNvPicPr>
-          <p:nvPr/>
-        </p:nvPicPr>
-        <p:blipFill>
-          <a:blip r:embed="rId2"/>
-          <a:stretch>
-            <a:fillRect/>
-          </a:stretch>
-        </p:blipFill>
-        <p:spPr>
-          <a:xfrm>
-            <a:off x="790956" y="1884338"/>
-            <a:ext cx="10607040" cy="3738546"/>
-          </a:xfrm>
-          <a:prstGeom prst="rect">
-            <a:avLst/>
-          </a:prstGeom>
-        </p:spPr>
-      </p:pic>
-      <p:sp>
-        <p:nvSpPr>
-          <p:cNvPr id="7" name="TextBox 6"/>
+      <p:sp>
+        <p:nvSpPr>
+          <p:cNvPr id="6" name="Rectangle 5"/>
+          <p:cNvSpPr/>
+          <p:nvPr/>
+        </p:nvSpPr>
+        <p:spPr>
+          <a:xfrm>
+            <a:off x="566928" y="1188720"/>
+            <a:ext cx="11064240" cy="347472"/>
+          </a:xfrm>
+          <a:prstGeom prst="rect">
+            <a:avLst/>
+          </a:prstGeom>
+          <a:solidFill>
+            <a:srgbClr val="F4F7FB"/>
+          </a:solidFill>
+          <a:ln>
+            <a:solidFill>
+              <a:srgbClr val="F4F7FB"/>
+            </a:solidFill>
+          </a:ln>
+        </p:spPr>
+        <p:style>
+          <a:lnRef idx="1">
+            <a:schemeClr val="accent1"/>
+          </a:lnRef>
+          <a:fillRef idx="3">
+            <a:schemeClr val="accent1"/>
+          </a:fillRef>
+          <a:effectRef idx="2">
+            <a:schemeClr val="accent1"/>
+          </a:effectRef>
+          <a:fontRef idx="minor">
+            <a:schemeClr val="lt1"/>
+          </a:fontRef>
+        </p:style>
+        <p:txBody>
+          <a:bodyPr rtlCol="0" anchor="ctr" wrap="square" lIns="73152" rIns="73152" tIns="36576" bIns="36576"/>
+          <a:lstStyle/>
+          <a:p>
+            <a:pPr algn="l">
+              <a:spcAft>
+                <a:spcPts val="0"/>
+              </a:spcAft>
+              <a:defRPr sz="1300" b="1">
+                <a:solidFill>
+                  <a:srgbClr val="122C4E"/>
+                </a:solidFill>
+                <a:latin typeface="Noto Sans CJK KR"/>
+              </a:defRPr>
+            </a:pPr>
+            <a:r>
+              <a:t>현재 단계 실행    |    현재 폴더 ~/agv_ws    |    현재 터미널</a:t>
+            </a:r>
+          </a:p>
+        </p:txBody>
+      </p:sp>
+      <p:sp>
+        <p:nvSpPr>
+          <p:cNvPr id="7" name="Rounded Rectangle 6"/>
+          <p:cNvSpPr/>
+          <p:nvPr/>
+        </p:nvSpPr>
+        <p:spPr>
+          <a:xfrm>
+            <a:off x="658368" y="1700784"/>
+            <a:ext cx="10972800" cy="3182112"/>
+          </a:xfrm>
+          <a:prstGeom prst="roundRect">
+            <a:avLst/>
+          </a:prstGeom>
+          <a:solidFill>
+            <a:srgbClr val="1D232D"/>
+          </a:solidFill>
+          <a:ln>
+            <a:solidFill>
+              <a:srgbClr val="1D232D"/>
+            </a:solidFill>
+          </a:ln>
+        </p:spPr>
+        <p:style>
+          <a:lnRef idx="1">
+            <a:schemeClr val="accent1"/>
+          </a:lnRef>
+          <a:fillRef idx="3">
+            <a:schemeClr val="accent1"/>
+          </a:fillRef>
+          <a:effectRef idx="2">
+            <a:schemeClr val="accent1"/>
+          </a:effectRef>
+          <a:fontRef idx="minor">
+            <a:schemeClr val="lt1"/>
+          </a:fontRef>
+        </p:style>
+        <p:txBody>
+          <a:bodyPr rtlCol="0" anchor="ctr" wrap="square" lIns="73152" rIns="73152" tIns="36576" bIns="36576"/>
+          <a:lstStyle/>
+          <a:p>
+            <a:pPr algn="l">
+              <a:spcAft>
+                <a:spcPts val="0"/>
+              </a:spcAft>
+              <a:defRPr sz="1600" b="0">
+                <a:solidFill>
+                  <a:srgbClr val="FFFFFF"/>
+                </a:solidFill>
+                <a:latin typeface="DejaVu Sans Mono"/>
+              </a:defRPr>
+            </a:pPr>
+            <a:r>
+              <a:t>cd ~/agv_ws &amp;&amp; source install/setup.bash</a:t>
+            </a:r>
+            <a:br/>
+            <a:r>
+              <a:t>ros2 launch agv_gazebo gazebo.launch.py</a:t>
+            </a:r>
+          </a:p>
+        </p:txBody>
+      </p:sp>
+      <p:sp>
+        <p:nvSpPr>
+          <p:cNvPr id="8" name="TextBox 7"/>
           <p:cNvSpPr txBox="1"/>
           <p:nvPr/>
         </p:nvSpPr>
         <p:spPr>
           <a:xfrm>
-            <a:off x="777240" y="6217920"/>
-            <a:ext cx="10607040" cy="182880"/>
+            <a:off x="786384" y="5239512"/>
+            <a:ext cx="1261872" cy="237744"/>
           </a:xfrm>
           <a:prstGeom prst="rect">
             <a:avLst/>
@@ -13112,11 +13409,11 @@
           </a:bodyPr>
           <a:lstStyle/>
           <a:p>
-            <a:pPr algn="ctr">
-              <a:spcAft>
-                <a:spcPts val="0"/>
-              </a:spcAft>
-              <a:defRPr sz="1100" b="1">
+            <a:pPr algn="l">
+              <a:spcAft>
+                <a:spcPts val="0"/>
+              </a:spcAft>
+              <a:defRPr sz="1800" b="1">
                 <a:solidFill>
                   <a:srgbClr val="2A8B5A"/>
                 </a:solidFill>
@@ -13124,7 +13421,46 @@
               </a:defRPr>
             </a:pPr>
             <a:r>
-              <a:t>① 명령/설정  ② 정상 출력 또는 화면  ③ 다음 검증 명령으로 재확인</a:t>
+              <a:t>확인 기준</a:t>
+            </a:r>
+          </a:p>
+        </p:txBody>
+      </p:sp>
+      <p:sp>
+        <p:nvSpPr>
+          <p:cNvPr id="9" name="TextBox 8"/>
+          <p:cNvSpPr txBox="1"/>
+          <p:nvPr/>
+        </p:nvSpPr>
+        <p:spPr>
+          <a:xfrm>
+            <a:off x="786384" y="5532120"/>
+            <a:ext cx="10469880" cy="420624"/>
+          </a:xfrm>
+          <a:prstGeom prst="rect">
+            <a:avLst/>
+          </a:prstGeom>
+          <a:noFill/>
+        </p:spPr>
+        <p:txBody>
+          <a:bodyPr wrap="square" lIns="73152" rIns="73152" tIns="36576" bIns="36576">
+            <a:spAutoFit/>
+          </a:bodyPr>
+          <a:lstStyle/>
+          <a:p>
+            <a:pPr algn="l">
+              <a:spcAft>
+                <a:spcPts val="0"/>
+              </a:spcAft>
+              <a:defRPr sz="1800" b="0">
+                <a:solidFill>
+                  <a:srgbClr val="122C4E"/>
+                </a:solidFill>
+                <a:latin typeface="Noto Sans CJK KR"/>
+              </a:defRPr>
+            </a:pPr>
+            <a:r>
+              <a:t>ground·벽·박스가 있는 World에 AGV가 spawn되어 있는 Gazebo 화면을 확인한다.</a:t>
             </a:r>
           </a:p>
         </p:txBody>
@@ -13220,7 +13556,7 @@
               </a:defRPr>
             </a:pPr>
             <a:r>
-              <a:t>실제 Gazebo Sim에서 warehouse World에 spawn된 AGV</a:t>
+              <a:t>실제 ROS 2 환경의 파일·패키지·구성 검증 로그</a:t>
             </a:r>
           </a:p>
         </p:txBody>
@@ -13305,7 +13641,7 @@
       </p:sp>
       <p:pic>
         <p:nvPicPr>
-          <p:cNvPr id="6" name="Picture 5" descr="gazebo_agv_actual.png"/>
+          <p:cNvPr id="6" name="Picture 5" descr="validation_terminal.png"/>
           <p:cNvPicPr>
             <a:picLocks noChangeAspect="1"/>
           </p:cNvPicPr>
@@ -13319,8 +13655,8 @@
         </p:blipFill>
         <p:spPr>
           <a:xfrm>
-            <a:off x="3385904" y="1353312"/>
-            <a:ext cx="5417142" cy="4800600"/>
+            <a:off x="790956" y="1884338"/>
+            <a:ext cx="10607040" cy="3738546"/>
           </a:xfrm>
           <a:prstGeom prst="rect">
             <a:avLst/>
@@ -13418,7 +13754,7 @@
               </a:defRPr>
             </a:pPr>
             <a:r>
-              <a:t>객관적 검증 명령으로 완료를 확인한다</a:t>
+              <a:t>정상 결과: 실제 환경에서 확인한 출력</a:t>
             </a:r>
           </a:p>
         </p:txBody>
@@ -13457,7 +13793,7 @@
               </a:defRPr>
             </a:pPr>
             <a:r>
-              <a:t>화면만 보지 말고 topic·frame·파일·parameter를 다시 확인합니다.</a:t>
+              <a:t>실제 Gazebo Sim에서 warehouse World에 spawn된 AGV</a:t>
             </a:r>
           </a:p>
         </p:txBody>
@@ -13540,210 +13876,40 @@
           </a:p>
         </p:txBody>
       </p:sp>
-      <p:sp>
-        <p:nvSpPr>
-          <p:cNvPr id="6" name="Rectangle 5"/>
-          <p:cNvSpPr/>
-          <p:nvPr/>
-        </p:nvSpPr>
-        <p:spPr>
-          <a:xfrm>
-            <a:off x="566928" y="1188720"/>
-            <a:ext cx="11064240" cy="347472"/>
-          </a:xfrm>
-          <a:prstGeom prst="rect">
-            <a:avLst/>
-          </a:prstGeom>
-          <a:solidFill>
-            <a:srgbClr val="F4F7FB"/>
-          </a:solidFill>
-          <a:ln>
-            <a:solidFill>
-              <a:srgbClr val="F4F7FB"/>
-            </a:solidFill>
-          </a:ln>
-        </p:spPr>
-        <p:style>
-          <a:lnRef idx="1">
-            <a:schemeClr val="accent1"/>
-          </a:lnRef>
-          <a:fillRef idx="3">
-            <a:schemeClr val="accent1"/>
-          </a:fillRef>
-          <a:effectRef idx="2">
-            <a:schemeClr val="accent1"/>
-          </a:effectRef>
-          <a:fontRef idx="minor">
-            <a:schemeClr val="lt1"/>
-          </a:fontRef>
-        </p:style>
-        <p:txBody>
-          <a:bodyPr rtlCol="0" anchor="ctr" wrap="square" lIns="73152" rIns="73152" tIns="36576" bIns="36576"/>
-          <a:lstStyle/>
-          <a:p>
-            <a:pPr algn="l">
-              <a:spcAft>
-                <a:spcPts val="0"/>
-              </a:spcAft>
-              <a:defRPr sz="1300" b="1">
-                <a:solidFill>
-                  <a:srgbClr val="122C4E"/>
-                </a:solidFill>
-                <a:latin typeface="Noto Sans CJK KR"/>
-              </a:defRPr>
-            </a:pPr>
-            <a:r>
-              <a:t>현재 단계 검증    |    현재 폴더 ~/agv_ws    |    현재 터미널</a:t>
-            </a:r>
-          </a:p>
-        </p:txBody>
-      </p:sp>
-      <p:sp>
-        <p:nvSpPr>
-          <p:cNvPr id="7" name="Rounded Rectangle 6"/>
-          <p:cNvSpPr/>
-          <p:nvPr/>
-        </p:nvSpPr>
-        <p:spPr>
-          <a:xfrm>
-            <a:off x="658368" y="1755648"/>
-            <a:ext cx="10972800" cy="2148840"/>
-          </a:xfrm>
-          <a:prstGeom prst="roundRect">
-            <a:avLst/>
-          </a:prstGeom>
-          <a:solidFill>
-            <a:srgbClr val="1D232D"/>
-          </a:solidFill>
-          <a:ln>
-            <a:solidFill>
-              <a:srgbClr val="1D232D"/>
-            </a:solidFill>
-          </a:ln>
-        </p:spPr>
-        <p:style>
-          <a:lnRef idx="1">
-            <a:schemeClr val="accent1"/>
-          </a:lnRef>
-          <a:fillRef idx="3">
-            <a:schemeClr val="accent1"/>
-          </a:fillRef>
-          <a:effectRef idx="2">
-            <a:schemeClr val="accent1"/>
-          </a:effectRef>
-          <a:fontRef idx="minor">
-            <a:schemeClr val="lt1"/>
-          </a:fontRef>
-        </p:style>
-        <p:txBody>
-          <a:bodyPr rtlCol="0" anchor="ctr" wrap="square" lIns="73152" rIns="73152" tIns="36576" bIns="36576"/>
-          <a:lstStyle/>
-          <a:p>
-            <a:pPr algn="l">
-              <a:spcAft>
-                <a:spcPts val="0"/>
-              </a:spcAft>
-              <a:defRPr sz="1600" b="0">
-                <a:solidFill>
-                  <a:srgbClr val="FFFFFF"/>
-                </a:solidFill>
-                <a:latin typeface="DejaVu Sans Mono"/>
-              </a:defRPr>
-            </a:pPr>
-            <a:r>
-              <a:t>gz sdf -k ~/agv_ws/src/agv_gazebo/models/agv/model.sdf</a:t>
-            </a:r>
-            <a:br/>
-            <a:r>
-              <a:t>rg -n 'model://agv|&lt;world name=' ~/agv_ws/src/agv_gazebo/worlds/warehouse.sdf</a:t>
-            </a:r>
-            <a:br/>
-            <a:r>
-              <a:t># 이어서 ros2 launch agv_gazebo gazebo.launch.py로 World를 연다.</a:t>
-            </a:r>
-          </a:p>
-        </p:txBody>
-      </p:sp>
-      <p:sp>
-        <p:nvSpPr>
-          <p:cNvPr id="8" name="Rounded Rectangle 7"/>
-          <p:cNvSpPr/>
-          <p:nvPr/>
-        </p:nvSpPr>
-        <p:spPr>
-          <a:xfrm>
-            <a:off x="658368" y="4206240"/>
-            <a:ext cx="10972800" cy="1554480"/>
-          </a:xfrm>
-          <a:prstGeom prst="roundRect">
-            <a:avLst/>
-          </a:prstGeom>
-          <a:solidFill>
-            <a:srgbClr val="F4F7FB"/>
-          </a:solidFill>
-          <a:ln>
-            <a:solidFill>
-              <a:srgbClr val="D1DFD5"/>
-            </a:solidFill>
-          </a:ln>
-        </p:spPr>
-        <p:style>
-          <a:lnRef idx="1">
-            <a:schemeClr val="accent1"/>
-          </a:lnRef>
-          <a:fillRef idx="3">
-            <a:schemeClr val="accent1"/>
-          </a:fillRef>
-          <a:effectRef idx="2">
-            <a:schemeClr val="accent1"/>
-          </a:effectRef>
-          <a:fontRef idx="minor">
-            <a:schemeClr val="lt1"/>
-          </a:fontRef>
-        </p:style>
-        <p:txBody>
-          <a:bodyPr rtlCol="0" anchor="ctr" wrap="square" lIns="73152" rIns="73152" tIns="36576" bIns="36576"/>
-          <a:lstStyle/>
-          <a:p>
-            <a:pPr algn="l">
-              <a:spcAft>
-                <a:spcPts val="0"/>
-              </a:spcAft>
-              <a:defRPr sz="1800" b="1">
-                <a:solidFill>
-                  <a:srgbClr val="2A8B5A"/>
-                </a:solidFill>
-                <a:latin typeface="Noto Sans CJK KR"/>
-              </a:defRPr>
-            </a:pPr>
-            <a:r>
-              <a:t>완료 체크</a:t>
-            </a:r>
-            <a:br/>
-            <a:r>
-              <a:t>□ 명령이 오류 없이 실행된다.</a:t>
-            </a:r>
-            <a:br/>
-            <a:r>
-              <a:t>□ 기대한 파일·topic·frame·parameter 이름이 보인다.</a:t>
-            </a:r>
-            <a:br/>
-            <a:r>
-              <a:t>□ 값의 단위와 방향을 한 문장으로 설명할 수 있다.</a:t>
-            </a:r>
-          </a:p>
-        </p:txBody>
-      </p:sp>
-      <p:sp>
-        <p:nvSpPr>
-          <p:cNvPr id="9" name="TextBox 8"/>
+      <p:pic>
+        <p:nvPicPr>
+          <p:cNvPr id="6" name="Picture 5" descr="gazebo_agv_actual.png"/>
+          <p:cNvPicPr>
+            <a:picLocks noChangeAspect="1"/>
+          </p:cNvPicPr>
+          <p:nvPr/>
+        </p:nvPicPr>
+        <p:blipFill>
+          <a:blip r:embed="rId2"/>
+          <a:stretch>
+            <a:fillRect/>
+          </a:stretch>
+        </p:blipFill>
+        <p:spPr>
+          <a:xfrm>
+            <a:off x="3385904" y="1353312"/>
+            <a:ext cx="5417142" cy="4800600"/>
+          </a:xfrm>
+          <a:prstGeom prst="rect">
+            <a:avLst/>
+          </a:prstGeom>
+        </p:spPr>
+      </p:pic>
+      <p:sp>
+        <p:nvSpPr>
+          <p:cNvPr id="7" name="TextBox 6"/>
           <p:cNvSpPr txBox="1"/>
           <p:nvPr/>
         </p:nvSpPr>
         <p:spPr>
           <a:xfrm>
-            <a:off x="731520" y="5989320"/>
-            <a:ext cx="10789920" cy="237744"/>
+            <a:off x="777240" y="6217920"/>
+            <a:ext cx="10607040" cy="182880"/>
           </a:xfrm>
           <a:prstGeom prst="rect">
             <a:avLst/>
@@ -13756,19 +13922,19 @@
           </a:bodyPr>
           <a:lstStyle/>
           <a:p>
-            <a:pPr algn="l">
-              <a:spcAft>
-                <a:spcPts val="0"/>
-              </a:spcAft>
-              <a:defRPr sz="1500" b="1">
-                <a:solidFill>
-                  <a:srgbClr val="122C4E"/>
-                </a:solidFill>
-                <a:latin typeface="Noto Sans CJK KR"/>
-              </a:defRPr>
-            </a:pPr>
-            <a:r>
-              <a:t>완료 조건: ground·벽·박스가 있는 World에 AGV가 spawn되어 있는 Gazebo 화면을 확인한다.</a:t>
+            <a:pPr algn="ctr">
+              <a:spcAft>
+                <a:spcPts val="0"/>
+              </a:spcAft>
+              <a:defRPr sz="1100" b="1">
+                <a:solidFill>
+                  <a:srgbClr val="2A8B5A"/>
+                </a:solidFill>
+                <a:latin typeface="Noto Sans CJK KR"/>
+              </a:defRPr>
+            </a:pPr>
+            <a:r>
+              <a:t>① 명령/설정  ② 정상 출력 또는 화면  ③ 다음 검증 명령으로 재확인</a:t>
             </a:r>
           </a:p>
         </p:txBody>
@@ -13825,7 +13991,7 @@
               </a:defRPr>
             </a:pPr>
             <a:r>
-              <a:t>막히면: 증상 → 우선 확인 → 재검증</a:t>
+              <a:t>객관적 검증 명령으로 완료를 확인한다</a:t>
             </a:r>
           </a:p>
         </p:txBody>
@@ -13864,7 +14030,7 @@
               </a:defRPr>
             </a:pPr>
             <a:r>
-              <a:t>오류 메시지를 숨기지 않고 같은 순서로 점검합니다.</a:t>
+              <a:t>화면만 보지 말고 topic·frame·파일·parameter를 다시 확인합니다.</a:t>
             </a:r>
           </a:p>
         </p:txBody>
@@ -14000,7 +14166,7 @@
               </a:defRPr>
             </a:pPr>
             <a:r>
-              <a:t>현재 단계 오류 대응    |    현재 폴더 ~/agv_ws    |    현재 터미널</a:t>
+              <a:t>현재 단계 검증    |    현재 폴더 ~/agv_ws    |    현재 터미널</a:t>
             </a:r>
           </a:p>
         </p:txBody>
@@ -14013,18 +14179,18 @@
         </p:nvSpPr>
         <p:spPr>
           <a:xfrm>
-            <a:off x="694944" y="1755648"/>
-            <a:ext cx="10972800" cy="1115568"/>
+            <a:off x="658368" y="1755648"/>
+            <a:ext cx="10972800" cy="2148840"/>
           </a:xfrm>
           <a:prstGeom prst="roundRect">
             <a:avLst/>
           </a:prstGeom>
           <a:solidFill>
-            <a:srgbClr val="FFF7F4"/>
+            <a:srgbClr val="1D232D"/>
           </a:solidFill>
           <a:ln>
             <a:solidFill>
-              <a:srgbClr val="EDBEB4"/>
+              <a:srgbClr val="1D232D"/>
             </a:solidFill>
           </a:ln>
         </p:spPr>
@@ -14043,115 +14209,54 @@
           </a:fontRef>
         </p:style>
         <p:txBody>
-          <a:bodyPr rtlCol="0" anchor="ctr"/>
-          <a:lstStyle/>
-          <a:p>
-            <a:pPr algn="ctr"/>
-          </a:p>
-        </p:txBody>
-      </p:sp>
-      <p:sp>
-        <p:nvSpPr>
-          <p:cNvPr id="8" name="TextBox 7"/>
-          <p:cNvSpPr txBox="1"/>
-          <p:nvPr/>
-        </p:nvSpPr>
-        <p:spPr>
-          <a:xfrm>
-            <a:off x="896112" y="1901952"/>
-            <a:ext cx="2926080" cy="274320"/>
-          </a:xfrm>
-          <a:prstGeom prst="rect">
-            <a:avLst/>
-          </a:prstGeom>
-          <a:noFill/>
-        </p:spPr>
-        <p:txBody>
-          <a:bodyPr wrap="square" lIns="73152" rIns="73152" tIns="36576" bIns="36576">
-            <a:spAutoFit/>
-          </a:bodyPr>
+          <a:bodyPr rtlCol="0" anchor="ctr" wrap="square" lIns="73152" rIns="73152" tIns="36576" bIns="36576"/>
           <a:lstStyle/>
           <a:p>
             <a:pPr algn="l">
               <a:spcAft>
                 <a:spcPts val="0"/>
               </a:spcAft>
-              <a:defRPr sz="1800" b="1">
-                <a:solidFill>
-                  <a:srgbClr val="BE3B3B"/>
-                </a:solidFill>
-                <a:latin typeface="Noto Sans CJK KR"/>
-              </a:defRPr>
-            </a:pPr>
-            <a:r>
-              <a:t>증상 1: world 파일을 못 찾음</a:t>
-            </a:r>
-          </a:p>
-        </p:txBody>
-      </p:sp>
-      <p:sp>
-        <p:nvSpPr>
-          <p:cNvPr id="9" name="TextBox 8"/>
-          <p:cNvSpPr txBox="1"/>
-          <p:nvPr/>
-        </p:nvSpPr>
-        <p:spPr>
-          <a:xfrm>
-            <a:off x="3794760" y="1883664"/>
-            <a:ext cx="7543800" cy="621792"/>
-          </a:xfrm>
-          <a:prstGeom prst="rect">
-            <a:avLst/>
-          </a:prstGeom>
-          <a:noFill/>
-        </p:spPr>
-        <p:txBody>
-          <a:bodyPr wrap="square" lIns="73152" rIns="73152" tIns="36576" bIns="36576">
-            <a:spAutoFit/>
-          </a:bodyPr>
-          <a:lstStyle/>
-          <a:p>
-            <a:pPr algn="l">
-              <a:spcAft>
-                <a:spcPts val="0"/>
-              </a:spcAft>
               <a:defRPr sz="1600" b="0">
                 <a:solidFill>
-                  <a:srgbClr val="122C4E"/>
-                </a:solidFill>
-                <a:latin typeface="Noto Sans CJK KR"/>
-              </a:defRPr>
-            </a:pPr>
-            <a:r>
-              <a:t>우선 확인: launch의 package share path와 install data_files를 확인한다.</a:t>
+                  <a:srgbClr val="FFFFFF"/>
+                </a:solidFill>
+                <a:latin typeface="DejaVu Sans Mono"/>
+              </a:defRPr>
+            </a:pPr>
+            <a:r>
+              <a:t>gz sdf -k ~/agv_ws/src/agv_gazebo/models/agv/model.sdf</a:t>
             </a:r>
             <a:br/>
             <a:r>
-              <a:t>수정 후: gz sdf -k ~/agv_ws/src/agv_gazebo/models/agv/model.sdf</a:t>
-            </a:r>
-          </a:p>
-        </p:txBody>
-      </p:sp>
-      <p:sp>
-        <p:nvSpPr>
-          <p:cNvPr id="10" name="Rounded Rectangle 9"/>
+              <a:t>rg -n 'model://agv|&lt;world name=' ~/agv_ws/src/agv_gazebo/worlds/warehouse.sdf</a:t>
+            </a:r>
+            <a:br/>
+            <a:r>
+              <a:t># 이어서 ros2 launch agv_gazebo gazebo.launch.py로 World를 연다.</a:t>
+            </a:r>
+          </a:p>
+        </p:txBody>
+      </p:sp>
+      <p:sp>
+        <p:nvSpPr>
+          <p:cNvPr id="8" name="Rounded Rectangle 7"/>
           <p:cNvSpPr/>
           <p:nvPr/>
         </p:nvSpPr>
         <p:spPr>
           <a:xfrm>
-            <a:off x="694944" y="3172968"/>
-            <a:ext cx="10972800" cy="1115568"/>
+            <a:off x="658368" y="4206240"/>
+            <a:ext cx="10972800" cy="1554480"/>
           </a:xfrm>
           <a:prstGeom prst="roundRect">
             <a:avLst/>
           </a:prstGeom>
           <a:solidFill>
-            <a:srgbClr val="FFF7F4"/>
+            <a:srgbClr val="F4F7FB"/>
           </a:solidFill>
           <a:ln>
             <a:solidFill>
-              <a:srgbClr val="EDBEB4"/>
+              <a:srgbClr val="D1DFD5"/>
             </a:solidFill>
           </a:ln>
         </p:spPr>
@@ -14170,23 +14275,48 @@
           </a:fontRef>
         </p:style>
         <p:txBody>
-          <a:bodyPr rtlCol="0" anchor="ctr"/>
-          <a:lstStyle/>
-          <a:p>
-            <a:pPr algn="ctr"/>
-          </a:p>
-        </p:txBody>
-      </p:sp>
-      <p:sp>
-        <p:nvSpPr>
-          <p:cNvPr id="11" name="TextBox 10"/>
+          <a:bodyPr rtlCol="0" anchor="ctr" wrap="square" lIns="73152" rIns="73152" tIns="36576" bIns="36576"/>
+          <a:lstStyle/>
+          <a:p>
+            <a:pPr algn="l">
+              <a:spcAft>
+                <a:spcPts val="0"/>
+              </a:spcAft>
+              <a:defRPr sz="1800" b="1">
+                <a:solidFill>
+                  <a:srgbClr val="2A8B5A"/>
+                </a:solidFill>
+                <a:latin typeface="Noto Sans CJK KR"/>
+              </a:defRPr>
+            </a:pPr>
+            <a:r>
+              <a:t>완료 체크</a:t>
+            </a:r>
+            <a:br/>
+            <a:r>
+              <a:t>□ 명령이 오류 없이 실행된다.</a:t>
+            </a:r>
+            <a:br/>
+            <a:r>
+              <a:t>□ 기대한 파일·topic·frame·parameter 이름이 보인다.</a:t>
+            </a:r>
+            <a:br/>
+            <a:r>
+              <a:t>□ 값의 단위와 방향을 한 문장으로 설명할 수 있다.</a:t>
+            </a:r>
+          </a:p>
+        </p:txBody>
+      </p:sp>
+      <p:sp>
+        <p:nvSpPr>
+          <p:cNvPr id="9" name="TextBox 8"/>
           <p:cNvSpPr txBox="1"/>
           <p:nvPr/>
         </p:nvSpPr>
         <p:spPr>
           <a:xfrm>
-            <a:off x="896112" y="3319272"/>
-            <a:ext cx="2926080" cy="274320"/>
+            <a:off x="731520" y="5989320"/>
+            <a:ext cx="10789920" cy="237744"/>
           </a:xfrm>
           <a:prstGeom prst="rect">
             <a:avLst/>
@@ -14203,46 +14333,7 @@
               <a:spcAft>
                 <a:spcPts val="0"/>
               </a:spcAft>
-              <a:defRPr sz="1800" b="1">
-                <a:solidFill>
-                  <a:srgbClr val="BE3B3B"/>
-                </a:solidFill>
-                <a:latin typeface="Noto Sans CJK KR"/>
-              </a:defRPr>
-            </a:pPr>
-            <a:r>
-              <a:t>증상 2: 모델이 공중/바닥 아래</a:t>
-            </a:r>
-          </a:p>
-        </p:txBody>
-      </p:sp>
-      <p:sp>
-        <p:nvSpPr>
-          <p:cNvPr id="12" name="TextBox 11"/>
-          <p:cNvSpPr txBox="1"/>
-          <p:nvPr/>
-        </p:nvSpPr>
-        <p:spPr>
-          <a:xfrm>
-            <a:off x="3794760" y="3300984"/>
-            <a:ext cx="7543800" cy="621792"/>
-          </a:xfrm>
-          <a:prstGeom prst="rect">
-            <a:avLst/>
-          </a:prstGeom>
-          <a:noFill/>
-        </p:spPr>
-        <p:txBody>
-          <a:bodyPr wrap="square" lIns="73152" rIns="73152" tIns="36576" bIns="36576">
-            <a:spAutoFit/>
-          </a:bodyPr>
-          <a:lstStyle/>
-          <a:p>
-            <a:pPr algn="l">
-              <a:spcAft>
-                <a:spcPts val="0"/>
-              </a:spcAft>
-              <a:defRPr sz="1600" b="0">
+              <a:defRPr sz="1500" b="1">
                 <a:solidFill>
                   <a:srgbClr val="122C4E"/>
                 </a:solidFill>
@@ -14250,50 +14341,7 @@
               </a:defRPr>
             </a:pPr>
             <a:r>
-              <a:t>우선 확인: 초기 z·collision origin·geometry 크기를 확인한다.</a:t>
-            </a:r>
-            <a:br/>
-            <a:r>
-              <a:t>수정 후: gz sdf -k ~/agv_ws/src/agv_gazebo/models/agv/model.sdf</a:t>
-            </a:r>
-          </a:p>
-        </p:txBody>
-      </p:sp>
-      <p:sp>
-        <p:nvSpPr>
-          <p:cNvPr id="13" name="TextBox 12"/>
-          <p:cNvSpPr txBox="1"/>
-          <p:nvPr/>
-        </p:nvSpPr>
-        <p:spPr>
-          <a:xfrm>
-            <a:off x="822960" y="5102352"/>
-            <a:ext cx="10607040" cy="402336"/>
-          </a:xfrm>
-          <a:prstGeom prst="rect">
-            <a:avLst/>
-          </a:prstGeom>
-          <a:noFill/>
-        </p:spPr>
-        <p:txBody>
-          <a:bodyPr wrap="square" lIns="73152" rIns="73152" tIns="36576" bIns="36576">
-            <a:spAutoFit/>
-          </a:bodyPr>
-          <a:lstStyle/>
-          <a:p>
-            <a:pPr algn="ctr">
-              <a:spcAft>
-                <a:spcPts val="0"/>
-              </a:spcAft>
-              <a:defRPr sz="1800" b="1">
-                <a:solidFill>
-                  <a:srgbClr val="DB7E22"/>
-                </a:solidFill>
-                <a:latin typeface="Noto Sans CJK KR"/>
-              </a:defRPr>
-            </a:pPr>
-            <a:r>
-              <a:t>공통 순서: ① 현재 폴더 ② source ③ 파일 경로 ④ 이름/타입/단위 ⑤ build·source 후 재실행</a:t>
+              <a:t>완료 조건: ground·벽·박스가 있는 World에 AGV가 spawn되어 있는 Gazebo 화면을 확인한다.</a:t>
             </a:r>
           </a:p>
         </p:txBody>
@@ -14350,7 +14398,7 @@
               </a:defRPr>
             </a:pPr>
             <a:r>
-              <a:t>미니 실습: 값 하나를 바꾸고 결과를 비교한다</a:t>
+              <a:t>막히면: 증상 → 우선 확인 → 재검증</a:t>
             </a:r>
           </a:p>
         </p:txBody>
@@ -14389,7 +14437,7 @@
               </a:defRPr>
             </a:pPr>
             <a:r>
-              <a:t>정상 결과를 만든 뒤에는 한 번에 하나의 값만 바꿉니다.</a:t>
+              <a:t>오류 메시지를 숨기지 않고 같은 순서로 점검합니다.</a:t>
             </a:r>
           </a:p>
         </p:txBody>
@@ -14525,7 +14573,7 @@
               </a:defRPr>
             </a:pPr>
             <a:r>
-              <a:t>현재 단계 미니 실습    |    현재 폴더 ~/agv_ws    |    현재 터미널</a:t>
+              <a:t>현재 단계 오류 대응    |    현재 폴더 ~/agv_ws    |    현재 터미널</a:t>
             </a:r>
           </a:p>
         </p:txBody>
@@ -14538,18 +14586,18 @@
         </p:nvSpPr>
         <p:spPr>
           <a:xfrm>
-            <a:off x="749808" y="1874519"/>
-            <a:ext cx="10652760" cy="1993392"/>
+            <a:off x="694944" y="1755648"/>
+            <a:ext cx="10972800" cy="1115568"/>
           </a:xfrm>
           <a:prstGeom prst="roundRect">
             <a:avLst/>
           </a:prstGeom>
           <a:solidFill>
-            <a:srgbClr val="FFF8EB"/>
+            <a:srgbClr val="FFF7F4"/>
           </a:solidFill>
           <a:ln>
             <a:solidFill>
-              <a:srgbClr val="ECC680"/>
+              <a:srgbClr val="EDBEB4"/>
             </a:solidFill>
           </a:ln>
         </p:spPr>
@@ -14568,23 +14616,10 @@
           </a:fontRef>
         </p:style>
         <p:txBody>
-          <a:bodyPr rtlCol="0" anchor="ctr" wrap="square" lIns="73152" rIns="73152" tIns="36576" bIns="36576"/>
-          <a:lstStyle/>
-          <a:p>
-            <a:pPr algn="ctr">
-              <a:spcAft>
-                <a:spcPts val="0"/>
-              </a:spcAft>
-              <a:defRPr sz="2300" b="1">
-                <a:solidFill>
-                  <a:srgbClr val="122C4E"/>
-                </a:solidFill>
-                <a:latin typeface="Noto Sans CJK KR"/>
-              </a:defRPr>
-            </a:pPr>
-            <a:r>
-              <a:t>World의 box pose x 좌표를 1 m 바꾼 후 저장·재실행하여 top-view 위치 변화를 확인한다.</a:t>
-            </a:r>
+          <a:bodyPr rtlCol="0" anchor="ctr"/>
+          <a:lstStyle/>
+          <a:p>
+            <a:pPr algn="ctr"/>
           </a:p>
         </p:txBody>
       </p:sp>
@@ -14596,8 +14631,8 @@
         </p:nvSpPr>
         <p:spPr>
           <a:xfrm>
-            <a:off x="877824" y="4590288"/>
-            <a:ext cx="10241280" cy="594360"/>
+            <a:off x="896112" y="1901952"/>
+            <a:ext cx="2926080" cy="274320"/>
           </a:xfrm>
           <a:prstGeom prst="rect">
             <a:avLst/>
@@ -14610,11 +14645,220 @@
           </a:bodyPr>
           <a:lstStyle/>
           <a:p>
+            <a:pPr algn="l">
+              <a:spcAft>
+                <a:spcPts val="0"/>
+              </a:spcAft>
+              <a:defRPr sz="1800" b="1">
+                <a:solidFill>
+                  <a:srgbClr val="BE3B3B"/>
+                </a:solidFill>
+                <a:latin typeface="Noto Sans CJK KR"/>
+              </a:defRPr>
+            </a:pPr>
+            <a:r>
+              <a:t>증상 1: world 파일을 못 찾음</a:t>
+            </a:r>
+          </a:p>
+        </p:txBody>
+      </p:sp>
+      <p:sp>
+        <p:nvSpPr>
+          <p:cNvPr id="9" name="TextBox 8"/>
+          <p:cNvSpPr txBox="1"/>
+          <p:nvPr/>
+        </p:nvSpPr>
+        <p:spPr>
+          <a:xfrm>
+            <a:off x="3794760" y="1883664"/>
+            <a:ext cx="7543800" cy="621792"/>
+          </a:xfrm>
+          <a:prstGeom prst="rect">
+            <a:avLst/>
+          </a:prstGeom>
+          <a:noFill/>
+        </p:spPr>
+        <p:txBody>
+          <a:bodyPr wrap="square" lIns="73152" rIns="73152" tIns="36576" bIns="36576">
+            <a:spAutoFit/>
+          </a:bodyPr>
+          <a:lstStyle/>
+          <a:p>
+            <a:pPr algn="l">
+              <a:spcAft>
+                <a:spcPts val="0"/>
+              </a:spcAft>
+              <a:defRPr sz="1600" b="0">
+                <a:solidFill>
+                  <a:srgbClr val="122C4E"/>
+                </a:solidFill>
+                <a:latin typeface="Noto Sans CJK KR"/>
+              </a:defRPr>
+            </a:pPr>
+            <a:r>
+              <a:t>우선 확인: launch의 package share path와 install data_files를 확인한다.</a:t>
+            </a:r>
+            <a:br/>
+            <a:r>
+              <a:t>수정 후: gz sdf -k ~/agv_ws/src/agv_gazebo/models/agv/model.sdf</a:t>
+            </a:r>
+          </a:p>
+        </p:txBody>
+      </p:sp>
+      <p:sp>
+        <p:nvSpPr>
+          <p:cNvPr id="10" name="Rounded Rectangle 9"/>
+          <p:cNvSpPr/>
+          <p:nvPr/>
+        </p:nvSpPr>
+        <p:spPr>
+          <a:xfrm>
+            <a:off x="694944" y="3172968"/>
+            <a:ext cx="10972800" cy="1115568"/>
+          </a:xfrm>
+          <a:prstGeom prst="roundRect">
+            <a:avLst/>
+          </a:prstGeom>
+          <a:solidFill>
+            <a:srgbClr val="FFF7F4"/>
+          </a:solidFill>
+          <a:ln>
+            <a:solidFill>
+              <a:srgbClr val="EDBEB4"/>
+            </a:solidFill>
+          </a:ln>
+        </p:spPr>
+        <p:style>
+          <a:lnRef idx="1">
+            <a:schemeClr val="accent1"/>
+          </a:lnRef>
+          <a:fillRef idx="3">
+            <a:schemeClr val="accent1"/>
+          </a:fillRef>
+          <a:effectRef idx="2">
+            <a:schemeClr val="accent1"/>
+          </a:effectRef>
+          <a:fontRef idx="minor">
+            <a:schemeClr val="lt1"/>
+          </a:fontRef>
+        </p:style>
+        <p:txBody>
+          <a:bodyPr rtlCol="0" anchor="ctr"/>
+          <a:lstStyle/>
+          <a:p>
+            <a:pPr algn="ctr"/>
+          </a:p>
+        </p:txBody>
+      </p:sp>
+      <p:sp>
+        <p:nvSpPr>
+          <p:cNvPr id="11" name="TextBox 10"/>
+          <p:cNvSpPr txBox="1"/>
+          <p:nvPr/>
+        </p:nvSpPr>
+        <p:spPr>
+          <a:xfrm>
+            <a:off x="896112" y="3319272"/>
+            <a:ext cx="2926080" cy="274320"/>
+          </a:xfrm>
+          <a:prstGeom prst="rect">
+            <a:avLst/>
+          </a:prstGeom>
+          <a:noFill/>
+        </p:spPr>
+        <p:txBody>
+          <a:bodyPr wrap="square" lIns="73152" rIns="73152" tIns="36576" bIns="36576">
+            <a:spAutoFit/>
+          </a:bodyPr>
+          <a:lstStyle/>
+          <a:p>
+            <a:pPr algn="l">
+              <a:spcAft>
+                <a:spcPts val="0"/>
+              </a:spcAft>
+              <a:defRPr sz="1800" b="1">
+                <a:solidFill>
+                  <a:srgbClr val="BE3B3B"/>
+                </a:solidFill>
+                <a:latin typeface="Noto Sans CJK KR"/>
+              </a:defRPr>
+            </a:pPr>
+            <a:r>
+              <a:t>증상 2: 모델이 공중/바닥 아래</a:t>
+            </a:r>
+          </a:p>
+        </p:txBody>
+      </p:sp>
+      <p:sp>
+        <p:nvSpPr>
+          <p:cNvPr id="12" name="TextBox 11"/>
+          <p:cNvSpPr txBox="1"/>
+          <p:nvPr/>
+        </p:nvSpPr>
+        <p:spPr>
+          <a:xfrm>
+            <a:off x="3794760" y="3300984"/>
+            <a:ext cx="7543800" cy="621792"/>
+          </a:xfrm>
+          <a:prstGeom prst="rect">
+            <a:avLst/>
+          </a:prstGeom>
+          <a:noFill/>
+        </p:spPr>
+        <p:txBody>
+          <a:bodyPr wrap="square" lIns="73152" rIns="73152" tIns="36576" bIns="36576">
+            <a:spAutoFit/>
+          </a:bodyPr>
+          <a:lstStyle/>
+          <a:p>
+            <a:pPr algn="l">
+              <a:spcAft>
+                <a:spcPts val="0"/>
+              </a:spcAft>
+              <a:defRPr sz="1600" b="0">
+                <a:solidFill>
+                  <a:srgbClr val="122C4E"/>
+                </a:solidFill>
+                <a:latin typeface="Noto Sans CJK KR"/>
+              </a:defRPr>
+            </a:pPr>
+            <a:r>
+              <a:t>우선 확인: 초기 z·collision origin·geometry 크기를 확인한다.</a:t>
+            </a:r>
+            <a:br/>
+            <a:r>
+              <a:t>수정 후: gz sdf -k ~/agv_ws/src/agv_gazebo/models/agv/model.sdf</a:t>
+            </a:r>
+          </a:p>
+        </p:txBody>
+      </p:sp>
+      <p:sp>
+        <p:nvSpPr>
+          <p:cNvPr id="13" name="TextBox 12"/>
+          <p:cNvSpPr txBox="1"/>
+          <p:nvPr/>
+        </p:nvSpPr>
+        <p:spPr>
+          <a:xfrm>
+            <a:off x="822960" y="5102352"/>
+            <a:ext cx="10607040" cy="402336"/>
+          </a:xfrm>
+          <a:prstGeom prst="rect">
+            <a:avLst/>
+          </a:prstGeom>
+          <a:noFill/>
+        </p:spPr>
+        <p:txBody>
+          <a:bodyPr wrap="square" lIns="73152" rIns="73152" tIns="36576" bIns="36576">
+            <a:spAutoFit/>
+          </a:bodyPr>
+          <a:lstStyle/>
+          <a:p>
             <a:pPr algn="ctr">
               <a:spcAft>
                 <a:spcPts val="0"/>
               </a:spcAft>
-              <a:defRPr sz="1900" b="1">
+              <a:defRPr sz="1800" b="1">
                 <a:solidFill>
                   <a:srgbClr val="DB7E22"/>
                 </a:solidFill>
@@ -14622,7 +14866,7 @@
               </a:defRPr>
             </a:pPr>
             <a:r>
-              <a:t>기록할 것: 바꾼 값(단위) · 기대한 변화 · 실제 출력/화면 · 원래 값으로 되돌린 결과</a:t>
+              <a:t>공통 순서: ① 현재 폴더 ② source ③ 파일 경로 ④ 이름/타입/단위 ⑤ build·source 후 재실행</a:t>
             </a:r>
           </a:p>
         </p:txBody>
@@ -14679,7 +14923,7 @@
               </a:defRPr>
             </a:pPr>
             <a:r>
-              <a:t>체크포인트를 저장하고 다음 모듈로 넘긴다</a:t>
+              <a:t>미니 실습: 값 하나를 바꾸고 결과를 비교한다</a:t>
             </a:r>
           </a:p>
         </p:txBody>
@@ -14718,7 +14962,7 @@
               </a:defRPr>
             </a:pPr>
             <a:r>
-              <a:t>현재 Complete는 다음 Starter의 기준선입니다.</a:t>
+              <a:t>정상 결과를 만든 뒤에는 한 번에 하나의 값만 바꿉니다.</a:t>
             </a:r>
           </a:p>
         </p:txBody>
@@ -14854,7 +15098,7 @@
               </a:defRPr>
             </a:pPr>
             <a:r>
-              <a:t>현재 단계 체크포인트    |    현재 폴더 ~/agv_ws    |    현재 터미널</a:t>
+              <a:t>현재 단계 미니 실습    |    현재 폴더 ~/agv_ws    |    현재 터미널</a:t>
             </a:r>
           </a:p>
         </p:txBody>
@@ -14867,18 +15111,18 @@
         </p:nvSpPr>
         <p:spPr>
           <a:xfrm>
-            <a:off x="685800" y="1737360"/>
-            <a:ext cx="10972800" cy="3611880"/>
+            <a:off x="749808" y="1874519"/>
+            <a:ext cx="10652760" cy="1993392"/>
           </a:xfrm>
           <a:prstGeom prst="roundRect">
             <a:avLst/>
           </a:prstGeom>
           <a:solidFill>
-            <a:srgbClr val="F4F7FB"/>
+            <a:srgbClr val="FFF8EB"/>
           </a:solidFill>
           <a:ln>
             <a:solidFill>
-              <a:srgbClr val="D2DCE8"/>
+              <a:srgbClr val="ECC680"/>
             </a:solidFill>
           </a:ln>
         </p:spPr>
@@ -14897,10 +15141,23 @@
           </a:fontRef>
         </p:style>
         <p:txBody>
-          <a:bodyPr rtlCol="0" anchor="ctr"/>
-          <a:lstStyle/>
-          <a:p>
-            <a:pPr algn="ctr"/>
+          <a:bodyPr rtlCol="0" anchor="ctr" wrap="square" lIns="73152" rIns="73152" tIns="36576" bIns="36576"/>
+          <a:lstStyle/>
+          <a:p>
+            <a:pPr algn="ctr">
+              <a:spcAft>
+                <a:spcPts val="0"/>
+              </a:spcAft>
+              <a:defRPr sz="2300" b="1">
+                <a:solidFill>
+                  <a:srgbClr val="122C4E"/>
+                </a:solidFill>
+                <a:latin typeface="Noto Sans CJK KR"/>
+              </a:defRPr>
+            </a:pPr>
+            <a:r>
+              <a:t>World의 box pose x 좌표를 1 m 바꾼 후 저장·재실행하여 top-view 위치 변화를 확인한다.</a:t>
+            </a:r>
           </a:p>
         </p:txBody>
       </p:sp>
@@ -14912,111 +15169,8 @@
         </p:nvSpPr>
         <p:spPr>
           <a:xfrm>
-            <a:off x="896112" y="1993392"/>
-            <a:ext cx="10332720" cy="2971800"/>
-          </a:xfrm>
-          <a:prstGeom prst="rect">
-            <a:avLst/>
-          </a:prstGeom>
-          <a:noFill/>
-        </p:spPr>
-        <p:txBody>
-          <a:bodyPr wrap="square" lIns="109728" rIns="109728">
-            <a:spAutoFit/>
-          </a:bodyPr>
-          <a:lstStyle/>
-          <a:p>
-            <a:pPr>
-              <a:spcAft>
-                <a:spcPts val="800"/>
-              </a:spcAft>
-              <a:defRPr sz="1800">
-                <a:solidFill>
-                  <a:srgbClr val="122C4E"/>
-                </a:solidFill>
-                <a:latin typeface="Noto Sans CJK KR"/>
-              </a:defRPr>
-            </a:pPr>
-            <a:r>
-              <a:t>• □ 완료 화면: ground·벽·박스가 있는 World에 AGV가 spawn되어 있는 Gazebo 화면을 확인한다.</a:t>
-            </a:r>
-          </a:p>
-          <a:p>
-            <a:pPr>
-              <a:spcAft>
-                <a:spcPts val="800"/>
-              </a:spcAft>
-              <a:defRPr sz="1800">
-                <a:solidFill>
-                  <a:srgbClr val="122C4E"/>
-                </a:solidFill>
-                <a:latin typeface="Noto Sans CJK KR"/>
-              </a:defRPr>
-            </a:pPr>
-            <a:r>
-              <a:t>• □ Complete 파일: blocks/B_robot_build/M08_gazebo_world_spawn/complete/</a:t>
-            </a:r>
-          </a:p>
-          <a:p>
-            <a:pPr>
-              <a:spcAft>
-                <a:spcPts val="800"/>
-              </a:spcAft>
-              <a:defRPr sz="1800">
-                <a:solidFill>
-                  <a:srgbClr val="122C4E"/>
-                </a:solidFill>
-                <a:latin typeface="Noto Sans CJK KR"/>
-              </a:defRPr>
-            </a:pPr>
-            <a:r>
-              <a:t>• □ 정상 로그·캡처: logs/validation.log, screenshots/validation_terminal.png</a:t>
-            </a:r>
-          </a:p>
-          <a:p>
-            <a:pPr>
-              <a:spcAft>
-                <a:spcPts val="800"/>
-              </a:spcAft>
-              <a:defRPr sz="1800">
-                <a:solidFill>
-                  <a:srgbClr val="122C4E"/>
-                </a:solidFill>
-                <a:latin typeface="Noto Sans CJK KR"/>
-              </a:defRPr>
-            </a:pPr>
-            <a:r>
-              <a:t>• □ 버전 식별: CHECKSUM_or_TAG.txt의 SHA-256 manifest</a:t>
-            </a:r>
-          </a:p>
-          <a:p>
-            <a:pPr>
-              <a:spcAft>
-                <a:spcPts val="800"/>
-              </a:spcAft>
-              <a:defRPr sz="1800">
-                <a:solidFill>
-                  <a:srgbClr val="122C4E"/>
-                </a:solidFill>
-                <a:latin typeface="Noto Sans CJK KR"/>
-              </a:defRPr>
-            </a:pPr>
-            <a:r>
-              <a:t>• □ 다음 시작 조건: M09 Differential Drive</a:t>
-            </a:r>
-          </a:p>
-        </p:txBody>
-      </p:sp>
-      <p:sp>
-        <p:nvSpPr>
-          <p:cNvPr id="9" name="TextBox 8"/>
-          <p:cNvSpPr txBox="1"/>
-          <p:nvPr/>
-        </p:nvSpPr>
-        <p:spPr>
-          <a:xfrm>
-            <a:off x="868680" y="5596128"/>
-            <a:ext cx="10515600" cy="338328"/>
+            <a:off x="877824" y="4590288"/>
+            <a:ext cx="10241280" cy="594360"/>
           </a:xfrm>
           <a:prstGeom prst="rect">
             <a:avLst/>
@@ -15033,15 +15187,15 @@
               <a:spcAft>
                 <a:spcPts val="0"/>
               </a:spcAft>
-              <a:defRPr sz="1700" b="1">
-                <a:solidFill>
-                  <a:srgbClr val="2A8B5A"/>
-                </a:solidFill>
-                <a:latin typeface="Noto Sans CJK KR"/>
-              </a:defRPr>
-            </a:pPr>
-            <a:r>
-              <a:t>다음 모듈을 시작하기 전, 이 슬라이드의 Complete와 다음 모듈의 Starter를 비교합니다.</a:t>
+              <a:defRPr sz="1900" b="1">
+                <a:solidFill>
+                  <a:srgbClr val="DB7E22"/>
+                </a:solidFill>
+                <a:latin typeface="Noto Sans CJK KR"/>
+              </a:defRPr>
+            </a:pPr>
+            <a:r>
+              <a:t>기록할 것: 바꾼 값(단위) · 기대한 변화 · 실제 출력/화면 · 원래 값으로 되돌린 결과</a:t>
             </a:r>
           </a:p>
         </p:txBody>
@@ -15098,7 +15252,7 @@
               </a:defRPr>
             </a:pPr>
             <a:r>
-              <a:t>공식 참고 자료</a:t>
+              <a:t>체크포인트를 저장하고 다음 모듈로 넘긴다</a:t>
             </a:r>
           </a:p>
         </p:txBody>
@@ -15137,7 +15291,7 @@
               </a:defRPr>
             </a:pPr>
             <a:r>
-              <a:t>본문 단계는 링크를 열지 않아도 완료할 수 있으며, 링크는 개념을 더 확인할 때만 사용합니다.</a:t>
+              <a:t>현재 Complete는 다음 Starter의 기준선입니다.</a:t>
             </a:r>
           </a:p>
         </p:txBody>
@@ -15222,16 +15376,16 @@
       </p:sp>
       <p:sp>
         <p:nvSpPr>
-          <p:cNvPr id="6" name="Rounded Rectangle 5"/>
+          <p:cNvPr id="6" name="Rectangle 5"/>
           <p:cNvSpPr/>
           <p:nvPr/>
         </p:nvSpPr>
         <p:spPr>
           <a:xfrm>
-            <a:off x="658368" y="1554480"/>
-            <a:ext cx="10972800" cy="4526280"/>
-          </a:xfrm>
-          <a:prstGeom prst="roundRect">
+            <a:off x="566928" y="1188720"/>
+            <a:ext cx="11064240" cy="347472"/>
+          </a:xfrm>
+          <a:prstGeom prst="rect">
             <a:avLst/>
           </a:prstGeom>
           <a:solidFill>
@@ -15239,7 +15393,7 @@
           </a:solidFill>
           <a:ln>
             <a:solidFill>
-              <a:srgbClr val="D7DFE9"/>
+              <a:srgbClr val="F4F7FB"/>
             </a:solidFill>
           </a:ln>
         </p:spPr>
@@ -15258,6 +15412,64 @@
           </a:fontRef>
         </p:style>
         <p:txBody>
+          <a:bodyPr rtlCol="0" anchor="ctr" wrap="square" lIns="73152" rIns="73152" tIns="36576" bIns="36576"/>
+          <a:lstStyle/>
+          <a:p>
+            <a:pPr algn="l">
+              <a:spcAft>
+                <a:spcPts val="0"/>
+              </a:spcAft>
+              <a:defRPr sz="1300" b="1">
+                <a:solidFill>
+                  <a:srgbClr val="122C4E"/>
+                </a:solidFill>
+                <a:latin typeface="Noto Sans CJK KR"/>
+              </a:defRPr>
+            </a:pPr>
+            <a:r>
+              <a:t>현재 단계 체크포인트    |    현재 폴더 ~/agv_ws    |    현재 터미널</a:t>
+            </a:r>
+          </a:p>
+        </p:txBody>
+      </p:sp>
+      <p:sp>
+        <p:nvSpPr>
+          <p:cNvPr id="7" name="Rounded Rectangle 6"/>
+          <p:cNvSpPr/>
+          <p:nvPr/>
+        </p:nvSpPr>
+        <p:spPr>
+          <a:xfrm>
+            <a:off x="685800" y="1737360"/>
+            <a:ext cx="10972800" cy="3611880"/>
+          </a:xfrm>
+          <a:prstGeom prst="roundRect">
+            <a:avLst/>
+          </a:prstGeom>
+          <a:solidFill>
+            <a:srgbClr val="F4F7FB"/>
+          </a:solidFill>
+          <a:ln>
+            <a:solidFill>
+              <a:srgbClr val="D2DCE8"/>
+            </a:solidFill>
+          </a:ln>
+        </p:spPr>
+        <p:style>
+          <a:lnRef idx="1">
+            <a:schemeClr val="accent1"/>
+          </a:lnRef>
+          <a:fillRef idx="3">
+            <a:schemeClr val="accent1"/>
+          </a:fillRef>
+          <a:effectRef idx="2">
+            <a:schemeClr val="accent1"/>
+          </a:effectRef>
+          <a:fontRef idx="minor">
+            <a:schemeClr val="lt1"/>
+          </a:fontRef>
+        </p:style>
+        <p:txBody>
           <a:bodyPr rtlCol="0" anchor="ctr"/>
           <a:lstStyle/>
           <a:p>
@@ -15267,14 +15479,117 @@
       </p:sp>
       <p:sp>
         <p:nvSpPr>
-          <p:cNvPr id="7" name="TextBox 6"/>
+          <p:cNvPr id="8" name="TextBox 7"/>
           <p:cNvSpPr txBox="1"/>
           <p:nvPr/>
         </p:nvSpPr>
         <p:spPr>
           <a:xfrm>
-            <a:off x="914400" y="1810512"/>
-            <a:ext cx="3840480" cy="256032"/>
+            <a:off x="896112" y="1993392"/>
+            <a:ext cx="10332720" cy="2971800"/>
+          </a:xfrm>
+          <a:prstGeom prst="rect">
+            <a:avLst/>
+          </a:prstGeom>
+          <a:noFill/>
+        </p:spPr>
+        <p:txBody>
+          <a:bodyPr wrap="square" lIns="109728" rIns="109728">
+            <a:spAutoFit/>
+          </a:bodyPr>
+          <a:lstStyle/>
+          <a:p>
+            <a:pPr>
+              <a:spcAft>
+                <a:spcPts val="800"/>
+              </a:spcAft>
+              <a:defRPr sz="1800">
+                <a:solidFill>
+                  <a:srgbClr val="122C4E"/>
+                </a:solidFill>
+                <a:latin typeface="Noto Sans CJK KR"/>
+              </a:defRPr>
+            </a:pPr>
+            <a:r>
+              <a:t>• □ 완료 화면: ground·벽·박스가 있는 World에 AGV가 spawn되어 있는 Gazebo 화면을 확인한다.</a:t>
+            </a:r>
+          </a:p>
+          <a:p>
+            <a:pPr>
+              <a:spcAft>
+                <a:spcPts val="800"/>
+              </a:spcAft>
+              <a:defRPr sz="1800">
+                <a:solidFill>
+                  <a:srgbClr val="122C4E"/>
+                </a:solidFill>
+                <a:latin typeface="Noto Sans CJK KR"/>
+              </a:defRPr>
+            </a:pPr>
+            <a:r>
+              <a:t>• □ Complete 파일: blocks/B_robot_build/M08_gazebo_world_spawn/complete/</a:t>
+            </a:r>
+          </a:p>
+          <a:p>
+            <a:pPr>
+              <a:spcAft>
+                <a:spcPts val="800"/>
+              </a:spcAft>
+              <a:defRPr sz="1800">
+                <a:solidFill>
+                  <a:srgbClr val="122C4E"/>
+                </a:solidFill>
+                <a:latin typeface="Noto Sans CJK KR"/>
+              </a:defRPr>
+            </a:pPr>
+            <a:r>
+              <a:t>• □ 정상 로그·캡처: logs/validation.log, screenshots/validation_terminal.png</a:t>
+            </a:r>
+          </a:p>
+          <a:p>
+            <a:pPr>
+              <a:spcAft>
+                <a:spcPts val="800"/>
+              </a:spcAft>
+              <a:defRPr sz="1800">
+                <a:solidFill>
+                  <a:srgbClr val="122C4E"/>
+                </a:solidFill>
+                <a:latin typeface="Noto Sans CJK KR"/>
+              </a:defRPr>
+            </a:pPr>
+            <a:r>
+              <a:t>• □ 버전 식별: CHECKSUM_or_TAG.txt의 SHA-256 manifest</a:t>
+            </a:r>
+          </a:p>
+          <a:p>
+            <a:pPr>
+              <a:spcAft>
+                <a:spcPts val="800"/>
+              </a:spcAft>
+              <a:defRPr sz="1800">
+                <a:solidFill>
+                  <a:srgbClr val="122C4E"/>
+                </a:solidFill>
+                <a:latin typeface="Noto Sans CJK KR"/>
+              </a:defRPr>
+            </a:pPr>
+            <a:r>
+              <a:t>• □ 다음 시작 조건: M09 Differential Drive</a:t>
+            </a:r>
+          </a:p>
+        </p:txBody>
+      </p:sp>
+      <p:sp>
+        <p:nvSpPr>
+          <p:cNvPr id="9" name="TextBox 8"/>
+          <p:cNvSpPr txBox="1"/>
+          <p:nvPr/>
+        </p:nvSpPr>
+        <p:spPr>
+          <a:xfrm>
+            <a:off x="868680" y="5596128"/>
+            <a:ext cx="10515600" cy="338328"/>
           </a:xfrm>
           <a:prstGeom prst="rect">
             <a:avLst/>
@@ -15287,292 +15602,19 @@
           </a:bodyPr>
           <a:lstStyle/>
           <a:p>
-            <a:pPr algn="l">
+            <a:pPr algn="ctr">
               <a:spcAft>
                 <a:spcPts val="0"/>
               </a:spcAft>
               <a:defRPr sz="1700" b="1">
                 <a:solidFill>
-                  <a:srgbClr val="122C4E"/>
-                </a:solidFill>
-                <a:latin typeface="Noto Sans CJK KR"/>
-              </a:defRPr>
-            </a:pPr>
-            <a:r>
-              <a:t>ROS 2 Jazzy — Gazebo Simulation</a:t>
-            </a:r>
-          </a:p>
-        </p:txBody>
-      </p:sp>
-      <p:sp>
-        <p:nvSpPr>
-          <p:cNvPr id="8" name="TextBox 7"/>
-          <p:cNvSpPr txBox="1"/>
-          <p:nvPr/>
-        </p:nvSpPr>
-        <p:spPr>
-          <a:xfrm>
-            <a:off x="914400" y="2121408"/>
-            <a:ext cx="9966960" cy="256032"/>
-          </a:xfrm>
-          <a:prstGeom prst="rect">
-            <a:avLst/>
-          </a:prstGeom>
-          <a:noFill/>
-        </p:spPr>
-        <p:txBody>
-          <a:bodyPr wrap="square" lIns="73152" rIns="73152" tIns="36576" bIns="36576">
-            <a:spAutoFit/>
-          </a:bodyPr>
-          <a:lstStyle/>
-          <a:p>
-            <a:pPr algn="l">
-              <a:spcAft>
-                <a:spcPts val="0"/>
-              </a:spcAft>
-              <a:defRPr sz="1200" b="0">
-                <a:solidFill>
-                  <a:srgbClr val="225B9B"/>
-                </a:solidFill>
-                <a:latin typeface="DejaVu Sans Mono"/>
-              </a:defRPr>
-            </a:pPr>
-            <a:r>
-              <a:t>https://docs.ros.org/en/jazzy/Tutorials/Advanced/Simulators/Gazebo/Simulation-Gazebo.html</a:t>
-            </a:r>
-          </a:p>
-        </p:txBody>
-      </p:sp>
-      <p:sp>
-        <p:nvSpPr>
-          <p:cNvPr id="9" name="TextBox 8"/>
-          <p:cNvSpPr txBox="1"/>
-          <p:nvPr/>
-        </p:nvSpPr>
-        <p:spPr>
-          <a:xfrm>
-            <a:off x="914400" y="2816352"/>
-            <a:ext cx="3840480" cy="256032"/>
-          </a:xfrm>
-          <a:prstGeom prst="rect">
-            <a:avLst/>
-          </a:prstGeom>
-          <a:noFill/>
-        </p:spPr>
-        <p:txBody>
-          <a:bodyPr wrap="square" lIns="73152" rIns="73152" tIns="36576" bIns="36576">
-            <a:spAutoFit/>
-          </a:bodyPr>
-          <a:lstStyle/>
-          <a:p>
-            <a:pPr algn="l">
-              <a:spcAft>
-                <a:spcPts val="0"/>
-              </a:spcAft>
-              <a:defRPr sz="1700" b="1">
-                <a:solidFill>
-                  <a:srgbClr val="122C4E"/>
-                </a:solidFill>
-                <a:latin typeface="Noto Sans CJK KR"/>
-              </a:defRPr>
-            </a:pPr>
-            <a:r>
-              <a:t>ROS 2 Jazzy — URDF / robot_state_publisher</a:t>
-            </a:r>
-          </a:p>
-        </p:txBody>
-      </p:sp>
-      <p:sp>
-        <p:nvSpPr>
-          <p:cNvPr id="10" name="TextBox 9"/>
-          <p:cNvSpPr txBox="1"/>
-          <p:nvPr/>
-        </p:nvSpPr>
-        <p:spPr>
-          <a:xfrm>
-            <a:off x="914400" y="3127248"/>
-            <a:ext cx="9966960" cy="256032"/>
-          </a:xfrm>
-          <a:prstGeom prst="rect">
-            <a:avLst/>
-          </a:prstGeom>
-          <a:noFill/>
-        </p:spPr>
-        <p:txBody>
-          <a:bodyPr wrap="square" lIns="73152" rIns="73152" tIns="36576" bIns="36576">
-            <a:spAutoFit/>
-          </a:bodyPr>
-          <a:lstStyle/>
-          <a:p>
-            <a:pPr algn="l">
-              <a:spcAft>
-                <a:spcPts val="0"/>
-              </a:spcAft>
-              <a:defRPr sz="1200" b="0">
-                <a:solidFill>
-                  <a:srgbClr val="225B9B"/>
-                </a:solidFill>
-                <a:latin typeface="DejaVu Sans Mono"/>
-              </a:defRPr>
-            </a:pPr>
-            <a:r>
-              <a:t>https://docs.ros.org/en/jazzy/Tutorials/Intermediate/URDF/Using-URDF-with-Robot-State-Publisher-py.html</a:t>
-            </a:r>
-          </a:p>
-        </p:txBody>
-      </p:sp>
-      <p:sp>
-        <p:nvSpPr>
-          <p:cNvPr id="11" name="TextBox 10"/>
-          <p:cNvSpPr txBox="1"/>
-          <p:nvPr/>
-        </p:nvSpPr>
-        <p:spPr>
-          <a:xfrm>
-            <a:off x="914400" y="3822191"/>
-            <a:ext cx="3840480" cy="256032"/>
-          </a:xfrm>
-          <a:prstGeom prst="rect">
-            <a:avLst/>
-          </a:prstGeom>
-          <a:noFill/>
-        </p:spPr>
-        <p:txBody>
-          <a:bodyPr wrap="square" lIns="73152" rIns="73152" tIns="36576" bIns="36576">
-            <a:spAutoFit/>
-          </a:bodyPr>
-          <a:lstStyle/>
-          <a:p>
-            <a:pPr algn="l">
-              <a:spcAft>
-                <a:spcPts val="0"/>
-              </a:spcAft>
-              <a:defRPr sz="1700" b="1">
-                <a:solidFill>
-                  <a:srgbClr val="122C4E"/>
-                </a:solidFill>
-                <a:latin typeface="Noto Sans CJK KR"/>
-              </a:defRPr>
-            </a:pPr>
-            <a:r>
-              <a:t>Gazebo — ROS 2 Integration / ros_gz_bridge</a:t>
-            </a:r>
-          </a:p>
-        </p:txBody>
-      </p:sp>
-      <p:sp>
-        <p:nvSpPr>
-          <p:cNvPr id="12" name="TextBox 11"/>
-          <p:cNvSpPr txBox="1"/>
-          <p:nvPr/>
-        </p:nvSpPr>
-        <p:spPr>
-          <a:xfrm>
-            <a:off x="914400" y="4133087"/>
-            <a:ext cx="9966960" cy="256032"/>
-          </a:xfrm>
-          <a:prstGeom prst="rect">
-            <a:avLst/>
-          </a:prstGeom>
-          <a:noFill/>
-        </p:spPr>
-        <p:txBody>
-          <a:bodyPr wrap="square" lIns="73152" rIns="73152" tIns="36576" bIns="36576">
-            <a:spAutoFit/>
-          </a:bodyPr>
-          <a:lstStyle/>
-          <a:p>
-            <a:pPr algn="l">
-              <a:spcAft>
-                <a:spcPts val="0"/>
-              </a:spcAft>
-              <a:defRPr sz="1200" b="0">
-                <a:solidFill>
-                  <a:srgbClr val="225B9B"/>
-                </a:solidFill>
-                <a:latin typeface="DejaVu Sans Mono"/>
-              </a:defRPr>
-            </a:pPr>
-            <a:r>
-              <a:t>https://gazebosim.org/docs/latest/ros2_integration/</a:t>
-            </a:r>
-          </a:p>
-        </p:txBody>
-      </p:sp>
-      <p:sp>
-        <p:nvSpPr>
-          <p:cNvPr id="13" name="TextBox 12"/>
-          <p:cNvSpPr txBox="1"/>
-          <p:nvPr/>
-        </p:nvSpPr>
-        <p:spPr>
-          <a:xfrm>
-            <a:off x="914400" y="4828032"/>
-            <a:ext cx="3840480" cy="256032"/>
-          </a:xfrm>
-          <a:prstGeom prst="rect">
-            <a:avLst/>
-          </a:prstGeom>
-          <a:noFill/>
-        </p:spPr>
-        <p:txBody>
-          <a:bodyPr wrap="square" lIns="73152" rIns="73152" tIns="36576" bIns="36576">
-            <a:spAutoFit/>
-          </a:bodyPr>
-          <a:lstStyle/>
-          <a:p>
-            <a:pPr algn="l">
-              <a:spcAft>
-                <a:spcPts val="0"/>
-              </a:spcAft>
-              <a:defRPr sz="1700" b="1">
-                <a:solidFill>
-                  <a:srgbClr val="122C4E"/>
-                </a:solidFill>
-                <a:latin typeface="Noto Sans CJK KR"/>
-              </a:defRPr>
-            </a:pPr>
-            <a:r>
-              <a:t>ROS 2 Jazzy — rosbag2 Recording and Playback</a:t>
-            </a:r>
-          </a:p>
-        </p:txBody>
-      </p:sp>
-      <p:sp>
-        <p:nvSpPr>
-          <p:cNvPr id="14" name="TextBox 13"/>
-          <p:cNvSpPr txBox="1"/>
-          <p:nvPr/>
-        </p:nvSpPr>
-        <p:spPr>
-          <a:xfrm>
-            <a:off x="914400" y="5138928"/>
-            <a:ext cx="9966960" cy="256032"/>
-          </a:xfrm>
-          <a:prstGeom prst="rect">
-            <a:avLst/>
-          </a:prstGeom>
-          <a:noFill/>
-        </p:spPr>
-        <p:txBody>
-          <a:bodyPr wrap="square" lIns="73152" rIns="73152" tIns="36576" bIns="36576">
-            <a:spAutoFit/>
-          </a:bodyPr>
-          <a:lstStyle/>
-          <a:p>
-            <a:pPr algn="l">
-              <a:spcAft>
-                <a:spcPts val="0"/>
-              </a:spcAft>
-              <a:defRPr sz="1200" b="0">
-                <a:solidFill>
-                  <a:srgbClr val="225B9B"/>
-                </a:solidFill>
-                <a:latin typeface="DejaVu Sans Mono"/>
-              </a:defRPr>
-            </a:pPr>
-            <a:r>
-              <a:t>https://docs.ros.org/en/jazzy/Tutorials/Beginner-CLI-Tools/Recording-And-Playing-Back-Data/Recording-And-Playing-Back-Data.html</a:t>
+                  <a:srgbClr val="2A8B5A"/>
+                </a:solidFill>
+                <a:latin typeface="Noto Sans CJK KR"/>
+              </a:defRPr>
+            </a:pPr>
+            <a:r>
+              <a:t>다음 모듈을 시작하기 전, 이 슬라이드의 Complete와 다음 모듈의 Starter를 비교합니다.</a:t>
             </a:r>
           </a:p>
         </p:txBody>
@@ -16004,6 +16046,537 @@
 </p:sld>
 </file>
 
+<file path=ppt/slides/slide30.xml><?xml version="1.0" encoding="utf-8"?>
+<p:sld xmlns:a="http://schemas.openxmlformats.org/drawingml/2006/main" xmlns:p="http://schemas.openxmlformats.org/presentationml/2006/main" xmlns:r="http://schemas.openxmlformats.org/officeDocument/2006/relationships">
+  <p:cSld>
+    <p:spTree>
+      <p:nvGrpSpPr>
+        <p:cNvPr id="1" name=""/>
+        <p:cNvGrpSpPr/>
+        <p:nvPr/>
+      </p:nvGrpSpPr>
+      <p:grpSpPr/>
+      <p:sp>
+        <p:nvSpPr>
+          <p:cNvPr id="2" name="TextBox 1"/>
+          <p:cNvSpPr txBox="1"/>
+          <p:nvPr/>
+        </p:nvSpPr>
+        <p:spPr>
+          <a:xfrm>
+            <a:off x="566928" y="347472"/>
+            <a:ext cx="10881360" cy="438912"/>
+          </a:xfrm>
+          <a:prstGeom prst="rect">
+            <a:avLst/>
+          </a:prstGeom>
+          <a:noFill/>
+        </p:spPr>
+        <p:txBody>
+          <a:bodyPr wrap="square" lIns="73152" rIns="73152" tIns="36576" bIns="36576">
+            <a:spAutoFit/>
+          </a:bodyPr>
+          <a:lstStyle/>
+          <a:p>
+            <a:pPr algn="l">
+              <a:spcAft>
+                <a:spcPts val="0"/>
+              </a:spcAft>
+              <a:defRPr sz="3200" b="1">
+                <a:solidFill>
+                  <a:srgbClr val="122C4E"/>
+                </a:solidFill>
+                <a:latin typeface="Noto Sans CJK KR"/>
+              </a:defRPr>
+            </a:pPr>
+            <a:r>
+              <a:t>공식 참고 자료</a:t>
+            </a:r>
+          </a:p>
+        </p:txBody>
+      </p:sp>
+      <p:sp>
+        <p:nvSpPr>
+          <p:cNvPr id="3" name="TextBox 2"/>
+          <p:cNvSpPr txBox="1"/>
+          <p:nvPr/>
+        </p:nvSpPr>
+        <p:spPr>
+          <a:xfrm>
+            <a:off x="603504" y="859536"/>
+            <a:ext cx="10698480" cy="292608"/>
+          </a:xfrm>
+          <a:prstGeom prst="rect">
+            <a:avLst/>
+          </a:prstGeom>
+          <a:noFill/>
+        </p:spPr>
+        <p:txBody>
+          <a:bodyPr wrap="square" lIns="73152" rIns="73152" tIns="36576" bIns="36576">
+            <a:spAutoFit/>
+          </a:bodyPr>
+          <a:lstStyle/>
+          <a:p>
+            <a:pPr algn="l">
+              <a:spcAft>
+                <a:spcPts val="0"/>
+              </a:spcAft>
+              <a:defRPr sz="1700" b="0">
+                <a:solidFill>
+                  <a:srgbClr val="5C6672"/>
+                </a:solidFill>
+                <a:latin typeface="Noto Sans CJK KR"/>
+              </a:defRPr>
+            </a:pPr>
+            <a:r>
+              <a:t>본문 단계는 링크를 열지 않아도 완료할 수 있으며, 링크는 개념을 더 확인할 때만 사용합니다.</a:t>
+            </a:r>
+          </a:p>
+        </p:txBody>
+      </p:sp>
+      <p:sp>
+        <p:nvSpPr>
+          <p:cNvPr id="4" name="TextBox 3"/>
+          <p:cNvSpPr txBox="1"/>
+          <p:nvPr/>
+        </p:nvSpPr>
+        <p:spPr>
+          <a:xfrm>
+            <a:off x="530352" y="6510528"/>
+            <a:ext cx="7772400" cy="201168"/>
+          </a:xfrm>
+          <a:prstGeom prst="rect">
+            <a:avLst/>
+          </a:prstGeom>
+          <a:noFill/>
+        </p:spPr>
+        <p:txBody>
+          <a:bodyPr wrap="square" lIns="73152" rIns="73152" tIns="36576" bIns="36576">
+            <a:spAutoFit/>
+          </a:bodyPr>
+          <a:lstStyle/>
+          <a:p>
+            <a:pPr algn="l">
+              <a:spcAft>
+                <a:spcPts val="0"/>
+              </a:spcAft>
+              <a:defRPr sz="1000" b="0">
+                <a:solidFill>
+                  <a:srgbClr val="5C6672"/>
+                </a:solidFill>
+                <a:latin typeface="Noto Sans CJK KR"/>
+              </a:defRPr>
+            </a:pPr>
+            <a:r>
+              <a:t>ROS 2 Jazzy · Gazebo Harmonic · M08 · 따라 하기형 AGV 실습</a:t>
+            </a:r>
+          </a:p>
+        </p:txBody>
+      </p:sp>
+      <p:sp>
+        <p:nvSpPr>
+          <p:cNvPr id="5" name="TextBox 4"/>
+          <p:cNvSpPr txBox="1"/>
+          <p:nvPr/>
+        </p:nvSpPr>
+        <p:spPr>
+          <a:xfrm>
+            <a:off x="9144000" y="6510528"/>
+            <a:ext cx="2468880" cy="201168"/>
+          </a:xfrm>
+          <a:prstGeom prst="rect">
+            <a:avLst/>
+          </a:prstGeom>
+          <a:noFill/>
+        </p:spPr>
+        <p:txBody>
+          <a:bodyPr wrap="square" lIns="73152" rIns="73152" tIns="36576" bIns="36576">
+            <a:spAutoFit/>
+          </a:bodyPr>
+          <a:lstStyle/>
+          <a:p>
+            <a:pPr algn="r">
+              <a:spcAft>
+                <a:spcPts val="0"/>
+              </a:spcAft>
+              <a:defRPr sz="1000" b="0">
+                <a:solidFill>
+                  <a:srgbClr val="5C6672"/>
+                </a:solidFill>
+                <a:latin typeface="Noto Sans CJK KR"/>
+              </a:defRPr>
+            </a:pPr>
+            <a:r>
+              <a:t>명령·파일 경로는 슬라이드에서 복사 가능</a:t>
+            </a:r>
+          </a:p>
+        </p:txBody>
+      </p:sp>
+      <p:sp>
+        <p:nvSpPr>
+          <p:cNvPr id="6" name="Rounded Rectangle 5"/>
+          <p:cNvSpPr/>
+          <p:nvPr/>
+        </p:nvSpPr>
+        <p:spPr>
+          <a:xfrm>
+            <a:off x="658368" y="1554480"/>
+            <a:ext cx="10972800" cy="4526280"/>
+          </a:xfrm>
+          <a:prstGeom prst="roundRect">
+            <a:avLst/>
+          </a:prstGeom>
+          <a:solidFill>
+            <a:srgbClr val="F4F7FB"/>
+          </a:solidFill>
+          <a:ln>
+            <a:solidFill>
+              <a:srgbClr val="D7DFE9"/>
+            </a:solidFill>
+          </a:ln>
+        </p:spPr>
+        <p:style>
+          <a:lnRef idx="1">
+            <a:schemeClr val="accent1"/>
+          </a:lnRef>
+          <a:fillRef idx="3">
+            <a:schemeClr val="accent1"/>
+          </a:fillRef>
+          <a:effectRef idx="2">
+            <a:schemeClr val="accent1"/>
+          </a:effectRef>
+          <a:fontRef idx="minor">
+            <a:schemeClr val="lt1"/>
+          </a:fontRef>
+        </p:style>
+        <p:txBody>
+          <a:bodyPr rtlCol="0" anchor="ctr"/>
+          <a:lstStyle/>
+          <a:p>
+            <a:pPr algn="ctr"/>
+          </a:p>
+        </p:txBody>
+      </p:sp>
+      <p:sp>
+        <p:nvSpPr>
+          <p:cNvPr id="7" name="TextBox 6"/>
+          <p:cNvSpPr txBox="1"/>
+          <p:nvPr/>
+        </p:nvSpPr>
+        <p:spPr>
+          <a:xfrm>
+            <a:off x="914400" y="1773936"/>
+            <a:ext cx="3840480" cy="256032"/>
+          </a:xfrm>
+          <a:prstGeom prst="rect">
+            <a:avLst/>
+          </a:prstGeom>
+          <a:noFill/>
+        </p:spPr>
+        <p:txBody>
+          <a:bodyPr wrap="square" lIns="73152" rIns="73152" tIns="36576" bIns="36576">
+            <a:spAutoFit/>
+          </a:bodyPr>
+          <a:lstStyle/>
+          <a:p>
+            <a:pPr algn="l">
+              <a:spcAft>
+                <a:spcPts val="0"/>
+              </a:spcAft>
+              <a:defRPr sz="1700" b="1">
+                <a:solidFill>
+                  <a:srgbClr val="122C4E"/>
+                </a:solidFill>
+                <a:latin typeface="Noto Sans CJK KR"/>
+              </a:defRPr>
+            </a:pPr>
+            <a:r>
+              <a:t>ROS 2 Jazzy — Gazebo Simulation</a:t>
+            </a:r>
+          </a:p>
+        </p:txBody>
+      </p:sp>
+      <p:sp>
+        <p:nvSpPr>
+          <p:cNvPr id="8" name="TextBox 7"/>
+          <p:cNvSpPr txBox="1"/>
+          <p:nvPr/>
+        </p:nvSpPr>
+        <p:spPr>
+          <a:xfrm>
+            <a:off x="914400" y="2048255"/>
+            <a:ext cx="9966960" cy="475488"/>
+          </a:xfrm>
+          <a:prstGeom prst="rect">
+            <a:avLst/>
+          </a:prstGeom>
+          <a:noFill/>
+        </p:spPr>
+        <p:txBody>
+          <a:bodyPr wrap="square" lIns="73152" rIns="73152" tIns="36576" bIns="36576">
+            <a:spAutoFit/>
+          </a:bodyPr>
+          <a:lstStyle/>
+          <a:p>
+            <a:pPr algn="l">
+              <a:spcAft>
+                <a:spcPts val="0"/>
+              </a:spcAft>
+              <a:defRPr sz="1000" b="0">
+                <a:solidFill>
+                  <a:srgbClr val="225B9B"/>
+                </a:solidFill>
+                <a:latin typeface="DejaVu Sans Mono"/>
+              </a:defRPr>
+            </a:pPr>
+            <a:r>
+              <a:t>https://docs.ros.org/en/jazzy/Tutorials/Advanced/Simulators/Gazebo/Simulation-Gazebo.html</a:t>
+            </a:r>
+          </a:p>
+        </p:txBody>
+      </p:sp>
+      <p:sp>
+        <p:nvSpPr>
+          <p:cNvPr id="9" name="TextBox 8"/>
+          <p:cNvSpPr txBox="1"/>
+          <p:nvPr/>
+        </p:nvSpPr>
+        <p:spPr>
+          <a:xfrm>
+            <a:off x="914400" y="2852928"/>
+            <a:ext cx="3840480" cy="256032"/>
+          </a:xfrm>
+          <a:prstGeom prst="rect">
+            <a:avLst/>
+          </a:prstGeom>
+          <a:noFill/>
+        </p:spPr>
+        <p:txBody>
+          <a:bodyPr wrap="square" lIns="73152" rIns="73152" tIns="36576" bIns="36576">
+            <a:spAutoFit/>
+          </a:bodyPr>
+          <a:lstStyle/>
+          <a:p>
+            <a:pPr algn="l">
+              <a:spcAft>
+                <a:spcPts val="0"/>
+              </a:spcAft>
+              <a:defRPr sz="1700" b="1">
+                <a:solidFill>
+                  <a:srgbClr val="122C4E"/>
+                </a:solidFill>
+                <a:latin typeface="Noto Sans CJK KR"/>
+              </a:defRPr>
+            </a:pPr>
+            <a:r>
+              <a:t>ROS 2 Jazzy — URDF / robot_state_publisher</a:t>
+            </a:r>
+          </a:p>
+        </p:txBody>
+      </p:sp>
+      <p:sp>
+        <p:nvSpPr>
+          <p:cNvPr id="10" name="TextBox 9"/>
+          <p:cNvSpPr txBox="1"/>
+          <p:nvPr/>
+        </p:nvSpPr>
+        <p:spPr>
+          <a:xfrm>
+            <a:off x="914400" y="3127248"/>
+            <a:ext cx="9966960" cy="475488"/>
+          </a:xfrm>
+          <a:prstGeom prst="rect">
+            <a:avLst/>
+          </a:prstGeom>
+          <a:noFill/>
+        </p:spPr>
+        <p:txBody>
+          <a:bodyPr wrap="square" lIns="73152" rIns="73152" tIns="36576" bIns="36576">
+            <a:spAutoFit/>
+          </a:bodyPr>
+          <a:lstStyle/>
+          <a:p>
+            <a:pPr algn="l">
+              <a:spcAft>
+                <a:spcPts val="0"/>
+              </a:spcAft>
+              <a:defRPr sz="1000" b="0">
+                <a:solidFill>
+                  <a:srgbClr val="225B9B"/>
+                </a:solidFill>
+                <a:latin typeface="DejaVu Sans Mono"/>
+              </a:defRPr>
+            </a:pPr>
+            <a:r>
+              <a:t>https://docs.ros.org/en/jazzy/Tutorials/Intermediate/URDF/Using-URDF-with-Robot-State-Publisher-py.html</a:t>
+            </a:r>
+          </a:p>
+        </p:txBody>
+      </p:sp>
+      <p:sp>
+        <p:nvSpPr>
+          <p:cNvPr id="11" name="TextBox 10"/>
+          <p:cNvSpPr txBox="1"/>
+          <p:nvPr/>
+        </p:nvSpPr>
+        <p:spPr>
+          <a:xfrm>
+            <a:off x="914400" y="3931920"/>
+            <a:ext cx="3840480" cy="256032"/>
+          </a:xfrm>
+          <a:prstGeom prst="rect">
+            <a:avLst/>
+          </a:prstGeom>
+          <a:noFill/>
+        </p:spPr>
+        <p:txBody>
+          <a:bodyPr wrap="square" lIns="73152" rIns="73152" tIns="36576" bIns="36576">
+            <a:spAutoFit/>
+          </a:bodyPr>
+          <a:lstStyle/>
+          <a:p>
+            <a:pPr algn="l">
+              <a:spcAft>
+                <a:spcPts val="0"/>
+              </a:spcAft>
+              <a:defRPr sz="1700" b="1">
+                <a:solidFill>
+                  <a:srgbClr val="122C4E"/>
+                </a:solidFill>
+                <a:latin typeface="Noto Sans CJK KR"/>
+              </a:defRPr>
+            </a:pPr>
+            <a:r>
+              <a:t>Gazebo — ROS 2 Integration / ros_gz_bridge</a:t>
+            </a:r>
+          </a:p>
+        </p:txBody>
+      </p:sp>
+      <p:sp>
+        <p:nvSpPr>
+          <p:cNvPr id="12" name="TextBox 11"/>
+          <p:cNvSpPr txBox="1"/>
+          <p:nvPr/>
+        </p:nvSpPr>
+        <p:spPr>
+          <a:xfrm>
+            <a:off x="914400" y="4206240"/>
+            <a:ext cx="9966960" cy="475488"/>
+          </a:xfrm>
+          <a:prstGeom prst="rect">
+            <a:avLst/>
+          </a:prstGeom>
+          <a:noFill/>
+        </p:spPr>
+        <p:txBody>
+          <a:bodyPr wrap="square" lIns="73152" rIns="73152" tIns="36576" bIns="36576">
+            <a:spAutoFit/>
+          </a:bodyPr>
+          <a:lstStyle/>
+          <a:p>
+            <a:pPr algn="l">
+              <a:spcAft>
+                <a:spcPts val="0"/>
+              </a:spcAft>
+              <a:defRPr sz="1000" b="0">
+                <a:solidFill>
+                  <a:srgbClr val="225B9B"/>
+                </a:solidFill>
+                <a:latin typeface="DejaVu Sans Mono"/>
+              </a:defRPr>
+            </a:pPr>
+            <a:r>
+              <a:t>https://gazebosim.org/docs/latest/ros2_integration/</a:t>
+            </a:r>
+          </a:p>
+        </p:txBody>
+      </p:sp>
+      <p:sp>
+        <p:nvSpPr>
+          <p:cNvPr id="13" name="TextBox 12"/>
+          <p:cNvSpPr txBox="1"/>
+          <p:nvPr/>
+        </p:nvSpPr>
+        <p:spPr>
+          <a:xfrm>
+            <a:off x="914400" y="5010912"/>
+            <a:ext cx="3840480" cy="256032"/>
+          </a:xfrm>
+          <a:prstGeom prst="rect">
+            <a:avLst/>
+          </a:prstGeom>
+          <a:noFill/>
+        </p:spPr>
+        <p:txBody>
+          <a:bodyPr wrap="square" lIns="73152" rIns="73152" tIns="36576" bIns="36576">
+            <a:spAutoFit/>
+          </a:bodyPr>
+          <a:lstStyle/>
+          <a:p>
+            <a:pPr algn="l">
+              <a:spcAft>
+                <a:spcPts val="0"/>
+              </a:spcAft>
+              <a:defRPr sz="1700" b="1">
+                <a:solidFill>
+                  <a:srgbClr val="122C4E"/>
+                </a:solidFill>
+                <a:latin typeface="Noto Sans CJK KR"/>
+              </a:defRPr>
+            </a:pPr>
+            <a:r>
+              <a:t>ROS 2 Jazzy — rosbag2 Recording and Playback</a:t>
+            </a:r>
+          </a:p>
+        </p:txBody>
+      </p:sp>
+      <p:sp>
+        <p:nvSpPr>
+          <p:cNvPr id="14" name="TextBox 13"/>
+          <p:cNvSpPr txBox="1"/>
+          <p:nvPr/>
+        </p:nvSpPr>
+        <p:spPr>
+          <a:xfrm>
+            <a:off x="914400" y="5285232"/>
+            <a:ext cx="9966960" cy="475488"/>
+          </a:xfrm>
+          <a:prstGeom prst="rect">
+            <a:avLst/>
+          </a:prstGeom>
+          <a:noFill/>
+        </p:spPr>
+        <p:txBody>
+          <a:bodyPr wrap="square" lIns="73152" rIns="73152" tIns="36576" bIns="36576">
+            <a:spAutoFit/>
+          </a:bodyPr>
+          <a:lstStyle/>
+          <a:p>
+            <a:pPr algn="l">
+              <a:spcAft>
+                <a:spcPts val="0"/>
+              </a:spcAft>
+              <a:defRPr sz="1000" b="0">
+                <a:solidFill>
+                  <a:srgbClr val="225B9B"/>
+                </a:solidFill>
+                <a:latin typeface="DejaVu Sans Mono"/>
+              </a:defRPr>
+            </a:pPr>
+            <a:r>
+              <a:t>https://docs.ros.org/en/jazzy/Tutorials/Beginner-CLI-Tools/Recording-And-Playing-Back-Data/Recording-And-Playing-Back-Data.html</a:t>
+            </a:r>
+          </a:p>
+        </p:txBody>
+      </p:sp>
+    </p:spTree>
+  </p:cSld>
+  <p:clrMapOvr>
+    <a:masterClrMapping/>
+  </p:clrMapOvr>
+</p:sld>
+</file>
+
 <file path=ppt/slides/slide4.xml><?xml version="1.0" encoding="utf-8"?>
 <p:sld xmlns:a="http://schemas.openxmlformats.org/drawingml/2006/main" xmlns:p="http://schemas.openxmlformats.org/presentationml/2006/main" xmlns:r="http://schemas.openxmlformats.org/officeDocument/2006/relationships">
   <p:cSld>
@@ -18029,7 +18602,7 @@
               </a:defRPr>
             </a:pPr>
             <a:r>
-              <a:t>파일을 새로 만들고 저장한다 (1/10)</a:t>
+              <a:t>파일을 새로 만들고 저장한다 (1/11)</a:t>
             </a:r>
           </a:p>
         </p:txBody>
@@ -18204,7 +18777,7 @@
               </a:defRPr>
             </a:pPr>
             <a:r>
-              <a:t>현재 단계 3/13    |    현재 폴더 ~/agv_ws    |    현재 터미널</a:t>
+              <a:t>현재 단계 3/14    |    현재 폴더 ~/agv_ws    |    현재 터미널</a:t>
             </a:r>
           </a:p>
         </p:txBody>
@@ -18217,8 +18790,8 @@
         </p:nvSpPr>
         <p:spPr>
           <a:xfrm>
-            <a:off x="658368" y="1682496"/>
-            <a:ext cx="10972800" cy="347472"/>
+            <a:off x="658368" y="1627632"/>
+            <a:ext cx="10972800" cy="256032"/>
           </a:xfrm>
           <a:prstGeom prst="rect">
             <a:avLst/>
@@ -18235,7 +18808,7 @@
               <a:spcAft>
                 <a:spcPts val="0"/>
               </a:spcAft>
-              <a:defRPr sz="1700" b="1">
+              <a:defRPr sz="1500" b="1">
                 <a:solidFill>
                   <a:srgbClr val="122C4E"/>
                 </a:solidFill>
@@ -18256,8 +18829,8 @@
         </p:nvSpPr>
         <p:spPr>
           <a:xfrm>
-            <a:off x="658368" y="2103120"/>
-            <a:ext cx="10972800" cy="493776"/>
+            <a:off x="658368" y="1956816"/>
+            <a:ext cx="10972800" cy="603504"/>
           </a:xfrm>
           <a:prstGeom prst="rect">
             <a:avLst/>
@@ -18301,7 +18874,11 @@
               </a:defRPr>
             </a:pPr>
             <a:r>
-              <a:t>파일 생성/열기: mkdir -p ~/agv_ws/src/agv_gazebo/worlds    &amp;&amp;    nano ~/agv_ws/src/agv_gazebo/worlds/warehouse.sdf</a:t>
+              <a:t>파일 생성: mkdir -p ~/agv_ws/src/agv_gazebo/worlds</a:t>
+            </a:r>
+            <a:br/>
+            <a:r>
+              <a:t>파일 열기: nano ~/agv_ws/src/agv_gazebo/worlds/warehouse.sdf</a:t>
             </a:r>
           </a:p>
         </p:txBody>
@@ -18314,8 +18891,8 @@
         </p:nvSpPr>
         <p:spPr>
           <a:xfrm>
-            <a:off x="658368" y="2761488"/>
-            <a:ext cx="10972800" cy="3383280"/>
+            <a:off x="658368" y="2706624"/>
+            <a:ext cx="10972800" cy="3364992"/>
           </a:xfrm>
           <a:prstGeom prst="rect">
             <a:avLst/>
@@ -18405,14 +18982,6 @@
             <a:r>
               <a:t>    &lt;plugin filename="gz-sim-scene-broadcaster-system"</a:t>
             </a:r>
-            <a:br/>
-            <a:r>
-              <a:t>      name="gz::sim::systems::SceneBroadcaster"/&gt;</a:t>
-            </a:r>
-            <a:br/>
-            <a:r>
-              <a:t>    &lt;plugin filename="gz-sim-sensors-system" name="gz::sim::systems::Sensors"/&gt;</a:t>
-            </a:r>
           </a:p>
         </p:txBody>
       </p:sp>
@@ -18424,7 +18993,7 @@
         </p:nvSpPr>
         <p:spPr>
           <a:xfrm>
-            <a:off x="749808" y="6199632"/>
+            <a:off x="749808" y="6181344"/>
             <a:ext cx="10789920" cy="201168"/>
           </a:xfrm>
           <a:prstGeom prst="rect">
@@ -18450,7 +19019,7 @@
               </a:defRPr>
             </a:pPr>
             <a:r>
-              <a:t>파일 전체 1/10 · 이 슬라이드 다음에 같은 파일의 나머지 줄이 이어집니다.</a:t>
+              <a:t>파일 전체 1/11 · 이 슬라이드 다음에 같은 파일의 나머지 줄이 이어집니다.</a:t>
             </a:r>
           </a:p>
         </p:txBody>

--- a/blocks/B_robot_build/M08_gazebo_world_spawn/M08_Gazebo_World와_Robot_Spawn.pptx
+++ b/blocks/B_robot_build/M08_gazebo_world_spawn/M08_Gazebo_World와_Robot_Spawn.pptx
@@ -35,6 +35,8 @@
     <p:sldId id="283" r:id="rId35"/>
     <p:sldId id="284" r:id="rId36"/>
     <p:sldId id="285" r:id="rId37"/>
+    <p:sldId id="286" r:id="rId38"/>
+    <p:sldId id="287" r:id="rId39"/>
   </p:sldIdLst>
   <p:sldSz cx="12191999" cy="6858000" type="screen4x3"/>
   <p:notesSz cx="6858000" cy="9144000"/>
@@ -621,12 +623,12 @@
           <a:lstStyle/>
           <a:p>
             <a:r>
-              <a:t>[설명] ~/agv_ws/src/agv_gazebo/worlds/warehouse.sdf의 전체 파일을 2/11 구간으로 작성한다.</a:t>
-            </a:r>
-          </a:p>
-          <a:p>
-            <a:r>
-              <a:t>[실행] nano ~/agv_ws/src/agv_gazebo/worlds/warehouse.sdf</a:t>
+              <a:t>[설명] ~/ros2_curri/agv_ws/src/agv_description/curriculum_stages/M08/model.sdf의 전체 파일을 1/11 구간으로 작성한다.</a:t>
+            </a:r>
+          </a:p>
+          <a:p>
+            <a:r>
+              <a:t>[실행] nano ~/ros2_curri/agv_ws/src/agv_description/curriculum_stages/M08/model.sdf</a:t>
             </a:r>
           </a:p>
           <a:p>
@@ -711,12 +713,12 @@
           <a:lstStyle/>
           <a:p>
             <a:r>
-              <a:t>[설명] ~/agv_ws/src/agv_gazebo/worlds/warehouse.sdf의 전체 파일을 3/11 구간으로 작성한다.</a:t>
-            </a:r>
-          </a:p>
-          <a:p>
-            <a:r>
-              <a:t>[실행] nano ~/agv_ws/src/agv_gazebo/worlds/warehouse.sdf</a:t>
+              <a:t>[설명] ~/ros2_curri/agv_ws/src/agv_description/curriculum_stages/M08/model.sdf의 전체 파일을 2/11 구간으로 작성한다.</a:t>
+            </a:r>
+          </a:p>
+          <a:p>
+            <a:r>
+              <a:t>[실행] nano ~/ros2_curri/agv_ws/src/agv_description/curriculum_stages/M08/model.sdf</a:t>
             </a:r>
           </a:p>
           <a:p>
@@ -801,12 +803,12 @@
           <a:lstStyle/>
           <a:p>
             <a:r>
-              <a:t>[설명] ~/agv_ws/src/agv_gazebo/worlds/warehouse.sdf의 전체 파일을 4/11 구간으로 작성한다.</a:t>
-            </a:r>
-          </a:p>
-          <a:p>
-            <a:r>
-              <a:t>[실행] nano ~/agv_ws/src/agv_gazebo/worlds/warehouse.sdf</a:t>
+              <a:t>[설명] ~/ros2_curri/agv_ws/src/agv_description/curriculum_stages/M08/model.sdf의 전체 파일을 3/11 구간으로 작성한다.</a:t>
+            </a:r>
+          </a:p>
+          <a:p>
+            <a:r>
+              <a:t>[실행] nano ~/ros2_curri/agv_ws/src/agv_description/curriculum_stages/M08/model.sdf</a:t>
             </a:r>
           </a:p>
           <a:p>
@@ -891,12 +893,12 @@
           <a:lstStyle/>
           <a:p>
             <a:r>
-              <a:t>[설명] ~/agv_ws/src/agv_gazebo/worlds/warehouse.sdf의 전체 파일을 5/11 구간으로 작성한다.</a:t>
-            </a:r>
-          </a:p>
-          <a:p>
-            <a:r>
-              <a:t>[실행] nano ~/agv_ws/src/agv_gazebo/worlds/warehouse.sdf</a:t>
+              <a:t>[설명] ~/ros2_curri/agv_ws/src/agv_description/curriculum_stages/M08/model.sdf의 전체 파일을 4/11 구간으로 작성한다.</a:t>
+            </a:r>
+          </a:p>
+          <a:p>
+            <a:r>
+              <a:t>[실행] nano ~/ros2_curri/agv_ws/src/agv_description/curriculum_stages/M08/model.sdf</a:t>
             </a:r>
           </a:p>
           <a:p>
@@ -981,12 +983,12 @@
           <a:lstStyle/>
           <a:p>
             <a:r>
-              <a:t>[설명] ~/agv_ws/src/agv_gazebo/worlds/warehouse.sdf의 전체 파일을 6/11 구간으로 작성한다.</a:t>
-            </a:r>
-          </a:p>
-          <a:p>
-            <a:r>
-              <a:t>[실행] nano ~/agv_ws/src/agv_gazebo/worlds/warehouse.sdf</a:t>
+              <a:t>[설명] ~/ros2_curri/agv_ws/src/agv_description/curriculum_stages/M08/model.sdf의 전체 파일을 5/11 구간으로 작성한다.</a:t>
+            </a:r>
+          </a:p>
+          <a:p>
+            <a:r>
+              <a:t>[실행] nano ~/ros2_curri/agv_ws/src/agv_description/curriculum_stages/M08/model.sdf</a:t>
             </a:r>
           </a:p>
           <a:p>
@@ -1071,12 +1073,12 @@
           <a:lstStyle/>
           <a:p>
             <a:r>
-              <a:t>[설명] ~/agv_ws/src/agv_gazebo/worlds/warehouse.sdf의 전체 파일을 7/11 구간으로 작성한다.</a:t>
-            </a:r>
-          </a:p>
-          <a:p>
-            <a:r>
-              <a:t>[실행] nano ~/agv_ws/src/agv_gazebo/worlds/warehouse.sdf</a:t>
+              <a:t>[설명] ~/ros2_curri/agv_ws/src/agv_description/curriculum_stages/M08/model.sdf의 전체 파일을 6/11 구간으로 작성한다.</a:t>
+            </a:r>
+          </a:p>
+          <a:p>
+            <a:r>
+              <a:t>[실행] nano ~/ros2_curri/agv_ws/src/agv_description/curriculum_stages/M08/model.sdf</a:t>
             </a:r>
           </a:p>
           <a:p>
@@ -1161,12 +1163,12 @@
           <a:lstStyle/>
           <a:p>
             <a:r>
-              <a:t>[설명] ~/agv_ws/src/agv_gazebo/worlds/warehouse.sdf의 전체 파일을 8/11 구간으로 작성한다.</a:t>
-            </a:r>
-          </a:p>
-          <a:p>
-            <a:r>
-              <a:t>[실행] nano ~/agv_ws/src/agv_gazebo/worlds/warehouse.sdf</a:t>
+              <a:t>[설명] ~/ros2_curri/agv_ws/src/agv_description/curriculum_stages/M08/model.sdf의 전체 파일을 7/11 구간으로 작성한다.</a:t>
+            </a:r>
+          </a:p>
+          <a:p>
+            <a:r>
+              <a:t>[실행] nano ~/ros2_curri/agv_ws/src/agv_description/curriculum_stages/M08/model.sdf</a:t>
             </a:r>
           </a:p>
           <a:p>
@@ -1251,12 +1253,12 @@
           <a:lstStyle/>
           <a:p>
             <a:r>
-              <a:t>[설명] ~/agv_ws/src/agv_gazebo/worlds/warehouse.sdf의 전체 파일을 9/11 구간으로 작성한다.</a:t>
-            </a:r>
-          </a:p>
-          <a:p>
-            <a:r>
-              <a:t>[실행] nano ~/agv_ws/src/agv_gazebo/worlds/warehouse.sdf</a:t>
+              <a:t>[설명] ~/ros2_curri/agv_ws/src/agv_description/curriculum_stages/M08/model.sdf의 전체 파일을 8/11 구간으로 작성한다.</a:t>
+            </a:r>
+          </a:p>
+          <a:p>
+            <a:r>
+              <a:t>[실행] nano ~/ros2_curri/agv_ws/src/agv_description/curriculum_stages/M08/model.sdf</a:t>
             </a:r>
           </a:p>
           <a:p>
@@ -1341,12 +1343,12 @@
           <a:lstStyle/>
           <a:p>
             <a:r>
-              <a:t>[설명] ~/agv_ws/src/agv_gazebo/worlds/warehouse.sdf의 전체 파일을 10/11 구간으로 작성한다.</a:t>
-            </a:r>
-          </a:p>
-          <a:p>
-            <a:r>
-              <a:t>[실행] nano ~/agv_ws/src/agv_gazebo/worlds/warehouse.sdf</a:t>
+              <a:t>[설명] ~/ros2_curri/agv_ws/src/agv_description/curriculum_stages/M08/model.sdf의 전체 파일을 9/11 구간으로 작성한다.</a:t>
+            </a:r>
+          </a:p>
+          <a:p>
+            <a:r>
+              <a:t>[실행] nano ~/ros2_curri/agv_ws/src/agv_description/curriculum_stages/M08/model.sdf</a:t>
             </a:r>
           </a:p>
           <a:p>
@@ -1431,12 +1433,12 @@
           <a:lstStyle/>
           <a:p>
             <a:r>
-              <a:t>[설명] ~/agv_ws/src/agv_gazebo/worlds/warehouse.sdf의 전체 파일을 11/11 구간으로 작성한다.</a:t>
-            </a:r>
-          </a:p>
-          <a:p>
-            <a:r>
-              <a:t>[실행] nano ~/agv_ws/src/agv_gazebo/worlds/warehouse.sdf</a:t>
+              <a:t>[설명] ~/ros2_curri/agv_ws/src/agv_description/curriculum_stages/M08/model.sdf의 전체 파일을 10/11 구간으로 작성한다.</a:t>
+            </a:r>
+          </a:p>
+          <a:p>
+            <a:r>
+              <a:t>[실행] nano ~/ros2_curri/agv_ws/src/agv_description/curriculum_stages/M08/model.sdf</a:t>
             </a:r>
           </a:p>
           <a:p>
@@ -1611,12 +1613,12 @@
           <a:lstStyle/>
           <a:p>
             <a:r>
-              <a:t>[설명] ~/agv_ws/src/agv_gazebo/models/agv/model.config의 전체 파일을 1/1 구간으로 작성한다.</a:t>
-            </a:r>
-          </a:p>
-          <a:p>
-            <a:r>
-              <a:t>[실행] nano ~/agv_ws/src/agv_gazebo/models/agv/model.config</a:t>
+              <a:t>[설명] ~/ros2_curri/agv_ws/src/agv_description/curriculum_stages/M08/model.sdf의 전체 파일을 11/11 구간으로 작성한다.</a:t>
+            </a:r>
+          </a:p>
+          <a:p>
+            <a:r>
+              <a:t>[실행] nano ~/ros2_curri/agv_ws/src/agv_description/curriculum_stages/M08/model.sdf</a:t>
             </a:r>
           </a:p>
           <a:p>
@@ -1701,12 +1703,12 @@
           <a:lstStyle/>
           <a:p>
             <a:r>
-              <a:t>[설명] ~/agv_ws/src/agv_gazebo/launch/gazebo.launch.py의 전체 파일을 1/2 구간으로 작성한다.</a:t>
-            </a:r>
-          </a:p>
-          <a:p>
-            <a:r>
-              <a:t>[실행] nano ~/agv_ws/src/agv_gazebo/launch/gazebo.launch.py</a:t>
+              <a:t>[설명] ~/ros2_curri/agv_ws/src/agv_description/curriculum_stages/M08/warehouse.sdf의 전체 파일을 1/4 구간으로 작성한다.</a:t>
+            </a:r>
+          </a:p>
+          <a:p>
+            <a:r>
+              <a:t>[실행] nano ~/ros2_curri/agv_ws/src/agv_description/curriculum_stages/M08/warehouse.sdf</a:t>
             </a:r>
           </a:p>
           <a:p>
@@ -1791,12 +1793,12 @@
           <a:lstStyle/>
           <a:p>
             <a:r>
-              <a:t>[설명] ~/agv_ws/src/agv_gazebo/launch/gazebo.launch.py의 전체 파일을 2/2 구간으로 작성한다.</a:t>
-            </a:r>
-          </a:p>
-          <a:p>
-            <a:r>
-              <a:t>[실행] nano ~/agv_ws/src/agv_gazebo/launch/gazebo.launch.py</a:t>
+              <a:t>[설명] ~/ros2_curri/agv_ws/src/agv_description/curriculum_stages/M08/warehouse.sdf의 전체 파일을 2/4 구간으로 작성한다.</a:t>
+            </a:r>
+          </a:p>
+          <a:p>
+            <a:r>
+              <a:t>[실행] nano ~/ros2_curri/agv_ws/src/agv_description/curriculum_stages/M08/warehouse.sdf</a:t>
             </a:r>
           </a:p>
           <a:p>
@@ -1881,22 +1883,17 @@
           <a:lstStyle/>
           <a:p>
             <a:r>
-              <a:t>[설명] build/source/run을 생략 없이 실행한다.</a:t>
-            </a:r>
-          </a:p>
-          <a:p>
-            <a:r>
-              <a:t>[실행] cd ~/agv_ws &amp;&amp; source install/setup.bash</a:t>
-            </a:r>
-          </a:p>
-          <a:p>
-            <a:r>
-              <a:t>ros2 launch agv_gazebo gazebo.launch.py</a:t>
-            </a:r>
-          </a:p>
-          <a:p>
-            <a:r>
-              <a:t>[확인] ground·벽·박스가 있는 World에 AGV가 spawn되어 있는 Gazebo 화면을 확인한다.</a:t>
+              <a:t>[설명] ~/ros2_curri/agv_ws/src/agv_description/curriculum_stages/M08/warehouse.sdf의 전체 파일을 3/4 구간으로 작성한다.</a:t>
+            </a:r>
+          </a:p>
+          <a:p>
+            <a:r>
+              <a:t>[실행] nano ~/ros2_curri/agv_ws/src/agv_description/curriculum_stages/M08/warehouse.sdf</a:t>
+            </a:r>
+          </a:p>
+          <a:p>
+            <a:r>
+              <a:t>[확인] 코드를 저장하고 다음 코드 슬라이드 또는 build 단계로 이동한다.</a:t>
             </a:r>
           </a:p>
           <a:p>
@@ -1906,7 +1903,7 @@
           </a:p>
           <a:p>
             <a:r>
-              <a:t>[오류] 오류가 나면 현재 폴더, source, 파일 경로를 먼저 확인한다.</a:t>
+              <a:t>[오류] 들여쓰기·XML 태그·따옴표가 슬라이드와 정확히 같은지 확인한다.</a:t>
             </a:r>
           </a:p>
         </p:txBody>
@@ -1976,17 +1973,17 @@
           <a:lstStyle/>
           <a:p>
             <a:r>
-              <a:t>[설명] 실제 Ubuntu/ROS 2 환경에서 생성한 검증 화면이다.</a:t>
-            </a:r>
-          </a:p>
-          <a:p>
-            <a:r>
-              <a:t>[실행] 슬라이드의 명령 또는 파일 작성 단계를 진행한다.</a:t>
-            </a:r>
-          </a:p>
-          <a:p>
-            <a:r>
-              <a:t>[확인] 캡처의 명령과 다음 슬라이드의 검증 명령을 비교한다.</a:t>
+              <a:t>[설명] ~/ros2_curri/agv_ws/src/agv_description/curriculum_stages/M08/warehouse.sdf의 전체 파일을 4/4 구간으로 작성한다.</a:t>
+            </a:r>
+          </a:p>
+          <a:p>
+            <a:r>
+              <a:t>[실행] nano ~/ros2_curri/agv_ws/src/agv_description/curriculum_stages/M08/warehouse.sdf</a:t>
+            </a:r>
+          </a:p>
+          <a:p>
+            <a:r>
+              <a:t>[확인] 코드를 저장하고 다음 코드 슬라이드 또는 build 단계로 이동한다.</a:t>
             </a:r>
           </a:p>
           <a:p>
@@ -1996,7 +1993,7 @@
           </a:p>
           <a:p>
             <a:r>
-              <a:t>[오류] 오류가 나면 현재 폴더, source, 파일 경로를 먼저 확인한다.</a:t>
+              <a:t>[오류] 들여쓰기·XML 태그·따옴표가 슬라이드와 정확히 같은지 확인한다.</a:t>
             </a:r>
           </a:p>
         </p:txBody>
@@ -2066,17 +2063,22 @@
           <a:lstStyle/>
           <a:p>
             <a:r>
-              <a:t>[설명] 실제 Ubuntu/ROS 2 환경에서 생성한 검증 화면이다.</a:t>
-            </a:r>
-          </a:p>
-          <a:p>
-            <a:r>
-              <a:t>[실행] 슬라이드의 명령 또는 파일 작성 단계를 진행한다.</a:t>
-            </a:r>
-          </a:p>
-          <a:p>
-            <a:r>
-              <a:t>[확인] 캡처의 명령과 다음 슬라이드의 검증 명령을 비교한다.</a:t>
+              <a:t>[설명] build/source/run을 생략 없이 실행한다.</a:t>
+            </a:r>
+          </a:p>
+          <a:p>
+            <a:r>
+              <a:t>[실행] cd ~/ros2_curri/agv_ws</a:t>
+            </a:r>
+          </a:p>
+          <a:p>
+            <a:r>
+              <a:t>gz sim -r src/agv_description/curriculum_stages/M08/warehouse.sdf</a:t>
+            </a:r>
+          </a:p>
+          <a:p>
+            <a:r>
+              <a:t>[확인] ground·벽·박스가 있는 World에 AGV가 spawn되어 있는 Gazebo 화면을 확인한다.</a:t>
             </a:r>
           </a:p>
           <a:p>
@@ -2156,27 +2158,17 @@
           <a:lstStyle/>
           <a:p>
             <a:r>
-              <a:t>[설명] 검증 명령은 GUI 결과와 별도로 실행해 재현 가능한 완료 기준을 만든다.</a:t>
-            </a:r>
-          </a:p>
-          <a:p>
-            <a:r>
-              <a:t>[실행] gz sdf -k ~/agv_ws/src/agv_gazebo/models/agv/model.sdf</a:t>
-            </a:r>
-          </a:p>
-          <a:p>
-            <a:r>
-              <a:t>rg -n 'model://agv|&lt;world name=' ~/agv_ws/src/agv_gazebo/worlds/warehouse.sdf</a:t>
-            </a:r>
-          </a:p>
-          <a:p>
-            <a:r>
-              <a:t># 이어서 ros2 launch agv_gazebo gazebo.launch.py로 World를 연다.</a:t>
-            </a:r>
-          </a:p>
-          <a:p>
-            <a:r>
-              <a:t>[확인] ground·벽·박스가 있는 World에 AGV가 spawn되어 있는 Gazebo 화면을 확인한다.</a:t>
+              <a:t>[설명] 실제 Ubuntu/ROS 2 환경에서 생성한 검증 화면이다.</a:t>
+            </a:r>
+          </a:p>
+          <a:p>
+            <a:r>
+              <a:t>[실행] 슬라이드의 명령 또는 파일 작성 단계를 진행한다.</a:t>
+            </a:r>
+          </a:p>
+          <a:p>
+            <a:r>
+              <a:t>[확인] 캡처의 명령과 다음 슬라이드의 검증 명령을 비교한다.</a:t>
             </a:r>
           </a:p>
           <a:p>
@@ -2256,7 +2248,7 @@
           <a:lstStyle/>
           <a:p>
             <a:r>
-              <a:t>[설명] 오류를 대신 해결하지 말고 증상부터 우선 확인 순서대로 교육생이 실행하게 한다.</a:t>
+              <a:t>[설명] 실제 Ubuntu/ROS 2 환경에서 생성한 검증 화면이다.</a:t>
             </a:r>
           </a:p>
           <a:p>
@@ -2266,7 +2258,7 @@
           </a:p>
           <a:p>
             <a:r>
-              <a:t>[확인] 수정 뒤 첫 검증 명령을 다시 실행한다.</a:t>
+              <a:t>[확인] 캡처의 명령과 다음 슬라이드의 검증 명령을 비교한다.</a:t>
             </a:r>
           </a:p>
           <a:p>
@@ -2276,7 +2268,7 @@
           </a:p>
           <a:p>
             <a:r>
-              <a:t>[오류] 슬라이드의 두 대표 오류를 먼저 사용한다.</a:t>
+              <a:t>[오류] 오류가 나면 현재 폴더, source, 파일 경로를 먼저 확인한다.</a:t>
             </a:r>
           </a:p>
         </p:txBody>
@@ -2346,17 +2338,22 @@
           <a:lstStyle/>
           <a:p>
             <a:r>
-              <a:t>[설명] 교육생이 직접 한 값만 바꿔 원인과 결과를 연결하게 한다.</a:t>
-            </a:r>
-          </a:p>
-          <a:p>
-            <a:r>
-              <a:t>[실행] 슬라이드의 명령 또는 파일 작성 단계를 진행한다.</a:t>
-            </a:r>
-          </a:p>
-          <a:p>
-            <a:r>
-              <a:t>[확인] 원래 값과 변경 값을 모두 기록한다.</a:t>
+              <a:t>[설명] 검증 명령은 GUI 결과와 별도로 실행해 재현 가능한 완료 기준을 만든다.</a:t>
+            </a:r>
+          </a:p>
+          <a:p>
+            <a:r>
+              <a:t>[실행] gz sdf -k ~/ros2_curri/agv_ws/src/agv_description/curriculum_stages/M08/model.sdf</a:t>
+            </a:r>
+          </a:p>
+          <a:p>
+            <a:r>
+              <a:t>rg -n '&lt;sensor|DiffDrive|/cmd_vel|/odom' ~/ros2_curri/agv_ws/src/agv_description/curriculum_stages/M08/model.sdf</a:t>
+            </a:r>
+          </a:p>
+          <a:p>
+            <a:r>
+              <a:t>[확인] ground·벽·박스가 있는 World에 AGV가 spawn되어 있는 Gazebo 화면을 확인한다.</a:t>
             </a:r>
           </a:p>
           <a:p>
@@ -2436,7 +2433,7 @@
           <a:lstStyle/>
           <a:p>
             <a:r>
-              <a:t>[설명] 교육생이 Complete·캡처·로그를 저장했는지 확인하고 다음 모듈의 시작 상태를 읽는다.</a:t>
+              <a:t>[설명] 오류를 대신 해결하지 말고 증상부터 우선 확인 순서대로 교육생이 실행하게 한다.</a:t>
             </a:r>
           </a:p>
           <a:p>
@@ -2446,7 +2443,7 @@
           </a:p>
           <a:p>
             <a:r>
-              <a:t>[확인] M09 Differential Drive 시작 조건을 말할 수 있다.</a:t>
+              <a:t>[확인] 수정 뒤 첫 검증 명령을 다시 실행한다.</a:t>
             </a:r>
           </a:p>
           <a:p>
@@ -2456,7 +2453,7 @@
           </a:p>
           <a:p>
             <a:r>
-              <a:t>[오류] 오류가 나면 현재 폴더, source, 파일 경로를 먼저 확인한다.</a:t>
+              <a:t>[오류] 슬라이드의 두 대표 오류를 먼저 사용한다.</a:t>
             </a:r>
           </a:p>
         </p:txBody>
@@ -2531,7 +2528,7 @@
           </a:p>
           <a:p>
             <a:r>
-              <a:t>[실행] pwd; source /opt/ros/jazzy/setup.bash; source ~/agv_ws/install/setup.bash</a:t>
+              <a:t>[실행] pwd; source /opt/ros/jazzy/setup.bash; source ~/ros2_curri/agv_ws/install/setup.bash</a:t>
             </a:r>
           </a:p>
           <a:p>
@@ -2616,6 +2613,186 @@
           <a:lstStyle/>
           <a:p>
             <a:r>
+              <a:t>[설명] 교육생이 직접 한 값만 바꿔 원인과 결과를 연결하게 한다.</a:t>
+            </a:r>
+          </a:p>
+          <a:p>
+            <a:r>
+              <a:t>[실행] 슬라이드의 명령 또는 파일 작성 단계를 진행한다.</a:t>
+            </a:r>
+          </a:p>
+          <a:p>
+            <a:r>
+              <a:t>[확인] 원래 값과 변경 값을 모두 기록한다.</a:t>
+            </a:r>
+          </a:p>
+          <a:p>
+            <a:r>
+              <a:t>[멈춤] 교육생이 현재 체크포인트를 통과할 때까지 기다린다.</a:t>
+            </a:r>
+          </a:p>
+          <a:p>
+            <a:r>
+              <a:t>[오류] 오류가 나면 현재 폴더, source, 파일 경로를 먼저 확인한다.</a:t>
+            </a:r>
+          </a:p>
+        </p:txBody>
+      </p:sp>
+      <p:sp>
+        <p:nvSpPr>
+          <p:cNvPr id="4" name="Slide Number Placeholder 3"/>
+          <p:cNvSpPr>
+            <a:spLocks noGrp="1"/>
+          </p:cNvSpPr>
+          <p:nvPr>
+            <p:ph type="sldNum" idx="5" sz="quarter"/>
+          </p:nvPr>
+        </p:nvSpPr>
+        <p:spPr/>
+      </p:sp>
+    </p:spTree>
+  </p:cSld>
+  <p:clrMapOvr>
+    <a:masterClrMapping/>
+  </p:clrMapOvr>
+</p:notes>
+</file>
+
+<file path=ppt/notesSlides/notesSlide31.xml><?xml version="1.0" encoding="utf-8"?>
+<p:notes xmlns:a="http://schemas.openxmlformats.org/drawingml/2006/main" xmlns:p="http://schemas.openxmlformats.org/presentationml/2006/main" xmlns:r="http://schemas.openxmlformats.org/officeDocument/2006/relationships">
+  <p:cSld>
+    <p:spTree>
+      <p:nvGrpSpPr>
+        <p:cNvPr id="1" name=""/>
+        <p:cNvGrpSpPr/>
+        <p:nvPr/>
+      </p:nvGrpSpPr>
+      <p:grpSpPr>
+        <a:xfrm>
+          <a:off x="0" y="0"/>
+          <a:ext cx="0" cy="0"/>
+          <a:chOff x="0" y="0"/>
+          <a:chExt cx="0" cy="0"/>
+        </a:xfrm>
+      </p:grpSpPr>
+      <p:sp>
+        <p:nvSpPr>
+          <p:cNvPr id="2" name="Slide Image Placeholder 1"/>
+          <p:cNvSpPr>
+            <a:spLocks noGrp="1"/>
+          </p:cNvSpPr>
+          <p:nvPr>
+            <p:ph type="sldImg" idx="2"/>
+          </p:nvPr>
+        </p:nvSpPr>
+        <p:spPr/>
+      </p:sp>
+      <p:sp>
+        <p:nvSpPr>
+          <p:cNvPr id="3" name="Notes Placeholder 2"/>
+          <p:cNvSpPr>
+            <a:spLocks noGrp="1"/>
+          </p:cNvSpPr>
+          <p:nvPr>
+            <p:ph type="body" idx="3" sz="quarter"/>
+          </p:nvPr>
+        </p:nvSpPr>
+        <p:spPr/>
+        <p:txBody>
+          <a:bodyPr/>
+          <a:lstStyle/>
+          <a:p>
+            <a:r>
+              <a:t>[설명] 교육생이 Complete·캡처·로그를 저장했는지 확인하고 다음 모듈의 시작 상태를 읽는다.</a:t>
+            </a:r>
+          </a:p>
+          <a:p>
+            <a:r>
+              <a:t>[실행] 슬라이드의 명령 또는 파일 작성 단계를 진행한다.</a:t>
+            </a:r>
+          </a:p>
+          <a:p>
+            <a:r>
+              <a:t>[확인] M09 Differential Drive 시작 조건을 말할 수 있다.</a:t>
+            </a:r>
+          </a:p>
+          <a:p>
+            <a:r>
+              <a:t>[멈춤] 교육생이 현재 체크포인트를 통과할 때까지 기다린다.</a:t>
+            </a:r>
+          </a:p>
+          <a:p>
+            <a:r>
+              <a:t>[오류] 오류가 나면 현재 폴더, source, 파일 경로를 먼저 확인한다.</a:t>
+            </a:r>
+          </a:p>
+        </p:txBody>
+      </p:sp>
+      <p:sp>
+        <p:nvSpPr>
+          <p:cNvPr id="4" name="Slide Number Placeholder 3"/>
+          <p:cNvSpPr>
+            <a:spLocks noGrp="1"/>
+          </p:cNvSpPr>
+          <p:nvPr>
+            <p:ph type="sldNum" idx="5" sz="quarter"/>
+          </p:nvPr>
+        </p:nvSpPr>
+        <p:spPr/>
+      </p:sp>
+    </p:spTree>
+  </p:cSld>
+  <p:clrMapOvr>
+    <a:masterClrMapping/>
+  </p:clrMapOvr>
+</p:notes>
+</file>
+
+<file path=ppt/notesSlides/notesSlide32.xml><?xml version="1.0" encoding="utf-8"?>
+<p:notes xmlns:a="http://schemas.openxmlformats.org/drawingml/2006/main" xmlns:p="http://schemas.openxmlformats.org/presentationml/2006/main" xmlns:r="http://schemas.openxmlformats.org/officeDocument/2006/relationships">
+  <p:cSld>
+    <p:spTree>
+      <p:nvGrpSpPr>
+        <p:cNvPr id="1" name=""/>
+        <p:cNvGrpSpPr/>
+        <p:nvPr/>
+      </p:nvGrpSpPr>
+      <p:grpSpPr>
+        <a:xfrm>
+          <a:off x="0" y="0"/>
+          <a:ext cx="0" cy="0"/>
+          <a:chOff x="0" y="0"/>
+          <a:chExt cx="0" cy="0"/>
+        </a:xfrm>
+      </p:grpSpPr>
+      <p:sp>
+        <p:nvSpPr>
+          <p:cNvPr id="2" name="Slide Image Placeholder 1"/>
+          <p:cNvSpPr>
+            <a:spLocks noGrp="1"/>
+          </p:cNvSpPr>
+          <p:nvPr>
+            <p:ph type="sldImg" idx="2"/>
+          </p:nvPr>
+        </p:nvSpPr>
+        <p:spPr/>
+      </p:sp>
+      <p:sp>
+        <p:nvSpPr>
+          <p:cNvPr id="3" name="Notes Placeholder 2"/>
+          <p:cNvSpPr>
+            <a:spLocks noGrp="1"/>
+          </p:cNvSpPr>
+          <p:nvPr>
+            <p:ph type="body" idx="3" sz="quarter"/>
+          </p:nvPr>
+        </p:nvSpPr>
+        <p:spPr/>
+        <p:txBody>
+          <a:bodyPr/>
+          <a:lstStyle/>
+          <a:p>
+            <a:r>
               <a:t>[설명] 공식 문서는 버전 차이와 확장 학습을 확인할 때 사용한다.</a:t>
             </a:r>
           </a:p>
@@ -2976,22 +3153,22 @@
           <a:lstStyle/>
           <a:p>
             <a:r>
-              <a:t>[설명] CLI의 `gz sdf -k`는 standalone World에서 model:// URI를 해석하지 못할 수 있다. AGV model 자체를 먼저 검사한다.</a:t>
-            </a:r>
-          </a:p>
-          <a:p>
-            <a:r>
-              <a:t>[실행] cd ~/agv_ws</a:t>
-            </a:r>
-          </a:p>
-          <a:p>
-            <a:r>
-              <a:t>gz sdf -k src/agv_gazebo/models/agv/model.sdf</a:t>
-            </a:r>
-          </a:p>
-          <a:p>
-            <a:r>
-              <a:t>rg -n 'model://agv|&lt;world name=' src/agv_gazebo/worlds/warehouse.sdf</a:t>
+              <a:t>[설명] M08은 M07 물리 AGV를 World에 배치하는 단계이며 DiffDrive·Camera·LiDAR·IMU는 아직 넣지 않는다.</a:t>
+            </a:r>
+          </a:p>
+          <a:p>
+            <a:r>
+              <a:t>[실행] cd ~/ros2_curri/agv_ws</a:t>
+            </a:r>
+          </a:p>
+          <a:p>
+            <a:r>
+              <a:t>gz sdf -k src/agv_description/curriculum_stages/M08/model.sdf</a:t>
+            </a:r>
+          </a:p>
+          <a:p>
+            <a:r>
+              <a:t>rg -n 'model://agv|&lt;world name=' src/agv_description/curriculum_stages/M08/warehouse.sdf</a:t>
             </a:r>
           </a:p>
           <a:p>
@@ -3076,17 +3253,17 @@
           <a:lstStyle/>
           <a:p>
             <a:r>
-              <a:t>[설명] launch가 Gazebo resource path와 World 실행을 한 번에 준비하므로 World는 이 명령으로 검증한다.</a:t>
-            </a:r>
-          </a:p>
-          <a:p>
-            <a:r>
-              <a:t>[실행] source install/setup.bash</a:t>
-            </a:r>
-          </a:p>
-          <a:p>
-            <a:r>
-              <a:t>ros2 launch agv_gazebo gazebo.launch.py</a:t>
+              <a:t>[설명] M08 snapshot을 agv_gazebo models/worlds 경로에 복사한 뒤 Gazebo를 실행해 spawn만 확인한다.</a:t>
+            </a:r>
+          </a:p>
+          <a:p>
+            <a:r>
+              <a:t>[실행] gz sim -r src/agv_description/curriculum_stages/M08/warehouse.sdf</a:t>
+            </a:r>
+          </a:p>
+          <a:p>
+            <a:r>
+              <a:t># 이 단계에는 ROS bridge와 구동 topic이 없다.</a:t>
             </a:r>
           </a:p>
           <a:p>
@@ -3171,12 +3348,12 @@
           <a:lstStyle/>
           <a:p>
             <a:r>
-              <a:t>[설명] ~/agv_ws/src/agv_gazebo/worlds/warehouse.sdf의 전체 파일을 1/11 구간으로 작성한다.</a:t>
-            </a:r>
-          </a:p>
-          <a:p>
-            <a:r>
-              <a:t>[실행] nano ~/agv_ws/src/agv_gazebo/worlds/warehouse.sdf</a:t>
+              <a:t>[설명] ~/ros2_curri/agv_ws/src/agv_description/curriculum_stages/M08/model.config의 전체 파일을 1/1 구간으로 작성한다.</a:t>
+            </a:r>
+          </a:p>
+          <a:p>
+            <a:r>
+              <a:t>[실행] nano ~/ros2_curri/agv_ws/src/agv_description/curriculum_stages/M08/model.config</a:t>
             </a:r>
           </a:p>
           <a:p>
@@ -6564,7 +6741,7 @@
               </a:defRPr>
             </a:pPr>
             <a:r>
-              <a:t>파일을 계속 작성하고 저장한다 (2/11)</a:t>
+              <a:t>파일을 새로 만들고 저장한다 (1/11)</a:t>
             </a:r>
           </a:p>
         </p:txBody>
@@ -6603,7 +6780,7 @@
               </a:defRPr>
             </a:pPr>
             <a:r>
-              <a:t>~/agv_ws/src/agv_gazebo/worlds/warehouse.sdf</a:t>
+              <a:t>~/ros2_curri/agv_ws/src/agv_description/curriculum_stages/M08/model.sdf</a:t>
             </a:r>
           </a:p>
         </p:txBody>
@@ -6739,7 +6916,7 @@
               </a:defRPr>
             </a:pPr>
             <a:r>
-              <a:t>현재 단계 4/14    |    현재 폴더 ~/agv_ws    |    현재 터미널</a:t>
+              <a:t>현재 단계 4/15    |    현재 폴더 ~/ros2_curri/agv_ws    |    현재 터미널</a:t>
             </a:r>
           </a:p>
         </p:txBody>
@@ -6836,11 +7013,11 @@
               </a:defRPr>
             </a:pPr>
             <a:r>
-              <a:t>파일 생성: mkdir -p ~/agv_ws/src/agv_gazebo/worlds</a:t>
+              <a:t>파일 생성: mkdir -p ~/ros2_curri/agv_ws/src/agv_description/curriculum_stages/M08</a:t>
             </a:r>
             <a:br/>
             <a:r>
-              <a:t>파일 열기: nano ~/agv_ws/src/agv_gazebo/worlds/warehouse.sdf</a:t>
+              <a:t>파일 열기: nano ~/ros2_curri/agv_ws/src/agv_description/curriculum_stages/M08/model.sdf</a:t>
             </a:r>
           </a:p>
         </p:txBody>
@@ -6898,51 +7075,51 @@
               </a:defRPr>
             </a:pPr>
             <a:r>
-              <a:t>      name="gz::sim::systems::SceneBroadcaster"/&gt;</a:t>
+              <a:t>&lt;?xml version="1.0" ?&gt;</a:t>
             </a:r>
             <a:br/>
             <a:r>
-              <a:t>    &lt;plugin filename="gz-sim-sensors-system" name="gz::sim::systems::Sensors"/&gt;</a:t>
+              <a:t>&lt;!-- M08 spawn snapshot: physical links only; no DiffDrive and no Camera/LiDAR/IMU. --&gt;</a:t>
             </a:r>
             <a:br/>
             <a:r>
-              <a:t>    </a:t>
+              <a:t>&lt;sdf version="1.10"&gt;</a:t>
             </a:r>
             <a:br/>
             <a:r>
-              <a:t>  </a:t>
+              <a:t>  &lt;model name="agv"&gt;</a:t>
             </a:r>
             <a:br/>
             <a:r>
-              <a:t>    &lt;light type="directional" name="sun"&gt;</a:t>
+              <a:t>    &lt;link name="base_link"&gt;</a:t>
             </a:r>
             <a:br/>
             <a:r>
-              <a:t>      &lt;pose&gt;0 0 10 0 0 0&lt;/pose&gt;</a:t>
+              <a:t>      &lt;pose&gt;0 0 0.16 0 0 0&lt;/pose&gt;</a:t>
             </a:r>
             <a:br/>
             <a:r>
-              <a:t>      &lt;cast_shadows&gt;true&lt;/cast_shadows&gt;</a:t>
+              <a:t>      &lt;inertial&gt;</a:t>
             </a:r>
             <a:br/>
             <a:r>
-              <a:t>      &lt;direction&gt;-0.5 0.1 -0.9&lt;/direction&gt;</a:t>
+              <a:t>        &lt;mass&gt;12.0&lt;/mass&gt;</a:t>
             </a:r>
             <a:br/>
             <a:r>
-              <a:t>    &lt;/light&gt;</a:t>
+              <a:t>        &lt;inertia&gt;</a:t>
             </a:r>
             <a:br/>
             <a:r>
-              <a:t>    </a:t>
+              <a:t>          &lt;ixx&gt;0.20&lt;/ixx&gt;</a:t>
             </a:r>
             <a:br/>
             <a:r>
-              <a:t>  </a:t>
+              <a:t>          &lt;iyy&gt;0.40&lt;/iyy&gt;</a:t>
             </a:r>
             <a:br/>
             <a:r>
-              <a:t>    &lt;model name="ground"&gt;</a:t>
+              <a:t>          &lt;izz&gt;0.50&lt;/izz&gt;</a:t>
             </a:r>
           </a:p>
         </p:txBody>
@@ -6981,7 +7158,7 @@
               </a:defRPr>
             </a:pPr>
             <a:r>
-              <a:t>파일 전체 2/11 · 이 슬라이드 다음에 같은 파일의 나머지 줄이 이어집니다.</a:t>
+              <a:t>파일 전체 1/11 · 이 슬라이드 다음에 같은 파일의 나머지 줄이 이어집니다.</a:t>
             </a:r>
           </a:p>
         </p:txBody>
@@ -7038,7 +7215,7 @@
               </a:defRPr>
             </a:pPr>
             <a:r>
-              <a:t>파일을 계속 작성하고 저장한다 (3/11)</a:t>
+              <a:t>파일을 계속 작성하고 저장한다 (2/11)</a:t>
             </a:r>
           </a:p>
         </p:txBody>
@@ -7077,7 +7254,7 @@
               </a:defRPr>
             </a:pPr>
             <a:r>
-              <a:t>~/agv_ws/src/agv_gazebo/worlds/warehouse.sdf</a:t>
+              <a:t>~/ros2_curri/agv_ws/src/agv_description/curriculum_stages/M08/model.sdf</a:t>
             </a:r>
           </a:p>
         </p:txBody>
@@ -7213,7 +7390,7 @@
               </a:defRPr>
             </a:pPr>
             <a:r>
-              <a:t>현재 단계 5/14    |    현재 폴더 ~/agv_ws    |    현재 터미널</a:t>
+              <a:t>현재 단계 5/15    |    현재 폴더 ~/ros2_curri/agv_ws    |    현재 터미널</a:t>
             </a:r>
           </a:p>
         </p:txBody>
@@ -7310,11 +7487,11 @@
               </a:defRPr>
             </a:pPr>
             <a:r>
-              <a:t>파일 생성: mkdir -p ~/agv_ws/src/agv_gazebo/worlds</a:t>
+              <a:t>파일 생성: mkdir -p ~/ros2_curri/agv_ws/src/agv_description/curriculum_stages/M08</a:t>
             </a:r>
             <a:br/>
             <a:r>
-              <a:t>파일 열기: nano ~/agv_ws/src/agv_gazebo/worlds/warehouse.sdf</a:t>
+              <a:t>파일 열기: nano ~/ros2_curri/agv_ws/src/agv_description/curriculum_stages/M08/model.sdf</a:t>
             </a:r>
           </a:p>
         </p:txBody>
@@ -7372,51 +7549,51 @@
               </a:defRPr>
             </a:pPr>
             <a:r>
-              <a:t>      &lt;static&gt;true&lt;/static&gt;</a:t>
+              <a:t>        &lt;/inertia&gt;</a:t>
             </a:r>
             <a:br/>
             <a:r>
-              <a:t>      &lt;link name="link"&gt;</a:t>
+              <a:t>      &lt;/inertial&gt;</a:t>
             </a:r>
             <a:br/>
             <a:r>
-              <a:t>        &lt;collision name="collision"&gt;</a:t>
+              <a:t>      &lt;visual name="body"&gt;</a:t>
             </a:r>
             <a:br/>
             <a:r>
-              <a:t>          &lt;geometry&gt;</a:t>
+              <a:t>        &lt;geometry&gt;</a:t>
             </a:r>
             <a:br/>
             <a:r>
-              <a:t>            &lt;plane&gt;</a:t>
+              <a:t>          &lt;box&gt;</a:t>
             </a:r>
             <a:br/>
             <a:r>
-              <a:t>              &lt;normal&gt;0 0 1&lt;/normal&gt;</a:t>
+              <a:t>            &lt;size&gt;0.60 0.42 0.16&lt;/size&gt;</a:t>
             </a:r>
             <a:br/>
             <a:r>
-              <a:t>              &lt;size&gt;30 30&lt;/size&gt;</a:t>
+              <a:t>          &lt;/box&gt;</a:t>
             </a:r>
             <a:br/>
             <a:r>
-              <a:t>            &lt;/plane&gt;</a:t>
+              <a:t>        &lt;/geometry&gt;</a:t>
             </a:r>
             <a:br/>
             <a:r>
-              <a:t>          &lt;/geometry&gt;</a:t>
+              <a:t>      &lt;/visual&gt;</a:t>
             </a:r>
             <a:br/>
             <a:r>
-              <a:t>        &lt;/collision&gt;</a:t>
+              <a:t>      &lt;collision name="body_collision"&gt;</a:t>
             </a:r>
             <a:br/>
             <a:r>
-              <a:t>        &lt;visual name="visual"&gt;</a:t>
+              <a:t>        &lt;geometry&gt;</a:t>
             </a:r>
             <a:br/>
             <a:r>
-              <a:t>          &lt;geometry&gt;</a:t>
+              <a:t>          &lt;box&gt;</a:t>
             </a:r>
           </a:p>
         </p:txBody>
@@ -7455,7 +7632,7 @@
               </a:defRPr>
             </a:pPr>
             <a:r>
-              <a:t>파일 전체 3/11 · 이 슬라이드 다음에 같은 파일의 나머지 줄이 이어집니다.</a:t>
+              <a:t>파일 전체 2/11 · 이 슬라이드 다음에 같은 파일의 나머지 줄이 이어집니다.</a:t>
             </a:r>
           </a:p>
         </p:txBody>
@@ -7512,7 +7689,7 @@
               </a:defRPr>
             </a:pPr>
             <a:r>
-              <a:t>파일을 계속 작성하고 저장한다 (4/11)</a:t>
+              <a:t>파일을 계속 작성하고 저장한다 (3/11)</a:t>
             </a:r>
           </a:p>
         </p:txBody>
@@ -7551,7 +7728,7 @@
               </a:defRPr>
             </a:pPr>
             <a:r>
-              <a:t>~/agv_ws/src/agv_gazebo/worlds/warehouse.sdf</a:t>
+              <a:t>~/ros2_curri/agv_ws/src/agv_description/curriculum_stages/M08/model.sdf</a:t>
             </a:r>
           </a:p>
         </p:txBody>
@@ -7687,7 +7864,7 @@
               </a:defRPr>
             </a:pPr>
             <a:r>
-              <a:t>현재 단계 6/14    |    현재 폴더 ~/agv_ws    |    현재 터미널</a:t>
+              <a:t>현재 단계 6/15    |    현재 폴더 ~/ros2_curri/agv_ws    |    현재 터미널</a:t>
             </a:r>
           </a:p>
         </p:txBody>
@@ -7784,11 +7961,11 @@
               </a:defRPr>
             </a:pPr>
             <a:r>
-              <a:t>파일 생성: mkdir -p ~/agv_ws/src/agv_gazebo/worlds</a:t>
+              <a:t>파일 생성: mkdir -p ~/ros2_curri/agv_ws/src/agv_description/curriculum_stages/M08</a:t>
             </a:r>
             <a:br/>
             <a:r>
-              <a:t>파일 열기: nano ~/agv_ws/src/agv_gazebo/worlds/warehouse.sdf</a:t>
+              <a:t>파일 열기: nano ~/ros2_curri/agv_ws/src/agv_description/curriculum_stages/M08/model.sdf</a:t>
             </a:r>
           </a:p>
         </p:txBody>
@@ -7846,51 +8023,51 @@
               </a:defRPr>
             </a:pPr>
             <a:r>
-              <a:t>            &lt;plane&gt;</a:t>
+              <a:t>            &lt;size&gt;0.60 0.42 0.16&lt;/size&gt;</a:t>
             </a:r>
             <a:br/>
             <a:r>
-              <a:t>              &lt;normal&gt;0 0 1&lt;/normal&gt;</a:t>
+              <a:t>          &lt;/box&gt;</a:t>
             </a:r>
             <a:br/>
             <a:r>
-              <a:t>              &lt;size&gt;30 30&lt;/size&gt;</a:t>
+              <a:t>        &lt;/geometry&gt;</a:t>
             </a:r>
             <a:br/>
             <a:r>
-              <a:t>            &lt;/plane&gt;</a:t>
+              <a:t>      &lt;/collision&gt;</a:t>
             </a:r>
             <a:br/>
             <a:r>
-              <a:t>          &lt;/geometry&gt;</a:t>
+              <a:t>    &lt;/link&gt;</a:t>
             </a:r>
             <a:br/>
             <a:r>
-              <a:t>          &lt;material&gt;</a:t>
+              <a:t>    &lt;link name="left_wheel_link"&gt;</a:t>
             </a:r>
             <a:br/>
             <a:r>
-              <a:t>            &lt;diffuse&gt;0.65 0.65 0.65 1&lt;/diffuse&gt;</a:t>
+              <a:t>      &lt;pose relative_to="base_link"&gt;0 0.19 -0.08 1.5708 0 0&lt;/pose&gt;</a:t>
             </a:r>
             <a:br/>
             <a:r>
-              <a:t>          &lt;/material&gt;</a:t>
+              <a:t>      &lt;inertial&gt;</a:t>
             </a:r>
             <a:br/>
             <a:r>
-              <a:t>        &lt;/visual&gt;</a:t>
+              <a:t>        &lt;mass&gt;0.6&lt;/mass&gt;</a:t>
             </a:r>
             <a:br/>
             <a:r>
-              <a:t>      &lt;/link&gt;</a:t>
+              <a:t>        &lt;inertia&gt;</a:t>
             </a:r>
             <a:br/>
             <a:r>
-              <a:t>    &lt;/model&gt;</a:t>
+              <a:t>          &lt;ixx&gt;0.002&lt;/ixx&gt;</a:t>
             </a:r>
             <a:br/>
             <a:r>
-              <a:t>    </a:t>
+              <a:t>          &lt;iyy&gt;0.002&lt;/iyy&gt;</a:t>
             </a:r>
           </a:p>
         </p:txBody>
@@ -7929,7 +8106,7 @@
               </a:defRPr>
             </a:pPr>
             <a:r>
-              <a:t>파일 전체 4/11 · 이 슬라이드 다음에 같은 파일의 나머지 줄이 이어집니다.</a:t>
+              <a:t>파일 전체 3/11 · 이 슬라이드 다음에 같은 파일의 나머지 줄이 이어집니다.</a:t>
             </a:r>
           </a:p>
         </p:txBody>
@@ -7986,7 +8163,7 @@
               </a:defRPr>
             </a:pPr>
             <a:r>
-              <a:t>파일을 계속 작성하고 저장한다 (5/11)</a:t>
+              <a:t>파일을 계속 작성하고 저장한다 (4/11)</a:t>
             </a:r>
           </a:p>
         </p:txBody>
@@ -8025,7 +8202,7 @@
               </a:defRPr>
             </a:pPr>
             <a:r>
-              <a:t>~/agv_ws/src/agv_gazebo/worlds/warehouse.sdf</a:t>
+              <a:t>~/ros2_curri/agv_ws/src/agv_description/curriculum_stages/M08/model.sdf</a:t>
             </a:r>
           </a:p>
         </p:txBody>
@@ -8161,7 +8338,7 @@
               </a:defRPr>
             </a:pPr>
             <a:r>
-              <a:t>현재 단계 7/14    |    현재 폴더 ~/agv_ws    |    현재 터미널</a:t>
+              <a:t>현재 단계 7/15    |    현재 폴더 ~/ros2_curri/agv_ws    |    현재 터미널</a:t>
             </a:r>
           </a:p>
         </p:txBody>
@@ -8258,11 +8435,11 @@
               </a:defRPr>
             </a:pPr>
             <a:r>
-              <a:t>파일 생성: mkdir -p ~/agv_ws/src/agv_gazebo/worlds</a:t>
+              <a:t>파일 생성: mkdir -p ~/ros2_curri/agv_ws/src/agv_description/curriculum_stages/M08</a:t>
             </a:r>
             <a:br/>
             <a:r>
-              <a:t>파일 열기: nano ~/agv_ws/src/agv_gazebo/worlds/warehouse.sdf</a:t>
+              <a:t>파일 열기: nano ~/ros2_curri/agv_ws/src/agv_description/curriculum_stages/M08/model.sdf</a:t>
             </a:r>
           </a:p>
         </p:txBody>
@@ -8320,51 +8497,51 @@
               </a:defRPr>
             </a:pPr>
             <a:r>
-              <a:t>  </a:t>
+              <a:t>          &lt;izz&gt;0.001&lt;/izz&gt;</a:t>
             </a:r>
             <a:br/>
             <a:r>
-              <a:t>    &lt;model name="wall_north"&gt;</a:t>
+              <a:t>        &lt;/inertia&gt;</a:t>
             </a:r>
             <a:br/>
             <a:r>
-              <a:t>      &lt;static&gt;true&lt;/static&gt;</a:t>
+              <a:t>      &lt;/inertial&gt;</a:t>
             </a:r>
             <a:br/>
             <a:r>
-              <a:t>      &lt;pose&gt;0 4 1 0 0 0&lt;/pose&gt;</a:t>
+              <a:t>      &lt;visual name="wheel"&gt;</a:t>
             </a:r>
             <a:br/>
             <a:r>
-              <a:t>      &lt;link name="link"&gt;</a:t>
+              <a:t>        &lt;geometry&gt;</a:t>
             </a:r>
             <a:br/>
             <a:r>
-              <a:t>        &lt;collision name="c"&gt;</a:t>
+              <a:t>          &lt;cylinder&gt;</a:t>
             </a:r>
             <a:br/>
             <a:r>
-              <a:t>          &lt;geometry&gt;</a:t>
+              <a:t>            &lt;radius&gt;0.08&lt;/radius&gt;</a:t>
             </a:r>
             <a:br/>
             <a:r>
-              <a:t>            &lt;box&gt;</a:t>
+              <a:t>            &lt;length&gt;0.05&lt;/length&gt;</a:t>
             </a:r>
             <a:br/>
             <a:r>
-              <a:t>              &lt;size&gt;8 0.15 2&lt;/size&gt;</a:t>
+              <a:t>          &lt;/cylinder&gt;</a:t>
             </a:r>
             <a:br/>
             <a:r>
-              <a:t>            &lt;/box&gt;</a:t>
+              <a:t>        &lt;/geometry&gt;</a:t>
             </a:r>
             <a:br/>
             <a:r>
-              <a:t>          &lt;/geometry&gt;</a:t>
+              <a:t>      &lt;/visual&gt;</a:t>
             </a:r>
             <a:br/>
             <a:r>
-              <a:t>        &lt;/collision&gt;</a:t>
+              <a:t>      &lt;collision name="wheel_collision"&gt;</a:t>
             </a:r>
           </a:p>
         </p:txBody>
@@ -8403,7 +8580,7 @@
               </a:defRPr>
             </a:pPr>
             <a:r>
-              <a:t>파일 전체 5/11 · 이 슬라이드 다음에 같은 파일의 나머지 줄이 이어집니다.</a:t>
+              <a:t>파일 전체 4/11 · 이 슬라이드 다음에 같은 파일의 나머지 줄이 이어집니다.</a:t>
             </a:r>
           </a:p>
         </p:txBody>
@@ -8460,7 +8637,7 @@
               </a:defRPr>
             </a:pPr>
             <a:r>
-              <a:t>파일을 계속 작성하고 저장한다 (6/11)</a:t>
+              <a:t>파일을 계속 작성하고 저장한다 (5/11)</a:t>
             </a:r>
           </a:p>
         </p:txBody>
@@ -8499,7 +8676,7 @@
               </a:defRPr>
             </a:pPr>
             <a:r>
-              <a:t>~/agv_ws/src/agv_gazebo/worlds/warehouse.sdf</a:t>
+              <a:t>~/ros2_curri/agv_ws/src/agv_description/curriculum_stages/M08/model.sdf</a:t>
             </a:r>
           </a:p>
         </p:txBody>
@@ -8635,7 +8812,7 @@
               </a:defRPr>
             </a:pPr>
             <a:r>
-              <a:t>현재 단계 8/14    |    현재 폴더 ~/agv_ws    |    현재 터미널</a:t>
+              <a:t>현재 단계 8/15    |    현재 폴더 ~/ros2_curri/agv_ws    |    현재 터미널</a:t>
             </a:r>
           </a:p>
         </p:txBody>
@@ -8732,11 +8909,11 @@
               </a:defRPr>
             </a:pPr>
             <a:r>
-              <a:t>파일 생성: mkdir -p ~/agv_ws/src/agv_gazebo/worlds</a:t>
+              <a:t>파일 생성: mkdir -p ~/ros2_curri/agv_ws/src/agv_description/curriculum_stages/M08</a:t>
             </a:r>
             <a:br/>
             <a:r>
-              <a:t>파일 열기: nano ~/agv_ws/src/agv_gazebo/worlds/warehouse.sdf</a:t>
+              <a:t>파일 열기: nano ~/ros2_curri/agv_ws/src/agv_description/curriculum_stages/M08/model.sdf</a:t>
             </a:r>
           </a:p>
         </p:txBody>
@@ -8794,51 +8971,51 @@
               </a:defRPr>
             </a:pPr>
             <a:r>
-              <a:t>        &lt;visual name="v"&gt;</a:t>
+              <a:t>        &lt;geometry&gt;</a:t>
             </a:r>
             <a:br/>
             <a:r>
-              <a:t>          &lt;geometry&gt;</a:t>
+              <a:t>          &lt;cylinder&gt;</a:t>
             </a:r>
             <a:br/>
             <a:r>
-              <a:t>            &lt;box&gt;</a:t>
+              <a:t>            &lt;radius&gt;0.08&lt;/radius&gt;</a:t>
             </a:r>
             <a:br/>
             <a:r>
-              <a:t>              &lt;size&gt;8 0.15 2&lt;/size&gt;</a:t>
+              <a:t>            &lt;length&gt;0.05&lt;/length&gt;</a:t>
             </a:r>
             <a:br/>
             <a:r>
-              <a:t>            &lt;/box&gt;</a:t>
+              <a:t>          &lt;/cylinder&gt;</a:t>
             </a:r>
             <a:br/>
             <a:r>
-              <a:t>          &lt;/geometry&gt;</a:t>
+              <a:t>        &lt;/geometry&gt;</a:t>
             </a:r>
             <a:br/>
             <a:r>
-              <a:t>        &lt;/visual&gt;</a:t>
+              <a:t>        &lt;surface&gt;</a:t>
             </a:r>
             <a:br/>
             <a:r>
-              <a:t>      &lt;/link&gt;</a:t>
+              <a:t>          &lt;friction&gt;</a:t>
             </a:r>
             <a:br/>
             <a:r>
-              <a:t>    &lt;/model&gt;</a:t>
+              <a:t>            &lt;ode&gt;</a:t>
             </a:r>
             <a:br/>
             <a:r>
-              <a:t>    </a:t>
+              <a:t>              &lt;mu&gt;1.0&lt;/mu&gt;</a:t>
             </a:r>
             <a:br/>
             <a:r>
-              <a:t>  </a:t>
+              <a:t>              &lt;mu2&gt;1.0&lt;/mu2&gt;</a:t>
             </a:r>
             <a:br/>
             <a:r>
-              <a:t>    &lt;model name="obstacle"&gt;</a:t>
+              <a:t>            &lt;/ode&gt;</a:t>
             </a:r>
           </a:p>
         </p:txBody>
@@ -8877,7 +9054,7 @@
               </a:defRPr>
             </a:pPr>
             <a:r>
-              <a:t>파일 전체 6/11 · 이 슬라이드 다음에 같은 파일의 나머지 줄이 이어집니다.</a:t>
+              <a:t>파일 전체 5/11 · 이 슬라이드 다음에 같은 파일의 나머지 줄이 이어집니다.</a:t>
             </a:r>
           </a:p>
         </p:txBody>
@@ -8934,7 +9111,7 @@
               </a:defRPr>
             </a:pPr>
             <a:r>
-              <a:t>파일을 계속 작성하고 저장한다 (7/11)</a:t>
+              <a:t>파일을 계속 작성하고 저장한다 (6/11)</a:t>
             </a:r>
           </a:p>
         </p:txBody>
@@ -8973,7 +9150,7 @@
               </a:defRPr>
             </a:pPr>
             <a:r>
-              <a:t>~/agv_ws/src/agv_gazebo/worlds/warehouse.sdf</a:t>
+              <a:t>~/ros2_curri/agv_ws/src/agv_description/curriculum_stages/M08/model.sdf</a:t>
             </a:r>
           </a:p>
         </p:txBody>
@@ -9109,7 +9286,7 @@
               </a:defRPr>
             </a:pPr>
             <a:r>
-              <a:t>현재 단계 9/14    |    현재 폴더 ~/agv_ws    |    현재 터미널</a:t>
+              <a:t>현재 단계 9/15    |    현재 폴더 ~/ros2_curri/agv_ws    |    현재 터미널</a:t>
             </a:r>
           </a:p>
         </p:txBody>
@@ -9206,11 +9383,11 @@
               </a:defRPr>
             </a:pPr>
             <a:r>
-              <a:t>파일 생성: mkdir -p ~/agv_ws/src/agv_gazebo/worlds</a:t>
+              <a:t>파일 생성: mkdir -p ~/ros2_curri/agv_ws/src/agv_description/curriculum_stages/M08</a:t>
             </a:r>
             <a:br/>
             <a:r>
-              <a:t>파일 열기: nano ~/agv_ws/src/agv_gazebo/worlds/warehouse.sdf</a:t>
+              <a:t>파일 열기: nano ~/ros2_curri/agv_ws/src/agv_description/curriculum_stages/M08/model.sdf</a:t>
             </a:r>
           </a:p>
         </p:txBody>
@@ -9268,51 +9445,51 @@
               </a:defRPr>
             </a:pPr>
             <a:r>
-              <a:t>      &lt;static&gt;true&lt;/static&gt;</a:t>
+              <a:t>          &lt;/friction&gt;</a:t>
             </a:r>
             <a:br/>
             <a:r>
-              <a:t>      &lt;pose&gt;1.5 0 0.4 0 0 0&lt;/pose&gt;</a:t>
+              <a:t>        &lt;/surface&gt;</a:t>
             </a:r>
             <a:br/>
             <a:r>
-              <a:t>      &lt;link name="link"&gt;</a:t>
+              <a:t>      &lt;/collision&gt;</a:t>
             </a:r>
             <a:br/>
             <a:r>
-              <a:t>        &lt;collision name="c"&gt;</a:t>
+              <a:t>    &lt;/link&gt;</a:t>
             </a:r>
             <a:br/>
             <a:r>
-              <a:t>          &lt;geometry&gt;</a:t>
+              <a:t>    &lt;link name="right_wheel_link"&gt;</a:t>
             </a:r>
             <a:br/>
             <a:r>
-              <a:t>            &lt;box&gt;</a:t>
+              <a:t>      &lt;pose relative_to="base_link"&gt;0 -0.19 -0.08 1.5708 0 0&lt;/pose&gt;</a:t>
             </a:r>
             <a:br/>
             <a:r>
-              <a:t>              &lt;size&gt;0.5 0.5 0.8&lt;/size&gt;</a:t>
+              <a:t>      &lt;inertial&gt;</a:t>
             </a:r>
             <a:br/>
             <a:r>
-              <a:t>            &lt;/box&gt;</a:t>
+              <a:t>        &lt;mass&gt;0.6&lt;/mass&gt;</a:t>
             </a:r>
             <a:br/>
             <a:r>
-              <a:t>          &lt;/geometry&gt;</a:t>
+              <a:t>        &lt;inertia&gt;</a:t>
             </a:r>
             <a:br/>
             <a:r>
-              <a:t>        &lt;/collision&gt;</a:t>
+              <a:t>          &lt;ixx&gt;0.002&lt;/ixx&gt;</a:t>
             </a:r>
             <a:br/>
             <a:r>
-              <a:t>        &lt;visual name="v"&gt;</a:t>
+              <a:t>          &lt;iyy&gt;0.002&lt;/iyy&gt;</a:t>
             </a:r>
             <a:br/>
             <a:r>
-              <a:t>          &lt;geometry&gt;</a:t>
+              <a:t>          &lt;izz&gt;0.001&lt;/izz&gt;</a:t>
             </a:r>
           </a:p>
         </p:txBody>
@@ -9351,7 +9528,7 @@
               </a:defRPr>
             </a:pPr>
             <a:r>
-              <a:t>파일 전체 7/11 · 이 슬라이드 다음에 같은 파일의 나머지 줄이 이어집니다.</a:t>
+              <a:t>파일 전체 6/11 · 이 슬라이드 다음에 같은 파일의 나머지 줄이 이어집니다.</a:t>
             </a:r>
           </a:p>
         </p:txBody>
@@ -9408,7 +9585,7 @@
               </a:defRPr>
             </a:pPr>
             <a:r>
-              <a:t>파일을 계속 작성하고 저장한다 (8/11)</a:t>
+              <a:t>파일을 계속 작성하고 저장한다 (7/11)</a:t>
             </a:r>
           </a:p>
         </p:txBody>
@@ -9447,7 +9624,7 @@
               </a:defRPr>
             </a:pPr>
             <a:r>
-              <a:t>~/agv_ws/src/agv_gazebo/worlds/warehouse.sdf</a:t>
+              <a:t>~/ros2_curri/agv_ws/src/agv_description/curriculum_stages/M08/model.sdf</a:t>
             </a:r>
           </a:p>
         </p:txBody>
@@ -9583,7 +9760,7 @@
               </a:defRPr>
             </a:pPr>
             <a:r>
-              <a:t>현재 단계 10/14    |    현재 폴더 ~/agv_ws    |    현재 터미널</a:t>
+              <a:t>현재 단계 10/15    |    현재 폴더 ~/ros2_curri/agv_ws    |    현재 터미널</a:t>
             </a:r>
           </a:p>
         </p:txBody>
@@ -9680,11 +9857,11 @@
               </a:defRPr>
             </a:pPr>
             <a:r>
-              <a:t>파일 생성: mkdir -p ~/agv_ws/src/agv_gazebo/worlds</a:t>
+              <a:t>파일 생성: mkdir -p ~/ros2_curri/agv_ws/src/agv_description/curriculum_stages/M08</a:t>
             </a:r>
             <a:br/>
             <a:r>
-              <a:t>파일 열기: nano ~/agv_ws/src/agv_gazebo/worlds/warehouse.sdf</a:t>
+              <a:t>파일 열기: nano ~/ros2_curri/agv_ws/src/agv_description/curriculum_stages/M08/model.sdf</a:t>
             </a:r>
           </a:p>
         </p:txBody>
@@ -9742,51 +9919,51 @@
               </a:defRPr>
             </a:pPr>
             <a:r>
-              <a:t>            &lt;box&gt;</a:t>
+              <a:t>        &lt;/inertia&gt;</a:t>
             </a:r>
             <a:br/>
             <a:r>
-              <a:t>              &lt;size&gt;0.5 0.5 0.8&lt;/size&gt;</a:t>
+              <a:t>      &lt;/inertial&gt;</a:t>
             </a:r>
             <a:br/>
             <a:r>
-              <a:t>            &lt;/box&gt;</a:t>
+              <a:t>      &lt;visual name="wheel"&gt;</a:t>
             </a:r>
             <a:br/>
             <a:r>
-              <a:t>          &lt;/geometry&gt;</a:t>
+              <a:t>        &lt;geometry&gt;</a:t>
             </a:r>
             <a:br/>
             <a:r>
-              <a:t>          &lt;material&gt;</a:t>
+              <a:t>          &lt;cylinder&gt;</a:t>
             </a:r>
             <a:br/>
             <a:r>
-              <a:t>            &lt;diffuse&gt;0.9 0.7 0.1 1&lt;/diffuse&gt;</a:t>
+              <a:t>            &lt;radius&gt;0.08&lt;/radius&gt;</a:t>
             </a:r>
             <a:br/>
             <a:r>
-              <a:t>          &lt;/material&gt;</a:t>
+              <a:t>            &lt;length&gt;0.05&lt;/length&gt;</a:t>
             </a:r>
             <a:br/>
             <a:r>
-              <a:t>        &lt;/visual&gt;</a:t>
+              <a:t>          &lt;/cylinder&gt;</a:t>
             </a:r>
             <a:br/>
             <a:r>
-              <a:t>      &lt;/link&gt;</a:t>
+              <a:t>        &lt;/geometry&gt;</a:t>
             </a:r>
             <a:br/>
             <a:r>
-              <a:t>    &lt;/model&gt;</a:t>
+              <a:t>      &lt;/visual&gt;</a:t>
             </a:r>
             <a:br/>
             <a:r>
-              <a:t>    </a:t>
+              <a:t>      &lt;collision name="wheel_collision"&gt;</a:t>
             </a:r>
             <a:br/>
             <a:r>
-              <a:t>  </a:t>
+              <a:t>        &lt;geometry&gt;</a:t>
             </a:r>
           </a:p>
         </p:txBody>
@@ -9825,7 +10002,7 @@
               </a:defRPr>
             </a:pPr>
             <a:r>
-              <a:t>파일 전체 8/11 · 이 슬라이드 다음에 같은 파일의 나머지 줄이 이어집니다.</a:t>
+              <a:t>파일 전체 7/11 · 이 슬라이드 다음에 같은 파일의 나머지 줄이 이어집니다.</a:t>
             </a:r>
           </a:p>
         </p:txBody>
@@ -9882,7 +10059,7 @@
               </a:defRPr>
             </a:pPr>
             <a:r>
-              <a:t>파일을 계속 작성하고 저장한다 (9/11)</a:t>
+              <a:t>파일을 계속 작성하고 저장한다 (8/11)</a:t>
             </a:r>
           </a:p>
         </p:txBody>
@@ -9921,7 +10098,7 @@
               </a:defRPr>
             </a:pPr>
             <a:r>
-              <a:t>~/agv_ws/src/agv_gazebo/worlds/warehouse.sdf</a:t>
+              <a:t>~/ros2_curri/agv_ws/src/agv_description/curriculum_stages/M08/model.sdf</a:t>
             </a:r>
           </a:p>
         </p:txBody>
@@ -10057,7 +10234,7 @@
               </a:defRPr>
             </a:pPr>
             <a:r>
-              <a:t>현재 단계 11/14    |    현재 폴더 ~/agv_ws    |    현재 터미널</a:t>
+              <a:t>현재 단계 11/15    |    현재 폴더 ~/ros2_curri/agv_ws    |    현재 터미널</a:t>
             </a:r>
           </a:p>
         </p:txBody>
@@ -10154,11 +10331,11 @@
               </a:defRPr>
             </a:pPr>
             <a:r>
-              <a:t>파일 생성: mkdir -p ~/agv_ws/src/agv_gazebo/worlds</a:t>
+              <a:t>파일 생성: mkdir -p ~/ros2_curri/agv_ws/src/agv_description/curriculum_stages/M08</a:t>
             </a:r>
             <a:br/>
             <a:r>
-              <a:t>파일 열기: nano ~/agv_ws/src/agv_gazebo/worlds/warehouse.sdf</a:t>
+              <a:t>파일 열기: nano ~/ros2_curri/agv_ws/src/agv_description/curriculum_stages/M08/model.sdf</a:t>
             </a:r>
           </a:p>
         </p:txBody>
@@ -10216,51 +10393,51 @@
               </a:defRPr>
             </a:pPr>
             <a:r>
-              <a:t>    &lt;model name="target"&gt;</a:t>
+              <a:t>          &lt;cylinder&gt;</a:t>
             </a:r>
             <a:br/>
             <a:r>
-              <a:t>      &lt;static&gt;true&lt;/static&gt;</a:t>
+              <a:t>            &lt;radius&gt;0.08&lt;/radius&gt;</a:t>
             </a:r>
             <a:br/>
             <a:r>
-              <a:t>      &lt;pose&gt;3 1 0.5 0 0 0&lt;/pose&gt;</a:t>
+              <a:t>            &lt;length&gt;0.05&lt;/length&gt;</a:t>
             </a:r>
             <a:br/>
             <a:r>
-              <a:t>      &lt;link name="link"&gt;</a:t>
+              <a:t>          &lt;/cylinder&gt;</a:t>
             </a:r>
             <a:br/>
             <a:r>
-              <a:t>        &lt;collision name="c"&gt;</a:t>
+              <a:t>        &lt;/geometry&gt;</a:t>
             </a:r>
             <a:br/>
             <a:r>
-              <a:t>          &lt;geometry&gt;</a:t>
+              <a:t>        &lt;surface&gt;</a:t>
             </a:r>
             <a:br/>
             <a:r>
-              <a:t>            &lt;box&gt;</a:t>
+              <a:t>          &lt;friction&gt;</a:t>
             </a:r>
             <a:br/>
             <a:r>
-              <a:t>              &lt;size&gt;0.25 0.25 1&lt;/size&gt;</a:t>
+              <a:t>            &lt;ode&gt;</a:t>
             </a:r>
             <a:br/>
             <a:r>
-              <a:t>            &lt;/box&gt;</a:t>
+              <a:t>              &lt;mu&gt;1.0&lt;/mu&gt;</a:t>
             </a:r>
             <a:br/>
             <a:r>
-              <a:t>          &lt;/geometry&gt;</a:t>
+              <a:t>              &lt;mu2&gt;1.0&lt;/mu2&gt;</a:t>
             </a:r>
             <a:br/>
             <a:r>
-              <a:t>        &lt;/collision&gt;</a:t>
+              <a:t>            &lt;/ode&gt;</a:t>
             </a:r>
             <a:br/>
             <a:r>
-              <a:t>        &lt;visual name="v"&gt;</a:t>
+              <a:t>          &lt;/friction&gt;</a:t>
             </a:r>
           </a:p>
         </p:txBody>
@@ -10299,7 +10476,7 @@
               </a:defRPr>
             </a:pPr>
             <a:r>
-              <a:t>파일 전체 9/11 · 이 슬라이드 다음에 같은 파일의 나머지 줄이 이어집니다.</a:t>
+              <a:t>파일 전체 8/11 · 이 슬라이드 다음에 같은 파일의 나머지 줄이 이어집니다.</a:t>
             </a:r>
           </a:p>
         </p:txBody>
@@ -10356,7 +10533,7 @@
               </a:defRPr>
             </a:pPr>
             <a:r>
-              <a:t>파일을 계속 작성하고 저장한다 (10/11)</a:t>
+              <a:t>파일을 계속 작성하고 저장한다 (9/11)</a:t>
             </a:r>
           </a:p>
         </p:txBody>
@@ -10395,7 +10572,7 @@
               </a:defRPr>
             </a:pPr>
             <a:r>
-              <a:t>~/agv_ws/src/agv_gazebo/worlds/warehouse.sdf</a:t>
+              <a:t>~/ros2_curri/agv_ws/src/agv_description/curriculum_stages/M08/model.sdf</a:t>
             </a:r>
           </a:p>
         </p:txBody>
@@ -10531,7 +10708,7 @@
               </a:defRPr>
             </a:pPr>
             <a:r>
-              <a:t>현재 단계 12/14    |    현재 폴더 ~/agv_ws    |    현재 터미널</a:t>
+              <a:t>현재 단계 12/15    |    현재 폴더 ~/ros2_curri/agv_ws    |    현재 터미널</a:t>
             </a:r>
           </a:p>
         </p:txBody>
@@ -10628,11 +10805,11 @@
               </a:defRPr>
             </a:pPr>
             <a:r>
-              <a:t>파일 생성: mkdir -p ~/agv_ws/src/agv_gazebo/worlds</a:t>
+              <a:t>파일 생성: mkdir -p ~/ros2_curri/agv_ws/src/agv_description/curriculum_stages/M08</a:t>
             </a:r>
             <a:br/>
             <a:r>
-              <a:t>파일 열기: nano ~/agv_ws/src/agv_gazebo/worlds/warehouse.sdf</a:t>
+              <a:t>파일 열기: nano ~/ros2_curri/agv_ws/src/agv_description/curriculum_stages/M08/model.sdf</a:t>
             </a:r>
           </a:p>
         </p:txBody>
@@ -10690,51 +10867,51 @@
               </a:defRPr>
             </a:pPr>
             <a:r>
-              <a:t>          &lt;geometry&gt;</a:t>
+              <a:t>        &lt;/surface&gt;</a:t>
             </a:r>
             <a:br/>
             <a:r>
-              <a:t>            &lt;box&gt;</a:t>
+              <a:t>      &lt;/collision&gt;</a:t>
             </a:r>
             <a:br/>
             <a:r>
-              <a:t>              &lt;size&gt;0.25 0.25 1&lt;/size&gt;</a:t>
+              <a:t>    &lt;/link&gt;</a:t>
             </a:r>
             <a:br/>
             <a:r>
-              <a:t>            &lt;/box&gt;</a:t>
+              <a:t>    &lt;joint name="left_wheel_joint" type="revolute"&gt;</a:t>
             </a:r>
             <a:br/>
             <a:r>
-              <a:t>          &lt;/geometry&gt;</a:t>
+              <a:t>      &lt;parent&gt;base_link&lt;/parent&gt;</a:t>
             </a:r>
             <a:br/>
             <a:r>
-              <a:t>          &lt;material&gt;</a:t>
+              <a:t>      &lt;child&gt;left_wheel_link&lt;/child&gt;</a:t>
             </a:r>
             <a:br/>
             <a:r>
-              <a:t>            &lt;diffuse&gt;0.9 0.05 0.05 1&lt;/diffuse&gt;</a:t>
+              <a:t>      &lt;axis&gt;</a:t>
             </a:r>
             <a:br/>
             <a:r>
-              <a:t>          &lt;/material&gt;</a:t>
+              <a:t>        &lt;xyz&gt;0 1 0&lt;/xyz&gt;</a:t>
             </a:r>
             <a:br/>
             <a:r>
-              <a:t>        &lt;/visual&gt;</a:t>
+              <a:t>        &lt;limit&gt;</a:t>
             </a:r>
             <a:br/>
             <a:r>
-              <a:t>      &lt;/link&gt;</a:t>
+              <a:t>          &lt;lower&gt;-1e16&lt;/lower&gt;</a:t>
             </a:r>
             <a:br/>
             <a:r>
-              <a:t>    &lt;/model&gt;</a:t>
+              <a:t>          &lt;upper&gt;1e16&lt;/upper&gt;</a:t>
             </a:r>
             <a:br/>
             <a:r>
-              <a:t>    </a:t>
+              <a:t>        &lt;/limit&gt;</a:t>
             </a:r>
           </a:p>
         </p:txBody>
@@ -10773,7 +10950,7 @@
               </a:defRPr>
             </a:pPr>
             <a:r>
-              <a:t>파일 전체 10/11 · 이 슬라이드 다음에 같은 파일의 나머지 줄이 이어집니다.</a:t>
+              <a:t>파일 전체 9/11 · 이 슬라이드 다음에 같은 파일의 나머지 줄이 이어집니다.</a:t>
             </a:r>
           </a:p>
         </p:txBody>
@@ -10830,7 +11007,7 @@
               </a:defRPr>
             </a:pPr>
             <a:r>
-              <a:t>파일을 계속 작성하고 저장한다 (11/11)</a:t>
+              <a:t>파일을 계속 작성하고 저장한다 (10/11)</a:t>
             </a:r>
           </a:p>
         </p:txBody>
@@ -10869,7 +11046,7 @@
               </a:defRPr>
             </a:pPr>
             <a:r>
-              <a:t>~/agv_ws/src/agv_gazebo/worlds/warehouse.sdf</a:t>
+              <a:t>~/ros2_curri/agv_ws/src/agv_description/curriculum_stages/M08/model.sdf</a:t>
             </a:r>
           </a:p>
         </p:txBody>
@@ -11005,7 +11182,7 @@
               </a:defRPr>
             </a:pPr>
             <a:r>
-              <a:t>현재 단계 13/14    |    현재 폴더 ~/agv_ws    |    현재 터미널</a:t>
+              <a:t>현재 단계 13/15    |    현재 폴더 ~/ros2_curri/agv_ws    |    현재 터미널</a:t>
             </a:r>
           </a:p>
         </p:txBody>
@@ -11102,11 +11279,11 @@
               </a:defRPr>
             </a:pPr>
             <a:r>
-              <a:t>파일 생성: mkdir -p ~/agv_ws/src/agv_gazebo/worlds</a:t>
+              <a:t>파일 생성: mkdir -p ~/ros2_curri/agv_ws/src/agv_description/curriculum_stages/M08</a:t>
             </a:r>
             <a:br/>
             <a:r>
-              <a:t>파일 열기: nano ~/agv_ws/src/agv_gazebo/worlds/warehouse.sdf</a:t>
+              <a:t>파일 열기: nano ~/ros2_curri/agv_ws/src/agv_description/curriculum_stages/M08/model.sdf</a:t>
             </a:r>
           </a:p>
         </p:txBody>
@@ -11164,40 +11341,51 @@
               </a:defRPr>
             </a:pPr>
             <a:r>
-              <a:t>  </a:t>
+              <a:t>      &lt;/axis&gt;</a:t>
             </a:r>
             <a:br/>
             <a:r>
-              <a:t>    &lt;include&gt;</a:t>
+              <a:t>    &lt;/joint&gt;</a:t>
             </a:r>
             <a:br/>
             <a:r>
-              <a:t>      &lt;uri&gt;model://agv&lt;/uri&gt;</a:t>
+              <a:t>    &lt;joint name="right_wheel_joint" type="revolute"&gt;</a:t>
             </a:r>
             <a:br/>
             <a:r>
-              <a:t>      &lt;name&gt;agv&lt;/name&gt;</a:t>
+              <a:t>      &lt;parent&gt;base_link&lt;/parent&gt;</a:t>
             </a:r>
             <a:br/>
             <a:r>
-              <a:t>      &lt;pose&gt;0 0 0.08 0 0 0&lt;/pose&gt;</a:t>
+              <a:t>      &lt;child&gt;right_wheel_link&lt;/child&gt;</a:t>
             </a:r>
             <a:br/>
             <a:r>
-              <a:t>    &lt;/include&gt;</a:t>
+              <a:t>      &lt;axis&gt;</a:t>
             </a:r>
             <a:br/>
             <a:r>
-              <a:t>    </a:t>
+              <a:t>        &lt;xyz&gt;0 1 0&lt;/xyz&gt;</a:t>
             </a:r>
             <a:br/>
+            <a:r>
+              <a:t>        &lt;limit&gt;</a:t>
+            </a:r>
             <a:br/>
             <a:r>
-              <a:t>  &lt;/world&gt;</a:t>
+              <a:t>          &lt;lower&gt;-1e16&lt;/lower&gt;</a:t>
             </a:r>
             <a:br/>
             <a:r>
-              <a:t>&lt;/sdf&gt;</a:t>
+              <a:t>          &lt;upper&gt;1e16&lt;/upper&gt;</a:t>
+            </a:r>
+            <a:br/>
+            <a:r>
+              <a:t>        &lt;/limit&gt;</a:t>
+            </a:r>
+            <a:br/>
+            <a:r>
+              <a:t>      &lt;/axis&gt;</a:t>
             </a:r>
           </a:p>
         </p:txBody>
@@ -11236,7 +11424,7 @@
               </a:defRPr>
             </a:pPr>
             <a:r>
-              <a:t>파일 전체 11/11 · 이 슬라이드 다음에 같은 파일의 나머지 줄이 이어집니다.</a:t>
+              <a:t>파일 전체 10/11 · 이 슬라이드 다음에 같은 파일의 나머지 줄이 이어집니다.</a:t>
             </a:r>
           </a:p>
         </p:txBody>
@@ -11754,7 +11942,7 @@
               </a:defRPr>
             </a:pPr>
             <a:r>
-              <a:t>파일을 새로 만들고 저장한다 (1/1)</a:t>
+              <a:t>파일을 계속 작성하고 저장한다 (11/11)</a:t>
             </a:r>
           </a:p>
         </p:txBody>
@@ -11793,7 +11981,7 @@
               </a:defRPr>
             </a:pPr>
             <a:r>
-              <a:t>~/agv_ws/src/agv_gazebo/models/agv/model.config</a:t>
+              <a:t>~/ros2_curri/agv_ws/src/agv_description/curriculum_stages/M08/model.sdf</a:t>
             </a:r>
           </a:p>
         </p:txBody>
@@ -11929,7 +12117,7 @@
               </a:defRPr>
             </a:pPr>
             <a:r>
-              <a:t>현재 단계 14/15    |    현재 폴더 ~/agv_ws    |    현재 터미널</a:t>
+              <a:t>현재 단계 14/15    |    현재 폴더 ~/ros2_curri/agv_ws    |    현재 터미널</a:t>
             </a:r>
           </a:p>
         </p:txBody>
@@ -12026,11 +12214,11 @@
               </a:defRPr>
             </a:pPr>
             <a:r>
-              <a:t>파일 생성: mkdir -p ~/agv_ws/src/agv_gazebo/models/agv</a:t>
+              <a:t>파일 생성: mkdir -p ~/ros2_curri/agv_ws/src/agv_description/curriculum_stages/M08</a:t>
             </a:r>
             <a:br/>
             <a:r>
-              <a:t>파일 열기: nano ~/agv_ws/src/agv_gazebo/models/agv/model.config</a:t>
+              <a:t>파일 열기: nano ~/ros2_curri/agv_ws/src/agv_description/curriculum_stages/M08/model.sdf</a:t>
             </a:r>
           </a:p>
         </p:txBody>
@@ -12088,43 +12276,15 @@
               </a:defRPr>
             </a:pPr>
             <a:r>
-              <a:t>&lt;?xml version="1.0" ?&gt;</a:t>
+              <a:t>    &lt;/joint&gt;</a:t>
             </a:r>
             <a:br/>
             <a:r>
-              <a:t>&lt;model&gt;</a:t>
+              <a:t>  &lt;/model&gt;</a:t>
             </a:r>
             <a:br/>
             <a:r>
-              <a:t>  &lt;name&gt;agv&lt;/name&gt;</a:t>
-            </a:r>
-            <a:br/>
-            <a:r>
-              <a:t>  &lt;version&gt;1.0&lt;/version&gt;</a:t>
-            </a:r>
-            <a:br/>
-            <a:r>
-              <a:t>  &lt;sdf version="1.10"&gt;model.sdf&lt;/sdf&gt;</a:t>
-            </a:r>
-            <a:br/>
-            <a:r>
-              <a:t>  &lt;author&gt;</a:t>
-            </a:r>
-            <a:br/>
-            <a:r>
-              <a:t>    &lt;name&gt;AGV course&lt;/name&gt;</a:t>
-            </a:r>
-            <a:br/>
-            <a:r>
-              <a:t>  &lt;/author&gt;</a:t>
-            </a:r>
-            <a:br/>
-            <a:r>
-              <a:t>  &lt;description&gt;Two-wheel educational AGV.&lt;/description&gt;</a:t>
-            </a:r>
-            <a:br/>
-            <a:r>
-              <a:t>&lt;/model&gt;</a:t>
+              <a:t>&lt;/sdf&gt;</a:t>
             </a:r>
           </a:p>
         </p:txBody>
@@ -12163,7 +12323,7 @@
               </a:defRPr>
             </a:pPr>
             <a:r>
-              <a:t>파일 전체 1/1 · 이 슬라이드 다음에 같은 파일의 나머지 줄이 이어집니다.</a:t>
+              <a:t>파일 전체 11/11 · 이 슬라이드 다음에 같은 파일의 나머지 줄이 이어집니다.</a:t>
             </a:r>
           </a:p>
         </p:txBody>
@@ -12220,7 +12380,7 @@
               </a:defRPr>
             </a:pPr>
             <a:r>
-              <a:t>파일을 새로 만들고 저장한다 (1/2)</a:t>
+              <a:t>파일을 새로 만들고 저장한다 (1/4)</a:t>
             </a:r>
           </a:p>
         </p:txBody>
@@ -12259,7 +12419,7 @@
               </a:defRPr>
             </a:pPr>
             <a:r>
-              <a:t>~/agv_ws/src/agv_gazebo/launch/gazebo.launch.py</a:t>
+              <a:t>~/ros2_curri/agv_ws/src/agv_description/curriculum_stages/M08/warehouse.sdf</a:t>
             </a:r>
           </a:p>
         </p:txBody>
@@ -12395,7 +12555,7 @@
               </a:defRPr>
             </a:pPr>
             <a:r>
-              <a:t>현재 단계 15/17    |    현재 폴더 ~/agv_ws    |    현재 터미널</a:t>
+              <a:t>현재 단계 15/19    |    현재 폴더 ~/ros2_curri/agv_ws    |    현재 터미널</a:t>
             </a:r>
           </a:p>
         </p:txBody>
@@ -12492,11 +12652,11 @@
               </a:defRPr>
             </a:pPr>
             <a:r>
-              <a:t>파일 생성: mkdir -p ~/agv_ws/src/agv_gazebo/launch</a:t>
+              <a:t>파일 생성: mkdir -p ~/ros2_curri/agv_ws/src/agv_description/curriculum_stages/M08</a:t>
             </a:r>
             <a:br/>
             <a:r>
-              <a:t>파일 열기: nano ~/agv_ws/src/agv_gazebo/launch/gazebo.launch.py</a:t>
+              <a:t>파일 열기: nano ~/ros2_curri/agv_ws/src/agv_description/curriculum_stages/M08/warehouse.sdf</a:t>
             </a:r>
           </a:p>
         </p:txBody>
@@ -12554,48 +12714,51 @@
               </a:defRPr>
             </a:pPr>
             <a:r>
-              <a:t>import os</a:t>
+              <a:t>&lt;?xml version="1.0" ?&gt;</a:t>
             </a:r>
             <a:br/>
             <a:r>
-              <a:t>from ament_index_python.packages import get_package_share_directory</a:t>
+              <a:t>&lt;sdf version="1.10"&gt;</a:t>
             </a:r>
             <a:br/>
             <a:r>
-              <a:t>from launch import LaunchDescription</a:t>
+              <a:t>  &lt;world name="warehouse_m08"&gt;</a:t>
             </a:r>
             <a:br/>
             <a:r>
-              <a:t>from launch.actions import IncludeLaunchDescription, SetEnvironmentVariable</a:t>
+              <a:t>    &lt;gravity&gt;0 0 -9.8&lt;/gravity&gt;</a:t>
             </a:r>
             <a:br/>
             <a:r>
-              <a:t>from launch.launch_description_sources import PythonLaunchDescriptionSource</a:t>
+              <a:t>    &lt;plugin filename="gz-sim-physics-system" name="gz::sim::systems::Physics"/&gt;</a:t>
             </a:r>
             <a:br/>
             <a:r>
-              <a:t>from launch_ros.actions import Node</a:t>
+              <a:t>    &lt;plugin filename="gz-sim-user-commands-system"</a:t>
             </a:r>
             <a:br/>
+            <a:r>
+              <a:t>      name="gz::sim::systems::UserCommands"/&gt;</a:t>
+            </a:r>
             <a:br/>
             <a:r>
-              <a:t>def generate_launch_description():</a:t>
+              <a:t>    &lt;plugin filename="gz-sim-scene-broadcaster-system"</a:t>
             </a:r>
             <a:br/>
             <a:r>
-              <a:t>    share = get_package_share_directory('agv_gazebo')</a:t>
+              <a:t>      name="gz::sim::systems::SceneBroadcaster"/&gt;</a:t>
             </a:r>
             <a:br/>
             <a:r>
-              <a:t>    world = os.path.join(share, 'worlds', 'warehouse.sdf')</a:t>
+              <a:t>    &lt;light type="directional" name="sun"&gt;</a:t>
             </a:r>
             <a:br/>
             <a:r>
-              <a:t>    models = os.path.join(share, 'models')</a:t>
+              <a:t>      &lt;pose&gt;0 0 10 0 0 0&lt;/pose&gt;</a:t>
             </a:r>
             <a:br/>
             <a:r>
-              <a:t>    previous = os.environ.get('GZ_SIM_RESOURCE_PATH', '')</a:t>
+              <a:t>    &lt;/light&gt;</a:t>
             </a:r>
           </a:p>
         </p:txBody>
@@ -12634,7 +12797,7 @@
               </a:defRPr>
             </a:pPr>
             <a:r>
-              <a:t>파일 전체 1/2 · 이 슬라이드 다음에 같은 파일의 나머지 줄이 이어집니다.</a:t>
+              <a:t>파일 전체 1/4 · 이 슬라이드 다음에 같은 파일의 나머지 줄이 이어집니다.</a:t>
             </a:r>
           </a:p>
         </p:txBody>
@@ -12691,7 +12854,7 @@
               </a:defRPr>
             </a:pPr>
             <a:r>
-              <a:t>파일을 계속 작성하고 저장한다 (2/2)</a:t>
+              <a:t>파일을 계속 작성하고 저장한다 (2/4)</a:t>
             </a:r>
           </a:p>
         </p:txBody>
@@ -12730,7 +12893,7 @@
               </a:defRPr>
             </a:pPr>
             <a:r>
-              <a:t>~/agv_ws/src/agv_gazebo/launch/gazebo.launch.py</a:t>
+              <a:t>~/ros2_curri/agv_ws/src/agv_description/curriculum_stages/M08/warehouse.sdf</a:t>
             </a:r>
           </a:p>
         </p:txBody>
@@ -12866,7 +13029,7 @@
               </a:defRPr>
             </a:pPr>
             <a:r>
-              <a:t>현재 단계 16/17    |    현재 폴더 ~/agv_ws    |    현재 터미널</a:t>
+              <a:t>현재 단계 16/19    |    현재 폴더 ~/ros2_curri/agv_ws    |    현재 터미널</a:t>
             </a:r>
           </a:p>
         </p:txBody>
@@ -12963,11 +13126,11 @@
               </a:defRPr>
             </a:pPr>
             <a:r>
-              <a:t>파일 생성: mkdir -p ~/agv_ws/src/agv_gazebo/launch</a:t>
+              <a:t>파일 생성: mkdir -p ~/ros2_curri/agv_ws/src/agv_description/curriculum_stages/M08</a:t>
             </a:r>
             <a:br/>
             <a:r>
-              <a:t>파일 열기: nano ~/agv_ws/src/agv_gazebo/launch/gazebo.launch.py</a:t>
+              <a:t>파일 열기: nano ~/ros2_curri/agv_ws/src/agv_description/curriculum_stages/M08/warehouse.sdf</a:t>
             </a:r>
           </a:p>
         </p:txBody>
@@ -13025,31 +13188,51 @@
               </a:defRPr>
             </a:pPr>
             <a:r>
-              <a:t>    gz_launch = os.path.join(get_package_share_directory('ros_gz_sim'), 'launch', 'gz_sim.launch.py')</a:t>
+              <a:t>    &lt;model name="ground"&gt;</a:t>
             </a:r>
             <a:br/>
             <a:r>
-              <a:t>    return LaunchDescription([SetEnvironmentVariable('GZ_SIM_RESOURCE_PATH',</a:t>
+              <a:t>      &lt;static&gt;true&lt;/static&gt;</a:t>
             </a:r>
             <a:br/>
             <a:r>
-              <a:t>        models + (':' + previous if previous else '')),</a:t>
+              <a:t>      &lt;link name="link"&gt;</a:t>
             </a:r>
             <a:br/>
             <a:r>
-              <a:t>        IncludeLaunchDescription(PythonLaunchDescriptionSource(gz_launch),</a:t>
+              <a:t>        &lt;collision name="collision"&gt;</a:t>
             </a:r>
             <a:br/>
             <a:r>
-              <a:t>        launch_arguments={'gz_args': '-r ' + world}.items()), Node(package='ros_gz_bridge',</a:t>
+              <a:t>          &lt;geometry&gt;</a:t>
             </a:r>
             <a:br/>
             <a:r>
-              <a:t>         executable='parameter_bridge', parameters=[{'config_file': os.path.join(share,</a:t>
+              <a:t>            &lt;plane&gt;</a:t>
             </a:r>
             <a:br/>
             <a:r>
-              <a:t>        'config', 'bridge.yaml')}], output='screen')])</a:t>
+              <a:t>              &lt;normal&gt;0 0 1&lt;/normal&gt;</a:t>
+            </a:r>
+            <a:br/>
+            <a:r>
+              <a:t>              &lt;size&gt;30 30&lt;/size&gt;</a:t>
+            </a:r>
+            <a:br/>
+            <a:r>
+              <a:t>            &lt;/plane&gt;</a:t>
+            </a:r>
+            <a:br/>
+            <a:r>
+              <a:t>          &lt;/geometry&gt;</a:t>
+            </a:r>
+            <a:br/>
+            <a:r>
+              <a:t>        &lt;/collision&gt;</a:t>
+            </a:r>
+            <a:br/>
+            <a:r>
+              <a:t>        &lt;visual name="visual"&gt;</a:t>
             </a:r>
           </a:p>
         </p:txBody>
@@ -13088,7 +13271,7 @@
               </a:defRPr>
             </a:pPr>
             <a:r>
-              <a:t>파일 전체 2/2 · 이 슬라이드 다음에 같은 파일의 나머지 줄이 이어집니다.</a:t>
+              <a:t>파일 전체 2/4 · 이 슬라이드 다음에 같은 파일의 나머지 줄이 이어집니다.</a:t>
             </a:r>
           </a:p>
         </p:txBody>
@@ -13145,7 +13328,7 @@
               </a:defRPr>
             </a:pPr>
             <a:r>
-              <a:t>build → source → run 순서로 실행한다</a:t>
+              <a:t>파일을 계속 작성하고 저장한다 (3/4)</a:t>
             </a:r>
           </a:p>
         </p:txBody>
@@ -13184,7 +13367,7 @@
               </a:defRPr>
             </a:pPr>
             <a:r>
-              <a:t>새 파일 또는 수정 파일은 build와 source 뒤에만 실행 이름·설정에 반영됩니다.</a:t>
+              <a:t>~/ros2_curri/agv_ws/src/agv_description/curriculum_stages/M08/warehouse.sdf</a:t>
             </a:r>
           </a:p>
         </p:txBody>
@@ -13320,23 +13503,124 @@
               </a:defRPr>
             </a:pPr>
             <a:r>
-              <a:t>현재 단계 실행    |    현재 폴더 ~/agv_ws    |    현재 터미널</a:t>
-            </a:r>
-          </a:p>
-        </p:txBody>
-      </p:sp>
-      <p:sp>
-        <p:nvSpPr>
-          <p:cNvPr id="7" name="Rounded Rectangle 6"/>
+              <a:t>현재 단계 17/19    |    현재 폴더 ~/ros2_curri/agv_ws    |    현재 터미널</a:t>
+            </a:r>
+          </a:p>
+        </p:txBody>
+      </p:sp>
+      <p:sp>
+        <p:nvSpPr>
+          <p:cNvPr id="7" name="TextBox 6"/>
+          <p:cNvSpPr txBox="1"/>
+          <p:nvPr/>
+        </p:nvSpPr>
+        <p:spPr>
+          <a:xfrm>
+            <a:off x="658368" y="1627632"/>
+            <a:ext cx="10972800" cy="256032"/>
+          </a:xfrm>
+          <a:prstGeom prst="rect">
+            <a:avLst/>
+          </a:prstGeom>
+          <a:noFill/>
+        </p:spPr>
+        <p:txBody>
+          <a:bodyPr wrap="square" lIns="73152" rIns="73152" tIns="36576" bIns="36576">
+            <a:spAutoFit/>
+          </a:bodyPr>
+          <a:lstStyle/>
+          <a:p>
+            <a:pPr algn="l">
+              <a:spcAft>
+                <a:spcPts val="0"/>
+              </a:spcAft>
+              <a:defRPr sz="1500" b="1">
+                <a:solidFill>
+                  <a:srgbClr val="122C4E"/>
+                </a:solidFill>
+                <a:latin typeface="Noto Sans CJK KR"/>
+              </a:defRPr>
+            </a:pPr>
+            <a:r>
+              <a:t>이번 단계: 파일의 전체 내용을 중간 생략 없이 작성합니다. 아래 줄 범위를 끝까지 입력하세요.</a:t>
+            </a:r>
+          </a:p>
+        </p:txBody>
+      </p:sp>
+      <p:sp>
+        <p:nvSpPr>
+          <p:cNvPr id="8" name="Rectangle 7"/>
           <p:cNvSpPr/>
           <p:nvPr/>
         </p:nvSpPr>
         <p:spPr>
           <a:xfrm>
-            <a:off x="658368" y="1700784"/>
-            <a:ext cx="10972800" cy="3182112"/>
-          </a:xfrm>
-          <a:prstGeom prst="roundRect">
+            <a:off x="658368" y="1956816"/>
+            <a:ext cx="10972800" cy="603504"/>
+          </a:xfrm>
+          <a:prstGeom prst="rect">
+            <a:avLst/>
+          </a:prstGeom>
+          <a:solidFill>
+            <a:srgbClr val="F4F7FB"/>
+          </a:solidFill>
+          <a:ln>
+            <a:solidFill>
+              <a:srgbClr val="F4F7FB"/>
+            </a:solidFill>
+          </a:ln>
+        </p:spPr>
+        <p:style>
+          <a:lnRef idx="1">
+            <a:schemeClr val="accent1"/>
+          </a:lnRef>
+          <a:fillRef idx="3">
+            <a:schemeClr val="accent1"/>
+          </a:fillRef>
+          <a:effectRef idx="2">
+            <a:schemeClr val="accent1"/>
+          </a:effectRef>
+          <a:fontRef idx="minor">
+            <a:schemeClr val="lt1"/>
+          </a:fontRef>
+        </p:style>
+        <p:txBody>
+          <a:bodyPr rtlCol="0" anchor="ctr" wrap="square" lIns="73152" rIns="73152" tIns="36576" bIns="36576"/>
+          <a:lstStyle/>
+          <a:p>
+            <a:pPr algn="l">
+              <a:spcAft>
+                <a:spcPts val="0"/>
+              </a:spcAft>
+              <a:defRPr sz="1400" b="0">
+                <a:solidFill>
+                  <a:srgbClr val="122C4E"/>
+                </a:solidFill>
+                <a:latin typeface="DejaVu Sans Mono"/>
+              </a:defRPr>
+            </a:pPr>
+            <a:r>
+              <a:t>파일 생성: mkdir -p ~/ros2_curri/agv_ws/src/agv_description/curriculum_stages/M08</a:t>
+            </a:r>
+            <a:br/>
+            <a:r>
+              <a:t>파일 열기: nano ~/ros2_curri/agv_ws/src/agv_description/curriculum_stages/M08/warehouse.sdf</a:t>
+            </a:r>
+          </a:p>
+        </p:txBody>
+      </p:sp>
+      <p:sp>
+        <p:nvSpPr>
+          <p:cNvPr id="9" name="Rectangle 8"/>
+          <p:cNvSpPr/>
+          <p:nvPr/>
+        </p:nvSpPr>
+        <p:spPr>
+          <a:xfrm>
+            <a:off x="658368" y="2706624"/>
+            <a:ext cx="10972800" cy="3364992"/>
+          </a:xfrm>
+          <a:prstGeom prst="rect">
             <a:avLst/>
           </a:prstGeom>
           <a:solidFill>
@@ -13363,14 +13647,14 @@
           </a:fontRef>
         </p:style>
         <p:txBody>
-          <a:bodyPr rtlCol="0" anchor="ctr" wrap="square" lIns="73152" rIns="73152" tIns="36576" bIns="36576"/>
-          <a:lstStyle/>
-          <a:p>
-            <a:pPr algn="l">
-              <a:spcAft>
-                <a:spcPts val="0"/>
-              </a:spcAft>
-              <a:defRPr sz="1600" b="0">
+          <a:bodyPr rtlCol="0" anchor="ctr" wrap="square" lIns="164592" rIns="164592" tIns="109728" bIns="36576"/>
+          <a:lstStyle/>
+          <a:p>
+            <a:pPr algn="l">
+              <a:spcAft>
+                <a:spcPts val="0"/>
+              </a:spcAft>
+              <a:defRPr sz="1400" b="0">
                 <a:solidFill>
                   <a:srgbClr val="FFFFFF"/>
                 </a:solidFill>
@@ -13378,25 +13662,65 @@
               </a:defRPr>
             </a:pPr>
             <a:r>
-              <a:t>cd ~/agv_ws &amp;&amp; source install/setup.bash</a:t>
+              <a:t>          &lt;geometry&gt;</a:t>
             </a:r>
             <a:br/>
             <a:r>
-              <a:t>ros2 launch agv_gazebo gazebo.launch.py</a:t>
-            </a:r>
-          </a:p>
-        </p:txBody>
-      </p:sp>
-      <p:sp>
-        <p:nvSpPr>
-          <p:cNvPr id="8" name="TextBox 7"/>
+              <a:t>            &lt;plane&gt;</a:t>
+            </a:r>
+            <a:br/>
+            <a:r>
+              <a:t>              &lt;normal&gt;0 0 1&lt;/normal&gt;</a:t>
+            </a:r>
+            <a:br/>
+            <a:r>
+              <a:t>              &lt;size&gt;30 30&lt;/size&gt;</a:t>
+            </a:r>
+            <a:br/>
+            <a:r>
+              <a:t>            &lt;/plane&gt;</a:t>
+            </a:r>
+            <a:br/>
+            <a:r>
+              <a:t>          &lt;/geometry&gt;</a:t>
+            </a:r>
+            <a:br/>
+            <a:r>
+              <a:t>        &lt;/visual&gt;</a:t>
+            </a:r>
+            <a:br/>
+            <a:r>
+              <a:t>      &lt;/link&gt;</a:t>
+            </a:r>
+            <a:br/>
+            <a:r>
+              <a:t>    &lt;/model&gt;</a:t>
+            </a:r>
+            <a:br/>
+            <a:r>
+              <a:t>    &lt;include&gt;</a:t>
+            </a:r>
+            <a:br/>
+            <a:r>
+              <a:t>      &lt;uri&gt;model://agv&lt;/uri&gt;</a:t>
+            </a:r>
+            <a:br/>
+            <a:r>
+              <a:t>      &lt;name&gt;agv&lt;/name&gt;</a:t>
+            </a:r>
+          </a:p>
+        </p:txBody>
+      </p:sp>
+      <p:sp>
+        <p:nvSpPr>
+          <p:cNvPr id="10" name="TextBox 9"/>
           <p:cNvSpPr txBox="1"/>
           <p:nvPr/>
         </p:nvSpPr>
         <p:spPr>
           <a:xfrm>
-            <a:off x="786384" y="5239512"/>
-            <a:ext cx="1261872" cy="237744"/>
+            <a:off x="749808" y="6181344"/>
+            <a:ext cx="10789920" cy="201168"/>
           </a:xfrm>
           <a:prstGeom prst="rect">
             <a:avLst/>
@@ -13413,54 +13737,15 @@
               <a:spcAft>
                 <a:spcPts val="0"/>
               </a:spcAft>
-              <a:defRPr sz="1800" b="1">
-                <a:solidFill>
-                  <a:srgbClr val="2A8B5A"/>
-                </a:solidFill>
-                <a:latin typeface="Noto Sans CJK KR"/>
-              </a:defRPr>
-            </a:pPr>
-            <a:r>
-              <a:t>확인 기준</a:t>
-            </a:r>
-          </a:p>
-        </p:txBody>
-      </p:sp>
-      <p:sp>
-        <p:nvSpPr>
-          <p:cNvPr id="9" name="TextBox 8"/>
-          <p:cNvSpPr txBox="1"/>
-          <p:nvPr/>
-        </p:nvSpPr>
-        <p:spPr>
-          <a:xfrm>
-            <a:off x="786384" y="5532120"/>
-            <a:ext cx="10469880" cy="420624"/>
-          </a:xfrm>
-          <a:prstGeom prst="rect">
-            <a:avLst/>
-          </a:prstGeom>
-          <a:noFill/>
-        </p:spPr>
-        <p:txBody>
-          <a:bodyPr wrap="square" lIns="73152" rIns="73152" tIns="36576" bIns="36576">
-            <a:spAutoFit/>
-          </a:bodyPr>
-          <a:lstStyle/>
-          <a:p>
-            <a:pPr algn="l">
-              <a:spcAft>
-                <a:spcPts val="0"/>
-              </a:spcAft>
-              <a:defRPr sz="1800" b="0">
-                <a:solidFill>
-                  <a:srgbClr val="122C4E"/>
-                </a:solidFill>
-                <a:latin typeface="Noto Sans CJK KR"/>
-              </a:defRPr>
-            </a:pPr>
-            <a:r>
-              <a:t>ground·벽·박스가 있는 World에 AGV가 spawn되어 있는 Gazebo 화면을 확인한다.</a:t>
+              <a:defRPr sz="1000" b="0">
+                <a:solidFill>
+                  <a:srgbClr val="5C6672"/>
+                </a:solidFill>
+                <a:latin typeface="Noto Sans CJK KR"/>
+              </a:defRPr>
+            </a:pPr>
+            <a:r>
+              <a:t>파일 전체 3/4 · 이 슬라이드 다음에 같은 파일의 나머지 줄이 이어집니다.</a:t>
             </a:r>
           </a:p>
         </p:txBody>
@@ -13517,7 +13802,7 @@
               </a:defRPr>
             </a:pPr>
             <a:r>
-              <a:t>정상 결과: 실제 환경에서 확인한 출력</a:t>
+              <a:t>파일을 계속 작성하고 저장한다 (4/4)</a:t>
             </a:r>
           </a:p>
         </p:txBody>
@@ -13556,7 +13841,7 @@
               </a:defRPr>
             </a:pPr>
             <a:r>
-              <a:t>실제 ROS 2 환경의 파일·패키지·구성 검증 로그</a:t>
+              <a:t>~/ros2_curri/agv_ws/src/agv_description/curriculum_stages/M08/warehouse.sdf</a:t>
             </a:r>
           </a:p>
         </p:txBody>
@@ -13639,30 +13924,64 @@
           </a:p>
         </p:txBody>
       </p:sp>
-      <p:pic>
-        <p:nvPicPr>
-          <p:cNvPr id="6" name="Picture 5" descr="validation_terminal.png"/>
-          <p:cNvPicPr>
-            <a:picLocks noChangeAspect="1"/>
-          </p:cNvPicPr>
-          <p:nvPr/>
-        </p:nvPicPr>
-        <p:blipFill>
-          <a:blip r:embed="rId2"/>
-          <a:stretch>
-            <a:fillRect/>
-          </a:stretch>
-        </p:blipFill>
-        <p:spPr>
-          <a:xfrm>
-            <a:off x="790956" y="1884338"/>
-            <a:ext cx="10607040" cy="3738546"/>
-          </a:xfrm>
-          <a:prstGeom prst="rect">
-            <a:avLst/>
-          </a:prstGeom>
-        </p:spPr>
-      </p:pic>
+      <p:sp>
+        <p:nvSpPr>
+          <p:cNvPr id="6" name="Rectangle 5"/>
+          <p:cNvSpPr/>
+          <p:nvPr/>
+        </p:nvSpPr>
+        <p:spPr>
+          <a:xfrm>
+            <a:off x="566928" y="1188720"/>
+            <a:ext cx="11064240" cy="347472"/>
+          </a:xfrm>
+          <a:prstGeom prst="rect">
+            <a:avLst/>
+          </a:prstGeom>
+          <a:solidFill>
+            <a:srgbClr val="F4F7FB"/>
+          </a:solidFill>
+          <a:ln>
+            <a:solidFill>
+              <a:srgbClr val="F4F7FB"/>
+            </a:solidFill>
+          </a:ln>
+        </p:spPr>
+        <p:style>
+          <a:lnRef idx="1">
+            <a:schemeClr val="accent1"/>
+          </a:lnRef>
+          <a:fillRef idx="3">
+            <a:schemeClr val="accent1"/>
+          </a:fillRef>
+          <a:effectRef idx="2">
+            <a:schemeClr val="accent1"/>
+          </a:effectRef>
+          <a:fontRef idx="minor">
+            <a:schemeClr val="lt1"/>
+          </a:fontRef>
+        </p:style>
+        <p:txBody>
+          <a:bodyPr rtlCol="0" anchor="ctr" wrap="square" lIns="73152" rIns="73152" tIns="36576" bIns="36576"/>
+          <a:lstStyle/>
+          <a:p>
+            <a:pPr algn="l">
+              <a:spcAft>
+                <a:spcPts val="0"/>
+              </a:spcAft>
+              <a:defRPr sz="1300" b="1">
+                <a:solidFill>
+                  <a:srgbClr val="122C4E"/>
+                </a:solidFill>
+                <a:latin typeface="Noto Sans CJK KR"/>
+              </a:defRPr>
+            </a:pPr>
+            <a:r>
+              <a:t>현재 단계 18/19    |    현재 폴더 ~/ros2_curri/agv_ws    |    현재 터미널</a:t>
+            </a:r>
+          </a:p>
+        </p:txBody>
+      </p:sp>
       <p:sp>
         <p:nvSpPr>
           <p:cNvPr id="7" name="TextBox 6"/>
@@ -13671,8 +13990,8 @@
         </p:nvSpPr>
         <p:spPr>
           <a:xfrm>
-            <a:off x="777240" y="6217920"/>
-            <a:ext cx="10607040" cy="182880"/>
+            <a:off x="658368" y="1627632"/>
+            <a:ext cx="10972800" cy="256032"/>
           </a:xfrm>
           <a:prstGeom prst="rect">
             <a:avLst/>
@@ -13685,19 +14004,190 @@
           </a:bodyPr>
           <a:lstStyle/>
           <a:p>
-            <a:pPr algn="ctr">
-              <a:spcAft>
-                <a:spcPts val="0"/>
-              </a:spcAft>
-              <a:defRPr sz="1100" b="1">
-                <a:solidFill>
-                  <a:srgbClr val="2A8B5A"/>
-                </a:solidFill>
-                <a:latin typeface="Noto Sans CJK KR"/>
-              </a:defRPr>
-            </a:pPr>
-            <a:r>
-              <a:t>① 명령/설정  ② 정상 출력 또는 화면  ③ 다음 검증 명령으로 재확인</a:t>
+            <a:pPr algn="l">
+              <a:spcAft>
+                <a:spcPts val="0"/>
+              </a:spcAft>
+              <a:defRPr sz="1500" b="1">
+                <a:solidFill>
+                  <a:srgbClr val="122C4E"/>
+                </a:solidFill>
+                <a:latin typeface="Noto Sans CJK KR"/>
+              </a:defRPr>
+            </a:pPr>
+            <a:r>
+              <a:t>이번 단계: 파일의 전체 내용을 중간 생략 없이 작성합니다. 아래 줄 범위를 끝까지 입력하세요.</a:t>
+            </a:r>
+          </a:p>
+        </p:txBody>
+      </p:sp>
+      <p:sp>
+        <p:nvSpPr>
+          <p:cNvPr id="8" name="Rectangle 7"/>
+          <p:cNvSpPr/>
+          <p:nvPr/>
+        </p:nvSpPr>
+        <p:spPr>
+          <a:xfrm>
+            <a:off x="658368" y="1956816"/>
+            <a:ext cx="10972800" cy="603504"/>
+          </a:xfrm>
+          <a:prstGeom prst="rect">
+            <a:avLst/>
+          </a:prstGeom>
+          <a:solidFill>
+            <a:srgbClr val="F4F7FB"/>
+          </a:solidFill>
+          <a:ln>
+            <a:solidFill>
+              <a:srgbClr val="F4F7FB"/>
+            </a:solidFill>
+          </a:ln>
+        </p:spPr>
+        <p:style>
+          <a:lnRef idx="1">
+            <a:schemeClr val="accent1"/>
+          </a:lnRef>
+          <a:fillRef idx="3">
+            <a:schemeClr val="accent1"/>
+          </a:fillRef>
+          <a:effectRef idx="2">
+            <a:schemeClr val="accent1"/>
+          </a:effectRef>
+          <a:fontRef idx="minor">
+            <a:schemeClr val="lt1"/>
+          </a:fontRef>
+        </p:style>
+        <p:txBody>
+          <a:bodyPr rtlCol="0" anchor="ctr" wrap="square" lIns="73152" rIns="73152" tIns="36576" bIns="36576"/>
+          <a:lstStyle/>
+          <a:p>
+            <a:pPr algn="l">
+              <a:spcAft>
+                <a:spcPts val="0"/>
+              </a:spcAft>
+              <a:defRPr sz="1400" b="0">
+                <a:solidFill>
+                  <a:srgbClr val="122C4E"/>
+                </a:solidFill>
+                <a:latin typeface="DejaVu Sans Mono"/>
+              </a:defRPr>
+            </a:pPr>
+            <a:r>
+              <a:t>파일 생성: mkdir -p ~/ros2_curri/agv_ws/src/agv_description/curriculum_stages/M08</a:t>
+            </a:r>
+            <a:br/>
+            <a:r>
+              <a:t>파일 열기: nano ~/ros2_curri/agv_ws/src/agv_description/curriculum_stages/M08/warehouse.sdf</a:t>
+            </a:r>
+          </a:p>
+        </p:txBody>
+      </p:sp>
+      <p:sp>
+        <p:nvSpPr>
+          <p:cNvPr id="9" name="Rectangle 8"/>
+          <p:cNvSpPr/>
+          <p:nvPr/>
+        </p:nvSpPr>
+        <p:spPr>
+          <a:xfrm>
+            <a:off x="658368" y="2706624"/>
+            <a:ext cx="10972800" cy="3364992"/>
+          </a:xfrm>
+          <a:prstGeom prst="rect">
+            <a:avLst/>
+          </a:prstGeom>
+          <a:solidFill>
+            <a:srgbClr val="1D232D"/>
+          </a:solidFill>
+          <a:ln>
+            <a:solidFill>
+              <a:srgbClr val="1D232D"/>
+            </a:solidFill>
+          </a:ln>
+        </p:spPr>
+        <p:style>
+          <a:lnRef idx="1">
+            <a:schemeClr val="accent1"/>
+          </a:lnRef>
+          <a:fillRef idx="3">
+            <a:schemeClr val="accent1"/>
+          </a:fillRef>
+          <a:effectRef idx="2">
+            <a:schemeClr val="accent1"/>
+          </a:effectRef>
+          <a:fontRef idx="minor">
+            <a:schemeClr val="lt1"/>
+          </a:fontRef>
+        </p:style>
+        <p:txBody>
+          <a:bodyPr rtlCol="0" anchor="ctr" wrap="square" lIns="164592" rIns="164592" tIns="109728" bIns="36576"/>
+          <a:lstStyle/>
+          <a:p>
+            <a:pPr algn="l">
+              <a:spcAft>
+                <a:spcPts val="0"/>
+              </a:spcAft>
+              <a:defRPr sz="1400" b="0">
+                <a:solidFill>
+                  <a:srgbClr val="FFFFFF"/>
+                </a:solidFill>
+                <a:latin typeface="DejaVu Sans Mono"/>
+              </a:defRPr>
+            </a:pPr>
+            <a:r>
+              <a:t>      &lt;pose&gt;0 0 0.08 0 0 0&lt;/pose&gt;</a:t>
+            </a:r>
+            <a:br/>
+            <a:r>
+              <a:t>    &lt;/include&gt;</a:t>
+            </a:r>
+            <a:br/>
+            <a:r>
+              <a:t>  &lt;/world&gt;</a:t>
+            </a:r>
+            <a:br/>
+            <a:r>
+              <a:t>&lt;/sdf&gt;</a:t>
+            </a:r>
+          </a:p>
+        </p:txBody>
+      </p:sp>
+      <p:sp>
+        <p:nvSpPr>
+          <p:cNvPr id="10" name="TextBox 9"/>
+          <p:cNvSpPr txBox="1"/>
+          <p:nvPr/>
+        </p:nvSpPr>
+        <p:spPr>
+          <a:xfrm>
+            <a:off x="749808" y="6181344"/>
+            <a:ext cx="10789920" cy="201168"/>
+          </a:xfrm>
+          <a:prstGeom prst="rect">
+            <a:avLst/>
+          </a:prstGeom>
+          <a:noFill/>
+        </p:spPr>
+        <p:txBody>
+          <a:bodyPr wrap="square" lIns="73152" rIns="73152" tIns="36576" bIns="36576">
+            <a:spAutoFit/>
+          </a:bodyPr>
+          <a:lstStyle/>
+          <a:p>
+            <a:pPr algn="l">
+              <a:spcAft>
+                <a:spcPts val="0"/>
+              </a:spcAft>
+              <a:defRPr sz="1000" b="0">
+                <a:solidFill>
+                  <a:srgbClr val="5C6672"/>
+                </a:solidFill>
+                <a:latin typeface="Noto Sans CJK KR"/>
+              </a:defRPr>
+            </a:pPr>
+            <a:r>
+              <a:t>파일 전체 4/4 · 이 슬라이드 다음에 같은 파일의 나머지 줄이 이어집니다.</a:t>
             </a:r>
           </a:p>
         </p:txBody>
@@ -13754,7 +14244,7 @@
               </a:defRPr>
             </a:pPr>
             <a:r>
-              <a:t>정상 결과: 실제 환경에서 확인한 출력</a:t>
+              <a:t>build → source → run 순서로 실행한다</a:t>
             </a:r>
           </a:p>
         </p:txBody>
@@ -13793,7 +14283,7 @@
               </a:defRPr>
             </a:pPr>
             <a:r>
-              <a:t>실제 Gazebo Sim에서 warehouse World에 spawn된 AGV</a:t>
+              <a:t>새 파일 또는 수정 파일은 build와 source 뒤에만 실행 이름·설정에 반영됩니다.</a:t>
             </a:r>
           </a:p>
         </p:txBody>
@@ -13876,40 +14366,136 @@
           </a:p>
         </p:txBody>
       </p:sp>
-      <p:pic>
-        <p:nvPicPr>
-          <p:cNvPr id="6" name="Picture 5" descr="gazebo_agv_actual.png"/>
-          <p:cNvPicPr>
-            <a:picLocks noChangeAspect="1"/>
-          </p:cNvPicPr>
-          <p:nvPr/>
-        </p:nvPicPr>
-        <p:blipFill>
-          <a:blip r:embed="rId2"/>
-          <a:stretch>
-            <a:fillRect/>
-          </a:stretch>
-        </p:blipFill>
-        <p:spPr>
-          <a:xfrm>
-            <a:off x="3385904" y="1353312"/>
-            <a:ext cx="5417142" cy="4800600"/>
-          </a:xfrm>
-          <a:prstGeom prst="rect">
-            <a:avLst/>
-          </a:prstGeom>
-        </p:spPr>
-      </p:pic>
-      <p:sp>
-        <p:nvSpPr>
-          <p:cNvPr id="7" name="TextBox 6"/>
+      <p:sp>
+        <p:nvSpPr>
+          <p:cNvPr id="6" name="Rectangle 5"/>
+          <p:cNvSpPr/>
+          <p:nvPr/>
+        </p:nvSpPr>
+        <p:spPr>
+          <a:xfrm>
+            <a:off x="566928" y="1188720"/>
+            <a:ext cx="11064240" cy="347472"/>
+          </a:xfrm>
+          <a:prstGeom prst="rect">
+            <a:avLst/>
+          </a:prstGeom>
+          <a:solidFill>
+            <a:srgbClr val="F4F7FB"/>
+          </a:solidFill>
+          <a:ln>
+            <a:solidFill>
+              <a:srgbClr val="F4F7FB"/>
+            </a:solidFill>
+          </a:ln>
+        </p:spPr>
+        <p:style>
+          <a:lnRef idx="1">
+            <a:schemeClr val="accent1"/>
+          </a:lnRef>
+          <a:fillRef idx="3">
+            <a:schemeClr val="accent1"/>
+          </a:fillRef>
+          <a:effectRef idx="2">
+            <a:schemeClr val="accent1"/>
+          </a:effectRef>
+          <a:fontRef idx="minor">
+            <a:schemeClr val="lt1"/>
+          </a:fontRef>
+        </p:style>
+        <p:txBody>
+          <a:bodyPr rtlCol="0" anchor="ctr" wrap="square" lIns="73152" rIns="73152" tIns="36576" bIns="36576"/>
+          <a:lstStyle/>
+          <a:p>
+            <a:pPr algn="l">
+              <a:spcAft>
+                <a:spcPts val="0"/>
+              </a:spcAft>
+              <a:defRPr sz="1300" b="1">
+                <a:solidFill>
+                  <a:srgbClr val="122C4E"/>
+                </a:solidFill>
+                <a:latin typeface="Noto Sans CJK KR"/>
+              </a:defRPr>
+            </a:pPr>
+            <a:r>
+              <a:t>현재 단계 실행    |    현재 폴더 ~/ros2_curri/agv_ws    |    현재 터미널</a:t>
+            </a:r>
+          </a:p>
+        </p:txBody>
+      </p:sp>
+      <p:sp>
+        <p:nvSpPr>
+          <p:cNvPr id="7" name="Rounded Rectangle 6"/>
+          <p:cNvSpPr/>
+          <p:nvPr/>
+        </p:nvSpPr>
+        <p:spPr>
+          <a:xfrm>
+            <a:off x="658368" y="1700784"/>
+            <a:ext cx="10972800" cy="3182112"/>
+          </a:xfrm>
+          <a:prstGeom prst="roundRect">
+            <a:avLst/>
+          </a:prstGeom>
+          <a:solidFill>
+            <a:srgbClr val="1D232D"/>
+          </a:solidFill>
+          <a:ln>
+            <a:solidFill>
+              <a:srgbClr val="1D232D"/>
+            </a:solidFill>
+          </a:ln>
+        </p:spPr>
+        <p:style>
+          <a:lnRef idx="1">
+            <a:schemeClr val="accent1"/>
+          </a:lnRef>
+          <a:fillRef idx="3">
+            <a:schemeClr val="accent1"/>
+          </a:fillRef>
+          <a:effectRef idx="2">
+            <a:schemeClr val="accent1"/>
+          </a:effectRef>
+          <a:fontRef idx="minor">
+            <a:schemeClr val="lt1"/>
+          </a:fontRef>
+        </p:style>
+        <p:txBody>
+          <a:bodyPr rtlCol="0" anchor="ctr" wrap="square" lIns="73152" rIns="73152" tIns="36576" bIns="36576"/>
+          <a:lstStyle/>
+          <a:p>
+            <a:pPr algn="l">
+              <a:spcAft>
+                <a:spcPts val="0"/>
+              </a:spcAft>
+              <a:defRPr sz="1600" b="0">
+                <a:solidFill>
+                  <a:srgbClr val="FFFFFF"/>
+                </a:solidFill>
+                <a:latin typeface="DejaVu Sans Mono"/>
+              </a:defRPr>
+            </a:pPr>
+            <a:r>
+              <a:t>cd ~/ros2_curri/agv_ws</a:t>
+            </a:r>
+            <a:br/>
+            <a:r>
+              <a:t>gz sim -r src/agv_description/curriculum_stages/M08/warehouse.sdf</a:t>
+            </a:r>
+          </a:p>
+        </p:txBody>
+      </p:sp>
+      <p:sp>
+        <p:nvSpPr>
+          <p:cNvPr id="8" name="TextBox 7"/>
           <p:cNvSpPr txBox="1"/>
           <p:nvPr/>
         </p:nvSpPr>
         <p:spPr>
           <a:xfrm>
-            <a:off x="777240" y="6217920"/>
-            <a:ext cx="10607040" cy="182880"/>
+            <a:off x="786384" y="5239512"/>
+            <a:ext cx="1261872" cy="237744"/>
           </a:xfrm>
           <a:prstGeom prst="rect">
             <a:avLst/>
@@ -13922,11 +14508,11 @@
           </a:bodyPr>
           <a:lstStyle/>
           <a:p>
-            <a:pPr algn="ctr">
-              <a:spcAft>
-                <a:spcPts val="0"/>
-              </a:spcAft>
-              <a:defRPr sz="1100" b="1">
+            <a:pPr algn="l">
+              <a:spcAft>
+                <a:spcPts val="0"/>
+              </a:spcAft>
+              <a:defRPr sz="1800" b="1">
                 <a:solidFill>
                   <a:srgbClr val="2A8B5A"/>
                 </a:solidFill>
@@ -13934,7 +14520,46 @@
               </a:defRPr>
             </a:pPr>
             <a:r>
-              <a:t>① 명령/설정  ② 정상 출력 또는 화면  ③ 다음 검증 명령으로 재확인</a:t>
+              <a:t>확인 기준</a:t>
+            </a:r>
+          </a:p>
+        </p:txBody>
+      </p:sp>
+      <p:sp>
+        <p:nvSpPr>
+          <p:cNvPr id="9" name="TextBox 8"/>
+          <p:cNvSpPr txBox="1"/>
+          <p:nvPr/>
+        </p:nvSpPr>
+        <p:spPr>
+          <a:xfrm>
+            <a:off x="786384" y="5532120"/>
+            <a:ext cx="10469880" cy="420624"/>
+          </a:xfrm>
+          <a:prstGeom prst="rect">
+            <a:avLst/>
+          </a:prstGeom>
+          <a:noFill/>
+        </p:spPr>
+        <p:txBody>
+          <a:bodyPr wrap="square" lIns="73152" rIns="73152" tIns="36576" bIns="36576">
+            <a:spAutoFit/>
+          </a:bodyPr>
+          <a:lstStyle/>
+          <a:p>
+            <a:pPr algn="l">
+              <a:spcAft>
+                <a:spcPts val="0"/>
+              </a:spcAft>
+              <a:defRPr sz="1800" b="0">
+                <a:solidFill>
+                  <a:srgbClr val="122C4E"/>
+                </a:solidFill>
+                <a:latin typeface="Noto Sans CJK KR"/>
+              </a:defRPr>
+            </a:pPr>
+            <a:r>
+              <a:t>ground·벽·박스가 있는 World에 AGV가 spawn되어 있는 Gazebo 화면을 확인한다.</a:t>
             </a:r>
           </a:p>
         </p:txBody>
@@ -13991,7 +14616,7 @@
               </a:defRPr>
             </a:pPr>
             <a:r>
-              <a:t>객관적 검증 명령으로 완료를 확인한다</a:t>
+              <a:t>정상 결과: 실제 환경에서 확인한 출력</a:t>
             </a:r>
           </a:p>
         </p:txBody>
@@ -14030,7 +14655,7 @@
               </a:defRPr>
             </a:pPr>
             <a:r>
-              <a:t>화면만 보지 말고 topic·frame·파일·parameter를 다시 확인합니다.</a:t>
+              <a:t>실제 ROS 2 환경의 파일·패키지·구성 검증 로그</a:t>
             </a:r>
           </a:p>
         </p:txBody>
@@ -14113,210 +14738,40 @@
           </a:p>
         </p:txBody>
       </p:sp>
-      <p:sp>
-        <p:nvSpPr>
-          <p:cNvPr id="6" name="Rectangle 5"/>
-          <p:cNvSpPr/>
-          <p:nvPr/>
-        </p:nvSpPr>
-        <p:spPr>
-          <a:xfrm>
-            <a:off x="566928" y="1188720"/>
-            <a:ext cx="11064240" cy="347472"/>
-          </a:xfrm>
-          <a:prstGeom prst="rect">
-            <a:avLst/>
-          </a:prstGeom>
-          <a:solidFill>
-            <a:srgbClr val="F4F7FB"/>
-          </a:solidFill>
-          <a:ln>
-            <a:solidFill>
-              <a:srgbClr val="F4F7FB"/>
-            </a:solidFill>
-          </a:ln>
-        </p:spPr>
-        <p:style>
-          <a:lnRef idx="1">
-            <a:schemeClr val="accent1"/>
-          </a:lnRef>
-          <a:fillRef idx="3">
-            <a:schemeClr val="accent1"/>
-          </a:fillRef>
-          <a:effectRef idx="2">
-            <a:schemeClr val="accent1"/>
-          </a:effectRef>
-          <a:fontRef idx="minor">
-            <a:schemeClr val="lt1"/>
-          </a:fontRef>
-        </p:style>
-        <p:txBody>
-          <a:bodyPr rtlCol="0" anchor="ctr" wrap="square" lIns="73152" rIns="73152" tIns="36576" bIns="36576"/>
-          <a:lstStyle/>
-          <a:p>
-            <a:pPr algn="l">
-              <a:spcAft>
-                <a:spcPts val="0"/>
-              </a:spcAft>
-              <a:defRPr sz="1300" b="1">
-                <a:solidFill>
-                  <a:srgbClr val="122C4E"/>
-                </a:solidFill>
-                <a:latin typeface="Noto Sans CJK KR"/>
-              </a:defRPr>
-            </a:pPr>
-            <a:r>
-              <a:t>현재 단계 검증    |    현재 폴더 ~/agv_ws    |    현재 터미널</a:t>
-            </a:r>
-          </a:p>
-        </p:txBody>
-      </p:sp>
-      <p:sp>
-        <p:nvSpPr>
-          <p:cNvPr id="7" name="Rounded Rectangle 6"/>
-          <p:cNvSpPr/>
-          <p:nvPr/>
-        </p:nvSpPr>
-        <p:spPr>
-          <a:xfrm>
-            <a:off x="658368" y="1755648"/>
-            <a:ext cx="10972800" cy="2148840"/>
-          </a:xfrm>
-          <a:prstGeom prst="roundRect">
-            <a:avLst/>
-          </a:prstGeom>
-          <a:solidFill>
-            <a:srgbClr val="1D232D"/>
-          </a:solidFill>
-          <a:ln>
-            <a:solidFill>
-              <a:srgbClr val="1D232D"/>
-            </a:solidFill>
-          </a:ln>
-        </p:spPr>
-        <p:style>
-          <a:lnRef idx="1">
-            <a:schemeClr val="accent1"/>
-          </a:lnRef>
-          <a:fillRef idx="3">
-            <a:schemeClr val="accent1"/>
-          </a:fillRef>
-          <a:effectRef idx="2">
-            <a:schemeClr val="accent1"/>
-          </a:effectRef>
-          <a:fontRef idx="minor">
-            <a:schemeClr val="lt1"/>
-          </a:fontRef>
-        </p:style>
-        <p:txBody>
-          <a:bodyPr rtlCol="0" anchor="ctr" wrap="square" lIns="73152" rIns="73152" tIns="36576" bIns="36576"/>
-          <a:lstStyle/>
-          <a:p>
-            <a:pPr algn="l">
-              <a:spcAft>
-                <a:spcPts val="0"/>
-              </a:spcAft>
-              <a:defRPr sz="1600" b="0">
-                <a:solidFill>
-                  <a:srgbClr val="FFFFFF"/>
-                </a:solidFill>
-                <a:latin typeface="DejaVu Sans Mono"/>
-              </a:defRPr>
-            </a:pPr>
-            <a:r>
-              <a:t>gz sdf -k ~/agv_ws/src/agv_gazebo/models/agv/model.sdf</a:t>
-            </a:r>
-            <a:br/>
-            <a:r>
-              <a:t>rg -n 'model://agv|&lt;world name=' ~/agv_ws/src/agv_gazebo/worlds/warehouse.sdf</a:t>
-            </a:r>
-            <a:br/>
-            <a:r>
-              <a:t># 이어서 ros2 launch agv_gazebo gazebo.launch.py로 World를 연다.</a:t>
-            </a:r>
-          </a:p>
-        </p:txBody>
-      </p:sp>
-      <p:sp>
-        <p:nvSpPr>
-          <p:cNvPr id="8" name="Rounded Rectangle 7"/>
-          <p:cNvSpPr/>
-          <p:nvPr/>
-        </p:nvSpPr>
-        <p:spPr>
-          <a:xfrm>
-            <a:off x="658368" y="4206240"/>
-            <a:ext cx="10972800" cy="1554480"/>
-          </a:xfrm>
-          <a:prstGeom prst="roundRect">
-            <a:avLst/>
-          </a:prstGeom>
-          <a:solidFill>
-            <a:srgbClr val="F4F7FB"/>
-          </a:solidFill>
-          <a:ln>
-            <a:solidFill>
-              <a:srgbClr val="D1DFD5"/>
-            </a:solidFill>
-          </a:ln>
-        </p:spPr>
-        <p:style>
-          <a:lnRef idx="1">
-            <a:schemeClr val="accent1"/>
-          </a:lnRef>
-          <a:fillRef idx="3">
-            <a:schemeClr val="accent1"/>
-          </a:fillRef>
-          <a:effectRef idx="2">
-            <a:schemeClr val="accent1"/>
-          </a:effectRef>
-          <a:fontRef idx="minor">
-            <a:schemeClr val="lt1"/>
-          </a:fontRef>
-        </p:style>
-        <p:txBody>
-          <a:bodyPr rtlCol="0" anchor="ctr" wrap="square" lIns="73152" rIns="73152" tIns="36576" bIns="36576"/>
-          <a:lstStyle/>
-          <a:p>
-            <a:pPr algn="l">
-              <a:spcAft>
-                <a:spcPts val="0"/>
-              </a:spcAft>
-              <a:defRPr sz="1800" b="1">
-                <a:solidFill>
-                  <a:srgbClr val="2A8B5A"/>
-                </a:solidFill>
-                <a:latin typeface="Noto Sans CJK KR"/>
-              </a:defRPr>
-            </a:pPr>
-            <a:r>
-              <a:t>완료 체크</a:t>
-            </a:r>
-            <a:br/>
-            <a:r>
-              <a:t>□ 명령이 오류 없이 실행된다.</a:t>
-            </a:r>
-            <a:br/>
-            <a:r>
-              <a:t>□ 기대한 파일·topic·frame·parameter 이름이 보인다.</a:t>
-            </a:r>
-            <a:br/>
-            <a:r>
-              <a:t>□ 값의 단위와 방향을 한 문장으로 설명할 수 있다.</a:t>
-            </a:r>
-          </a:p>
-        </p:txBody>
-      </p:sp>
-      <p:sp>
-        <p:nvSpPr>
-          <p:cNvPr id="9" name="TextBox 8"/>
+      <p:pic>
+        <p:nvPicPr>
+          <p:cNvPr id="6" name="Picture 5" descr="validation_terminal.png"/>
+          <p:cNvPicPr>
+            <a:picLocks noChangeAspect="1"/>
+          </p:cNvPicPr>
+          <p:nvPr/>
+        </p:nvPicPr>
+        <p:blipFill>
+          <a:blip r:embed="rId2"/>
+          <a:stretch>
+            <a:fillRect/>
+          </a:stretch>
+        </p:blipFill>
+        <p:spPr>
+          <a:xfrm>
+            <a:off x="790956" y="1884338"/>
+            <a:ext cx="10607040" cy="3738546"/>
+          </a:xfrm>
+          <a:prstGeom prst="rect">
+            <a:avLst/>
+          </a:prstGeom>
+        </p:spPr>
+      </p:pic>
+      <p:sp>
+        <p:nvSpPr>
+          <p:cNvPr id="7" name="TextBox 6"/>
           <p:cNvSpPr txBox="1"/>
           <p:nvPr/>
         </p:nvSpPr>
         <p:spPr>
           <a:xfrm>
-            <a:off x="731520" y="5989320"/>
-            <a:ext cx="10789920" cy="237744"/>
+            <a:off x="777240" y="6217920"/>
+            <a:ext cx="10607040" cy="182880"/>
           </a:xfrm>
           <a:prstGeom prst="rect">
             <a:avLst/>
@@ -14329,19 +14784,19 @@
           </a:bodyPr>
           <a:lstStyle/>
           <a:p>
-            <a:pPr algn="l">
-              <a:spcAft>
-                <a:spcPts val="0"/>
-              </a:spcAft>
-              <a:defRPr sz="1500" b="1">
-                <a:solidFill>
-                  <a:srgbClr val="122C4E"/>
-                </a:solidFill>
-                <a:latin typeface="Noto Sans CJK KR"/>
-              </a:defRPr>
-            </a:pPr>
-            <a:r>
-              <a:t>완료 조건: ground·벽·박스가 있는 World에 AGV가 spawn되어 있는 Gazebo 화면을 확인한다.</a:t>
+            <a:pPr algn="ctr">
+              <a:spcAft>
+                <a:spcPts val="0"/>
+              </a:spcAft>
+              <a:defRPr sz="1100" b="1">
+                <a:solidFill>
+                  <a:srgbClr val="2A8B5A"/>
+                </a:solidFill>
+                <a:latin typeface="Noto Sans CJK KR"/>
+              </a:defRPr>
+            </a:pPr>
+            <a:r>
+              <a:t>① 명령/설정  ② 정상 출력 또는 화면  ③ 다음 검증 명령으로 재확인</a:t>
             </a:r>
           </a:p>
         </p:txBody>
@@ -14398,7 +14853,7 @@
               </a:defRPr>
             </a:pPr>
             <a:r>
-              <a:t>막히면: 증상 → 우선 확인 → 재검증</a:t>
+              <a:t>정상 결과: 실제 환경에서 확인한 출력</a:t>
             </a:r>
           </a:p>
         </p:txBody>
@@ -14437,7 +14892,7 @@
               </a:defRPr>
             </a:pPr>
             <a:r>
-              <a:t>오류 메시지를 숨기지 않고 같은 순서로 점검합니다.</a:t>
+              <a:t>실제 Gazebo Sim에서 warehouse World에 spawn된 AGV</a:t>
             </a:r>
           </a:p>
         </p:txBody>
@@ -14520,119 +14975,40 @@
           </a:p>
         </p:txBody>
       </p:sp>
-      <p:sp>
-        <p:nvSpPr>
-          <p:cNvPr id="6" name="Rectangle 5"/>
-          <p:cNvSpPr/>
-          <p:nvPr/>
-        </p:nvSpPr>
-        <p:spPr>
-          <a:xfrm>
-            <a:off x="566928" y="1188720"/>
-            <a:ext cx="11064240" cy="347472"/>
-          </a:xfrm>
-          <a:prstGeom prst="rect">
-            <a:avLst/>
-          </a:prstGeom>
-          <a:solidFill>
-            <a:srgbClr val="F4F7FB"/>
-          </a:solidFill>
-          <a:ln>
-            <a:solidFill>
-              <a:srgbClr val="F4F7FB"/>
-            </a:solidFill>
-          </a:ln>
-        </p:spPr>
-        <p:style>
-          <a:lnRef idx="1">
-            <a:schemeClr val="accent1"/>
-          </a:lnRef>
-          <a:fillRef idx="3">
-            <a:schemeClr val="accent1"/>
-          </a:fillRef>
-          <a:effectRef idx="2">
-            <a:schemeClr val="accent1"/>
-          </a:effectRef>
-          <a:fontRef idx="minor">
-            <a:schemeClr val="lt1"/>
-          </a:fontRef>
-        </p:style>
-        <p:txBody>
-          <a:bodyPr rtlCol="0" anchor="ctr" wrap="square" lIns="73152" rIns="73152" tIns="36576" bIns="36576"/>
-          <a:lstStyle/>
-          <a:p>
-            <a:pPr algn="l">
-              <a:spcAft>
-                <a:spcPts val="0"/>
-              </a:spcAft>
-              <a:defRPr sz="1300" b="1">
-                <a:solidFill>
-                  <a:srgbClr val="122C4E"/>
-                </a:solidFill>
-                <a:latin typeface="Noto Sans CJK KR"/>
-              </a:defRPr>
-            </a:pPr>
-            <a:r>
-              <a:t>현재 단계 오류 대응    |    현재 폴더 ~/agv_ws    |    현재 터미널</a:t>
-            </a:r>
-          </a:p>
-        </p:txBody>
-      </p:sp>
-      <p:sp>
-        <p:nvSpPr>
-          <p:cNvPr id="7" name="Rounded Rectangle 6"/>
-          <p:cNvSpPr/>
-          <p:nvPr/>
-        </p:nvSpPr>
-        <p:spPr>
-          <a:xfrm>
-            <a:off x="694944" y="1755648"/>
-            <a:ext cx="10972800" cy="1115568"/>
-          </a:xfrm>
-          <a:prstGeom prst="roundRect">
-            <a:avLst/>
-          </a:prstGeom>
-          <a:solidFill>
-            <a:srgbClr val="FFF7F4"/>
-          </a:solidFill>
-          <a:ln>
-            <a:solidFill>
-              <a:srgbClr val="EDBEB4"/>
-            </a:solidFill>
-          </a:ln>
-        </p:spPr>
-        <p:style>
-          <a:lnRef idx="1">
-            <a:schemeClr val="accent1"/>
-          </a:lnRef>
-          <a:fillRef idx="3">
-            <a:schemeClr val="accent1"/>
-          </a:fillRef>
-          <a:effectRef idx="2">
-            <a:schemeClr val="accent1"/>
-          </a:effectRef>
-          <a:fontRef idx="minor">
-            <a:schemeClr val="lt1"/>
-          </a:fontRef>
-        </p:style>
-        <p:txBody>
-          <a:bodyPr rtlCol="0" anchor="ctr"/>
-          <a:lstStyle/>
-          <a:p>
-            <a:pPr algn="ctr"/>
-          </a:p>
-        </p:txBody>
-      </p:sp>
-      <p:sp>
-        <p:nvSpPr>
-          <p:cNvPr id="8" name="TextBox 7"/>
+      <p:pic>
+        <p:nvPicPr>
+          <p:cNvPr id="6" name="Picture 5" descr="01_gazebo_world_spawn_actual.png"/>
+          <p:cNvPicPr>
+            <a:picLocks noChangeAspect="1"/>
+          </p:cNvPicPr>
+          <p:nvPr/>
+        </p:nvPicPr>
+        <p:blipFill>
+          <a:blip r:embed="rId2"/>
+          <a:stretch>
+            <a:fillRect/>
+          </a:stretch>
+        </p:blipFill>
+        <p:spPr>
+          <a:xfrm>
+            <a:off x="3253884" y="1353312"/>
+            <a:ext cx="5681183" cy="4800600"/>
+          </a:xfrm>
+          <a:prstGeom prst="rect">
+            <a:avLst/>
+          </a:prstGeom>
+        </p:spPr>
+      </p:pic>
+      <p:sp>
+        <p:nvSpPr>
+          <p:cNvPr id="7" name="TextBox 6"/>
           <p:cNvSpPr txBox="1"/>
           <p:nvPr/>
         </p:nvSpPr>
         <p:spPr>
           <a:xfrm>
-            <a:off x="896112" y="1901952"/>
-            <a:ext cx="2926080" cy="274320"/>
+            <a:off x="777240" y="6217920"/>
+            <a:ext cx="10607040" cy="182880"/>
           </a:xfrm>
           <a:prstGeom prst="rect">
             <a:avLst/>
@@ -14645,228 +15021,19 @@
           </a:bodyPr>
           <a:lstStyle/>
           <a:p>
-            <a:pPr algn="l">
-              <a:spcAft>
-                <a:spcPts val="0"/>
-              </a:spcAft>
-              <a:defRPr sz="1800" b="1">
-                <a:solidFill>
-                  <a:srgbClr val="BE3B3B"/>
-                </a:solidFill>
-                <a:latin typeface="Noto Sans CJK KR"/>
-              </a:defRPr>
-            </a:pPr>
-            <a:r>
-              <a:t>증상 1: world 파일을 못 찾음</a:t>
-            </a:r>
-          </a:p>
-        </p:txBody>
-      </p:sp>
-      <p:sp>
-        <p:nvSpPr>
-          <p:cNvPr id="9" name="TextBox 8"/>
-          <p:cNvSpPr txBox="1"/>
-          <p:nvPr/>
-        </p:nvSpPr>
-        <p:spPr>
-          <a:xfrm>
-            <a:off x="3794760" y="1883664"/>
-            <a:ext cx="7543800" cy="621792"/>
-          </a:xfrm>
-          <a:prstGeom prst="rect">
-            <a:avLst/>
-          </a:prstGeom>
-          <a:noFill/>
-        </p:spPr>
-        <p:txBody>
-          <a:bodyPr wrap="square" lIns="73152" rIns="73152" tIns="36576" bIns="36576">
-            <a:spAutoFit/>
-          </a:bodyPr>
-          <a:lstStyle/>
-          <a:p>
-            <a:pPr algn="l">
-              <a:spcAft>
-                <a:spcPts val="0"/>
-              </a:spcAft>
-              <a:defRPr sz="1600" b="0">
-                <a:solidFill>
-                  <a:srgbClr val="122C4E"/>
-                </a:solidFill>
-                <a:latin typeface="Noto Sans CJK KR"/>
-              </a:defRPr>
-            </a:pPr>
-            <a:r>
-              <a:t>우선 확인: launch의 package share path와 install data_files를 확인한다.</a:t>
-            </a:r>
-            <a:br/>
-            <a:r>
-              <a:t>수정 후: gz sdf -k ~/agv_ws/src/agv_gazebo/models/agv/model.sdf</a:t>
-            </a:r>
-          </a:p>
-        </p:txBody>
-      </p:sp>
-      <p:sp>
-        <p:nvSpPr>
-          <p:cNvPr id="10" name="Rounded Rectangle 9"/>
-          <p:cNvSpPr/>
-          <p:nvPr/>
-        </p:nvSpPr>
-        <p:spPr>
-          <a:xfrm>
-            <a:off x="694944" y="3172968"/>
-            <a:ext cx="10972800" cy="1115568"/>
-          </a:xfrm>
-          <a:prstGeom prst="roundRect">
-            <a:avLst/>
-          </a:prstGeom>
-          <a:solidFill>
-            <a:srgbClr val="FFF7F4"/>
-          </a:solidFill>
-          <a:ln>
-            <a:solidFill>
-              <a:srgbClr val="EDBEB4"/>
-            </a:solidFill>
-          </a:ln>
-        </p:spPr>
-        <p:style>
-          <a:lnRef idx="1">
-            <a:schemeClr val="accent1"/>
-          </a:lnRef>
-          <a:fillRef idx="3">
-            <a:schemeClr val="accent1"/>
-          </a:fillRef>
-          <a:effectRef idx="2">
-            <a:schemeClr val="accent1"/>
-          </a:effectRef>
-          <a:fontRef idx="minor">
-            <a:schemeClr val="lt1"/>
-          </a:fontRef>
-        </p:style>
-        <p:txBody>
-          <a:bodyPr rtlCol="0" anchor="ctr"/>
-          <a:lstStyle/>
-          <a:p>
-            <a:pPr algn="ctr"/>
-          </a:p>
-        </p:txBody>
-      </p:sp>
-      <p:sp>
-        <p:nvSpPr>
-          <p:cNvPr id="11" name="TextBox 10"/>
-          <p:cNvSpPr txBox="1"/>
-          <p:nvPr/>
-        </p:nvSpPr>
-        <p:spPr>
-          <a:xfrm>
-            <a:off x="896112" y="3319272"/>
-            <a:ext cx="2926080" cy="274320"/>
-          </a:xfrm>
-          <a:prstGeom prst="rect">
-            <a:avLst/>
-          </a:prstGeom>
-          <a:noFill/>
-        </p:spPr>
-        <p:txBody>
-          <a:bodyPr wrap="square" lIns="73152" rIns="73152" tIns="36576" bIns="36576">
-            <a:spAutoFit/>
-          </a:bodyPr>
-          <a:lstStyle/>
-          <a:p>
-            <a:pPr algn="l">
-              <a:spcAft>
-                <a:spcPts val="0"/>
-              </a:spcAft>
-              <a:defRPr sz="1800" b="1">
-                <a:solidFill>
-                  <a:srgbClr val="BE3B3B"/>
-                </a:solidFill>
-                <a:latin typeface="Noto Sans CJK KR"/>
-              </a:defRPr>
-            </a:pPr>
-            <a:r>
-              <a:t>증상 2: 모델이 공중/바닥 아래</a:t>
-            </a:r>
-          </a:p>
-        </p:txBody>
-      </p:sp>
-      <p:sp>
-        <p:nvSpPr>
-          <p:cNvPr id="12" name="TextBox 11"/>
-          <p:cNvSpPr txBox="1"/>
-          <p:nvPr/>
-        </p:nvSpPr>
-        <p:spPr>
-          <a:xfrm>
-            <a:off x="3794760" y="3300984"/>
-            <a:ext cx="7543800" cy="621792"/>
-          </a:xfrm>
-          <a:prstGeom prst="rect">
-            <a:avLst/>
-          </a:prstGeom>
-          <a:noFill/>
-        </p:spPr>
-        <p:txBody>
-          <a:bodyPr wrap="square" lIns="73152" rIns="73152" tIns="36576" bIns="36576">
-            <a:spAutoFit/>
-          </a:bodyPr>
-          <a:lstStyle/>
-          <a:p>
-            <a:pPr algn="l">
-              <a:spcAft>
-                <a:spcPts val="0"/>
-              </a:spcAft>
-              <a:defRPr sz="1600" b="0">
-                <a:solidFill>
-                  <a:srgbClr val="122C4E"/>
-                </a:solidFill>
-                <a:latin typeface="Noto Sans CJK KR"/>
-              </a:defRPr>
-            </a:pPr>
-            <a:r>
-              <a:t>우선 확인: 초기 z·collision origin·geometry 크기를 확인한다.</a:t>
-            </a:r>
-            <a:br/>
-            <a:r>
-              <a:t>수정 후: gz sdf -k ~/agv_ws/src/agv_gazebo/models/agv/model.sdf</a:t>
-            </a:r>
-          </a:p>
-        </p:txBody>
-      </p:sp>
-      <p:sp>
-        <p:nvSpPr>
-          <p:cNvPr id="13" name="TextBox 12"/>
-          <p:cNvSpPr txBox="1"/>
-          <p:nvPr/>
-        </p:nvSpPr>
-        <p:spPr>
-          <a:xfrm>
-            <a:off x="822960" y="5102352"/>
-            <a:ext cx="10607040" cy="402336"/>
-          </a:xfrm>
-          <a:prstGeom prst="rect">
-            <a:avLst/>
-          </a:prstGeom>
-          <a:noFill/>
-        </p:spPr>
-        <p:txBody>
-          <a:bodyPr wrap="square" lIns="73152" rIns="73152" tIns="36576" bIns="36576">
-            <a:spAutoFit/>
-          </a:bodyPr>
-          <a:lstStyle/>
-          <a:p>
             <a:pPr algn="ctr">
               <a:spcAft>
                 <a:spcPts val="0"/>
               </a:spcAft>
-              <a:defRPr sz="1800" b="1">
-                <a:solidFill>
-                  <a:srgbClr val="DB7E22"/>
-                </a:solidFill>
-                <a:latin typeface="Noto Sans CJK KR"/>
-              </a:defRPr>
-            </a:pPr>
-            <a:r>
-              <a:t>공통 순서: ① 현재 폴더 ② source ③ 파일 경로 ④ 이름/타입/단위 ⑤ build·source 후 재실행</a:t>
+              <a:defRPr sz="1100" b="1">
+                <a:solidFill>
+                  <a:srgbClr val="2A8B5A"/>
+                </a:solidFill>
+                <a:latin typeface="Noto Sans CJK KR"/>
+              </a:defRPr>
+            </a:pPr>
+            <a:r>
+              <a:t>① 명령/설정  ② 정상 출력 또는 화면  ③ 다음 검증 명령으로 재확인</a:t>
             </a:r>
           </a:p>
         </p:txBody>
@@ -14923,7 +15090,7 @@
               </a:defRPr>
             </a:pPr>
             <a:r>
-              <a:t>미니 실습: 값 하나를 바꾸고 결과를 비교한다</a:t>
+              <a:t>객관적 검증 명령으로 완료를 확인한다</a:t>
             </a:r>
           </a:p>
         </p:txBody>
@@ -14962,7 +15129,7 @@
               </a:defRPr>
             </a:pPr>
             <a:r>
-              <a:t>정상 결과를 만든 뒤에는 한 번에 하나의 값만 바꿉니다.</a:t>
+              <a:t>화면만 보지 말고 topic·frame·파일·parameter를 다시 확인합니다.</a:t>
             </a:r>
           </a:p>
         </p:txBody>
@@ -15098,7 +15265,7 @@
               </a:defRPr>
             </a:pPr>
             <a:r>
-              <a:t>현재 단계 미니 실습    |    현재 폴더 ~/agv_ws    |    현재 터미널</a:t>
+              <a:t>현재 단계 검증    |    현재 폴더 ~/ros2_curri/agv_ws    |    현재 터미널</a:t>
             </a:r>
           </a:p>
         </p:txBody>
@@ -15111,18 +15278,18 @@
         </p:nvSpPr>
         <p:spPr>
           <a:xfrm>
-            <a:off x="749808" y="1874519"/>
-            <a:ext cx="10652760" cy="1993392"/>
+            <a:off x="658368" y="1755648"/>
+            <a:ext cx="10972800" cy="2148840"/>
           </a:xfrm>
           <a:prstGeom prst="roundRect">
             <a:avLst/>
           </a:prstGeom>
           <a:solidFill>
-            <a:srgbClr val="FFF8EB"/>
+            <a:srgbClr val="1D232D"/>
           </a:solidFill>
           <a:ln>
             <a:solidFill>
-              <a:srgbClr val="ECC680"/>
+              <a:srgbClr val="1D232D"/>
             </a:solidFill>
           </a:ln>
         </p:spPr>
@@ -15144,33 +15311,107 @@
           <a:bodyPr rtlCol="0" anchor="ctr" wrap="square" lIns="73152" rIns="73152" tIns="36576" bIns="36576"/>
           <a:lstStyle/>
           <a:p>
-            <a:pPr algn="ctr">
-              <a:spcAft>
-                <a:spcPts val="0"/>
-              </a:spcAft>
-              <a:defRPr sz="2300" b="1">
-                <a:solidFill>
-                  <a:srgbClr val="122C4E"/>
-                </a:solidFill>
-                <a:latin typeface="Noto Sans CJK KR"/>
-              </a:defRPr>
-            </a:pPr>
-            <a:r>
-              <a:t>World의 box pose x 좌표를 1 m 바꾼 후 저장·재실행하여 top-view 위치 변화를 확인한다.</a:t>
-            </a:r>
-          </a:p>
-        </p:txBody>
-      </p:sp>
-      <p:sp>
-        <p:nvSpPr>
-          <p:cNvPr id="8" name="TextBox 7"/>
+            <a:pPr algn="l">
+              <a:spcAft>
+                <a:spcPts val="0"/>
+              </a:spcAft>
+              <a:defRPr sz="1600" b="0">
+                <a:solidFill>
+                  <a:srgbClr val="FFFFFF"/>
+                </a:solidFill>
+                <a:latin typeface="DejaVu Sans Mono"/>
+              </a:defRPr>
+            </a:pPr>
+            <a:r>
+              <a:t>gz sdf -k ~/ros2_curri/agv_ws/src/agv_description/curriculum_stages/M08/model.sdf</a:t>
+            </a:r>
+            <a:br/>
+            <a:r>
+              <a:t>rg -n '&lt;sensor|DiffDrive|/cmd_vel|/odom' ~/ros2_curri/agv_ws/src/agv_description/curriculum_stages/M08/model.sdf</a:t>
+            </a:r>
+          </a:p>
+        </p:txBody>
+      </p:sp>
+      <p:sp>
+        <p:nvSpPr>
+          <p:cNvPr id="8" name="Rounded Rectangle 7"/>
+          <p:cNvSpPr/>
+          <p:nvPr/>
+        </p:nvSpPr>
+        <p:spPr>
+          <a:xfrm>
+            <a:off x="658368" y="4206240"/>
+            <a:ext cx="10972800" cy="1554480"/>
+          </a:xfrm>
+          <a:prstGeom prst="roundRect">
+            <a:avLst/>
+          </a:prstGeom>
+          <a:solidFill>
+            <a:srgbClr val="F4F7FB"/>
+          </a:solidFill>
+          <a:ln>
+            <a:solidFill>
+              <a:srgbClr val="D1DFD5"/>
+            </a:solidFill>
+          </a:ln>
+        </p:spPr>
+        <p:style>
+          <a:lnRef idx="1">
+            <a:schemeClr val="accent1"/>
+          </a:lnRef>
+          <a:fillRef idx="3">
+            <a:schemeClr val="accent1"/>
+          </a:fillRef>
+          <a:effectRef idx="2">
+            <a:schemeClr val="accent1"/>
+          </a:effectRef>
+          <a:fontRef idx="minor">
+            <a:schemeClr val="lt1"/>
+          </a:fontRef>
+        </p:style>
+        <p:txBody>
+          <a:bodyPr rtlCol="0" anchor="ctr" wrap="square" lIns="73152" rIns="73152" tIns="36576" bIns="36576"/>
+          <a:lstStyle/>
+          <a:p>
+            <a:pPr algn="l">
+              <a:spcAft>
+                <a:spcPts val="0"/>
+              </a:spcAft>
+              <a:defRPr sz="1800" b="1">
+                <a:solidFill>
+                  <a:srgbClr val="2A8B5A"/>
+                </a:solidFill>
+                <a:latin typeface="Noto Sans CJK KR"/>
+              </a:defRPr>
+            </a:pPr>
+            <a:r>
+              <a:t>완료 체크</a:t>
+            </a:r>
+            <a:br/>
+            <a:r>
+              <a:t>□ 명령이 오류 없이 실행된다.</a:t>
+            </a:r>
+            <a:br/>
+            <a:r>
+              <a:t>□ 기대한 파일·topic·frame·parameter 이름이 보인다.</a:t>
+            </a:r>
+            <a:br/>
+            <a:r>
+              <a:t>□ 값의 단위와 방향을 한 문장으로 설명할 수 있다.</a:t>
+            </a:r>
+          </a:p>
+        </p:txBody>
+      </p:sp>
+      <p:sp>
+        <p:nvSpPr>
+          <p:cNvPr id="9" name="TextBox 8"/>
           <p:cNvSpPr txBox="1"/>
           <p:nvPr/>
         </p:nvSpPr>
         <p:spPr>
           <a:xfrm>
-            <a:off x="877824" y="4590288"/>
-            <a:ext cx="10241280" cy="594360"/>
+            <a:off x="731520" y="5989320"/>
+            <a:ext cx="10789920" cy="237744"/>
           </a:xfrm>
           <a:prstGeom prst="rect">
             <a:avLst/>
@@ -15183,19 +15424,19 @@
           </a:bodyPr>
           <a:lstStyle/>
           <a:p>
-            <a:pPr algn="ctr">
-              <a:spcAft>
-                <a:spcPts val="0"/>
-              </a:spcAft>
-              <a:defRPr sz="1900" b="1">
-                <a:solidFill>
-                  <a:srgbClr val="DB7E22"/>
-                </a:solidFill>
-                <a:latin typeface="Noto Sans CJK KR"/>
-              </a:defRPr>
-            </a:pPr>
-            <a:r>
-              <a:t>기록할 것: 바꾼 값(단위) · 기대한 변화 · 실제 출력/화면 · 원래 값으로 되돌린 결과</a:t>
+            <a:pPr algn="l">
+              <a:spcAft>
+                <a:spcPts val="0"/>
+              </a:spcAft>
+              <a:defRPr sz="1500" b="1">
+                <a:solidFill>
+                  <a:srgbClr val="122C4E"/>
+                </a:solidFill>
+                <a:latin typeface="Noto Sans CJK KR"/>
+              </a:defRPr>
+            </a:pPr>
+            <a:r>
+              <a:t>완료 조건: ground·벽·박스가 있는 World에 AGV가 spawn되어 있는 Gazebo 화면을 확인한다.</a:t>
             </a:r>
           </a:p>
         </p:txBody>
@@ -15252,7 +15493,7 @@
               </a:defRPr>
             </a:pPr>
             <a:r>
-              <a:t>체크포인트를 저장하고 다음 모듈로 넘긴다</a:t>
+              <a:t>막히면: 증상 → 우선 확인 → 재검증</a:t>
             </a:r>
           </a:p>
         </p:txBody>
@@ -15291,7 +15532,7 @@
               </a:defRPr>
             </a:pPr>
             <a:r>
-              <a:t>현재 Complete는 다음 Starter의 기준선입니다.</a:t>
+              <a:t>오류 메시지를 숨기지 않고 같은 순서로 점검합니다.</a:t>
             </a:r>
           </a:p>
         </p:txBody>
@@ -15427,7 +15668,7 @@
               </a:defRPr>
             </a:pPr>
             <a:r>
-              <a:t>현재 단계 체크포인트    |    현재 폴더 ~/agv_ws    |    현재 터미널</a:t>
+              <a:t>현재 단계 오류 대응    |    현재 폴더 ~/ros2_curri/agv_ws    |    현재 터미널</a:t>
             </a:r>
           </a:p>
         </p:txBody>
@@ -15440,18 +15681,18 @@
         </p:nvSpPr>
         <p:spPr>
           <a:xfrm>
-            <a:off x="685800" y="1737360"/>
-            <a:ext cx="10972800" cy="3611880"/>
+            <a:off x="694944" y="1755648"/>
+            <a:ext cx="10972800" cy="1115568"/>
           </a:xfrm>
           <a:prstGeom prst="roundRect">
             <a:avLst/>
           </a:prstGeom>
           <a:solidFill>
-            <a:srgbClr val="F4F7FB"/>
+            <a:srgbClr val="FFF7F4"/>
           </a:solidFill>
           <a:ln>
             <a:solidFill>
-              <a:srgbClr val="D2DCE8"/>
+              <a:srgbClr val="EDBEB4"/>
             </a:solidFill>
           </a:ln>
         </p:spPr>
@@ -15485,111 +15726,8 @@
         </p:nvSpPr>
         <p:spPr>
           <a:xfrm>
-            <a:off x="896112" y="1993392"/>
-            <a:ext cx="10332720" cy="2971800"/>
-          </a:xfrm>
-          <a:prstGeom prst="rect">
-            <a:avLst/>
-          </a:prstGeom>
-          <a:noFill/>
-        </p:spPr>
-        <p:txBody>
-          <a:bodyPr wrap="square" lIns="109728" rIns="109728">
-            <a:spAutoFit/>
-          </a:bodyPr>
-          <a:lstStyle/>
-          <a:p>
-            <a:pPr>
-              <a:spcAft>
-                <a:spcPts val="800"/>
-              </a:spcAft>
-              <a:defRPr sz="1800">
-                <a:solidFill>
-                  <a:srgbClr val="122C4E"/>
-                </a:solidFill>
-                <a:latin typeface="Noto Sans CJK KR"/>
-              </a:defRPr>
-            </a:pPr>
-            <a:r>
-              <a:t>• □ 완료 화면: ground·벽·박스가 있는 World에 AGV가 spawn되어 있는 Gazebo 화면을 확인한다.</a:t>
-            </a:r>
-          </a:p>
-          <a:p>
-            <a:pPr>
-              <a:spcAft>
-                <a:spcPts val="800"/>
-              </a:spcAft>
-              <a:defRPr sz="1800">
-                <a:solidFill>
-                  <a:srgbClr val="122C4E"/>
-                </a:solidFill>
-                <a:latin typeface="Noto Sans CJK KR"/>
-              </a:defRPr>
-            </a:pPr>
-            <a:r>
-              <a:t>• □ Complete 파일: blocks/B_robot_build/M08_gazebo_world_spawn/complete/</a:t>
-            </a:r>
-          </a:p>
-          <a:p>
-            <a:pPr>
-              <a:spcAft>
-                <a:spcPts val="800"/>
-              </a:spcAft>
-              <a:defRPr sz="1800">
-                <a:solidFill>
-                  <a:srgbClr val="122C4E"/>
-                </a:solidFill>
-                <a:latin typeface="Noto Sans CJK KR"/>
-              </a:defRPr>
-            </a:pPr>
-            <a:r>
-              <a:t>• □ 정상 로그·캡처: logs/validation.log, screenshots/validation_terminal.png</a:t>
-            </a:r>
-          </a:p>
-          <a:p>
-            <a:pPr>
-              <a:spcAft>
-                <a:spcPts val="800"/>
-              </a:spcAft>
-              <a:defRPr sz="1800">
-                <a:solidFill>
-                  <a:srgbClr val="122C4E"/>
-                </a:solidFill>
-                <a:latin typeface="Noto Sans CJK KR"/>
-              </a:defRPr>
-            </a:pPr>
-            <a:r>
-              <a:t>• □ 버전 식별: CHECKSUM_or_TAG.txt의 SHA-256 manifest</a:t>
-            </a:r>
-          </a:p>
-          <a:p>
-            <a:pPr>
-              <a:spcAft>
-                <a:spcPts val="800"/>
-              </a:spcAft>
-              <a:defRPr sz="1800">
-                <a:solidFill>
-                  <a:srgbClr val="122C4E"/>
-                </a:solidFill>
-                <a:latin typeface="Noto Sans CJK KR"/>
-              </a:defRPr>
-            </a:pPr>
-            <a:r>
-              <a:t>• □ 다음 시작 조건: M09 Differential Drive</a:t>
-            </a:r>
-          </a:p>
-        </p:txBody>
-      </p:sp>
-      <p:sp>
-        <p:nvSpPr>
-          <p:cNvPr id="9" name="TextBox 8"/>
-          <p:cNvSpPr txBox="1"/>
-          <p:nvPr/>
-        </p:nvSpPr>
-        <p:spPr>
-          <a:xfrm>
-            <a:off x="868680" y="5596128"/>
-            <a:ext cx="10515600" cy="338328"/>
+            <a:off x="896112" y="1901952"/>
+            <a:ext cx="2926080" cy="274320"/>
           </a:xfrm>
           <a:prstGeom prst="rect">
             <a:avLst/>
@@ -15602,19 +15740,228 @@
           </a:bodyPr>
           <a:lstStyle/>
           <a:p>
+            <a:pPr algn="l">
+              <a:spcAft>
+                <a:spcPts val="0"/>
+              </a:spcAft>
+              <a:defRPr sz="1800" b="1">
+                <a:solidFill>
+                  <a:srgbClr val="BE3B3B"/>
+                </a:solidFill>
+                <a:latin typeface="Noto Sans CJK KR"/>
+              </a:defRPr>
+            </a:pPr>
+            <a:r>
+              <a:t>증상 1: world 파일을 못 찾음</a:t>
+            </a:r>
+          </a:p>
+        </p:txBody>
+      </p:sp>
+      <p:sp>
+        <p:nvSpPr>
+          <p:cNvPr id="9" name="TextBox 8"/>
+          <p:cNvSpPr txBox="1"/>
+          <p:nvPr/>
+        </p:nvSpPr>
+        <p:spPr>
+          <a:xfrm>
+            <a:off x="3794760" y="1883664"/>
+            <a:ext cx="7543800" cy="621792"/>
+          </a:xfrm>
+          <a:prstGeom prst="rect">
+            <a:avLst/>
+          </a:prstGeom>
+          <a:noFill/>
+        </p:spPr>
+        <p:txBody>
+          <a:bodyPr wrap="square" lIns="73152" rIns="73152" tIns="36576" bIns="36576">
+            <a:spAutoFit/>
+          </a:bodyPr>
+          <a:lstStyle/>
+          <a:p>
+            <a:pPr algn="l">
+              <a:spcAft>
+                <a:spcPts val="0"/>
+              </a:spcAft>
+              <a:defRPr sz="1600" b="0">
+                <a:solidFill>
+                  <a:srgbClr val="122C4E"/>
+                </a:solidFill>
+                <a:latin typeface="Noto Sans CJK KR"/>
+              </a:defRPr>
+            </a:pPr>
+            <a:r>
+              <a:t>우선 확인: launch의 package share path와 install data_files를 확인한다.</a:t>
+            </a:r>
+            <a:br/>
+            <a:r>
+              <a:t>수정 후: gz sdf -k ~/ros2_curri/agv_ws/src/agv_description/curriculum_stages/M08/model.sdf</a:t>
+            </a:r>
+          </a:p>
+        </p:txBody>
+      </p:sp>
+      <p:sp>
+        <p:nvSpPr>
+          <p:cNvPr id="10" name="Rounded Rectangle 9"/>
+          <p:cNvSpPr/>
+          <p:nvPr/>
+        </p:nvSpPr>
+        <p:spPr>
+          <a:xfrm>
+            <a:off x="694944" y="3172968"/>
+            <a:ext cx="10972800" cy="1115568"/>
+          </a:xfrm>
+          <a:prstGeom prst="roundRect">
+            <a:avLst/>
+          </a:prstGeom>
+          <a:solidFill>
+            <a:srgbClr val="FFF7F4"/>
+          </a:solidFill>
+          <a:ln>
+            <a:solidFill>
+              <a:srgbClr val="EDBEB4"/>
+            </a:solidFill>
+          </a:ln>
+        </p:spPr>
+        <p:style>
+          <a:lnRef idx="1">
+            <a:schemeClr val="accent1"/>
+          </a:lnRef>
+          <a:fillRef idx="3">
+            <a:schemeClr val="accent1"/>
+          </a:fillRef>
+          <a:effectRef idx="2">
+            <a:schemeClr val="accent1"/>
+          </a:effectRef>
+          <a:fontRef idx="minor">
+            <a:schemeClr val="lt1"/>
+          </a:fontRef>
+        </p:style>
+        <p:txBody>
+          <a:bodyPr rtlCol="0" anchor="ctr"/>
+          <a:lstStyle/>
+          <a:p>
+            <a:pPr algn="ctr"/>
+          </a:p>
+        </p:txBody>
+      </p:sp>
+      <p:sp>
+        <p:nvSpPr>
+          <p:cNvPr id="11" name="TextBox 10"/>
+          <p:cNvSpPr txBox="1"/>
+          <p:nvPr/>
+        </p:nvSpPr>
+        <p:spPr>
+          <a:xfrm>
+            <a:off x="896112" y="3319272"/>
+            <a:ext cx="2926080" cy="274320"/>
+          </a:xfrm>
+          <a:prstGeom prst="rect">
+            <a:avLst/>
+          </a:prstGeom>
+          <a:noFill/>
+        </p:spPr>
+        <p:txBody>
+          <a:bodyPr wrap="square" lIns="73152" rIns="73152" tIns="36576" bIns="36576">
+            <a:spAutoFit/>
+          </a:bodyPr>
+          <a:lstStyle/>
+          <a:p>
+            <a:pPr algn="l">
+              <a:spcAft>
+                <a:spcPts val="0"/>
+              </a:spcAft>
+              <a:defRPr sz="1800" b="1">
+                <a:solidFill>
+                  <a:srgbClr val="BE3B3B"/>
+                </a:solidFill>
+                <a:latin typeface="Noto Sans CJK KR"/>
+              </a:defRPr>
+            </a:pPr>
+            <a:r>
+              <a:t>증상 2: 모델이 공중/바닥 아래</a:t>
+            </a:r>
+          </a:p>
+        </p:txBody>
+      </p:sp>
+      <p:sp>
+        <p:nvSpPr>
+          <p:cNvPr id="12" name="TextBox 11"/>
+          <p:cNvSpPr txBox="1"/>
+          <p:nvPr/>
+        </p:nvSpPr>
+        <p:spPr>
+          <a:xfrm>
+            <a:off x="3794760" y="3300984"/>
+            <a:ext cx="7543800" cy="621792"/>
+          </a:xfrm>
+          <a:prstGeom prst="rect">
+            <a:avLst/>
+          </a:prstGeom>
+          <a:noFill/>
+        </p:spPr>
+        <p:txBody>
+          <a:bodyPr wrap="square" lIns="73152" rIns="73152" tIns="36576" bIns="36576">
+            <a:spAutoFit/>
+          </a:bodyPr>
+          <a:lstStyle/>
+          <a:p>
+            <a:pPr algn="l">
+              <a:spcAft>
+                <a:spcPts val="0"/>
+              </a:spcAft>
+              <a:defRPr sz="1600" b="0">
+                <a:solidFill>
+                  <a:srgbClr val="122C4E"/>
+                </a:solidFill>
+                <a:latin typeface="Noto Sans CJK KR"/>
+              </a:defRPr>
+            </a:pPr>
+            <a:r>
+              <a:t>우선 확인: 초기 z·collision origin·geometry 크기를 확인한다.</a:t>
+            </a:r>
+            <a:br/>
+            <a:r>
+              <a:t>수정 후: gz sdf -k ~/ros2_curri/agv_ws/src/agv_description/curriculum_stages/M08/model.sdf</a:t>
+            </a:r>
+          </a:p>
+        </p:txBody>
+      </p:sp>
+      <p:sp>
+        <p:nvSpPr>
+          <p:cNvPr id="13" name="TextBox 12"/>
+          <p:cNvSpPr txBox="1"/>
+          <p:nvPr/>
+        </p:nvSpPr>
+        <p:spPr>
+          <a:xfrm>
+            <a:off x="822960" y="5102352"/>
+            <a:ext cx="10607040" cy="402336"/>
+          </a:xfrm>
+          <a:prstGeom prst="rect">
+            <a:avLst/>
+          </a:prstGeom>
+          <a:noFill/>
+        </p:spPr>
+        <p:txBody>
+          <a:bodyPr wrap="square" lIns="73152" rIns="73152" tIns="36576" bIns="36576">
+            <a:spAutoFit/>
+          </a:bodyPr>
+          <a:lstStyle/>
+          <a:p>
             <a:pPr algn="ctr">
               <a:spcAft>
                 <a:spcPts val="0"/>
               </a:spcAft>
-              <a:defRPr sz="1700" b="1">
-                <a:solidFill>
-                  <a:srgbClr val="2A8B5A"/>
-                </a:solidFill>
-                <a:latin typeface="Noto Sans CJK KR"/>
-              </a:defRPr>
-            </a:pPr>
-            <a:r>
-              <a:t>다음 모듈을 시작하기 전, 이 슬라이드의 Complete와 다음 모듈의 Starter를 비교합니다.</a:t>
+              <a:defRPr sz="1800" b="1">
+                <a:solidFill>
+                  <a:srgbClr val="DB7E22"/>
+                </a:solidFill>
+                <a:latin typeface="Noto Sans CJK KR"/>
+              </a:defRPr>
+            </a:pPr>
+            <a:r>
+              <a:t>공통 순서: ① 현재 폴더 ② source ③ 파일 경로 ④ 이름/타입/단위 ⑤ build·source 후 재실행</a:t>
             </a:r>
           </a:p>
         </p:txBody>
@@ -15846,7 +16193,7 @@
               </a:defRPr>
             </a:pPr>
             <a:r>
-              <a:t>현재 단계 시작    |    현재 폴더 ~/agv_ws    |    현재 터미널</a:t>
+              <a:t>현재 단계 시작    |    현재 폴더 ~/ros2_curri/agv_ws    |    현재 터미널</a:t>
             </a:r>
           </a:p>
         </p:txBody>
@@ -15962,7 +16309,7 @@
               </a:defRPr>
             </a:pPr>
             <a:r>
-              <a:t>• 현재 폴더: ~/agv_ws</a:t>
+              <a:t>• 현재 폴더: ~/ros2_curri/agv_ws</a:t>
             </a:r>
           </a:p>
           <a:p>
@@ -16033,7 +16380,7 @@
               </a:defRPr>
             </a:pPr>
             <a:r>
-              <a:t>확인: pwd가 ~/agv_ws이고, 이전 모듈의 완료 조건을 한 문장으로 설명할 수 있으면 시작합니다.</a:t>
+              <a:t>확인: pwd가 ~/ros2_curri/agv_ws이고, 이전 모듈의 완료 조건을 한 문장으로 설명할 수 있으면 시작합니다.</a:t>
             </a:r>
           </a:p>
         </p:txBody>
@@ -16090,6 +16437,754 @@
               </a:defRPr>
             </a:pPr>
             <a:r>
+              <a:t>미니 실습: 값 하나를 바꾸고 결과를 비교한다</a:t>
+            </a:r>
+          </a:p>
+        </p:txBody>
+      </p:sp>
+      <p:sp>
+        <p:nvSpPr>
+          <p:cNvPr id="3" name="TextBox 2"/>
+          <p:cNvSpPr txBox="1"/>
+          <p:nvPr/>
+        </p:nvSpPr>
+        <p:spPr>
+          <a:xfrm>
+            <a:off x="603504" y="859536"/>
+            <a:ext cx="10698480" cy="292608"/>
+          </a:xfrm>
+          <a:prstGeom prst="rect">
+            <a:avLst/>
+          </a:prstGeom>
+          <a:noFill/>
+        </p:spPr>
+        <p:txBody>
+          <a:bodyPr wrap="square" lIns="73152" rIns="73152" tIns="36576" bIns="36576">
+            <a:spAutoFit/>
+          </a:bodyPr>
+          <a:lstStyle/>
+          <a:p>
+            <a:pPr algn="l">
+              <a:spcAft>
+                <a:spcPts val="0"/>
+              </a:spcAft>
+              <a:defRPr sz="1700" b="0">
+                <a:solidFill>
+                  <a:srgbClr val="5C6672"/>
+                </a:solidFill>
+                <a:latin typeface="Noto Sans CJK KR"/>
+              </a:defRPr>
+            </a:pPr>
+            <a:r>
+              <a:t>정상 결과를 만든 뒤에는 한 번에 하나의 값만 바꿉니다.</a:t>
+            </a:r>
+          </a:p>
+        </p:txBody>
+      </p:sp>
+      <p:sp>
+        <p:nvSpPr>
+          <p:cNvPr id="4" name="TextBox 3"/>
+          <p:cNvSpPr txBox="1"/>
+          <p:nvPr/>
+        </p:nvSpPr>
+        <p:spPr>
+          <a:xfrm>
+            <a:off x="530352" y="6510528"/>
+            <a:ext cx="7772400" cy="201168"/>
+          </a:xfrm>
+          <a:prstGeom prst="rect">
+            <a:avLst/>
+          </a:prstGeom>
+          <a:noFill/>
+        </p:spPr>
+        <p:txBody>
+          <a:bodyPr wrap="square" lIns="73152" rIns="73152" tIns="36576" bIns="36576">
+            <a:spAutoFit/>
+          </a:bodyPr>
+          <a:lstStyle/>
+          <a:p>
+            <a:pPr algn="l">
+              <a:spcAft>
+                <a:spcPts val="0"/>
+              </a:spcAft>
+              <a:defRPr sz="1000" b="0">
+                <a:solidFill>
+                  <a:srgbClr val="5C6672"/>
+                </a:solidFill>
+                <a:latin typeface="Noto Sans CJK KR"/>
+              </a:defRPr>
+            </a:pPr>
+            <a:r>
+              <a:t>ROS 2 Jazzy · Gazebo Harmonic · M08 · 따라 하기형 AGV 실습</a:t>
+            </a:r>
+          </a:p>
+        </p:txBody>
+      </p:sp>
+      <p:sp>
+        <p:nvSpPr>
+          <p:cNvPr id="5" name="TextBox 4"/>
+          <p:cNvSpPr txBox="1"/>
+          <p:nvPr/>
+        </p:nvSpPr>
+        <p:spPr>
+          <a:xfrm>
+            <a:off x="9144000" y="6510528"/>
+            <a:ext cx="2468880" cy="201168"/>
+          </a:xfrm>
+          <a:prstGeom prst="rect">
+            <a:avLst/>
+          </a:prstGeom>
+          <a:noFill/>
+        </p:spPr>
+        <p:txBody>
+          <a:bodyPr wrap="square" lIns="73152" rIns="73152" tIns="36576" bIns="36576">
+            <a:spAutoFit/>
+          </a:bodyPr>
+          <a:lstStyle/>
+          <a:p>
+            <a:pPr algn="r">
+              <a:spcAft>
+                <a:spcPts val="0"/>
+              </a:spcAft>
+              <a:defRPr sz="1000" b="0">
+                <a:solidFill>
+                  <a:srgbClr val="5C6672"/>
+                </a:solidFill>
+                <a:latin typeface="Noto Sans CJK KR"/>
+              </a:defRPr>
+            </a:pPr>
+            <a:r>
+              <a:t>명령·파일 경로는 슬라이드에서 복사 가능</a:t>
+            </a:r>
+          </a:p>
+        </p:txBody>
+      </p:sp>
+      <p:sp>
+        <p:nvSpPr>
+          <p:cNvPr id="6" name="Rectangle 5"/>
+          <p:cNvSpPr/>
+          <p:nvPr/>
+        </p:nvSpPr>
+        <p:spPr>
+          <a:xfrm>
+            <a:off x="566928" y="1188720"/>
+            <a:ext cx="11064240" cy="347472"/>
+          </a:xfrm>
+          <a:prstGeom prst="rect">
+            <a:avLst/>
+          </a:prstGeom>
+          <a:solidFill>
+            <a:srgbClr val="F4F7FB"/>
+          </a:solidFill>
+          <a:ln>
+            <a:solidFill>
+              <a:srgbClr val="F4F7FB"/>
+            </a:solidFill>
+          </a:ln>
+        </p:spPr>
+        <p:style>
+          <a:lnRef idx="1">
+            <a:schemeClr val="accent1"/>
+          </a:lnRef>
+          <a:fillRef idx="3">
+            <a:schemeClr val="accent1"/>
+          </a:fillRef>
+          <a:effectRef idx="2">
+            <a:schemeClr val="accent1"/>
+          </a:effectRef>
+          <a:fontRef idx="minor">
+            <a:schemeClr val="lt1"/>
+          </a:fontRef>
+        </p:style>
+        <p:txBody>
+          <a:bodyPr rtlCol="0" anchor="ctr" wrap="square" lIns="73152" rIns="73152" tIns="36576" bIns="36576"/>
+          <a:lstStyle/>
+          <a:p>
+            <a:pPr algn="l">
+              <a:spcAft>
+                <a:spcPts val="0"/>
+              </a:spcAft>
+              <a:defRPr sz="1300" b="1">
+                <a:solidFill>
+                  <a:srgbClr val="122C4E"/>
+                </a:solidFill>
+                <a:latin typeface="Noto Sans CJK KR"/>
+              </a:defRPr>
+            </a:pPr>
+            <a:r>
+              <a:t>현재 단계 미니 실습    |    현재 폴더 ~/ros2_curri/agv_ws    |    현재 터미널</a:t>
+            </a:r>
+          </a:p>
+        </p:txBody>
+      </p:sp>
+      <p:sp>
+        <p:nvSpPr>
+          <p:cNvPr id="7" name="Rounded Rectangle 6"/>
+          <p:cNvSpPr/>
+          <p:nvPr/>
+        </p:nvSpPr>
+        <p:spPr>
+          <a:xfrm>
+            <a:off x="749808" y="1874519"/>
+            <a:ext cx="10652760" cy="1993392"/>
+          </a:xfrm>
+          <a:prstGeom prst="roundRect">
+            <a:avLst/>
+          </a:prstGeom>
+          <a:solidFill>
+            <a:srgbClr val="FFF8EB"/>
+          </a:solidFill>
+          <a:ln>
+            <a:solidFill>
+              <a:srgbClr val="ECC680"/>
+            </a:solidFill>
+          </a:ln>
+        </p:spPr>
+        <p:style>
+          <a:lnRef idx="1">
+            <a:schemeClr val="accent1"/>
+          </a:lnRef>
+          <a:fillRef idx="3">
+            <a:schemeClr val="accent1"/>
+          </a:fillRef>
+          <a:effectRef idx="2">
+            <a:schemeClr val="accent1"/>
+          </a:effectRef>
+          <a:fontRef idx="minor">
+            <a:schemeClr val="lt1"/>
+          </a:fontRef>
+        </p:style>
+        <p:txBody>
+          <a:bodyPr rtlCol="0" anchor="ctr" wrap="square" lIns="73152" rIns="73152" tIns="36576" bIns="36576"/>
+          <a:lstStyle/>
+          <a:p>
+            <a:pPr algn="ctr">
+              <a:spcAft>
+                <a:spcPts val="0"/>
+              </a:spcAft>
+              <a:defRPr sz="2300" b="1">
+                <a:solidFill>
+                  <a:srgbClr val="122C4E"/>
+                </a:solidFill>
+                <a:latin typeface="Noto Sans CJK KR"/>
+              </a:defRPr>
+            </a:pPr>
+            <a:r>
+              <a:t>World의 box pose x 좌표를 1 m 바꾼 후 저장·재실행하여 top-view 위치 변화를 확인한다.</a:t>
+            </a:r>
+          </a:p>
+        </p:txBody>
+      </p:sp>
+      <p:sp>
+        <p:nvSpPr>
+          <p:cNvPr id="8" name="TextBox 7"/>
+          <p:cNvSpPr txBox="1"/>
+          <p:nvPr/>
+        </p:nvSpPr>
+        <p:spPr>
+          <a:xfrm>
+            <a:off x="877824" y="4590288"/>
+            <a:ext cx="10241280" cy="594360"/>
+          </a:xfrm>
+          <a:prstGeom prst="rect">
+            <a:avLst/>
+          </a:prstGeom>
+          <a:noFill/>
+        </p:spPr>
+        <p:txBody>
+          <a:bodyPr wrap="square" lIns="73152" rIns="73152" tIns="36576" bIns="36576">
+            <a:spAutoFit/>
+          </a:bodyPr>
+          <a:lstStyle/>
+          <a:p>
+            <a:pPr algn="ctr">
+              <a:spcAft>
+                <a:spcPts val="0"/>
+              </a:spcAft>
+              <a:defRPr sz="1900" b="1">
+                <a:solidFill>
+                  <a:srgbClr val="DB7E22"/>
+                </a:solidFill>
+                <a:latin typeface="Noto Sans CJK KR"/>
+              </a:defRPr>
+            </a:pPr>
+            <a:r>
+              <a:t>기록할 것: 바꾼 값(단위) · 기대한 변화 · 실제 출력/화면 · 원래 값으로 되돌린 결과</a:t>
+            </a:r>
+          </a:p>
+        </p:txBody>
+      </p:sp>
+    </p:spTree>
+  </p:cSld>
+  <p:clrMapOvr>
+    <a:masterClrMapping/>
+  </p:clrMapOvr>
+</p:sld>
+</file>
+
+<file path=ppt/slides/slide31.xml><?xml version="1.0" encoding="utf-8"?>
+<p:sld xmlns:a="http://schemas.openxmlformats.org/drawingml/2006/main" xmlns:p="http://schemas.openxmlformats.org/presentationml/2006/main" xmlns:r="http://schemas.openxmlformats.org/officeDocument/2006/relationships">
+  <p:cSld>
+    <p:spTree>
+      <p:nvGrpSpPr>
+        <p:cNvPr id="1" name=""/>
+        <p:cNvGrpSpPr/>
+        <p:nvPr/>
+      </p:nvGrpSpPr>
+      <p:grpSpPr/>
+      <p:sp>
+        <p:nvSpPr>
+          <p:cNvPr id="2" name="TextBox 1"/>
+          <p:cNvSpPr txBox="1"/>
+          <p:nvPr/>
+        </p:nvSpPr>
+        <p:spPr>
+          <a:xfrm>
+            <a:off x="566928" y="347472"/>
+            <a:ext cx="10881360" cy="438912"/>
+          </a:xfrm>
+          <a:prstGeom prst="rect">
+            <a:avLst/>
+          </a:prstGeom>
+          <a:noFill/>
+        </p:spPr>
+        <p:txBody>
+          <a:bodyPr wrap="square" lIns="73152" rIns="73152" tIns="36576" bIns="36576">
+            <a:spAutoFit/>
+          </a:bodyPr>
+          <a:lstStyle/>
+          <a:p>
+            <a:pPr algn="l">
+              <a:spcAft>
+                <a:spcPts val="0"/>
+              </a:spcAft>
+              <a:defRPr sz="3200" b="1">
+                <a:solidFill>
+                  <a:srgbClr val="122C4E"/>
+                </a:solidFill>
+                <a:latin typeface="Noto Sans CJK KR"/>
+              </a:defRPr>
+            </a:pPr>
+            <a:r>
+              <a:t>체크포인트를 저장하고 다음 모듈로 넘긴다</a:t>
+            </a:r>
+          </a:p>
+        </p:txBody>
+      </p:sp>
+      <p:sp>
+        <p:nvSpPr>
+          <p:cNvPr id="3" name="TextBox 2"/>
+          <p:cNvSpPr txBox="1"/>
+          <p:nvPr/>
+        </p:nvSpPr>
+        <p:spPr>
+          <a:xfrm>
+            <a:off x="603504" y="859536"/>
+            <a:ext cx="10698480" cy="292608"/>
+          </a:xfrm>
+          <a:prstGeom prst="rect">
+            <a:avLst/>
+          </a:prstGeom>
+          <a:noFill/>
+        </p:spPr>
+        <p:txBody>
+          <a:bodyPr wrap="square" lIns="73152" rIns="73152" tIns="36576" bIns="36576">
+            <a:spAutoFit/>
+          </a:bodyPr>
+          <a:lstStyle/>
+          <a:p>
+            <a:pPr algn="l">
+              <a:spcAft>
+                <a:spcPts val="0"/>
+              </a:spcAft>
+              <a:defRPr sz="1700" b="0">
+                <a:solidFill>
+                  <a:srgbClr val="5C6672"/>
+                </a:solidFill>
+                <a:latin typeface="Noto Sans CJK KR"/>
+              </a:defRPr>
+            </a:pPr>
+            <a:r>
+              <a:t>현재 Complete는 다음 Starter의 기준선입니다.</a:t>
+            </a:r>
+          </a:p>
+        </p:txBody>
+      </p:sp>
+      <p:sp>
+        <p:nvSpPr>
+          <p:cNvPr id="4" name="TextBox 3"/>
+          <p:cNvSpPr txBox="1"/>
+          <p:nvPr/>
+        </p:nvSpPr>
+        <p:spPr>
+          <a:xfrm>
+            <a:off x="530352" y="6510528"/>
+            <a:ext cx="7772400" cy="201168"/>
+          </a:xfrm>
+          <a:prstGeom prst="rect">
+            <a:avLst/>
+          </a:prstGeom>
+          <a:noFill/>
+        </p:spPr>
+        <p:txBody>
+          <a:bodyPr wrap="square" lIns="73152" rIns="73152" tIns="36576" bIns="36576">
+            <a:spAutoFit/>
+          </a:bodyPr>
+          <a:lstStyle/>
+          <a:p>
+            <a:pPr algn="l">
+              <a:spcAft>
+                <a:spcPts val="0"/>
+              </a:spcAft>
+              <a:defRPr sz="1000" b="0">
+                <a:solidFill>
+                  <a:srgbClr val="5C6672"/>
+                </a:solidFill>
+                <a:latin typeface="Noto Sans CJK KR"/>
+              </a:defRPr>
+            </a:pPr>
+            <a:r>
+              <a:t>ROS 2 Jazzy · Gazebo Harmonic · M08 · 따라 하기형 AGV 실습</a:t>
+            </a:r>
+          </a:p>
+        </p:txBody>
+      </p:sp>
+      <p:sp>
+        <p:nvSpPr>
+          <p:cNvPr id="5" name="TextBox 4"/>
+          <p:cNvSpPr txBox="1"/>
+          <p:nvPr/>
+        </p:nvSpPr>
+        <p:spPr>
+          <a:xfrm>
+            <a:off x="9144000" y="6510528"/>
+            <a:ext cx="2468880" cy="201168"/>
+          </a:xfrm>
+          <a:prstGeom prst="rect">
+            <a:avLst/>
+          </a:prstGeom>
+          <a:noFill/>
+        </p:spPr>
+        <p:txBody>
+          <a:bodyPr wrap="square" lIns="73152" rIns="73152" tIns="36576" bIns="36576">
+            <a:spAutoFit/>
+          </a:bodyPr>
+          <a:lstStyle/>
+          <a:p>
+            <a:pPr algn="r">
+              <a:spcAft>
+                <a:spcPts val="0"/>
+              </a:spcAft>
+              <a:defRPr sz="1000" b="0">
+                <a:solidFill>
+                  <a:srgbClr val="5C6672"/>
+                </a:solidFill>
+                <a:latin typeface="Noto Sans CJK KR"/>
+              </a:defRPr>
+            </a:pPr>
+            <a:r>
+              <a:t>명령·파일 경로는 슬라이드에서 복사 가능</a:t>
+            </a:r>
+          </a:p>
+        </p:txBody>
+      </p:sp>
+      <p:sp>
+        <p:nvSpPr>
+          <p:cNvPr id="6" name="Rectangle 5"/>
+          <p:cNvSpPr/>
+          <p:nvPr/>
+        </p:nvSpPr>
+        <p:spPr>
+          <a:xfrm>
+            <a:off x="566928" y="1188720"/>
+            <a:ext cx="11064240" cy="347472"/>
+          </a:xfrm>
+          <a:prstGeom prst="rect">
+            <a:avLst/>
+          </a:prstGeom>
+          <a:solidFill>
+            <a:srgbClr val="F4F7FB"/>
+          </a:solidFill>
+          <a:ln>
+            <a:solidFill>
+              <a:srgbClr val="F4F7FB"/>
+            </a:solidFill>
+          </a:ln>
+        </p:spPr>
+        <p:style>
+          <a:lnRef idx="1">
+            <a:schemeClr val="accent1"/>
+          </a:lnRef>
+          <a:fillRef idx="3">
+            <a:schemeClr val="accent1"/>
+          </a:fillRef>
+          <a:effectRef idx="2">
+            <a:schemeClr val="accent1"/>
+          </a:effectRef>
+          <a:fontRef idx="minor">
+            <a:schemeClr val="lt1"/>
+          </a:fontRef>
+        </p:style>
+        <p:txBody>
+          <a:bodyPr rtlCol="0" anchor="ctr" wrap="square" lIns="73152" rIns="73152" tIns="36576" bIns="36576"/>
+          <a:lstStyle/>
+          <a:p>
+            <a:pPr algn="l">
+              <a:spcAft>
+                <a:spcPts val="0"/>
+              </a:spcAft>
+              <a:defRPr sz="1300" b="1">
+                <a:solidFill>
+                  <a:srgbClr val="122C4E"/>
+                </a:solidFill>
+                <a:latin typeface="Noto Sans CJK KR"/>
+              </a:defRPr>
+            </a:pPr>
+            <a:r>
+              <a:t>현재 단계 체크포인트    |    현재 폴더 ~/ros2_curri/agv_ws    |    현재 터미널</a:t>
+            </a:r>
+          </a:p>
+        </p:txBody>
+      </p:sp>
+      <p:sp>
+        <p:nvSpPr>
+          <p:cNvPr id="7" name="Rounded Rectangle 6"/>
+          <p:cNvSpPr/>
+          <p:nvPr/>
+        </p:nvSpPr>
+        <p:spPr>
+          <a:xfrm>
+            <a:off x="685800" y="1737360"/>
+            <a:ext cx="10972800" cy="3611880"/>
+          </a:xfrm>
+          <a:prstGeom prst="roundRect">
+            <a:avLst/>
+          </a:prstGeom>
+          <a:solidFill>
+            <a:srgbClr val="F4F7FB"/>
+          </a:solidFill>
+          <a:ln>
+            <a:solidFill>
+              <a:srgbClr val="D2DCE8"/>
+            </a:solidFill>
+          </a:ln>
+        </p:spPr>
+        <p:style>
+          <a:lnRef idx="1">
+            <a:schemeClr val="accent1"/>
+          </a:lnRef>
+          <a:fillRef idx="3">
+            <a:schemeClr val="accent1"/>
+          </a:fillRef>
+          <a:effectRef idx="2">
+            <a:schemeClr val="accent1"/>
+          </a:effectRef>
+          <a:fontRef idx="minor">
+            <a:schemeClr val="lt1"/>
+          </a:fontRef>
+        </p:style>
+        <p:txBody>
+          <a:bodyPr rtlCol="0" anchor="ctr"/>
+          <a:lstStyle/>
+          <a:p>
+            <a:pPr algn="ctr"/>
+          </a:p>
+        </p:txBody>
+      </p:sp>
+      <p:sp>
+        <p:nvSpPr>
+          <p:cNvPr id="8" name="TextBox 7"/>
+          <p:cNvSpPr txBox="1"/>
+          <p:nvPr/>
+        </p:nvSpPr>
+        <p:spPr>
+          <a:xfrm>
+            <a:off x="896112" y="1993392"/>
+            <a:ext cx="10332720" cy="2971800"/>
+          </a:xfrm>
+          <a:prstGeom prst="rect">
+            <a:avLst/>
+          </a:prstGeom>
+          <a:noFill/>
+        </p:spPr>
+        <p:txBody>
+          <a:bodyPr wrap="square" lIns="109728" rIns="109728">
+            <a:spAutoFit/>
+          </a:bodyPr>
+          <a:lstStyle/>
+          <a:p>
+            <a:pPr>
+              <a:spcAft>
+                <a:spcPts val="800"/>
+              </a:spcAft>
+              <a:defRPr sz="1800">
+                <a:solidFill>
+                  <a:srgbClr val="122C4E"/>
+                </a:solidFill>
+                <a:latin typeface="Noto Sans CJK KR"/>
+              </a:defRPr>
+            </a:pPr>
+            <a:r>
+              <a:t>• □ 완료 화면: ground·벽·박스가 있는 World에 AGV가 spawn되어 있는 Gazebo 화면을 확인한다.</a:t>
+            </a:r>
+          </a:p>
+          <a:p>
+            <a:pPr>
+              <a:spcAft>
+                <a:spcPts val="800"/>
+              </a:spcAft>
+              <a:defRPr sz="1800">
+                <a:solidFill>
+                  <a:srgbClr val="122C4E"/>
+                </a:solidFill>
+                <a:latin typeface="Noto Sans CJK KR"/>
+              </a:defRPr>
+            </a:pPr>
+            <a:r>
+              <a:t>• □ Complete 파일: blocks/B_robot_build/M08_gazebo_world_spawn/complete/</a:t>
+            </a:r>
+          </a:p>
+          <a:p>
+            <a:pPr>
+              <a:spcAft>
+                <a:spcPts val="800"/>
+              </a:spcAft>
+              <a:defRPr sz="1800">
+                <a:solidFill>
+                  <a:srgbClr val="122C4E"/>
+                </a:solidFill>
+                <a:latin typeface="Noto Sans CJK KR"/>
+              </a:defRPr>
+            </a:pPr>
+            <a:r>
+              <a:t>• □ 정상 로그·캡처: logs/validation.log, screenshots/validation_terminal.png</a:t>
+            </a:r>
+          </a:p>
+          <a:p>
+            <a:pPr>
+              <a:spcAft>
+                <a:spcPts val="800"/>
+              </a:spcAft>
+              <a:defRPr sz="1800">
+                <a:solidFill>
+                  <a:srgbClr val="122C4E"/>
+                </a:solidFill>
+                <a:latin typeface="Noto Sans CJK KR"/>
+              </a:defRPr>
+            </a:pPr>
+            <a:r>
+              <a:t>• □ 버전 식별: CHECKSUM_or_TAG.txt의 SHA-256 manifest</a:t>
+            </a:r>
+          </a:p>
+          <a:p>
+            <a:pPr>
+              <a:spcAft>
+                <a:spcPts val="800"/>
+              </a:spcAft>
+              <a:defRPr sz="1800">
+                <a:solidFill>
+                  <a:srgbClr val="122C4E"/>
+                </a:solidFill>
+                <a:latin typeface="Noto Sans CJK KR"/>
+              </a:defRPr>
+            </a:pPr>
+            <a:r>
+              <a:t>• □ 다음 시작 조건: M09 Differential Drive</a:t>
+            </a:r>
+          </a:p>
+        </p:txBody>
+      </p:sp>
+      <p:sp>
+        <p:nvSpPr>
+          <p:cNvPr id="9" name="TextBox 8"/>
+          <p:cNvSpPr txBox="1"/>
+          <p:nvPr/>
+        </p:nvSpPr>
+        <p:spPr>
+          <a:xfrm>
+            <a:off x="868680" y="5596128"/>
+            <a:ext cx="10515600" cy="338328"/>
+          </a:xfrm>
+          <a:prstGeom prst="rect">
+            <a:avLst/>
+          </a:prstGeom>
+          <a:noFill/>
+        </p:spPr>
+        <p:txBody>
+          <a:bodyPr wrap="square" lIns="73152" rIns="73152" tIns="36576" bIns="36576">
+            <a:spAutoFit/>
+          </a:bodyPr>
+          <a:lstStyle/>
+          <a:p>
+            <a:pPr algn="ctr">
+              <a:spcAft>
+                <a:spcPts val="0"/>
+              </a:spcAft>
+              <a:defRPr sz="1700" b="1">
+                <a:solidFill>
+                  <a:srgbClr val="2A8B5A"/>
+                </a:solidFill>
+                <a:latin typeface="Noto Sans CJK KR"/>
+              </a:defRPr>
+            </a:pPr>
+            <a:r>
+              <a:t>다음 모듈을 시작하기 전, 이 슬라이드의 Complete와 다음 모듈의 Starter를 비교합니다.</a:t>
+            </a:r>
+          </a:p>
+        </p:txBody>
+      </p:sp>
+    </p:spTree>
+  </p:cSld>
+  <p:clrMapOvr>
+    <a:masterClrMapping/>
+  </p:clrMapOvr>
+</p:sld>
+</file>
+
+<file path=ppt/slides/slide32.xml><?xml version="1.0" encoding="utf-8"?>
+<p:sld xmlns:a="http://schemas.openxmlformats.org/drawingml/2006/main" xmlns:p="http://schemas.openxmlformats.org/presentationml/2006/main" xmlns:r="http://schemas.openxmlformats.org/officeDocument/2006/relationships">
+  <p:cSld>
+    <p:spTree>
+      <p:nvGrpSpPr>
+        <p:cNvPr id="1" name=""/>
+        <p:cNvGrpSpPr/>
+        <p:nvPr/>
+      </p:nvGrpSpPr>
+      <p:grpSpPr/>
+      <p:sp>
+        <p:nvSpPr>
+          <p:cNvPr id="2" name="TextBox 1"/>
+          <p:cNvSpPr txBox="1"/>
+          <p:nvPr/>
+        </p:nvSpPr>
+        <p:spPr>
+          <a:xfrm>
+            <a:off x="566928" y="347472"/>
+            <a:ext cx="10881360" cy="438912"/>
+          </a:xfrm>
+          <a:prstGeom prst="rect">
+            <a:avLst/>
+          </a:prstGeom>
+          <a:noFill/>
+        </p:spPr>
+        <p:txBody>
+          <a:bodyPr wrap="square" lIns="73152" rIns="73152" tIns="36576" bIns="36576">
+            <a:spAutoFit/>
+          </a:bodyPr>
+          <a:lstStyle/>
+          <a:p>
+            <a:pPr algn="l">
+              <a:spcAft>
+                <a:spcPts val="0"/>
+              </a:spcAft>
+              <a:defRPr sz="3200" b="1">
+                <a:solidFill>
+                  <a:srgbClr val="122C4E"/>
+                </a:solidFill>
+                <a:latin typeface="Noto Sans CJK KR"/>
+              </a:defRPr>
+            </a:pPr>
+            <a:r>
               <a:t>공식 참고 자료</a:t>
             </a:r>
           </a:p>
@@ -17590,19 +18685,19 @@
               </a:defRPr>
             </a:pPr>
             <a:r>
-              <a:t>~/agv_ws/src/</a:t>
+              <a:t>~/ros2_curri/agv_ws/src/</a:t>
             </a:r>
             <a:br/>
             <a:r>
-              <a:t>└── agv_gazebo/worlds/warehouse.sdf</a:t>
+              <a:t>└── agv_description/curriculum_stages/M08/model.config</a:t>
             </a:r>
             <a:br/>
             <a:r>
-              <a:t>└── agv_gazebo/models/agv/model.config</a:t>
+              <a:t>└── agv_description/curriculum_stages/M08/model.sdf</a:t>
             </a:r>
             <a:br/>
             <a:r>
-              <a:t>└── agv_gazebo/launch/gazebo.launch.py</a:t>
+              <a:t>└── agv_description/curriculum_stages/M08/warehouse.sdf</a:t>
             </a:r>
           </a:p>
         </p:txBody>
@@ -17698,7 +18793,7 @@
               </a:defRPr>
             </a:pPr>
             <a:r>
-              <a:t>model 파일을 먼저 검증한다</a:t>
+              <a:t>model과 World를 각각 검사한다</a:t>
             </a:r>
           </a:p>
         </p:txBody>
@@ -17873,7 +18968,7 @@
               </a:defRPr>
             </a:pPr>
             <a:r>
-              <a:t>현재 단계 1/2    |    현재 폴더 ~/agv_ws    |    현재 터미널</a:t>
+              <a:t>현재 단계 1/2    |    현재 폴더 ~/ros2_curri/agv_ws    |    현재 터미널</a:t>
             </a:r>
           </a:p>
         </p:txBody>
@@ -17951,7 +19046,7 @@
               </a:defRPr>
             </a:pPr>
             <a:r>
-              <a:t>CLI의 `gz sdf -k`는 standalone World에서 model:// URI를 해석하지 못할 수 있다. AGV model 자체를 먼저 검사한다.</a:t>
+              <a:t>M08은 M07 물리 AGV를 World에 배치하는 단계이며 DiffDrive·Camera·LiDAR·IMU는 아직 넣지 않는다.</a:t>
             </a:r>
           </a:p>
         </p:txBody>
@@ -18009,15 +19104,15 @@
               </a:defRPr>
             </a:pPr>
             <a:r>
-              <a:t>cd ~/agv_ws</a:t>
+              <a:t>cd ~/ros2_curri/agv_ws</a:t>
             </a:r>
             <a:br/>
             <a:r>
-              <a:t>gz sdf -k src/agv_gazebo/models/agv/model.sdf</a:t>
+              <a:t>gz sdf -k src/agv_description/curriculum_stages/M08/model.sdf</a:t>
             </a:r>
             <a:br/>
             <a:r>
-              <a:t>rg -n 'model://agv|&lt;world name=' src/agv_gazebo/worlds/warehouse.sdf</a:t>
+              <a:t>rg -n 'model://agv|&lt;world name=' src/agv_description/curriculum_stages/M08/warehouse.sdf</a:t>
             </a:r>
           </a:p>
         </p:txBody>
@@ -18152,7 +19247,7 @@
               </a:defRPr>
             </a:pPr>
             <a:r>
-              <a:t>launch로 World와 bridge를 시작한다</a:t>
+              <a:t>World를 실행한다</a:t>
             </a:r>
           </a:p>
         </p:txBody>
@@ -18327,7 +19422,7 @@
               </a:defRPr>
             </a:pPr>
             <a:r>
-              <a:t>현재 단계 2/2    |    현재 폴더 ~/agv_ws    |    현재 터미널</a:t>
+              <a:t>현재 단계 2/2    |    현재 폴더 ~/ros2_curri/agv_ws    |    현재 터미널</a:t>
             </a:r>
           </a:p>
         </p:txBody>
@@ -18405,7 +19500,7 @@
               </a:defRPr>
             </a:pPr>
             <a:r>
-              <a:t>launch가 Gazebo resource path와 World 실행을 한 번에 준비하므로 World는 이 명령으로 검증한다.</a:t>
+              <a:t>M08 snapshot을 agv_gazebo models/worlds 경로에 복사한 뒤 Gazebo를 실행해 spawn만 확인한다.</a:t>
             </a:r>
           </a:p>
         </p:txBody>
@@ -18463,11 +19558,11 @@
               </a:defRPr>
             </a:pPr>
             <a:r>
-              <a:t>source install/setup.bash</a:t>
+              <a:t>gz sim -r src/agv_description/curriculum_stages/M08/warehouse.sdf</a:t>
             </a:r>
             <a:br/>
             <a:r>
-              <a:t>ros2 launch agv_gazebo gazebo.launch.py</a:t>
+              <a:t># 이 단계에는 ROS bridge와 구동 topic이 없다.</a:t>
             </a:r>
           </a:p>
         </p:txBody>
@@ -18602,7 +19697,7 @@
               </a:defRPr>
             </a:pPr>
             <a:r>
-              <a:t>파일을 새로 만들고 저장한다 (1/11)</a:t>
+              <a:t>파일을 새로 만들고 저장한다 (1/1)</a:t>
             </a:r>
           </a:p>
         </p:txBody>
@@ -18641,7 +19736,7 @@
               </a:defRPr>
             </a:pPr>
             <a:r>
-              <a:t>~/agv_ws/src/agv_gazebo/worlds/warehouse.sdf</a:t>
+              <a:t>~/ros2_curri/agv_ws/src/agv_description/curriculum_stages/M08/model.config</a:t>
             </a:r>
           </a:p>
         </p:txBody>
@@ -18777,7 +19872,7 @@
               </a:defRPr>
             </a:pPr>
             <a:r>
-              <a:t>현재 단계 3/14    |    현재 폴더 ~/agv_ws    |    현재 터미널</a:t>
+              <a:t>현재 단계 3/4    |    현재 폴더 ~/ros2_curri/agv_ws    |    현재 터미널</a:t>
             </a:r>
           </a:p>
         </p:txBody>
@@ -18874,11 +19969,11 @@
               </a:defRPr>
             </a:pPr>
             <a:r>
-              <a:t>파일 생성: mkdir -p ~/agv_ws/src/agv_gazebo/worlds</a:t>
+              <a:t>파일 생성: mkdir -p ~/ros2_curri/agv_ws/src/agv_description/curriculum_stages/M08</a:t>
             </a:r>
             <a:br/>
             <a:r>
-              <a:t>파일 열기: nano ~/agv_ws/src/agv_gazebo/worlds/warehouse.sdf</a:t>
+              <a:t>파일 열기: nano ~/ros2_curri/agv_ws/src/agv_description/curriculum_stages/M08/model.config</a:t>
             </a:r>
           </a:p>
         </p:txBody>
@@ -18940,47 +20035,23 @@
             </a:r>
             <a:br/>
             <a:r>
-              <a:t>&lt;sdf version="1.10"&gt;</a:t>
+              <a:t>&lt;model&gt;</a:t>
             </a:r>
             <a:br/>
             <a:r>
-              <a:t>  &lt;world name="warehouse"&gt;</a:t>
+              <a:t>  &lt;name&gt;agv&lt;/name&gt;</a:t>
             </a:r>
             <a:br/>
             <a:r>
-              <a:t>    </a:t>
+              <a:t>  &lt;version&gt;1.0&lt;/version&gt;</a:t>
             </a:r>
             <a:br/>
             <a:r>
-              <a:t>  </a:t>
+              <a:t>  &lt;sdf version="1.10"&gt;model.sdf&lt;/sdf&gt;</a:t>
             </a:r>
             <a:br/>
             <a:r>
-              <a:t>    &lt;gravity&gt;0 0 -9.8&lt;/gravity&gt;</a:t>
-            </a:r>
-            <a:br/>
-            <a:r>
-              <a:t>    </a:t>
-            </a:r>
-            <a:br/>
-            <a:r>
-              <a:t>  </a:t>
-            </a:r>
-            <a:br/>
-            <a:r>
-              <a:t>    &lt;plugin filename="gz-sim-physics-system" name="gz::sim::systems::Physics"/&gt;</a:t>
-            </a:r>
-            <a:br/>
-            <a:r>
-              <a:t>    &lt;plugin filename="gz-sim-user-commands-system"</a:t>
-            </a:r>
-            <a:br/>
-            <a:r>
-              <a:t>      name="gz::sim::systems::UserCommands"/&gt;</a:t>
-            </a:r>
-            <a:br/>
-            <a:r>
-              <a:t>    &lt;plugin filename="gz-sim-scene-broadcaster-system"</a:t>
+              <a:t>&lt;/model&gt;</a:t>
             </a:r>
           </a:p>
         </p:txBody>
@@ -19019,7 +20090,7 @@
               </a:defRPr>
             </a:pPr>
             <a:r>
-              <a:t>파일 전체 1/11 · 이 슬라이드 다음에 같은 파일의 나머지 줄이 이어집니다.</a:t>
+              <a:t>파일 전체 1/1 · 이 슬라이드 다음에 같은 파일의 나머지 줄이 이어집니다.</a:t>
             </a:r>
           </a:p>
         </p:txBody>

--- a/blocks/B_robot_build/M08_gazebo_world_spawn/M08_Gazebo_World와_Robot_Spawn.pptx
+++ b/blocks/B_robot_build/M08_gazebo_world_spawn/M08_Gazebo_World와_Robot_Spawn.pptx
@@ -37,6 +37,10 @@
     <p:sldId id="285" r:id="rId37"/>
     <p:sldId id="286" r:id="rId38"/>
     <p:sldId id="287" r:id="rId39"/>
+    <p:sldId id="288" r:id="rId40"/>
+    <p:sldId id="289" r:id="rId41"/>
+    <p:sldId id="290" r:id="rId42"/>
+    <p:sldId id="291" r:id="rId43"/>
   </p:sldIdLst>
   <p:sldSz cx="12191999" cy="6858000" type="screen4x3"/>
   <p:notesSz cx="6858000" cy="9144000"/>
@@ -623,17 +627,27 @@
           <a:lstStyle/>
           <a:p>
             <a:r>
-              <a:t>[설명] ~/ros2_curri/agv_ws/src/agv_description/curriculum_stages/M08/model.sdf의 전체 파일을 1/11 구간으로 작성한다.</a:t>
-            </a:r>
-          </a:p>
-          <a:p>
-            <a:r>
-              <a:t>[실행] nano ~/ros2_curri/agv_ws/src/agv_description/curriculum_stages/M08/model.sdf</a:t>
-            </a:r>
-          </a:p>
-          <a:p>
-            <a:r>
-              <a:t>[확인] 코드를 저장하고 다음 코드 슬라이드 또는 build 단계로 이동한다.</a:t>
+              <a:t>[설명] M08은 M07 물리 AGV를 World에 배치하는 단계이며 DiffDrive·Camera·LiDAR·IMU는 아직 넣지 않는다.</a:t>
+            </a:r>
+          </a:p>
+          <a:p>
+            <a:r>
+              <a:t>[실행] cd ~/ros2_curri/agv_ws</a:t>
+            </a:r>
+          </a:p>
+          <a:p>
+            <a:r>
+              <a:t>gz sdf -k src/agv_description/curriculum_stages/M08/model.sdf</a:t>
+            </a:r>
+          </a:p>
+          <a:p>
+            <a:r>
+              <a:t>rg -n 'model://agv|&lt;world name=' src/agv_description/curriculum_stages/M08/warehouse.sdf</a:t>
+            </a:r>
+          </a:p>
+          <a:p>
+            <a:r>
+              <a:t>[확인] 명령 출력에서 슬라이드의 확인 항목을 찾는다.</a:t>
             </a:r>
           </a:p>
           <a:p>
@@ -643,7 +657,7 @@
           </a:p>
           <a:p>
             <a:r>
-              <a:t>[오류] 들여쓰기·XML 태그·따옴표가 슬라이드와 정확히 같은지 확인한다.</a:t>
+              <a:t>[오류] 오류가 나면 현재 폴더, source, 파일 경로를 먼저 확인한다.</a:t>
             </a:r>
           </a:p>
         </p:txBody>
@@ -713,17 +727,22 @@
           <a:lstStyle/>
           <a:p>
             <a:r>
-              <a:t>[설명] ~/ros2_curri/agv_ws/src/agv_description/curriculum_stages/M08/model.sdf의 전체 파일을 2/11 구간으로 작성한다.</a:t>
-            </a:r>
-          </a:p>
-          <a:p>
-            <a:r>
-              <a:t>[실행] nano ~/ros2_curri/agv_ws/src/agv_description/curriculum_stages/M08/model.sdf</a:t>
-            </a:r>
-          </a:p>
-          <a:p>
-            <a:r>
-              <a:t>[확인] 코드를 저장하고 다음 코드 슬라이드 또는 build 단계로 이동한다.</a:t>
+              <a:t>[설명] M08 snapshot을 agv_gazebo models/worlds 경로에 복사한 뒤 Gazebo를 실행해 spawn만 확인한다.</a:t>
+            </a:r>
+          </a:p>
+          <a:p>
+            <a:r>
+              <a:t>[실행] gz sim -r src/agv_description/curriculum_stages/M08/warehouse.sdf</a:t>
+            </a:r>
+          </a:p>
+          <a:p>
+            <a:r>
+              <a:t># 이 단계에는 ROS bridge와 구동 topic이 없다.</a:t>
+            </a:r>
+          </a:p>
+          <a:p>
+            <a:r>
+              <a:t>[확인] 명령 출력에서 슬라이드의 확인 항목을 찾는다.</a:t>
             </a:r>
           </a:p>
           <a:p>
@@ -733,7 +752,7 @@
           </a:p>
           <a:p>
             <a:r>
-              <a:t>[오류] 들여쓰기·XML 태그·따옴표가 슬라이드와 정확히 같은지 확인한다.</a:t>
+              <a:t>[오류] 오류가 나면 현재 폴더, source, 파일 경로를 먼저 확인한다.</a:t>
             </a:r>
           </a:p>
         </p:txBody>
@@ -803,12 +822,12 @@
           <a:lstStyle/>
           <a:p>
             <a:r>
-              <a:t>[설명] ~/ros2_curri/agv_ws/src/agv_description/curriculum_stages/M08/model.sdf의 전체 파일을 3/11 구간으로 작성한다.</a:t>
-            </a:r>
-          </a:p>
-          <a:p>
-            <a:r>
-              <a:t>[실행] nano ~/ros2_curri/agv_ws/src/agv_description/curriculum_stages/M08/model.sdf</a:t>
+              <a:t>[설명] ~/ros2_curri/agv_ws/src/agv_description/curriculum_stages/M08/model.config의 전체 파일을 1/1 구간으로 작성한다.</a:t>
+            </a:r>
+          </a:p>
+          <a:p>
+            <a:r>
+              <a:t>[실행] nano ~/ros2_curri/agv_ws/src/agv_description/curriculum_stages/M08/model.config</a:t>
             </a:r>
           </a:p>
           <a:p>
@@ -893,7 +912,7 @@
           <a:lstStyle/>
           <a:p>
             <a:r>
-              <a:t>[설명] ~/ros2_curri/agv_ws/src/agv_description/curriculum_stages/M08/model.sdf의 전체 파일을 4/11 구간으로 작성한다.</a:t>
+              <a:t>[설명] ~/ros2_curri/agv_ws/src/agv_description/curriculum_stages/M08/model.sdf의 전체 파일을 1/11 구간으로 작성한다.</a:t>
             </a:r>
           </a:p>
           <a:p>
@@ -983,7 +1002,7 @@
           <a:lstStyle/>
           <a:p>
             <a:r>
-              <a:t>[설명] ~/ros2_curri/agv_ws/src/agv_description/curriculum_stages/M08/model.sdf의 전체 파일을 5/11 구간으로 작성한다.</a:t>
+              <a:t>[설명] ~/ros2_curri/agv_ws/src/agv_description/curriculum_stages/M08/model.sdf의 전체 파일을 2/11 구간으로 작성한다.</a:t>
             </a:r>
           </a:p>
           <a:p>
@@ -1073,7 +1092,7 @@
           <a:lstStyle/>
           <a:p>
             <a:r>
-              <a:t>[설명] ~/ros2_curri/agv_ws/src/agv_description/curriculum_stages/M08/model.sdf의 전체 파일을 6/11 구간으로 작성한다.</a:t>
+              <a:t>[설명] ~/ros2_curri/agv_ws/src/agv_description/curriculum_stages/M08/model.sdf의 전체 파일을 3/11 구간으로 작성한다.</a:t>
             </a:r>
           </a:p>
           <a:p>
@@ -1163,7 +1182,7 @@
           <a:lstStyle/>
           <a:p>
             <a:r>
-              <a:t>[설명] ~/ros2_curri/agv_ws/src/agv_description/curriculum_stages/M08/model.sdf의 전체 파일을 7/11 구간으로 작성한다.</a:t>
+              <a:t>[설명] ~/ros2_curri/agv_ws/src/agv_description/curriculum_stages/M08/model.sdf의 전체 파일을 4/11 구간으로 작성한다.</a:t>
             </a:r>
           </a:p>
           <a:p>
@@ -1253,7 +1272,7 @@
           <a:lstStyle/>
           <a:p>
             <a:r>
-              <a:t>[설명] ~/ros2_curri/agv_ws/src/agv_description/curriculum_stages/M08/model.sdf의 전체 파일을 8/11 구간으로 작성한다.</a:t>
+              <a:t>[설명] ~/ros2_curri/agv_ws/src/agv_description/curriculum_stages/M08/model.sdf의 전체 파일을 5/11 구간으로 작성한다.</a:t>
             </a:r>
           </a:p>
           <a:p>
@@ -1343,7 +1362,7 @@
           <a:lstStyle/>
           <a:p>
             <a:r>
-              <a:t>[설명] ~/ros2_curri/agv_ws/src/agv_description/curriculum_stages/M08/model.sdf의 전체 파일을 9/11 구간으로 작성한다.</a:t>
+              <a:t>[설명] ~/ros2_curri/agv_ws/src/agv_description/curriculum_stages/M08/model.sdf의 전체 파일을 6/11 구간으로 작성한다.</a:t>
             </a:r>
           </a:p>
           <a:p>
@@ -1433,7 +1452,7 @@
           <a:lstStyle/>
           <a:p>
             <a:r>
-              <a:t>[설명] ~/ros2_curri/agv_ws/src/agv_description/curriculum_stages/M08/model.sdf의 전체 파일을 10/11 구간으로 작성한다.</a:t>
+              <a:t>[설명] ~/ros2_curri/agv_ws/src/agv_description/curriculum_stages/M08/model.sdf의 전체 파일을 7/11 구간으로 작성한다.</a:t>
             </a:r>
           </a:p>
           <a:p>
@@ -1613,7 +1632,7 @@
           <a:lstStyle/>
           <a:p>
             <a:r>
-              <a:t>[설명] ~/ros2_curri/agv_ws/src/agv_description/curriculum_stages/M08/model.sdf의 전체 파일을 11/11 구간으로 작성한다.</a:t>
+              <a:t>[설명] ~/ros2_curri/agv_ws/src/agv_description/curriculum_stages/M08/model.sdf의 전체 파일을 8/11 구간으로 작성한다.</a:t>
             </a:r>
           </a:p>
           <a:p>
@@ -1703,12 +1722,12 @@
           <a:lstStyle/>
           <a:p>
             <a:r>
-              <a:t>[설명] ~/ros2_curri/agv_ws/src/agv_description/curriculum_stages/M08/warehouse.sdf의 전체 파일을 1/4 구간으로 작성한다.</a:t>
-            </a:r>
-          </a:p>
-          <a:p>
-            <a:r>
-              <a:t>[실행] nano ~/ros2_curri/agv_ws/src/agv_description/curriculum_stages/M08/warehouse.sdf</a:t>
+              <a:t>[설명] ~/ros2_curri/agv_ws/src/agv_description/curriculum_stages/M08/model.sdf의 전체 파일을 9/11 구간으로 작성한다.</a:t>
+            </a:r>
+          </a:p>
+          <a:p>
+            <a:r>
+              <a:t>[실행] nano ~/ros2_curri/agv_ws/src/agv_description/curriculum_stages/M08/model.sdf</a:t>
             </a:r>
           </a:p>
           <a:p>
@@ -1793,12 +1812,12 @@
           <a:lstStyle/>
           <a:p>
             <a:r>
-              <a:t>[설명] ~/ros2_curri/agv_ws/src/agv_description/curriculum_stages/M08/warehouse.sdf의 전체 파일을 2/4 구간으로 작성한다.</a:t>
-            </a:r>
-          </a:p>
-          <a:p>
-            <a:r>
-              <a:t>[실행] nano ~/ros2_curri/agv_ws/src/agv_description/curriculum_stages/M08/warehouse.sdf</a:t>
+              <a:t>[설명] ~/ros2_curri/agv_ws/src/agv_description/curriculum_stages/M08/model.sdf의 전체 파일을 10/11 구간으로 작성한다.</a:t>
+            </a:r>
+          </a:p>
+          <a:p>
+            <a:r>
+              <a:t>[실행] nano ~/ros2_curri/agv_ws/src/agv_description/curriculum_stages/M08/model.sdf</a:t>
             </a:r>
           </a:p>
           <a:p>
@@ -1883,12 +1902,12 @@
           <a:lstStyle/>
           <a:p>
             <a:r>
-              <a:t>[설명] ~/ros2_curri/agv_ws/src/agv_description/curriculum_stages/M08/warehouse.sdf의 전체 파일을 3/4 구간으로 작성한다.</a:t>
-            </a:r>
-          </a:p>
-          <a:p>
-            <a:r>
-              <a:t>[실행] nano ~/ros2_curri/agv_ws/src/agv_description/curriculum_stages/M08/warehouse.sdf</a:t>
+              <a:t>[설명] ~/ros2_curri/agv_ws/src/agv_description/curriculum_stages/M08/model.sdf의 전체 파일을 11/11 구간으로 작성한다.</a:t>
+            </a:r>
+          </a:p>
+          <a:p>
+            <a:r>
+              <a:t>[실행] nano ~/ros2_curri/agv_ws/src/agv_description/curriculum_stages/M08/model.sdf</a:t>
             </a:r>
           </a:p>
           <a:p>
@@ -1973,7 +1992,7 @@
           <a:lstStyle/>
           <a:p>
             <a:r>
-              <a:t>[설명] ~/ros2_curri/agv_ws/src/agv_description/curriculum_stages/M08/warehouse.sdf의 전체 파일을 4/4 구간으로 작성한다.</a:t>
+              <a:t>[설명] ~/ros2_curri/agv_ws/src/agv_description/curriculum_stages/M08/warehouse.sdf의 전체 파일을 1/4 구간으로 작성한다.</a:t>
             </a:r>
           </a:p>
           <a:p>
@@ -2063,22 +2082,17 @@
           <a:lstStyle/>
           <a:p>
             <a:r>
-              <a:t>[설명] build/source/run을 생략 없이 실행한다.</a:t>
-            </a:r>
-          </a:p>
-          <a:p>
-            <a:r>
-              <a:t>[실행] cd ~/ros2_curri/agv_ws</a:t>
-            </a:r>
-          </a:p>
-          <a:p>
-            <a:r>
-              <a:t>gz sim -r src/agv_description/curriculum_stages/M08/warehouse.sdf</a:t>
-            </a:r>
-          </a:p>
-          <a:p>
-            <a:r>
-              <a:t>[확인] ground·벽·박스가 있는 World에 AGV가 spawn되어 있는 Gazebo 화면을 확인한다.</a:t>
+              <a:t>[설명] ~/ros2_curri/agv_ws/src/agv_description/curriculum_stages/M08/warehouse.sdf의 전체 파일을 2/4 구간으로 작성한다.</a:t>
+            </a:r>
+          </a:p>
+          <a:p>
+            <a:r>
+              <a:t>[실행] nano ~/ros2_curri/agv_ws/src/agv_description/curriculum_stages/M08/warehouse.sdf</a:t>
+            </a:r>
+          </a:p>
+          <a:p>
+            <a:r>
+              <a:t>[확인] 코드를 저장하고 다음 코드 슬라이드 또는 build 단계로 이동한다.</a:t>
             </a:r>
           </a:p>
           <a:p>
@@ -2088,7 +2102,7 @@
           </a:p>
           <a:p>
             <a:r>
-              <a:t>[오류] 오류가 나면 현재 폴더, source, 파일 경로를 먼저 확인한다.</a:t>
+              <a:t>[오류] 들여쓰기·XML 태그·따옴표가 슬라이드와 정확히 같은지 확인한다.</a:t>
             </a:r>
           </a:p>
         </p:txBody>
@@ -2158,17 +2172,17 @@
           <a:lstStyle/>
           <a:p>
             <a:r>
-              <a:t>[설명] 실제 Ubuntu/ROS 2 환경에서 생성한 검증 화면이다.</a:t>
-            </a:r>
-          </a:p>
-          <a:p>
-            <a:r>
-              <a:t>[실행] 슬라이드의 명령 또는 파일 작성 단계를 진행한다.</a:t>
-            </a:r>
-          </a:p>
-          <a:p>
-            <a:r>
-              <a:t>[확인] 캡처의 명령과 다음 슬라이드의 검증 명령을 비교한다.</a:t>
+              <a:t>[설명] ~/ros2_curri/agv_ws/src/agv_description/curriculum_stages/M08/warehouse.sdf의 전체 파일을 3/4 구간으로 작성한다.</a:t>
+            </a:r>
+          </a:p>
+          <a:p>
+            <a:r>
+              <a:t>[실행] nano ~/ros2_curri/agv_ws/src/agv_description/curriculum_stages/M08/warehouse.sdf</a:t>
+            </a:r>
+          </a:p>
+          <a:p>
+            <a:r>
+              <a:t>[확인] 코드를 저장하고 다음 코드 슬라이드 또는 build 단계로 이동한다.</a:t>
             </a:r>
           </a:p>
           <a:p>
@@ -2178,7 +2192,7 @@
           </a:p>
           <a:p>
             <a:r>
-              <a:t>[오류] 오류가 나면 현재 폴더, source, 파일 경로를 먼저 확인한다.</a:t>
+              <a:t>[오류] 들여쓰기·XML 태그·따옴표가 슬라이드와 정확히 같은지 확인한다.</a:t>
             </a:r>
           </a:p>
         </p:txBody>
@@ -2248,17 +2262,17 @@
           <a:lstStyle/>
           <a:p>
             <a:r>
-              <a:t>[설명] 실제 Ubuntu/ROS 2 환경에서 생성한 검증 화면이다.</a:t>
-            </a:r>
-          </a:p>
-          <a:p>
-            <a:r>
-              <a:t>[실행] 슬라이드의 명령 또는 파일 작성 단계를 진행한다.</a:t>
-            </a:r>
-          </a:p>
-          <a:p>
-            <a:r>
-              <a:t>[확인] 캡처의 명령과 다음 슬라이드의 검증 명령을 비교한다.</a:t>
+              <a:t>[설명] ~/ros2_curri/agv_ws/src/agv_description/curriculum_stages/M08/warehouse.sdf의 전체 파일을 4/4 구간으로 작성한다.</a:t>
+            </a:r>
+          </a:p>
+          <a:p>
+            <a:r>
+              <a:t>[실행] nano ~/ros2_curri/agv_ws/src/agv_description/curriculum_stages/M08/warehouse.sdf</a:t>
+            </a:r>
+          </a:p>
+          <a:p>
+            <a:r>
+              <a:t>[확인] 코드를 저장하고 다음 코드 슬라이드 또는 build 단계로 이동한다.</a:t>
             </a:r>
           </a:p>
           <a:p>
@@ -2268,7 +2282,7 @@
           </a:p>
           <a:p>
             <a:r>
-              <a:t>[오류] 오류가 나면 현재 폴더, source, 파일 경로를 먼저 확인한다.</a:t>
+              <a:t>[오류] 들여쓰기·XML 태그·따옴표가 슬라이드와 정확히 같은지 확인한다.</a:t>
             </a:r>
           </a:p>
         </p:txBody>
@@ -2338,17 +2352,17 @@
           <a:lstStyle/>
           <a:p>
             <a:r>
-              <a:t>[설명] 검증 명령은 GUI 결과와 별도로 실행해 재현 가능한 완료 기준을 만든다.</a:t>
-            </a:r>
-          </a:p>
-          <a:p>
-            <a:r>
-              <a:t>[실행] gz sdf -k ~/ros2_curri/agv_ws/src/agv_description/curriculum_stages/M08/model.sdf</a:t>
-            </a:r>
-          </a:p>
-          <a:p>
-            <a:r>
-              <a:t>rg -n '&lt;sensor|DiffDrive|/cmd_vel|/odom' ~/ros2_curri/agv_ws/src/agv_description/curriculum_stages/M08/model.sdf</a:t>
+              <a:t>[설명] build/source/run을 생략 없이 실행한다.</a:t>
+            </a:r>
+          </a:p>
+          <a:p>
+            <a:r>
+              <a:t>[실행] cd ~/ros2_curri/agv_ws</a:t>
+            </a:r>
+          </a:p>
+          <a:p>
+            <a:r>
+              <a:t>gz sim -r src/agv_description/curriculum_stages/M08/warehouse.sdf</a:t>
             </a:r>
           </a:p>
           <a:p>
@@ -2433,7 +2447,7 @@
           <a:lstStyle/>
           <a:p>
             <a:r>
-              <a:t>[설명] 오류를 대신 해결하지 말고 증상부터 우선 확인 순서대로 교육생이 실행하게 한다.</a:t>
+              <a:t>[설명] 실제 Ubuntu/ROS 2 환경에서 생성한 검증 화면이다.</a:t>
             </a:r>
           </a:p>
           <a:p>
@@ -2443,7 +2457,7 @@
           </a:p>
           <a:p>
             <a:r>
-              <a:t>[확인] 수정 뒤 첫 검증 명령을 다시 실행한다.</a:t>
+              <a:t>[확인] ① 명령/설정  ② 정상 출력 또는 화면  ③ 다음 검증 명령으로 재확인</a:t>
             </a:r>
           </a:p>
           <a:p>
@@ -2453,7 +2467,7 @@
           </a:p>
           <a:p>
             <a:r>
-              <a:t>[오류] 슬라이드의 두 대표 오류를 먼저 사용한다.</a:t>
+              <a:t>[오류] 오류가 나면 현재 폴더, source, 파일 경로를 먼저 확인한다.</a:t>
             </a:r>
           </a:p>
         </p:txBody>
@@ -2613,7 +2627,7 @@
           <a:lstStyle/>
           <a:p>
             <a:r>
-              <a:t>[설명] 교육생이 직접 한 값만 바꿔 원인과 결과를 연결하게 한다.</a:t>
+              <a:t>[설명] 실제 Ubuntu/ROS 2 환경에서 생성한 검증 화면이다.</a:t>
             </a:r>
           </a:p>
           <a:p>
@@ -2623,7 +2637,7 @@
           </a:p>
           <a:p>
             <a:r>
-              <a:t>[확인] 원래 값과 변경 값을 모두 기록한다.</a:t>
+              <a:t>[확인] warehouse_m08, model://agv, pose 세 항목을 순서대로 찾습니다.</a:t>
             </a:r>
           </a:p>
           <a:p>
@@ -2703,7 +2717,7 @@
           <a:lstStyle/>
           <a:p>
             <a:r>
-              <a:t>[설명] 교육생이 Complete·캡처·로그를 저장했는지 확인하고 다음 모듈의 시작 상태를 읽는다.</a:t>
+              <a:t>[설명] 실제 Ubuntu/ROS 2 환경에서 생성한 검증 화면이다.</a:t>
             </a:r>
           </a:p>
           <a:p>
@@ -2713,7 +2727,7 @@
           </a:p>
           <a:p>
             <a:r>
-              <a:t>[확인] M09 Differential Drive 시작 조건을 말할 수 있다.</a:t>
+              <a:t>[확인] 오른쪽 Entity Tree에서 ground·wall·target·agv가 따로 생성됐는지 확인합니다.</a:t>
             </a:r>
           </a:p>
           <a:p>
@@ -2793,6 +2807,371 @@
           <a:lstStyle/>
           <a:p>
             <a:r>
+              <a:t>[설명] 검증 명령은 GUI 결과와 별도로 실행해 재현 가능한 완료 기준을 만든다.</a:t>
+            </a:r>
+          </a:p>
+          <a:p>
+            <a:r>
+              <a:t>[실행] gz sdf -k ~/ros2_curri/agv_ws/src/agv_description/curriculum_stages/M08/model.sdf</a:t>
+            </a:r>
+          </a:p>
+          <a:p>
+            <a:r>
+              <a:t>rg -n '&lt;sensor|DiffDrive|/cmd_vel|/odom' ~/ros2_curri/agv_ws/src/agv_description/curriculum_stages/M08/model.sdf</a:t>
+            </a:r>
+          </a:p>
+          <a:p>
+            <a:r>
+              <a:t>[확인] ground·벽·박스가 있는 World에 AGV가 spawn되어 있는 Gazebo 화면을 확인한다.</a:t>
+            </a:r>
+          </a:p>
+          <a:p>
+            <a:r>
+              <a:t>[멈춤] 교육생이 현재 체크포인트를 통과할 때까지 기다린다.</a:t>
+            </a:r>
+          </a:p>
+          <a:p>
+            <a:r>
+              <a:t>[오류] 오류가 나면 현재 폴더, source, 파일 경로를 먼저 확인한다.</a:t>
+            </a:r>
+          </a:p>
+        </p:txBody>
+      </p:sp>
+      <p:sp>
+        <p:nvSpPr>
+          <p:cNvPr id="4" name="Slide Number Placeholder 3"/>
+          <p:cNvSpPr>
+            <a:spLocks noGrp="1"/>
+          </p:cNvSpPr>
+          <p:nvPr>
+            <p:ph type="sldNum" idx="5" sz="quarter"/>
+          </p:nvPr>
+        </p:nvSpPr>
+        <p:spPr/>
+      </p:sp>
+    </p:spTree>
+  </p:cSld>
+  <p:clrMapOvr>
+    <a:masterClrMapping/>
+  </p:clrMapOvr>
+</p:notes>
+</file>
+
+<file path=ppt/notesSlides/notesSlide33.xml><?xml version="1.0" encoding="utf-8"?>
+<p:notes xmlns:a="http://schemas.openxmlformats.org/drawingml/2006/main" xmlns:p="http://schemas.openxmlformats.org/presentationml/2006/main" xmlns:r="http://schemas.openxmlformats.org/officeDocument/2006/relationships">
+  <p:cSld>
+    <p:spTree>
+      <p:nvGrpSpPr>
+        <p:cNvPr id="1" name=""/>
+        <p:cNvGrpSpPr/>
+        <p:nvPr/>
+      </p:nvGrpSpPr>
+      <p:grpSpPr>
+        <a:xfrm>
+          <a:off x="0" y="0"/>
+          <a:ext cx="0" cy="0"/>
+          <a:chOff x="0" y="0"/>
+          <a:chExt cx="0" cy="0"/>
+        </a:xfrm>
+      </p:grpSpPr>
+      <p:sp>
+        <p:nvSpPr>
+          <p:cNvPr id="2" name="Slide Image Placeholder 1"/>
+          <p:cNvSpPr>
+            <a:spLocks noGrp="1"/>
+          </p:cNvSpPr>
+          <p:nvPr>
+            <p:ph type="sldImg" idx="2"/>
+          </p:nvPr>
+        </p:nvSpPr>
+        <p:spPr/>
+      </p:sp>
+      <p:sp>
+        <p:nvSpPr>
+          <p:cNvPr id="3" name="Notes Placeholder 2"/>
+          <p:cNvSpPr>
+            <a:spLocks noGrp="1"/>
+          </p:cNvSpPr>
+          <p:nvPr>
+            <p:ph type="body" idx="3" sz="quarter"/>
+          </p:nvPr>
+        </p:nvSpPr>
+        <p:spPr/>
+        <p:txBody>
+          <a:bodyPr/>
+          <a:lstStyle/>
+          <a:p>
+            <a:r>
+              <a:t>[설명] 오류를 대신 해결하지 말고 증상부터 우선 확인 순서대로 교육생이 실행하게 한다.</a:t>
+            </a:r>
+          </a:p>
+          <a:p>
+            <a:r>
+              <a:t>[실행] 슬라이드의 명령 또는 파일 작성 단계를 진행한다.</a:t>
+            </a:r>
+          </a:p>
+          <a:p>
+            <a:r>
+              <a:t>[확인] 수정 뒤 첫 검증 명령을 다시 실행한다.</a:t>
+            </a:r>
+          </a:p>
+          <a:p>
+            <a:r>
+              <a:t>[멈춤] 교육생이 현재 체크포인트를 통과할 때까지 기다린다.</a:t>
+            </a:r>
+          </a:p>
+          <a:p>
+            <a:r>
+              <a:t>[오류] 슬라이드의 두 대표 오류를 먼저 사용한다.</a:t>
+            </a:r>
+          </a:p>
+        </p:txBody>
+      </p:sp>
+      <p:sp>
+        <p:nvSpPr>
+          <p:cNvPr id="4" name="Slide Number Placeholder 3"/>
+          <p:cNvSpPr>
+            <a:spLocks noGrp="1"/>
+          </p:cNvSpPr>
+          <p:nvPr>
+            <p:ph type="sldNum" idx="5" sz="quarter"/>
+          </p:nvPr>
+        </p:nvSpPr>
+        <p:spPr/>
+      </p:sp>
+    </p:spTree>
+  </p:cSld>
+  <p:clrMapOvr>
+    <a:masterClrMapping/>
+  </p:clrMapOvr>
+</p:notes>
+</file>
+
+<file path=ppt/notesSlides/notesSlide34.xml><?xml version="1.0" encoding="utf-8"?>
+<p:notes xmlns:a="http://schemas.openxmlformats.org/drawingml/2006/main" xmlns:p="http://schemas.openxmlformats.org/presentationml/2006/main" xmlns:r="http://schemas.openxmlformats.org/officeDocument/2006/relationships">
+  <p:cSld>
+    <p:spTree>
+      <p:nvGrpSpPr>
+        <p:cNvPr id="1" name=""/>
+        <p:cNvGrpSpPr/>
+        <p:nvPr/>
+      </p:nvGrpSpPr>
+      <p:grpSpPr>
+        <a:xfrm>
+          <a:off x="0" y="0"/>
+          <a:ext cx="0" cy="0"/>
+          <a:chOff x="0" y="0"/>
+          <a:chExt cx="0" cy="0"/>
+        </a:xfrm>
+      </p:grpSpPr>
+      <p:sp>
+        <p:nvSpPr>
+          <p:cNvPr id="2" name="Slide Image Placeholder 1"/>
+          <p:cNvSpPr>
+            <a:spLocks noGrp="1"/>
+          </p:cNvSpPr>
+          <p:nvPr>
+            <p:ph type="sldImg" idx="2"/>
+          </p:nvPr>
+        </p:nvSpPr>
+        <p:spPr/>
+      </p:sp>
+      <p:sp>
+        <p:nvSpPr>
+          <p:cNvPr id="3" name="Notes Placeholder 2"/>
+          <p:cNvSpPr>
+            <a:spLocks noGrp="1"/>
+          </p:cNvSpPr>
+          <p:nvPr>
+            <p:ph type="body" idx="3" sz="quarter"/>
+          </p:nvPr>
+        </p:nvSpPr>
+        <p:spPr/>
+        <p:txBody>
+          <a:bodyPr/>
+          <a:lstStyle/>
+          <a:p>
+            <a:r>
+              <a:t>[설명] 교육생이 직접 한 값만 바꿔 원인과 결과를 연결하게 한다.</a:t>
+            </a:r>
+          </a:p>
+          <a:p>
+            <a:r>
+              <a:t>[실행] 슬라이드의 명령 또는 파일 작성 단계를 진행한다.</a:t>
+            </a:r>
+          </a:p>
+          <a:p>
+            <a:r>
+              <a:t>[확인] 원래 값과 변경 값을 모두 기록한다.</a:t>
+            </a:r>
+          </a:p>
+          <a:p>
+            <a:r>
+              <a:t>[멈춤] 교육생이 현재 체크포인트를 통과할 때까지 기다린다.</a:t>
+            </a:r>
+          </a:p>
+          <a:p>
+            <a:r>
+              <a:t>[오류] 오류가 나면 현재 폴더, source, 파일 경로를 먼저 확인한다.</a:t>
+            </a:r>
+          </a:p>
+        </p:txBody>
+      </p:sp>
+      <p:sp>
+        <p:nvSpPr>
+          <p:cNvPr id="4" name="Slide Number Placeholder 3"/>
+          <p:cNvSpPr>
+            <a:spLocks noGrp="1"/>
+          </p:cNvSpPr>
+          <p:nvPr>
+            <p:ph type="sldNum" idx="5" sz="quarter"/>
+          </p:nvPr>
+        </p:nvSpPr>
+        <p:spPr/>
+      </p:sp>
+    </p:spTree>
+  </p:cSld>
+  <p:clrMapOvr>
+    <a:masterClrMapping/>
+  </p:clrMapOvr>
+</p:notes>
+</file>
+
+<file path=ppt/notesSlides/notesSlide35.xml><?xml version="1.0" encoding="utf-8"?>
+<p:notes xmlns:a="http://schemas.openxmlformats.org/drawingml/2006/main" xmlns:p="http://schemas.openxmlformats.org/presentationml/2006/main" xmlns:r="http://schemas.openxmlformats.org/officeDocument/2006/relationships">
+  <p:cSld>
+    <p:spTree>
+      <p:nvGrpSpPr>
+        <p:cNvPr id="1" name=""/>
+        <p:cNvGrpSpPr/>
+        <p:nvPr/>
+      </p:nvGrpSpPr>
+      <p:grpSpPr>
+        <a:xfrm>
+          <a:off x="0" y="0"/>
+          <a:ext cx="0" cy="0"/>
+          <a:chOff x="0" y="0"/>
+          <a:chExt cx="0" cy="0"/>
+        </a:xfrm>
+      </p:grpSpPr>
+      <p:sp>
+        <p:nvSpPr>
+          <p:cNvPr id="2" name="Slide Image Placeholder 1"/>
+          <p:cNvSpPr>
+            <a:spLocks noGrp="1"/>
+          </p:cNvSpPr>
+          <p:nvPr>
+            <p:ph type="sldImg" idx="2"/>
+          </p:nvPr>
+        </p:nvSpPr>
+        <p:spPr/>
+      </p:sp>
+      <p:sp>
+        <p:nvSpPr>
+          <p:cNvPr id="3" name="Notes Placeholder 2"/>
+          <p:cNvSpPr>
+            <a:spLocks noGrp="1"/>
+          </p:cNvSpPr>
+          <p:nvPr>
+            <p:ph type="body" idx="3" sz="quarter"/>
+          </p:nvPr>
+        </p:nvSpPr>
+        <p:spPr/>
+        <p:txBody>
+          <a:bodyPr/>
+          <a:lstStyle/>
+          <a:p>
+            <a:r>
+              <a:t>[설명] 교육생이 Complete·캡처·로그를 저장했는지 확인하고 다음 모듈의 시작 상태를 읽는다.</a:t>
+            </a:r>
+          </a:p>
+          <a:p>
+            <a:r>
+              <a:t>[실행] 슬라이드의 명령 또는 파일 작성 단계를 진행한다.</a:t>
+            </a:r>
+          </a:p>
+          <a:p>
+            <a:r>
+              <a:t>[확인] M09 Differential Drive 시작 조건을 말할 수 있다.</a:t>
+            </a:r>
+          </a:p>
+          <a:p>
+            <a:r>
+              <a:t>[멈춤] 교육생이 현재 체크포인트를 통과할 때까지 기다린다.</a:t>
+            </a:r>
+          </a:p>
+          <a:p>
+            <a:r>
+              <a:t>[오류] 오류가 나면 현재 폴더, source, 파일 경로를 먼저 확인한다.</a:t>
+            </a:r>
+          </a:p>
+        </p:txBody>
+      </p:sp>
+      <p:sp>
+        <p:nvSpPr>
+          <p:cNvPr id="4" name="Slide Number Placeholder 3"/>
+          <p:cNvSpPr>
+            <a:spLocks noGrp="1"/>
+          </p:cNvSpPr>
+          <p:nvPr>
+            <p:ph type="sldNum" idx="5" sz="quarter"/>
+          </p:nvPr>
+        </p:nvSpPr>
+        <p:spPr/>
+      </p:sp>
+    </p:spTree>
+  </p:cSld>
+  <p:clrMapOvr>
+    <a:masterClrMapping/>
+  </p:clrMapOvr>
+</p:notes>
+</file>
+
+<file path=ppt/notesSlides/notesSlide36.xml><?xml version="1.0" encoding="utf-8"?>
+<p:notes xmlns:a="http://schemas.openxmlformats.org/drawingml/2006/main" xmlns:p="http://schemas.openxmlformats.org/presentationml/2006/main" xmlns:r="http://schemas.openxmlformats.org/officeDocument/2006/relationships">
+  <p:cSld>
+    <p:spTree>
+      <p:nvGrpSpPr>
+        <p:cNvPr id="1" name=""/>
+        <p:cNvGrpSpPr/>
+        <p:nvPr/>
+      </p:nvGrpSpPr>
+      <p:grpSpPr>
+        <a:xfrm>
+          <a:off x="0" y="0"/>
+          <a:ext cx="0" cy="0"/>
+          <a:chOff x="0" y="0"/>
+          <a:chExt cx="0" cy="0"/>
+        </a:xfrm>
+      </p:grpSpPr>
+      <p:sp>
+        <p:nvSpPr>
+          <p:cNvPr id="2" name="Slide Image Placeholder 1"/>
+          <p:cNvSpPr>
+            <a:spLocks noGrp="1"/>
+          </p:cNvSpPr>
+          <p:nvPr>
+            <p:ph type="sldImg" idx="2"/>
+          </p:nvPr>
+        </p:nvSpPr>
+        <p:spPr/>
+      </p:sp>
+      <p:sp>
+        <p:nvSpPr>
+          <p:cNvPr id="3" name="Notes Placeholder 2"/>
+          <p:cNvSpPr>
+            <a:spLocks noGrp="1"/>
+          </p:cNvSpPr>
+          <p:nvPr>
+            <p:ph type="body" idx="3" sz="quarter"/>
+          </p:nvPr>
+        </p:nvSpPr>
+        <p:spPr/>
+        <p:txBody>
+          <a:bodyPr/>
+          <a:lstStyle/>
+          <a:p>
+            <a:r>
               <a:t>[설명] 공식 문서는 버전 차이와 확장 학습을 확인할 때 사용한다.</a:t>
             </a:r>
           </a:p>
@@ -3153,27 +3532,17 @@
           <a:lstStyle/>
           <a:p>
             <a:r>
-              <a:t>[설명] M08은 M07 물리 AGV를 World에 배치하는 단계이며 DiffDrive·Camera·LiDAR·IMU는 아직 넣지 않는다.</a:t>
-            </a:r>
-          </a:p>
-          <a:p>
-            <a:r>
-              <a:t>[실행] cd ~/ros2_curri/agv_ws</a:t>
-            </a:r>
-          </a:p>
-          <a:p>
-            <a:r>
-              <a:t>gz sdf -k src/agv_description/curriculum_stages/M08/model.sdf</a:t>
-            </a:r>
-          </a:p>
-          <a:p>
-            <a:r>
-              <a:t>rg -n 'model://agv|&lt;world name=' src/agv_description/curriculum_stages/M08/warehouse.sdf</a:t>
-            </a:r>
-          </a:p>
-          <a:p>
-            <a:r>
-              <a:t>[확인] 명령 출력에서 슬라이드의 확인 항목을 찾는다.</a:t>
+              <a:t>[설명] 파일을 코드 문법보다 먼저 역할·사용법·확인 화면으로 설명한다.</a:t>
+            </a:r>
+          </a:p>
+          <a:p>
+            <a:r>
+              <a:t>[실행] 슬라이드의 명령 또는 파일 작성 단계를 진행한다.</a:t>
+            </a:r>
+          </a:p>
+          <a:p>
+            <a:r>
+              <a:t>[확인] 교육생이 각 파일의 산출물과 확인 위치를 말할 수 있다.</a:t>
             </a:r>
           </a:p>
           <a:p>
@@ -3253,22 +3622,17 @@
           <a:lstStyle/>
           <a:p>
             <a:r>
-              <a:t>[설명] M08 snapshot을 agv_gazebo models/worlds 경로에 복사한 뒤 Gazebo를 실행해 spawn만 확인한다.</a:t>
-            </a:r>
-          </a:p>
-          <a:p>
-            <a:r>
-              <a:t>[실행] gz sim -r src/agv_description/curriculum_stages/M08/warehouse.sdf</a:t>
-            </a:r>
-          </a:p>
-          <a:p>
-            <a:r>
-              <a:t># 이 단계에는 ROS bridge와 구동 topic이 없다.</a:t>
-            </a:r>
-          </a:p>
-          <a:p>
-            <a:r>
-              <a:t>[확인] 명령 출력에서 슬라이드의 확인 항목을 찾는다.</a:t>
+              <a:t>[설명] 파일을 코드 문법보다 먼저 역할·사용법·확인 화면으로 설명한다.</a:t>
+            </a:r>
+          </a:p>
+          <a:p>
+            <a:r>
+              <a:t>[실행] 슬라이드의 명령 또는 파일 작성 단계를 진행한다.</a:t>
+            </a:r>
+          </a:p>
+          <a:p>
+            <a:r>
+              <a:t>[확인] 교육생이 각 파일의 산출물과 확인 위치를 말할 수 있다.</a:t>
             </a:r>
           </a:p>
           <a:p>
@@ -3348,17 +3712,17 @@
           <a:lstStyle/>
           <a:p>
             <a:r>
-              <a:t>[설명] ~/ros2_curri/agv_ws/src/agv_description/curriculum_stages/M08/model.config의 전체 파일을 1/1 구간으로 작성한다.</a:t>
-            </a:r>
-          </a:p>
-          <a:p>
-            <a:r>
-              <a:t>[실행] nano ~/ros2_curri/agv_ws/src/agv_description/curriculum_stages/M08/model.config</a:t>
-            </a:r>
-          </a:p>
-          <a:p>
-            <a:r>
-              <a:t>[확인] 코드를 저장하고 다음 코드 슬라이드 또는 build 단계로 이동한다.</a:t>
+              <a:t>[설명] World는 무대이고 model://agv include는 그 무대 위에 로봇을 놓는 한 줄입니다.</a:t>
+            </a:r>
+          </a:p>
+          <a:p>
+            <a:r>
+              <a:t>[실행] 슬라이드의 명령 또는 파일 작성 단계를 진행한다.</a:t>
+            </a:r>
+          </a:p>
+          <a:p>
+            <a:r>
+              <a:t>[확인] Gazebo Entity Tree에서 환경 model과 agv가 따로 보이는지 확인합니다.</a:t>
             </a:r>
           </a:p>
           <a:p>
@@ -3368,7 +3732,7 @@
           </a:p>
           <a:p>
             <a:r>
-              <a:t>[오류] 들여쓰기·XML 태그·따옴표가 슬라이드와 정확히 같은지 확인한다.</a:t>
+              <a:t>[오류] 오류가 나면 현재 폴더, source, 파일 경로를 먼저 확인한다.</a:t>
             </a:r>
           </a:p>
         </p:txBody>
@@ -6741,7 +7105,7 @@
               </a:defRPr>
             </a:pPr>
             <a:r>
-              <a:t>파일을 새로 만들고 저장한다 (1/11)</a:t>
+              <a:t>model과 World를 각각 검사한다</a:t>
             </a:r>
           </a:p>
         </p:txBody>
@@ -6780,7 +7144,7 @@
               </a:defRPr>
             </a:pPr>
             <a:r>
-              <a:t>~/ros2_curri/agv_ws/src/agv_description/curriculum_stages/M08/model.sdf</a:t>
+              <a:t>한 장에는 한 행동만 수행합니다.</a:t>
             </a:r>
           </a:p>
         </p:txBody>
@@ -6916,7 +7280,7 @@
               </a:defRPr>
             </a:pPr>
             <a:r>
-              <a:t>현재 단계 4/15    |    현재 폴더 ~/ros2_curri/agv_ws    |    현재 터미널</a:t>
+              <a:t>현재 단계 1/2    |    현재 폴더 ~/ros2_curri/agv_ws    |    현재 터미널</a:t>
             </a:r>
           </a:p>
         </p:txBody>
@@ -6929,25 +7293,64 @@
         </p:nvSpPr>
         <p:spPr>
           <a:xfrm>
-            <a:off x="658368" y="1627632"/>
-            <a:ext cx="10972800" cy="256032"/>
-          </a:xfrm>
-          <a:prstGeom prst="rect">
-            <a:avLst/>
-          </a:prstGeom>
-          <a:noFill/>
-        </p:spPr>
-        <p:txBody>
-          <a:bodyPr wrap="square" lIns="73152" rIns="73152" tIns="36576" bIns="36576">
-            <a:spAutoFit/>
-          </a:bodyPr>
-          <a:lstStyle/>
-          <a:p>
-            <a:pPr algn="l">
-              <a:spcAft>
-                <a:spcPts val="0"/>
-              </a:spcAft>
-              <a:defRPr sz="1500" b="1">
+            <a:off x="676656" y="1764792"/>
+            <a:ext cx="1828800" cy="347472"/>
+          </a:xfrm>
+          <a:prstGeom prst="rect">
+            <a:avLst/>
+          </a:prstGeom>
+          <a:noFill/>
+        </p:spPr>
+        <p:txBody>
+          <a:bodyPr wrap="square" lIns="73152" rIns="73152" tIns="36576" bIns="36576">
+            <a:spAutoFit/>
+          </a:bodyPr>
+          <a:lstStyle/>
+          <a:p>
+            <a:pPr algn="l">
+              <a:spcAft>
+                <a:spcPts val="0"/>
+              </a:spcAft>
+              <a:defRPr sz="1800" b="1">
+                <a:solidFill>
+                  <a:srgbClr val="225B9B"/>
+                </a:solidFill>
+                <a:latin typeface="Noto Sans CJK KR"/>
+              </a:defRPr>
+            </a:pPr>
+            <a:r>
+              <a:t>왜 하는가</a:t>
+            </a:r>
+          </a:p>
+        </p:txBody>
+      </p:sp>
+      <p:sp>
+        <p:nvSpPr>
+          <p:cNvPr id="8" name="TextBox 7"/>
+          <p:cNvSpPr txBox="1"/>
+          <p:nvPr/>
+        </p:nvSpPr>
+        <p:spPr>
+          <a:xfrm>
+            <a:off x="676656" y="2103120"/>
+            <a:ext cx="10789920" cy="512064"/>
+          </a:xfrm>
+          <a:prstGeom prst="rect">
+            <a:avLst/>
+          </a:prstGeom>
+          <a:noFill/>
+        </p:spPr>
+        <p:txBody>
+          <a:bodyPr wrap="square" lIns="73152" rIns="73152" tIns="36576" bIns="36576">
+            <a:spAutoFit/>
+          </a:bodyPr>
+          <a:lstStyle/>
+          <a:p>
+            <a:pPr algn="l">
+              <a:spcAft>
+                <a:spcPts val="0"/>
+              </a:spcAft>
+              <a:defRPr sz="2000" b="0">
                 <a:solidFill>
                   <a:srgbClr val="122C4E"/>
                 </a:solidFill>
@@ -6955,85 +7358,23 @@
               </a:defRPr>
             </a:pPr>
             <a:r>
-              <a:t>이번 단계: 파일의 전체 내용을 중간 생략 없이 작성합니다. 아래 줄 범위를 끝까지 입력하세요.</a:t>
-            </a:r>
-          </a:p>
-        </p:txBody>
-      </p:sp>
-      <p:sp>
-        <p:nvSpPr>
-          <p:cNvPr id="8" name="Rectangle 7"/>
+              <a:t>M08은 M07 물리 AGV를 World에 배치하는 단계이며 DiffDrive·Camera·LiDAR·IMU는 아직 넣지 않는다.</a:t>
+            </a:r>
+          </a:p>
+        </p:txBody>
+      </p:sp>
+      <p:sp>
+        <p:nvSpPr>
+          <p:cNvPr id="9" name="Rounded Rectangle 8"/>
           <p:cNvSpPr/>
           <p:nvPr/>
         </p:nvSpPr>
         <p:spPr>
           <a:xfrm>
-            <a:off x="658368" y="1956816"/>
-            <a:ext cx="10972800" cy="603504"/>
-          </a:xfrm>
-          <a:prstGeom prst="rect">
-            <a:avLst/>
-          </a:prstGeom>
-          <a:solidFill>
-            <a:srgbClr val="F4F7FB"/>
-          </a:solidFill>
-          <a:ln>
-            <a:solidFill>
-              <a:srgbClr val="F4F7FB"/>
-            </a:solidFill>
-          </a:ln>
-        </p:spPr>
-        <p:style>
-          <a:lnRef idx="1">
-            <a:schemeClr val="accent1"/>
-          </a:lnRef>
-          <a:fillRef idx="3">
-            <a:schemeClr val="accent1"/>
-          </a:fillRef>
-          <a:effectRef idx="2">
-            <a:schemeClr val="accent1"/>
-          </a:effectRef>
-          <a:fontRef idx="minor">
-            <a:schemeClr val="lt1"/>
-          </a:fontRef>
-        </p:style>
-        <p:txBody>
-          <a:bodyPr rtlCol="0" anchor="ctr" wrap="square" lIns="73152" rIns="73152" tIns="36576" bIns="36576"/>
-          <a:lstStyle/>
-          <a:p>
-            <a:pPr algn="l">
-              <a:spcAft>
-                <a:spcPts val="0"/>
-              </a:spcAft>
-              <a:defRPr sz="1400" b="0">
-                <a:solidFill>
-                  <a:srgbClr val="122C4E"/>
-                </a:solidFill>
-                <a:latin typeface="DejaVu Sans Mono"/>
-              </a:defRPr>
-            </a:pPr>
-            <a:r>
-              <a:t>파일 생성: mkdir -p ~/ros2_curri/agv_ws/src/agv_description/curriculum_stages/M08</a:t>
-            </a:r>
-            <a:br/>
-            <a:r>
-              <a:t>파일 열기: nano ~/ros2_curri/agv_ws/src/agv_description/curriculum_stages/M08/model.sdf</a:t>
-            </a:r>
-          </a:p>
-        </p:txBody>
-      </p:sp>
-      <p:sp>
-        <p:nvSpPr>
-          <p:cNvPr id="9" name="Rectangle 8"/>
-          <p:cNvSpPr/>
-          <p:nvPr/>
-        </p:nvSpPr>
-        <p:spPr>
-          <a:xfrm>
-            <a:off x="658368" y="2706624"/>
-            <a:ext cx="10972800" cy="3364992"/>
-          </a:xfrm>
-          <a:prstGeom prst="rect">
+            <a:off x="676656" y="2871216"/>
+            <a:ext cx="10835640" cy="2331720"/>
+          </a:xfrm>
+          <a:prstGeom prst="roundRect">
             <a:avLst/>
           </a:prstGeom>
           <a:solidFill>
@@ -7060,14 +7401,14 @@
           </a:fontRef>
         </p:style>
         <p:txBody>
-          <a:bodyPr rtlCol="0" anchor="ctr" wrap="square" lIns="164592" rIns="164592" tIns="109728" bIns="36576"/>
-          <a:lstStyle/>
-          <a:p>
-            <a:pPr algn="l">
-              <a:spcAft>
-                <a:spcPts val="0"/>
-              </a:spcAft>
-              <a:defRPr sz="1400" b="0">
+          <a:bodyPr rtlCol="0" anchor="ctr" wrap="square" lIns="73152" rIns="73152" tIns="36576" bIns="36576"/>
+          <a:lstStyle/>
+          <a:p>
+            <a:pPr algn="l">
+              <a:spcAft>
+                <a:spcPts val="0"/>
+              </a:spcAft>
+              <a:defRPr sz="1600" b="0">
                 <a:solidFill>
                   <a:srgbClr val="FFFFFF"/>
                 </a:solidFill>
@@ -7075,51 +7416,15 @@
               </a:defRPr>
             </a:pPr>
             <a:r>
-              <a:t>&lt;?xml version="1.0" ?&gt;</a:t>
+              <a:t>cd ~/ros2_curri/agv_ws</a:t>
             </a:r>
             <a:br/>
             <a:r>
-              <a:t>&lt;!-- M08 spawn snapshot: physical links only; no DiffDrive and no Camera/LiDAR/IMU. --&gt;</a:t>
+              <a:t>gz sdf -k src/agv_description/curriculum_stages/M08/model.sdf</a:t>
             </a:r>
             <a:br/>
             <a:r>
-              <a:t>&lt;sdf version="1.10"&gt;</a:t>
-            </a:r>
-            <a:br/>
-            <a:r>
-              <a:t>  &lt;model name="agv"&gt;</a:t>
-            </a:r>
-            <a:br/>
-            <a:r>
-              <a:t>    &lt;link name="base_link"&gt;</a:t>
-            </a:r>
-            <a:br/>
-            <a:r>
-              <a:t>      &lt;pose&gt;0 0 0.16 0 0 0&lt;/pose&gt;</a:t>
-            </a:r>
-            <a:br/>
-            <a:r>
-              <a:t>      &lt;inertial&gt;</a:t>
-            </a:r>
-            <a:br/>
-            <a:r>
-              <a:t>        &lt;mass&gt;12.0&lt;/mass&gt;</a:t>
-            </a:r>
-            <a:br/>
-            <a:r>
-              <a:t>        &lt;inertia&gt;</a:t>
-            </a:r>
-            <a:br/>
-            <a:r>
-              <a:t>          &lt;ixx&gt;0.20&lt;/ixx&gt;</a:t>
-            </a:r>
-            <a:br/>
-            <a:r>
-              <a:t>          &lt;iyy&gt;0.40&lt;/iyy&gt;</a:t>
-            </a:r>
-            <a:br/>
-            <a:r>
-              <a:t>          &lt;izz&gt;0.50&lt;/izz&gt;</a:t>
+              <a:t>rg -n 'model://agv|&lt;world name=' src/agv_description/curriculum_stages/M08/warehouse.sdf</a:t>
             </a:r>
           </a:p>
         </p:txBody>
@@ -7132,33 +7437,72 @@
         </p:nvSpPr>
         <p:spPr>
           <a:xfrm>
-            <a:off x="749808" y="6181344"/>
-            <a:ext cx="10789920" cy="201168"/>
-          </a:xfrm>
-          <a:prstGeom prst="rect">
-            <a:avLst/>
-          </a:prstGeom>
-          <a:noFill/>
-        </p:spPr>
-        <p:txBody>
-          <a:bodyPr wrap="square" lIns="73152" rIns="73152" tIns="36576" bIns="36576">
-            <a:spAutoFit/>
-          </a:bodyPr>
-          <a:lstStyle/>
-          <a:p>
-            <a:pPr algn="l">
-              <a:spcAft>
-                <a:spcPts val="0"/>
-              </a:spcAft>
-              <a:defRPr sz="1000" b="0">
-                <a:solidFill>
-                  <a:srgbClr val="5C6672"/>
-                </a:solidFill>
-                <a:latin typeface="Noto Sans CJK KR"/>
-              </a:defRPr>
-            </a:pPr>
-            <a:r>
-              <a:t>파일 전체 1/11 · 이 슬라이드 다음에 같은 파일의 나머지 줄이 이어집니다.</a:t>
+            <a:off x="768096" y="5468112"/>
+            <a:ext cx="1143000" cy="256032"/>
+          </a:xfrm>
+          <a:prstGeom prst="rect">
+            <a:avLst/>
+          </a:prstGeom>
+          <a:noFill/>
+        </p:spPr>
+        <p:txBody>
+          <a:bodyPr wrap="square" lIns="73152" rIns="73152" tIns="36576" bIns="36576">
+            <a:spAutoFit/>
+          </a:bodyPr>
+          <a:lstStyle/>
+          <a:p>
+            <a:pPr algn="l">
+              <a:spcAft>
+                <a:spcPts val="0"/>
+              </a:spcAft>
+              <a:defRPr sz="1800" b="1">
+                <a:solidFill>
+                  <a:srgbClr val="2A8B5A"/>
+                </a:solidFill>
+                <a:latin typeface="Noto Sans CJK KR"/>
+              </a:defRPr>
+            </a:pPr>
+            <a:r>
+              <a:t>확인</a:t>
+            </a:r>
+          </a:p>
+        </p:txBody>
+      </p:sp>
+      <p:sp>
+        <p:nvSpPr>
+          <p:cNvPr id="11" name="TextBox 10"/>
+          <p:cNvSpPr txBox="1"/>
+          <p:nvPr/>
+        </p:nvSpPr>
+        <p:spPr>
+          <a:xfrm>
+            <a:off x="768096" y="5742432"/>
+            <a:ext cx="10561320" cy="347472"/>
+          </a:xfrm>
+          <a:prstGeom prst="rect">
+            <a:avLst/>
+          </a:prstGeom>
+          <a:noFill/>
+        </p:spPr>
+        <p:txBody>
+          <a:bodyPr wrap="square" lIns="73152" rIns="73152" tIns="36576" bIns="36576">
+            <a:spAutoFit/>
+          </a:bodyPr>
+          <a:lstStyle/>
+          <a:p>
+            <a:pPr algn="l">
+              <a:spcAft>
+                <a:spcPts val="0"/>
+              </a:spcAft>
+              <a:defRPr sz="1800" b="0">
+                <a:solidFill>
+                  <a:srgbClr val="122C4E"/>
+                </a:solidFill>
+                <a:latin typeface="Noto Sans CJK KR"/>
+              </a:defRPr>
+            </a:pPr>
+            <a:r>
+              <a:t>명령의 출력에서 topic·frame·파일 이름 또는 성공 메시지를 찾으면 이 단계가 완료됩니다.</a:t>
             </a:r>
           </a:p>
         </p:txBody>
@@ -7215,7 +7559,7 @@
               </a:defRPr>
             </a:pPr>
             <a:r>
-              <a:t>파일을 계속 작성하고 저장한다 (2/11)</a:t>
+              <a:t>World를 실행한다</a:t>
             </a:r>
           </a:p>
         </p:txBody>
@@ -7254,7 +7598,7 @@
               </a:defRPr>
             </a:pPr>
             <a:r>
-              <a:t>~/ros2_curri/agv_ws/src/agv_description/curriculum_stages/M08/model.sdf</a:t>
+              <a:t>한 장에는 한 행동만 수행합니다.</a:t>
             </a:r>
           </a:p>
         </p:txBody>
@@ -7390,7 +7734,7 @@
               </a:defRPr>
             </a:pPr>
             <a:r>
-              <a:t>현재 단계 5/15    |    현재 폴더 ~/ros2_curri/agv_ws    |    현재 터미널</a:t>
+              <a:t>현재 단계 2/2    |    현재 폴더 ~/ros2_curri/agv_ws    |    현재 터미널</a:t>
             </a:r>
           </a:p>
         </p:txBody>
@@ -7403,25 +7747,64 @@
         </p:nvSpPr>
         <p:spPr>
           <a:xfrm>
-            <a:off x="658368" y="1627632"/>
-            <a:ext cx="10972800" cy="256032"/>
-          </a:xfrm>
-          <a:prstGeom prst="rect">
-            <a:avLst/>
-          </a:prstGeom>
-          <a:noFill/>
-        </p:spPr>
-        <p:txBody>
-          <a:bodyPr wrap="square" lIns="73152" rIns="73152" tIns="36576" bIns="36576">
-            <a:spAutoFit/>
-          </a:bodyPr>
-          <a:lstStyle/>
-          <a:p>
-            <a:pPr algn="l">
-              <a:spcAft>
-                <a:spcPts val="0"/>
-              </a:spcAft>
-              <a:defRPr sz="1500" b="1">
+            <a:off x="676656" y="1764792"/>
+            <a:ext cx="1828800" cy="347472"/>
+          </a:xfrm>
+          <a:prstGeom prst="rect">
+            <a:avLst/>
+          </a:prstGeom>
+          <a:noFill/>
+        </p:spPr>
+        <p:txBody>
+          <a:bodyPr wrap="square" lIns="73152" rIns="73152" tIns="36576" bIns="36576">
+            <a:spAutoFit/>
+          </a:bodyPr>
+          <a:lstStyle/>
+          <a:p>
+            <a:pPr algn="l">
+              <a:spcAft>
+                <a:spcPts val="0"/>
+              </a:spcAft>
+              <a:defRPr sz="1800" b="1">
+                <a:solidFill>
+                  <a:srgbClr val="225B9B"/>
+                </a:solidFill>
+                <a:latin typeface="Noto Sans CJK KR"/>
+              </a:defRPr>
+            </a:pPr>
+            <a:r>
+              <a:t>왜 하는가</a:t>
+            </a:r>
+          </a:p>
+        </p:txBody>
+      </p:sp>
+      <p:sp>
+        <p:nvSpPr>
+          <p:cNvPr id="8" name="TextBox 7"/>
+          <p:cNvSpPr txBox="1"/>
+          <p:nvPr/>
+        </p:nvSpPr>
+        <p:spPr>
+          <a:xfrm>
+            <a:off x="676656" y="2103120"/>
+            <a:ext cx="10789920" cy="512064"/>
+          </a:xfrm>
+          <a:prstGeom prst="rect">
+            <a:avLst/>
+          </a:prstGeom>
+          <a:noFill/>
+        </p:spPr>
+        <p:txBody>
+          <a:bodyPr wrap="square" lIns="73152" rIns="73152" tIns="36576" bIns="36576">
+            <a:spAutoFit/>
+          </a:bodyPr>
+          <a:lstStyle/>
+          <a:p>
+            <a:pPr algn="l">
+              <a:spcAft>
+                <a:spcPts val="0"/>
+              </a:spcAft>
+              <a:defRPr sz="2000" b="0">
                 <a:solidFill>
                   <a:srgbClr val="122C4E"/>
                 </a:solidFill>
@@ -7429,85 +7812,23 @@
               </a:defRPr>
             </a:pPr>
             <a:r>
-              <a:t>이번 단계: 파일의 전체 내용을 중간 생략 없이 작성합니다. 아래 줄 범위를 끝까지 입력하세요.</a:t>
-            </a:r>
-          </a:p>
-        </p:txBody>
-      </p:sp>
-      <p:sp>
-        <p:nvSpPr>
-          <p:cNvPr id="8" name="Rectangle 7"/>
+              <a:t>M08 snapshot을 agv_gazebo models/worlds 경로에 복사한 뒤 Gazebo를 실행해 spawn만 확인한다.</a:t>
+            </a:r>
+          </a:p>
+        </p:txBody>
+      </p:sp>
+      <p:sp>
+        <p:nvSpPr>
+          <p:cNvPr id="9" name="Rounded Rectangle 8"/>
           <p:cNvSpPr/>
           <p:nvPr/>
         </p:nvSpPr>
         <p:spPr>
           <a:xfrm>
-            <a:off x="658368" y="1956816"/>
-            <a:ext cx="10972800" cy="603504"/>
-          </a:xfrm>
-          <a:prstGeom prst="rect">
-            <a:avLst/>
-          </a:prstGeom>
-          <a:solidFill>
-            <a:srgbClr val="F4F7FB"/>
-          </a:solidFill>
-          <a:ln>
-            <a:solidFill>
-              <a:srgbClr val="F4F7FB"/>
-            </a:solidFill>
-          </a:ln>
-        </p:spPr>
-        <p:style>
-          <a:lnRef idx="1">
-            <a:schemeClr val="accent1"/>
-          </a:lnRef>
-          <a:fillRef idx="3">
-            <a:schemeClr val="accent1"/>
-          </a:fillRef>
-          <a:effectRef idx="2">
-            <a:schemeClr val="accent1"/>
-          </a:effectRef>
-          <a:fontRef idx="minor">
-            <a:schemeClr val="lt1"/>
-          </a:fontRef>
-        </p:style>
-        <p:txBody>
-          <a:bodyPr rtlCol="0" anchor="ctr" wrap="square" lIns="73152" rIns="73152" tIns="36576" bIns="36576"/>
-          <a:lstStyle/>
-          <a:p>
-            <a:pPr algn="l">
-              <a:spcAft>
-                <a:spcPts val="0"/>
-              </a:spcAft>
-              <a:defRPr sz="1400" b="0">
-                <a:solidFill>
-                  <a:srgbClr val="122C4E"/>
-                </a:solidFill>
-                <a:latin typeface="DejaVu Sans Mono"/>
-              </a:defRPr>
-            </a:pPr>
-            <a:r>
-              <a:t>파일 생성: mkdir -p ~/ros2_curri/agv_ws/src/agv_description/curriculum_stages/M08</a:t>
-            </a:r>
-            <a:br/>
-            <a:r>
-              <a:t>파일 열기: nano ~/ros2_curri/agv_ws/src/agv_description/curriculum_stages/M08/model.sdf</a:t>
-            </a:r>
-          </a:p>
-        </p:txBody>
-      </p:sp>
-      <p:sp>
-        <p:nvSpPr>
-          <p:cNvPr id="9" name="Rectangle 8"/>
-          <p:cNvSpPr/>
-          <p:nvPr/>
-        </p:nvSpPr>
-        <p:spPr>
-          <a:xfrm>
-            <a:off x="658368" y="2706624"/>
-            <a:ext cx="10972800" cy="3364992"/>
-          </a:xfrm>
-          <a:prstGeom prst="rect">
+            <a:off x="676656" y="2871216"/>
+            <a:ext cx="10835640" cy="2331720"/>
+          </a:xfrm>
+          <a:prstGeom prst="roundRect">
             <a:avLst/>
           </a:prstGeom>
           <a:solidFill>
@@ -7534,14 +7855,14 @@
           </a:fontRef>
         </p:style>
         <p:txBody>
-          <a:bodyPr rtlCol="0" anchor="ctr" wrap="square" lIns="164592" rIns="164592" tIns="109728" bIns="36576"/>
-          <a:lstStyle/>
-          <a:p>
-            <a:pPr algn="l">
-              <a:spcAft>
-                <a:spcPts val="0"/>
-              </a:spcAft>
-              <a:defRPr sz="1400" b="0">
+          <a:bodyPr rtlCol="0" anchor="ctr" wrap="square" lIns="73152" rIns="73152" tIns="36576" bIns="36576"/>
+          <a:lstStyle/>
+          <a:p>
+            <a:pPr algn="l">
+              <a:spcAft>
+                <a:spcPts val="0"/>
+              </a:spcAft>
+              <a:defRPr sz="1600" b="0">
                 <a:solidFill>
                   <a:srgbClr val="FFFFFF"/>
                 </a:solidFill>
@@ -7549,51 +7870,11 @@
               </a:defRPr>
             </a:pPr>
             <a:r>
-              <a:t>        &lt;/inertia&gt;</a:t>
+              <a:t>gz sim -r src/agv_description/curriculum_stages/M08/warehouse.sdf</a:t>
             </a:r>
             <a:br/>
             <a:r>
-              <a:t>      &lt;/inertial&gt;</a:t>
-            </a:r>
-            <a:br/>
-            <a:r>
-              <a:t>      &lt;visual name="body"&gt;</a:t>
-            </a:r>
-            <a:br/>
-            <a:r>
-              <a:t>        &lt;geometry&gt;</a:t>
-            </a:r>
-            <a:br/>
-            <a:r>
-              <a:t>          &lt;box&gt;</a:t>
-            </a:r>
-            <a:br/>
-            <a:r>
-              <a:t>            &lt;size&gt;0.60 0.42 0.16&lt;/size&gt;</a:t>
-            </a:r>
-            <a:br/>
-            <a:r>
-              <a:t>          &lt;/box&gt;</a:t>
-            </a:r>
-            <a:br/>
-            <a:r>
-              <a:t>        &lt;/geometry&gt;</a:t>
-            </a:r>
-            <a:br/>
-            <a:r>
-              <a:t>      &lt;/visual&gt;</a:t>
-            </a:r>
-            <a:br/>
-            <a:r>
-              <a:t>      &lt;collision name="body_collision"&gt;</a:t>
-            </a:r>
-            <a:br/>
-            <a:r>
-              <a:t>        &lt;geometry&gt;</a:t>
-            </a:r>
-            <a:br/>
-            <a:r>
-              <a:t>          &lt;box&gt;</a:t>
+              <a:t># 이 단계에는 ROS bridge와 구동 topic이 없다.</a:t>
             </a:r>
           </a:p>
         </p:txBody>
@@ -7606,33 +7887,72 @@
         </p:nvSpPr>
         <p:spPr>
           <a:xfrm>
-            <a:off x="749808" y="6181344"/>
-            <a:ext cx="10789920" cy="201168"/>
-          </a:xfrm>
-          <a:prstGeom prst="rect">
-            <a:avLst/>
-          </a:prstGeom>
-          <a:noFill/>
-        </p:spPr>
-        <p:txBody>
-          <a:bodyPr wrap="square" lIns="73152" rIns="73152" tIns="36576" bIns="36576">
-            <a:spAutoFit/>
-          </a:bodyPr>
-          <a:lstStyle/>
-          <a:p>
-            <a:pPr algn="l">
-              <a:spcAft>
-                <a:spcPts val="0"/>
-              </a:spcAft>
-              <a:defRPr sz="1000" b="0">
-                <a:solidFill>
-                  <a:srgbClr val="5C6672"/>
-                </a:solidFill>
-                <a:latin typeface="Noto Sans CJK KR"/>
-              </a:defRPr>
-            </a:pPr>
-            <a:r>
-              <a:t>파일 전체 2/11 · 이 슬라이드 다음에 같은 파일의 나머지 줄이 이어집니다.</a:t>
+            <a:off x="768096" y="5468112"/>
+            <a:ext cx="1143000" cy="256032"/>
+          </a:xfrm>
+          <a:prstGeom prst="rect">
+            <a:avLst/>
+          </a:prstGeom>
+          <a:noFill/>
+        </p:spPr>
+        <p:txBody>
+          <a:bodyPr wrap="square" lIns="73152" rIns="73152" tIns="36576" bIns="36576">
+            <a:spAutoFit/>
+          </a:bodyPr>
+          <a:lstStyle/>
+          <a:p>
+            <a:pPr algn="l">
+              <a:spcAft>
+                <a:spcPts val="0"/>
+              </a:spcAft>
+              <a:defRPr sz="1800" b="1">
+                <a:solidFill>
+                  <a:srgbClr val="2A8B5A"/>
+                </a:solidFill>
+                <a:latin typeface="Noto Sans CJK KR"/>
+              </a:defRPr>
+            </a:pPr>
+            <a:r>
+              <a:t>확인</a:t>
+            </a:r>
+          </a:p>
+        </p:txBody>
+      </p:sp>
+      <p:sp>
+        <p:nvSpPr>
+          <p:cNvPr id="11" name="TextBox 10"/>
+          <p:cNvSpPr txBox="1"/>
+          <p:nvPr/>
+        </p:nvSpPr>
+        <p:spPr>
+          <a:xfrm>
+            <a:off x="768096" y="5742432"/>
+            <a:ext cx="10561320" cy="347472"/>
+          </a:xfrm>
+          <a:prstGeom prst="rect">
+            <a:avLst/>
+          </a:prstGeom>
+          <a:noFill/>
+        </p:spPr>
+        <p:txBody>
+          <a:bodyPr wrap="square" lIns="73152" rIns="73152" tIns="36576" bIns="36576">
+            <a:spAutoFit/>
+          </a:bodyPr>
+          <a:lstStyle/>
+          <a:p>
+            <a:pPr algn="l">
+              <a:spcAft>
+                <a:spcPts val="0"/>
+              </a:spcAft>
+              <a:defRPr sz="1800" b="0">
+                <a:solidFill>
+                  <a:srgbClr val="122C4E"/>
+                </a:solidFill>
+                <a:latin typeface="Noto Sans CJK KR"/>
+              </a:defRPr>
+            </a:pPr>
+            <a:r>
+              <a:t>명령의 출력에서 topic·frame·파일 이름 또는 성공 메시지를 찾으면 이 단계가 완료됩니다.</a:t>
             </a:r>
           </a:p>
         </p:txBody>
@@ -7689,7 +8009,7 @@
               </a:defRPr>
             </a:pPr>
             <a:r>
-              <a:t>파일을 계속 작성하고 저장한다 (3/11)</a:t>
+              <a:t>파일을 새로 만들고 저장한다 (1/1)</a:t>
             </a:r>
           </a:p>
         </p:txBody>
@@ -7728,7 +8048,7 @@
               </a:defRPr>
             </a:pPr>
             <a:r>
-              <a:t>~/ros2_curri/agv_ws/src/agv_description/curriculum_stages/M08/model.sdf</a:t>
+              <a:t>~/ros2_curri/agv_ws/src/agv_description/curriculum_stages/M08/model.config</a:t>
             </a:r>
           </a:p>
         </p:txBody>
@@ -7864,7 +8184,7 @@
               </a:defRPr>
             </a:pPr>
             <a:r>
-              <a:t>현재 단계 6/15    |    현재 폴더 ~/ros2_curri/agv_ws    |    현재 터미널</a:t>
+              <a:t>현재 단계 3/4    |    현재 폴더 ~/ros2_curri/agv_ws    |    현재 터미널</a:t>
             </a:r>
           </a:p>
         </p:txBody>
@@ -7965,7 +8285,7 @@
             </a:r>
             <a:br/>
             <a:r>
-              <a:t>파일 열기: nano ~/ros2_curri/agv_ws/src/agv_description/curriculum_stages/M08/model.sdf</a:t>
+              <a:t>파일 열기: nano ~/ros2_curri/agv_ws/src/agv_description/curriculum_stages/M08/model.config</a:t>
             </a:r>
           </a:p>
         </p:txBody>
@@ -8023,51 +8343,27 @@
               </a:defRPr>
             </a:pPr>
             <a:r>
-              <a:t>            &lt;size&gt;0.60 0.42 0.16&lt;/size&gt;</a:t>
+              <a:t>&lt;?xml version="1.0" ?&gt;</a:t>
             </a:r>
             <a:br/>
             <a:r>
-              <a:t>          &lt;/box&gt;</a:t>
+              <a:t>&lt;model&gt;</a:t>
             </a:r>
             <a:br/>
             <a:r>
-              <a:t>        &lt;/geometry&gt;</a:t>
+              <a:t>  &lt;name&gt;agv&lt;/name&gt;</a:t>
             </a:r>
             <a:br/>
             <a:r>
-              <a:t>      &lt;/collision&gt;</a:t>
+              <a:t>  &lt;version&gt;1.0&lt;/version&gt;</a:t>
             </a:r>
             <a:br/>
             <a:r>
-              <a:t>    &lt;/link&gt;</a:t>
+              <a:t>  &lt;sdf version="1.10"&gt;model.sdf&lt;/sdf&gt;</a:t>
             </a:r>
             <a:br/>
             <a:r>
-              <a:t>    &lt;link name="left_wheel_link"&gt;</a:t>
-            </a:r>
-            <a:br/>
-            <a:r>
-              <a:t>      &lt;pose relative_to="base_link"&gt;0 0.19 -0.08 1.5708 0 0&lt;/pose&gt;</a:t>
-            </a:r>
-            <a:br/>
-            <a:r>
-              <a:t>      &lt;inertial&gt;</a:t>
-            </a:r>
-            <a:br/>
-            <a:r>
-              <a:t>        &lt;mass&gt;0.6&lt;/mass&gt;</a:t>
-            </a:r>
-            <a:br/>
-            <a:r>
-              <a:t>        &lt;inertia&gt;</a:t>
-            </a:r>
-            <a:br/>
-            <a:r>
-              <a:t>          &lt;ixx&gt;0.002&lt;/ixx&gt;</a:t>
-            </a:r>
-            <a:br/>
-            <a:r>
-              <a:t>          &lt;iyy&gt;0.002&lt;/iyy&gt;</a:t>
+              <a:t>&lt;/model&gt;</a:t>
             </a:r>
           </a:p>
         </p:txBody>
@@ -8106,7 +8402,7 @@
               </a:defRPr>
             </a:pPr>
             <a:r>
-              <a:t>파일 전체 3/11 · 이 슬라이드 다음에 같은 파일의 나머지 줄이 이어집니다.</a:t>
+              <a:t>파일 전체 1/1 · 이 슬라이드 다음에 같은 파일의 나머지 줄이 이어집니다.</a:t>
             </a:r>
           </a:p>
         </p:txBody>
@@ -8163,7 +8459,7 @@
               </a:defRPr>
             </a:pPr>
             <a:r>
-              <a:t>파일을 계속 작성하고 저장한다 (4/11)</a:t>
+              <a:t>파일을 새로 만들고 저장한다 (1/11)</a:t>
             </a:r>
           </a:p>
         </p:txBody>
@@ -8338,7 +8634,7 @@
               </a:defRPr>
             </a:pPr>
             <a:r>
-              <a:t>현재 단계 7/15    |    현재 폴더 ~/ros2_curri/agv_ws    |    현재 터미널</a:t>
+              <a:t>현재 단계 4/15    |    현재 폴더 ~/ros2_curri/agv_ws    |    현재 터미널</a:t>
             </a:r>
           </a:p>
         </p:txBody>
@@ -8497,51 +8793,51 @@
               </a:defRPr>
             </a:pPr>
             <a:r>
-              <a:t>          &lt;izz&gt;0.001&lt;/izz&gt;</a:t>
+              <a:t>&lt;?xml version="1.0" ?&gt;</a:t>
             </a:r>
             <a:br/>
             <a:r>
-              <a:t>        &lt;/inertia&gt;</a:t>
+              <a:t>&lt;!-- M08 spawn snapshot: physical links only; no DiffDrive and no Camera/LiDAR/IMU. --&gt;</a:t>
             </a:r>
             <a:br/>
             <a:r>
-              <a:t>      &lt;/inertial&gt;</a:t>
+              <a:t>&lt;sdf version="1.10"&gt;</a:t>
             </a:r>
             <a:br/>
             <a:r>
-              <a:t>      &lt;visual name="wheel"&gt;</a:t>
+              <a:t>  &lt;model name="agv"&gt;</a:t>
             </a:r>
             <a:br/>
             <a:r>
-              <a:t>        &lt;geometry&gt;</a:t>
+              <a:t>    &lt;link name="base_link"&gt;</a:t>
             </a:r>
             <a:br/>
             <a:r>
-              <a:t>          &lt;cylinder&gt;</a:t>
+              <a:t>      &lt;pose&gt;0 0 0.16 0 0 0&lt;/pose&gt;</a:t>
             </a:r>
             <a:br/>
             <a:r>
-              <a:t>            &lt;radius&gt;0.08&lt;/radius&gt;</a:t>
+              <a:t>      &lt;inertial&gt;</a:t>
             </a:r>
             <a:br/>
             <a:r>
-              <a:t>            &lt;length&gt;0.05&lt;/length&gt;</a:t>
+              <a:t>        &lt;mass&gt;12.0&lt;/mass&gt;</a:t>
             </a:r>
             <a:br/>
             <a:r>
-              <a:t>          &lt;/cylinder&gt;</a:t>
+              <a:t>        &lt;inertia&gt;</a:t>
             </a:r>
             <a:br/>
             <a:r>
-              <a:t>        &lt;/geometry&gt;</a:t>
+              <a:t>          &lt;ixx&gt;0.20&lt;/ixx&gt;</a:t>
             </a:r>
             <a:br/>
             <a:r>
-              <a:t>      &lt;/visual&gt;</a:t>
+              <a:t>          &lt;iyy&gt;0.40&lt;/iyy&gt;</a:t>
             </a:r>
             <a:br/>
             <a:r>
-              <a:t>      &lt;collision name="wheel_collision"&gt;</a:t>
+              <a:t>          &lt;izz&gt;0.50&lt;/izz&gt;</a:t>
             </a:r>
           </a:p>
         </p:txBody>
@@ -8580,7 +8876,7 @@
               </a:defRPr>
             </a:pPr>
             <a:r>
-              <a:t>파일 전체 4/11 · 이 슬라이드 다음에 같은 파일의 나머지 줄이 이어집니다.</a:t>
+              <a:t>파일 전체 1/11 · 이 슬라이드 다음에 같은 파일의 나머지 줄이 이어집니다.</a:t>
             </a:r>
           </a:p>
         </p:txBody>
@@ -8637,7 +8933,7 @@
               </a:defRPr>
             </a:pPr>
             <a:r>
-              <a:t>파일을 계속 작성하고 저장한다 (5/11)</a:t>
+              <a:t>파일을 계속 작성하고 저장한다 (2/11)</a:t>
             </a:r>
           </a:p>
         </p:txBody>
@@ -8812,7 +9108,7 @@
               </a:defRPr>
             </a:pPr>
             <a:r>
-              <a:t>현재 단계 8/15    |    현재 폴더 ~/ros2_curri/agv_ws    |    현재 터미널</a:t>
+              <a:t>현재 단계 5/15    |    현재 폴더 ~/ros2_curri/agv_ws    |    현재 터미널</a:t>
             </a:r>
           </a:p>
         </p:txBody>
@@ -8971,51 +9267,51 @@
               </a:defRPr>
             </a:pPr>
             <a:r>
+              <a:t>        &lt;/inertia&gt;</a:t>
+            </a:r>
+            <a:br/>
+            <a:r>
+              <a:t>      &lt;/inertial&gt;</a:t>
+            </a:r>
+            <a:br/>
+            <a:r>
+              <a:t>      &lt;visual name="body"&gt;</a:t>
+            </a:r>
+            <a:br/>
+            <a:r>
               <a:t>        &lt;geometry&gt;</a:t>
             </a:r>
             <a:br/>
             <a:r>
-              <a:t>          &lt;cylinder&gt;</a:t>
+              <a:t>          &lt;box&gt;</a:t>
             </a:r>
             <a:br/>
             <a:r>
-              <a:t>            &lt;radius&gt;0.08&lt;/radius&gt;</a:t>
+              <a:t>            &lt;size&gt;0.60 0.42 0.16&lt;/size&gt;</a:t>
             </a:r>
             <a:br/>
             <a:r>
-              <a:t>            &lt;length&gt;0.05&lt;/length&gt;</a:t>
+              <a:t>          &lt;/box&gt;</a:t>
             </a:r>
             <a:br/>
             <a:r>
-              <a:t>          &lt;/cylinder&gt;</a:t>
+              <a:t>        &lt;/geometry&gt;</a:t>
             </a:r>
             <a:br/>
             <a:r>
-              <a:t>        &lt;/geometry&gt;</a:t>
+              <a:t>      &lt;/visual&gt;</a:t>
             </a:r>
             <a:br/>
             <a:r>
-              <a:t>        &lt;surface&gt;</a:t>
+              <a:t>      &lt;collision name="body_collision"&gt;</a:t>
             </a:r>
             <a:br/>
             <a:r>
-              <a:t>          &lt;friction&gt;</a:t>
+              <a:t>        &lt;geometry&gt;</a:t>
             </a:r>
             <a:br/>
             <a:r>
-              <a:t>            &lt;ode&gt;</a:t>
-            </a:r>
-            <a:br/>
-            <a:r>
-              <a:t>              &lt;mu&gt;1.0&lt;/mu&gt;</a:t>
-            </a:r>
-            <a:br/>
-            <a:r>
-              <a:t>              &lt;mu2&gt;1.0&lt;/mu2&gt;</a:t>
-            </a:r>
-            <a:br/>
-            <a:r>
-              <a:t>            &lt;/ode&gt;</a:t>
+              <a:t>          &lt;box&gt;</a:t>
             </a:r>
           </a:p>
         </p:txBody>
@@ -9054,7 +9350,7 @@
               </a:defRPr>
             </a:pPr>
             <a:r>
-              <a:t>파일 전체 5/11 · 이 슬라이드 다음에 같은 파일의 나머지 줄이 이어집니다.</a:t>
+              <a:t>파일 전체 2/11 · 이 슬라이드 다음에 같은 파일의 나머지 줄이 이어집니다.</a:t>
             </a:r>
           </a:p>
         </p:txBody>
@@ -9111,7 +9407,7 @@
               </a:defRPr>
             </a:pPr>
             <a:r>
-              <a:t>파일을 계속 작성하고 저장한다 (6/11)</a:t>
+              <a:t>파일을 계속 작성하고 저장한다 (3/11)</a:t>
             </a:r>
           </a:p>
         </p:txBody>
@@ -9286,7 +9582,7 @@
               </a:defRPr>
             </a:pPr>
             <a:r>
-              <a:t>현재 단계 9/15    |    현재 폴더 ~/ros2_curri/agv_ws    |    현재 터미널</a:t>
+              <a:t>현재 단계 6/15    |    현재 폴더 ~/ros2_curri/agv_ws    |    현재 터미널</a:t>
             </a:r>
           </a:p>
         </p:txBody>
@@ -9445,14 +9741,18 @@
               </a:defRPr>
             </a:pPr>
             <a:r>
-              <a:t>          &lt;/friction&gt;</a:t>
+              <a:t>            &lt;size&gt;0.60 0.42 0.16&lt;/size&gt;</a:t>
             </a:r>
             <a:br/>
             <a:r>
-              <a:t>        &lt;/surface&gt;</a:t>
+              <a:t>          &lt;/box&gt;</a:t>
             </a:r>
             <a:br/>
             <a:r>
+              <a:t>        &lt;/geometry&gt;</a:t>
+            </a:r>
+            <a:br/>
+            <a:r>
               <a:t>      &lt;/collision&gt;</a:t>
             </a:r>
             <a:br/>
@@ -9461,11 +9761,11 @@
             </a:r>
             <a:br/>
             <a:r>
-              <a:t>    &lt;link name="right_wheel_link"&gt;</a:t>
+              <a:t>    &lt;link name="left_wheel_link"&gt;</a:t>
             </a:r>
             <a:br/>
             <a:r>
-              <a:t>      &lt;pose relative_to="base_link"&gt;0 -0.19 -0.08 1.5708 0 0&lt;/pose&gt;</a:t>
+              <a:t>      &lt;pose relative_to="base_link"&gt;0 0.19 -0.08 1.5708 0 0&lt;/pose&gt;</a:t>
             </a:r>
             <a:br/>
             <a:r>
@@ -9486,10 +9786,6 @@
             <a:br/>
             <a:r>
               <a:t>          &lt;iyy&gt;0.002&lt;/iyy&gt;</a:t>
-            </a:r>
-            <a:br/>
-            <a:r>
-              <a:t>          &lt;izz&gt;0.001&lt;/izz&gt;</a:t>
             </a:r>
           </a:p>
         </p:txBody>
@@ -9528,7 +9824,7 @@
               </a:defRPr>
             </a:pPr>
             <a:r>
-              <a:t>파일 전체 6/11 · 이 슬라이드 다음에 같은 파일의 나머지 줄이 이어집니다.</a:t>
+              <a:t>파일 전체 3/11 · 이 슬라이드 다음에 같은 파일의 나머지 줄이 이어집니다.</a:t>
             </a:r>
           </a:p>
         </p:txBody>
@@ -9585,7 +9881,7 @@
               </a:defRPr>
             </a:pPr>
             <a:r>
-              <a:t>파일을 계속 작성하고 저장한다 (7/11)</a:t>
+              <a:t>파일을 계속 작성하고 저장한다 (4/11)</a:t>
             </a:r>
           </a:p>
         </p:txBody>
@@ -9760,7 +10056,7 @@
               </a:defRPr>
             </a:pPr>
             <a:r>
-              <a:t>현재 단계 10/15    |    현재 폴더 ~/ros2_curri/agv_ws    |    현재 터미널</a:t>
+              <a:t>현재 단계 7/15    |    현재 폴더 ~/ros2_curri/agv_ws    |    현재 터미널</a:t>
             </a:r>
           </a:p>
         </p:txBody>
@@ -9919,6 +10215,10 @@
               </a:defRPr>
             </a:pPr>
             <a:r>
+              <a:t>          &lt;izz&gt;0.001&lt;/izz&gt;</a:t>
+            </a:r>
+            <a:br/>
+            <a:r>
               <a:t>        &lt;/inertia&gt;</a:t>
             </a:r>
             <a:br/>
@@ -9960,10 +10260,6 @@
             <a:br/>
             <a:r>
               <a:t>      &lt;collision name="wheel_collision"&gt;</a:t>
-            </a:r>
-            <a:br/>
-            <a:r>
-              <a:t>        &lt;geometry&gt;</a:t>
             </a:r>
           </a:p>
         </p:txBody>
@@ -10002,7 +10298,7 @@
               </a:defRPr>
             </a:pPr>
             <a:r>
-              <a:t>파일 전체 7/11 · 이 슬라이드 다음에 같은 파일의 나머지 줄이 이어집니다.</a:t>
+              <a:t>파일 전체 4/11 · 이 슬라이드 다음에 같은 파일의 나머지 줄이 이어집니다.</a:t>
             </a:r>
           </a:p>
         </p:txBody>
@@ -10059,7 +10355,7 @@
               </a:defRPr>
             </a:pPr>
             <a:r>
-              <a:t>파일을 계속 작성하고 저장한다 (8/11)</a:t>
+              <a:t>파일을 계속 작성하고 저장한다 (5/11)</a:t>
             </a:r>
           </a:p>
         </p:txBody>
@@ -10234,7 +10530,7 @@
               </a:defRPr>
             </a:pPr>
             <a:r>
-              <a:t>현재 단계 11/15    |    현재 폴더 ~/ros2_curri/agv_ws    |    현재 터미널</a:t>
+              <a:t>현재 단계 8/15    |    현재 폴더 ~/ros2_curri/agv_ws    |    현재 터미널</a:t>
             </a:r>
           </a:p>
         </p:txBody>
@@ -10393,6 +10689,10 @@
               </a:defRPr>
             </a:pPr>
             <a:r>
+              <a:t>        &lt;geometry&gt;</a:t>
+            </a:r>
+            <a:br/>
+            <a:r>
               <a:t>          &lt;cylinder&gt;</a:t>
             </a:r>
             <a:br/>
@@ -10434,10 +10734,6 @@
             <a:br/>
             <a:r>
               <a:t>            &lt;/ode&gt;</a:t>
-            </a:r>
-            <a:br/>
-            <a:r>
-              <a:t>          &lt;/friction&gt;</a:t>
             </a:r>
           </a:p>
         </p:txBody>
@@ -10476,7 +10772,7 @@
               </a:defRPr>
             </a:pPr>
             <a:r>
-              <a:t>파일 전체 8/11 · 이 슬라이드 다음에 같은 파일의 나머지 줄이 이어집니다.</a:t>
+              <a:t>파일 전체 5/11 · 이 슬라이드 다음에 같은 파일의 나머지 줄이 이어집니다.</a:t>
             </a:r>
           </a:p>
         </p:txBody>
@@ -10533,7 +10829,7 @@
               </a:defRPr>
             </a:pPr>
             <a:r>
-              <a:t>파일을 계속 작성하고 저장한다 (9/11)</a:t>
+              <a:t>파일을 계속 작성하고 저장한다 (6/11)</a:t>
             </a:r>
           </a:p>
         </p:txBody>
@@ -10708,7 +11004,7 @@
               </a:defRPr>
             </a:pPr>
             <a:r>
-              <a:t>현재 단계 12/15    |    현재 폴더 ~/ros2_curri/agv_ws    |    현재 터미널</a:t>
+              <a:t>현재 단계 9/15    |    현재 폴더 ~/ros2_curri/agv_ws    |    현재 터미널</a:t>
             </a:r>
           </a:p>
         </p:txBody>
@@ -10867,6 +11163,10 @@
               </a:defRPr>
             </a:pPr>
             <a:r>
+              <a:t>          &lt;/friction&gt;</a:t>
+            </a:r>
+            <a:br/>
+            <a:r>
               <a:t>        &lt;/surface&gt;</a:t>
             </a:r>
             <a:br/>
@@ -10879,39 +11179,35 @@
             </a:r>
             <a:br/>
             <a:r>
-              <a:t>    &lt;joint name="left_wheel_joint" type="revolute"&gt;</a:t>
+              <a:t>    &lt;link name="right_wheel_link"&gt;</a:t>
             </a:r>
             <a:br/>
             <a:r>
-              <a:t>      &lt;parent&gt;base_link&lt;/parent&gt;</a:t>
+              <a:t>      &lt;pose relative_to="base_link"&gt;0 -0.19 -0.08 1.5708 0 0&lt;/pose&gt;</a:t>
             </a:r>
             <a:br/>
             <a:r>
-              <a:t>      &lt;child&gt;left_wheel_link&lt;/child&gt;</a:t>
+              <a:t>      &lt;inertial&gt;</a:t>
             </a:r>
             <a:br/>
             <a:r>
-              <a:t>      &lt;axis&gt;</a:t>
+              <a:t>        &lt;mass&gt;0.6&lt;/mass&gt;</a:t>
             </a:r>
             <a:br/>
             <a:r>
-              <a:t>        &lt;xyz&gt;0 1 0&lt;/xyz&gt;</a:t>
+              <a:t>        &lt;inertia&gt;</a:t>
             </a:r>
             <a:br/>
             <a:r>
-              <a:t>        &lt;limit&gt;</a:t>
+              <a:t>          &lt;ixx&gt;0.002&lt;/ixx&gt;</a:t>
             </a:r>
             <a:br/>
             <a:r>
-              <a:t>          &lt;lower&gt;-1e16&lt;/lower&gt;</a:t>
+              <a:t>          &lt;iyy&gt;0.002&lt;/iyy&gt;</a:t>
             </a:r>
             <a:br/>
             <a:r>
-              <a:t>          &lt;upper&gt;1e16&lt;/upper&gt;</a:t>
-            </a:r>
-            <a:br/>
-            <a:r>
-              <a:t>        &lt;/limit&gt;</a:t>
+              <a:t>          &lt;izz&gt;0.001&lt;/izz&gt;</a:t>
             </a:r>
           </a:p>
         </p:txBody>
@@ -10950,7 +11246,7 @@
               </a:defRPr>
             </a:pPr>
             <a:r>
-              <a:t>파일 전체 9/11 · 이 슬라이드 다음에 같은 파일의 나머지 줄이 이어집니다.</a:t>
+              <a:t>파일 전체 6/11 · 이 슬라이드 다음에 같은 파일의 나머지 줄이 이어집니다.</a:t>
             </a:r>
           </a:p>
         </p:txBody>
@@ -11007,7 +11303,7 @@
               </a:defRPr>
             </a:pPr>
             <a:r>
-              <a:t>파일을 계속 작성하고 저장한다 (10/11)</a:t>
+              <a:t>파일을 계속 작성하고 저장한다 (7/11)</a:t>
             </a:r>
           </a:p>
         </p:txBody>
@@ -11182,7 +11478,7 @@
               </a:defRPr>
             </a:pPr>
             <a:r>
-              <a:t>현재 단계 13/15    |    현재 폴더 ~/ros2_curri/agv_ws    |    현재 터미널</a:t>
+              <a:t>현재 단계 10/15    |    현재 폴더 ~/ros2_curri/agv_ws    |    현재 터미널</a:t>
             </a:r>
           </a:p>
         </p:txBody>
@@ -11341,51 +11637,51 @@
               </a:defRPr>
             </a:pPr>
             <a:r>
-              <a:t>      &lt;/axis&gt;</a:t>
+              <a:t>        &lt;/inertia&gt;</a:t>
             </a:r>
             <a:br/>
             <a:r>
-              <a:t>    &lt;/joint&gt;</a:t>
+              <a:t>      &lt;/inertial&gt;</a:t>
             </a:r>
             <a:br/>
             <a:r>
-              <a:t>    &lt;joint name="right_wheel_joint" type="revolute"&gt;</a:t>
+              <a:t>      &lt;visual name="wheel"&gt;</a:t>
             </a:r>
             <a:br/>
             <a:r>
-              <a:t>      &lt;parent&gt;base_link&lt;/parent&gt;</a:t>
+              <a:t>        &lt;geometry&gt;</a:t>
             </a:r>
             <a:br/>
             <a:r>
-              <a:t>      &lt;child&gt;right_wheel_link&lt;/child&gt;</a:t>
+              <a:t>          &lt;cylinder&gt;</a:t>
             </a:r>
             <a:br/>
             <a:r>
-              <a:t>      &lt;axis&gt;</a:t>
+              <a:t>            &lt;radius&gt;0.08&lt;/radius&gt;</a:t>
             </a:r>
             <a:br/>
             <a:r>
-              <a:t>        &lt;xyz&gt;0 1 0&lt;/xyz&gt;</a:t>
+              <a:t>            &lt;length&gt;0.05&lt;/length&gt;</a:t>
             </a:r>
             <a:br/>
             <a:r>
-              <a:t>        &lt;limit&gt;</a:t>
+              <a:t>          &lt;/cylinder&gt;</a:t>
             </a:r>
             <a:br/>
             <a:r>
-              <a:t>          &lt;lower&gt;-1e16&lt;/lower&gt;</a:t>
+              <a:t>        &lt;/geometry&gt;</a:t>
             </a:r>
             <a:br/>
             <a:r>
-              <a:t>          &lt;upper&gt;1e16&lt;/upper&gt;</a:t>
+              <a:t>      &lt;/visual&gt;</a:t>
             </a:r>
             <a:br/>
             <a:r>
-              <a:t>        &lt;/limit&gt;</a:t>
+              <a:t>      &lt;collision name="wheel_collision"&gt;</a:t>
             </a:r>
             <a:br/>
             <a:r>
-              <a:t>      &lt;/axis&gt;</a:t>
+              <a:t>        &lt;geometry&gt;</a:t>
             </a:r>
           </a:p>
         </p:txBody>
@@ -11424,7 +11720,7 @@
               </a:defRPr>
             </a:pPr>
             <a:r>
-              <a:t>파일 전체 10/11 · 이 슬라이드 다음에 같은 파일의 나머지 줄이 이어집니다.</a:t>
+              <a:t>파일 전체 7/11 · 이 슬라이드 다음에 같은 파일의 나머지 줄이 이어집니다.</a:t>
             </a:r>
           </a:p>
         </p:txBody>
@@ -11942,7 +12238,7 @@
               </a:defRPr>
             </a:pPr>
             <a:r>
-              <a:t>파일을 계속 작성하고 저장한다 (11/11)</a:t>
+              <a:t>파일을 계속 작성하고 저장한다 (8/11)</a:t>
             </a:r>
           </a:p>
         </p:txBody>
@@ -12117,7 +12413,7 @@
               </a:defRPr>
             </a:pPr>
             <a:r>
-              <a:t>현재 단계 14/15    |    현재 폴더 ~/ros2_curri/agv_ws    |    현재 터미널</a:t>
+              <a:t>현재 단계 11/15    |    현재 폴더 ~/ros2_curri/agv_ws    |    현재 터미널</a:t>
             </a:r>
           </a:p>
         </p:txBody>
@@ -12276,15 +12572,51 @@
               </a:defRPr>
             </a:pPr>
             <a:r>
-              <a:t>    &lt;/joint&gt;</a:t>
+              <a:t>          &lt;cylinder&gt;</a:t>
             </a:r>
             <a:br/>
             <a:r>
-              <a:t>  &lt;/model&gt;</a:t>
+              <a:t>            &lt;radius&gt;0.08&lt;/radius&gt;</a:t>
             </a:r>
             <a:br/>
             <a:r>
-              <a:t>&lt;/sdf&gt;</a:t>
+              <a:t>            &lt;length&gt;0.05&lt;/length&gt;</a:t>
+            </a:r>
+            <a:br/>
+            <a:r>
+              <a:t>          &lt;/cylinder&gt;</a:t>
+            </a:r>
+            <a:br/>
+            <a:r>
+              <a:t>        &lt;/geometry&gt;</a:t>
+            </a:r>
+            <a:br/>
+            <a:r>
+              <a:t>        &lt;surface&gt;</a:t>
+            </a:r>
+            <a:br/>
+            <a:r>
+              <a:t>          &lt;friction&gt;</a:t>
+            </a:r>
+            <a:br/>
+            <a:r>
+              <a:t>            &lt;ode&gt;</a:t>
+            </a:r>
+            <a:br/>
+            <a:r>
+              <a:t>              &lt;mu&gt;1.0&lt;/mu&gt;</a:t>
+            </a:r>
+            <a:br/>
+            <a:r>
+              <a:t>              &lt;mu2&gt;1.0&lt;/mu2&gt;</a:t>
+            </a:r>
+            <a:br/>
+            <a:r>
+              <a:t>            &lt;/ode&gt;</a:t>
+            </a:r>
+            <a:br/>
+            <a:r>
+              <a:t>          &lt;/friction&gt;</a:t>
             </a:r>
           </a:p>
         </p:txBody>
@@ -12323,7 +12655,7 @@
               </a:defRPr>
             </a:pPr>
             <a:r>
-              <a:t>파일 전체 11/11 · 이 슬라이드 다음에 같은 파일의 나머지 줄이 이어집니다.</a:t>
+              <a:t>파일 전체 8/11 · 이 슬라이드 다음에 같은 파일의 나머지 줄이 이어집니다.</a:t>
             </a:r>
           </a:p>
         </p:txBody>
@@ -12380,7 +12712,7 @@
               </a:defRPr>
             </a:pPr>
             <a:r>
-              <a:t>파일을 새로 만들고 저장한다 (1/4)</a:t>
+              <a:t>파일을 계속 작성하고 저장한다 (9/11)</a:t>
             </a:r>
           </a:p>
         </p:txBody>
@@ -12419,7 +12751,7 @@
               </a:defRPr>
             </a:pPr>
             <a:r>
-              <a:t>~/ros2_curri/agv_ws/src/agv_description/curriculum_stages/M08/warehouse.sdf</a:t>
+              <a:t>~/ros2_curri/agv_ws/src/agv_description/curriculum_stages/M08/model.sdf</a:t>
             </a:r>
           </a:p>
         </p:txBody>
@@ -12555,7 +12887,7 @@
               </a:defRPr>
             </a:pPr>
             <a:r>
-              <a:t>현재 단계 15/19    |    현재 폴더 ~/ros2_curri/agv_ws    |    현재 터미널</a:t>
+              <a:t>현재 단계 12/15    |    현재 폴더 ~/ros2_curri/agv_ws    |    현재 터미널</a:t>
             </a:r>
           </a:p>
         </p:txBody>
@@ -12656,7 +12988,7 @@
             </a:r>
             <a:br/>
             <a:r>
-              <a:t>파일 열기: nano ~/ros2_curri/agv_ws/src/agv_description/curriculum_stages/M08/warehouse.sdf</a:t>
+              <a:t>파일 열기: nano ~/ros2_curri/agv_ws/src/agv_description/curriculum_stages/M08/model.sdf</a:t>
             </a:r>
           </a:p>
         </p:txBody>
@@ -12714,51 +13046,51 @@
               </a:defRPr>
             </a:pPr>
             <a:r>
-              <a:t>&lt;?xml version="1.0" ?&gt;</a:t>
+              <a:t>        &lt;/surface&gt;</a:t>
             </a:r>
             <a:br/>
             <a:r>
-              <a:t>&lt;sdf version="1.10"&gt;</a:t>
+              <a:t>      &lt;/collision&gt;</a:t>
             </a:r>
             <a:br/>
             <a:r>
-              <a:t>  &lt;world name="warehouse_m08"&gt;</a:t>
+              <a:t>    &lt;/link&gt;</a:t>
             </a:r>
             <a:br/>
             <a:r>
-              <a:t>    &lt;gravity&gt;0 0 -9.8&lt;/gravity&gt;</a:t>
+              <a:t>    &lt;joint name="left_wheel_joint" type="revolute"&gt;</a:t>
             </a:r>
             <a:br/>
             <a:r>
-              <a:t>    &lt;plugin filename="gz-sim-physics-system" name="gz::sim::systems::Physics"/&gt;</a:t>
+              <a:t>      &lt;parent&gt;base_link&lt;/parent&gt;</a:t>
             </a:r>
             <a:br/>
             <a:r>
-              <a:t>    &lt;plugin filename="gz-sim-user-commands-system"</a:t>
+              <a:t>      &lt;child&gt;left_wheel_link&lt;/child&gt;</a:t>
             </a:r>
             <a:br/>
             <a:r>
-              <a:t>      name="gz::sim::systems::UserCommands"/&gt;</a:t>
+              <a:t>      &lt;axis&gt;</a:t>
             </a:r>
             <a:br/>
             <a:r>
-              <a:t>    &lt;plugin filename="gz-sim-scene-broadcaster-system"</a:t>
+              <a:t>        &lt;xyz&gt;0 1 0&lt;/xyz&gt;</a:t>
             </a:r>
             <a:br/>
             <a:r>
-              <a:t>      name="gz::sim::systems::SceneBroadcaster"/&gt;</a:t>
+              <a:t>        &lt;limit&gt;</a:t>
             </a:r>
             <a:br/>
             <a:r>
-              <a:t>    &lt;light type="directional" name="sun"&gt;</a:t>
+              <a:t>          &lt;lower&gt;-1e16&lt;/lower&gt;</a:t>
             </a:r>
             <a:br/>
             <a:r>
-              <a:t>      &lt;pose&gt;0 0 10 0 0 0&lt;/pose&gt;</a:t>
+              <a:t>          &lt;upper&gt;1e16&lt;/upper&gt;</a:t>
             </a:r>
             <a:br/>
             <a:r>
-              <a:t>    &lt;/light&gt;</a:t>
+              <a:t>        &lt;/limit&gt;</a:t>
             </a:r>
           </a:p>
         </p:txBody>
@@ -12797,7 +13129,7 @@
               </a:defRPr>
             </a:pPr>
             <a:r>
-              <a:t>파일 전체 1/4 · 이 슬라이드 다음에 같은 파일의 나머지 줄이 이어집니다.</a:t>
+              <a:t>파일 전체 9/11 · 이 슬라이드 다음에 같은 파일의 나머지 줄이 이어집니다.</a:t>
             </a:r>
           </a:p>
         </p:txBody>
@@ -12854,7 +13186,7 @@
               </a:defRPr>
             </a:pPr>
             <a:r>
-              <a:t>파일을 계속 작성하고 저장한다 (2/4)</a:t>
+              <a:t>파일을 계속 작성하고 저장한다 (10/11)</a:t>
             </a:r>
           </a:p>
         </p:txBody>
@@ -12893,7 +13225,7 @@
               </a:defRPr>
             </a:pPr>
             <a:r>
-              <a:t>~/ros2_curri/agv_ws/src/agv_description/curriculum_stages/M08/warehouse.sdf</a:t>
+              <a:t>~/ros2_curri/agv_ws/src/agv_description/curriculum_stages/M08/model.sdf</a:t>
             </a:r>
           </a:p>
         </p:txBody>
@@ -13029,7 +13361,7 @@
               </a:defRPr>
             </a:pPr>
             <a:r>
-              <a:t>현재 단계 16/19    |    현재 폴더 ~/ros2_curri/agv_ws    |    현재 터미널</a:t>
+              <a:t>현재 단계 13/15    |    현재 폴더 ~/ros2_curri/agv_ws    |    현재 터미널</a:t>
             </a:r>
           </a:p>
         </p:txBody>
@@ -13130,7 +13462,7 @@
             </a:r>
             <a:br/>
             <a:r>
-              <a:t>파일 열기: nano ~/ros2_curri/agv_ws/src/agv_description/curriculum_stages/M08/warehouse.sdf</a:t>
+              <a:t>파일 열기: nano ~/ros2_curri/agv_ws/src/agv_description/curriculum_stages/M08/model.sdf</a:t>
             </a:r>
           </a:p>
         </p:txBody>
@@ -13188,51 +13520,51 @@
               </a:defRPr>
             </a:pPr>
             <a:r>
-              <a:t>    &lt;model name="ground"&gt;</a:t>
+              <a:t>      &lt;/axis&gt;</a:t>
             </a:r>
             <a:br/>
             <a:r>
-              <a:t>      &lt;static&gt;true&lt;/static&gt;</a:t>
+              <a:t>    &lt;/joint&gt;</a:t>
             </a:r>
             <a:br/>
             <a:r>
-              <a:t>      &lt;link name="link"&gt;</a:t>
+              <a:t>    &lt;joint name="right_wheel_joint" type="revolute"&gt;</a:t>
             </a:r>
             <a:br/>
             <a:r>
-              <a:t>        &lt;collision name="collision"&gt;</a:t>
+              <a:t>      &lt;parent&gt;base_link&lt;/parent&gt;</a:t>
             </a:r>
             <a:br/>
             <a:r>
-              <a:t>          &lt;geometry&gt;</a:t>
+              <a:t>      &lt;child&gt;right_wheel_link&lt;/child&gt;</a:t>
             </a:r>
             <a:br/>
             <a:r>
-              <a:t>            &lt;plane&gt;</a:t>
+              <a:t>      &lt;axis&gt;</a:t>
             </a:r>
             <a:br/>
             <a:r>
-              <a:t>              &lt;normal&gt;0 0 1&lt;/normal&gt;</a:t>
+              <a:t>        &lt;xyz&gt;0 1 0&lt;/xyz&gt;</a:t>
             </a:r>
             <a:br/>
             <a:r>
-              <a:t>              &lt;size&gt;30 30&lt;/size&gt;</a:t>
+              <a:t>        &lt;limit&gt;</a:t>
             </a:r>
             <a:br/>
             <a:r>
-              <a:t>            &lt;/plane&gt;</a:t>
+              <a:t>          &lt;lower&gt;-1e16&lt;/lower&gt;</a:t>
             </a:r>
             <a:br/>
             <a:r>
-              <a:t>          &lt;/geometry&gt;</a:t>
+              <a:t>          &lt;upper&gt;1e16&lt;/upper&gt;</a:t>
             </a:r>
             <a:br/>
             <a:r>
-              <a:t>        &lt;/collision&gt;</a:t>
+              <a:t>        &lt;/limit&gt;</a:t>
             </a:r>
             <a:br/>
             <a:r>
-              <a:t>        &lt;visual name="visual"&gt;</a:t>
+              <a:t>      &lt;/axis&gt;</a:t>
             </a:r>
           </a:p>
         </p:txBody>
@@ -13271,7 +13603,7 @@
               </a:defRPr>
             </a:pPr>
             <a:r>
-              <a:t>파일 전체 2/4 · 이 슬라이드 다음에 같은 파일의 나머지 줄이 이어집니다.</a:t>
+              <a:t>파일 전체 10/11 · 이 슬라이드 다음에 같은 파일의 나머지 줄이 이어집니다.</a:t>
             </a:r>
           </a:p>
         </p:txBody>
@@ -13328,7 +13660,7 @@
               </a:defRPr>
             </a:pPr>
             <a:r>
-              <a:t>파일을 계속 작성하고 저장한다 (3/4)</a:t>
+              <a:t>파일을 계속 작성하고 저장한다 (11/11)</a:t>
             </a:r>
           </a:p>
         </p:txBody>
@@ -13367,7 +13699,7 @@
               </a:defRPr>
             </a:pPr>
             <a:r>
-              <a:t>~/ros2_curri/agv_ws/src/agv_description/curriculum_stages/M08/warehouse.sdf</a:t>
+              <a:t>~/ros2_curri/agv_ws/src/agv_description/curriculum_stages/M08/model.sdf</a:t>
             </a:r>
           </a:p>
         </p:txBody>
@@ -13503,7 +13835,7 @@
               </a:defRPr>
             </a:pPr>
             <a:r>
-              <a:t>현재 단계 17/19    |    현재 폴더 ~/ros2_curri/agv_ws    |    현재 터미널</a:t>
+              <a:t>현재 단계 14/15    |    현재 폴더 ~/ros2_curri/agv_ws    |    현재 터미널</a:t>
             </a:r>
           </a:p>
         </p:txBody>
@@ -13604,7 +13936,7 @@
             </a:r>
             <a:br/>
             <a:r>
-              <a:t>파일 열기: nano ~/ros2_curri/agv_ws/src/agv_description/curriculum_stages/M08/warehouse.sdf</a:t>
+              <a:t>파일 열기: nano ~/ros2_curri/agv_ws/src/agv_description/curriculum_stages/M08/model.sdf</a:t>
             </a:r>
           </a:p>
         </p:txBody>
@@ -13662,51 +13994,15 @@
               </a:defRPr>
             </a:pPr>
             <a:r>
-              <a:t>          &lt;geometry&gt;</a:t>
+              <a:t>    &lt;/joint&gt;</a:t>
             </a:r>
             <a:br/>
             <a:r>
-              <a:t>            &lt;plane&gt;</a:t>
+              <a:t>  &lt;/model&gt;</a:t>
             </a:r>
             <a:br/>
             <a:r>
-              <a:t>              &lt;normal&gt;0 0 1&lt;/normal&gt;</a:t>
-            </a:r>
-            <a:br/>
-            <a:r>
-              <a:t>              &lt;size&gt;30 30&lt;/size&gt;</a:t>
-            </a:r>
-            <a:br/>
-            <a:r>
-              <a:t>            &lt;/plane&gt;</a:t>
-            </a:r>
-            <a:br/>
-            <a:r>
-              <a:t>          &lt;/geometry&gt;</a:t>
-            </a:r>
-            <a:br/>
-            <a:r>
-              <a:t>        &lt;/visual&gt;</a:t>
-            </a:r>
-            <a:br/>
-            <a:r>
-              <a:t>      &lt;/link&gt;</a:t>
-            </a:r>
-            <a:br/>
-            <a:r>
-              <a:t>    &lt;/model&gt;</a:t>
-            </a:r>
-            <a:br/>
-            <a:r>
-              <a:t>    &lt;include&gt;</a:t>
-            </a:r>
-            <a:br/>
-            <a:r>
-              <a:t>      &lt;uri&gt;model://agv&lt;/uri&gt;</a:t>
-            </a:r>
-            <a:br/>
-            <a:r>
-              <a:t>      &lt;name&gt;agv&lt;/name&gt;</a:t>
+              <a:t>&lt;/sdf&gt;</a:t>
             </a:r>
           </a:p>
         </p:txBody>
@@ -13745,7 +14041,7 @@
               </a:defRPr>
             </a:pPr>
             <a:r>
-              <a:t>파일 전체 3/4 · 이 슬라이드 다음에 같은 파일의 나머지 줄이 이어집니다.</a:t>
+              <a:t>파일 전체 11/11 · 이 슬라이드 다음에 같은 파일의 나머지 줄이 이어집니다.</a:t>
             </a:r>
           </a:p>
         </p:txBody>
@@ -13802,7 +14098,7 @@
               </a:defRPr>
             </a:pPr>
             <a:r>
-              <a:t>파일을 계속 작성하고 저장한다 (4/4)</a:t>
+              <a:t>파일을 새로 만들고 저장한다 (1/4)</a:t>
             </a:r>
           </a:p>
         </p:txBody>
@@ -13977,7 +14273,7 @@
               </a:defRPr>
             </a:pPr>
             <a:r>
-              <a:t>현재 단계 18/19    |    현재 폴더 ~/ros2_curri/agv_ws    |    현재 터미널</a:t>
+              <a:t>현재 단계 15/19    |    현재 폴더 ~/ros2_curri/agv_ws    |    현재 터미널</a:t>
             </a:r>
           </a:p>
         </p:txBody>
@@ -14136,19 +14432,51 @@
               </a:defRPr>
             </a:pPr>
             <a:r>
-              <a:t>      &lt;pose&gt;0 0 0.08 0 0 0&lt;/pose&gt;</a:t>
+              <a:t>&lt;?xml version="1.0" ?&gt;</a:t>
             </a:r>
             <a:br/>
             <a:r>
-              <a:t>    &lt;/include&gt;</a:t>
+              <a:t>&lt;sdf version="1.10"&gt;</a:t>
             </a:r>
             <a:br/>
             <a:r>
-              <a:t>  &lt;/world&gt;</a:t>
+              <a:t>  &lt;world name="warehouse_m08"&gt;</a:t>
             </a:r>
             <a:br/>
             <a:r>
-              <a:t>&lt;/sdf&gt;</a:t>
+              <a:t>    &lt;gravity&gt;0 0 -9.8&lt;/gravity&gt;</a:t>
+            </a:r>
+            <a:br/>
+            <a:r>
+              <a:t>    &lt;plugin filename="gz-sim-physics-system" name="gz::sim::systems::Physics"/&gt;</a:t>
+            </a:r>
+            <a:br/>
+            <a:r>
+              <a:t>    &lt;plugin filename="gz-sim-user-commands-system"</a:t>
+            </a:r>
+            <a:br/>
+            <a:r>
+              <a:t>      name="gz::sim::systems::UserCommands"/&gt;</a:t>
+            </a:r>
+            <a:br/>
+            <a:r>
+              <a:t>    &lt;plugin filename="gz-sim-scene-broadcaster-system"</a:t>
+            </a:r>
+            <a:br/>
+            <a:r>
+              <a:t>      name="gz::sim::systems::SceneBroadcaster"/&gt;</a:t>
+            </a:r>
+            <a:br/>
+            <a:r>
+              <a:t>    &lt;light type="directional" name="sun"&gt;</a:t>
+            </a:r>
+            <a:br/>
+            <a:r>
+              <a:t>      &lt;pose&gt;0 0 10 0 0 0&lt;/pose&gt;</a:t>
+            </a:r>
+            <a:br/>
+            <a:r>
+              <a:t>    &lt;/light&gt;</a:t>
             </a:r>
           </a:p>
         </p:txBody>
@@ -14187,7 +14515,7 @@
               </a:defRPr>
             </a:pPr>
             <a:r>
-              <a:t>파일 전체 4/4 · 이 슬라이드 다음에 같은 파일의 나머지 줄이 이어집니다.</a:t>
+              <a:t>파일 전체 1/4 · 이 슬라이드 다음에 같은 파일의 나머지 줄이 이어집니다.</a:t>
             </a:r>
           </a:p>
         </p:txBody>
@@ -14244,7 +14572,7 @@
               </a:defRPr>
             </a:pPr>
             <a:r>
-              <a:t>build → source → run 순서로 실행한다</a:t>
+              <a:t>파일을 계속 작성하고 저장한다 (2/4)</a:t>
             </a:r>
           </a:p>
         </p:txBody>
@@ -14283,7 +14611,7 @@
               </a:defRPr>
             </a:pPr>
             <a:r>
-              <a:t>새 파일 또는 수정 파일은 build와 source 뒤에만 실행 이름·설정에 반영됩니다.</a:t>
+              <a:t>~/ros2_curri/agv_ws/src/agv_description/curriculum_stages/M08/warehouse.sdf</a:t>
             </a:r>
           </a:p>
         </p:txBody>
@@ -14419,23 +14747,124 @@
               </a:defRPr>
             </a:pPr>
             <a:r>
-              <a:t>현재 단계 실행    |    현재 폴더 ~/ros2_curri/agv_ws    |    현재 터미널</a:t>
-            </a:r>
-          </a:p>
-        </p:txBody>
-      </p:sp>
-      <p:sp>
-        <p:nvSpPr>
-          <p:cNvPr id="7" name="Rounded Rectangle 6"/>
+              <a:t>현재 단계 16/19    |    현재 폴더 ~/ros2_curri/agv_ws    |    현재 터미널</a:t>
+            </a:r>
+          </a:p>
+        </p:txBody>
+      </p:sp>
+      <p:sp>
+        <p:nvSpPr>
+          <p:cNvPr id="7" name="TextBox 6"/>
+          <p:cNvSpPr txBox="1"/>
+          <p:nvPr/>
+        </p:nvSpPr>
+        <p:spPr>
+          <a:xfrm>
+            <a:off x="658368" y="1627632"/>
+            <a:ext cx="10972800" cy="256032"/>
+          </a:xfrm>
+          <a:prstGeom prst="rect">
+            <a:avLst/>
+          </a:prstGeom>
+          <a:noFill/>
+        </p:spPr>
+        <p:txBody>
+          <a:bodyPr wrap="square" lIns="73152" rIns="73152" tIns="36576" bIns="36576">
+            <a:spAutoFit/>
+          </a:bodyPr>
+          <a:lstStyle/>
+          <a:p>
+            <a:pPr algn="l">
+              <a:spcAft>
+                <a:spcPts val="0"/>
+              </a:spcAft>
+              <a:defRPr sz="1500" b="1">
+                <a:solidFill>
+                  <a:srgbClr val="122C4E"/>
+                </a:solidFill>
+                <a:latin typeface="Noto Sans CJK KR"/>
+              </a:defRPr>
+            </a:pPr>
+            <a:r>
+              <a:t>이번 단계: 파일의 전체 내용을 중간 생략 없이 작성합니다. 아래 줄 범위를 끝까지 입력하세요.</a:t>
+            </a:r>
+          </a:p>
+        </p:txBody>
+      </p:sp>
+      <p:sp>
+        <p:nvSpPr>
+          <p:cNvPr id="8" name="Rectangle 7"/>
           <p:cNvSpPr/>
           <p:nvPr/>
         </p:nvSpPr>
         <p:spPr>
           <a:xfrm>
-            <a:off x="658368" y="1700784"/>
-            <a:ext cx="10972800" cy="3182112"/>
-          </a:xfrm>
-          <a:prstGeom prst="roundRect">
+            <a:off x="658368" y="1956816"/>
+            <a:ext cx="10972800" cy="603504"/>
+          </a:xfrm>
+          <a:prstGeom prst="rect">
+            <a:avLst/>
+          </a:prstGeom>
+          <a:solidFill>
+            <a:srgbClr val="F4F7FB"/>
+          </a:solidFill>
+          <a:ln>
+            <a:solidFill>
+              <a:srgbClr val="F4F7FB"/>
+            </a:solidFill>
+          </a:ln>
+        </p:spPr>
+        <p:style>
+          <a:lnRef idx="1">
+            <a:schemeClr val="accent1"/>
+          </a:lnRef>
+          <a:fillRef idx="3">
+            <a:schemeClr val="accent1"/>
+          </a:fillRef>
+          <a:effectRef idx="2">
+            <a:schemeClr val="accent1"/>
+          </a:effectRef>
+          <a:fontRef idx="minor">
+            <a:schemeClr val="lt1"/>
+          </a:fontRef>
+        </p:style>
+        <p:txBody>
+          <a:bodyPr rtlCol="0" anchor="ctr" wrap="square" lIns="73152" rIns="73152" tIns="36576" bIns="36576"/>
+          <a:lstStyle/>
+          <a:p>
+            <a:pPr algn="l">
+              <a:spcAft>
+                <a:spcPts val="0"/>
+              </a:spcAft>
+              <a:defRPr sz="1400" b="0">
+                <a:solidFill>
+                  <a:srgbClr val="122C4E"/>
+                </a:solidFill>
+                <a:latin typeface="DejaVu Sans Mono"/>
+              </a:defRPr>
+            </a:pPr>
+            <a:r>
+              <a:t>파일 생성: mkdir -p ~/ros2_curri/agv_ws/src/agv_description/curriculum_stages/M08</a:t>
+            </a:r>
+            <a:br/>
+            <a:r>
+              <a:t>파일 열기: nano ~/ros2_curri/agv_ws/src/agv_description/curriculum_stages/M08/warehouse.sdf</a:t>
+            </a:r>
+          </a:p>
+        </p:txBody>
+      </p:sp>
+      <p:sp>
+        <p:nvSpPr>
+          <p:cNvPr id="9" name="Rectangle 8"/>
+          <p:cNvSpPr/>
+          <p:nvPr/>
+        </p:nvSpPr>
+        <p:spPr>
+          <a:xfrm>
+            <a:off x="658368" y="2706624"/>
+            <a:ext cx="10972800" cy="3364992"/>
+          </a:xfrm>
+          <a:prstGeom prst="rect">
             <a:avLst/>
           </a:prstGeom>
           <a:solidFill>
@@ -14462,14 +14891,14 @@
           </a:fontRef>
         </p:style>
         <p:txBody>
-          <a:bodyPr rtlCol="0" anchor="ctr" wrap="square" lIns="73152" rIns="73152" tIns="36576" bIns="36576"/>
-          <a:lstStyle/>
-          <a:p>
-            <a:pPr algn="l">
-              <a:spcAft>
-                <a:spcPts val="0"/>
-              </a:spcAft>
-              <a:defRPr sz="1600" b="0">
+          <a:bodyPr rtlCol="0" anchor="ctr" wrap="square" lIns="164592" rIns="164592" tIns="109728" bIns="36576"/>
+          <a:lstStyle/>
+          <a:p>
+            <a:pPr algn="l">
+              <a:spcAft>
+                <a:spcPts val="0"/>
+              </a:spcAft>
+              <a:defRPr sz="1400" b="0">
                 <a:solidFill>
                   <a:srgbClr val="FFFFFF"/>
                 </a:solidFill>
@@ -14477,89 +14906,90 @@
               </a:defRPr>
             </a:pPr>
             <a:r>
-              <a:t>cd ~/ros2_curri/agv_ws</a:t>
+              <a:t>    &lt;model name="ground"&gt;</a:t>
             </a:r>
             <a:br/>
             <a:r>
-              <a:t>gz sim -r src/agv_description/curriculum_stages/M08/warehouse.sdf</a:t>
-            </a:r>
-          </a:p>
-        </p:txBody>
-      </p:sp>
-      <p:sp>
-        <p:nvSpPr>
-          <p:cNvPr id="8" name="TextBox 7"/>
-          <p:cNvSpPr txBox="1"/>
-          <p:nvPr/>
-        </p:nvSpPr>
-        <p:spPr>
-          <a:xfrm>
-            <a:off x="786384" y="5239512"/>
-            <a:ext cx="1261872" cy="237744"/>
-          </a:xfrm>
-          <a:prstGeom prst="rect">
-            <a:avLst/>
-          </a:prstGeom>
-          <a:noFill/>
-        </p:spPr>
-        <p:txBody>
-          <a:bodyPr wrap="square" lIns="73152" rIns="73152" tIns="36576" bIns="36576">
-            <a:spAutoFit/>
-          </a:bodyPr>
-          <a:lstStyle/>
-          <a:p>
-            <a:pPr algn="l">
-              <a:spcAft>
-                <a:spcPts val="0"/>
-              </a:spcAft>
-              <a:defRPr sz="1800" b="1">
-                <a:solidFill>
-                  <a:srgbClr val="2A8B5A"/>
-                </a:solidFill>
-                <a:latin typeface="Noto Sans CJK KR"/>
-              </a:defRPr>
-            </a:pPr>
-            <a:r>
-              <a:t>확인 기준</a:t>
-            </a:r>
-          </a:p>
-        </p:txBody>
-      </p:sp>
-      <p:sp>
-        <p:nvSpPr>
-          <p:cNvPr id="9" name="TextBox 8"/>
-          <p:cNvSpPr txBox="1"/>
-          <p:nvPr/>
-        </p:nvSpPr>
-        <p:spPr>
-          <a:xfrm>
-            <a:off x="786384" y="5532120"/>
-            <a:ext cx="10469880" cy="420624"/>
-          </a:xfrm>
-          <a:prstGeom prst="rect">
-            <a:avLst/>
-          </a:prstGeom>
-          <a:noFill/>
-        </p:spPr>
-        <p:txBody>
-          <a:bodyPr wrap="square" lIns="73152" rIns="73152" tIns="36576" bIns="36576">
-            <a:spAutoFit/>
-          </a:bodyPr>
-          <a:lstStyle/>
-          <a:p>
-            <a:pPr algn="l">
-              <a:spcAft>
-                <a:spcPts val="0"/>
-              </a:spcAft>
-              <a:defRPr sz="1800" b="0">
-                <a:solidFill>
-                  <a:srgbClr val="122C4E"/>
-                </a:solidFill>
-                <a:latin typeface="Noto Sans CJK KR"/>
-              </a:defRPr>
-            </a:pPr>
-            <a:r>
-              <a:t>ground·벽·박스가 있는 World에 AGV가 spawn되어 있는 Gazebo 화면을 확인한다.</a:t>
+              <a:t>      &lt;static&gt;true&lt;/static&gt;</a:t>
+            </a:r>
+            <a:br/>
+            <a:r>
+              <a:t>      &lt;link name="link"&gt;</a:t>
+            </a:r>
+            <a:br/>
+            <a:r>
+              <a:t>        &lt;collision name="collision"&gt;</a:t>
+            </a:r>
+            <a:br/>
+            <a:r>
+              <a:t>          &lt;geometry&gt;</a:t>
+            </a:r>
+            <a:br/>
+            <a:r>
+              <a:t>            &lt;plane&gt;</a:t>
+            </a:r>
+            <a:br/>
+            <a:r>
+              <a:t>              &lt;normal&gt;0 0 1&lt;/normal&gt;</a:t>
+            </a:r>
+            <a:br/>
+            <a:r>
+              <a:t>              &lt;size&gt;30 30&lt;/size&gt;</a:t>
+            </a:r>
+            <a:br/>
+            <a:r>
+              <a:t>            &lt;/plane&gt;</a:t>
+            </a:r>
+            <a:br/>
+            <a:r>
+              <a:t>          &lt;/geometry&gt;</a:t>
+            </a:r>
+            <a:br/>
+            <a:r>
+              <a:t>        &lt;/collision&gt;</a:t>
+            </a:r>
+            <a:br/>
+            <a:r>
+              <a:t>        &lt;visual name="visual"&gt;</a:t>
+            </a:r>
+          </a:p>
+        </p:txBody>
+      </p:sp>
+      <p:sp>
+        <p:nvSpPr>
+          <p:cNvPr id="10" name="TextBox 9"/>
+          <p:cNvSpPr txBox="1"/>
+          <p:nvPr/>
+        </p:nvSpPr>
+        <p:spPr>
+          <a:xfrm>
+            <a:off x="749808" y="6181344"/>
+            <a:ext cx="10789920" cy="201168"/>
+          </a:xfrm>
+          <a:prstGeom prst="rect">
+            <a:avLst/>
+          </a:prstGeom>
+          <a:noFill/>
+        </p:spPr>
+        <p:txBody>
+          <a:bodyPr wrap="square" lIns="73152" rIns="73152" tIns="36576" bIns="36576">
+            <a:spAutoFit/>
+          </a:bodyPr>
+          <a:lstStyle/>
+          <a:p>
+            <a:pPr algn="l">
+              <a:spcAft>
+                <a:spcPts val="0"/>
+              </a:spcAft>
+              <a:defRPr sz="1000" b="0">
+                <a:solidFill>
+                  <a:srgbClr val="5C6672"/>
+                </a:solidFill>
+                <a:latin typeface="Noto Sans CJK KR"/>
+              </a:defRPr>
+            </a:pPr>
+            <a:r>
+              <a:t>파일 전체 2/4 · 이 슬라이드 다음에 같은 파일의 나머지 줄이 이어집니다.</a:t>
             </a:r>
           </a:p>
         </p:txBody>
@@ -14616,7 +15046,7 @@
               </a:defRPr>
             </a:pPr>
             <a:r>
-              <a:t>정상 결과: 실제 환경에서 확인한 출력</a:t>
+              <a:t>파일을 계속 작성하고 저장한다 (3/4)</a:t>
             </a:r>
           </a:p>
         </p:txBody>
@@ -14655,7 +15085,7 @@
               </a:defRPr>
             </a:pPr>
             <a:r>
-              <a:t>실제 ROS 2 환경의 파일·패키지·구성 검증 로그</a:t>
+              <a:t>~/ros2_curri/agv_ws/src/agv_description/curriculum_stages/M08/warehouse.sdf</a:t>
             </a:r>
           </a:p>
         </p:txBody>
@@ -14738,30 +15168,64 @@
           </a:p>
         </p:txBody>
       </p:sp>
-      <p:pic>
-        <p:nvPicPr>
-          <p:cNvPr id="6" name="Picture 5" descr="validation_terminal.png"/>
-          <p:cNvPicPr>
-            <a:picLocks noChangeAspect="1"/>
-          </p:cNvPicPr>
-          <p:nvPr/>
-        </p:nvPicPr>
-        <p:blipFill>
-          <a:blip r:embed="rId2"/>
-          <a:stretch>
-            <a:fillRect/>
-          </a:stretch>
-        </p:blipFill>
-        <p:spPr>
-          <a:xfrm>
-            <a:off x="790956" y="1884338"/>
-            <a:ext cx="10607040" cy="3738546"/>
-          </a:xfrm>
-          <a:prstGeom prst="rect">
-            <a:avLst/>
-          </a:prstGeom>
-        </p:spPr>
-      </p:pic>
+      <p:sp>
+        <p:nvSpPr>
+          <p:cNvPr id="6" name="Rectangle 5"/>
+          <p:cNvSpPr/>
+          <p:nvPr/>
+        </p:nvSpPr>
+        <p:spPr>
+          <a:xfrm>
+            <a:off x="566928" y="1188720"/>
+            <a:ext cx="11064240" cy="347472"/>
+          </a:xfrm>
+          <a:prstGeom prst="rect">
+            <a:avLst/>
+          </a:prstGeom>
+          <a:solidFill>
+            <a:srgbClr val="F4F7FB"/>
+          </a:solidFill>
+          <a:ln>
+            <a:solidFill>
+              <a:srgbClr val="F4F7FB"/>
+            </a:solidFill>
+          </a:ln>
+        </p:spPr>
+        <p:style>
+          <a:lnRef idx="1">
+            <a:schemeClr val="accent1"/>
+          </a:lnRef>
+          <a:fillRef idx="3">
+            <a:schemeClr val="accent1"/>
+          </a:fillRef>
+          <a:effectRef idx="2">
+            <a:schemeClr val="accent1"/>
+          </a:effectRef>
+          <a:fontRef idx="minor">
+            <a:schemeClr val="lt1"/>
+          </a:fontRef>
+        </p:style>
+        <p:txBody>
+          <a:bodyPr rtlCol="0" anchor="ctr" wrap="square" lIns="73152" rIns="73152" tIns="36576" bIns="36576"/>
+          <a:lstStyle/>
+          <a:p>
+            <a:pPr algn="l">
+              <a:spcAft>
+                <a:spcPts val="0"/>
+              </a:spcAft>
+              <a:defRPr sz="1300" b="1">
+                <a:solidFill>
+                  <a:srgbClr val="122C4E"/>
+                </a:solidFill>
+                <a:latin typeface="Noto Sans CJK KR"/>
+              </a:defRPr>
+            </a:pPr>
+            <a:r>
+              <a:t>현재 단계 17/19    |    현재 폴더 ~/ros2_curri/agv_ws    |    현재 터미널</a:t>
+            </a:r>
+          </a:p>
+        </p:txBody>
+      </p:sp>
       <p:sp>
         <p:nvSpPr>
           <p:cNvPr id="7" name="TextBox 6"/>
@@ -14770,33 +15234,236 @@
         </p:nvSpPr>
         <p:spPr>
           <a:xfrm>
-            <a:off x="777240" y="6217920"/>
-            <a:ext cx="10607040" cy="182880"/>
-          </a:xfrm>
-          <a:prstGeom prst="rect">
-            <a:avLst/>
-          </a:prstGeom>
-          <a:noFill/>
-        </p:spPr>
-        <p:txBody>
-          <a:bodyPr wrap="square" lIns="73152" rIns="73152" tIns="36576" bIns="36576">
-            <a:spAutoFit/>
-          </a:bodyPr>
-          <a:lstStyle/>
-          <a:p>
-            <a:pPr algn="ctr">
-              <a:spcAft>
-                <a:spcPts val="0"/>
-              </a:spcAft>
-              <a:defRPr sz="1100" b="1">
-                <a:solidFill>
-                  <a:srgbClr val="2A8B5A"/>
-                </a:solidFill>
-                <a:latin typeface="Noto Sans CJK KR"/>
-              </a:defRPr>
-            </a:pPr>
-            <a:r>
-              <a:t>① 명령/설정  ② 정상 출력 또는 화면  ③ 다음 검증 명령으로 재확인</a:t>
+            <a:off x="658368" y="1627632"/>
+            <a:ext cx="10972800" cy="256032"/>
+          </a:xfrm>
+          <a:prstGeom prst="rect">
+            <a:avLst/>
+          </a:prstGeom>
+          <a:noFill/>
+        </p:spPr>
+        <p:txBody>
+          <a:bodyPr wrap="square" lIns="73152" rIns="73152" tIns="36576" bIns="36576">
+            <a:spAutoFit/>
+          </a:bodyPr>
+          <a:lstStyle/>
+          <a:p>
+            <a:pPr algn="l">
+              <a:spcAft>
+                <a:spcPts val="0"/>
+              </a:spcAft>
+              <a:defRPr sz="1500" b="1">
+                <a:solidFill>
+                  <a:srgbClr val="122C4E"/>
+                </a:solidFill>
+                <a:latin typeface="Noto Sans CJK KR"/>
+              </a:defRPr>
+            </a:pPr>
+            <a:r>
+              <a:t>이번 단계: 파일의 전체 내용을 중간 생략 없이 작성합니다. 아래 줄 범위를 끝까지 입력하세요.</a:t>
+            </a:r>
+          </a:p>
+        </p:txBody>
+      </p:sp>
+      <p:sp>
+        <p:nvSpPr>
+          <p:cNvPr id="8" name="Rectangle 7"/>
+          <p:cNvSpPr/>
+          <p:nvPr/>
+        </p:nvSpPr>
+        <p:spPr>
+          <a:xfrm>
+            <a:off x="658368" y="1956816"/>
+            <a:ext cx="10972800" cy="603504"/>
+          </a:xfrm>
+          <a:prstGeom prst="rect">
+            <a:avLst/>
+          </a:prstGeom>
+          <a:solidFill>
+            <a:srgbClr val="F4F7FB"/>
+          </a:solidFill>
+          <a:ln>
+            <a:solidFill>
+              <a:srgbClr val="F4F7FB"/>
+            </a:solidFill>
+          </a:ln>
+        </p:spPr>
+        <p:style>
+          <a:lnRef idx="1">
+            <a:schemeClr val="accent1"/>
+          </a:lnRef>
+          <a:fillRef idx="3">
+            <a:schemeClr val="accent1"/>
+          </a:fillRef>
+          <a:effectRef idx="2">
+            <a:schemeClr val="accent1"/>
+          </a:effectRef>
+          <a:fontRef idx="minor">
+            <a:schemeClr val="lt1"/>
+          </a:fontRef>
+        </p:style>
+        <p:txBody>
+          <a:bodyPr rtlCol="0" anchor="ctr" wrap="square" lIns="73152" rIns="73152" tIns="36576" bIns="36576"/>
+          <a:lstStyle/>
+          <a:p>
+            <a:pPr algn="l">
+              <a:spcAft>
+                <a:spcPts val="0"/>
+              </a:spcAft>
+              <a:defRPr sz="1400" b="0">
+                <a:solidFill>
+                  <a:srgbClr val="122C4E"/>
+                </a:solidFill>
+                <a:latin typeface="DejaVu Sans Mono"/>
+              </a:defRPr>
+            </a:pPr>
+            <a:r>
+              <a:t>파일 생성: mkdir -p ~/ros2_curri/agv_ws/src/agv_description/curriculum_stages/M08</a:t>
+            </a:r>
+            <a:br/>
+            <a:r>
+              <a:t>파일 열기: nano ~/ros2_curri/agv_ws/src/agv_description/curriculum_stages/M08/warehouse.sdf</a:t>
+            </a:r>
+          </a:p>
+        </p:txBody>
+      </p:sp>
+      <p:sp>
+        <p:nvSpPr>
+          <p:cNvPr id="9" name="Rectangle 8"/>
+          <p:cNvSpPr/>
+          <p:nvPr/>
+        </p:nvSpPr>
+        <p:spPr>
+          <a:xfrm>
+            <a:off x="658368" y="2706624"/>
+            <a:ext cx="10972800" cy="3364992"/>
+          </a:xfrm>
+          <a:prstGeom prst="rect">
+            <a:avLst/>
+          </a:prstGeom>
+          <a:solidFill>
+            <a:srgbClr val="1D232D"/>
+          </a:solidFill>
+          <a:ln>
+            <a:solidFill>
+              <a:srgbClr val="1D232D"/>
+            </a:solidFill>
+          </a:ln>
+        </p:spPr>
+        <p:style>
+          <a:lnRef idx="1">
+            <a:schemeClr val="accent1"/>
+          </a:lnRef>
+          <a:fillRef idx="3">
+            <a:schemeClr val="accent1"/>
+          </a:fillRef>
+          <a:effectRef idx="2">
+            <a:schemeClr val="accent1"/>
+          </a:effectRef>
+          <a:fontRef idx="minor">
+            <a:schemeClr val="lt1"/>
+          </a:fontRef>
+        </p:style>
+        <p:txBody>
+          <a:bodyPr rtlCol="0" anchor="ctr" wrap="square" lIns="164592" rIns="164592" tIns="109728" bIns="36576"/>
+          <a:lstStyle/>
+          <a:p>
+            <a:pPr algn="l">
+              <a:spcAft>
+                <a:spcPts val="0"/>
+              </a:spcAft>
+              <a:defRPr sz="1400" b="0">
+                <a:solidFill>
+                  <a:srgbClr val="FFFFFF"/>
+                </a:solidFill>
+                <a:latin typeface="DejaVu Sans Mono"/>
+              </a:defRPr>
+            </a:pPr>
+            <a:r>
+              <a:t>          &lt;geometry&gt;</a:t>
+            </a:r>
+            <a:br/>
+            <a:r>
+              <a:t>            &lt;plane&gt;</a:t>
+            </a:r>
+            <a:br/>
+            <a:r>
+              <a:t>              &lt;normal&gt;0 0 1&lt;/normal&gt;</a:t>
+            </a:r>
+            <a:br/>
+            <a:r>
+              <a:t>              &lt;size&gt;30 30&lt;/size&gt;</a:t>
+            </a:r>
+            <a:br/>
+            <a:r>
+              <a:t>            &lt;/plane&gt;</a:t>
+            </a:r>
+            <a:br/>
+            <a:r>
+              <a:t>          &lt;/geometry&gt;</a:t>
+            </a:r>
+            <a:br/>
+            <a:r>
+              <a:t>        &lt;/visual&gt;</a:t>
+            </a:r>
+            <a:br/>
+            <a:r>
+              <a:t>      &lt;/link&gt;</a:t>
+            </a:r>
+            <a:br/>
+            <a:r>
+              <a:t>    &lt;/model&gt;</a:t>
+            </a:r>
+            <a:br/>
+            <a:r>
+              <a:t>    &lt;include&gt;</a:t>
+            </a:r>
+            <a:br/>
+            <a:r>
+              <a:t>      &lt;uri&gt;model://agv&lt;/uri&gt;</a:t>
+            </a:r>
+            <a:br/>
+            <a:r>
+              <a:t>      &lt;name&gt;agv&lt;/name&gt;</a:t>
+            </a:r>
+          </a:p>
+        </p:txBody>
+      </p:sp>
+      <p:sp>
+        <p:nvSpPr>
+          <p:cNvPr id="10" name="TextBox 9"/>
+          <p:cNvSpPr txBox="1"/>
+          <p:nvPr/>
+        </p:nvSpPr>
+        <p:spPr>
+          <a:xfrm>
+            <a:off x="749808" y="6181344"/>
+            <a:ext cx="10789920" cy="201168"/>
+          </a:xfrm>
+          <a:prstGeom prst="rect">
+            <a:avLst/>
+          </a:prstGeom>
+          <a:noFill/>
+        </p:spPr>
+        <p:txBody>
+          <a:bodyPr wrap="square" lIns="73152" rIns="73152" tIns="36576" bIns="36576">
+            <a:spAutoFit/>
+          </a:bodyPr>
+          <a:lstStyle/>
+          <a:p>
+            <a:pPr algn="l">
+              <a:spcAft>
+                <a:spcPts val="0"/>
+              </a:spcAft>
+              <a:defRPr sz="1000" b="0">
+                <a:solidFill>
+                  <a:srgbClr val="5C6672"/>
+                </a:solidFill>
+                <a:latin typeface="Noto Sans CJK KR"/>
+              </a:defRPr>
+            </a:pPr>
+            <a:r>
+              <a:t>파일 전체 3/4 · 이 슬라이드 다음에 같은 파일의 나머지 줄이 이어집니다.</a:t>
             </a:r>
           </a:p>
         </p:txBody>
@@ -14853,7 +15520,7 @@
               </a:defRPr>
             </a:pPr>
             <a:r>
-              <a:t>정상 결과: 실제 환경에서 확인한 출력</a:t>
+              <a:t>파일을 계속 작성하고 저장한다 (4/4)</a:t>
             </a:r>
           </a:p>
         </p:txBody>
@@ -14892,7 +15559,7 @@
               </a:defRPr>
             </a:pPr>
             <a:r>
-              <a:t>실제 Gazebo Sim에서 warehouse World에 spawn된 AGV</a:t>
+              <a:t>~/ros2_curri/agv_ws/src/agv_description/curriculum_stages/M08/warehouse.sdf</a:t>
             </a:r>
           </a:p>
         </p:txBody>
@@ -14975,30 +15642,64 @@
           </a:p>
         </p:txBody>
       </p:sp>
-      <p:pic>
-        <p:nvPicPr>
-          <p:cNvPr id="6" name="Picture 5" descr="01_gazebo_world_spawn_actual.png"/>
-          <p:cNvPicPr>
-            <a:picLocks noChangeAspect="1"/>
-          </p:cNvPicPr>
-          <p:nvPr/>
-        </p:nvPicPr>
-        <p:blipFill>
-          <a:blip r:embed="rId2"/>
-          <a:stretch>
-            <a:fillRect/>
-          </a:stretch>
-        </p:blipFill>
-        <p:spPr>
-          <a:xfrm>
-            <a:off x="3253884" y="1353312"/>
-            <a:ext cx="5681183" cy="4800600"/>
-          </a:xfrm>
-          <a:prstGeom prst="rect">
-            <a:avLst/>
-          </a:prstGeom>
-        </p:spPr>
-      </p:pic>
+      <p:sp>
+        <p:nvSpPr>
+          <p:cNvPr id="6" name="Rectangle 5"/>
+          <p:cNvSpPr/>
+          <p:nvPr/>
+        </p:nvSpPr>
+        <p:spPr>
+          <a:xfrm>
+            <a:off x="566928" y="1188720"/>
+            <a:ext cx="11064240" cy="347472"/>
+          </a:xfrm>
+          <a:prstGeom prst="rect">
+            <a:avLst/>
+          </a:prstGeom>
+          <a:solidFill>
+            <a:srgbClr val="F4F7FB"/>
+          </a:solidFill>
+          <a:ln>
+            <a:solidFill>
+              <a:srgbClr val="F4F7FB"/>
+            </a:solidFill>
+          </a:ln>
+        </p:spPr>
+        <p:style>
+          <a:lnRef idx="1">
+            <a:schemeClr val="accent1"/>
+          </a:lnRef>
+          <a:fillRef idx="3">
+            <a:schemeClr val="accent1"/>
+          </a:fillRef>
+          <a:effectRef idx="2">
+            <a:schemeClr val="accent1"/>
+          </a:effectRef>
+          <a:fontRef idx="minor">
+            <a:schemeClr val="lt1"/>
+          </a:fontRef>
+        </p:style>
+        <p:txBody>
+          <a:bodyPr rtlCol="0" anchor="ctr" wrap="square" lIns="73152" rIns="73152" tIns="36576" bIns="36576"/>
+          <a:lstStyle/>
+          <a:p>
+            <a:pPr algn="l">
+              <a:spcAft>
+                <a:spcPts val="0"/>
+              </a:spcAft>
+              <a:defRPr sz="1300" b="1">
+                <a:solidFill>
+                  <a:srgbClr val="122C4E"/>
+                </a:solidFill>
+                <a:latin typeface="Noto Sans CJK KR"/>
+              </a:defRPr>
+            </a:pPr>
+            <a:r>
+              <a:t>현재 단계 18/19    |    현재 폴더 ~/ros2_curri/agv_ws    |    현재 터미널</a:t>
+            </a:r>
+          </a:p>
+        </p:txBody>
+      </p:sp>
       <p:sp>
         <p:nvSpPr>
           <p:cNvPr id="7" name="TextBox 6"/>
@@ -15007,33 +15708,204 @@
         </p:nvSpPr>
         <p:spPr>
           <a:xfrm>
-            <a:off x="777240" y="6217920"/>
-            <a:ext cx="10607040" cy="182880"/>
-          </a:xfrm>
-          <a:prstGeom prst="rect">
-            <a:avLst/>
-          </a:prstGeom>
-          <a:noFill/>
-        </p:spPr>
-        <p:txBody>
-          <a:bodyPr wrap="square" lIns="73152" rIns="73152" tIns="36576" bIns="36576">
-            <a:spAutoFit/>
-          </a:bodyPr>
-          <a:lstStyle/>
-          <a:p>
-            <a:pPr algn="ctr">
-              <a:spcAft>
-                <a:spcPts val="0"/>
-              </a:spcAft>
-              <a:defRPr sz="1100" b="1">
-                <a:solidFill>
-                  <a:srgbClr val="2A8B5A"/>
-                </a:solidFill>
-                <a:latin typeface="Noto Sans CJK KR"/>
-              </a:defRPr>
-            </a:pPr>
-            <a:r>
-              <a:t>① 명령/설정  ② 정상 출력 또는 화면  ③ 다음 검증 명령으로 재확인</a:t>
+            <a:off x="658368" y="1627632"/>
+            <a:ext cx="10972800" cy="256032"/>
+          </a:xfrm>
+          <a:prstGeom prst="rect">
+            <a:avLst/>
+          </a:prstGeom>
+          <a:noFill/>
+        </p:spPr>
+        <p:txBody>
+          <a:bodyPr wrap="square" lIns="73152" rIns="73152" tIns="36576" bIns="36576">
+            <a:spAutoFit/>
+          </a:bodyPr>
+          <a:lstStyle/>
+          <a:p>
+            <a:pPr algn="l">
+              <a:spcAft>
+                <a:spcPts val="0"/>
+              </a:spcAft>
+              <a:defRPr sz="1500" b="1">
+                <a:solidFill>
+                  <a:srgbClr val="122C4E"/>
+                </a:solidFill>
+                <a:latin typeface="Noto Sans CJK KR"/>
+              </a:defRPr>
+            </a:pPr>
+            <a:r>
+              <a:t>이번 단계: 파일의 전체 내용을 중간 생략 없이 작성합니다. 아래 줄 범위를 끝까지 입력하세요.</a:t>
+            </a:r>
+          </a:p>
+        </p:txBody>
+      </p:sp>
+      <p:sp>
+        <p:nvSpPr>
+          <p:cNvPr id="8" name="Rectangle 7"/>
+          <p:cNvSpPr/>
+          <p:nvPr/>
+        </p:nvSpPr>
+        <p:spPr>
+          <a:xfrm>
+            <a:off x="658368" y="1956816"/>
+            <a:ext cx="10972800" cy="603504"/>
+          </a:xfrm>
+          <a:prstGeom prst="rect">
+            <a:avLst/>
+          </a:prstGeom>
+          <a:solidFill>
+            <a:srgbClr val="F4F7FB"/>
+          </a:solidFill>
+          <a:ln>
+            <a:solidFill>
+              <a:srgbClr val="F4F7FB"/>
+            </a:solidFill>
+          </a:ln>
+        </p:spPr>
+        <p:style>
+          <a:lnRef idx="1">
+            <a:schemeClr val="accent1"/>
+          </a:lnRef>
+          <a:fillRef idx="3">
+            <a:schemeClr val="accent1"/>
+          </a:fillRef>
+          <a:effectRef idx="2">
+            <a:schemeClr val="accent1"/>
+          </a:effectRef>
+          <a:fontRef idx="minor">
+            <a:schemeClr val="lt1"/>
+          </a:fontRef>
+        </p:style>
+        <p:txBody>
+          <a:bodyPr rtlCol="0" anchor="ctr" wrap="square" lIns="73152" rIns="73152" tIns="36576" bIns="36576"/>
+          <a:lstStyle/>
+          <a:p>
+            <a:pPr algn="l">
+              <a:spcAft>
+                <a:spcPts val="0"/>
+              </a:spcAft>
+              <a:defRPr sz="1400" b="0">
+                <a:solidFill>
+                  <a:srgbClr val="122C4E"/>
+                </a:solidFill>
+                <a:latin typeface="DejaVu Sans Mono"/>
+              </a:defRPr>
+            </a:pPr>
+            <a:r>
+              <a:t>파일 생성: mkdir -p ~/ros2_curri/agv_ws/src/agv_description/curriculum_stages/M08</a:t>
+            </a:r>
+            <a:br/>
+            <a:r>
+              <a:t>파일 열기: nano ~/ros2_curri/agv_ws/src/agv_description/curriculum_stages/M08/warehouse.sdf</a:t>
+            </a:r>
+          </a:p>
+        </p:txBody>
+      </p:sp>
+      <p:sp>
+        <p:nvSpPr>
+          <p:cNvPr id="9" name="Rectangle 8"/>
+          <p:cNvSpPr/>
+          <p:nvPr/>
+        </p:nvSpPr>
+        <p:spPr>
+          <a:xfrm>
+            <a:off x="658368" y="2706624"/>
+            <a:ext cx="10972800" cy="3364992"/>
+          </a:xfrm>
+          <a:prstGeom prst="rect">
+            <a:avLst/>
+          </a:prstGeom>
+          <a:solidFill>
+            <a:srgbClr val="1D232D"/>
+          </a:solidFill>
+          <a:ln>
+            <a:solidFill>
+              <a:srgbClr val="1D232D"/>
+            </a:solidFill>
+          </a:ln>
+        </p:spPr>
+        <p:style>
+          <a:lnRef idx="1">
+            <a:schemeClr val="accent1"/>
+          </a:lnRef>
+          <a:fillRef idx="3">
+            <a:schemeClr val="accent1"/>
+          </a:fillRef>
+          <a:effectRef idx="2">
+            <a:schemeClr val="accent1"/>
+          </a:effectRef>
+          <a:fontRef idx="minor">
+            <a:schemeClr val="lt1"/>
+          </a:fontRef>
+        </p:style>
+        <p:txBody>
+          <a:bodyPr rtlCol="0" anchor="ctr" wrap="square" lIns="164592" rIns="164592" tIns="109728" bIns="36576"/>
+          <a:lstStyle/>
+          <a:p>
+            <a:pPr algn="l">
+              <a:spcAft>
+                <a:spcPts val="0"/>
+              </a:spcAft>
+              <a:defRPr sz="1400" b="0">
+                <a:solidFill>
+                  <a:srgbClr val="FFFFFF"/>
+                </a:solidFill>
+                <a:latin typeface="DejaVu Sans Mono"/>
+              </a:defRPr>
+            </a:pPr>
+            <a:r>
+              <a:t>      &lt;pose&gt;0 0 0.08 0 0 0&lt;/pose&gt;</a:t>
+            </a:r>
+            <a:br/>
+            <a:r>
+              <a:t>    &lt;/include&gt;</a:t>
+            </a:r>
+            <a:br/>
+            <a:r>
+              <a:t>  &lt;/world&gt;</a:t>
+            </a:r>
+            <a:br/>
+            <a:r>
+              <a:t>&lt;/sdf&gt;</a:t>
+            </a:r>
+          </a:p>
+        </p:txBody>
+      </p:sp>
+      <p:sp>
+        <p:nvSpPr>
+          <p:cNvPr id="10" name="TextBox 9"/>
+          <p:cNvSpPr txBox="1"/>
+          <p:nvPr/>
+        </p:nvSpPr>
+        <p:spPr>
+          <a:xfrm>
+            <a:off x="749808" y="6181344"/>
+            <a:ext cx="10789920" cy="201168"/>
+          </a:xfrm>
+          <a:prstGeom prst="rect">
+            <a:avLst/>
+          </a:prstGeom>
+          <a:noFill/>
+        </p:spPr>
+        <p:txBody>
+          <a:bodyPr wrap="square" lIns="73152" rIns="73152" tIns="36576" bIns="36576">
+            <a:spAutoFit/>
+          </a:bodyPr>
+          <a:lstStyle/>
+          <a:p>
+            <a:pPr algn="l">
+              <a:spcAft>
+                <a:spcPts val="0"/>
+              </a:spcAft>
+              <a:defRPr sz="1000" b="0">
+                <a:solidFill>
+                  <a:srgbClr val="5C6672"/>
+                </a:solidFill>
+                <a:latin typeface="Noto Sans CJK KR"/>
+              </a:defRPr>
+            </a:pPr>
+            <a:r>
+              <a:t>파일 전체 4/4 · 이 슬라이드 다음에 같은 파일의 나머지 줄이 이어집니다.</a:t>
             </a:r>
           </a:p>
         </p:txBody>
@@ -15090,7 +15962,7 @@
               </a:defRPr>
             </a:pPr>
             <a:r>
-              <a:t>객관적 검증 명령으로 완료를 확인한다</a:t>
+              <a:t>build → source → run 순서로 실행한다</a:t>
             </a:r>
           </a:p>
         </p:txBody>
@@ -15129,7 +16001,7 @@
               </a:defRPr>
             </a:pPr>
             <a:r>
-              <a:t>화면만 보지 말고 topic·frame·파일·parameter를 다시 확인합니다.</a:t>
+              <a:t>새 파일 또는 수정 파일은 build와 source 뒤에만 실행 이름·설정에 반영됩니다.</a:t>
             </a:r>
           </a:p>
         </p:txBody>
@@ -15265,7 +16137,7 @@
               </a:defRPr>
             </a:pPr>
             <a:r>
-              <a:t>현재 단계 검증    |    현재 폴더 ~/ros2_curri/agv_ws    |    현재 터미널</a:t>
+              <a:t>현재 단계 실행    |    현재 폴더 ~/ros2_curri/agv_ws    |    현재 터미널</a:t>
             </a:r>
           </a:p>
         </p:txBody>
@@ -15278,8 +16150,8 @@
         </p:nvSpPr>
         <p:spPr>
           <a:xfrm>
-            <a:off x="658368" y="1755648"/>
-            <a:ext cx="10972800" cy="2148840"/>
+            <a:off x="658368" y="1700784"/>
+            <a:ext cx="10972800" cy="3182112"/>
           </a:xfrm>
           <a:prstGeom prst="roundRect">
             <a:avLst/>
@@ -15323,54 +16195,35 @@
               </a:defRPr>
             </a:pPr>
             <a:r>
-              <a:t>gz sdf -k ~/ros2_curri/agv_ws/src/agv_description/curriculum_stages/M08/model.sdf</a:t>
+              <a:t>cd ~/ros2_curri/agv_ws</a:t>
             </a:r>
             <a:br/>
             <a:r>
-              <a:t>rg -n '&lt;sensor|DiffDrive|/cmd_vel|/odom' ~/ros2_curri/agv_ws/src/agv_description/curriculum_stages/M08/model.sdf</a:t>
-            </a:r>
-          </a:p>
-        </p:txBody>
-      </p:sp>
-      <p:sp>
-        <p:nvSpPr>
-          <p:cNvPr id="8" name="Rounded Rectangle 7"/>
-          <p:cNvSpPr/>
-          <p:nvPr/>
-        </p:nvSpPr>
-        <p:spPr>
-          <a:xfrm>
-            <a:off x="658368" y="4206240"/>
-            <a:ext cx="10972800" cy="1554480"/>
-          </a:xfrm>
-          <a:prstGeom prst="roundRect">
-            <a:avLst/>
-          </a:prstGeom>
-          <a:solidFill>
-            <a:srgbClr val="F4F7FB"/>
-          </a:solidFill>
-          <a:ln>
-            <a:solidFill>
-              <a:srgbClr val="D1DFD5"/>
-            </a:solidFill>
-          </a:ln>
-        </p:spPr>
-        <p:style>
-          <a:lnRef idx="1">
-            <a:schemeClr val="accent1"/>
-          </a:lnRef>
-          <a:fillRef idx="3">
-            <a:schemeClr val="accent1"/>
-          </a:fillRef>
-          <a:effectRef idx="2">
-            <a:schemeClr val="accent1"/>
-          </a:effectRef>
-          <a:fontRef idx="minor">
-            <a:schemeClr val="lt1"/>
-          </a:fontRef>
-        </p:style>
-        <p:txBody>
-          <a:bodyPr rtlCol="0" anchor="ctr" wrap="square" lIns="73152" rIns="73152" tIns="36576" bIns="36576"/>
+              <a:t>gz sim -r src/agv_description/curriculum_stages/M08/warehouse.sdf</a:t>
+            </a:r>
+          </a:p>
+        </p:txBody>
+      </p:sp>
+      <p:sp>
+        <p:nvSpPr>
+          <p:cNvPr id="8" name="TextBox 7"/>
+          <p:cNvSpPr txBox="1"/>
+          <p:nvPr/>
+        </p:nvSpPr>
+        <p:spPr>
+          <a:xfrm>
+            <a:off x="786384" y="5239512"/>
+            <a:ext cx="1261872" cy="237744"/>
+          </a:xfrm>
+          <a:prstGeom prst="rect">
+            <a:avLst/>
+          </a:prstGeom>
+          <a:noFill/>
+        </p:spPr>
+        <p:txBody>
+          <a:bodyPr wrap="square" lIns="73152" rIns="73152" tIns="36576" bIns="36576">
+            <a:spAutoFit/>
+          </a:bodyPr>
           <a:lstStyle/>
           <a:p>
             <a:pPr algn="l">
@@ -15385,19 +16238,7 @@
               </a:defRPr>
             </a:pPr>
             <a:r>
-              <a:t>완료 체크</a:t>
-            </a:r>
-            <a:br/>
-            <a:r>
-              <a:t>□ 명령이 오류 없이 실행된다.</a:t>
-            </a:r>
-            <a:br/>
-            <a:r>
-              <a:t>□ 기대한 파일·topic·frame·parameter 이름이 보인다.</a:t>
-            </a:r>
-            <a:br/>
-            <a:r>
-              <a:t>□ 값의 단위와 방향을 한 문장으로 설명할 수 있다.</a:t>
+              <a:t>확인 기준</a:t>
             </a:r>
           </a:p>
         </p:txBody>
@@ -15410,25 +16251,25 @@
         </p:nvSpPr>
         <p:spPr>
           <a:xfrm>
-            <a:off x="731520" y="5989320"/>
-            <a:ext cx="10789920" cy="237744"/>
-          </a:xfrm>
-          <a:prstGeom prst="rect">
-            <a:avLst/>
-          </a:prstGeom>
-          <a:noFill/>
-        </p:spPr>
-        <p:txBody>
-          <a:bodyPr wrap="square" lIns="73152" rIns="73152" tIns="36576" bIns="36576">
-            <a:spAutoFit/>
-          </a:bodyPr>
-          <a:lstStyle/>
-          <a:p>
-            <a:pPr algn="l">
-              <a:spcAft>
-                <a:spcPts val="0"/>
-              </a:spcAft>
-              <a:defRPr sz="1500" b="1">
+            <a:off x="786384" y="5532120"/>
+            <a:ext cx="10469880" cy="420624"/>
+          </a:xfrm>
+          <a:prstGeom prst="rect">
+            <a:avLst/>
+          </a:prstGeom>
+          <a:noFill/>
+        </p:spPr>
+        <p:txBody>
+          <a:bodyPr wrap="square" lIns="73152" rIns="73152" tIns="36576" bIns="36576">
+            <a:spAutoFit/>
+          </a:bodyPr>
+          <a:lstStyle/>
+          <a:p>
+            <a:pPr algn="l">
+              <a:spcAft>
+                <a:spcPts val="0"/>
+              </a:spcAft>
+              <a:defRPr sz="1800" b="0">
                 <a:solidFill>
                   <a:srgbClr val="122C4E"/>
                 </a:solidFill>
@@ -15436,7 +16277,7 @@
               </a:defRPr>
             </a:pPr>
             <a:r>
-              <a:t>완료 조건: ground·벽·박스가 있는 World에 AGV가 spawn되어 있는 Gazebo 화면을 확인한다.</a:t>
+              <a:t>ground·벽·박스가 있는 World에 AGV가 spawn되어 있는 Gazebo 화면을 확인한다.</a:t>
             </a:r>
           </a:p>
         </p:txBody>
@@ -15493,7 +16334,7 @@
               </a:defRPr>
             </a:pPr>
             <a:r>
-              <a:t>막히면: 증상 → 우선 확인 → 재검증</a:t>
+              <a:t>정상 결과: 실제 환경에서 확인한 출력</a:t>
             </a:r>
           </a:p>
         </p:txBody>
@@ -15532,7 +16373,7 @@
               </a:defRPr>
             </a:pPr>
             <a:r>
-              <a:t>오류 메시지를 숨기지 않고 같은 순서로 점검합니다.</a:t>
+              <a:t>실제 ROS 2 환경의 파일·패키지·구성 검증 로그</a:t>
             </a:r>
           </a:p>
         </p:txBody>
@@ -15615,328 +16456,40 @@
           </a:p>
         </p:txBody>
       </p:sp>
-      <p:sp>
-        <p:nvSpPr>
-          <p:cNvPr id="6" name="Rectangle 5"/>
-          <p:cNvSpPr/>
-          <p:nvPr/>
-        </p:nvSpPr>
-        <p:spPr>
-          <a:xfrm>
-            <a:off x="566928" y="1188720"/>
-            <a:ext cx="11064240" cy="347472"/>
-          </a:xfrm>
-          <a:prstGeom prst="rect">
-            <a:avLst/>
-          </a:prstGeom>
-          <a:solidFill>
-            <a:srgbClr val="F4F7FB"/>
-          </a:solidFill>
-          <a:ln>
-            <a:solidFill>
-              <a:srgbClr val="F4F7FB"/>
-            </a:solidFill>
-          </a:ln>
-        </p:spPr>
-        <p:style>
-          <a:lnRef idx="1">
-            <a:schemeClr val="accent1"/>
-          </a:lnRef>
-          <a:fillRef idx="3">
-            <a:schemeClr val="accent1"/>
-          </a:fillRef>
-          <a:effectRef idx="2">
-            <a:schemeClr val="accent1"/>
-          </a:effectRef>
-          <a:fontRef idx="minor">
-            <a:schemeClr val="lt1"/>
-          </a:fontRef>
-        </p:style>
-        <p:txBody>
-          <a:bodyPr rtlCol="0" anchor="ctr" wrap="square" lIns="73152" rIns="73152" tIns="36576" bIns="36576"/>
-          <a:lstStyle/>
-          <a:p>
-            <a:pPr algn="l">
-              <a:spcAft>
-                <a:spcPts val="0"/>
-              </a:spcAft>
-              <a:defRPr sz="1300" b="1">
-                <a:solidFill>
-                  <a:srgbClr val="122C4E"/>
-                </a:solidFill>
-                <a:latin typeface="Noto Sans CJK KR"/>
-              </a:defRPr>
-            </a:pPr>
-            <a:r>
-              <a:t>현재 단계 오류 대응    |    현재 폴더 ~/ros2_curri/agv_ws    |    현재 터미널</a:t>
-            </a:r>
-          </a:p>
-        </p:txBody>
-      </p:sp>
-      <p:sp>
-        <p:nvSpPr>
-          <p:cNvPr id="7" name="Rounded Rectangle 6"/>
-          <p:cNvSpPr/>
-          <p:nvPr/>
-        </p:nvSpPr>
-        <p:spPr>
-          <a:xfrm>
-            <a:off x="694944" y="1755648"/>
-            <a:ext cx="10972800" cy="1115568"/>
-          </a:xfrm>
-          <a:prstGeom prst="roundRect">
-            <a:avLst/>
-          </a:prstGeom>
-          <a:solidFill>
-            <a:srgbClr val="FFF7F4"/>
-          </a:solidFill>
-          <a:ln>
-            <a:solidFill>
-              <a:srgbClr val="EDBEB4"/>
-            </a:solidFill>
-          </a:ln>
-        </p:spPr>
-        <p:style>
-          <a:lnRef idx="1">
-            <a:schemeClr val="accent1"/>
-          </a:lnRef>
-          <a:fillRef idx="3">
-            <a:schemeClr val="accent1"/>
-          </a:fillRef>
-          <a:effectRef idx="2">
-            <a:schemeClr val="accent1"/>
-          </a:effectRef>
-          <a:fontRef idx="minor">
-            <a:schemeClr val="lt1"/>
-          </a:fontRef>
-        </p:style>
-        <p:txBody>
-          <a:bodyPr rtlCol="0" anchor="ctr"/>
-          <a:lstStyle/>
-          <a:p>
-            <a:pPr algn="ctr"/>
-          </a:p>
-        </p:txBody>
-      </p:sp>
-      <p:sp>
-        <p:nvSpPr>
-          <p:cNvPr id="8" name="TextBox 7"/>
-          <p:cNvSpPr txBox="1"/>
-          <p:nvPr/>
-        </p:nvSpPr>
-        <p:spPr>
-          <a:xfrm>
-            <a:off x="896112" y="1901952"/>
-            <a:ext cx="2926080" cy="274320"/>
-          </a:xfrm>
-          <a:prstGeom prst="rect">
-            <a:avLst/>
-          </a:prstGeom>
-          <a:noFill/>
-        </p:spPr>
-        <p:txBody>
-          <a:bodyPr wrap="square" lIns="73152" rIns="73152" tIns="36576" bIns="36576">
-            <a:spAutoFit/>
-          </a:bodyPr>
-          <a:lstStyle/>
-          <a:p>
-            <a:pPr algn="l">
-              <a:spcAft>
-                <a:spcPts val="0"/>
-              </a:spcAft>
-              <a:defRPr sz="1800" b="1">
-                <a:solidFill>
-                  <a:srgbClr val="BE3B3B"/>
-                </a:solidFill>
-                <a:latin typeface="Noto Sans CJK KR"/>
-              </a:defRPr>
-            </a:pPr>
-            <a:r>
-              <a:t>증상 1: world 파일을 못 찾음</a:t>
-            </a:r>
-          </a:p>
-        </p:txBody>
-      </p:sp>
-      <p:sp>
-        <p:nvSpPr>
-          <p:cNvPr id="9" name="TextBox 8"/>
-          <p:cNvSpPr txBox="1"/>
-          <p:nvPr/>
-        </p:nvSpPr>
-        <p:spPr>
-          <a:xfrm>
-            <a:off x="3794760" y="1883664"/>
-            <a:ext cx="7543800" cy="621792"/>
-          </a:xfrm>
-          <a:prstGeom prst="rect">
-            <a:avLst/>
-          </a:prstGeom>
-          <a:noFill/>
-        </p:spPr>
-        <p:txBody>
-          <a:bodyPr wrap="square" lIns="73152" rIns="73152" tIns="36576" bIns="36576">
-            <a:spAutoFit/>
-          </a:bodyPr>
-          <a:lstStyle/>
-          <a:p>
-            <a:pPr algn="l">
-              <a:spcAft>
-                <a:spcPts val="0"/>
-              </a:spcAft>
-              <a:defRPr sz="1600" b="0">
-                <a:solidFill>
-                  <a:srgbClr val="122C4E"/>
-                </a:solidFill>
-                <a:latin typeface="Noto Sans CJK KR"/>
-              </a:defRPr>
-            </a:pPr>
-            <a:r>
-              <a:t>우선 확인: launch의 package share path와 install data_files를 확인한다.</a:t>
-            </a:r>
-            <a:br/>
-            <a:r>
-              <a:t>수정 후: gz sdf -k ~/ros2_curri/agv_ws/src/agv_description/curriculum_stages/M08/model.sdf</a:t>
-            </a:r>
-          </a:p>
-        </p:txBody>
-      </p:sp>
-      <p:sp>
-        <p:nvSpPr>
-          <p:cNvPr id="10" name="Rounded Rectangle 9"/>
-          <p:cNvSpPr/>
-          <p:nvPr/>
-        </p:nvSpPr>
-        <p:spPr>
-          <a:xfrm>
-            <a:off x="694944" y="3172968"/>
-            <a:ext cx="10972800" cy="1115568"/>
-          </a:xfrm>
-          <a:prstGeom prst="roundRect">
-            <a:avLst/>
-          </a:prstGeom>
-          <a:solidFill>
-            <a:srgbClr val="FFF7F4"/>
-          </a:solidFill>
-          <a:ln>
-            <a:solidFill>
-              <a:srgbClr val="EDBEB4"/>
-            </a:solidFill>
-          </a:ln>
-        </p:spPr>
-        <p:style>
-          <a:lnRef idx="1">
-            <a:schemeClr val="accent1"/>
-          </a:lnRef>
-          <a:fillRef idx="3">
-            <a:schemeClr val="accent1"/>
-          </a:fillRef>
-          <a:effectRef idx="2">
-            <a:schemeClr val="accent1"/>
-          </a:effectRef>
-          <a:fontRef idx="minor">
-            <a:schemeClr val="lt1"/>
-          </a:fontRef>
-        </p:style>
-        <p:txBody>
-          <a:bodyPr rtlCol="0" anchor="ctr"/>
-          <a:lstStyle/>
-          <a:p>
-            <a:pPr algn="ctr"/>
-          </a:p>
-        </p:txBody>
-      </p:sp>
-      <p:sp>
-        <p:nvSpPr>
-          <p:cNvPr id="11" name="TextBox 10"/>
-          <p:cNvSpPr txBox="1"/>
-          <p:nvPr/>
-        </p:nvSpPr>
-        <p:spPr>
-          <a:xfrm>
-            <a:off x="896112" y="3319272"/>
-            <a:ext cx="2926080" cy="274320"/>
-          </a:xfrm>
-          <a:prstGeom prst="rect">
-            <a:avLst/>
-          </a:prstGeom>
-          <a:noFill/>
-        </p:spPr>
-        <p:txBody>
-          <a:bodyPr wrap="square" lIns="73152" rIns="73152" tIns="36576" bIns="36576">
-            <a:spAutoFit/>
-          </a:bodyPr>
-          <a:lstStyle/>
-          <a:p>
-            <a:pPr algn="l">
-              <a:spcAft>
-                <a:spcPts val="0"/>
-              </a:spcAft>
-              <a:defRPr sz="1800" b="1">
-                <a:solidFill>
-                  <a:srgbClr val="BE3B3B"/>
-                </a:solidFill>
-                <a:latin typeface="Noto Sans CJK KR"/>
-              </a:defRPr>
-            </a:pPr>
-            <a:r>
-              <a:t>증상 2: 모델이 공중/바닥 아래</a:t>
-            </a:r>
-          </a:p>
-        </p:txBody>
-      </p:sp>
-      <p:sp>
-        <p:nvSpPr>
-          <p:cNvPr id="12" name="TextBox 11"/>
-          <p:cNvSpPr txBox="1"/>
-          <p:nvPr/>
-        </p:nvSpPr>
-        <p:spPr>
-          <a:xfrm>
-            <a:off x="3794760" y="3300984"/>
-            <a:ext cx="7543800" cy="621792"/>
-          </a:xfrm>
-          <a:prstGeom prst="rect">
-            <a:avLst/>
-          </a:prstGeom>
-          <a:noFill/>
-        </p:spPr>
-        <p:txBody>
-          <a:bodyPr wrap="square" lIns="73152" rIns="73152" tIns="36576" bIns="36576">
-            <a:spAutoFit/>
-          </a:bodyPr>
-          <a:lstStyle/>
-          <a:p>
-            <a:pPr algn="l">
-              <a:spcAft>
-                <a:spcPts val="0"/>
-              </a:spcAft>
-              <a:defRPr sz="1600" b="0">
-                <a:solidFill>
-                  <a:srgbClr val="122C4E"/>
-                </a:solidFill>
-                <a:latin typeface="Noto Sans CJK KR"/>
-              </a:defRPr>
-            </a:pPr>
-            <a:r>
-              <a:t>우선 확인: 초기 z·collision origin·geometry 크기를 확인한다.</a:t>
-            </a:r>
-            <a:br/>
-            <a:r>
-              <a:t>수정 후: gz sdf -k ~/ros2_curri/agv_ws/src/agv_description/curriculum_stages/M08/model.sdf</a:t>
-            </a:r>
-          </a:p>
-        </p:txBody>
-      </p:sp>
-      <p:sp>
-        <p:nvSpPr>
-          <p:cNvPr id="13" name="TextBox 12"/>
-          <p:cNvSpPr txBox="1"/>
-          <p:nvPr/>
-        </p:nvSpPr>
-        <p:spPr>
-          <a:xfrm>
-            <a:off x="822960" y="5102352"/>
-            <a:ext cx="10607040" cy="402336"/>
+      <p:pic>
+        <p:nvPicPr>
+          <p:cNvPr id="6" name="Picture 5" descr="validation_terminal.png"/>
+          <p:cNvPicPr>
+            <a:picLocks noChangeAspect="1"/>
+          </p:cNvPicPr>
+          <p:nvPr/>
+        </p:nvPicPr>
+        <p:blipFill>
+          <a:blip r:embed="rId2"/>
+          <a:stretch>
+            <a:fillRect/>
+          </a:stretch>
+        </p:blipFill>
+        <p:spPr>
+          <a:xfrm>
+            <a:off x="790956" y="1884338"/>
+            <a:ext cx="10607040" cy="3738546"/>
+          </a:xfrm>
+          <a:prstGeom prst="rect">
+            <a:avLst/>
+          </a:prstGeom>
+        </p:spPr>
+      </p:pic>
+      <p:sp>
+        <p:nvSpPr>
+          <p:cNvPr id="7" name="TextBox 6"/>
+          <p:cNvSpPr txBox="1"/>
+          <p:nvPr/>
+        </p:nvSpPr>
+        <p:spPr>
+          <a:xfrm>
+            <a:off x="777240" y="6144768"/>
+            <a:ext cx="10607040" cy="310896"/>
           </a:xfrm>
           <a:prstGeom prst="rect">
             <a:avLst/>
@@ -15953,15 +16506,15 @@
               <a:spcAft>
                 <a:spcPts val="0"/>
               </a:spcAft>
-              <a:defRPr sz="1800" b="1">
-                <a:solidFill>
-                  <a:srgbClr val="DB7E22"/>
-                </a:solidFill>
-                <a:latin typeface="Noto Sans CJK KR"/>
-              </a:defRPr>
-            </a:pPr>
-            <a:r>
-              <a:t>공통 순서: ① 현재 폴더 ② source ③ 파일 경로 ④ 이름/타입/단위 ⑤ build·source 후 재실행</a:t>
+              <a:defRPr sz="1100" b="1">
+                <a:solidFill>
+                  <a:srgbClr val="2A8B5A"/>
+                </a:solidFill>
+                <a:latin typeface="Noto Sans CJK KR"/>
+              </a:defRPr>
+            </a:pPr>
+            <a:r>
+              <a:t>화면에서 확인: ① 명령/설정  ② 정상 출력 또는 화면  ③ 다음 검증 명령으로 재확인</a:t>
             </a:r>
           </a:p>
         </p:txBody>
@@ -16437,7 +16990,7 @@
               </a:defRPr>
             </a:pPr>
             <a:r>
-              <a:t>미니 실습: 값 하나를 바꾸고 결과를 비교한다</a:t>
+              <a:t>정상 결과: 실제 환경에서 확인한 출력</a:t>
             </a:r>
           </a:p>
         </p:txBody>
@@ -16476,7 +17029,7 @@
               </a:defRPr>
             </a:pPr>
             <a:r>
-              <a:t>정상 결과를 만든 뒤에는 한 번에 하나의 값만 바꿉니다.</a:t>
+              <a:t>실제 terminal: World 이름과 model://agv include·spawn pose</a:t>
             </a:r>
           </a:p>
         </p:txBody>
@@ -16559,157 +17112,65 @@
           </a:p>
         </p:txBody>
       </p:sp>
-      <p:sp>
-        <p:nvSpPr>
-          <p:cNvPr id="6" name="Rectangle 5"/>
-          <p:cNvSpPr/>
-          <p:nvPr/>
-        </p:nvSpPr>
-        <p:spPr>
-          <a:xfrm>
-            <a:off x="566928" y="1188720"/>
-            <a:ext cx="11064240" cy="347472"/>
-          </a:xfrm>
-          <a:prstGeom prst="rect">
-            <a:avLst/>
-          </a:prstGeom>
-          <a:solidFill>
-            <a:srgbClr val="F4F7FB"/>
-          </a:solidFill>
-          <a:ln>
-            <a:solidFill>
-              <a:srgbClr val="F4F7FB"/>
-            </a:solidFill>
-          </a:ln>
-        </p:spPr>
-        <p:style>
-          <a:lnRef idx="1">
-            <a:schemeClr val="accent1"/>
-          </a:lnRef>
-          <a:fillRef idx="3">
-            <a:schemeClr val="accent1"/>
-          </a:fillRef>
-          <a:effectRef idx="2">
-            <a:schemeClr val="accent1"/>
-          </a:effectRef>
-          <a:fontRef idx="minor">
-            <a:schemeClr val="lt1"/>
-          </a:fontRef>
-        </p:style>
-        <p:txBody>
-          <a:bodyPr rtlCol="0" anchor="ctr" wrap="square" lIns="73152" rIns="73152" tIns="36576" bIns="36576"/>
-          <a:lstStyle/>
-          <a:p>
-            <a:pPr algn="l">
-              <a:spcAft>
-                <a:spcPts val="0"/>
-              </a:spcAft>
-              <a:defRPr sz="1300" b="1">
-                <a:solidFill>
-                  <a:srgbClr val="122C4E"/>
-                </a:solidFill>
-                <a:latin typeface="Noto Sans CJK KR"/>
-              </a:defRPr>
-            </a:pPr>
-            <a:r>
-              <a:t>현재 단계 미니 실습    |    현재 폴더 ~/ros2_curri/agv_ws    |    현재 터미널</a:t>
-            </a:r>
-          </a:p>
-        </p:txBody>
-      </p:sp>
-      <p:sp>
-        <p:nvSpPr>
-          <p:cNvPr id="7" name="Rounded Rectangle 6"/>
-          <p:cNvSpPr/>
-          <p:nvPr/>
-        </p:nvSpPr>
-        <p:spPr>
-          <a:xfrm>
-            <a:off x="749808" y="1874519"/>
-            <a:ext cx="10652760" cy="1993392"/>
-          </a:xfrm>
-          <a:prstGeom prst="roundRect">
-            <a:avLst/>
-          </a:prstGeom>
-          <a:solidFill>
-            <a:srgbClr val="FFF8EB"/>
-          </a:solidFill>
-          <a:ln>
-            <a:solidFill>
-              <a:srgbClr val="ECC680"/>
-            </a:solidFill>
-          </a:ln>
-        </p:spPr>
-        <p:style>
-          <a:lnRef idx="1">
-            <a:schemeClr val="accent1"/>
-          </a:lnRef>
-          <a:fillRef idx="3">
-            <a:schemeClr val="accent1"/>
-          </a:fillRef>
-          <a:effectRef idx="2">
-            <a:schemeClr val="accent1"/>
-          </a:effectRef>
-          <a:fontRef idx="minor">
-            <a:schemeClr val="lt1"/>
-          </a:fontRef>
-        </p:style>
-        <p:txBody>
-          <a:bodyPr rtlCol="0" anchor="ctr" wrap="square" lIns="73152" rIns="73152" tIns="36576" bIns="36576"/>
+      <p:pic>
+        <p:nvPicPr>
+          <p:cNvPr id="6" name="Picture 5" descr="05_m08_world_terminal_actual.png"/>
+          <p:cNvPicPr>
+            <a:picLocks noChangeAspect="1"/>
+          </p:cNvPicPr>
+          <p:nvPr/>
+        </p:nvPicPr>
+        <p:blipFill>
+          <a:blip r:embed="rId2"/>
+          <a:stretch>
+            <a:fillRect/>
+          </a:stretch>
+        </p:blipFill>
+        <p:spPr>
+          <a:xfrm>
+            <a:off x="2789770" y="1353312"/>
+            <a:ext cx="6609411" cy="4800600"/>
+          </a:xfrm>
+          <a:prstGeom prst="rect">
+            <a:avLst/>
+          </a:prstGeom>
+        </p:spPr>
+      </p:pic>
+      <p:sp>
+        <p:nvSpPr>
+          <p:cNvPr id="7" name="TextBox 6"/>
+          <p:cNvSpPr txBox="1"/>
+          <p:nvPr/>
+        </p:nvSpPr>
+        <p:spPr>
+          <a:xfrm>
+            <a:off x="777240" y="6144768"/>
+            <a:ext cx="10607040" cy="310896"/>
+          </a:xfrm>
+          <a:prstGeom prst="rect">
+            <a:avLst/>
+          </a:prstGeom>
+          <a:noFill/>
+        </p:spPr>
+        <p:txBody>
+          <a:bodyPr wrap="square" lIns="73152" rIns="73152" tIns="36576" bIns="36576">
+            <a:spAutoFit/>
+          </a:bodyPr>
           <a:lstStyle/>
           <a:p>
             <a:pPr algn="ctr">
               <a:spcAft>
                 <a:spcPts val="0"/>
               </a:spcAft>
-              <a:defRPr sz="2300" b="1">
-                <a:solidFill>
-                  <a:srgbClr val="122C4E"/>
-                </a:solidFill>
-                <a:latin typeface="Noto Sans CJK KR"/>
-              </a:defRPr>
-            </a:pPr>
-            <a:r>
-              <a:t>World의 box pose x 좌표를 1 m 바꾼 후 저장·재실행하여 top-view 위치 변화를 확인한다.</a:t>
-            </a:r>
-          </a:p>
-        </p:txBody>
-      </p:sp>
-      <p:sp>
-        <p:nvSpPr>
-          <p:cNvPr id="8" name="TextBox 7"/>
-          <p:cNvSpPr txBox="1"/>
-          <p:nvPr/>
-        </p:nvSpPr>
-        <p:spPr>
-          <a:xfrm>
-            <a:off x="877824" y="4590288"/>
-            <a:ext cx="10241280" cy="594360"/>
-          </a:xfrm>
-          <a:prstGeom prst="rect">
-            <a:avLst/>
-          </a:prstGeom>
-          <a:noFill/>
-        </p:spPr>
-        <p:txBody>
-          <a:bodyPr wrap="square" lIns="73152" rIns="73152" tIns="36576" bIns="36576">
-            <a:spAutoFit/>
-          </a:bodyPr>
-          <a:lstStyle/>
-          <a:p>
-            <a:pPr algn="ctr">
-              <a:spcAft>
-                <a:spcPts val="0"/>
-              </a:spcAft>
-              <a:defRPr sz="1900" b="1">
-                <a:solidFill>
-                  <a:srgbClr val="DB7E22"/>
-                </a:solidFill>
-                <a:latin typeface="Noto Sans CJK KR"/>
-              </a:defRPr>
-            </a:pPr>
-            <a:r>
-              <a:t>기록할 것: 바꾼 값(단위) · 기대한 변화 · 실제 출력/화면 · 원래 값으로 되돌린 결과</a:t>
+              <a:defRPr sz="1100" b="1">
+                <a:solidFill>
+                  <a:srgbClr val="2A8B5A"/>
+                </a:solidFill>
+                <a:latin typeface="Noto Sans CJK KR"/>
+              </a:defRPr>
+            </a:pPr>
+            <a:r>
+              <a:t>화면에서 확인: warehouse_m08, model://agv, pose 세 항목을 순서대로 찾습니다.</a:t>
             </a:r>
           </a:p>
         </p:txBody>
@@ -16766,7 +17227,7 @@
               </a:defRPr>
             </a:pPr>
             <a:r>
-              <a:t>체크포인트를 저장하고 다음 모듈로 넘긴다</a:t>
+              <a:t>정상 결과: 실제 환경에서 확인한 출력</a:t>
             </a:r>
           </a:p>
         </p:txBody>
@@ -16805,7 +17266,7 @@
               </a:defRPr>
             </a:pPr>
             <a:r>
-              <a:t>현재 Complete는 다음 Starter의 기준선입니다.</a:t>
+              <a:t>실제 Gazebo Sim: warehouse World와 Entity Tree에 보이는 AGV</a:t>
             </a:r>
           </a:p>
         </p:txBody>
@@ -16888,222 +17349,40 @@
           </a:p>
         </p:txBody>
       </p:sp>
-      <p:sp>
-        <p:nvSpPr>
-          <p:cNvPr id="6" name="Rectangle 5"/>
-          <p:cNvSpPr/>
-          <p:nvPr/>
-        </p:nvSpPr>
-        <p:spPr>
-          <a:xfrm>
-            <a:off x="566928" y="1188720"/>
-            <a:ext cx="11064240" cy="347472"/>
-          </a:xfrm>
-          <a:prstGeom prst="rect">
-            <a:avLst/>
-          </a:prstGeom>
-          <a:solidFill>
-            <a:srgbClr val="F4F7FB"/>
-          </a:solidFill>
-          <a:ln>
-            <a:solidFill>
-              <a:srgbClr val="F4F7FB"/>
-            </a:solidFill>
-          </a:ln>
-        </p:spPr>
-        <p:style>
-          <a:lnRef idx="1">
-            <a:schemeClr val="accent1"/>
-          </a:lnRef>
-          <a:fillRef idx="3">
-            <a:schemeClr val="accent1"/>
-          </a:fillRef>
-          <a:effectRef idx="2">
-            <a:schemeClr val="accent1"/>
-          </a:effectRef>
-          <a:fontRef idx="minor">
-            <a:schemeClr val="lt1"/>
-          </a:fontRef>
-        </p:style>
-        <p:txBody>
-          <a:bodyPr rtlCol="0" anchor="ctr" wrap="square" lIns="73152" rIns="73152" tIns="36576" bIns="36576"/>
-          <a:lstStyle/>
-          <a:p>
-            <a:pPr algn="l">
-              <a:spcAft>
-                <a:spcPts val="0"/>
-              </a:spcAft>
-              <a:defRPr sz="1300" b="1">
-                <a:solidFill>
-                  <a:srgbClr val="122C4E"/>
-                </a:solidFill>
-                <a:latin typeface="Noto Sans CJK KR"/>
-              </a:defRPr>
-            </a:pPr>
-            <a:r>
-              <a:t>현재 단계 체크포인트    |    현재 폴더 ~/ros2_curri/agv_ws    |    현재 터미널</a:t>
-            </a:r>
-          </a:p>
-        </p:txBody>
-      </p:sp>
-      <p:sp>
-        <p:nvSpPr>
-          <p:cNvPr id="7" name="Rounded Rectangle 6"/>
-          <p:cNvSpPr/>
-          <p:nvPr/>
-        </p:nvSpPr>
-        <p:spPr>
-          <a:xfrm>
-            <a:off x="685800" y="1737360"/>
-            <a:ext cx="10972800" cy="3611880"/>
-          </a:xfrm>
-          <a:prstGeom prst="roundRect">
-            <a:avLst/>
-          </a:prstGeom>
-          <a:solidFill>
-            <a:srgbClr val="F4F7FB"/>
-          </a:solidFill>
-          <a:ln>
-            <a:solidFill>
-              <a:srgbClr val="D2DCE8"/>
-            </a:solidFill>
-          </a:ln>
-        </p:spPr>
-        <p:style>
-          <a:lnRef idx="1">
-            <a:schemeClr val="accent1"/>
-          </a:lnRef>
-          <a:fillRef idx="3">
-            <a:schemeClr val="accent1"/>
-          </a:fillRef>
-          <a:effectRef idx="2">
-            <a:schemeClr val="accent1"/>
-          </a:effectRef>
-          <a:fontRef idx="minor">
-            <a:schemeClr val="lt1"/>
-          </a:fontRef>
-        </p:style>
-        <p:txBody>
-          <a:bodyPr rtlCol="0" anchor="ctr"/>
-          <a:lstStyle/>
-          <a:p>
-            <a:pPr algn="ctr"/>
-          </a:p>
-        </p:txBody>
-      </p:sp>
-      <p:sp>
-        <p:nvSpPr>
-          <p:cNvPr id="8" name="TextBox 7"/>
-          <p:cNvSpPr txBox="1"/>
-          <p:nvPr/>
-        </p:nvSpPr>
-        <p:spPr>
-          <a:xfrm>
-            <a:off x="896112" y="1993392"/>
-            <a:ext cx="10332720" cy="2971800"/>
-          </a:xfrm>
-          <a:prstGeom prst="rect">
-            <a:avLst/>
-          </a:prstGeom>
-          <a:noFill/>
-        </p:spPr>
-        <p:txBody>
-          <a:bodyPr wrap="square" lIns="109728" rIns="109728">
-            <a:spAutoFit/>
-          </a:bodyPr>
-          <a:lstStyle/>
-          <a:p>
-            <a:pPr>
-              <a:spcAft>
-                <a:spcPts val="800"/>
-              </a:spcAft>
-              <a:defRPr sz="1800">
-                <a:solidFill>
-                  <a:srgbClr val="122C4E"/>
-                </a:solidFill>
-                <a:latin typeface="Noto Sans CJK KR"/>
-              </a:defRPr>
-            </a:pPr>
-            <a:r>
-              <a:t>• □ 완료 화면: ground·벽·박스가 있는 World에 AGV가 spawn되어 있는 Gazebo 화면을 확인한다.</a:t>
-            </a:r>
-          </a:p>
-          <a:p>
-            <a:pPr>
-              <a:spcAft>
-                <a:spcPts val="800"/>
-              </a:spcAft>
-              <a:defRPr sz="1800">
-                <a:solidFill>
-                  <a:srgbClr val="122C4E"/>
-                </a:solidFill>
-                <a:latin typeface="Noto Sans CJK KR"/>
-              </a:defRPr>
-            </a:pPr>
-            <a:r>
-              <a:t>• □ Complete 파일: blocks/B_robot_build/M08_gazebo_world_spawn/complete/</a:t>
-            </a:r>
-          </a:p>
-          <a:p>
-            <a:pPr>
-              <a:spcAft>
-                <a:spcPts val="800"/>
-              </a:spcAft>
-              <a:defRPr sz="1800">
-                <a:solidFill>
-                  <a:srgbClr val="122C4E"/>
-                </a:solidFill>
-                <a:latin typeface="Noto Sans CJK KR"/>
-              </a:defRPr>
-            </a:pPr>
-            <a:r>
-              <a:t>• □ 정상 로그·캡처: logs/validation.log, screenshots/validation_terminal.png</a:t>
-            </a:r>
-          </a:p>
-          <a:p>
-            <a:pPr>
-              <a:spcAft>
-                <a:spcPts val="800"/>
-              </a:spcAft>
-              <a:defRPr sz="1800">
-                <a:solidFill>
-                  <a:srgbClr val="122C4E"/>
-                </a:solidFill>
-                <a:latin typeface="Noto Sans CJK KR"/>
-              </a:defRPr>
-            </a:pPr>
-            <a:r>
-              <a:t>• □ 버전 식별: CHECKSUM_or_TAG.txt의 SHA-256 manifest</a:t>
-            </a:r>
-          </a:p>
-          <a:p>
-            <a:pPr>
-              <a:spcAft>
-                <a:spcPts val="800"/>
-              </a:spcAft>
-              <a:defRPr sz="1800">
-                <a:solidFill>
-                  <a:srgbClr val="122C4E"/>
-                </a:solidFill>
-                <a:latin typeface="Noto Sans CJK KR"/>
-              </a:defRPr>
-            </a:pPr>
-            <a:r>
-              <a:t>• □ 다음 시작 조건: M09 Differential Drive</a:t>
-            </a:r>
-          </a:p>
-        </p:txBody>
-      </p:sp>
-      <p:sp>
-        <p:nvSpPr>
-          <p:cNvPr id="9" name="TextBox 8"/>
-          <p:cNvSpPr txBox="1"/>
-          <p:nvPr/>
-        </p:nvSpPr>
-        <p:spPr>
-          <a:xfrm>
-            <a:off x="868680" y="5596128"/>
-            <a:ext cx="10515600" cy="338328"/>
+      <p:pic>
+        <p:nvPicPr>
+          <p:cNvPr id="6" name="Picture 5" descr="01_gazebo_world_spawn_actual.png"/>
+          <p:cNvPicPr>
+            <a:picLocks noChangeAspect="1"/>
+          </p:cNvPicPr>
+          <p:nvPr/>
+        </p:nvPicPr>
+        <p:blipFill>
+          <a:blip r:embed="rId2"/>
+          <a:stretch>
+            <a:fillRect/>
+          </a:stretch>
+        </p:blipFill>
+        <p:spPr>
+          <a:xfrm>
+            <a:off x="3253884" y="1353312"/>
+            <a:ext cx="5681183" cy="4800600"/>
+          </a:xfrm>
+          <a:prstGeom prst="rect">
+            <a:avLst/>
+          </a:prstGeom>
+        </p:spPr>
+      </p:pic>
+      <p:sp>
+        <p:nvSpPr>
+          <p:cNvPr id="7" name="TextBox 6"/>
+          <p:cNvSpPr txBox="1"/>
+          <p:nvPr/>
+        </p:nvSpPr>
+        <p:spPr>
+          <a:xfrm>
+            <a:off x="777240" y="6144768"/>
+            <a:ext cx="10607040" cy="310896"/>
           </a:xfrm>
           <a:prstGeom prst="rect">
             <a:avLst/>
@@ -17120,7 +17399,7 @@
               <a:spcAft>
                 <a:spcPts val="0"/>
               </a:spcAft>
-              <a:defRPr sz="1700" b="1">
+              <a:defRPr sz="1100" b="1">
                 <a:solidFill>
                   <a:srgbClr val="2A8B5A"/>
                 </a:solidFill>
@@ -17128,7 +17407,7 @@
               </a:defRPr>
             </a:pPr>
             <a:r>
-              <a:t>다음 모듈을 시작하기 전, 이 슬라이드의 Complete와 다음 모듈의 Starter를 비교합니다.</a:t>
+              <a:t>화면에서 확인: 오른쪽 Entity Tree에서 ground·wall·target·agv가 따로 생성됐는지 확인합니다.</a:t>
             </a:r>
           </a:p>
         </p:txBody>
@@ -17185,6 +17464,1682 @@
               </a:defRPr>
             </a:pPr>
             <a:r>
+              <a:t>객관적 검증 명령으로 완료를 확인한다</a:t>
+            </a:r>
+          </a:p>
+        </p:txBody>
+      </p:sp>
+      <p:sp>
+        <p:nvSpPr>
+          <p:cNvPr id="3" name="TextBox 2"/>
+          <p:cNvSpPr txBox="1"/>
+          <p:nvPr/>
+        </p:nvSpPr>
+        <p:spPr>
+          <a:xfrm>
+            <a:off x="603504" y="859536"/>
+            <a:ext cx="10698480" cy="292608"/>
+          </a:xfrm>
+          <a:prstGeom prst="rect">
+            <a:avLst/>
+          </a:prstGeom>
+          <a:noFill/>
+        </p:spPr>
+        <p:txBody>
+          <a:bodyPr wrap="square" lIns="73152" rIns="73152" tIns="36576" bIns="36576">
+            <a:spAutoFit/>
+          </a:bodyPr>
+          <a:lstStyle/>
+          <a:p>
+            <a:pPr algn="l">
+              <a:spcAft>
+                <a:spcPts val="0"/>
+              </a:spcAft>
+              <a:defRPr sz="1700" b="0">
+                <a:solidFill>
+                  <a:srgbClr val="5C6672"/>
+                </a:solidFill>
+                <a:latin typeface="Noto Sans CJK KR"/>
+              </a:defRPr>
+            </a:pPr>
+            <a:r>
+              <a:t>화면만 보지 말고 topic·frame·파일·parameter를 다시 확인합니다.</a:t>
+            </a:r>
+          </a:p>
+        </p:txBody>
+      </p:sp>
+      <p:sp>
+        <p:nvSpPr>
+          <p:cNvPr id="4" name="TextBox 3"/>
+          <p:cNvSpPr txBox="1"/>
+          <p:nvPr/>
+        </p:nvSpPr>
+        <p:spPr>
+          <a:xfrm>
+            <a:off x="530352" y="6510528"/>
+            <a:ext cx="7772400" cy="201168"/>
+          </a:xfrm>
+          <a:prstGeom prst="rect">
+            <a:avLst/>
+          </a:prstGeom>
+          <a:noFill/>
+        </p:spPr>
+        <p:txBody>
+          <a:bodyPr wrap="square" lIns="73152" rIns="73152" tIns="36576" bIns="36576">
+            <a:spAutoFit/>
+          </a:bodyPr>
+          <a:lstStyle/>
+          <a:p>
+            <a:pPr algn="l">
+              <a:spcAft>
+                <a:spcPts val="0"/>
+              </a:spcAft>
+              <a:defRPr sz="1000" b="0">
+                <a:solidFill>
+                  <a:srgbClr val="5C6672"/>
+                </a:solidFill>
+                <a:latin typeface="Noto Sans CJK KR"/>
+              </a:defRPr>
+            </a:pPr>
+            <a:r>
+              <a:t>ROS 2 Jazzy · Gazebo Harmonic · M08 · 따라 하기형 AGV 실습</a:t>
+            </a:r>
+          </a:p>
+        </p:txBody>
+      </p:sp>
+      <p:sp>
+        <p:nvSpPr>
+          <p:cNvPr id="5" name="TextBox 4"/>
+          <p:cNvSpPr txBox="1"/>
+          <p:nvPr/>
+        </p:nvSpPr>
+        <p:spPr>
+          <a:xfrm>
+            <a:off x="9144000" y="6510528"/>
+            <a:ext cx="2468880" cy="201168"/>
+          </a:xfrm>
+          <a:prstGeom prst="rect">
+            <a:avLst/>
+          </a:prstGeom>
+          <a:noFill/>
+        </p:spPr>
+        <p:txBody>
+          <a:bodyPr wrap="square" lIns="73152" rIns="73152" tIns="36576" bIns="36576">
+            <a:spAutoFit/>
+          </a:bodyPr>
+          <a:lstStyle/>
+          <a:p>
+            <a:pPr algn="r">
+              <a:spcAft>
+                <a:spcPts val="0"/>
+              </a:spcAft>
+              <a:defRPr sz="1000" b="0">
+                <a:solidFill>
+                  <a:srgbClr val="5C6672"/>
+                </a:solidFill>
+                <a:latin typeface="Noto Sans CJK KR"/>
+              </a:defRPr>
+            </a:pPr>
+            <a:r>
+              <a:t>명령·파일 경로는 슬라이드에서 복사 가능</a:t>
+            </a:r>
+          </a:p>
+        </p:txBody>
+      </p:sp>
+      <p:sp>
+        <p:nvSpPr>
+          <p:cNvPr id="6" name="Rectangle 5"/>
+          <p:cNvSpPr/>
+          <p:nvPr/>
+        </p:nvSpPr>
+        <p:spPr>
+          <a:xfrm>
+            <a:off x="566928" y="1188720"/>
+            <a:ext cx="11064240" cy="347472"/>
+          </a:xfrm>
+          <a:prstGeom prst="rect">
+            <a:avLst/>
+          </a:prstGeom>
+          <a:solidFill>
+            <a:srgbClr val="F4F7FB"/>
+          </a:solidFill>
+          <a:ln>
+            <a:solidFill>
+              <a:srgbClr val="F4F7FB"/>
+            </a:solidFill>
+          </a:ln>
+        </p:spPr>
+        <p:style>
+          <a:lnRef idx="1">
+            <a:schemeClr val="accent1"/>
+          </a:lnRef>
+          <a:fillRef idx="3">
+            <a:schemeClr val="accent1"/>
+          </a:fillRef>
+          <a:effectRef idx="2">
+            <a:schemeClr val="accent1"/>
+          </a:effectRef>
+          <a:fontRef idx="minor">
+            <a:schemeClr val="lt1"/>
+          </a:fontRef>
+        </p:style>
+        <p:txBody>
+          <a:bodyPr rtlCol="0" anchor="ctr" wrap="square" lIns="73152" rIns="73152" tIns="36576" bIns="36576"/>
+          <a:lstStyle/>
+          <a:p>
+            <a:pPr algn="l">
+              <a:spcAft>
+                <a:spcPts val="0"/>
+              </a:spcAft>
+              <a:defRPr sz="1300" b="1">
+                <a:solidFill>
+                  <a:srgbClr val="122C4E"/>
+                </a:solidFill>
+                <a:latin typeface="Noto Sans CJK KR"/>
+              </a:defRPr>
+            </a:pPr>
+            <a:r>
+              <a:t>현재 단계 검증    |    현재 폴더 ~/ros2_curri/agv_ws    |    현재 터미널</a:t>
+            </a:r>
+          </a:p>
+        </p:txBody>
+      </p:sp>
+      <p:sp>
+        <p:nvSpPr>
+          <p:cNvPr id="7" name="Rounded Rectangle 6"/>
+          <p:cNvSpPr/>
+          <p:nvPr/>
+        </p:nvSpPr>
+        <p:spPr>
+          <a:xfrm>
+            <a:off x="658368" y="1755648"/>
+            <a:ext cx="10972800" cy="2148840"/>
+          </a:xfrm>
+          <a:prstGeom prst="roundRect">
+            <a:avLst/>
+          </a:prstGeom>
+          <a:solidFill>
+            <a:srgbClr val="1D232D"/>
+          </a:solidFill>
+          <a:ln>
+            <a:solidFill>
+              <a:srgbClr val="1D232D"/>
+            </a:solidFill>
+          </a:ln>
+        </p:spPr>
+        <p:style>
+          <a:lnRef idx="1">
+            <a:schemeClr val="accent1"/>
+          </a:lnRef>
+          <a:fillRef idx="3">
+            <a:schemeClr val="accent1"/>
+          </a:fillRef>
+          <a:effectRef idx="2">
+            <a:schemeClr val="accent1"/>
+          </a:effectRef>
+          <a:fontRef idx="minor">
+            <a:schemeClr val="lt1"/>
+          </a:fontRef>
+        </p:style>
+        <p:txBody>
+          <a:bodyPr rtlCol="0" anchor="ctr" wrap="square" lIns="73152" rIns="73152" tIns="36576" bIns="36576"/>
+          <a:lstStyle/>
+          <a:p>
+            <a:pPr algn="l">
+              <a:spcAft>
+                <a:spcPts val="0"/>
+              </a:spcAft>
+              <a:defRPr sz="1600" b="0">
+                <a:solidFill>
+                  <a:srgbClr val="FFFFFF"/>
+                </a:solidFill>
+                <a:latin typeface="DejaVu Sans Mono"/>
+              </a:defRPr>
+            </a:pPr>
+            <a:r>
+              <a:t>gz sdf -k ~/ros2_curri/agv_ws/src/agv_description/curriculum_stages/M08/model.sdf</a:t>
+            </a:r>
+            <a:br/>
+            <a:r>
+              <a:t>rg -n '&lt;sensor|DiffDrive|/cmd_vel|/odom' ~/ros2_curri/agv_ws/src/agv_description/curriculum_stages/M08/model.sdf</a:t>
+            </a:r>
+          </a:p>
+        </p:txBody>
+      </p:sp>
+      <p:sp>
+        <p:nvSpPr>
+          <p:cNvPr id="8" name="Rounded Rectangle 7"/>
+          <p:cNvSpPr/>
+          <p:nvPr/>
+        </p:nvSpPr>
+        <p:spPr>
+          <a:xfrm>
+            <a:off x="658368" y="4206240"/>
+            <a:ext cx="10972800" cy="1554480"/>
+          </a:xfrm>
+          <a:prstGeom prst="roundRect">
+            <a:avLst/>
+          </a:prstGeom>
+          <a:solidFill>
+            <a:srgbClr val="F4F7FB"/>
+          </a:solidFill>
+          <a:ln>
+            <a:solidFill>
+              <a:srgbClr val="D1DFD5"/>
+            </a:solidFill>
+          </a:ln>
+        </p:spPr>
+        <p:style>
+          <a:lnRef idx="1">
+            <a:schemeClr val="accent1"/>
+          </a:lnRef>
+          <a:fillRef idx="3">
+            <a:schemeClr val="accent1"/>
+          </a:fillRef>
+          <a:effectRef idx="2">
+            <a:schemeClr val="accent1"/>
+          </a:effectRef>
+          <a:fontRef idx="minor">
+            <a:schemeClr val="lt1"/>
+          </a:fontRef>
+        </p:style>
+        <p:txBody>
+          <a:bodyPr rtlCol="0" anchor="ctr" wrap="square" lIns="73152" rIns="73152" tIns="36576" bIns="36576"/>
+          <a:lstStyle/>
+          <a:p>
+            <a:pPr algn="l">
+              <a:spcAft>
+                <a:spcPts val="0"/>
+              </a:spcAft>
+              <a:defRPr sz="1800" b="1">
+                <a:solidFill>
+                  <a:srgbClr val="2A8B5A"/>
+                </a:solidFill>
+                <a:latin typeface="Noto Sans CJK KR"/>
+              </a:defRPr>
+            </a:pPr>
+            <a:r>
+              <a:t>완료 체크</a:t>
+            </a:r>
+            <a:br/>
+            <a:r>
+              <a:t>□ 명령이 오류 없이 실행된다.</a:t>
+            </a:r>
+            <a:br/>
+            <a:r>
+              <a:t>□ 기대한 파일·topic·frame·parameter 이름이 보인다.</a:t>
+            </a:r>
+            <a:br/>
+            <a:r>
+              <a:t>□ 값의 단위와 방향을 한 문장으로 설명할 수 있다.</a:t>
+            </a:r>
+          </a:p>
+        </p:txBody>
+      </p:sp>
+      <p:sp>
+        <p:nvSpPr>
+          <p:cNvPr id="9" name="TextBox 8"/>
+          <p:cNvSpPr txBox="1"/>
+          <p:nvPr/>
+        </p:nvSpPr>
+        <p:spPr>
+          <a:xfrm>
+            <a:off x="731520" y="5989320"/>
+            <a:ext cx="10789920" cy="237744"/>
+          </a:xfrm>
+          <a:prstGeom prst="rect">
+            <a:avLst/>
+          </a:prstGeom>
+          <a:noFill/>
+        </p:spPr>
+        <p:txBody>
+          <a:bodyPr wrap="square" lIns="73152" rIns="73152" tIns="36576" bIns="36576">
+            <a:spAutoFit/>
+          </a:bodyPr>
+          <a:lstStyle/>
+          <a:p>
+            <a:pPr algn="l">
+              <a:spcAft>
+                <a:spcPts val="0"/>
+              </a:spcAft>
+              <a:defRPr sz="1500" b="1">
+                <a:solidFill>
+                  <a:srgbClr val="122C4E"/>
+                </a:solidFill>
+                <a:latin typeface="Noto Sans CJK KR"/>
+              </a:defRPr>
+            </a:pPr>
+            <a:r>
+              <a:t>완료 조건: ground·벽·박스가 있는 World에 AGV가 spawn되어 있는 Gazebo 화면을 확인한다.</a:t>
+            </a:r>
+          </a:p>
+        </p:txBody>
+      </p:sp>
+    </p:spTree>
+  </p:cSld>
+  <p:clrMapOvr>
+    <a:masterClrMapping/>
+  </p:clrMapOvr>
+</p:sld>
+</file>
+
+<file path=ppt/slides/slide33.xml><?xml version="1.0" encoding="utf-8"?>
+<p:sld xmlns:a="http://schemas.openxmlformats.org/drawingml/2006/main" xmlns:p="http://schemas.openxmlformats.org/presentationml/2006/main" xmlns:r="http://schemas.openxmlformats.org/officeDocument/2006/relationships">
+  <p:cSld>
+    <p:spTree>
+      <p:nvGrpSpPr>
+        <p:cNvPr id="1" name=""/>
+        <p:cNvGrpSpPr/>
+        <p:nvPr/>
+      </p:nvGrpSpPr>
+      <p:grpSpPr/>
+      <p:sp>
+        <p:nvSpPr>
+          <p:cNvPr id="2" name="TextBox 1"/>
+          <p:cNvSpPr txBox="1"/>
+          <p:nvPr/>
+        </p:nvSpPr>
+        <p:spPr>
+          <a:xfrm>
+            <a:off x="566928" y="347472"/>
+            <a:ext cx="10881360" cy="438912"/>
+          </a:xfrm>
+          <a:prstGeom prst="rect">
+            <a:avLst/>
+          </a:prstGeom>
+          <a:noFill/>
+        </p:spPr>
+        <p:txBody>
+          <a:bodyPr wrap="square" lIns="73152" rIns="73152" tIns="36576" bIns="36576">
+            <a:spAutoFit/>
+          </a:bodyPr>
+          <a:lstStyle/>
+          <a:p>
+            <a:pPr algn="l">
+              <a:spcAft>
+                <a:spcPts val="0"/>
+              </a:spcAft>
+              <a:defRPr sz="3200" b="1">
+                <a:solidFill>
+                  <a:srgbClr val="122C4E"/>
+                </a:solidFill>
+                <a:latin typeface="Noto Sans CJK KR"/>
+              </a:defRPr>
+            </a:pPr>
+            <a:r>
+              <a:t>막히면: 증상 → 우선 확인 → 재검증</a:t>
+            </a:r>
+          </a:p>
+        </p:txBody>
+      </p:sp>
+      <p:sp>
+        <p:nvSpPr>
+          <p:cNvPr id="3" name="TextBox 2"/>
+          <p:cNvSpPr txBox="1"/>
+          <p:nvPr/>
+        </p:nvSpPr>
+        <p:spPr>
+          <a:xfrm>
+            <a:off x="603504" y="859536"/>
+            <a:ext cx="10698480" cy="292608"/>
+          </a:xfrm>
+          <a:prstGeom prst="rect">
+            <a:avLst/>
+          </a:prstGeom>
+          <a:noFill/>
+        </p:spPr>
+        <p:txBody>
+          <a:bodyPr wrap="square" lIns="73152" rIns="73152" tIns="36576" bIns="36576">
+            <a:spAutoFit/>
+          </a:bodyPr>
+          <a:lstStyle/>
+          <a:p>
+            <a:pPr algn="l">
+              <a:spcAft>
+                <a:spcPts val="0"/>
+              </a:spcAft>
+              <a:defRPr sz="1700" b="0">
+                <a:solidFill>
+                  <a:srgbClr val="5C6672"/>
+                </a:solidFill>
+                <a:latin typeface="Noto Sans CJK KR"/>
+              </a:defRPr>
+            </a:pPr>
+            <a:r>
+              <a:t>오류 메시지를 숨기지 않고 같은 순서로 점검합니다.</a:t>
+            </a:r>
+          </a:p>
+        </p:txBody>
+      </p:sp>
+      <p:sp>
+        <p:nvSpPr>
+          <p:cNvPr id="4" name="TextBox 3"/>
+          <p:cNvSpPr txBox="1"/>
+          <p:nvPr/>
+        </p:nvSpPr>
+        <p:spPr>
+          <a:xfrm>
+            <a:off x="530352" y="6510528"/>
+            <a:ext cx="7772400" cy="201168"/>
+          </a:xfrm>
+          <a:prstGeom prst="rect">
+            <a:avLst/>
+          </a:prstGeom>
+          <a:noFill/>
+        </p:spPr>
+        <p:txBody>
+          <a:bodyPr wrap="square" lIns="73152" rIns="73152" tIns="36576" bIns="36576">
+            <a:spAutoFit/>
+          </a:bodyPr>
+          <a:lstStyle/>
+          <a:p>
+            <a:pPr algn="l">
+              <a:spcAft>
+                <a:spcPts val="0"/>
+              </a:spcAft>
+              <a:defRPr sz="1000" b="0">
+                <a:solidFill>
+                  <a:srgbClr val="5C6672"/>
+                </a:solidFill>
+                <a:latin typeface="Noto Sans CJK KR"/>
+              </a:defRPr>
+            </a:pPr>
+            <a:r>
+              <a:t>ROS 2 Jazzy · Gazebo Harmonic · M08 · 따라 하기형 AGV 실습</a:t>
+            </a:r>
+          </a:p>
+        </p:txBody>
+      </p:sp>
+      <p:sp>
+        <p:nvSpPr>
+          <p:cNvPr id="5" name="TextBox 4"/>
+          <p:cNvSpPr txBox="1"/>
+          <p:nvPr/>
+        </p:nvSpPr>
+        <p:spPr>
+          <a:xfrm>
+            <a:off x="9144000" y="6510528"/>
+            <a:ext cx="2468880" cy="201168"/>
+          </a:xfrm>
+          <a:prstGeom prst="rect">
+            <a:avLst/>
+          </a:prstGeom>
+          <a:noFill/>
+        </p:spPr>
+        <p:txBody>
+          <a:bodyPr wrap="square" lIns="73152" rIns="73152" tIns="36576" bIns="36576">
+            <a:spAutoFit/>
+          </a:bodyPr>
+          <a:lstStyle/>
+          <a:p>
+            <a:pPr algn="r">
+              <a:spcAft>
+                <a:spcPts val="0"/>
+              </a:spcAft>
+              <a:defRPr sz="1000" b="0">
+                <a:solidFill>
+                  <a:srgbClr val="5C6672"/>
+                </a:solidFill>
+                <a:latin typeface="Noto Sans CJK KR"/>
+              </a:defRPr>
+            </a:pPr>
+            <a:r>
+              <a:t>명령·파일 경로는 슬라이드에서 복사 가능</a:t>
+            </a:r>
+          </a:p>
+        </p:txBody>
+      </p:sp>
+      <p:sp>
+        <p:nvSpPr>
+          <p:cNvPr id="6" name="Rectangle 5"/>
+          <p:cNvSpPr/>
+          <p:nvPr/>
+        </p:nvSpPr>
+        <p:spPr>
+          <a:xfrm>
+            <a:off x="566928" y="1188720"/>
+            <a:ext cx="11064240" cy="347472"/>
+          </a:xfrm>
+          <a:prstGeom prst="rect">
+            <a:avLst/>
+          </a:prstGeom>
+          <a:solidFill>
+            <a:srgbClr val="F4F7FB"/>
+          </a:solidFill>
+          <a:ln>
+            <a:solidFill>
+              <a:srgbClr val="F4F7FB"/>
+            </a:solidFill>
+          </a:ln>
+        </p:spPr>
+        <p:style>
+          <a:lnRef idx="1">
+            <a:schemeClr val="accent1"/>
+          </a:lnRef>
+          <a:fillRef idx="3">
+            <a:schemeClr val="accent1"/>
+          </a:fillRef>
+          <a:effectRef idx="2">
+            <a:schemeClr val="accent1"/>
+          </a:effectRef>
+          <a:fontRef idx="minor">
+            <a:schemeClr val="lt1"/>
+          </a:fontRef>
+        </p:style>
+        <p:txBody>
+          <a:bodyPr rtlCol="0" anchor="ctr" wrap="square" lIns="73152" rIns="73152" tIns="36576" bIns="36576"/>
+          <a:lstStyle/>
+          <a:p>
+            <a:pPr algn="l">
+              <a:spcAft>
+                <a:spcPts val="0"/>
+              </a:spcAft>
+              <a:defRPr sz="1300" b="1">
+                <a:solidFill>
+                  <a:srgbClr val="122C4E"/>
+                </a:solidFill>
+                <a:latin typeface="Noto Sans CJK KR"/>
+              </a:defRPr>
+            </a:pPr>
+            <a:r>
+              <a:t>현재 단계 오류 대응    |    현재 폴더 ~/ros2_curri/agv_ws    |    현재 터미널</a:t>
+            </a:r>
+          </a:p>
+        </p:txBody>
+      </p:sp>
+      <p:sp>
+        <p:nvSpPr>
+          <p:cNvPr id="7" name="Rounded Rectangle 6"/>
+          <p:cNvSpPr/>
+          <p:nvPr/>
+        </p:nvSpPr>
+        <p:spPr>
+          <a:xfrm>
+            <a:off x="694944" y="1755648"/>
+            <a:ext cx="10972800" cy="1115568"/>
+          </a:xfrm>
+          <a:prstGeom prst="roundRect">
+            <a:avLst/>
+          </a:prstGeom>
+          <a:solidFill>
+            <a:srgbClr val="FFF7F4"/>
+          </a:solidFill>
+          <a:ln>
+            <a:solidFill>
+              <a:srgbClr val="EDBEB4"/>
+            </a:solidFill>
+          </a:ln>
+        </p:spPr>
+        <p:style>
+          <a:lnRef idx="1">
+            <a:schemeClr val="accent1"/>
+          </a:lnRef>
+          <a:fillRef idx="3">
+            <a:schemeClr val="accent1"/>
+          </a:fillRef>
+          <a:effectRef idx="2">
+            <a:schemeClr val="accent1"/>
+          </a:effectRef>
+          <a:fontRef idx="minor">
+            <a:schemeClr val="lt1"/>
+          </a:fontRef>
+        </p:style>
+        <p:txBody>
+          <a:bodyPr rtlCol="0" anchor="ctr"/>
+          <a:lstStyle/>
+          <a:p>
+            <a:pPr algn="ctr"/>
+          </a:p>
+        </p:txBody>
+      </p:sp>
+      <p:sp>
+        <p:nvSpPr>
+          <p:cNvPr id="8" name="TextBox 7"/>
+          <p:cNvSpPr txBox="1"/>
+          <p:nvPr/>
+        </p:nvSpPr>
+        <p:spPr>
+          <a:xfrm>
+            <a:off x="896112" y="1901952"/>
+            <a:ext cx="2926080" cy="274320"/>
+          </a:xfrm>
+          <a:prstGeom prst="rect">
+            <a:avLst/>
+          </a:prstGeom>
+          <a:noFill/>
+        </p:spPr>
+        <p:txBody>
+          <a:bodyPr wrap="square" lIns="73152" rIns="73152" tIns="36576" bIns="36576">
+            <a:spAutoFit/>
+          </a:bodyPr>
+          <a:lstStyle/>
+          <a:p>
+            <a:pPr algn="l">
+              <a:spcAft>
+                <a:spcPts val="0"/>
+              </a:spcAft>
+              <a:defRPr sz="1800" b="1">
+                <a:solidFill>
+                  <a:srgbClr val="BE3B3B"/>
+                </a:solidFill>
+                <a:latin typeface="Noto Sans CJK KR"/>
+              </a:defRPr>
+            </a:pPr>
+            <a:r>
+              <a:t>증상 1: world 파일을 못 찾음</a:t>
+            </a:r>
+          </a:p>
+        </p:txBody>
+      </p:sp>
+      <p:sp>
+        <p:nvSpPr>
+          <p:cNvPr id="9" name="TextBox 8"/>
+          <p:cNvSpPr txBox="1"/>
+          <p:nvPr/>
+        </p:nvSpPr>
+        <p:spPr>
+          <a:xfrm>
+            <a:off x="3794760" y="1883664"/>
+            <a:ext cx="7543800" cy="621792"/>
+          </a:xfrm>
+          <a:prstGeom prst="rect">
+            <a:avLst/>
+          </a:prstGeom>
+          <a:noFill/>
+        </p:spPr>
+        <p:txBody>
+          <a:bodyPr wrap="square" lIns="73152" rIns="73152" tIns="36576" bIns="36576">
+            <a:spAutoFit/>
+          </a:bodyPr>
+          <a:lstStyle/>
+          <a:p>
+            <a:pPr algn="l">
+              <a:spcAft>
+                <a:spcPts val="0"/>
+              </a:spcAft>
+              <a:defRPr sz="1600" b="0">
+                <a:solidFill>
+                  <a:srgbClr val="122C4E"/>
+                </a:solidFill>
+                <a:latin typeface="Noto Sans CJK KR"/>
+              </a:defRPr>
+            </a:pPr>
+            <a:r>
+              <a:t>우선 확인: launch의 package share path와 install data_files를 확인한다.</a:t>
+            </a:r>
+            <a:br/>
+            <a:r>
+              <a:t>수정 후: gz sdf -k ~/ros2_curri/agv_ws/src/agv_description/curriculum_stages/M08/model.sdf</a:t>
+            </a:r>
+          </a:p>
+        </p:txBody>
+      </p:sp>
+      <p:sp>
+        <p:nvSpPr>
+          <p:cNvPr id="10" name="Rounded Rectangle 9"/>
+          <p:cNvSpPr/>
+          <p:nvPr/>
+        </p:nvSpPr>
+        <p:spPr>
+          <a:xfrm>
+            <a:off x="694944" y="3172968"/>
+            <a:ext cx="10972800" cy="1115568"/>
+          </a:xfrm>
+          <a:prstGeom prst="roundRect">
+            <a:avLst/>
+          </a:prstGeom>
+          <a:solidFill>
+            <a:srgbClr val="FFF7F4"/>
+          </a:solidFill>
+          <a:ln>
+            <a:solidFill>
+              <a:srgbClr val="EDBEB4"/>
+            </a:solidFill>
+          </a:ln>
+        </p:spPr>
+        <p:style>
+          <a:lnRef idx="1">
+            <a:schemeClr val="accent1"/>
+          </a:lnRef>
+          <a:fillRef idx="3">
+            <a:schemeClr val="accent1"/>
+          </a:fillRef>
+          <a:effectRef idx="2">
+            <a:schemeClr val="accent1"/>
+          </a:effectRef>
+          <a:fontRef idx="minor">
+            <a:schemeClr val="lt1"/>
+          </a:fontRef>
+        </p:style>
+        <p:txBody>
+          <a:bodyPr rtlCol="0" anchor="ctr"/>
+          <a:lstStyle/>
+          <a:p>
+            <a:pPr algn="ctr"/>
+          </a:p>
+        </p:txBody>
+      </p:sp>
+      <p:sp>
+        <p:nvSpPr>
+          <p:cNvPr id="11" name="TextBox 10"/>
+          <p:cNvSpPr txBox="1"/>
+          <p:nvPr/>
+        </p:nvSpPr>
+        <p:spPr>
+          <a:xfrm>
+            <a:off x="896112" y="3319272"/>
+            <a:ext cx="2926080" cy="274320"/>
+          </a:xfrm>
+          <a:prstGeom prst="rect">
+            <a:avLst/>
+          </a:prstGeom>
+          <a:noFill/>
+        </p:spPr>
+        <p:txBody>
+          <a:bodyPr wrap="square" lIns="73152" rIns="73152" tIns="36576" bIns="36576">
+            <a:spAutoFit/>
+          </a:bodyPr>
+          <a:lstStyle/>
+          <a:p>
+            <a:pPr algn="l">
+              <a:spcAft>
+                <a:spcPts val="0"/>
+              </a:spcAft>
+              <a:defRPr sz="1800" b="1">
+                <a:solidFill>
+                  <a:srgbClr val="BE3B3B"/>
+                </a:solidFill>
+                <a:latin typeface="Noto Sans CJK KR"/>
+              </a:defRPr>
+            </a:pPr>
+            <a:r>
+              <a:t>증상 2: 모델이 공중/바닥 아래</a:t>
+            </a:r>
+          </a:p>
+        </p:txBody>
+      </p:sp>
+      <p:sp>
+        <p:nvSpPr>
+          <p:cNvPr id="12" name="TextBox 11"/>
+          <p:cNvSpPr txBox="1"/>
+          <p:nvPr/>
+        </p:nvSpPr>
+        <p:spPr>
+          <a:xfrm>
+            <a:off x="3794760" y="3300984"/>
+            <a:ext cx="7543800" cy="621792"/>
+          </a:xfrm>
+          <a:prstGeom prst="rect">
+            <a:avLst/>
+          </a:prstGeom>
+          <a:noFill/>
+        </p:spPr>
+        <p:txBody>
+          <a:bodyPr wrap="square" lIns="73152" rIns="73152" tIns="36576" bIns="36576">
+            <a:spAutoFit/>
+          </a:bodyPr>
+          <a:lstStyle/>
+          <a:p>
+            <a:pPr algn="l">
+              <a:spcAft>
+                <a:spcPts val="0"/>
+              </a:spcAft>
+              <a:defRPr sz="1600" b="0">
+                <a:solidFill>
+                  <a:srgbClr val="122C4E"/>
+                </a:solidFill>
+                <a:latin typeface="Noto Sans CJK KR"/>
+              </a:defRPr>
+            </a:pPr>
+            <a:r>
+              <a:t>우선 확인: 초기 z·collision origin·geometry 크기를 확인한다.</a:t>
+            </a:r>
+            <a:br/>
+            <a:r>
+              <a:t>수정 후: gz sdf -k ~/ros2_curri/agv_ws/src/agv_description/curriculum_stages/M08/model.sdf</a:t>
+            </a:r>
+          </a:p>
+        </p:txBody>
+      </p:sp>
+      <p:sp>
+        <p:nvSpPr>
+          <p:cNvPr id="13" name="TextBox 12"/>
+          <p:cNvSpPr txBox="1"/>
+          <p:nvPr/>
+        </p:nvSpPr>
+        <p:spPr>
+          <a:xfrm>
+            <a:off x="822960" y="5102352"/>
+            <a:ext cx="10607040" cy="402336"/>
+          </a:xfrm>
+          <a:prstGeom prst="rect">
+            <a:avLst/>
+          </a:prstGeom>
+          <a:noFill/>
+        </p:spPr>
+        <p:txBody>
+          <a:bodyPr wrap="square" lIns="73152" rIns="73152" tIns="36576" bIns="36576">
+            <a:spAutoFit/>
+          </a:bodyPr>
+          <a:lstStyle/>
+          <a:p>
+            <a:pPr algn="ctr">
+              <a:spcAft>
+                <a:spcPts val="0"/>
+              </a:spcAft>
+              <a:defRPr sz="1800" b="1">
+                <a:solidFill>
+                  <a:srgbClr val="DB7E22"/>
+                </a:solidFill>
+                <a:latin typeface="Noto Sans CJK KR"/>
+              </a:defRPr>
+            </a:pPr>
+            <a:r>
+              <a:t>공통 순서: ① 현재 폴더 ② source ③ 파일 경로 ④ 이름/타입/단위 ⑤ build·source 후 재실행</a:t>
+            </a:r>
+          </a:p>
+        </p:txBody>
+      </p:sp>
+    </p:spTree>
+  </p:cSld>
+  <p:clrMapOvr>
+    <a:masterClrMapping/>
+  </p:clrMapOvr>
+</p:sld>
+</file>
+
+<file path=ppt/slides/slide34.xml><?xml version="1.0" encoding="utf-8"?>
+<p:sld xmlns:a="http://schemas.openxmlformats.org/drawingml/2006/main" xmlns:p="http://schemas.openxmlformats.org/presentationml/2006/main" xmlns:r="http://schemas.openxmlformats.org/officeDocument/2006/relationships">
+  <p:cSld>
+    <p:spTree>
+      <p:nvGrpSpPr>
+        <p:cNvPr id="1" name=""/>
+        <p:cNvGrpSpPr/>
+        <p:nvPr/>
+      </p:nvGrpSpPr>
+      <p:grpSpPr/>
+      <p:sp>
+        <p:nvSpPr>
+          <p:cNvPr id="2" name="TextBox 1"/>
+          <p:cNvSpPr txBox="1"/>
+          <p:nvPr/>
+        </p:nvSpPr>
+        <p:spPr>
+          <a:xfrm>
+            <a:off x="566928" y="347472"/>
+            <a:ext cx="10881360" cy="438912"/>
+          </a:xfrm>
+          <a:prstGeom prst="rect">
+            <a:avLst/>
+          </a:prstGeom>
+          <a:noFill/>
+        </p:spPr>
+        <p:txBody>
+          <a:bodyPr wrap="square" lIns="73152" rIns="73152" tIns="36576" bIns="36576">
+            <a:spAutoFit/>
+          </a:bodyPr>
+          <a:lstStyle/>
+          <a:p>
+            <a:pPr algn="l">
+              <a:spcAft>
+                <a:spcPts val="0"/>
+              </a:spcAft>
+              <a:defRPr sz="3200" b="1">
+                <a:solidFill>
+                  <a:srgbClr val="122C4E"/>
+                </a:solidFill>
+                <a:latin typeface="Noto Sans CJK KR"/>
+              </a:defRPr>
+            </a:pPr>
+            <a:r>
+              <a:t>미니 실습: 값 하나를 바꾸고 결과를 비교한다</a:t>
+            </a:r>
+          </a:p>
+        </p:txBody>
+      </p:sp>
+      <p:sp>
+        <p:nvSpPr>
+          <p:cNvPr id="3" name="TextBox 2"/>
+          <p:cNvSpPr txBox="1"/>
+          <p:nvPr/>
+        </p:nvSpPr>
+        <p:spPr>
+          <a:xfrm>
+            <a:off x="603504" y="859536"/>
+            <a:ext cx="10698480" cy="292608"/>
+          </a:xfrm>
+          <a:prstGeom prst="rect">
+            <a:avLst/>
+          </a:prstGeom>
+          <a:noFill/>
+        </p:spPr>
+        <p:txBody>
+          <a:bodyPr wrap="square" lIns="73152" rIns="73152" tIns="36576" bIns="36576">
+            <a:spAutoFit/>
+          </a:bodyPr>
+          <a:lstStyle/>
+          <a:p>
+            <a:pPr algn="l">
+              <a:spcAft>
+                <a:spcPts val="0"/>
+              </a:spcAft>
+              <a:defRPr sz="1700" b="0">
+                <a:solidFill>
+                  <a:srgbClr val="5C6672"/>
+                </a:solidFill>
+                <a:latin typeface="Noto Sans CJK KR"/>
+              </a:defRPr>
+            </a:pPr>
+            <a:r>
+              <a:t>정상 결과를 만든 뒤에는 한 번에 하나의 값만 바꿉니다.</a:t>
+            </a:r>
+          </a:p>
+        </p:txBody>
+      </p:sp>
+      <p:sp>
+        <p:nvSpPr>
+          <p:cNvPr id="4" name="TextBox 3"/>
+          <p:cNvSpPr txBox="1"/>
+          <p:nvPr/>
+        </p:nvSpPr>
+        <p:spPr>
+          <a:xfrm>
+            <a:off x="530352" y="6510528"/>
+            <a:ext cx="7772400" cy="201168"/>
+          </a:xfrm>
+          <a:prstGeom prst="rect">
+            <a:avLst/>
+          </a:prstGeom>
+          <a:noFill/>
+        </p:spPr>
+        <p:txBody>
+          <a:bodyPr wrap="square" lIns="73152" rIns="73152" tIns="36576" bIns="36576">
+            <a:spAutoFit/>
+          </a:bodyPr>
+          <a:lstStyle/>
+          <a:p>
+            <a:pPr algn="l">
+              <a:spcAft>
+                <a:spcPts val="0"/>
+              </a:spcAft>
+              <a:defRPr sz="1000" b="0">
+                <a:solidFill>
+                  <a:srgbClr val="5C6672"/>
+                </a:solidFill>
+                <a:latin typeface="Noto Sans CJK KR"/>
+              </a:defRPr>
+            </a:pPr>
+            <a:r>
+              <a:t>ROS 2 Jazzy · Gazebo Harmonic · M08 · 따라 하기형 AGV 실습</a:t>
+            </a:r>
+          </a:p>
+        </p:txBody>
+      </p:sp>
+      <p:sp>
+        <p:nvSpPr>
+          <p:cNvPr id="5" name="TextBox 4"/>
+          <p:cNvSpPr txBox="1"/>
+          <p:nvPr/>
+        </p:nvSpPr>
+        <p:spPr>
+          <a:xfrm>
+            <a:off x="9144000" y="6510528"/>
+            <a:ext cx="2468880" cy="201168"/>
+          </a:xfrm>
+          <a:prstGeom prst="rect">
+            <a:avLst/>
+          </a:prstGeom>
+          <a:noFill/>
+        </p:spPr>
+        <p:txBody>
+          <a:bodyPr wrap="square" lIns="73152" rIns="73152" tIns="36576" bIns="36576">
+            <a:spAutoFit/>
+          </a:bodyPr>
+          <a:lstStyle/>
+          <a:p>
+            <a:pPr algn="r">
+              <a:spcAft>
+                <a:spcPts val="0"/>
+              </a:spcAft>
+              <a:defRPr sz="1000" b="0">
+                <a:solidFill>
+                  <a:srgbClr val="5C6672"/>
+                </a:solidFill>
+                <a:latin typeface="Noto Sans CJK KR"/>
+              </a:defRPr>
+            </a:pPr>
+            <a:r>
+              <a:t>명령·파일 경로는 슬라이드에서 복사 가능</a:t>
+            </a:r>
+          </a:p>
+        </p:txBody>
+      </p:sp>
+      <p:sp>
+        <p:nvSpPr>
+          <p:cNvPr id="6" name="Rectangle 5"/>
+          <p:cNvSpPr/>
+          <p:nvPr/>
+        </p:nvSpPr>
+        <p:spPr>
+          <a:xfrm>
+            <a:off x="566928" y="1188720"/>
+            <a:ext cx="11064240" cy="347472"/>
+          </a:xfrm>
+          <a:prstGeom prst="rect">
+            <a:avLst/>
+          </a:prstGeom>
+          <a:solidFill>
+            <a:srgbClr val="F4F7FB"/>
+          </a:solidFill>
+          <a:ln>
+            <a:solidFill>
+              <a:srgbClr val="F4F7FB"/>
+            </a:solidFill>
+          </a:ln>
+        </p:spPr>
+        <p:style>
+          <a:lnRef idx="1">
+            <a:schemeClr val="accent1"/>
+          </a:lnRef>
+          <a:fillRef idx="3">
+            <a:schemeClr val="accent1"/>
+          </a:fillRef>
+          <a:effectRef idx="2">
+            <a:schemeClr val="accent1"/>
+          </a:effectRef>
+          <a:fontRef idx="minor">
+            <a:schemeClr val="lt1"/>
+          </a:fontRef>
+        </p:style>
+        <p:txBody>
+          <a:bodyPr rtlCol="0" anchor="ctr" wrap="square" lIns="73152" rIns="73152" tIns="36576" bIns="36576"/>
+          <a:lstStyle/>
+          <a:p>
+            <a:pPr algn="l">
+              <a:spcAft>
+                <a:spcPts val="0"/>
+              </a:spcAft>
+              <a:defRPr sz="1300" b="1">
+                <a:solidFill>
+                  <a:srgbClr val="122C4E"/>
+                </a:solidFill>
+                <a:latin typeface="Noto Sans CJK KR"/>
+              </a:defRPr>
+            </a:pPr>
+            <a:r>
+              <a:t>현재 단계 미니 실습    |    현재 폴더 ~/ros2_curri/agv_ws    |    현재 터미널</a:t>
+            </a:r>
+          </a:p>
+        </p:txBody>
+      </p:sp>
+      <p:sp>
+        <p:nvSpPr>
+          <p:cNvPr id="7" name="Rounded Rectangle 6"/>
+          <p:cNvSpPr/>
+          <p:nvPr/>
+        </p:nvSpPr>
+        <p:spPr>
+          <a:xfrm>
+            <a:off x="749808" y="1874519"/>
+            <a:ext cx="10652760" cy="1993392"/>
+          </a:xfrm>
+          <a:prstGeom prst="roundRect">
+            <a:avLst/>
+          </a:prstGeom>
+          <a:solidFill>
+            <a:srgbClr val="FFF8EB"/>
+          </a:solidFill>
+          <a:ln>
+            <a:solidFill>
+              <a:srgbClr val="ECC680"/>
+            </a:solidFill>
+          </a:ln>
+        </p:spPr>
+        <p:style>
+          <a:lnRef idx="1">
+            <a:schemeClr val="accent1"/>
+          </a:lnRef>
+          <a:fillRef idx="3">
+            <a:schemeClr val="accent1"/>
+          </a:fillRef>
+          <a:effectRef idx="2">
+            <a:schemeClr val="accent1"/>
+          </a:effectRef>
+          <a:fontRef idx="minor">
+            <a:schemeClr val="lt1"/>
+          </a:fontRef>
+        </p:style>
+        <p:txBody>
+          <a:bodyPr rtlCol="0" anchor="ctr" wrap="square" lIns="73152" rIns="73152" tIns="36576" bIns="36576"/>
+          <a:lstStyle/>
+          <a:p>
+            <a:pPr algn="ctr">
+              <a:spcAft>
+                <a:spcPts val="0"/>
+              </a:spcAft>
+              <a:defRPr sz="2300" b="1">
+                <a:solidFill>
+                  <a:srgbClr val="122C4E"/>
+                </a:solidFill>
+                <a:latin typeface="Noto Sans CJK KR"/>
+              </a:defRPr>
+            </a:pPr>
+            <a:r>
+              <a:t>World의 box pose x 좌표를 1 m 바꾼 후 저장·재실행하여 top-view 위치 변화를 확인한다.</a:t>
+            </a:r>
+          </a:p>
+        </p:txBody>
+      </p:sp>
+      <p:sp>
+        <p:nvSpPr>
+          <p:cNvPr id="8" name="TextBox 7"/>
+          <p:cNvSpPr txBox="1"/>
+          <p:nvPr/>
+        </p:nvSpPr>
+        <p:spPr>
+          <a:xfrm>
+            <a:off x="877824" y="4590288"/>
+            <a:ext cx="10241280" cy="594360"/>
+          </a:xfrm>
+          <a:prstGeom prst="rect">
+            <a:avLst/>
+          </a:prstGeom>
+          <a:noFill/>
+        </p:spPr>
+        <p:txBody>
+          <a:bodyPr wrap="square" lIns="73152" rIns="73152" tIns="36576" bIns="36576">
+            <a:spAutoFit/>
+          </a:bodyPr>
+          <a:lstStyle/>
+          <a:p>
+            <a:pPr algn="ctr">
+              <a:spcAft>
+                <a:spcPts val="0"/>
+              </a:spcAft>
+              <a:defRPr sz="1900" b="1">
+                <a:solidFill>
+                  <a:srgbClr val="DB7E22"/>
+                </a:solidFill>
+                <a:latin typeface="Noto Sans CJK KR"/>
+              </a:defRPr>
+            </a:pPr>
+            <a:r>
+              <a:t>기록할 것: 바꾼 값(단위) · 기대한 변화 · 실제 출력/화면 · 원래 값으로 되돌린 결과</a:t>
+            </a:r>
+          </a:p>
+        </p:txBody>
+      </p:sp>
+    </p:spTree>
+  </p:cSld>
+  <p:clrMapOvr>
+    <a:masterClrMapping/>
+  </p:clrMapOvr>
+</p:sld>
+</file>
+
+<file path=ppt/slides/slide35.xml><?xml version="1.0" encoding="utf-8"?>
+<p:sld xmlns:a="http://schemas.openxmlformats.org/drawingml/2006/main" xmlns:p="http://schemas.openxmlformats.org/presentationml/2006/main" xmlns:r="http://schemas.openxmlformats.org/officeDocument/2006/relationships">
+  <p:cSld>
+    <p:spTree>
+      <p:nvGrpSpPr>
+        <p:cNvPr id="1" name=""/>
+        <p:cNvGrpSpPr/>
+        <p:nvPr/>
+      </p:nvGrpSpPr>
+      <p:grpSpPr/>
+      <p:sp>
+        <p:nvSpPr>
+          <p:cNvPr id="2" name="TextBox 1"/>
+          <p:cNvSpPr txBox="1"/>
+          <p:nvPr/>
+        </p:nvSpPr>
+        <p:spPr>
+          <a:xfrm>
+            <a:off x="566928" y="347472"/>
+            <a:ext cx="10881360" cy="438912"/>
+          </a:xfrm>
+          <a:prstGeom prst="rect">
+            <a:avLst/>
+          </a:prstGeom>
+          <a:noFill/>
+        </p:spPr>
+        <p:txBody>
+          <a:bodyPr wrap="square" lIns="73152" rIns="73152" tIns="36576" bIns="36576">
+            <a:spAutoFit/>
+          </a:bodyPr>
+          <a:lstStyle/>
+          <a:p>
+            <a:pPr algn="l">
+              <a:spcAft>
+                <a:spcPts val="0"/>
+              </a:spcAft>
+              <a:defRPr sz="3200" b="1">
+                <a:solidFill>
+                  <a:srgbClr val="122C4E"/>
+                </a:solidFill>
+                <a:latin typeface="Noto Sans CJK KR"/>
+              </a:defRPr>
+            </a:pPr>
+            <a:r>
+              <a:t>체크포인트를 저장하고 다음 모듈로 넘긴다</a:t>
+            </a:r>
+          </a:p>
+        </p:txBody>
+      </p:sp>
+      <p:sp>
+        <p:nvSpPr>
+          <p:cNvPr id="3" name="TextBox 2"/>
+          <p:cNvSpPr txBox="1"/>
+          <p:nvPr/>
+        </p:nvSpPr>
+        <p:spPr>
+          <a:xfrm>
+            <a:off x="603504" y="859536"/>
+            <a:ext cx="10698480" cy="292608"/>
+          </a:xfrm>
+          <a:prstGeom prst="rect">
+            <a:avLst/>
+          </a:prstGeom>
+          <a:noFill/>
+        </p:spPr>
+        <p:txBody>
+          <a:bodyPr wrap="square" lIns="73152" rIns="73152" tIns="36576" bIns="36576">
+            <a:spAutoFit/>
+          </a:bodyPr>
+          <a:lstStyle/>
+          <a:p>
+            <a:pPr algn="l">
+              <a:spcAft>
+                <a:spcPts val="0"/>
+              </a:spcAft>
+              <a:defRPr sz="1700" b="0">
+                <a:solidFill>
+                  <a:srgbClr val="5C6672"/>
+                </a:solidFill>
+                <a:latin typeface="Noto Sans CJK KR"/>
+              </a:defRPr>
+            </a:pPr>
+            <a:r>
+              <a:t>현재 Complete는 다음 Starter의 기준선입니다.</a:t>
+            </a:r>
+          </a:p>
+        </p:txBody>
+      </p:sp>
+      <p:sp>
+        <p:nvSpPr>
+          <p:cNvPr id="4" name="TextBox 3"/>
+          <p:cNvSpPr txBox="1"/>
+          <p:nvPr/>
+        </p:nvSpPr>
+        <p:spPr>
+          <a:xfrm>
+            <a:off x="530352" y="6510528"/>
+            <a:ext cx="7772400" cy="201168"/>
+          </a:xfrm>
+          <a:prstGeom prst="rect">
+            <a:avLst/>
+          </a:prstGeom>
+          <a:noFill/>
+        </p:spPr>
+        <p:txBody>
+          <a:bodyPr wrap="square" lIns="73152" rIns="73152" tIns="36576" bIns="36576">
+            <a:spAutoFit/>
+          </a:bodyPr>
+          <a:lstStyle/>
+          <a:p>
+            <a:pPr algn="l">
+              <a:spcAft>
+                <a:spcPts val="0"/>
+              </a:spcAft>
+              <a:defRPr sz="1000" b="0">
+                <a:solidFill>
+                  <a:srgbClr val="5C6672"/>
+                </a:solidFill>
+                <a:latin typeface="Noto Sans CJK KR"/>
+              </a:defRPr>
+            </a:pPr>
+            <a:r>
+              <a:t>ROS 2 Jazzy · Gazebo Harmonic · M08 · 따라 하기형 AGV 실습</a:t>
+            </a:r>
+          </a:p>
+        </p:txBody>
+      </p:sp>
+      <p:sp>
+        <p:nvSpPr>
+          <p:cNvPr id="5" name="TextBox 4"/>
+          <p:cNvSpPr txBox="1"/>
+          <p:nvPr/>
+        </p:nvSpPr>
+        <p:spPr>
+          <a:xfrm>
+            <a:off x="9144000" y="6510528"/>
+            <a:ext cx="2468880" cy="201168"/>
+          </a:xfrm>
+          <a:prstGeom prst="rect">
+            <a:avLst/>
+          </a:prstGeom>
+          <a:noFill/>
+        </p:spPr>
+        <p:txBody>
+          <a:bodyPr wrap="square" lIns="73152" rIns="73152" tIns="36576" bIns="36576">
+            <a:spAutoFit/>
+          </a:bodyPr>
+          <a:lstStyle/>
+          <a:p>
+            <a:pPr algn="r">
+              <a:spcAft>
+                <a:spcPts val="0"/>
+              </a:spcAft>
+              <a:defRPr sz="1000" b="0">
+                <a:solidFill>
+                  <a:srgbClr val="5C6672"/>
+                </a:solidFill>
+                <a:latin typeface="Noto Sans CJK KR"/>
+              </a:defRPr>
+            </a:pPr>
+            <a:r>
+              <a:t>명령·파일 경로는 슬라이드에서 복사 가능</a:t>
+            </a:r>
+          </a:p>
+        </p:txBody>
+      </p:sp>
+      <p:sp>
+        <p:nvSpPr>
+          <p:cNvPr id="6" name="Rectangle 5"/>
+          <p:cNvSpPr/>
+          <p:nvPr/>
+        </p:nvSpPr>
+        <p:spPr>
+          <a:xfrm>
+            <a:off x="566928" y="1188720"/>
+            <a:ext cx="11064240" cy="347472"/>
+          </a:xfrm>
+          <a:prstGeom prst="rect">
+            <a:avLst/>
+          </a:prstGeom>
+          <a:solidFill>
+            <a:srgbClr val="F4F7FB"/>
+          </a:solidFill>
+          <a:ln>
+            <a:solidFill>
+              <a:srgbClr val="F4F7FB"/>
+            </a:solidFill>
+          </a:ln>
+        </p:spPr>
+        <p:style>
+          <a:lnRef idx="1">
+            <a:schemeClr val="accent1"/>
+          </a:lnRef>
+          <a:fillRef idx="3">
+            <a:schemeClr val="accent1"/>
+          </a:fillRef>
+          <a:effectRef idx="2">
+            <a:schemeClr val="accent1"/>
+          </a:effectRef>
+          <a:fontRef idx="minor">
+            <a:schemeClr val="lt1"/>
+          </a:fontRef>
+        </p:style>
+        <p:txBody>
+          <a:bodyPr rtlCol="0" anchor="ctr" wrap="square" lIns="73152" rIns="73152" tIns="36576" bIns="36576"/>
+          <a:lstStyle/>
+          <a:p>
+            <a:pPr algn="l">
+              <a:spcAft>
+                <a:spcPts val="0"/>
+              </a:spcAft>
+              <a:defRPr sz="1300" b="1">
+                <a:solidFill>
+                  <a:srgbClr val="122C4E"/>
+                </a:solidFill>
+                <a:latin typeface="Noto Sans CJK KR"/>
+              </a:defRPr>
+            </a:pPr>
+            <a:r>
+              <a:t>현재 단계 체크포인트    |    현재 폴더 ~/ros2_curri/agv_ws    |    현재 터미널</a:t>
+            </a:r>
+          </a:p>
+        </p:txBody>
+      </p:sp>
+      <p:sp>
+        <p:nvSpPr>
+          <p:cNvPr id="7" name="Rounded Rectangle 6"/>
+          <p:cNvSpPr/>
+          <p:nvPr/>
+        </p:nvSpPr>
+        <p:spPr>
+          <a:xfrm>
+            <a:off x="685800" y="1737360"/>
+            <a:ext cx="10972800" cy="3611880"/>
+          </a:xfrm>
+          <a:prstGeom prst="roundRect">
+            <a:avLst/>
+          </a:prstGeom>
+          <a:solidFill>
+            <a:srgbClr val="F4F7FB"/>
+          </a:solidFill>
+          <a:ln>
+            <a:solidFill>
+              <a:srgbClr val="D2DCE8"/>
+            </a:solidFill>
+          </a:ln>
+        </p:spPr>
+        <p:style>
+          <a:lnRef idx="1">
+            <a:schemeClr val="accent1"/>
+          </a:lnRef>
+          <a:fillRef idx="3">
+            <a:schemeClr val="accent1"/>
+          </a:fillRef>
+          <a:effectRef idx="2">
+            <a:schemeClr val="accent1"/>
+          </a:effectRef>
+          <a:fontRef idx="minor">
+            <a:schemeClr val="lt1"/>
+          </a:fontRef>
+        </p:style>
+        <p:txBody>
+          <a:bodyPr rtlCol="0" anchor="ctr"/>
+          <a:lstStyle/>
+          <a:p>
+            <a:pPr algn="ctr"/>
+          </a:p>
+        </p:txBody>
+      </p:sp>
+      <p:sp>
+        <p:nvSpPr>
+          <p:cNvPr id="8" name="TextBox 7"/>
+          <p:cNvSpPr txBox="1"/>
+          <p:nvPr/>
+        </p:nvSpPr>
+        <p:spPr>
+          <a:xfrm>
+            <a:off x="896112" y="1993392"/>
+            <a:ext cx="10332720" cy="2971800"/>
+          </a:xfrm>
+          <a:prstGeom prst="rect">
+            <a:avLst/>
+          </a:prstGeom>
+          <a:noFill/>
+        </p:spPr>
+        <p:txBody>
+          <a:bodyPr wrap="square" lIns="109728" rIns="109728">
+            <a:spAutoFit/>
+          </a:bodyPr>
+          <a:lstStyle/>
+          <a:p>
+            <a:pPr>
+              <a:spcAft>
+                <a:spcPts val="800"/>
+              </a:spcAft>
+              <a:defRPr sz="1800">
+                <a:solidFill>
+                  <a:srgbClr val="122C4E"/>
+                </a:solidFill>
+                <a:latin typeface="Noto Sans CJK KR"/>
+              </a:defRPr>
+            </a:pPr>
+            <a:r>
+              <a:t>• □ 완료 화면: ground·벽·박스가 있는 World에 AGV가 spawn되어 있는 Gazebo 화면을 확인한다.</a:t>
+            </a:r>
+          </a:p>
+          <a:p>
+            <a:pPr>
+              <a:spcAft>
+                <a:spcPts val="800"/>
+              </a:spcAft>
+              <a:defRPr sz="1800">
+                <a:solidFill>
+                  <a:srgbClr val="122C4E"/>
+                </a:solidFill>
+                <a:latin typeface="Noto Sans CJK KR"/>
+              </a:defRPr>
+            </a:pPr>
+            <a:r>
+              <a:t>• □ Complete 파일: blocks/B_robot_build/M08_gazebo_world_spawn/complete/</a:t>
+            </a:r>
+          </a:p>
+          <a:p>
+            <a:pPr>
+              <a:spcAft>
+                <a:spcPts val="800"/>
+              </a:spcAft>
+              <a:defRPr sz="1800">
+                <a:solidFill>
+                  <a:srgbClr val="122C4E"/>
+                </a:solidFill>
+                <a:latin typeface="Noto Sans CJK KR"/>
+              </a:defRPr>
+            </a:pPr>
+            <a:r>
+              <a:t>• □ 정상 로그·캡처: logs/validation.log, screenshots/validation_terminal.png</a:t>
+            </a:r>
+          </a:p>
+          <a:p>
+            <a:pPr>
+              <a:spcAft>
+                <a:spcPts val="800"/>
+              </a:spcAft>
+              <a:defRPr sz="1800">
+                <a:solidFill>
+                  <a:srgbClr val="122C4E"/>
+                </a:solidFill>
+                <a:latin typeface="Noto Sans CJK KR"/>
+              </a:defRPr>
+            </a:pPr>
+            <a:r>
+              <a:t>• □ 버전 식별: CHECKSUM_or_TAG.txt의 SHA-256 manifest</a:t>
+            </a:r>
+          </a:p>
+          <a:p>
+            <a:pPr>
+              <a:spcAft>
+                <a:spcPts val="800"/>
+              </a:spcAft>
+              <a:defRPr sz="1800">
+                <a:solidFill>
+                  <a:srgbClr val="122C4E"/>
+                </a:solidFill>
+                <a:latin typeface="Noto Sans CJK KR"/>
+              </a:defRPr>
+            </a:pPr>
+            <a:r>
+              <a:t>• □ 다음 시작 조건: M09 Differential Drive</a:t>
+            </a:r>
+          </a:p>
+        </p:txBody>
+      </p:sp>
+      <p:sp>
+        <p:nvSpPr>
+          <p:cNvPr id="9" name="TextBox 8"/>
+          <p:cNvSpPr txBox="1"/>
+          <p:nvPr/>
+        </p:nvSpPr>
+        <p:spPr>
+          <a:xfrm>
+            <a:off x="868680" y="5596128"/>
+            <a:ext cx="10515600" cy="338328"/>
+          </a:xfrm>
+          <a:prstGeom prst="rect">
+            <a:avLst/>
+          </a:prstGeom>
+          <a:noFill/>
+        </p:spPr>
+        <p:txBody>
+          <a:bodyPr wrap="square" lIns="73152" rIns="73152" tIns="36576" bIns="36576">
+            <a:spAutoFit/>
+          </a:bodyPr>
+          <a:lstStyle/>
+          <a:p>
+            <a:pPr algn="ctr">
+              <a:spcAft>
+                <a:spcPts val="0"/>
+              </a:spcAft>
+              <a:defRPr sz="1700" b="1">
+                <a:solidFill>
+                  <a:srgbClr val="2A8B5A"/>
+                </a:solidFill>
+                <a:latin typeface="Noto Sans CJK KR"/>
+              </a:defRPr>
+            </a:pPr>
+            <a:r>
+              <a:t>다음 모듈을 시작하기 전, 이 슬라이드의 Complete와 다음 모듈의 Starter를 비교합니다.</a:t>
+            </a:r>
+          </a:p>
+        </p:txBody>
+      </p:sp>
+    </p:spTree>
+  </p:cSld>
+  <p:clrMapOvr>
+    <a:masterClrMapping/>
+  </p:clrMapOvr>
+</p:sld>
+</file>
+
+<file path=ppt/slides/slide36.xml><?xml version="1.0" encoding="utf-8"?>
+<p:sld xmlns:a="http://schemas.openxmlformats.org/drawingml/2006/main" xmlns:p="http://schemas.openxmlformats.org/presentationml/2006/main" xmlns:r="http://schemas.openxmlformats.org/officeDocument/2006/relationships">
+  <p:cSld>
+    <p:spTree>
+      <p:nvGrpSpPr>
+        <p:cNvPr id="1" name=""/>
+        <p:cNvGrpSpPr/>
+        <p:nvPr/>
+      </p:nvGrpSpPr>
+      <p:grpSpPr/>
+      <p:sp>
+        <p:nvSpPr>
+          <p:cNvPr id="2" name="TextBox 1"/>
+          <p:cNvSpPr txBox="1"/>
+          <p:nvPr/>
+        </p:nvSpPr>
+        <p:spPr>
+          <a:xfrm>
+            <a:off x="566928" y="347472"/>
+            <a:ext cx="10881360" cy="438912"/>
+          </a:xfrm>
+          <a:prstGeom prst="rect">
+            <a:avLst/>
+          </a:prstGeom>
+          <a:noFill/>
+        </p:spPr>
+        <p:txBody>
+          <a:bodyPr wrap="square" lIns="73152" rIns="73152" tIns="36576" bIns="36576">
+            <a:spAutoFit/>
+          </a:bodyPr>
+          <a:lstStyle/>
+          <a:p>
+            <a:pPr algn="l">
+              <a:spcAft>
+                <a:spcPts val="0"/>
+              </a:spcAft>
+              <a:defRPr sz="3200" b="1">
+                <a:solidFill>
+                  <a:srgbClr val="122C4E"/>
+                </a:solidFill>
+                <a:latin typeface="Noto Sans CJK KR"/>
+              </a:defRPr>
+            </a:pPr>
+            <a:r>
               <a:t>공식 참고 자료</a:t>
             </a:r>
           </a:p>
@@ -18793,7 +20748,7 @@
               </a:defRPr>
             </a:pPr>
             <a:r>
-              <a:t>model과 World를 각각 검사한다</a:t>
+              <a:t>코드/설정이 실제로 만드는 것 (1/2)</a:t>
             </a:r>
           </a:p>
         </p:txBody>
@@ -18832,7 +20787,7 @@
               </a:defRPr>
             </a:pPr>
             <a:r>
-              <a:t>한 장에는 한 행동만 수행합니다.</a:t>
+              <a:t>파일을 입력하기 전에 ‘무엇을 만들고 어디서 볼지’를 먼저 연결합니다.</a:t>
             </a:r>
           </a:p>
         </p:txBody>
@@ -18968,109 +20923,31 @@
               </a:defRPr>
             </a:pPr>
             <a:r>
-              <a:t>현재 단계 1/2    |    현재 폴더 ~/ros2_curri/agv_ws    |    현재 터미널</a:t>
-            </a:r>
-          </a:p>
-        </p:txBody>
-      </p:sp>
-      <p:sp>
-        <p:nvSpPr>
-          <p:cNvPr id="7" name="TextBox 6"/>
-          <p:cNvSpPr txBox="1"/>
-          <p:nvPr/>
-        </p:nvSpPr>
-        <p:spPr>
-          <a:xfrm>
-            <a:off x="676656" y="1764792"/>
-            <a:ext cx="1828800" cy="347472"/>
-          </a:xfrm>
-          <a:prstGeom prst="rect">
-            <a:avLst/>
-          </a:prstGeom>
-          <a:noFill/>
-        </p:spPr>
-        <p:txBody>
-          <a:bodyPr wrap="square" lIns="73152" rIns="73152" tIns="36576" bIns="36576">
-            <a:spAutoFit/>
-          </a:bodyPr>
-          <a:lstStyle/>
-          <a:p>
-            <a:pPr algn="l">
-              <a:spcAft>
-                <a:spcPts val="0"/>
-              </a:spcAft>
-              <a:defRPr sz="1800" b="1">
-                <a:solidFill>
-                  <a:srgbClr val="225B9B"/>
-                </a:solidFill>
-                <a:latin typeface="Noto Sans CJK KR"/>
-              </a:defRPr>
-            </a:pPr>
-            <a:r>
-              <a:t>왜 하는가</a:t>
-            </a:r>
-          </a:p>
-        </p:txBody>
-      </p:sp>
-      <p:sp>
-        <p:nvSpPr>
-          <p:cNvPr id="8" name="TextBox 7"/>
-          <p:cNvSpPr txBox="1"/>
-          <p:nvPr/>
-        </p:nvSpPr>
-        <p:spPr>
-          <a:xfrm>
-            <a:off x="676656" y="2103120"/>
-            <a:ext cx="10789920" cy="512064"/>
-          </a:xfrm>
-          <a:prstGeom prst="rect">
-            <a:avLst/>
-          </a:prstGeom>
-          <a:noFill/>
-        </p:spPr>
-        <p:txBody>
-          <a:bodyPr wrap="square" lIns="73152" rIns="73152" tIns="36576" bIns="36576">
-            <a:spAutoFit/>
-          </a:bodyPr>
-          <a:lstStyle/>
-          <a:p>
-            <a:pPr algn="l">
-              <a:spcAft>
-                <a:spcPts val="0"/>
-              </a:spcAft>
-              <a:defRPr sz="2000" b="0">
-                <a:solidFill>
-                  <a:srgbClr val="122C4E"/>
-                </a:solidFill>
-                <a:latin typeface="Noto Sans CJK KR"/>
-              </a:defRPr>
-            </a:pPr>
-            <a:r>
-              <a:t>M08은 M07 물리 AGV를 World에 배치하는 단계이며 DiffDrive·Camera·LiDAR·IMU는 아직 넣지 않는다.</a:t>
-            </a:r>
-          </a:p>
-        </p:txBody>
-      </p:sp>
-      <p:sp>
-        <p:nvSpPr>
-          <p:cNvPr id="9" name="Rounded Rectangle 8"/>
+              <a:t>현재 단계 파일 역할    |    현재 폴더 ~/ros2_curri/agv_ws    |    현재 터미널</a:t>
+            </a:r>
+          </a:p>
+        </p:txBody>
+      </p:sp>
+      <p:sp>
+        <p:nvSpPr>
+          <p:cNvPr id="7" name="Rounded Rectangle 6"/>
           <p:cNvSpPr/>
           <p:nvPr/>
         </p:nvSpPr>
         <p:spPr>
           <a:xfrm>
-            <a:off x="676656" y="2871216"/>
-            <a:ext cx="10835640" cy="2331720"/>
+            <a:off x="640080" y="1627632"/>
+            <a:ext cx="10972800" cy="2048256"/>
           </a:xfrm>
           <a:prstGeom prst="roundRect">
             <a:avLst/>
           </a:prstGeom>
           <a:solidFill>
-            <a:srgbClr val="1D232D"/>
+            <a:srgbClr val="F4F7FB"/>
           </a:solidFill>
           <a:ln>
             <a:solidFill>
-              <a:srgbClr val="1D232D"/>
+              <a:srgbClr val="CCDBEB"/>
             </a:solidFill>
           </a:ln>
         </p:spPr>
@@ -19089,108 +20966,608 @@
           </a:fontRef>
         </p:style>
         <p:txBody>
-          <a:bodyPr rtlCol="0" anchor="ctr" wrap="square" lIns="73152" rIns="73152" tIns="36576" bIns="36576"/>
-          <a:lstStyle/>
-          <a:p>
-            <a:pPr algn="l">
-              <a:spcAft>
-                <a:spcPts val="0"/>
-              </a:spcAft>
-              <a:defRPr sz="1600" b="0">
-                <a:solidFill>
-                  <a:srgbClr val="FFFFFF"/>
+          <a:bodyPr rtlCol="0" anchor="ctr"/>
+          <a:lstStyle/>
+          <a:p>
+            <a:pPr algn="ctr"/>
+          </a:p>
+        </p:txBody>
+      </p:sp>
+      <p:sp>
+        <p:nvSpPr>
+          <p:cNvPr id="8" name="TextBox 7"/>
+          <p:cNvSpPr txBox="1"/>
+          <p:nvPr/>
+        </p:nvSpPr>
+        <p:spPr>
+          <a:xfrm>
+            <a:off x="850392" y="1764792"/>
+            <a:ext cx="10424160" cy="256032"/>
+          </a:xfrm>
+          <a:prstGeom prst="rect">
+            <a:avLst/>
+          </a:prstGeom>
+          <a:noFill/>
+        </p:spPr>
+        <p:txBody>
+          <a:bodyPr wrap="square" lIns="73152" rIns="73152" tIns="36576" bIns="36576">
+            <a:spAutoFit/>
+          </a:bodyPr>
+          <a:lstStyle/>
+          <a:p>
+            <a:pPr algn="l">
+              <a:spcAft>
+                <a:spcPts val="0"/>
+              </a:spcAft>
+              <a:defRPr sz="1300" b="1">
+                <a:solidFill>
+                  <a:srgbClr val="225B9B"/>
                 </a:solidFill>
                 <a:latin typeface="DejaVu Sans Mono"/>
               </a:defRPr>
             </a:pPr>
             <a:r>
-              <a:t>cd ~/ros2_curri/agv_ws</a:t>
+              <a:t>~/ros2_curri/agv_ws/src/agv_description/curriculum_stages/M08/model.config</a:t>
+            </a:r>
+          </a:p>
+        </p:txBody>
+      </p:sp>
+      <p:sp>
+        <p:nvSpPr>
+          <p:cNvPr id="9" name="TextBox 8"/>
+          <p:cNvSpPr txBox="1"/>
+          <p:nvPr/>
+        </p:nvSpPr>
+        <p:spPr>
+          <a:xfrm>
+            <a:off x="868680" y="2130552"/>
+            <a:ext cx="1234440" cy="228600"/>
+          </a:xfrm>
+          <a:prstGeom prst="rect">
+            <a:avLst/>
+          </a:prstGeom>
+          <a:noFill/>
+        </p:spPr>
+        <p:txBody>
+          <a:bodyPr wrap="square" lIns="73152" rIns="73152" tIns="36576" bIns="36576">
+            <a:spAutoFit/>
+          </a:bodyPr>
+          <a:lstStyle/>
+          <a:p>
+            <a:pPr algn="l">
+              <a:spcAft>
+                <a:spcPts val="0"/>
+              </a:spcAft>
+              <a:defRPr sz="1500" b="1">
+                <a:solidFill>
+                  <a:srgbClr val="2A8B5A"/>
+                </a:solidFill>
+                <a:latin typeface="Noto Sans CJK KR"/>
+              </a:defRPr>
+            </a:pPr>
+            <a:r>
+              <a:t>만드는 것</a:t>
+            </a:r>
+          </a:p>
+        </p:txBody>
+      </p:sp>
+      <p:sp>
+        <p:nvSpPr>
+          <p:cNvPr id="10" name="TextBox 9"/>
+          <p:cNvSpPr txBox="1"/>
+          <p:nvPr/>
+        </p:nvSpPr>
+        <p:spPr>
+          <a:xfrm>
+            <a:off x="1975104" y="2112264"/>
+            <a:ext cx="9189720" cy="274320"/>
+          </a:xfrm>
+          <a:prstGeom prst="rect">
+            <a:avLst/>
+          </a:prstGeom>
+          <a:noFill/>
+        </p:spPr>
+        <p:txBody>
+          <a:bodyPr wrap="square" lIns="73152" rIns="73152" tIns="36576" bIns="36576">
+            <a:spAutoFit/>
+          </a:bodyPr>
+          <a:lstStyle/>
+          <a:p>
+            <a:pPr algn="l">
+              <a:spcAft>
+                <a:spcPts val="0"/>
+              </a:spcAft>
+              <a:defRPr sz="1500" b="0">
+                <a:solidFill>
+                  <a:srgbClr val="122C4E"/>
+                </a:solidFill>
+                <a:latin typeface="Noto Sans CJK KR"/>
+              </a:defRPr>
+            </a:pPr>
+            <a:r>
+              <a:t>Gazebo가 model://agv 이름으로 SDF 모델을 찾게 하는 모델 등록 정보</a:t>
+            </a:r>
+          </a:p>
+        </p:txBody>
+      </p:sp>
+      <p:sp>
+        <p:nvSpPr>
+          <p:cNvPr id="11" name="TextBox 10"/>
+          <p:cNvSpPr txBox="1"/>
+          <p:nvPr/>
+        </p:nvSpPr>
+        <p:spPr>
+          <a:xfrm>
+            <a:off x="868680" y="2505456"/>
+            <a:ext cx="1234440" cy="228600"/>
+          </a:xfrm>
+          <a:prstGeom prst="rect">
+            <a:avLst/>
+          </a:prstGeom>
+          <a:noFill/>
+        </p:spPr>
+        <p:txBody>
+          <a:bodyPr wrap="square" lIns="73152" rIns="73152" tIns="36576" bIns="36576">
+            <a:spAutoFit/>
+          </a:bodyPr>
+          <a:lstStyle/>
+          <a:p>
+            <a:pPr algn="l">
+              <a:spcAft>
+                <a:spcPts val="0"/>
+              </a:spcAft>
+              <a:defRPr sz="1500" b="1">
+                <a:solidFill>
+                  <a:srgbClr val="DB7E22"/>
+                </a:solidFill>
+                <a:latin typeface="Noto Sans CJK KR"/>
+              </a:defRPr>
+            </a:pPr>
+            <a:r>
+              <a:t>코드 읽기</a:t>
+            </a:r>
+          </a:p>
+        </p:txBody>
+      </p:sp>
+      <p:sp>
+        <p:nvSpPr>
+          <p:cNvPr id="12" name="TextBox 11"/>
+          <p:cNvSpPr txBox="1"/>
+          <p:nvPr/>
+        </p:nvSpPr>
+        <p:spPr>
+          <a:xfrm>
+            <a:off x="1975104" y="2487168"/>
+            <a:ext cx="9189720" cy="301752"/>
+          </a:xfrm>
+          <a:prstGeom prst="rect">
+            <a:avLst/>
+          </a:prstGeom>
+          <a:noFill/>
+        </p:spPr>
+        <p:txBody>
+          <a:bodyPr wrap="square" lIns="73152" rIns="73152" tIns="36576" bIns="36576">
+            <a:spAutoFit/>
+          </a:bodyPr>
+          <a:lstStyle/>
+          <a:p>
+            <a:pPr algn="l">
+              <a:spcAft>
+                <a:spcPts val="0"/>
+              </a:spcAft>
+              <a:defRPr sz="1400" b="0">
+                <a:solidFill>
+                  <a:srgbClr val="122C4E"/>
+                </a:solidFill>
+                <a:latin typeface="Noto Sans CJK KR"/>
+              </a:defRPr>
+            </a:pPr>
+            <a:r>
+              <a:t>name과 sdf 파일 이름이 실제 파일과 같은지 먼저 맞춘다.</a:t>
+            </a:r>
+          </a:p>
+        </p:txBody>
+      </p:sp>
+      <p:sp>
+        <p:nvSpPr>
+          <p:cNvPr id="13" name="TextBox 12"/>
+          <p:cNvSpPr txBox="1"/>
+          <p:nvPr/>
+        </p:nvSpPr>
+        <p:spPr>
+          <a:xfrm>
+            <a:off x="868680" y="2889504"/>
+            <a:ext cx="1234440" cy="228600"/>
+          </a:xfrm>
+          <a:prstGeom prst="rect">
+            <a:avLst/>
+          </a:prstGeom>
+          <a:noFill/>
+        </p:spPr>
+        <p:txBody>
+          <a:bodyPr wrap="square" lIns="73152" rIns="73152" tIns="36576" bIns="36576">
+            <a:spAutoFit/>
+          </a:bodyPr>
+          <a:lstStyle/>
+          <a:p>
+            <a:pPr algn="l">
+              <a:spcAft>
+                <a:spcPts val="0"/>
+              </a:spcAft>
+              <a:defRPr sz="1500" b="1">
+                <a:solidFill>
+                  <a:srgbClr val="225B9B"/>
+                </a:solidFill>
+                <a:latin typeface="Noto Sans CJK KR"/>
+              </a:defRPr>
+            </a:pPr>
+            <a:r>
+              <a:t>사용/확인</a:t>
+            </a:r>
+          </a:p>
+        </p:txBody>
+      </p:sp>
+      <p:sp>
+        <p:nvSpPr>
+          <p:cNvPr id="14" name="TextBox 13"/>
+          <p:cNvSpPr txBox="1"/>
+          <p:nvPr/>
+        </p:nvSpPr>
+        <p:spPr>
+          <a:xfrm>
+            <a:off x="1975104" y="2871216"/>
+            <a:ext cx="9189720" cy="512064"/>
+          </a:xfrm>
+          <a:prstGeom prst="rect">
+            <a:avLst/>
+          </a:prstGeom>
+          <a:noFill/>
+        </p:spPr>
+        <p:txBody>
+          <a:bodyPr wrap="square" lIns="73152" rIns="73152" tIns="36576" bIns="36576">
+            <a:spAutoFit/>
+          </a:bodyPr>
+          <a:lstStyle/>
+          <a:p>
+            <a:pPr algn="l">
+              <a:spcAft>
+                <a:spcPts val="0"/>
+              </a:spcAft>
+              <a:defRPr sz="1300" b="0">
+                <a:solidFill>
+                  <a:srgbClr val="122C4E"/>
+                </a:solidFill>
+                <a:latin typeface="Noto Sans CJK KR"/>
+              </a:defRPr>
+            </a:pPr>
+            <a:r>
+              <a:t>사용: models/ 아래에 둘 때 Gazebo가 URI를 해석한다.</a:t>
             </a:r>
             <a:br/>
             <a:r>
-              <a:t>gz sdf -k src/agv_description/curriculum_stages/M08/model.sdf</a:t>
+              <a:t>화면/출력: World의 &lt;uri&gt;model://agv&lt;/uri&gt;</a:t>
+            </a:r>
+          </a:p>
+        </p:txBody>
+      </p:sp>
+      <p:sp>
+        <p:nvSpPr>
+          <p:cNvPr id="15" name="Rounded Rectangle 14"/>
+          <p:cNvSpPr/>
+          <p:nvPr/>
+        </p:nvSpPr>
+        <p:spPr>
+          <a:xfrm>
+            <a:off x="640080" y="3941063"/>
+            <a:ext cx="10972800" cy="2048256"/>
+          </a:xfrm>
+          <a:prstGeom prst="roundRect">
+            <a:avLst/>
+          </a:prstGeom>
+          <a:solidFill>
+            <a:srgbClr val="F4F7FB"/>
+          </a:solidFill>
+          <a:ln>
+            <a:solidFill>
+              <a:srgbClr val="CCDBEB"/>
+            </a:solidFill>
+          </a:ln>
+        </p:spPr>
+        <p:style>
+          <a:lnRef idx="1">
+            <a:schemeClr val="accent1"/>
+          </a:lnRef>
+          <a:fillRef idx="3">
+            <a:schemeClr val="accent1"/>
+          </a:fillRef>
+          <a:effectRef idx="2">
+            <a:schemeClr val="accent1"/>
+          </a:effectRef>
+          <a:fontRef idx="minor">
+            <a:schemeClr val="lt1"/>
+          </a:fontRef>
+        </p:style>
+        <p:txBody>
+          <a:bodyPr rtlCol="0" anchor="ctr"/>
+          <a:lstStyle/>
+          <a:p>
+            <a:pPr algn="ctr"/>
+          </a:p>
+        </p:txBody>
+      </p:sp>
+      <p:sp>
+        <p:nvSpPr>
+          <p:cNvPr id="16" name="TextBox 15"/>
+          <p:cNvSpPr txBox="1"/>
+          <p:nvPr/>
+        </p:nvSpPr>
+        <p:spPr>
+          <a:xfrm>
+            <a:off x="850392" y="4078224"/>
+            <a:ext cx="10424160" cy="256032"/>
+          </a:xfrm>
+          <a:prstGeom prst="rect">
+            <a:avLst/>
+          </a:prstGeom>
+          <a:noFill/>
+        </p:spPr>
+        <p:txBody>
+          <a:bodyPr wrap="square" lIns="73152" rIns="73152" tIns="36576" bIns="36576">
+            <a:spAutoFit/>
+          </a:bodyPr>
+          <a:lstStyle/>
+          <a:p>
+            <a:pPr algn="l">
+              <a:spcAft>
+                <a:spcPts val="0"/>
+              </a:spcAft>
+              <a:defRPr sz="1300" b="1">
+                <a:solidFill>
+                  <a:srgbClr val="225B9B"/>
+                </a:solidFill>
+                <a:latin typeface="DejaVu Sans Mono"/>
+              </a:defRPr>
+            </a:pPr>
+            <a:r>
+              <a:t>~/ros2_curri/agv_ws/src/agv_description/curriculum_stages/M08/model.sdf</a:t>
+            </a:r>
+          </a:p>
+        </p:txBody>
+      </p:sp>
+      <p:sp>
+        <p:nvSpPr>
+          <p:cNvPr id="17" name="TextBox 16"/>
+          <p:cNvSpPr txBox="1"/>
+          <p:nvPr/>
+        </p:nvSpPr>
+        <p:spPr>
+          <a:xfrm>
+            <a:off x="868680" y="4443983"/>
+            <a:ext cx="1234440" cy="228600"/>
+          </a:xfrm>
+          <a:prstGeom prst="rect">
+            <a:avLst/>
+          </a:prstGeom>
+          <a:noFill/>
+        </p:spPr>
+        <p:txBody>
+          <a:bodyPr wrap="square" lIns="73152" rIns="73152" tIns="36576" bIns="36576">
+            <a:spAutoFit/>
+          </a:bodyPr>
+          <a:lstStyle/>
+          <a:p>
+            <a:pPr algn="l">
+              <a:spcAft>
+                <a:spcPts val="0"/>
+              </a:spcAft>
+              <a:defRPr sz="1500" b="1">
+                <a:solidFill>
+                  <a:srgbClr val="2A8B5A"/>
+                </a:solidFill>
+                <a:latin typeface="Noto Sans CJK KR"/>
+              </a:defRPr>
+            </a:pPr>
+            <a:r>
+              <a:t>만드는 것</a:t>
+            </a:r>
+          </a:p>
+        </p:txBody>
+      </p:sp>
+      <p:sp>
+        <p:nvSpPr>
+          <p:cNvPr id="18" name="TextBox 17"/>
+          <p:cNvSpPr txBox="1"/>
+          <p:nvPr/>
+        </p:nvSpPr>
+        <p:spPr>
+          <a:xfrm>
+            <a:off x="1975104" y="4425696"/>
+            <a:ext cx="9189720" cy="274320"/>
+          </a:xfrm>
+          <a:prstGeom prst="rect">
+            <a:avLst/>
+          </a:prstGeom>
+          <a:noFill/>
+        </p:spPr>
+        <p:txBody>
+          <a:bodyPr wrap="square" lIns="73152" rIns="73152" tIns="36576" bIns="36576">
+            <a:spAutoFit/>
+          </a:bodyPr>
+          <a:lstStyle/>
+          <a:p>
+            <a:pPr algn="l">
+              <a:spcAft>
+                <a:spcPts val="0"/>
+              </a:spcAft>
+              <a:defRPr sz="1500" b="0">
+                <a:solidFill>
+                  <a:srgbClr val="122C4E"/>
+                </a:solidFill>
+                <a:latin typeface="Noto Sans CJK KR"/>
+              </a:defRPr>
+            </a:pPr>
+            <a:r>
+              <a:t>World에 배치하기 직전의 AGV 본체·바퀴·joint 모델</a:t>
+            </a:r>
+          </a:p>
+        </p:txBody>
+      </p:sp>
+      <p:sp>
+        <p:nvSpPr>
+          <p:cNvPr id="19" name="TextBox 18"/>
+          <p:cNvSpPr txBox="1"/>
+          <p:nvPr/>
+        </p:nvSpPr>
+        <p:spPr>
+          <a:xfrm>
+            <a:off x="868680" y="4818888"/>
+            <a:ext cx="1234440" cy="228600"/>
+          </a:xfrm>
+          <a:prstGeom prst="rect">
+            <a:avLst/>
+          </a:prstGeom>
+          <a:noFill/>
+        </p:spPr>
+        <p:txBody>
+          <a:bodyPr wrap="square" lIns="73152" rIns="73152" tIns="36576" bIns="36576">
+            <a:spAutoFit/>
+          </a:bodyPr>
+          <a:lstStyle/>
+          <a:p>
+            <a:pPr algn="l">
+              <a:spcAft>
+                <a:spcPts val="0"/>
+              </a:spcAft>
+              <a:defRPr sz="1500" b="1">
+                <a:solidFill>
+                  <a:srgbClr val="DB7E22"/>
+                </a:solidFill>
+                <a:latin typeface="Noto Sans CJK KR"/>
+              </a:defRPr>
+            </a:pPr>
+            <a:r>
+              <a:t>코드 읽기</a:t>
+            </a:r>
+          </a:p>
+        </p:txBody>
+      </p:sp>
+      <p:sp>
+        <p:nvSpPr>
+          <p:cNvPr id="20" name="TextBox 19"/>
+          <p:cNvSpPr txBox="1"/>
+          <p:nvPr/>
+        </p:nvSpPr>
+        <p:spPr>
+          <a:xfrm>
+            <a:off x="1975104" y="4800600"/>
+            <a:ext cx="9189720" cy="301752"/>
+          </a:xfrm>
+          <a:prstGeom prst="rect">
+            <a:avLst/>
+          </a:prstGeom>
+          <a:noFill/>
+        </p:spPr>
+        <p:txBody>
+          <a:bodyPr wrap="square" lIns="73152" rIns="73152" tIns="36576" bIns="36576">
+            <a:spAutoFit/>
+          </a:bodyPr>
+          <a:lstStyle/>
+          <a:p>
+            <a:pPr algn="l">
+              <a:spcAft>
+                <a:spcPts val="0"/>
+              </a:spcAft>
+              <a:defRPr sz="1400" b="0">
+                <a:solidFill>
+                  <a:srgbClr val="122C4E"/>
+                </a:solidFill>
+                <a:latin typeface="Noto Sans CJK KR"/>
+              </a:defRPr>
+            </a:pPr>
+            <a:r>
+              <a:t>M07 물리 요소를 유지한 채 sensor/drive plugin이 아직 없는지 읽는다.</a:t>
+            </a:r>
+          </a:p>
+        </p:txBody>
+      </p:sp>
+      <p:sp>
+        <p:nvSpPr>
+          <p:cNvPr id="21" name="TextBox 20"/>
+          <p:cNvSpPr txBox="1"/>
+          <p:nvPr/>
+        </p:nvSpPr>
+        <p:spPr>
+          <a:xfrm>
+            <a:off x="868680" y="5202936"/>
+            <a:ext cx="1234440" cy="228600"/>
+          </a:xfrm>
+          <a:prstGeom prst="rect">
+            <a:avLst/>
+          </a:prstGeom>
+          <a:noFill/>
+        </p:spPr>
+        <p:txBody>
+          <a:bodyPr wrap="square" lIns="73152" rIns="73152" tIns="36576" bIns="36576">
+            <a:spAutoFit/>
+          </a:bodyPr>
+          <a:lstStyle/>
+          <a:p>
+            <a:pPr algn="l">
+              <a:spcAft>
+                <a:spcPts val="0"/>
+              </a:spcAft>
+              <a:defRPr sz="1500" b="1">
+                <a:solidFill>
+                  <a:srgbClr val="225B9B"/>
+                </a:solidFill>
+                <a:latin typeface="Noto Sans CJK KR"/>
+              </a:defRPr>
+            </a:pPr>
+            <a:r>
+              <a:t>사용/확인</a:t>
+            </a:r>
+          </a:p>
+        </p:txBody>
+      </p:sp>
+      <p:sp>
+        <p:nvSpPr>
+          <p:cNvPr id="22" name="TextBox 21"/>
+          <p:cNvSpPr txBox="1"/>
+          <p:nvPr/>
+        </p:nvSpPr>
+        <p:spPr>
+          <a:xfrm>
+            <a:off x="1975104" y="5184648"/>
+            <a:ext cx="9189720" cy="512064"/>
+          </a:xfrm>
+          <a:prstGeom prst="rect">
+            <a:avLst/>
+          </a:prstGeom>
+          <a:noFill/>
+        </p:spPr>
+        <p:txBody>
+          <a:bodyPr wrap="square" lIns="73152" rIns="73152" tIns="36576" bIns="36576">
+            <a:spAutoFit/>
+          </a:bodyPr>
+          <a:lstStyle/>
+          <a:p>
+            <a:pPr algn="l">
+              <a:spcAft>
+                <a:spcPts val="0"/>
+              </a:spcAft>
+              <a:defRPr sz="1300" b="0">
+                <a:solidFill>
+                  <a:srgbClr val="122C4E"/>
+                </a:solidFill>
+                <a:latin typeface="Noto Sans CJK KR"/>
+              </a:defRPr>
+            </a:pPr>
+            <a:r>
+              <a:t>사용: gz sdf -k 뒤 model.config와 함께 Gazebo models 경로에 둔다.</a:t>
             </a:r>
             <a:br/>
             <a:r>
-              <a:t>rg -n 'model://agv|&lt;world name=' src/agv_description/curriculum_stages/M08/warehouse.sdf</a:t>
-            </a:r>
-          </a:p>
-        </p:txBody>
-      </p:sp>
-      <p:sp>
-        <p:nvSpPr>
-          <p:cNvPr id="10" name="TextBox 9"/>
-          <p:cNvSpPr txBox="1"/>
-          <p:nvPr/>
-        </p:nvSpPr>
-        <p:spPr>
-          <a:xfrm>
-            <a:off x="768096" y="5468112"/>
-            <a:ext cx="1143000" cy="256032"/>
-          </a:xfrm>
-          <a:prstGeom prst="rect">
-            <a:avLst/>
-          </a:prstGeom>
-          <a:noFill/>
-        </p:spPr>
-        <p:txBody>
-          <a:bodyPr wrap="square" lIns="73152" rIns="73152" tIns="36576" bIns="36576">
-            <a:spAutoFit/>
-          </a:bodyPr>
-          <a:lstStyle/>
-          <a:p>
-            <a:pPr algn="l">
-              <a:spcAft>
-                <a:spcPts val="0"/>
-              </a:spcAft>
-              <a:defRPr sz="1800" b="1">
-                <a:solidFill>
-                  <a:srgbClr val="2A8B5A"/>
-                </a:solidFill>
-                <a:latin typeface="Noto Sans CJK KR"/>
-              </a:defRPr>
-            </a:pPr>
-            <a:r>
-              <a:t>확인</a:t>
-            </a:r>
-          </a:p>
-        </p:txBody>
-      </p:sp>
-      <p:sp>
-        <p:nvSpPr>
-          <p:cNvPr id="11" name="TextBox 10"/>
-          <p:cNvSpPr txBox="1"/>
-          <p:nvPr/>
-        </p:nvSpPr>
-        <p:spPr>
-          <a:xfrm>
-            <a:off x="768096" y="5742432"/>
-            <a:ext cx="10561320" cy="347472"/>
-          </a:xfrm>
-          <a:prstGeom prst="rect">
-            <a:avLst/>
-          </a:prstGeom>
-          <a:noFill/>
-        </p:spPr>
-        <p:txBody>
-          <a:bodyPr wrap="square" lIns="73152" rIns="73152" tIns="36576" bIns="36576">
-            <a:spAutoFit/>
-          </a:bodyPr>
-          <a:lstStyle/>
-          <a:p>
-            <a:pPr algn="l">
-              <a:spcAft>
-                <a:spcPts val="0"/>
-              </a:spcAft>
-              <a:defRPr sz="1800" b="0">
-                <a:solidFill>
-                  <a:srgbClr val="122C4E"/>
-                </a:solidFill>
-                <a:latin typeface="Noto Sans CJK KR"/>
-              </a:defRPr>
-            </a:pPr>
-            <a:r>
-              <a:t>명령의 출력에서 topic·frame·파일 이름 또는 성공 메시지를 찾으면 이 단계가 완료됩니다.</a:t>
+              <a:t>화면/출력: Valid 출력과 World에 spawn된 AGV</a:t>
             </a:r>
           </a:p>
         </p:txBody>
@@ -19247,7 +21624,7 @@
               </a:defRPr>
             </a:pPr>
             <a:r>
-              <a:t>World를 실행한다</a:t>
+              <a:t>코드/설정이 실제로 만드는 것 (2/2)</a:t>
             </a:r>
           </a:p>
         </p:txBody>
@@ -19286,7 +21663,7 @@
               </a:defRPr>
             </a:pPr>
             <a:r>
-              <a:t>한 장에는 한 행동만 수행합니다.</a:t>
+              <a:t>파일을 입력하기 전에 ‘무엇을 만들고 어디서 볼지’를 먼저 연결합니다.</a:t>
             </a:r>
           </a:p>
         </p:txBody>
@@ -19422,109 +21799,31 @@
               </a:defRPr>
             </a:pPr>
             <a:r>
-              <a:t>현재 단계 2/2    |    현재 폴더 ~/ros2_curri/agv_ws    |    현재 터미널</a:t>
-            </a:r>
-          </a:p>
-        </p:txBody>
-      </p:sp>
-      <p:sp>
-        <p:nvSpPr>
-          <p:cNvPr id="7" name="TextBox 6"/>
-          <p:cNvSpPr txBox="1"/>
-          <p:nvPr/>
-        </p:nvSpPr>
-        <p:spPr>
-          <a:xfrm>
-            <a:off x="676656" y="1764792"/>
-            <a:ext cx="1828800" cy="347472"/>
-          </a:xfrm>
-          <a:prstGeom prst="rect">
-            <a:avLst/>
-          </a:prstGeom>
-          <a:noFill/>
-        </p:spPr>
-        <p:txBody>
-          <a:bodyPr wrap="square" lIns="73152" rIns="73152" tIns="36576" bIns="36576">
-            <a:spAutoFit/>
-          </a:bodyPr>
-          <a:lstStyle/>
-          <a:p>
-            <a:pPr algn="l">
-              <a:spcAft>
-                <a:spcPts val="0"/>
-              </a:spcAft>
-              <a:defRPr sz="1800" b="1">
-                <a:solidFill>
-                  <a:srgbClr val="225B9B"/>
-                </a:solidFill>
-                <a:latin typeface="Noto Sans CJK KR"/>
-              </a:defRPr>
-            </a:pPr>
-            <a:r>
-              <a:t>왜 하는가</a:t>
-            </a:r>
-          </a:p>
-        </p:txBody>
-      </p:sp>
-      <p:sp>
-        <p:nvSpPr>
-          <p:cNvPr id="8" name="TextBox 7"/>
-          <p:cNvSpPr txBox="1"/>
-          <p:nvPr/>
-        </p:nvSpPr>
-        <p:spPr>
-          <a:xfrm>
-            <a:off x="676656" y="2103120"/>
-            <a:ext cx="10789920" cy="512064"/>
-          </a:xfrm>
-          <a:prstGeom prst="rect">
-            <a:avLst/>
-          </a:prstGeom>
-          <a:noFill/>
-        </p:spPr>
-        <p:txBody>
-          <a:bodyPr wrap="square" lIns="73152" rIns="73152" tIns="36576" bIns="36576">
-            <a:spAutoFit/>
-          </a:bodyPr>
-          <a:lstStyle/>
-          <a:p>
-            <a:pPr algn="l">
-              <a:spcAft>
-                <a:spcPts val="0"/>
-              </a:spcAft>
-              <a:defRPr sz="2000" b="0">
-                <a:solidFill>
-                  <a:srgbClr val="122C4E"/>
-                </a:solidFill>
-                <a:latin typeface="Noto Sans CJK KR"/>
-              </a:defRPr>
-            </a:pPr>
-            <a:r>
-              <a:t>M08 snapshot을 agv_gazebo models/worlds 경로에 복사한 뒤 Gazebo를 실행해 spawn만 확인한다.</a:t>
-            </a:r>
-          </a:p>
-        </p:txBody>
-      </p:sp>
-      <p:sp>
-        <p:nvSpPr>
-          <p:cNvPr id="9" name="Rounded Rectangle 8"/>
+              <a:t>현재 단계 파일 역할    |    현재 폴더 ~/ros2_curri/agv_ws    |    현재 터미널</a:t>
+            </a:r>
+          </a:p>
+        </p:txBody>
+      </p:sp>
+      <p:sp>
+        <p:nvSpPr>
+          <p:cNvPr id="7" name="Rounded Rectangle 6"/>
           <p:cNvSpPr/>
           <p:nvPr/>
         </p:nvSpPr>
         <p:spPr>
           <a:xfrm>
-            <a:off x="676656" y="2871216"/>
-            <a:ext cx="10835640" cy="2331720"/>
+            <a:off x="640080" y="1627632"/>
+            <a:ext cx="10972800" cy="2048256"/>
           </a:xfrm>
           <a:prstGeom prst="roundRect">
             <a:avLst/>
           </a:prstGeom>
           <a:solidFill>
-            <a:srgbClr val="1D232D"/>
+            <a:srgbClr val="F4F7FB"/>
           </a:solidFill>
           <a:ln>
             <a:solidFill>
-              <a:srgbClr val="1D232D"/>
+              <a:srgbClr val="CCDBEB"/>
             </a:solidFill>
           </a:ln>
         </p:spPr>
@@ -19543,104 +21842,286 @@
           </a:fontRef>
         </p:style>
         <p:txBody>
-          <a:bodyPr rtlCol="0" anchor="ctr" wrap="square" lIns="73152" rIns="73152" tIns="36576" bIns="36576"/>
-          <a:lstStyle/>
-          <a:p>
-            <a:pPr algn="l">
-              <a:spcAft>
-                <a:spcPts val="0"/>
-              </a:spcAft>
-              <a:defRPr sz="1600" b="0">
-                <a:solidFill>
-                  <a:srgbClr val="FFFFFF"/>
+          <a:bodyPr rtlCol="0" anchor="ctr"/>
+          <a:lstStyle/>
+          <a:p>
+            <a:pPr algn="ctr"/>
+          </a:p>
+        </p:txBody>
+      </p:sp>
+      <p:sp>
+        <p:nvSpPr>
+          <p:cNvPr id="8" name="TextBox 7"/>
+          <p:cNvSpPr txBox="1"/>
+          <p:nvPr/>
+        </p:nvSpPr>
+        <p:spPr>
+          <a:xfrm>
+            <a:off x="850392" y="1764792"/>
+            <a:ext cx="10424160" cy="256032"/>
+          </a:xfrm>
+          <a:prstGeom prst="rect">
+            <a:avLst/>
+          </a:prstGeom>
+          <a:noFill/>
+        </p:spPr>
+        <p:txBody>
+          <a:bodyPr wrap="square" lIns="73152" rIns="73152" tIns="36576" bIns="36576">
+            <a:spAutoFit/>
+          </a:bodyPr>
+          <a:lstStyle/>
+          <a:p>
+            <a:pPr algn="l">
+              <a:spcAft>
+                <a:spcPts val="0"/>
+              </a:spcAft>
+              <a:defRPr sz="1300" b="1">
+                <a:solidFill>
+                  <a:srgbClr val="225B9B"/>
                 </a:solidFill>
                 <a:latin typeface="DejaVu Sans Mono"/>
               </a:defRPr>
             </a:pPr>
             <a:r>
-              <a:t>gz sim -r src/agv_description/curriculum_stages/M08/warehouse.sdf</a:t>
+              <a:t>~/ros2_curri/agv_ws/src/agv_description/curriculum_stages/M08/warehouse.sdf</a:t>
+            </a:r>
+          </a:p>
+        </p:txBody>
+      </p:sp>
+      <p:sp>
+        <p:nvSpPr>
+          <p:cNvPr id="9" name="TextBox 8"/>
+          <p:cNvSpPr txBox="1"/>
+          <p:nvPr/>
+        </p:nvSpPr>
+        <p:spPr>
+          <a:xfrm>
+            <a:off x="868680" y="2130552"/>
+            <a:ext cx="1234440" cy="228600"/>
+          </a:xfrm>
+          <a:prstGeom prst="rect">
+            <a:avLst/>
+          </a:prstGeom>
+          <a:noFill/>
+        </p:spPr>
+        <p:txBody>
+          <a:bodyPr wrap="square" lIns="73152" rIns="73152" tIns="36576" bIns="36576">
+            <a:spAutoFit/>
+          </a:bodyPr>
+          <a:lstStyle/>
+          <a:p>
+            <a:pPr algn="l">
+              <a:spcAft>
+                <a:spcPts val="0"/>
+              </a:spcAft>
+              <a:defRPr sz="1500" b="1">
+                <a:solidFill>
+                  <a:srgbClr val="2A8B5A"/>
+                </a:solidFill>
+                <a:latin typeface="Noto Sans CJK KR"/>
+              </a:defRPr>
+            </a:pPr>
+            <a:r>
+              <a:t>만드는 것</a:t>
+            </a:r>
+          </a:p>
+        </p:txBody>
+      </p:sp>
+      <p:sp>
+        <p:nvSpPr>
+          <p:cNvPr id="10" name="TextBox 9"/>
+          <p:cNvSpPr txBox="1"/>
+          <p:nvPr/>
+        </p:nvSpPr>
+        <p:spPr>
+          <a:xfrm>
+            <a:off x="1975104" y="2112264"/>
+            <a:ext cx="9189720" cy="274320"/>
+          </a:xfrm>
+          <a:prstGeom prst="rect">
+            <a:avLst/>
+          </a:prstGeom>
+          <a:noFill/>
+        </p:spPr>
+        <p:txBody>
+          <a:bodyPr wrap="square" lIns="73152" rIns="73152" tIns="36576" bIns="36576">
+            <a:spAutoFit/>
+          </a:bodyPr>
+          <a:lstStyle/>
+          <a:p>
+            <a:pPr algn="l">
+              <a:spcAft>
+                <a:spcPts val="0"/>
+              </a:spcAft>
+              <a:defRPr sz="1500" b="0">
+                <a:solidFill>
+                  <a:srgbClr val="122C4E"/>
+                </a:solidFill>
+                <a:latin typeface="Noto Sans CJK KR"/>
+              </a:defRPr>
+            </a:pPr>
+            <a:r>
+              <a:t>바닥·벽·장애물·목표물과 AGV를 배치하는 실습 공간</a:t>
+            </a:r>
+          </a:p>
+        </p:txBody>
+      </p:sp>
+      <p:sp>
+        <p:nvSpPr>
+          <p:cNvPr id="11" name="TextBox 10"/>
+          <p:cNvSpPr txBox="1"/>
+          <p:nvPr/>
+        </p:nvSpPr>
+        <p:spPr>
+          <a:xfrm>
+            <a:off x="868680" y="2505456"/>
+            <a:ext cx="1234440" cy="228600"/>
+          </a:xfrm>
+          <a:prstGeom prst="rect">
+            <a:avLst/>
+          </a:prstGeom>
+          <a:noFill/>
+        </p:spPr>
+        <p:txBody>
+          <a:bodyPr wrap="square" lIns="73152" rIns="73152" tIns="36576" bIns="36576">
+            <a:spAutoFit/>
+          </a:bodyPr>
+          <a:lstStyle/>
+          <a:p>
+            <a:pPr algn="l">
+              <a:spcAft>
+                <a:spcPts val="0"/>
+              </a:spcAft>
+              <a:defRPr sz="1500" b="1">
+                <a:solidFill>
+                  <a:srgbClr val="DB7E22"/>
+                </a:solidFill>
+                <a:latin typeface="Noto Sans CJK KR"/>
+              </a:defRPr>
+            </a:pPr>
+            <a:r>
+              <a:t>코드 읽기</a:t>
+            </a:r>
+          </a:p>
+        </p:txBody>
+      </p:sp>
+      <p:sp>
+        <p:nvSpPr>
+          <p:cNvPr id="12" name="TextBox 11"/>
+          <p:cNvSpPr txBox="1"/>
+          <p:nvPr/>
+        </p:nvSpPr>
+        <p:spPr>
+          <a:xfrm>
+            <a:off x="1975104" y="2487168"/>
+            <a:ext cx="9189720" cy="301752"/>
+          </a:xfrm>
+          <a:prstGeom prst="rect">
+            <a:avLst/>
+          </a:prstGeom>
+          <a:noFill/>
+        </p:spPr>
+        <p:txBody>
+          <a:bodyPr wrap="square" lIns="73152" rIns="73152" tIns="36576" bIns="36576">
+            <a:spAutoFit/>
+          </a:bodyPr>
+          <a:lstStyle/>
+          <a:p>
+            <a:pPr algn="l">
+              <a:spcAft>
+                <a:spcPts val="0"/>
+              </a:spcAft>
+              <a:defRPr sz="1400" b="0">
+                <a:solidFill>
+                  <a:srgbClr val="122C4E"/>
+                </a:solidFill>
+                <a:latin typeface="Noto Sans CJK KR"/>
+              </a:defRPr>
+            </a:pPr>
+            <a:r>
+              <a:t>world → 환경 model → include 순서로 만들고 include의 pose를 마지막에 조정한다.</a:t>
+            </a:r>
+          </a:p>
+        </p:txBody>
+      </p:sp>
+      <p:sp>
+        <p:nvSpPr>
+          <p:cNvPr id="13" name="TextBox 12"/>
+          <p:cNvSpPr txBox="1"/>
+          <p:nvPr/>
+        </p:nvSpPr>
+        <p:spPr>
+          <a:xfrm>
+            <a:off x="868680" y="2889504"/>
+            <a:ext cx="1234440" cy="228600"/>
+          </a:xfrm>
+          <a:prstGeom prst="rect">
+            <a:avLst/>
+          </a:prstGeom>
+          <a:noFill/>
+        </p:spPr>
+        <p:txBody>
+          <a:bodyPr wrap="square" lIns="73152" rIns="73152" tIns="36576" bIns="36576">
+            <a:spAutoFit/>
+          </a:bodyPr>
+          <a:lstStyle/>
+          <a:p>
+            <a:pPr algn="l">
+              <a:spcAft>
+                <a:spcPts val="0"/>
+              </a:spcAft>
+              <a:defRPr sz="1500" b="1">
+                <a:solidFill>
+                  <a:srgbClr val="225B9B"/>
+                </a:solidFill>
+                <a:latin typeface="Noto Sans CJK KR"/>
+              </a:defRPr>
+            </a:pPr>
+            <a:r>
+              <a:t>사용/확인</a:t>
+            </a:r>
+          </a:p>
+        </p:txBody>
+      </p:sp>
+      <p:sp>
+        <p:nvSpPr>
+          <p:cNvPr id="14" name="TextBox 13"/>
+          <p:cNvSpPr txBox="1"/>
+          <p:nvPr/>
+        </p:nvSpPr>
+        <p:spPr>
+          <a:xfrm>
+            <a:off x="1975104" y="2871216"/>
+            <a:ext cx="9189720" cy="512064"/>
+          </a:xfrm>
+          <a:prstGeom prst="rect">
+            <a:avLst/>
+          </a:prstGeom>
+          <a:noFill/>
+        </p:spPr>
+        <p:txBody>
+          <a:bodyPr wrap="square" lIns="73152" rIns="73152" tIns="36576" bIns="36576">
+            <a:spAutoFit/>
+          </a:bodyPr>
+          <a:lstStyle/>
+          <a:p>
+            <a:pPr algn="l">
+              <a:spcAft>
+                <a:spcPts val="0"/>
+              </a:spcAft>
+              <a:defRPr sz="1300" b="0">
+                <a:solidFill>
+                  <a:srgbClr val="122C4E"/>
+                </a:solidFill>
+                <a:latin typeface="Noto Sans CJK KR"/>
+              </a:defRPr>
+            </a:pPr>
+            <a:r>
+              <a:t>사용: gz sim으로 World를 연다.</a:t>
             </a:r>
             <a:br/>
             <a:r>
-              <a:t># 이 단계에는 ROS bridge와 구동 topic이 없다.</a:t>
-            </a:r>
-          </a:p>
-        </p:txBody>
-      </p:sp>
-      <p:sp>
-        <p:nvSpPr>
-          <p:cNvPr id="10" name="TextBox 9"/>
-          <p:cNvSpPr txBox="1"/>
-          <p:nvPr/>
-        </p:nvSpPr>
-        <p:spPr>
-          <a:xfrm>
-            <a:off x="768096" y="5468112"/>
-            <a:ext cx="1143000" cy="256032"/>
-          </a:xfrm>
-          <a:prstGeom prst="rect">
-            <a:avLst/>
-          </a:prstGeom>
-          <a:noFill/>
-        </p:spPr>
-        <p:txBody>
-          <a:bodyPr wrap="square" lIns="73152" rIns="73152" tIns="36576" bIns="36576">
-            <a:spAutoFit/>
-          </a:bodyPr>
-          <a:lstStyle/>
-          <a:p>
-            <a:pPr algn="l">
-              <a:spcAft>
-                <a:spcPts val="0"/>
-              </a:spcAft>
-              <a:defRPr sz="1800" b="1">
-                <a:solidFill>
-                  <a:srgbClr val="2A8B5A"/>
-                </a:solidFill>
-                <a:latin typeface="Noto Sans CJK KR"/>
-              </a:defRPr>
-            </a:pPr>
-            <a:r>
-              <a:t>확인</a:t>
-            </a:r>
-          </a:p>
-        </p:txBody>
-      </p:sp>
-      <p:sp>
-        <p:nvSpPr>
-          <p:cNvPr id="11" name="TextBox 10"/>
-          <p:cNvSpPr txBox="1"/>
-          <p:nvPr/>
-        </p:nvSpPr>
-        <p:spPr>
-          <a:xfrm>
-            <a:off x="768096" y="5742432"/>
-            <a:ext cx="10561320" cy="347472"/>
-          </a:xfrm>
-          <a:prstGeom prst="rect">
-            <a:avLst/>
-          </a:prstGeom>
-          <a:noFill/>
-        </p:spPr>
-        <p:txBody>
-          <a:bodyPr wrap="square" lIns="73152" rIns="73152" tIns="36576" bIns="36576">
-            <a:spAutoFit/>
-          </a:bodyPr>
-          <a:lstStyle/>
-          <a:p>
-            <a:pPr algn="l">
-              <a:spcAft>
-                <a:spcPts val="0"/>
-              </a:spcAft>
-              <a:defRPr sz="1800" b="0">
-                <a:solidFill>
-                  <a:srgbClr val="122C4E"/>
-                </a:solidFill>
-                <a:latin typeface="Noto Sans CJK KR"/>
-              </a:defRPr>
-            </a:pPr>
-            <a:r>
-              <a:t>명령의 출력에서 topic·frame·파일 이름 또는 성공 메시지를 찾으면 이 단계가 완료됩니다.</a:t>
+              <a:t>화면/출력: Gazebo Entity Tree의 ground·wall·target·agv</a:t>
             </a:r>
           </a:p>
         </p:txBody>
@@ -19697,7 +22178,7 @@
               </a:defRPr>
             </a:pPr>
             <a:r>
-              <a:t>파일을 새로 만들고 저장한다 (1/1)</a:t>
+              <a:t>코드를 ‘만드는 것 → 표시할 줄 → 바꾼 결과’로 읽는다</a:t>
             </a:r>
           </a:p>
         </p:txBody>
@@ -19736,7 +22217,7 @@
               </a:defRPr>
             </a:pPr>
             <a:r>
-              <a:t>~/ros2_curri/agv_ws/src/agv_description/curriculum_stages/M08/model.config</a:t>
+              <a:t>PDF 예시처럼 화면을 보기 전에 코드의 역할과 관찰 지점을 한 번 짚고 갑니다.</a:t>
             </a:r>
           </a:p>
         </p:txBody>
@@ -19872,62 +22353,23 @@
               </a:defRPr>
             </a:pPr>
             <a:r>
-              <a:t>현재 단계 3/4    |    현재 폴더 ~/ros2_curri/agv_ws    |    현재 터미널</a:t>
-            </a:r>
-          </a:p>
-        </p:txBody>
-      </p:sp>
-      <p:sp>
-        <p:nvSpPr>
-          <p:cNvPr id="7" name="TextBox 6"/>
-          <p:cNvSpPr txBox="1"/>
-          <p:nvPr/>
-        </p:nvSpPr>
-        <p:spPr>
-          <a:xfrm>
-            <a:off x="658368" y="1627632"/>
-            <a:ext cx="10972800" cy="256032"/>
-          </a:xfrm>
-          <a:prstGeom prst="rect">
-            <a:avLst/>
-          </a:prstGeom>
-          <a:noFill/>
-        </p:spPr>
-        <p:txBody>
-          <a:bodyPr wrap="square" lIns="73152" rIns="73152" tIns="36576" bIns="36576">
-            <a:spAutoFit/>
-          </a:bodyPr>
-          <a:lstStyle/>
-          <a:p>
-            <a:pPr algn="l">
-              <a:spcAft>
-                <a:spcPts val="0"/>
-              </a:spcAft>
-              <a:defRPr sz="1500" b="1">
-                <a:solidFill>
-                  <a:srgbClr val="122C4E"/>
-                </a:solidFill>
-                <a:latin typeface="Noto Sans CJK KR"/>
-              </a:defRPr>
-            </a:pPr>
-            <a:r>
-              <a:t>이번 단계: 파일의 전체 내용을 중간 생략 없이 작성합니다. 아래 줄 범위를 끝까지 입력하세요.</a:t>
-            </a:r>
-          </a:p>
-        </p:txBody>
-      </p:sp>
-      <p:sp>
-        <p:nvSpPr>
-          <p:cNvPr id="8" name="Rectangle 7"/>
+              <a:t>현재 단계 코드 해설    |    현재 폴더 ~/ros2_curri/agv_ws    |    현재 터미널</a:t>
+            </a:r>
+          </a:p>
+        </p:txBody>
+      </p:sp>
+      <p:sp>
+        <p:nvSpPr>
+          <p:cNvPr id="7" name="Rounded Rectangle 6"/>
           <p:cNvSpPr/>
           <p:nvPr/>
         </p:nvSpPr>
         <p:spPr>
           <a:xfrm>
-            <a:off x="658368" y="1956816"/>
-            <a:ext cx="10972800" cy="603504"/>
-          </a:xfrm>
-          <a:prstGeom prst="rect">
+            <a:off x="658368" y="1664208"/>
+            <a:ext cx="5321808" cy="1764792"/>
+          </a:xfrm>
+          <a:prstGeom prst="roundRect">
             <a:avLst/>
           </a:prstGeom>
           <a:solidFill>
@@ -19935,7 +22377,7 @@
           </a:solidFill>
           <a:ln>
             <a:solidFill>
-              <a:srgbClr val="F4F7FB"/>
+              <a:srgbClr val="2A8B5A"/>
             </a:solidFill>
           </a:ln>
         </p:spPr>
@@ -19954,50 +22396,111 @@
           </a:fontRef>
         </p:style>
         <p:txBody>
-          <a:bodyPr rtlCol="0" anchor="ctr" wrap="square" lIns="73152" rIns="73152" tIns="36576" bIns="36576"/>
-          <a:lstStyle/>
-          <a:p>
-            <a:pPr algn="l">
-              <a:spcAft>
-                <a:spcPts val="0"/>
-              </a:spcAft>
-              <a:defRPr sz="1400" b="0">
+          <a:bodyPr rtlCol="0" anchor="ctr"/>
+          <a:lstStyle/>
+          <a:p>
+            <a:pPr algn="ctr"/>
+          </a:p>
+        </p:txBody>
+      </p:sp>
+      <p:sp>
+        <p:nvSpPr>
+          <p:cNvPr id="8" name="TextBox 7"/>
+          <p:cNvSpPr txBox="1"/>
+          <p:nvPr/>
+        </p:nvSpPr>
+        <p:spPr>
+          <a:xfrm>
+            <a:off x="859536" y="1828800"/>
+            <a:ext cx="4892040" cy="265176"/>
+          </a:xfrm>
+          <a:prstGeom prst="rect">
+            <a:avLst/>
+          </a:prstGeom>
+          <a:noFill/>
+        </p:spPr>
+        <p:txBody>
+          <a:bodyPr wrap="square" lIns="73152" rIns="73152" tIns="36576" bIns="36576">
+            <a:spAutoFit/>
+          </a:bodyPr>
+          <a:lstStyle/>
+          <a:p>
+            <a:pPr algn="l">
+              <a:spcAft>
+                <a:spcPts val="0"/>
+              </a:spcAft>
+              <a:defRPr sz="1700" b="1">
+                <a:solidFill>
+                  <a:srgbClr val="2A8B5A"/>
+                </a:solidFill>
+                <a:latin typeface="Noto Sans CJK KR"/>
+              </a:defRPr>
+            </a:pPr>
+            <a:r>
+              <a:t>1. 이 파일이 만드는 것</a:t>
+            </a:r>
+          </a:p>
+        </p:txBody>
+      </p:sp>
+      <p:sp>
+        <p:nvSpPr>
+          <p:cNvPr id="9" name="TextBox 8"/>
+          <p:cNvSpPr txBox="1"/>
+          <p:nvPr/>
+        </p:nvSpPr>
+        <p:spPr>
+          <a:xfrm>
+            <a:off x="859536" y="2240280"/>
+            <a:ext cx="4846320" cy="941832"/>
+          </a:xfrm>
+          <a:prstGeom prst="rect">
+            <a:avLst/>
+          </a:prstGeom>
+          <a:noFill/>
+        </p:spPr>
+        <p:txBody>
+          <a:bodyPr wrap="square" lIns="73152" rIns="73152" tIns="36576" bIns="36576">
+            <a:spAutoFit/>
+          </a:bodyPr>
+          <a:lstStyle/>
+          <a:p>
+            <a:pPr algn="l">
+              <a:spcAft>
+                <a:spcPts val="0"/>
+              </a:spcAft>
+              <a:defRPr sz="1600" b="0">
                 <a:solidFill>
                   <a:srgbClr val="122C4E"/>
                 </a:solidFill>
-                <a:latin typeface="DejaVu Sans Mono"/>
-              </a:defRPr>
-            </a:pPr>
-            <a:r>
-              <a:t>파일 생성: mkdir -p ~/ros2_curri/agv_ws/src/agv_description/curriculum_stages/M08</a:t>
-            </a:r>
-            <a:br/>
-            <a:r>
-              <a:t>파일 열기: nano ~/ros2_curri/agv_ws/src/agv_description/curriculum_stages/M08/model.config</a:t>
-            </a:r>
-          </a:p>
-        </p:txBody>
-      </p:sp>
-      <p:sp>
-        <p:nvSpPr>
-          <p:cNvPr id="9" name="Rectangle 8"/>
+                <a:latin typeface="Noto Sans CJK KR"/>
+              </a:defRPr>
+            </a:pPr>
+            <a:r>
+              <a:t>World는 무대이고 model://agv include는 그 무대 위에 로봇을 놓는 한 줄입니다.</a:t>
+            </a:r>
+          </a:p>
+        </p:txBody>
+      </p:sp>
+      <p:sp>
+        <p:nvSpPr>
+          <p:cNvPr id="10" name="Rounded Rectangle 9"/>
           <p:cNvSpPr/>
           <p:nvPr/>
         </p:nvSpPr>
         <p:spPr>
           <a:xfrm>
-            <a:off x="658368" y="2706624"/>
-            <a:ext cx="10972800" cy="3364992"/>
-          </a:xfrm>
-          <a:prstGeom prst="rect">
+            <a:off x="6217920" y="1664208"/>
+            <a:ext cx="5321808" cy="1764792"/>
+          </a:xfrm>
+          <a:prstGeom prst="roundRect">
             <a:avLst/>
           </a:prstGeom>
           <a:solidFill>
-            <a:srgbClr val="1D232D"/>
+            <a:srgbClr val="F4F7FB"/>
           </a:solidFill>
           <a:ln>
             <a:solidFill>
-              <a:srgbClr val="1D232D"/>
+              <a:srgbClr val="225B9B"/>
             </a:solidFill>
           </a:ln>
         </p:spPr>
@@ -20016,81 +22519,372 @@
           </a:fontRef>
         </p:style>
         <p:txBody>
-          <a:bodyPr rtlCol="0" anchor="ctr" wrap="square" lIns="164592" rIns="164592" tIns="109728" bIns="36576"/>
-          <a:lstStyle/>
-          <a:p>
-            <a:pPr algn="l">
-              <a:spcAft>
-                <a:spcPts val="0"/>
-              </a:spcAft>
-              <a:defRPr sz="1400" b="0">
-                <a:solidFill>
-                  <a:srgbClr val="FFFFFF"/>
-                </a:solidFill>
-                <a:latin typeface="DejaVu Sans Mono"/>
-              </a:defRPr>
-            </a:pPr>
-            <a:r>
-              <a:t>&lt;?xml version="1.0" ?&gt;</a:t>
-            </a:r>
-            <a:br/>
-            <a:r>
-              <a:t>&lt;model&gt;</a:t>
-            </a:r>
-            <a:br/>
-            <a:r>
-              <a:t>  &lt;name&gt;agv&lt;/name&gt;</a:t>
-            </a:r>
-            <a:br/>
-            <a:r>
-              <a:t>  &lt;version&gt;1.0&lt;/version&gt;</a:t>
-            </a:r>
-            <a:br/>
-            <a:r>
-              <a:t>  &lt;sdf version="1.10"&gt;model.sdf&lt;/sdf&gt;</a:t>
-            </a:r>
-            <a:br/>
-            <a:r>
-              <a:t>&lt;/model&gt;</a:t>
-            </a:r>
-          </a:p>
-        </p:txBody>
-      </p:sp>
-      <p:sp>
-        <p:nvSpPr>
-          <p:cNvPr id="10" name="TextBox 9"/>
-          <p:cNvSpPr txBox="1"/>
-          <p:nvPr/>
-        </p:nvSpPr>
-        <p:spPr>
-          <a:xfrm>
-            <a:off x="749808" y="6181344"/>
-            <a:ext cx="10789920" cy="201168"/>
-          </a:xfrm>
-          <a:prstGeom prst="rect">
-            <a:avLst/>
-          </a:prstGeom>
-          <a:noFill/>
-        </p:spPr>
-        <p:txBody>
-          <a:bodyPr wrap="square" lIns="73152" rIns="73152" tIns="36576" bIns="36576">
-            <a:spAutoFit/>
-          </a:bodyPr>
-          <a:lstStyle/>
-          <a:p>
-            <a:pPr algn="l">
-              <a:spcAft>
-                <a:spcPts val="0"/>
-              </a:spcAft>
-              <a:defRPr sz="1000" b="0">
-                <a:solidFill>
-                  <a:srgbClr val="5C6672"/>
-                </a:solidFill>
-                <a:latin typeface="Noto Sans CJK KR"/>
-              </a:defRPr>
-            </a:pPr>
-            <a:r>
-              <a:t>파일 전체 1/1 · 이 슬라이드 다음에 같은 파일의 나머지 줄이 이어집니다.</a:t>
+          <a:bodyPr rtlCol="0" anchor="ctr"/>
+          <a:lstStyle/>
+          <a:p>
+            <a:pPr algn="ctr"/>
+          </a:p>
+        </p:txBody>
+      </p:sp>
+      <p:sp>
+        <p:nvSpPr>
+          <p:cNvPr id="11" name="TextBox 10"/>
+          <p:cNvSpPr txBox="1"/>
+          <p:nvPr/>
+        </p:nvSpPr>
+        <p:spPr>
+          <a:xfrm>
+            <a:off x="6419088" y="1828800"/>
+            <a:ext cx="4892040" cy="265176"/>
+          </a:xfrm>
+          <a:prstGeom prst="rect">
+            <a:avLst/>
+          </a:prstGeom>
+          <a:noFill/>
+        </p:spPr>
+        <p:txBody>
+          <a:bodyPr wrap="square" lIns="73152" rIns="73152" tIns="36576" bIns="36576">
+            <a:spAutoFit/>
+          </a:bodyPr>
+          <a:lstStyle/>
+          <a:p>
+            <a:pPr algn="l">
+              <a:spcAft>
+                <a:spcPts val="0"/>
+              </a:spcAft>
+              <a:defRPr sz="1700" b="1">
+                <a:solidFill>
+                  <a:srgbClr val="225B9B"/>
+                </a:solidFill>
+                <a:latin typeface="Noto Sans CJK KR"/>
+              </a:defRPr>
+            </a:pPr>
+            <a:r>
+              <a:t>2. 먼저 찾을 코드/태그</a:t>
+            </a:r>
+          </a:p>
+        </p:txBody>
+      </p:sp>
+      <p:sp>
+        <p:nvSpPr>
+          <p:cNvPr id="12" name="TextBox 11"/>
+          <p:cNvSpPr txBox="1"/>
+          <p:nvPr/>
+        </p:nvSpPr>
+        <p:spPr>
+          <a:xfrm>
+            <a:off x="6419088" y="2240280"/>
+            <a:ext cx="4846320" cy="941832"/>
+          </a:xfrm>
+          <a:prstGeom prst="rect">
+            <a:avLst/>
+          </a:prstGeom>
+          <a:noFill/>
+        </p:spPr>
+        <p:txBody>
+          <a:bodyPr wrap="square" lIns="73152" rIns="73152" tIns="36576" bIns="36576">
+            <a:spAutoFit/>
+          </a:bodyPr>
+          <a:lstStyle/>
+          <a:p>
+            <a:pPr algn="l">
+              <a:spcAft>
+                <a:spcPts val="0"/>
+              </a:spcAft>
+              <a:defRPr sz="1600" b="0">
+                <a:solidFill>
+                  <a:srgbClr val="122C4E"/>
+                </a:solidFill>
+                <a:latin typeface="Noto Sans CJK KR"/>
+              </a:defRPr>
+            </a:pPr>
+            <a:r>
+              <a:t>&lt;world&gt;, &lt;include&gt;, &lt;uri&gt;model://agv&lt;/uri&gt;, &lt;pose&gt;</a:t>
+            </a:r>
+          </a:p>
+        </p:txBody>
+      </p:sp>
+      <p:sp>
+        <p:nvSpPr>
+          <p:cNvPr id="13" name="Rounded Rectangle 12"/>
+          <p:cNvSpPr/>
+          <p:nvPr/>
+        </p:nvSpPr>
+        <p:spPr>
+          <a:xfrm>
+            <a:off x="658368" y="3813048"/>
+            <a:ext cx="5321808" cy="1764792"/>
+          </a:xfrm>
+          <a:prstGeom prst="roundRect">
+            <a:avLst/>
+          </a:prstGeom>
+          <a:solidFill>
+            <a:srgbClr val="F4F7FB"/>
+          </a:solidFill>
+          <a:ln>
+            <a:solidFill>
+              <a:srgbClr val="DB7E22"/>
+            </a:solidFill>
+          </a:ln>
+        </p:spPr>
+        <p:style>
+          <a:lnRef idx="1">
+            <a:schemeClr val="accent1"/>
+          </a:lnRef>
+          <a:fillRef idx="3">
+            <a:schemeClr val="accent1"/>
+          </a:fillRef>
+          <a:effectRef idx="2">
+            <a:schemeClr val="accent1"/>
+          </a:effectRef>
+          <a:fontRef idx="minor">
+            <a:schemeClr val="lt1"/>
+          </a:fontRef>
+        </p:style>
+        <p:txBody>
+          <a:bodyPr rtlCol="0" anchor="ctr"/>
+          <a:lstStyle/>
+          <a:p>
+            <a:pPr algn="ctr"/>
+          </a:p>
+        </p:txBody>
+      </p:sp>
+      <p:sp>
+        <p:nvSpPr>
+          <p:cNvPr id="14" name="TextBox 13"/>
+          <p:cNvSpPr txBox="1"/>
+          <p:nvPr/>
+        </p:nvSpPr>
+        <p:spPr>
+          <a:xfrm>
+            <a:off x="859536" y="3977639"/>
+            <a:ext cx="4892040" cy="265176"/>
+          </a:xfrm>
+          <a:prstGeom prst="rect">
+            <a:avLst/>
+          </a:prstGeom>
+          <a:noFill/>
+        </p:spPr>
+        <p:txBody>
+          <a:bodyPr wrap="square" lIns="73152" rIns="73152" tIns="36576" bIns="36576">
+            <a:spAutoFit/>
+          </a:bodyPr>
+          <a:lstStyle/>
+          <a:p>
+            <a:pPr algn="l">
+              <a:spcAft>
+                <a:spcPts val="0"/>
+              </a:spcAft>
+              <a:defRPr sz="1700" b="1">
+                <a:solidFill>
+                  <a:srgbClr val="DB7E22"/>
+                </a:solidFill>
+                <a:latin typeface="Noto Sans CJK KR"/>
+              </a:defRPr>
+            </a:pPr>
+            <a:r>
+              <a:t>3. 값을 바꾸면</a:t>
+            </a:r>
+          </a:p>
+        </p:txBody>
+      </p:sp>
+      <p:sp>
+        <p:nvSpPr>
+          <p:cNvPr id="15" name="TextBox 14"/>
+          <p:cNvSpPr txBox="1"/>
+          <p:nvPr/>
+        </p:nvSpPr>
+        <p:spPr>
+          <a:xfrm>
+            <a:off x="859536" y="4389120"/>
+            <a:ext cx="4846320" cy="941832"/>
+          </a:xfrm>
+          <a:prstGeom prst="rect">
+            <a:avLst/>
+          </a:prstGeom>
+          <a:noFill/>
+        </p:spPr>
+        <p:txBody>
+          <a:bodyPr wrap="square" lIns="73152" rIns="73152" tIns="36576" bIns="36576">
+            <a:spAutoFit/>
+          </a:bodyPr>
+          <a:lstStyle/>
+          <a:p>
+            <a:pPr algn="l">
+              <a:spcAft>
+                <a:spcPts val="0"/>
+              </a:spcAft>
+              <a:defRPr sz="1600" b="0">
+                <a:solidFill>
+                  <a:srgbClr val="122C4E"/>
+                </a:solidFill>
+                <a:latin typeface="Noto Sans CJK KR"/>
+              </a:defRPr>
+            </a:pPr>
+            <a:r>
+              <a:t>include pose x/y/z를 바꾸면 spawn 위치만 바뀌며 AGV 모델 파일은 바뀌지 않습니다.</a:t>
+            </a:r>
+          </a:p>
+        </p:txBody>
+      </p:sp>
+      <p:sp>
+        <p:nvSpPr>
+          <p:cNvPr id="16" name="Rounded Rectangle 15"/>
+          <p:cNvSpPr/>
+          <p:nvPr/>
+        </p:nvSpPr>
+        <p:spPr>
+          <a:xfrm>
+            <a:off x="6217920" y="3813048"/>
+            <a:ext cx="5321808" cy="1764792"/>
+          </a:xfrm>
+          <a:prstGeom prst="roundRect">
+            <a:avLst/>
+          </a:prstGeom>
+          <a:solidFill>
+            <a:srgbClr val="F4F7FB"/>
+          </a:solidFill>
+          <a:ln>
+            <a:solidFill>
+              <a:srgbClr val="BE3B3B"/>
+            </a:solidFill>
+          </a:ln>
+        </p:spPr>
+        <p:style>
+          <a:lnRef idx="1">
+            <a:schemeClr val="accent1"/>
+          </a:lnRef>
+          <a:fillRef idx="3">
+            <a:schemeClr val="accent1"/>
+          </a:fillRef>
+          <a:effectRef idx="2">
+            <a:schemeClr val="accent1"/>
+          </a:effectRef>
+          <a:fontRef idx="minor">
+            <a:schemeClr val="lt1"/>
+          </a:fontRef>
+        </p:style>
+        <p:txBody>
+          <a:bodyPr rtlCol="0" anchor="ctr"/>
+          <a:lstStyle/>
+          <a:p>
+            <a:pPr algn="ctr"/>
+          </a:p>
+        </p:txBody>
+      </p:sp>
+      <p:sp>
+        <p:nvSpPr>
+          <p:cNvPr id="17" name="TextBox 16"/>
+          <p:cNvSpPr txBox="1"/>
+          <p:nvPr/>
+        </p:nvSpPr>
+        <p:spPr>
+          <a:xfrm>
+            <a:off x="6419088" y="3977639"/>
+            <a:ext cx="4892040" cy="265176"/>
+          </a:xfrm>
+          <a:prstGeom prst="rect">
+            <a:avLst/>
+          </a:prstGeom>
+          <a:noFill/>
+        </p:spPr>
+        <p:txBody>
+          <a:bodyPr wrap="square" lIns="73152" rIns="73152" tIns="36576" bIns="36576">
+            <a:spAutoFit/>
+          </a:bodyPr>
+          <a:lstStyle/>
+          <a:p>
+            <a:pPr algn="l">
+              <a:spcAft>
+                <a:spcPts val="0"/>
+              </a:spcAft>
+              <a:defRPr sz="1700" b="1">
+                <a:solidFill>
+                  <a:srgbClr val="BE3B3B"/>
+                </a:solidFill>
+                <a:latin typeface="Noto Sans CJK KR"/>
+              </a:defRPr>
+            </a:pPr>
+            <a:r>
+              <a:t>4. 실제로 보는 곳</a:t>
+            </a:r>
+          </a:p>
+        </p:txBody>
+      </p:sp>
+      <p:sp>
+        <p:nvSpPr>
+          <p:cNvPr id="18" name="TextBox 17"/>
+          <p:cNvSpPr txBox="1"/>
+          <p:nvPr/>
+        </p:nvSpPr>
+        <p:spPr>
+          <a:xfrm>
+            <a:off x="6419088" y="4389120"/>
+            <a:ext cx="4846320" cy="941832"/>
+          </a:xfrm>
+          <a:prstGeom prst="rect">
+            <a:avLst/>
+          </a:prstGeom>
+          <a:noFill/>
+        </p:spPr>
+        <p:txBody>
+          <a:bodyPr wrap="square" lIns="73152" rIns="73152" tIns="36576" bIns="36576">
+            <a:spAutoFit/>
+          </a:bodyPr>
+          <a:lstStyle/>
+          <a:p>
+            <a:pPr algn="l">
+              <a:spcAft>
+                <a:spcPts val="0"/>
+              </a:spcAft>
+              <a:defRPr sz="1600" b="0">
+                <a:solidFill>
+                  <a:srgbClr val="122C4E"/>
+                </a:solidFill>
+                <a:latin typeface="Noto Sans CJK KR"/>
+              </a:defRPr>
+            </a:pPr>
+            <a:r>
+              <a:t>Gazebo Entity Tree에서 환경 model과 agv가 따로 보이는지 확인합니다.</a:t>
+            </a:r>
+          </a:p>
+        </p:txBody>
+      </p:sp>
+      <p:sp>
+        <p:nvSpPr>
+          <p:cNvPr id="19" name="TextBox 18"/>
+          <p:cNvSpPr txBox="1"/>
+          <p:nvPr/>
+        </p:nvSpPr>
+        <p:spPr>
+          <a:xfrm>
+            <a:off x="777240" y="6172200"/>
+            <a:ext cx="10607040" cy="201168"/>
+          </a:xfrm>
+          <a:prstGeom prst="rect">
+            <a:avLst/>
+          </a:prstGeom>
+          <a:noFill/>
+        </p:spPr>
+        <p:txBody>
+          <a:bodyPr wrap="square" lIns="73152" rIns="73152" tIns="36576" bIns="36576">
+            <a:spAutoFit/>
+          </a:bodyPr>
+          <a:lstStyle/>
+          <a:p>
+            <a:pPr algn="ctr">
+              <a:spcAft>
+                <a:spcPts val="0"/>
+              </a:spcAft>
+              <a:defRPr sz="1200" b="1">
+                <a:solidFill>
+                  <a:srgbClr val="2A8B5A"/>
+                </a:solidFill>
+                <a:latin typeface="Noto Sans CJK KR"/>
+              </a:defRPr>
+            </a:pPr>
+            <a:r>
+              <a:t>다음 코드 슬라이드에서는 위의 태그/함수를 찾아 색으로 표시하며 한 줄씩 설명합니다.</a:t>
             </a:r>
           </a:p>
         </p:txBody>

--- a/blocks/B_robot_build/M08_gazebo_world_spawn/M08_Gazebo_World와_Robot_Spawn.pptx
+++ b/blocks/B_robot_build/M08_gazebo_world_spawn/M08_Gazebo_World와_Robot_Spawn.pptx
@@ -7910,7 +7910,7 @@
               <a:spcAft>
                 <a:spcPts val="0"/>
               </a:spcAft>
-              <a:defRPr sz="1800" b="1">
+              <a:defRPr sz="1400" b="1">
                 <a:solidFill>
                   <a:srgbClr val="FFFFFF"/>
                 </a:solidFill>
@@ -7918,7 +7918,7 @@
               </a:defRPr>
             </a:pPr>
             <a:r>
-              <a:t>M08 · Block B · ROS 2 + Gazebo Sim AGV</a:t>
+              <a:t>ROS 2 기반 AGV End-to-End 개발 커리큘럼 · M08 · Block B</a:t>
             </a:r>
           </a:p>
         </p:txBody>
@@ -8128,7 +8128,7 @@
               <a:spcAft>
                 <a:spcPts val="0"/>
               </a:spcAft>
-              <a:defRPr sz="1000" b="0">
+              <a:defRPr sz="900" b="0">
                 <a:solidFill>
                   <a:srgbClr val="5C6672"/>
                 </a:solidFill>
@@ -8136,7 +8136,7 @@
               </a:defRPr>
             </a:pPr>
             <a:r>
-              <a:t>ROS 2 Jazzy · Gazebo Harmonic · M08 · 따라 하기형 AGV 실습</a:t>
+              <a:t>ROS 2 기반 AGV End-to-End 개발 커리큘럼 · M08 · Block B</a:t>
             </a:r>
           </a:p>
         </p:txBody>
@@ -8302,7 +8302,7 @@
               <a:spcAft>
                 <a:spcPts val="0"/>
               </a:spcAft>
-              <a:defRPr sz="1000" b="0">
+              <a:defRPr sz="900" b="0">
                 <a:solidFill>
                   <a:srgbClr val="5C6672"/>
                 </a:solidFill>
@@ -8310,7 +8310,7 @@
               </a:defRPr>
             </a:pPr>
             <a:r>
-              <a:t>ROS 2 Jazzy · Gazebo Harmonic · M08 · 따라 하기형 AGV 실습</a:t>
+              <a:t>ROS 2 기반 AGV End-to-End 개발 커리큘럼 · M08 · Block B</a:t>
             </a:r>
           </a:p>
         </p:txBody>
@@ -9178,7 +9178,7 @@
               <a:spcAft>
                 <a:spcPts val="0"/>
               </a:spcAft>
-              <a:defRPr sz="1000" b="0">
+              <a:defRPr sz="900" b="0">
                 <a:solidFill>
                   <a:srgbClr val="5C6672"/>
                 </a:solidFill>
@@ -9186,7 +9186,7 @@
               </a:defRPr>
             </a:pPr>
             <a:r>
-              <a:t>ROS 2 Jazzy · Gazebo Harmonic · M08 · 따라 하기형 AGV 실습</a:t>
+              <a:t>ROS 2 기반 AGV End-to-End 개발 커리큘럼 · M08 · Block B</a:t>
             </a:r>
           </a:p>
         </p:txBody>
@@ -9732,7 +9732,7 @@
               <a:spcAft>
                 <a:spcPts val="0"/>
               </a:spcAft>
-              <a:defRPr sz="1000" b="0">
+              <a:defRPr sz="900" b="0">
                 <a:solidFill>
                   <a:srgbClr val="5C6672"/>
                 </a:solidFill>
@@ -9740,7 +9740,7 @@
               </a:defRPr>
             </a:pPr>
             <a:r>
-              <a:t>ROS 2 Jazzy · Gazebo Harmonic · M08 · 따라 하기형 AGV 실습</a:t>
+              <a:t>ROS 2 기반 AGV End-to-End 개발 커리큘럼 · M08 · Block B</a:t>
             </a:r>
           </a:p>
         </p:txBody>
@@ -10495,7 +10495,7 @@
               <a:spcAft>
                 <a:spcPts val="0"/>
               </a:spcAft>
-              <a:defRPr sz="1000" b="0">
+              <a:defRPr sz="900" b="0">
                 <a:solidFill>
                   <a:srgbClr val="5C6672"/>
                 </a:solidFill>
@@ -10503,7 +10503,7 @@
               </a:defRPr>
             </a:pPr>
             <a:r>
-              <a:t>ROS 2 Jazzy · Gazebo Harmonic · M08 · 따라 하기형 AGV 실습</a:t>
+              <a:t>ROS 2 기반 AGV End-to-End 개발 커리큘럼 · M08 · Block B</a:t>
             </a:r>
           </a:p>
         </p:txBody>
@@ -11023,7 +11023,7 @@
               <a:spcAft>
                 <a:spcPts val="0"/>
               </a:spcAft>
-              <a:defRPr sz="1000" b="0">
+              <a:defRPr sz="900" b="0">
                 <a:solidFill>
                   <a:srgbClr val="5C6672"/>
                 </a:solidFill>
@@ -11031,7 +11031,7 @@
               </a:defRPr>
             </a:pPr>
             <a:r>
-              <a:t>ROS 2 Jazzy · Gazebo Harmonic · M08 · 따라 하기형 AGV 실습</a:t>
+              <a:t>ROS 2 기반 AGV End-to-End 개발 커리큘럼 · M08 · Block B</a:t>
             </a:r>
           </a:p>
         </p:txBody>
@@ -11812,7 +11812,7 @@
               <a:spcAft>
                 <a:spcPts val="0"/>
               </a:spcAft>
-              <a:defRPr sz="1000" b="0">
+              <a:defRPr sz="900" b="0">
                 <a:solidFill>
                   <a:srgbClr val="5C6672"/>
                 </a:solidFill>
@@ -11820,7 +11820,7 @@
               </a:defRPr>
             </a:pPr>
             <a:r>
-              <a:t>ROS 2 Jazzy · Gazebo Harmonic · M08 · 따라 하기형 AGV 실습</a:t>
+              <a:t>ROS 2 기반 AGV End-to-End 개발 커리큘럼 · M08 · Block B</a:t>
             </a:r>
           </a:p>
         </p:txBody>
@@ -12262,7 +12262,7 @@
               <a:spcAft>
                 <a:spcPts val="0"/>
               </a:spcAft>
-              <a:defRPr sz="1000" b="0">
+              <a:defRPr sz="900" b="0">
                 <a:solidFill>
                   <a:srgbClr val="5C6672"/>
                 </a:solidFill>
@@ -12270,7 +12270,7 @@
               </a:defRPr>
             </a:pPr>
             <a:r>
-              <a:t>ROS 2 Jazzy · Gazebo Harmonic · M08 · 따라 하기형 AGV 실습</a:t>
+              <a:t>ROS 2 기반 AGV End-to-End 개발 커리큘럼 · M08 · Block B</a:t>
             </a:r>
           </a:p>
         </p:txBody>
@@ -12790,7 +12790,7 @@
               <a:spcAft>
                 <a:spcPts val="0"/>
               </a:spcAft>
-              <a:defRPr sz="1000" b="0">
+              <a:defRPr sz="900" b="0">
                 <a:solidFill>
                   <a:srgbClr val="5C6672"/>
                 </a:solidFill>
@@ -12798,7 +12798,7 @@
               </a:defRPr>
             </a:pPr>
             <a:r>
-              <a:t>ROS 2 Jazzy · Gazebo Harmonic · M08 · 따라 하기형 AGV 실습</a:t>
+              <a:t>ROS 2 기반 AGV End-to-End 개발 커리큘럼 · M08 · Block B</a:t>
             </a:r>
           </a:p>
         </p:txBody>
@@ -13579,7 +13579,7 @@
               <a:spcAft>
                 <a:spcPts val="0"/>
               </a:spcAft>
-              <a:defRPr sz="1000" b="0">
+              <a:defRPr sz="900" b="0">
                 <a:solidFill>
                   <a:srgbClr val="5C6672"/>
                 </a:solidFill>
@@ -13587,7 +13587,7 @@
               </a:defRPr>
             </a:pPr>
             <a:r>
-              <a:t>ROS 2 Jazzy · Gazebo Harmonic · M08 · 따라 하기형 AGV 실습</a:t>
+              <a:t>ROS 2 기반 AGV End-to-End 개발 커리큘럼 · M08 · Block B</a:t>
             </a:r>
           </a:p>
         </p:txBody>
@@ -14368,7 +14368,7 @@
               <a:spcAft>
                 <a:spcPts val="0"/>
               </a:spcAft>
-              <a:defRPr sz="1000" b="0">
+              <a:defRPr sz="900" b="0">
                 <a:solidFill>
                   <a:srgbClr val="5C6672"/>
                 </a:solidFill>
@@ -14376,7 +14376,7 @@
               </a:defRPr>
             </a:pPr>
             <a:r>
-              <a:t>ROS 2 Jazzy · Gazebo Harmonic · M08 · 따라 하기형 AGV 실습</a:t>
+              <a:t>ROS 2 기반 AGV End-to-End 개발 커리큘럼 · M08 · Block B</a:t>
             </a:r>
           </a:p>
         </p:txBody>
@@ -15157,7 +15157,7 @@
               <a:spcAft>
                 <a:spcPts val="0"/>
               </a:spcAft>
-              <a:defRPr sz="1000" b="0">
+              <a:defRPr sz="900" b="0">
                 <a:solidFill>
                   <a:srgbClr val="5C6672"/>
                 </a:solidFill>
@@ -15165,7 +15165,7 @@
               </a:defRPr>
             </a:pPr>
             <a:r>
-              <a:t>ROS 2 Jazzy · Gazebo Harmonic · M08 · 따라 하기형 AGV 실습</a:t>
+              <a:t>ROS 2 기반 AGV End-to-End 개발 커리큘럼 · M08 · Block B</a:t>
             </a:r>
           </a:p>
         </p:txBody>
@@ -15618,7 +15618,7 @@
               <a:spcAft>
                 <a:spcPts val="0"/>
               </a:spcAft>
-              <a:defRPr sz="1000" b="0">
+              <a:defRPr sz="900" b="0">
                 <a:solidFill>
                   <a:srgbClr val="5C6672"/>
                 </a:solidFill>
@@ -15626,7 +15626,7 @@
               </a:defRPr>
             </a:pPr>
             <a:r>
-              <a:t>ROS 2 Jazzy · Gazebo Harmonic · M08 · 따라 하기형 AGV 실습</a:t>
+              <a:t>ROS 2 기반 AGV End-to-End 개발 커리큘럼 · M08 · Block B</a:t>
             </a:r>
           </a:p>
         </p:txBody>
@@ -16092,7 +16092,7 @@
               <a:spcAft>
                 <a:spcPts val="0"/>
               </a:spcAft>
-              <a:defRPr sz="1000" b="0">
+              <a:defRPr sz="900" b="0">
                 <a:solidFill>
                   <a:srgbClr val="5C6672"/>
                 </a:solidFill>
@@ -16100,7 +16100,7 @@
               </a:defRPr>
             </a:pPr>
             <a:r>
-              <a:t>ROS 2 Jazzy · Gazebo Harmonic · M08 · 따라 하기형 AGV 실습</a:t>
+              <a:t>ROS 2 기반 AGV End-to-End 개발 커리큘럼 · M08 · Block B</a:t>
             </a:r>
           </a:p>
         </p:txBody>
@@ -16566,7 +16566,7 @@
               <a:spcAft>
                 <a:spcPts val="0"/>
               </a:spcAft>
-              <a:defRPr sz="1000" b="0">
+              <a:defRPr sz="900" b="0">
                 <a:solidFill>
                   <a:srgbClr val="5C6672"/>
                 </a:solidFill>
@@ -16574,7 +16574,7 @@
               </a:defRPr>
             </a:pPr>
             <a:r>
-              <a:t>ROS 2 Jazzy · Gazebo Harmonic · M08 · 따라 하기형 AGV 실습</a:t>
+              <a:t>ROS 2 기반 AGV End-to-End 개발 커리큘럼 · M08 · Block B</a:t>
             </a:r>
           </a:p>
         </p:txBody>
@@ -17040,7 +17040,7 @@
               <a:spcAft>
                 <a:spcPts val="0"/>
               </a:spcAft>
-              <a:defRPr sz="1000" b="0">
+              <a:defRPr sz="900" b="0">
                 <a:solidFill>
                   <a:srgbClr val="5C6672"/>
                 </a:solidFill>
@@ -17048,7 +17048,7 @@
               </a:defRPr>
             </a:pPr>
             <a:r>
-              <a:t>ROS 2 Jazzy · Gazebo Harmonic · M08 · 따라 하기형 AGV 실습</a:t>
+              <a:t>ROS 2 기반 AGV End-to-End 개발 커리큘럼 · M08 · Block B</a:t>
             </a:r>
           </a:p>
         </p:txBody>
@@ -17514,7 +17514,7 @@
               <a:spcAft>
                 <a:spcPts val="0"/>
               </a:spcAft>
-              <a:defRPr sz="1000" b="0">
+              <a:defRPr sz="900" b="0">
                 <a:solidFill>
                   <a:srgbClr val="5C6672"/>
                 </a:solidFill>
@@ -17522,7 +17522,7 @@
               </a:defRPr>
             </a:pPr>
             <a:r>
-              <a:t>ROS 2 Jazzy · Gazebo Harmonic · M08 · 따라 하기형 AGV 실습</a:t>
+              <a:t>ROS 2 기반 AGV End-to-End 개발 커리큘럼 · M08 · Block B</a:t>
             </a:r>
           </a:p>
         </p:txBody>
@@ -17988,7 +17988,7 @@
               <a:spcAft>
                 <a:spcPts val="0"/>
               </a:spcAft>
-              <a:defRPr sz="1000" b="0">
+              <a:defRPr sz="900" b="0">
                 <a:solidFill>
                   <a:srgbClr val="5C6672"/>
                 </a:solidFill>
@@ -17996,7 +17996,7 @@
               </a:defRPr>
             </a:pPr>
             <a:r>
-              <a:t>ROS 2 Jazzy · Gazebo Harmonic · M08 · 따라 하기형 AGV 실습</a:t>
+              <a:t>ROS 2 기반 AGV End-to-End 개발 커리큘럼 · M08 · Block B</a:t>
             </a:r>
           </a:p>
         </p:txBody>
@@ -18462,7 +18462,7 @@
               <a:spcAft>
                 <a:spcPts val="0"/>
               </a:spcAft>
-              <a:defRPr sz="1000" b="0">
+              <a:defRPr sz="900" b="0">
                 <a:solidFill>
                   <a:srgbClr val="5C6672"/>
                 </a:solidFill>
@@ -18470,7 +18470,7 @@
               </a:defRPr>
             </a:pPr>
             <a:r>
-              <a:t>ROS 2 Jazzy · Gazebo Harmonic · M08 · 따라 하기형 AGV 실습</a:t>
+              <a:t>ROS 2 기반 AGV End-to-End 개발 커리큘럼 · M08 · Block B</a:t>
             </a:r>
           </a:p>
         </p:txBody>
@@ -18936,7 +18936,7 @@
               <a:spcAft>
                 <a:spcPts val="0"/>
               </a:spcAft>
-              <a:defRPr sz="1000" b="0">
+              <a:defRPr sz="900" b="0">
                 <a:solidFill>
                   <a:srgbClr val="5C6672"/>
                 </a:solidFill>
@@ -18944,7 +18944,7 @@
               </a:defRPr>
             </a:pPr>
             <a:r>
-              <a:t>ROS 2 Jazzy · Gazebo Harmonic · M08 · 따라 하기형 AGV 실습</a:t>
+              <a:t>ROS 2 기반 AGV End-to-End 개발 커리큘럼 · M08 · Block B</a:t>
             </a:r>
           </a:p>
         </p:txBody>
@@ -19410,7 +19410,7 @@
               <a:spcAft>
                 <a:spcPts val="0"/>
               </a:spcAft>
-              <a:defRPr sz="1000" b="0">
+              <a:defRPr sz="900" b="0">
                 <a:solidFill>
                   <a:srgbClr val="5C6672"/>
                 </a:solidFill>
@@ -19418,7 +19418,7 @@
               </a:defRPr>
             </a:pPr>
             <a:r>
-              <a:t>ROS 2 Jazzy · Gazebo Harmonic · M08 · 따라 하기형 AGV 실습</a:t>
+              <a:t>ROS 2 기반 AGV End-to-End 개발 커리큘럼 · M08 · Block B</a:t>
             </a:r>
           </a:p>
         </p:txBody>
@@ -19884,7 +19884,7 @@
               <a:spcAft>
                 <a:spcPts val="0"/>
               </a:spcAft>
-              <a:defRPr sz="1000" b="0">
+              <a:defRPr sz="900" b="0">
                 <a:solidFill>
                   <a:srgbClr val="5C6672"/>
                 </a:solidFill>
@@ -19892,7 +19892,7 @@
               </a:defRPr>
             </a:pPr>
             <a:r>
-              <a:t>ROS 2 Jazzy · Gazebo Harmonic · M08 · 따라 하기형 AGV 실습</a:t>
+              <a:t>ROS 2 기반 AGV End-to-End 개발 커리큘럼 · M08 · Block B</a:t>
             </a:r>
           </a:p>
         </p:txBody>
@@ -20358,7 +20358,7 @@
               <a:spcAft>
                 <a:spcPts val="0"/>
               </a:spcAft>
-              <a:defRPr sz="1000" b="0">
+              <a:defRPr sz="900" b="0">
                 <a:solidFill>
                   <a:srgbClr val="5C6672"/>
                 </a:solidFill>
@@ -20366,7 +20366,7 @@
               </a:defRPr>
             </a:pPr>
             <a:r>
-              <a:t>ROS 2 Jazzy · Gazebo Harmonic · M08 · 따라 하기형 AGV 실습</a:t>
+              <a:t>ROS 2 기반 AGV End-to-End 개발 커리큘럼 · M08 · Block B</a:t>
             </a:r>
           </a:p>
         </p:txBody>
@@ -20777,7 +20777,7 @@
               <a:spcAft>
                 <a:spcPts val="0"/>
               </a:spcAft>
-              <a:defRPr sz="1000" b="0">
+              <a:defRPr sz="900" b="0">
                 <a:solidFill>
                   <a:srgbClr val="5C6672"/>
                 </a:solidFill>
@@ -20785,7 +20785,7 @@
               </a:defRPr>
             </a:pPr>
             <a:r>
-              <a:t>ROS 2 Jazzy · Gazebo Harmonic · M08 · 따라 하기형 AGV 실습</a:t>
+              <a:t>ROS 2 기반 AGV End-to-End 개발 커리큘럼 · M08 · Block B</a:t>
             </a:r>
           </a:p>
         </p:txBody>
@@ -21215,7 +21215,7 @@
               <a:spcAft>
                 <a:spcPts val="0"/>
               </a:spcAft>
-              <a:defRPr sz="1000" b="0">
+              <a:defRPr sz="900" b="0">
                 <a:solidFill>
                   <a:srgbClr val="5C6672"/>
                 </a:solidFill>
@@ -21223,7 +21223,7 @@
               </a:defRPr>
             </a:pPr>
             <a:r>
-              <a:t>ROS 2 Jazzy · Gazebo Harmonic · M08 · 따라 하기형 AGV 실습</a:t>
+              <a:t>ROS 2 기반 AGV End-to-End 개발 커리큘럼 · M08 · Block B</a:t>
             </a:r>
           </a:p>
         </p:txBody>
@@ -21743,7 +21743,7 @@
               <a:spcAft>
                 <a:spcPts val="0"/>
               </a:spcAft>
-              <a:defRPr sz="1000" b="0">
+              <a:defRPr sz="900" b="0">
                 <a:solidFill>
                   <a:srgbClr val="5C6672"/>
                 </a:solidFill>
@@ -21751,7 +21751,7 @@
               </a:defRPr>
             </a:pPr>
             <a:r>
-              <a:t>ROS 2 Jazzy · Gazebo Harmonic · M08 · 따라 하기형 AGV 실습</a:t>
+              <a:t>ROS 2 기반 AGV End-to-End 개발 커리큘럼 · M08 · Block B</a:t>
             </a:r>
           </a:p>
         </p:txBody>
@@ -22536,7 +22536,7 @@
               <a:spcAft>
                 <a:spcPts val="0"/>
               </a:spcAft>
-              <a:defRPr sz="1000" b="0">
+              <a:defRPr sz="900" b="0">
                 <a:solidFill>
                   <a:srgbClr val="5C6672"/>
                 </a:solidFill>
@@ -22544,7 +22544,7 @@
               </a:defRPr>
             </a:pPr>
             <a:r>
-              <a:t>ROS 2 Jazzy · Gazebo Harmonic · M08 · 따라 하기형 AGV 실습</a:t>
+              <a:t>ROS 2 기반 AGV End-to-End 개발 커리큘럼 · M08 · Block B</a:t>
             </a:r>
           </a:p>
         </p:txBody>
@@ -23325,7 +23325,7 @@
               <a:spcAft>
                 <a:spcPts val="0"/>
               </a:spcAft>
-              <a:defRPr sz="1000" b="0">
+              <a:defRPr sz="900" b="0">
                 <a:solidFill>
                   <a:srgbClr val="5C6672"/>
                 </a:solidFill>
@@ -23333,7 +23333,7 @@
               </a:defRPr>
             </a:pPr>
             <a:r>
-              <a:t>ROS 2 Jazzy · Gazebo Harmonic · M08 · 따라 하기형 AGV 실습</a:t>
+              <a:t>ROS 2 기반 AGV End-to-End 개발 커리큘럼 · M08 · Block B</a:t>
             </a:r>
           </a:p>
         </p:txBody>
@@ -24114,7 +24114,7 @@
               <a:spcAft>
                 <a:spcPts val="0"/>
               </a:spcAft>
-              <a:defRPr sz="1000" b="0">
+              <a:defRPr sz="900" b="0">
                 <a:solidFill>
                   <a:srgbClr val="5C6672"/>
                 </a:solidFill>
@@ -24122,7 +24122,7 @@
               </a:defRPr>
             </a:pPr>
             <a:r>
-              <a:t>ROS 2 Jazzy · Gazebo Harmonic · M08 · 따라 하기형 AGV 실습</a:t>
+              <a:t>ROS 2 기반 AGV End-to-End 개발 커리큘럼 · M08 · Block B</a:t>
             </a:r>
           </a:p>
         </p:txBody>
@@ -24588,7 +24588,7 @@
               <a:spcAft>
                 <a:spcPts val="0"/>
               </a:spcAft>
-              <a:defRPr sz="1000" b="0">
+              <a:defRPr sz="900" b="0">
                 <a:solidFill>
                   <a:srgbClr val="5C6672"/>
                 </a:solidFill>
@@ -24596,7 +24596,7 @@
               </a:defRPr>
             </a:pPr>
             <a:r>
-              <a:t>ROS 2 Jazzy · Gazebo Harmonic · M08 · 따라 하기형 AGV 실습</a:t>
+              <a:t>ROS 2 기반 AGV End-to-End 개발 커리큘럼 · M08 · Block B</a:t>
             </a:r>
           </a:p>
         </p:txBody>
@@ -25062,7 +25062,7 @@
               <a:spcAft>
                 <a:spcPts val="0"/>
               </a:spcAft>
-              <a:defRPr sz="1000" b="0">
+              <a:defRPr sz="900" b="0">
                 <a:solidFill>
                   <a:srgbClr val="5C6672"/>
                 </a:solidFill>
@@ -25070,7 +25070,7 @@
               </a:defRPr>
             </a:pPr>
             <a:r>
-              <a:t>ROS 2 Jazzy · Gazebo Harmonic · M08 · 따라 하기형 AGV 실습</a:t>
+              <a:t>ROS 2 기반 AGV End-to-End 개발 커리큘럼 · M08 · Block B</a:t>
             </a:r>
           </a:p>
         </p:txBody>
@@ -25536,7 +25536,7 @@
               <a:spcAft>
                 <a:spcPts val="0"/>
               </a:spcAft>
-              <a:defRPr sz="1000" b="0">
+              <a:defRPr sz="900" b="0">
                 <a:solidFill>
                   <a:srgbClr val="5C6672"/>
                 </a:solidFill>
@@ -25544,7 +25544,7 @@
               </a:defRPr>
             </a:pPr>
             <a:r>
-              <a:t>ROS 2 Jazzy · Gazebo Harmonic · M08 · 따라 하기형 AGV 실습</a:t>
+              <a:t>ROS 2 기반 AGV End-to-End 개발 커리큘럼 · M08 · Block B</a:t>
             </a:r>
           </a:p>
         </p:txBody>
@@ -25978,7 +25978,7 @@
               <a:spcAft>
                 <a:spcPts val="0"/>
               </a:spcAft>
-              <a:defRPr sz="1000" b="0">
+              <a:defRPr sz="900" b="0">
                 <a:solidFill>
                   <a:srgbClr val="5C6672"/>
                 </a:solidFill>
@@ -25986,7 +25986,7 @@
               </a:defRPr>
             </a:pPr>
             <a:r>
-              <a:t>ROS 2 Jazzy · Gazebo Harmonic · M08 · 따라 하기형 AGV 실습</a:t>
+              <a:t>ROS 2 기반 AGV End-to-End 개발 커리큘럼 · M08 · Block B</a:t>
             </a:r>
           </a:p>
         </p:txBody>
@@ -26432,7 +26432,7 @@
               <a:spcAft>
                 <a:spcPts val="0"/>
               </a:spcAft>
-              <a:defRPr sz="1000" b="0">
+              <a:defRPr sz="900" b="0">
                 <a:solidFill>
                   <a:srgbClr val="5C6672"/>
                 </a:solidFill>
@@ -26440,7 +26440,7 @@
               </a:defRPr>
             </a:pPr>
             <a:r>
-              <a:t>ROS 2 Jazzy · Gazebo Harmonic · M08 · 따라 하기형 AGV 실습</a:t>
+              <a:t>ROS 2 기반 AGV End-to-End 개발 커리큘럼 · M08 · Block B</a:t>
             </a:r>
           </a:p>
         </p:txBody>
@@ -26765,7 +26765,7 @@
               <a:spcAft>
                 <a:spcPts val="0"/>
               </a:spcAft>
-              <a:defRPr sz="1000" b="0">
+              <a:defRPr sz="900" b="0">
                 <a:solidFill>
                   <a:srgbClr val="5C6672"/>
                 </a:solidFill>
@@ -26773,7 +26773,7 @@
               </a:defRPr>
             </a:pPr>
             <a:r>
-              <a:t>ROS 2 Jazzy · Gazebo Harmonic · M08 · 따라 하기형 AGV 실습</a:t>
+              <a:t>ROS 2 기반 AGV End-to-End 개발 커리큘럼 · M08 · Block B</a:t>
             </a:r>
           </a:p>
         </p:txBody>
@@ -27215,7 +27215,7 @@
               <a:spcAft>
                 <a:spcPts val="0"/>
               </a:spcAft>
-              <a:defRPr sz="1000" b="0">
+              <a:defRPr sz="900" b="0">
                 <a:solidFill>
                   <a:srgbClr val="5C6672"/>
                 </a:solidFill>
@@ -27223,7 +27223,7 @@
               </a:defRPr>
             </a:pPr>
             <a:r>
-              <a:t>ROS 2 Jazzy · Gazebo Harmonic · M08 · 따라 하기형 AGV 실습</a:t>
+              <a:t>ROS 2 기반 AGV End-to-End 개발 커리큘럼 · M08 · Block B</a:t>
             </a:r>
           </a:p>
         </p:txBody>
@@ -27587,7 +27587,7 @@
               <a:spcAft>
                 <a:spcPts val="0"/>
               </a:spcAft>
-              <a:defRPr sz="1000" b="0">
+              <a:defRPr sz="900" b="0">
                 <a:solidFill>
                   <a:srgbClr val="5C6672"/>
                 </a:solidFill>
@@ -27595,7 +27595,7 @@
               </a:defRPr>
             </a:pPr>
             <a:r>
-              <a:t>ROS 2 Jazzy · Gazebo Harmonic · M08 · 따라 하기형 AGV 실습</a:t>
+              <a:t>ROS 2 기반 AGV End-to-End 개발 커리큘럼 · M08 · Block B</a:t>
             </a:r>
           </a:p>
         </p:txBody>
@@ -27824,7 +27824,7 @@
               <a:spcAft>
                 <a:spcPts val="0"/>
               </a:spcAft>
-              <a:defRPr sz="1000" b="0">
+              <a:defRPr sz="900" b="0">
                 <a:solidFill>
                   <a:srgbClr val="5C6672"/>
                 </a:solidFill>
@@ -27832,7 +27832,7 @@
               </a:defRPr>
             </a:pPr>
             <a:r>
-              <a:t>ROS 2 Jazzy · Gazebo Harmonic · M08 · 따라 하기형 AGV 실습</a:t>
+              <a:t>ROS 2 기반 AGV End-to-End 개발 커리큘럼 · M08 · Block B</a:t>
             </a:r>
           </a:p>
         </p:txBody>
@@ -28227,7 +28227,7 @@
               <a:spcAft>
                 <a:spcPts val="0"/>
               </a:spcAft>
-              <a:defRPr sz="1000" b="0">
+              <a:defRPr sz="900" b="0">
                 <a:solidFill>
                   <a:srgbClr val="5C6672"/>
                 </a:solidFill>
@@ -28235,7 +28235,7 @@
               </a:defRPr>
             </a:pPr>
             <a:r>
-              <a:t>ROS 2 Jazzy · Gazebo Harmonic · M08 · 따라 하기형 AGV 실습</a:t>
+              <a:t>ROS 2 기반 AGV End-to-End 개발 커리큘럼 · M08 · Block B</a:t>
             </a:r>
           </a:p>
         </p:txBody>
@@ -28752,7 +28752,7 @@
               <a:spcAft>
                 <a:spcPts val="0"/>
               </a:spcAft>
-              <a:defRPr sz="1000" b="0">
+              <a:defRPr sz="900" b="0">
                 <a:solidFill>
                   <a:srgbClr val="5C6672"/>
                 </a:solidFill>
@@ -28760,7 +28760,7 @@
               </a:defRPr>
             </a:pPr>
             <a:r>
-              <a:t>ROS 2 Jazzy · Gazebo Harmonic · M08 · 따라 하기형 AGV 실습</a:t>
+              <a:t>ROS 2 기반 AGV End-to-End 개발 커리큘럼 · M08 · Block B</a:t>
             </a:r>
           </a:p>
         </p:txBody>
@@ -29136,7 +29136,7 @@
               <a:spcAft>
                 <a:spcPts val="0"/>
               </a:spcAft>
-              <a:defRPr sz="1000" b="0">
+              <a:defRPr sz="900" b="0">
                 <a:solidFill>
                   <a:srgbClr val="5C6672"/>
                 </a:solidFill>
@@ -29144,7 +29144,7 @@
               </a:defRPr>
             </a:pPr>
             <a:r>
-              <a:t>ROS 2 Jazzy · Gazebo Harmonic · M08 · 따라 하기형 AGV 실습</a:t>
+              <a:t>ROS 2 기반 AGV End-to-End 개발 커리큘럼 · M08 · Block B</a:t>
             </a:r>
           </a:p>
         </p:txBody>
@@ -29465,7 +29465,7 @@
               <a:spcAft>
                 <a:spcPts val="0"/>
               </a:spcAft>
-              <a:defRPr sz="1000" b="0">
+              <a:defRPr sz="900" b="0">
                 <a:solidFill>
                   <a:srgbClr val="5C6672"/>
                 </a:solidFill>
@@ -29473,7 +29473,7 @@
               </a:defRPr>
             </a:pPr>
             <a:r>
-              <a:t>ROS 2 Jazzy · Gazebo Harmonic · M08 · 따라 하기형 AGV 실습</a:t>
+              <a:t>ROS 2 기반 AGV End-to-End 개발 커리큘럼 · M08 · Block B</a:t>
             </a:r>
           </a:p>
         </p:txBody>
@@ -29884,7 +29884,7 @@
               <a:spcAft>
                 <a:spcPts val="0"/>
               </a:spcAft>
-              <a:defRPr sz="1000" b="0">
+              <a:defRPr sz="900" b="0">
                 <a:solidFill>
                   <a:srgbClr val="5C6672"/>
                 </a:solidFill>
@@ -29892,7 +29892,7 @@
               </a:defRPr>
             </a:pPr>
             <a:r>
-              <a:t>ROS 2 Jazzy · Gazebo Harmonic · M08 · 따라 하기형 AGV 실습</a:t>
+              <a:t>ROS 2 기반 AGV End-to-End 개발 커리큘럼 · M08 · Block B</a:t>
             </a:r>
           </a:p>
         </p:txBody>
@@ -30415,7 +30415,7 @@
               <a:spcAft>
                 <a:spcPts val="0"/>
               </a:spcAft>
-              <a:defRPr sz="1000" b="0">
+              <a:defRPr sz="900" b="0">
                 <a:solidFill>
                   <a:srgbClr val="5C6672"/>
                 </a:solidFill>
@@ -30423,7 +30423,7 @@
               </a:defRPr>
             </a:pPr>
             <a:r>
-              <a:t>ROS 2 Jazzy · Gazebo Harmonic · M08 · 따라 하기형 AGV 실습</a:t>
+              <a:t>ROS 2 기반 AGV End-to-End 개발 커리큘럼 · M08 · Block B</a:t>
             </a:r>
           </a:p>
         </p:txBody>
@@ -31055,7 +31055,7 @@
               <a:spcAft>
                 <a:spcPts val="0"/>
               </a:spcAft>
-              <a:defRPr sz="1000" b="0">
+              <a:defRPr sz="900" b="0">
                 <a:solidFill>
                   <a:srgbClr val="5C6672"/>
                 </a:solidFill>
@@ -31063,7 +31063,7 @@
               </a:defRPr>
             </a:pPr>
             <a:r>
-              <a:t>ROS 2 Jazzy · Gazebo Harmonic · M08 · 따라 하기형 AGV 실습</a:t>
+              <a:t>ROS 2 기반 AGV End-to-End 개발 커리큘럼 · M08 · Block B</a:t>
             </a:r>
           </a:p>
         </p:txBody>
@@ -31292,7 +31292,7 @@
               <a:spcAft>
                 <a:spcPts val="0"/>
               </a:spcAft>
-              <a:defRPr sz="1000" b="0">
+              <a:defRPr sz="900" b="0">
                 <a:solidFill>
                   <a:srgbClr val="5C6672"/>
                 </a:solidFill>
@@ -31300,7 +31300,7 @@
               </a:defRPr>
             </a:pPr>
             <a:r>
-              <a:t>ROS 2 Jazzy · Gazebo Harmonic · M08 · 따라 하기형 AGV 실습</a:t>
+              <a:t>ROS 2 기반 AGV End-to-End 개발 커리큘럼 · M08 · Block B</a:t>
             </a:r>
           </a:p>
         </p:txBody>
@@ -31529,7 +31529,7 @@
               <a:spcAft>
                 <a:spcPts val="0"/>
               </a:spcAft>
-              <a:defRPr sz="1000" b="0">
+              <a:defRPr sz="900" b="0">
                 <a:solidFill>
                   <a:srgbClr val="5C6672"/>
                 </a:solidFill>
@@ -31537,7 +31537,7 @@
               </a:defRPr>
             </a:pPr>
             <a:r>
-              <a:t>ROS 2 Jazzy · Gazebo Harmonic · M08 · 따라 하기형 AGV 실습</a:t>
+              <a:t>ROS 2 기반 AGV End-to-End 개발 커리큘럼 · M08 · Block B</a:t>
             </a:r>
           </a:p>
         </p:txBody>
@@ -31990,7 +31990,7 @@
               <a:spcAft>
                 <a:spcPts val="0"/>
               </a:spcAft>
-              <a:defRPr sz="1000" b="0">
+              <a:defRPr sz="900" b="0">
                 <a:solidFill>
                   <a:srgbClr val="5C6672"/>
                 </a:solidFill>
@@ -31998,7 +31998,7 @@
               </a:defRPr>
             </a:pPr>
             <a:r>
-              <a:t>ROS 2 Jazzy · Gazebo Harmonic · M08 · 따라 하기형 AGV 실습</a:t>
+              <a:t>ROS 2 기반 AGV End-to-End 개발 커리큘럼 · M08 · Block B</a:t>
             </a:r>
           </a:p>
         </p:txBody>

--- a/blocks/B_robot_build/M08_gazebo_world_spawn/M08_Gazebo_World와_Robot_Spawn.pptx
+++ b/blocks/B_robot_build/M08_gazebo_world_spawn/M08_Gazebo_World와_Robot_Spawn.pptx
@@ -53,6 +53,8 @@
     <p:sldId id="301" r:id="rId53"/>
     <p:sldId id="302" r:id="rId54"/>
     <p:sldId id="303" r:id="rId55"/>
+    <p:sldId id="304" r:id="rId56"/>
+    <p:sldId id="305" r:id="rId57"/>
   </p:sldIdLst>
   <p:sldSz cx="12191999" cy="6858000" type="screen4x3"/>
   <p:notesSz cx="6858000" cy="9144000"/>
@@ -3834,7 +3836,7 @@
           </a:p>
           <a:p>
             <a:r>
-              <a:t>[확인] ① 명령/설정  ② 정상 출력 또는 화면  ③ 다음 검증 명령으로 재확인</a:t>
+              <a:t>[확인] warehouse_m08, model://agv, pose 세 항목을 순서대로 찾습니다.</a:t>
             </a:r>
           </a:p>
           <a:p>
@@ -3914,22 +3916,17 @@
           <a:lstStyle/>
           <a:p>
             <a:r>
-              <a:t>[설명] 검증 명령은 GUI 결과와 별도로 실행해 재현 가능한 완료 기준을 만든다.</a:t>
-            </a:r>
-          </a:p>
-          <a:p>
-            <a:r>
-              <a:t>[실행] gz sdf -k ~/ros2_curri/my_agv_ws/src/agv_description/curriculum_stages/M08/model.sdf</a:t>
-            </a:r>
-          </a:p>
-          <a:p>
-            <a:r>
-              <a:t>rg -n '&lt;sensor|DiffDrive|/cmd_vel|/odom' ~/ros2_curri/my_agv_ws/src/agv_description/curriculum_stages/M08/model.sdf</a:t>
-            </a:r>
-          </a:p>
-          <a:p>
-            <a:r>
-              <a:t>[확인] ground·벽·박스가 있는 World에 AGV가 spawn되어 있는 Gazebo 화면을 확인한다.</a:t>
+              <a:t>[설명] 실제 Ubuntu/ROS 2 환경에서 생성한 검증 화면이다.</a:t>
+            </a:r>
+          </a:p>
+          <a:p>
+            <a:r>
+              <a:t>[실행] 슬라이드의 명령 또는 파일 작성 단계를 진행한다.</a:t>
+            </a:r>
+          </a:p>
+          <a:p>
+            <a:r>
+              <a:t>[확인] 오른쪽 Entity Tree에서 ground·wall·target·agv가 따로 생성됐는지, 왼쪽 World에 파란 AGV가 놓였는지 확인합니다.</a:t>
             </a:r>
           </a:p>
           <a:p>
@@ -4009,7 +4006,7 @@
           <a:lstStyle/>
           <a:p>
             <a:r>
-              <a:t>[설명] 오류를 대신 해결하지 말고 증상부터 우선 확인 순서대로 교육생이 실행하게 한다.</a:t>
+              <a:t>[설명] 실제 Ubuntu/ROS 2 환경에서 생성한 검증 화면이다.</a:t>
             </a:r>
           </a:p>
           <a:p>
@@ -4019,7 +4016,7 @@
           </a:p>
           <a:p>
             <a:r>
-              <a:t>[확인] 수정 뒤 첫 검증 명령을 다시 실행한다.</a:t>
+              <a:t>[확인] ① 명령/설정  ② 정상 출력 또는 화면  ③ 다음 검증 명령으로 재확인</a:t>
             </a:r>
           </a:p>
           <a:p>
@@ -4029,7 +4026,7 @@
           </a:p>
           <a:p>
             <a:r>
-              <a:t>[오류] 슬라이드의 두 대표 오류를 먼저 사용한다.</a:t>
+              <a:t>[오류] 오류가 나면 현재 폴더, source, 파일 경로를 먼저 확인한다.</a:t>
             </a:r>
           </a:p>
         </p:txBody>
@@ -4099,37 +4096,22 @@
           <a:lstStyle/>
           <a:p>
             <a:r>
-              <a:t>[설명] Complete는 정답 복사본이 아니라 막혔을 때 비교·복구하는 안전망이다.</a:t>
-            </a:r>
-          </a:p>
-          <a:p>
-            <a:r>
-              <a:t>[실행] cd ~/ros2_curri</a:t>
-            </a:r>
-          </a:p>
-          <a:p>
-            <a:r>
-              <a:t>diff -ru my_agv_ws/src blocks/B_robot_build/M08_gazebo_world_spawn/complete/agv_ws/src || true</a:t>
-            </a:r>
-          </a:p>
-          <a:p>
-            <a:r>
-              <a:t>cp -a my_agv_ws/src my_agv_ws/src_before_M08</a:t>
-            </a:r>
-          </a:p>
-          <a:p>
-            <a:r>
-              <a:t>cp -a blocks/B_robot_build/M08_gazebo_world_spawn/complete/agv_ws/src/. my_agv_ws/src/</a:t>
-            </a:r>
-          </a:p>
-          <a:p>
-            <a:r>
-              <a:t>cd my_agv_ws &amp;&amp; colcon build --symlink-install &amp;&amp; source install/setup.bash</a:t>
-            </a:r>
-          </a:p>
-          <a:p>
-            <a:r>
-              <a:t>[확인] diff에서 내 파일과 Complete의 차이를 설명할 수 있다.</a:t>
+              <a:t>[설명] 검증 명령은 GUI 결과와 별도로 실행해 재현 가능한 완료 기준을 만든다.</a:t>
+            </a:r>
+          </a:p>
+          <a:p>
+            <a:r>
+              <a:t>[실행] gz sdf -k ~/ros2_curri/my_agv_ws/src/agv_description/curriculum_stages/M08/model.sdf</a:t>
+            </a:r>
+          </a:p>
+          <a:p>
+            <a:r>
+              <a:t>rg -n '&lt;sensor|DiffDrive|/cmd_vel|/odom' ~/ros2_curri/my_agv_ws/src/agv_description/curriculum_stages/M08/model.sdf</a:t>
+            </a:r>
+          </a:p>
+          <a:p>
+            <a:r>
+              <a:t>[확인] ground·벽·박스가 있는 World에 AGV가 spawn되어 있는 Gazebo 화면을 확인한다.</a:t>
             </a:r>
           </a:p>
           <a:p>
@@ -4209,7 +4191,7 @@
           <a:lstStyle/>
           <a:p>
             <a:r>
-              <a:t>[설명] 교육생이 직접 한 값만 바꿔 원인과 결과를 연결하게 한다.</a:t>
+              <a:t>[설명] 오류를 대신 해결하지 말고 증상부터 우선 확인 순서대로 교육생이 실행하게 한다.</a:t>
             </a:r>
           </a:p>
           <a:p>
@@ -4219,7 +4201,7 @@
           </a:p>
           <a:p>
             <a:r>
-              <a:t>[확인] 원래 값과 변경 값을 모두 기록한다.</a:t>
+              <a:t>[확인] 수정 뒤 첫 검증 명령을 다시 실행한다.</a:t>
             </a:r>
           </a:p>
           <a:p>
@@ -4229,7 +4211,7 @@
           </a:p>
           <a:p>
             <a:r>
-              <a:t>[오류] 오류가 나면 현재 폴더, source, 파일 경로를 먼저 확인한다.</a:t>
+              <a:t>[오류] 슬라이드의 두 대표 오류를 먼저 사용한다.</a:t>
             </a:r>
           </a:p>
         </p:txBody>
@@ -4299,17 +4281,37 @@
           <a:lstStyle/>
           <a:p>
             <a:r>
-              <a:t>[설명] 교육생이 자신의 workspace·캡처·로그를 저장했는지 확인하고 다음 모듈의 시작 상태를 읽는다.</a:t>
-            </a:r>
-          </a:p>
-          <a:p>
-            <a:r>
-              <a:t>[실행] 슬라이드의 명령 또는 파일 작성 단계를 진행한다.</a:t>
-            </a:r>
-          </a:p>
-          <a:p>
-            <a:r>
-              <a:t>[확인] M09 Differential Drive 시작 조건을 말할 수 있다.</a:t>
+              <a:t>[설명] Complete는 정답 복사본이 아니라 막혔을 때 비교·복구하는 안전망이다.</a:t>
+            </a:r>
+          </a:p>
+          <a:p>
+            <a:r>
+              <a:t>[실행] cd ~/ros2_curri</a:t>
+            </a:r>
+          </a:p>
+          <a:p>
+            <a:r>
+              <a:t>diff -ru my_agv_ws/src blocks/B_robot_build/M08_gazebo_world_spawn/complete/agv_ws/src || true</a:t>
+            </a:r>
+          </a:p>
+          <a:p>
+            <a:r>
+              <a:t>cp -a my_agv_ws/src my_agv_ws/src_before_M08</a:t>
+            </a:r>
+          </a:p>
+          <a:p>
+            <a:r>
+              <a:t>cp -a blocks/B_robot_build/M08_gazebo_world_spawn/complete/agv_ws/src/. my_agv_ws/src/</a:t>
+            </a:r>
+          </a:p>
+          <a:p>
+            <a:r>
+              <a:t>cd my_agv_ws &amp;&amp; colcon build --symlink-install &amp;&amp; source install/setup.bash</a:t>
+            </a:r>
+          </a:p>
+          <a:p>
+            <a:r>
+              <a:t>[확인] diff에서 내 파일과 Complete의 차이를 설명할 수 있다.</a:t>
             </a:r>
           </a:p>
           <a:p>
@@ -4389,7 +4391,7 @@
           <a:lstStyle/>
           <a:p>
             <a:r>
-              <a:t>[설명] 공식 문서는 버전 차이와 확장 학습을 확인할 때 사용한다.</a:t>
+              <a:t>[설명] 교육생이 직접 한 값만 바꿔 원인과 결과를 연결하게 한다.</a:t>
             </a:r>
           </a:p>
           <a:p>
@@ -4399,7 +4401,97 @@
           </a:p>
           <a:p>
             <a:r>
-              <a:t>[확인] 학습자는 본문만으로 현재 모듈을 완료한 상태여야 한다.</a:t>
+              <a:t>[확인] 원래 값과 변경 값을 모두 기록한다.</a:t>
+            </a:r>
+          </a:p>
+          <a:p>
+            <a:r>
+              <a:t>[멈춤] 교육생이 현재 체크포인트를 통과할 때까지 기다린다.</a:t>
+            </a:r>
+          </a:p>
+          <a:p>
+            <a:r>
+              <a:t>[오류] 오류가 나면 현재 폴더, source, 파일 경로를 먼저 확인한다.</a:t>
+            </a:r>
+          </a:p>
+        </p:txBody>
+      </p:sp>
+      <p:sp>
+        <p:nvSpPr>
+          <p:cNvPr id="4" name="Slide Number Placeholder 3"/>
+          <p:cNvSpPr>
+            <a:spLocks noGrp="1"/>
+          </p:cNvSpPr>
+          <p:nvPr>
+            <p:ph type="sldNum" idx="5" sz="quarter"/>
+          </p:nvPr>
+        </p:nvSpPr>
+        <p:spPr/>
+      </p:sp>
+    </p:spTree>
+  </p:cSld>
+  <p:clrMapOvr>
+    <a:masterClrMapping/>
+  </p:clrMapOvr>
+</p:notes>
+</file>
+
+<file path=ppt/notesSlides/notesSlide49.xml><?xml version="1.0" encoding="utf-8"?>
+<p:notes xmlns:a="http://schemas.openxmlformats.org/drawingml/2006/main" xmlns:p="http://schemas.openxmlformats.org/presentationml/2006/main" xmlns:r="http://schemas.openxmlformats.org/officeDocument/2006/relationships">
+  <p:cSld>
+    <p:spTree>
+      <p:nvGrpSpPr>
+        <p:cNvPr id="1" name=""/>
+        <p:cNvGrpSpPr/>
+        <p:nvPr/>
+      </p:nvGrpSpPr>
+      <p:grpSpPr>
+        <a:xfrm>
+          <a:off x="0" y="0"/>
+          <a:ext cx="0" cy="0"/>
+          <a:chOff x="0" y="0"/>
+          <a:chExt cx="0" cy="0"/>
+        </a:xfrm>
+      </p:grpSpPr>
+      <p:sp>
+        <p:nvSpPr>
+          <p:cNvPr id="2" name="Slide Image Placeholder 1"/>
+          <p:cNvSpPr>
+            <a:spLocks noGrp="1"/>
+          </p:cNvSpPr>
+          <p:nvPr>
+            <p:ph type="sldImg" idx="2"/>
+          </p:nvPr>
+        </p:nvSpPr>
+        <p:spPr/>
+      </p:sp>
+      <p:sp>
+        <p:nvSpPr>
+          <p:cNvPr id="3" name="Notes Placeholder 2"/>
+          <p:cNvSpPr>
+            <a:spLocks noGrp="1"/>
+          </p:cNvSpPr>
+          <p:nvPr>
+            <p:ph type="body" idx="3" sz="quarter"/>
+          </p:nvPr>
+        </p:nvSpPr>
+        <p:spPr/>
+        <p:txBody>
+          <a:bodyPr/>
+          <a:lstStyle/>
+          <a:p>
+            <a:r>
+              <a:t>[설명] 교육생이 자신의 workspace·캡처·로그를 저장했는지 확인하고 다음 모듈의 시작 상태를 읽는다.</a:t>
+            </a:r>
+          </a:p>
+          <a:p>
+            <a:r>
+              <a:t>[실행] 슬라이드의 명령 또는 파일 작성 단계를 진행한다.</a:t>
+            </a:r>
+          </a:p>
+          <a:p>
+            <a:r>
+              <a:t>[확인] M09 Differential Drive 시작 조건을 말할 수 있다.</a:t>
             </a:r>
           </a:p>
           <a:p>
@@ -4524,6 +4616,96 @@
 </p:notes>
 </file>
 
+<file path=ppt/notesSlides/notesSlide50.xml><?xml version="1.0" encoding="utf-8"?>
+<p:notes xmlns:a="http://schemas.openxmlformats.org/drawingml/2006/main" xmlns:p="http://schemas.openxmlformats.org/presentationml/2006/main" xmlns:r="http://schemas.openxmlformats.org/officeDocument/2006/relationships">
+  <p:cSld>
+    <p:spTree>
+      <p:nvGrpSpPr>
+        <p:cNvPr id="1" name=""/>
+        <p:cNvGrpSpPr/>
+        <p:nvPr/>
+      </p:nvGrpSpPr>
+      <p:grpSpPr>
+        <a:xfrm>
+          <a:off x="0" y="0"/>
+          <a:ext cx="0" cy="0"/>
+          <a:chOff x="0" y="0"/>
+          <a:chExt cx="0" cy="0"/>
+        </a:xfrm>
+      </p:grpSpPr>
+      <p:sp>
+        <p:nvSpPr>
+          <p:cNvPr id="2" name="Slide Image Placeholder 1"/>
+          <p:cNvSpPr>
+            <a:spLocks noGrp="1"/>
+          </p:cNvSpPr>
+          <p:nvPr>
+            <p:ph type="sldImg" idx="2"/>
+          </p:nvPr>
+        </p:nvSpPr>
+        <p:spPr/>
+      </p:sp>
+      <p:sp>
+        <p:nvSpPr>
+          <p:cNvPr id="3" name="Notes Placeholder 2"/>
+          <p:cNvSpPr>
+            <a:spLocks noGrp="1"/>
+          </p:cNvSpPr>
+          <p:nvPr>
+            <p:ph type="body" idx="3" sz="quarter"/>
+          </p:nvPr>
+        </p:nvSpPr>
+        <p:spPr/>
+        <p:txBody>
+          <a:bodyPr/>
+          <a:lstStyle/>
+          <a:p>
+            <a:r>
+              <a:t>[설명] 공식 문서는 버전 차이와 확장 학습을 확인할 때 사용한다.</a:t>
+            </a:r>
+          </a:p>
+          <a:p>
+            <a:r>
+              <a:t>[실행] 슬라이드의 명령 또는 파일 작성 단계를 진행한다.</a:t>
+            </a:r>
+          </a:p>
+          <a:p>
+            <a:r>
+              <a:t>[확인] 학습자는 본문만으로 현재 모듈을 완료한 상태여야 한다.</a:t>
+            </a:r>
+          </a:p>
+          <a:p>
+            <a:r>
+              <a:t>[멈춤] 교육생이 현재 체크포인트를 통과할 때까지 기다린다.</a:t>
+            </a:r>
+          </a:p>
+          <a:p>
+            <a:r>
+              <a:t>[오류] 오류가 나면 현재 폴더, source, 파일 경로를 먼저 확인한다.</a:t>
+            </a:r>
+          </a:p>
+        </p:txBody>
+      </p:sp>
+      <p:sp>
+        <p:nvSpPr>
+          <p:cNvPr id="4" name="Slide Number Placeholder 3"/>
+          <p:cNvSpPr>
+            <a:spLocks noGrp="1"/>
+          </p:cNvSpPr>
+          <p:nvPr>
+            <p:ph type="sldNum" idx="5" sz="quarter"/>
+          </p:nvPr>
+        </p:nvSpPr>
+        <p:spPr/>
+      </p:sp>
+    </p:spTree>
+  </p:cSld>
+  <p:clrMapOvr>
+    <a:masterClrMapping/>
+  </p:clrMapOvr>
+</p:notes>
+</file>
+
 <file path=ppt/notesSlides/notesSlide6.xml><?xml version="1.0" encoding="utf-8"?>
 <p:notes xmlns:a="http://schemas.openxmlformats.org/drawingml/2006/main" xmlns:p="http://schemas.openxmlformats.org/presentationml/2006/main" xmlns:r="http://schemas.openxmlformats.org/officeDocument/2006/relationships">
   <p:cSld>
@@ -4669,7 +4851,7 @@
           </a:p>
           <a:p>
             <a:r>
-              <a:t>[확인] 오른쪽 Entity Tree에서 ground·wall·target·agv가 따로 생성됐는지 확인합니다.</a:t>
+              <a:t>[확인] 오른쪽 Entity Tree에서 ground·wall·target·agv가 따로 생성됐는지, 왼쪽 World에 파란 AGV가 놓였는지 확인합니다.</a:t>
             </a:r>
           </a:p>
           <a:p>
@@ -10799,7 +10981,7 @@
           </a:fontRef>
         </p:style>
         <p:txBody>
-          <a:bodyPr rtlCol="0" anchor="ctr" wrap="square" lIns="73152" rIns="73152" tIns="36576" bIns="36576"/>
+          <a:bodyPr rtlCol="0" anchor="ctr" wrap="square" lIns="109728" rIns="109728" tIns="73152" bIns="73152"/>
           <a:lstStyle/>
           <a:p>
             <a:pPr algn="l">
@@ -10816,7 +10998,19 @@
             <a:r>
               <a:t>mkdir -p ~/ros2_curri/my_agv_ws/src/agv_description/curriculum_stages/M08</a:t>
             </a:r>
-            <a:br/>
+          </a:p>
+          <a:p>
+            <a:pPr algn="l">
+              <a:spcAft>
+                <a:spcPts val="0"/>
+              </a:spcAft>
+              <a:defRPr sz="1600" b="0">
+                <a:solidFill>
+                  <a:srgbClr val="FFFFFF"/>
+                </a:solidFill>
+                <a:latin typeface="DejaVu Sans Mono"/>
+              </a:defRPr>
+            </a:pPr>
             <a:r>
               <a:t>nano ~/ros2_curri/my_agv_ws/src/agv_description/curriculum_stages/M08/model.config</a:t>
             </a:r>
@@ -12061,7 +12255,7 @@
           </a:fontRef>
         </p:style>
         <p:txBody>
-          <a:bodyPr rtlCol="0" anchor="ctr" wrap="square" lIns="164592" rIns="164592" tIns="109728" bIns="36576"/>
+          <a:bodyPr rtlCol="0" anchor="ctr" wrap="square" lIns="164592" rIns="164592" tIns="109728" bIns="73152"/>
           <a:lstStyle/>
           <a:p>
             <a:pPr algn="l">
@@ -12078,23 +12272,83 @@
             <a:r>
               <a:t>&lt;?xml version="1.0" ?&gt;</a:t>
             </a:r>
-            <a:br/>
+          </a:p>
+          <a:p>
+            <a:pPr algn="l">
+              <a:spcAft>
+                <a:spcPts val="0"/>
+              </a:spcAft>
+              <a:defRPr sz="1400" b="0">
+                <a:solidFill>
+                  <a:srgbClr val="FFFFFF"/>
+                </a:solidFill>
+                <a:latin typeface="DejaVu Sans Mono"/>
+              </a:defRPr>
+            </a:pPr>
             <a:r>
               <a:t>&lt;model&gt;</a:t>
             </a:r>
-            <a:br/>
+          </a:p>
+          <a:p>
+            <a:pPr algn="l">
+              <a:spcAft>
+                <a:spcPts val="0"/>
+              </a:spcAft>
+              <a:defRPr sz="1400" b="0">
+                <a:solidFill>
+                  <a:srgbClr val="FFFFFF"/>
+                </a:solidFill>
+                <a:latin typeface="DejaVu Sans Mono"/>
+              </a:defRPr>
+            </a:pPr>
             <a:r>
               <a:t>  &lt;name&gt;agv&lt;/name&gt;</a:t>
             </a:r>
-            <a:br/>
+          </a:p>
+          <a:p>
+            <a:pPr algn="l">
+              <a:spcAft>
+                <a:spcPts val="0"/>
+              </a:spcAft>
+              <a:defRPr sz="1400" b="0">
+                <a:solidFill>
+                  <a:srgbClr val="FFFFFF"/>
+                </a:solidFill>
+                <a:latin typeface="DejaVu Sans Mono"/>
+              </a:defRPr>
+            </a:pPr>
             <a:r>
               <a:t>  &lt;version&gt;1.0&lt;/version&gt;</a:t>
             </a:r>
-            <a:br/>
+          </a:p>
+          <a:p>
+            <a:pPr algn="l">
+              <a:spcAft>
+                <a:spcPts val="0"/>
+              </a:spcAft>
+              <a:defRPr sz="1400" b="0">
+                <a:solidFill>
+                  <a:srgbClr val="FFFFFF"/>
+                </a:solidFill>
+                <a:latin typeface="DejaVu Sans Mono"/>
+              </a:defRPr>
+            </a:pPr>
             <a:r>
               <a:t>  &lt;sdf version="1.10"&gt;model.sdf&lt;/sdf&gt;</a:t>
             </a:r>
-            <a:br/>
+          </a:p>
+          <a:p>
+            <a:pPr algn="l">
+              <a:spcAft>
+                <a:spcPts val="0"/>
+              </a:spcAft>
+              <a:defRPr sz="1400" b="0">
+                <a:solidFill>
+                  <a:srgbClr val="FFFFFF"/>
+                </a:solidFill>
+                <a:latin typeface="DejaVu Sans Mono"/>
+              </a:defRPr>
+            </a:pPr>
             <a:r>
               <a:t>&lt;/model&gt;</a:t>
             </a:r>
@@ -12566,7 +12820,7 @@
           </a:fontRef>
         </p:style>
         <p:txBody>
-          <a:bodyPr rtlCol="0" anchor="ctr" wrap="square" lIns="73152" rIns="73152" tIns="36576" bIns="36576"/>
+          <a:bodyPr rtlCol="0" anchor="ctr" wrap="square" lIns="109728" rIns="109728" tIns="73152" bIns="73152"/>
           <a:lstStyle/>
           <a:p>
             <a:pPr algn="l">
@@ -12583,7 +12837,19 @@
             <a:r>
               <a:t>mkdir -p ~/ros2_curri/my_agv_ws/src/agv_description/curriculum_stages/M08</a:t>
             </a:r>
-            <a:br/>
+          </a:p>
+          <a:p>
+            <a:pPr algn="l">
+              <a:spcAft>
+                <a:spcPts val="0"/>
+              </a:spcAft>
+              <a:defRPr sz="1600" b="0">
+                <a:solidFill>
+                  <a:srgbClr val="FFFFFF"/>
+                </a:solidFill>
+                <a:latin typeface="DejaVu Sans Mono"/>
+              </a:defRPr>
+            </a:pPr>
             <a:r>
               <a:t>nano ~/ros2_curri/my_agv_ws/src/agv_description/curriculum_stages/M08/model.sdf</a:t>
             </a:r>
@@ -15867,7 +16133,7 @@
           </a:fontRef>
         </p:style>
         <p:txBody>
-          <a:bodyPr rtlCol="0" anchor="ctr" wrap="square" lIns="164592" rIns="164592" tIns="109728" bIns="36576"/>
+          <a:bodyPr rtlCol="0" anchor="ctr" wrap="square" lIns="164592" rIns="164592" tIns="109728" bIns="73152"/>
           <a:lstStyle/>
           <a:p>
             <a:pPr algn="l">
@@ -15884,47 +16150,179 @@
             <a:r>
               <a:t>&lt;?xml version="1.0" ?&gt;</a:t>
             </a:r>
-            <a:br/>
+          </a:p>
+          <a:p>
+            <a:pPr algn="l">
+              <a:spcAft>
+                <a:spcPts val="0"/>
+              </a:spcAft>
+              <a:defRPr sz="1400" b="0">
+                <a:solidFill>
+                  <a:srgbClr val="FFFFFF"/>
+                </a:solidFill>
+                <a:latin typeface="DejaVu Sans Mono"/>
+              </a:defRPr>
+            </a:pPr>
             <a:r>
               <a:t>&lt;!-- M08 spawn snapshot: physical links only; no DiffDrive and no Camera/LiDAR/IMU. --&gt;</a:t>
             </a:r>
-            <a:br/>
+          </a:p>
+          <a:p>
+            <a:pPr algn="l">
+              <a:spcAft>
+                <a:spcPts val="0"/>
+              </a:spcAft>
+              <a:defRPr sz="1400" b="0">
+                <a:solidFill>
+                  <a:srgbClr val="FFFFFF"/>
+                </a:solidFill>
+                <a:latin typeface="DejaVu Sans Mono"/>
+              </a:defRPr>
+            </a:pPr>
             <a:r>
               <a:t>&lt;sdf version="1.10"&gt;</a:t>
             </a:r>
-            <a:br/>
+          </a:p>
+          <a:p>
+            <a:pPr algn="l">
+              <a:spcAft>
+                <a:spcPts val="0"/>
+              </a:spcAft>
+              <a:defRPr sz="1400" b="0">
+                <a:solidFill>
+                  <a:srgbClr val="FFFFFF"/>
+                </a:solidFill>
+                <a:latin typeface="DejaVu Sans Mono"/>
+              </a:defRPr>
+            </a:pPr>
             <a:r>
               <a:t>  &lt;model name="agv"&gt;</a:t>
             </a:r>
-            <a:br/>
+          </a:p>
+          <a:p>
+            <a:pPr algn="l">
+              <a:spcAft>
+                <a:spcPts val="0"/>
+              </a:spcAft>
+              <a:defRPr sz="1400" b="0">
+                <a:solidFill>
+                  <a:srgbClr val="FFFFFF"/>
+                </a:solidFill>
+                <a:latin typeface="DejaVu Sans Mono"/>
+              </a:defRPr>
+            </a:pPr>
             <a:r>
               <a:t>    &lt;link name="base_link"&gt;</a:t>
             </a:r>
-            <a:br/>
+          </a:p>
+          <a:p>
+            <a:pPr algn="l">
+              <a:spcAft>
+                <a:spcPts val="0"/>
+              </a:spcAft>
+              <a:defRPr sz="1400" b="0">
+                <a:solidFill>
+                  <a:srgbClr val="FFFFFF"/>
+                </a:solidFill>
+                <a:latin typeface="DejaVu Sans Mono"/>
+              </a:defRPr>
+            </a:pPr>
             <a:r>
               <a:t>      &lt;pose&gt;0 0 0.16 0 0 0&lt;/pose&gt;</a:t>
             </a:r>
-            <a:br/>
+          </a:p>
+          <a:p>
+            <a:pPr algn="l">
+              <a:spcAft>
+                <a:spcPts val="0"/>
+              </a:spcAft>
+              <a:defRPr sz="1400" b="0">
+                <a:solidFill>
+                  <a:srgbClr val="FFFFFF"/>
+                </a:solidFill>
+                <a:latin typeface="DejaVu Sans Mono"/>
+              </a:defRPr>
+            </a:pPr>
             <a:r>
               <a:t>      &lt;inertial&gt;</a:t>
             </a:r>
-            <a:br/>
+          </a:p>
+          <a:p>
+            <a:pPr algn="l">
+              <a:spcAft>
+                <a:spcPts val="0"/>
+              </a:spcAft>
+              <a:defRPr sz="1400" b="0">
+                <a:solidFill>
+                  <a:srgbClr val="FFFFFF"/>
+                </a:solidFill>
+                <a:latin typeface="DejaVu Sans Mono"/>
+              </a:defRPr>
+            </a:pPr>
             <a:r>
               <a:t>        &lt;mass&gt;12.0&lt;/mass&gt;</a:t>
             </a:r>
-            <a:br/>
+          </a:p>
+          <a:p>
+            <a:pPr algn="l">
+              <a:spcAft>
+                <a:spcPts val="0"/>
+              </a:spcAft>
+              <a:defRPr sz="1400" b="0">
+                <a:solidFill>
+                  <a:srgbClr val="FFFFFF"/>
+                </a:solidFill>
+                <a:latin typeface="DejaVu Sans Mono"/>
+              </a:defRPr>
+            </a:pPr>
             <a:r>
               <a:t>        &lt;inertia&gt;</a:t>
             </a:r>
-            <a:br/>
+          </a:p>
+          <a:p>
+            <a:pPr algn="l">
+              <a:spcAft>
+                <a:spcPts val="0"/>
+              </a:spcAft>
+              <a:defRPr sz="1400" b="0">
+                <a:solidFill>
+                  <a:srgbClr val="FFFFFF"/>
+                </a:solidFill>
+                <a:latin typeface="DejaVu Sans Mono"/>
+              </a:defRPr>
+            </a:pPr>
             <a:r>
               <a:t>          &lt;ixx&gt;0.20&lt;/ixx&gt;</a:t>
             </a:r>
-            <a:br/>
+          </a:p>
+          <a:p>
+            <a:pPr algn="l">
+              <a:spcAft>
+                <a:spcPts val="0"/>
+              </a:spcAft>
+              <a:defRPr sz="1400" b="0">
+                <a:solidFill>
+                  <a:srgbClr val="FFFFFF"/>
+                </a:solidFill>
+                <a:latin typeface="DejaVu Sans Mono"/>
+              </a:defRPr>
+            </a:pPr>
             <a:r>
               <a:t>          &lt;iyy&gt;0.40&lt;/iyy&gt;</a:t>
             </a:r>
-            <a:br/>
+          </a:p>
+          <a:p>
+            <a:pPr algn="l">
+              <a:spcAft>
+                <a:spcPts val="0"/>
+              </a:spcAft>
+              <a:defRPr sz="1400" b="0">
+                <a:solidFill>
+                  <a:srgbClr val="FFFFFF"/>
+                </a:solidFill>
+                <a:latin typeface="DejaVu Sans Mono"/>
+              </a:defRPr>
+            </a:pPr>
             <a:r>
               <a:t>          &lt;izz&gt;0.50&lt;/izz&gt;</a:t>
             </a:r>
@@ -16341,7 +16739,7 @@
           </a:fontRef>
         </p:style>
         <p:txBody>
-          <a:bodyPr rtlCol="0" anchor="ctr" wrap="square" lIns="164592" rIns="164592" tIns="109728" bIns="36576"/>
+          <a:bodyPr rtlCol="0" anchor="ctr" wrap="square" lIns="164592" rIns="164592" tIns="109728" bIns="73152"/>
           <a:lstStyle/>
           <a:p>
             <a:pPr algn="l">
@@ -16358,47 +16756,179 @@
             <a:r>
               <a:t>        &lt;/inertia&gt;</a:t>
             </a:r>
-            <a:br/>
+          </a:p>
+          <a:p>
+            <a:pPr algn="l">
+              <a:spcAft>
+                <a:spcPts val="0"/>
+              </a:spcAft>
+              <a:defRPr sz="1400" b="0">
+                <a:solidFill>
+                  <a:srgbClr val="FFFFFF"/>
+                </a:solidFill>
+                <a:latin typeface="DejaVu Sans Mono"/>
+              </a:defRPr>
+            </a:pPr>
             <a:r>
               <a:t>      &lt;/inertial&gt;</a:t>
             </a:r>
-            <a:br/>
+          </a:p>
+          <a:p>
+            <a:pPr algn="l">
+              <a:spcAft>
+                <a:spcPts val="0"/>
+              </a:spcAft>
+              <a:defRPr sz="1400" b="0">
+                <a:solidFill>
+                  <a:srgbClr val="FFFFFF"/>
+                </a:solidFill>
+                <a:latin typeface="DejaVu Sans Mono"/>
+              </a:defRPr>
+            </a:pPr>
             <a:r>
               <a:t>      &lt;visual name="body"&gt;</a:t>
             </a:r>
-            <a:br/>
+          </a:p>
+          <a:p>
+            <a:pPr algn="l">
+              <a:spcAft>
+                <a:spcPts val="0"/>
+              </a:spcAft>
+              <a:defRPr sz="1400" b="0">
+                <a:solidFill>
+                  <a:srgbClr val="FFFFFF"/>
+                </a:solidFill>
+                <a:latin typeface="DejaVu Sans Mono"/>
+              </a:defRPr>
+            </a:pPr>
             <a:r>
               <a:t>        &lt;geometry&gt;</a:t>
             </a:r>
-            <a:br/>
+          </a:p>
+          <a:p>
+            <a:pPr algn="l">
+              <a:spcAft>
+                <a:spcPts val="0"/>
+              </a:spcAft>
+              <a:defRPr sz="1400" b="0">
+                <a:solidFill>
+                  <a:srgbClr val="FFFFFF"/>
+                </a:solidFill>
+                <a:latin typeface="DejaVu Sans Mono"/>
+              </a:defRPr>
+            </a:pPr>
             <a:r>
               <a:t>          &lt;box&gt;</a:t>
             </a:r>
-            <a:br/>
+          </a:p>
+          <a:p>
+            <a:pPr algn="l">
+              <a:spcAft>
+                <a:spcPts val="0"/>
+              </a:spcAft>
+              <a:defRPr sz="1400" b="0">
+                <a:solidFill>
+                  <a:srgbClr val="FFFFFF"/>
+                </a:solidFill>
+                <a:latin typeface="DejaVu Sans Mono"/>
+              </a:defRPr>
+            </a:pPr>
             <a:r>
               <a:t>            &lt;size&gt;0.60 0.42 0.16&lt;/size&gt;</a:t>
             </a:r>
-            <a:br/>
+          </a:p>
+          <a:p>
+            <a:pPr algn="l">
+              <a:spcAft>
+                <a:spcPts val="0"/>
+              </a:spcAft>
+              <a:defRPr sz="1400" b="0">
+                <a:solidFill>
+                  <a:srgbClr val="FFFFFF"/>
+                </a:solidFill>
+                <a:latin typeface="DejaVu Sans Mono"/>
+              </a:defRPr>
+            </a:pPr>
             <a:r>
               <a:t>          &lt;/box&gt;</a:t>
             </a:r>
-            <a:br/>
+          </a:p>
+          <a:p>
+            <a:pPr algn="l">
+              <a:spcAft>
+                <a:spcPts val="0"/>
+              </a:spcAft>
+              <a:defRPr sz="1400" b="0">
+                <a:solidFill>
+                  <a:srgbClr val="FFFFFF"/>
+                </a:solidFill>
+                <a:latin typeface="DejaVu Sans Mono"/>
+              </a:defRPr>
+            </a:pPr>
             <a:r>
               <a:t>        &lt;/geometry&gt;</a:t>
             </a:r>
-            <a:br/>
+          </a:p>
+          <a:p>
+            <a:pPr algn="l">
+              <a:spcAft>
+                <a:spcPts val="0"/>
+              </a:spcAft>
+              <a:defRPr sz="1400" b="0">
+                <a:solidFill>
+                  <a:srgbClr val="FFFFFF"/>
+                </a:solidFill>
+                <a:latin typeface="DejaVu Sans Mono"/>
+              </a:defRPr>
+            </a:pPr>
             <a:r>
               <a:t>      &lt;/visual&gt;</a:t>
             </a:r>
-            <a:br/>
+          </a:p>
+          <a:p>
+            <a:pPr algn="l">
+              <a:spcAft>
+                <a:spcPts val="0"/>
+              </a:spcAft>
+              <a:defRPr sz="1400" b="0">
+                <a:solidFill>
+                  <a:srgbClr val="FFFFFF"/>
+                </a:solidFill>
+                <a:latin typeface="DejaVu Sans Mono"/>
+              </a:defRPr>
+            </a:pPr>
             <a:r>
               <a:t>      &lt;collision name="body_collision"&gt;</a:t>
             </a:r>
-            <a:br/>
+          </a:p>
+          <a:p>
+            <a:pPr algn="l">
+              <a:spcAft>
+                <a:spcPts val="0"/>
+              </a:spcAft>
+              <a:defRPr sz="1400" b="0">
+                <a:solidFill>
+                  <a:srgbClr val="FFFFFF"/>
+                </a:solidFill>
+                <a:latin typeface="DejaVu Sans Mono"/>
+              </a:defRPr>
+            </a:pPr>
             <a:r>
               <a:t>        &lt;geometry&gt;</a:t>
             </a:r>
-            <a:br/>
+          </a:p>
+          <a:p>
+            <a:pPr algn="l">
+              <a:spcAft>
+                <a:spcPts val="0"/>
+              </a:spcAft>
+              <a:defRPr sz="1400" b="0">
+                <a:solidFill>
+                  <a:srgbClr val="FFFFFF"/>
+                </a:solidFill>
+                <a:latin typeface="DejaVu Sans Mono"/>
+              </a:defRPr>
+            </a:pPr>
             <a:r>
               <a:t>          &lt;box&gt;</a:t>
             </a:r>
@@ -16815,7 +17345,7 @@
           </a:fontRef>
         </p:style>
         <p:txBody>
-          <a:bodyPr rtlCol="0" anchor="ctr" wrap="square" lIns="164592" rIns="164592" tIns="109728" bIns="36576"/>
+          <a:bodyPr rtlCol="0" anchor="ctr" wrap="square" lIns="164592" rIns="164592" tIns="109728" bIns="73152"/>
           <a:lstStyle/>
           <a:p>
             <a:pPr algn="l">
@@ -16832,47 +17362,179 @@
             <a:r>
               <a:t>            &lt;size&gt;0.60 0.42 0.16&lt;/size&gt;</a:t>
             </a:r>
-            <a:br/>
+          </a:p>
+          <a:p>
+            <a:pPr algn="l">
+              <a:spcAft>
+                <a:spcPts val="0"/>
+              </a:spcAft>
+              <a:defRPr sz="1400" b="0">
+                <a:solidFill>
+                  <a:srgbClr val="FFFFFF"/>
+                </a:solidFill>
+                <a:latin typeface="DejaVu Sans Mono"/>
+              </a:defRPr>
+            </a:pPr>
             <a:r>
               <a:t>          &lt;/box&gt;</a:t>
             </a:r>
-            <a:br/>
+          </a:p>
+          <a:p>
+            <a:pPr algn="l">
+              <a:spcAft>
+                <a:spcPts val="0"/>
+              </a:spcAft>
+              <a:defRPr sz="1400" b="0">
+                <a:solidFill>
+                  <a:srgbClr val="FFFFFF"/>
+                </a:solidFill>
+                <a:latin typeface="DejaVu Sans Mono"/>
+              </a:defRPr>
+            </a:pPr>
             <a:r>
               <a:t>        &lt;/geometry&gt;</a:t>
             </a:r>
-            <a:br/>
+          </a:p>
+          <a:p>
+            <a:pPr algn="l">
+              <a:spcAft>
+                <a:spcPts val="0"/>
+              </a:spcAft>
+              <a:defRPr sz="1400" b="0">
+                <a:solidFill>
+                  <a:srgbClr val="FFFFFF"/>
+                </a:solidFill>
+                <a:latin typeface="DejaVu Sans Mono"/>
+              </a:defRPr>
+            </a:pPr>
             <a:r>
               <a:t>      &lt;/collision&gt;</a:t>
             </a:r>
-            <a:br/>
+          </a:p>
+          <a:p>
+            <a:pPr algn="l">
+              <a:spcAft>
+                <a:spcPts val="0"/>
+              </a:spcAft>
+              <a:defRPr sz="1400" b="0">
+                <a:solidFill>
+                  <a:srgbClr val="FFFFFF"/>
+                </a:solidFill>
+                <a:latin typeface="DejaVu Sans Mono"/>
+              </a:defRPr>
+            </a:pPr>
             <a:r>
               <a:t>    &lt;/link&gt;</a:t>
             </a:r>
-            <a:br/>
+          </a:p>
+          <a:p>
+            <a:pPr algn="l">
+              <a:spcAft>
+                <a:spcPts val="0"/>
+              </a:spcAft>
+              <a:defRPr sz="1400" b="0">
+                <a:solidFill>
+                  <a:srgbClr val="FFFFFF"/>
+                </a:solidFill>
+                <a:latin typeface="DejaVu Sans Mono"/>
+              </a:defRPr>
+            </a:pPr>
             <a:r>
               <a:t>    &lt;link name="left_wheel_link"&gt;</a:t>
             </a:r>
-            <a:br/>
+          </a:p>
+          <a:p>
+            <a:pPr algn="l">
+              <a:spcAft>
+                <a:spcPts val="0"/>
+              </a:spcAft>
+              <a:defRPr sz="1400" b="0">
+                <a:solidFill>
+                  <a:srgbClr val="FFFFFF"/>
+                </a:solidFill>
+                <a:latin typeface="DejaVu Sans Mono"/>
+              </a:defRPr>
+            </a:pPr>
             <a:r>
               <a:t>      &lt;pose relative_to="base_link"&gt;0 0.19 -0.08 1.5708 0 0&lt;/pose&gt;</a:t>
             </a:r>
-            <a:br/>
+          </a:p>
+          <a:p>
+            <a:pPr algn="l">
+              <a:spcAft>
+                <a:spcPts val="0"/>
+              </a:spcAft>
+              <a:defRPr sz="1400" b="0">
+                <a:solidFill>
+                  <a:srgbClr val="FFFFFF"/>
+                </a:solidFill>
+                <a:latin typeface="DejaVu Sans Mono"/>
+              </a:defRPr>
+            </a:pPr>
             <a:r>
               <a:t>      &lt;inertial&gt;</a:t>
             </a:r>
-            <a:br/>
+          </a:p>
+          <a:p>
+            <a:pPr algn="l">
+              <a:spcAft>
+                <a:spcPts val="0"/>
+              </a:spcAft>
+              <a:defRPr sz="1400" b="0">
+                <a:solidFill>
+                  <a:srgbClr val="FFFFFF"/>
+                </a:solidFill>
+                <a:latin typeface="DejaVu Sans Mono"/>
+              </a:defRPr>
+            </a:pPr>
             <a:r>
               <a:t>        &lt;mass&gt;0.6&lt;/mass&gt;</a:t>
             </a:r>
-            <a:br/>
+          </a:p>
+          <a:p>
+            <a:pPr algn="l">
+              <a:spcAft>
+                <a:spcPts val="0"/>
+              </a:spcAft>
+              <a:defRPr sz="1400" b="0">
+                <a:solidFill>
+                  <a:srgbClr val="FFFFFF"/>
+                </a:solidFill>
+                <a:latin typeface="DejaVu Sans Mono"/>
+              </a:defRPr>
+            </a:pPr>
             <a:r>
               <a:t>        &lt;inertia&gt;</a:t>
             </a:r>
-            <a:br/>
+          </a:p>
+          <a:p>
+            <a:pPr algn="l">
+              <a:spcAft>
+                <a:spcPts val="0"/>
+              </a:spcAft>
+              <a:defRPr sz="1400" b="0">
+                <a:solidFill>
+                  <a:srgbClr val="FFFFFF"/>
+                </a:solidFill>
+                <a:latin typeface="DejaVu Sans Mono"/>
+              </a:defRPr>
+            </a:pPr>
             <a:r>
               <a:t>          &lt;ixx&gt;0.002&lt;/ixx&gt;</a:t>
             </a:r>
-            <a:br/>
+          </a:p>
+          <a:p>
+            <a:pPr algn="l">
+              <a:spcAft>
+                <a:spcPts val="0"/>
+              </a:spcAft>
+              <a:defRPr sz="1400" b="0">
+                <a:solidFill>
+                  <a:srgbClr val="FFFFFF"/>
+                </a:solidFill>
+                <a:latin typeface="DejaVu Sans Mono"/>
+              </a:defRPr>
+            </a:pPr>
             <a:r>
               <a:t>          &lt;iyy&gt;0.002&lt;/iyy&gt;</a:t>
             </a:r>
@@ -17289,7 +17951,7 @@
           </a:fontRef>
         </p:style>
         <p:txBody>
-          <a:bodyPr rtlCol="0" anchor="ctr" wrap="square" lIns="164592" rIns="164592" tIns="109728" bIns="36576"/>
+          <a:bodyPr rtlCol="0" anchor="ctr" wrap="square" lIns="164592" rIns="164592" tIns="109728" bIns="73152"/>
           <a:lstStyle/>
           <a:p>
             <a:pPr algn="l">
@@ -17306,47 +17968,179 @@
             <a:r>
               <a:t>          &lt;izz&gt;0.001&lt;/izz&gt;</a:t>
             </a:r>
-            <a:br/>
+          </a:p>
+          <a:p>
+            <a:pPr algn="l">
+              <a:spcAft>
+                <a:spcPts val="0"/>
+              </a:spcAft>
+              <a:defRPr sz="1400" b="0">
+                <a:solidFill>
+                  <a:srgbClr val="FFFFFF"/>
+                </a:solidFill>
+                <a:latin typeface="DejaVu Sans Mono"/>
+              </a:defRPr>
+            </a:pPr>
             <a:r>
               <a:t>        &lt;/inertia&gt;</a:t>
             </a:r>
-            <a:br/>
+          </a:p>
+          <a:p>
+            <a:pPr algn="l">
+              <a:spcAft>
+                <a:spcPts val="0"/>
+              </a:spcAft>
+              <a:defRPr sz="1400" b="0">
+                <a:solidFill>
+                  <a:srgbClr val="FFFFFF"/>
+                </a:solidFill>
+                <a:latin typeface="DejaVu Sans Mono"/>
+              </a:defRPr>
+            </a:pPr>
             <a:r>
               <a:t>      &lt;/inertial&gt;</a:t>
             </a:r>
-            <a:br/>
+          </a:p>
+          <a:p>
+            <a:pPr algn="l">
+              <a:spcAft>
+                <a:spcPts val="0"/>
+              </a:spcAft>
+              <a:defRPr sz="1400" b="0">
+                <a:solidFill>
+                  <a:srgbClr val="FFFFFF"/>
+                </a:solidFill>
+                <a:latin typeface="DejaVu Sans Mono"/>
+              </a:defRPr>
+            </a:pPr>
             <a:r>
               <a:t>      &lt;visual name="wheel"&gt;</a:t>
             </a:r>
-            <a:br/>
+          </a:p>
+          <a:p>
+            <a:pPr algn="l">
+              <a:spcAft>
+                <a:spcPts val="0"/>
+              </a:spcAft>
+              <a:defRPr sz="1400" b="0">
+                <a:solidFill>
+                  <a:srgbClr val="FFFFFF"/>
+                </a:solidFill>
+                <a:latin typeface="DejaVu Sans Mono"/>
+              </a:defRPr>
+            </a:pPr>
             <a:r>
               <a:t>        &lt;geometry&gt;</a:t>
             </a:r>
-            <a:br/>
+          </a:p>
+          <a:p>
+            <a:pPr algn="l">
+              <a:spcAft>
+                <a:spcPts val="0"/>
+              </a:spcAft>
+              <a:defRPr sz="1400" b="0">
+                <a:solidFill>
+                  <a:srgbClr val="FFFFFF"/>
+                </a:solidFill>
+                <a:latin typeface="DejaVu Sans Mono"/>
+              </a:defRPr>
+            </a:pPr>
             <a:r>
               <a:t>          &lt;cylinder&gt;</a:t>
             </a:r>
-            <a:br/>
+          </a:p>
+          <a:p>
+            <a:pPr algn="l">
+              <a:spcAft>
+                <a:spcPts val="0"/>
+              </a:spcAft>
+              <a:defRPr sz="1400" b="0">
+                <a:solidFill>
+                  <a:srgbClr val="FFFFFF"/>
+                </a:solidFill>
+                <a:latin typeface="DejaVu Sans Mono"/>
+              </a:defRPr>
+            </a:pPr>
             <a:r>
               <a:t>            &lt;radius&gt;0.08&lt;/radius&gt;</a:t>
             </a:r>
-            <a:br/>
+          </a:p>
+          <a:p>
+            <a:pPr algn="l">
+              <a:spcAft>
+                <a:spcPts val="0"/>
+              </a:spcAft>
+              <a:defRPr sz="1400" b="0">
+                <a:solidFill>
+                  <a:srgbClr val="FFFFFF"/>
+                </a:solidFill>
+                <a:latin typeface="DejaVu Sans Mono"/>
+              </a:defRPr>
+            </a:pPr>
             <a:r>
               <a:t>            &lt;length&gt;0.05&lt;/length&gt;</a:t>
             </a:r>
-            <a:br/>
+          </a:p>
+          <a:p>
+            <a:pPr algn="l">
+              <a:spcAft>
+                <a:spcPts val="0"/>
+              </a:spcAft>
+              <a:defRPr sz="1400" b="0">
+                <a:solidFill>
+                  <a:srgbClr val="FFFFFF"/>
+                </a:solidFill>
+                <a:latin typeface="DejaVu Sans Mono"/>
+              </a:defRPr>
+            </a:pPr>
             <a:r>
               <a:t>          &lt;/cylinder&gt;</a:t>
             </a:r>
-            <a:br/>
+          </a:p>
+          <a:p>
+            <a:pPr algn="l">
+              <a:spcAft>
+                <a:spcPts val="0"/>
+              </a:spcAft>
+              <a:defRPr sz="1400" b="0">
+                <a:solidFill>
+                  <a:srgbClr val="FFFFFF"/>
+                </a:solidFill>
+                <a:latin typeface="DejaVu Sans Mono"/>
+              </a:defRPr>
+            </a:pPr>
             <a:r>
               <a:t>        &lt;/geometry&gt;</a:t>
             </a:r>
-            <a:br/>
+          </a:p>
+          <a:p>
+            <a:pPr algn="l">
+              <a:spcAft>
+                <a:spcPts val="0"/>
+              </a:spcAft>
+              <a:defRPr sz="1400" b="0">
+                <a:solidFill>
+                  <a:srgbClr val="FFFFFF"/>
+                </a:solidFill>
+                <a:latin typeface="DejaVu Sans Mono"/>
+              </a:defRPr>
+            </a:pPr>
             <a:r>
               <a:t>      &lt;/visual&gt;</a:t>
             </a:r>
-            <a:br/>
+          </a:p>
+          <a:p>
+            <a:pPr algn="l">
+              <a:spcAft>
+                <a:spcPts val="0"/>
+              </a:spcAft>
+              <a:defRPr sz="1400" b="0">
+                <a:solidFill>
+                  <a:srgbClr val="FFFFFF"/>
+                </a:solidFill>
+                <a:latin typeface="DejaVu Sans Mono"/>
+              </a:defRPr>
+            </a:pPr>
             <a:r>
               <a:t>      &lt;collision name="wheel_collision"&gt;</a:t>
             </a:r>
@@ -17763,7 +18557,7 @@
           </a:fontRef>
         </p:style>
         <p:txBody>
-          <a:bodyPr rtlCol="0" anchor="ctr" wrap="square" lIns="164592" rIns="164592" tIns="109728" bIns="36576"/>
+          <a:bodyPr rtlCol="0" anchor="ctr" wrap="square" lIns="164592" rIns="164592" tIns="109728" bIns="73152"/>
           <a:lstStyle/>
           <a:p>
             <a:pPr algn="l">
@@ -17780,47 +18574,179 @@
             <a:r>
               <a:t>        &lt;geometry&gt;</a:t>
             </a:r>
-            <a:br/>
+          </a:p>
+          <a:p>
+            <a:pPr algn="l">
+              <a:spcAft>
+                <a:spcPts val="0"/>
+              </a:spcAft>
+              <a:defRPr sz="1400" b="0">
+                <a:solidFill>
+                  <a:srgbClr val="FFFFFF"/>
+                </a:solidFill>
+                <a:latin typeface="DejaVu Sans Mono"/>
+              </a:defRPr>
+            </a:pPr>
             <a:r>
               <a:t>          &lt;cylinder&gt;</a:t>
             </a:r>
-            <a:br/>
+          </a:p>
+          <a:p>
+            <a:pPr algn="l">
+              <a:spcAft>
+                <a:spcPts val="0"/>
+              </a:spcAft>
+              <a:defRPr sz="1400" b="0">
+                <a:solidFill>
+                  <a:srgbClr val="FFFFFF"/>
+                </a:solidFill>
+                <a:latin typeface="DejaVu Sans Mono"/>
+              </a:defRPr>
+            </a:pPr>
             <a:r>
               <a:t>            &lt;radius&gt;0.08&lt;/radius&gt;</a:t>
             </a:r>
-            <a:br/>
+          </a:p>
+          <a:p>
+            <a:pPr algn="l">
+              <a:spcAft>
+                <a:spcPts val="0"/>
+              </a:spcAft>
+              <a:defRPr sz="1400" b="0">
+                <a:solidFill>
+                  <a:srgbClr val="FFFFFF"/>
+                </a:solidFill>
+                <a:latin typeface="DejaVu Sans Mono"/>
+              </a:defRPr>
+            </a:pPr>
             <a:r>
               <a:t>            &lt;length&gt;0.05&lt;/length&gt;</a:t>
             </a:r>
-            <a:br/>
+          </a:p>
+          <a:p>
+            <a:pPr algn="l">
+              <a:spcAft>
+                <a:spcPts val="0"/>
+              </a:spcAft>
+              <a:defRPr sz="1400" b="0">
+                <a:solidFill>
+                  <a:srgbClr val="FFFFFF"/>
+                </a:solidFill>
+                <a:latin typeface="DejaVu Sans Mono"/>
+              </a:defRPr>
+            </a:pPr>
             <a:r>
               <a:t>          &lt;/cylinder&gt;</a:t>
             </a:r>
-            <a:br/>
+          </a:p>
+          <a:p>
+            <a:pPr algn="l">
+              <a:spcAft>
+                <a:spcPts val="0"/>
+              </a:spcAft>
+              <a:defRPr sz="1400" b="0">
+                <a:solidFill>
+                  <a:srgbClr val="FFFFFF"/>
+                </a:solidFill>
+                <a:latin typeface="DejaVu Sans Mono"/>
+              </a:defRPr>
+            </a:pPr>
             <a:r>
               <a:t>        &lt;/geometry&gt;</a:t>
             </a:r>
-            <a:br/>
+          </a:p>
+          <a:p>
+            <a:pPr algn="l">
+              <a:spcAft>
+                <a:spcPts val="0"/>
+              </a:spcAft>
+              <a:defRPr sz="1400" b="0">
+                <a:solidFill>
+                  <a:srgbClr val="FFFFFF"/>
+                </a:solidFill>
+                <a:latin typeface="DejaVu Sans Mono"/>
+              </a:defRPr>
+            </a:pPr>
             <a:r>
               <a:t>        &lt;surface&gt;</a:t>
             </a:r>
-            <a:br/>
+          </a:p>
+          <a:p>
+            <a:pPr algn="l">
+              <a:spcAft>
+                <a:spcPts val="0"/>
+              </a:spcAft>
+              <a:defRPr sz="1400" b="0">
+                <a:solidFill>
+                  <a:srgbClr val="FFFFFF"/>
+                </a:solidFill>
+                <a:latin typeface="DejaVu Sans Mono"/>
+              </a:defRPr>
+            </a:pPr>
             <a:r>
               <a:t>          &lt;friction&gt;</a:t>
             </a:r>
-            <a:br/>
+          </a:p>
+          <a:p>
+            <a:pPr algn="l">
+              <a:spcAft>
+                <a:spcPts val="0"/>
+              </a:spcAft>
+              <a:defRPr sz="1400" b="0">
+                <a:solidFill>
+                  <a:srgbClr val="FFFFFF"/>
+                </a:solidFill>
+                <a:latin typeface="DejaVu Sans Mono"/>
+              </a:defRPr>
+            </a:pPr>
             <a:r>
               <a:t>            &lt;ode&gt;</a:t>
             </a:r>
-            <a:br/>
+          </a:p>
+          <a:p>
+            <a:pPr algn="l">
+              <a:spcAft>
+                <a:spcPts val="0"/>
+              </a:spcAft>
+              <a:defRPr sz="1400" b="0">
+                <a:solidFill>
+                  <a:srgbClr val="FFFFFF"/>
+                </a:solidFill>
+                <a:latin typeface="DejaVu Sans Mono"/>
+              </a:defRPr>
+            </a:pPr>
             <a:r>
               <a:t>              &lt;mu&gt;1.0&lt;/mu&gt;</a:t>
             </a:r>
-            <a:br/>
+          </a:p>
+          <a:p>
+            <a:pPr algn="l">
+              <a:spcAft>
+                <a:spcPts val="0"/>
+              </a:spcAft>
+              <a:defRPr sz="1400" b="0">
+                <a:solidFill>
+                  <a:srgbClr val="FFFFFF"/>
+                </a:solidFill>
+                <a:latin typeface="DejaVu Sans Mono"/>
+              </a:defRPr>
+            </a:pPr>
             <a:r>
               <a:t>              &lt;mu2&gt;1.0&lt;/mu2&gt;</a:t>
             </a:r>
-            <a:br/>
+          </a:p>
+          <a:p>
+            <a:pPr algn="l">
+              <a:spcAft>
+                <a:spcPts val="0"/>
+              </a:spcAft>
+              <a:defRPr sz="1400" b="0">
+                <a:solidFill>
+                  <a:srgbClr val="FFFFFF"/>
+                </a:solidFill>
+                <a:latin typeface="DejaVu Sans Mono"/>
+              </a:defRPr>
+            </a:pPr>
             <a:r>
               <a:t>            &lt;/ode&gt;</a:t>
             </a:r>
@@ -18237,7 +19163,7 @@
           </a:fontRef>
         </p:style>
         <p:txBody>
-          <a:bodyPr rtlCol="0" anchor="ctr" wrap="square" lIns="164592" rIns="164592" tIns="109728" bIns="36576"/>
+          <a:bodyPr rtlCol="0" anchor="ctr" wrap="square" lIns="164592" rIns="164592" tIns="109728" bIns="73152"/>
           <a:lstStyle/>
           <a:p>
             <a:pPr algn="l">
@@ -18254,47 +19180,179 @@
             <a:r>
               <a:t>          &lt;/friction&gt;</a:t>
             </a:r>
-            <a:br/>
+          </a:p>
+          <a:p>
+            <a:pPr algn="l">
+              <a:spcAft>
+                <a:spcPts val="0"/>
+              </a:spcAft>
+              <a:defRPr sz="1400" b="0">
+                <a:solidFill>
+                  <a:srgbClr val="FFFFFF"/>
+                </a:solidFill>
+                <a:latin typeface="DejaVu Sans Mono"/>
+              </a:defRPr>
+            </a:pPr>
             <a:r>
               <a:t>        &lt;/surface&gt;</a:t>
             </a:r>
-            <a:br/>
+          </a:p>
+          <a:p>
+            <a:pPr algn="l">
+              <a:spcAft>
+                <a:spcPts val="0"/>
+              </a:spcAft>
+              <a:defRPr sz="1400" b="0">
+                <a:solidFill>
+                  <a:srgbClr val="FFFFFF"/>
+                </a:solidFill>
+                <a:latin typeface="DejaVu Sans Mono"/>
+              </a:defRPr>
+            </a:pPr>
             <a:r>
               <a:t>      &lt;/collision&gt;</a:t>
             </a:r>
-            <a:br/>
+          </a:p>
+          <a:p>
+            <a:pPr algn="l">
+              <a:spcAft>
+                <a:spcPts val="0"/>
+              </a:spcAft>
+              <a:defRPr sz="1400" b="0">
+                <a:solidFill>
+                  <a:srgbClr val="FFFFFF"/>
+                </a:solidFill>
+                <a:latin typeface="DejaVu Sans Mono"/>
+              </a:defRPr>
+            </a:pPr>
             <a:r>
               <a:t>    &lt;/link&gt;</a:t>
             </a:r>
-            <a:br/>
+          </a:p>
+          <a:p>
+            <a:pPr algn="l">
+              <a:spcAft>
+                <a:spcPts val="0"/>
+              </a:spcAft>
+              <a:defRPr sz="1400" b="0">
+                <a:solidFill>
+                  <a:srgbClr val="FFFFFF"/>
+                </a:solidFill>
+                <a:latin typeface="DejaVu Sans Mono"/>
+              </a:defRPr>
+            </a:pPr>
             <a:r>
               <a:t>    &lt;link name="right_wheel_link"&gt;</a:t>
             </a:r>
-            <a:br/>
+          </a:p>
+          <a:p>
+            <a:pPr algn="l">
+              <a:spcAft>
+                <a:spcPts val="0"/>
+              </a:spcAft>
+              <a:defRPr sz="1400" b="0">
+                <a:solidFill>
+                  <a:srgbClr val="FFFFFF"/>
+                </a:solidFill>
+                <a:latin typeface="DejaVu Sans Mono"/>
+              </a:defRPr>
+            </a:pPr>
             <a:r>
               <a:t>      &lt;pose relative_to="base_link"&gt;0 -0.19 -0.08 1.5708 0 0&lt;/pose&gt;</a:t>
             </a:r>
-            <a:br/>
+          </a:p>
+          <a:p>
+            <a:pPr algn="l">
+              <a:spcAft>
+                <a:spcPts val="0"/>
+              </a:spcAft>
+              <a:defRPr sz="1400" b="0">
+                <a:solidFill>
+                  <a:srgbClr val="FFFFFF"/>
+                </a:solidFill>
+                <a:latin typeface="DejaVu Sans Mono"/>
+              </a:defRPr>
+            </a:pPr>
             <a:r>
               <a:t>      &lt;inertial&gt;</a:t>
             </a:r>
-            <a:br/>
+          </a:p>
+          <a:p>
+            <a:pPr algn="l">
+              <a:spcAft>
+                <a:spcPts val="0"/>
+              </a:spcAft>
+              <a:defRPr sz="1400" b="0">
+                <a:solidFill>
+                  <a:srgbClr val="FFFFFF"/>
+                </a:solidFill>
+                <a:latin typeface="DejaVu Sans Mono"/>
+              </a:defRPr>
+            </a:pPr>
             <a:r>
               <a:t>        &lt;mass&gt;0.6&lt;/mass&gt;</a:t>
             </a:r>
-            <a:br/>
+          </a:p>
+          <a:p>
+            <a:pPr algn="l">
+              <a:spcAft>
+                <a:spcPts val="0"/>
+              </a:spcAft>
+              <a:defRPr sz="1400" b="0">
+                <a:solidFill>
+                  <a:srgbClr val="FFFFFF"/>
+                </a:solidFill>
+                <a:latin typeface="DejaVu Sans Mono"/>
+              </a:defRPr>
+            </a:pPr>
             <a:r>
               <a:t>        &lt;inertia&gt;</a:t>
             </a:r>
-            <a:br/>
+          </a:p>
+          <a:p>
+            <a:pPr algn="l">
+              <a:spcAft>
+                <a:spcPts val="0"/>
+              </a:spcAft>
+              <a:defRPr sz="1400" b="0">
+                <a:solidFill>
+                  <a:srgbClr val="FFFFFF"/>
+                </a:solidFill>
+                <a:latin typeface="DejaVu Sans Mono"/>
+              </a:defRPr>
+            </a:pPr>
             <a:r>
               <a:t>          &lt;ixx&gt;0.002&lt;/ixx&gt;</a:t>
             </a:r>
-            <a:br/>
+          </a:p>
+          <a:p>
+            <a:pPr algn="l">
+              <a:spcAft>
+                <a:spcPts val="0"/>
+              </a:spcAft>
+              <a:defRPr sz="1400" b="0">
+                <a:solidFill>
+                  <a:srgbClr val="FFFFFF"/>
+                </a:solidFill>
+                <a:latin typeface="DejaVu Sans Mono"/>
+              </a:defRPr>
+            </a:pPr>
             <a:r>
               <a:t>          &lt;iyy&gt;0.002&lt;/iyy&gt;</a:t>
             </a:r>
-            <a:br/>
+          </a:p>
+          <a:p>
+            <a:pPr algn="l">
+              <a:spcAft>
+                <a:spcPts val="0"/>
+              </a:spcAft>
+              <a:defRPr sz="1400" b="0">
+                <a:solidFill>
+                  <a:srgbClr val="FFFFFF"/>
+                </a:solidFill>
+                <a:latin typeface="DejaVu Sans Mono"/>
+              </a:defRPr>
+            </a:pPr>
             <a:r>
               <a:t>          &lt;izz&gt;0.001&lt;/izz&gt;</a:t>
             </a:r>
@@ -18711,7 +19769,7 @@
           </a:fontRef>
         </p:style>
         <p:txBody>
-          <a:bodyPr rtlCol="0" anchor="ctr" wrap="square" lIns="164592" rIns="164592" tIns="109728" bIns="36576"/>
+          <a:bodyPr rtlCol="0" anchor="ctr" wrap="square" lIns="164592" rIns="164592" tIns="109728" bIns="73152"/>
           <a:lstStyle/>
           <a:p>
             <a:pPr algn="l">
@@ -18728,47 +19786,179 @@
             <a:r>
               <a:t>        &lt;/inertia&gt;</a:t>
             </a:r>
-            <a:br/>
+          </a:p>
+          <a:p>
+            <a:pPr algn="l">
+              <a:spcAft>
+                <a:spcPts val="0"/>
+              </a:spcAft>
+              <a:defRPr sz="1400" b="0">
+                <a:solidFill>
+                  <a:srgbClr val="FFFFFF"/>
+                </a:solidFill>
+                <a:latin typeface="DejaVu Sans Mono"/>
+              </a:defRPr>
+            </a:pPr>
             <a:r>
               <a:t>      &lt;/inertial&gt;</a:t>
             </a:r>
-            <a:br/>
+          </a:p>
+          <a:p>
+            <a:pPr algn="l">
+              <a:spcAft>
+                <a:spcPts val="0"/>
+              </a:spcAft>
+              <a:defRPr sz="1400" b="0">
+                <a:solidFill>
+                  <a:srgbClr val="FFFFFF"/>
+                </a:solidFill>
+                <a:latin typeface="DejaVu Sans Mono"/>
+              </a:defRPr>
+            </a:pPr>
             <a:r>
               <a:t>      &lt;visual name="wheel"&gt;</a:t>
             </a:r>
-            <a:br/>
+          </a:p>
+          <a:p>
+            <a:pPr algn="l">
+              <a:spcAft>
+                <a:spcPts val="0"/>
+              </a:spcAft>
+              <a:defRPr sz="1400" b="0">
+                <a:solidFill>
+                  <a:srgbClr val="FFFFFF"/>
+                </a:solidFill>
+                <a:latin typeface="DejaVu Sans Mono"/>
+              </a:defRPr>
+            </a:pPr>
             <a:r>
               <a:t>        &lt;geometry&gt;</a:t>
             </a:r>
-            <a:br/>
+          </a:p>
+          <a:p>
+            <a:pPr algn="l">
+              <a:spcAft>
+                <a:spcPts val="0"/>
+              </a:spcAft>
+              <a:defRPr sz="1400" b="0">
+                <a:solidFill>
+                  <a:srgbClr val="FFFFFF"/>
+                </a:solidFill>
+                <a:latin typeface="DejaVu Sans Mono"/>
+              </a:defRPr>
+            </a:pPr>
             <a:r>
               <a:t>          &lt;cylinder&gt;</a:t>
             </a:r>
-            <a:br/>
+          </a:p>
+          <a:p>
+            <a:pPr algn="l">
+              <a:spcAft>
+                <a:spcPts val="0"/>
+              </a:spcAft>
+              <a:defRPr sz="1400" b="0">
+                <a:solidFill>
+                  <a:srgbClr val="FFFFFF"/>
+                </a:solidFill>
+                <a:latin typeface="DejaVu Sans Mono"/>
+              </a:defRPr>
+            </a:pPr>
             <a:r>
               <a:t>            &lt;radius&gt;0.08&lt;/radius&gt;</a:t>
             </a:r>
-            <a:br/>
+          </a:p>
+          <a:p>
+            <a:pPr algn="l">
+              <a:spcAft>
+                <a:spcPts val="0"/>
+              </a:spcAft>
+              <a:defRPr sz="1400" b="0">
+                <a:solidFill>
+                  <a:srgbClr val="FFFFFF"/>
+                </a:solidFill>
+                <a:latin typeface="DejaVu Sans Mono"/>
+              </a:defRPr>
+            </a:pPr>
             <a:r>
               <a:t>            &lt;length&gt;0.05&lt;/length&gt;</a:t>
             </a:r>
-            <a:br/>
+          </a:p>
+          <a:p>
+            <a:pPr algn="l">
+              <a:spcAft>
+                <a:spcPts val="0"/>
+              </a:spcAft>
+              <a:defRPr sz="1400" b="0">
+                <a:solidFill>
+                  <a:srgbClr val="FFFFFF"/>
+                </a:solidFill>
+                <a:latin typeface="DejaVu Sans Mono"/>
+              </a:defRPr>
+            </a:pPr>
             <a:r>
               <a:t>          &lt;/cylinder&gt;</a:t>
             </a:r>
-            <a:br/>
+          </a:p>
+          <a:p>
+            <a:pPr algn="l">
+              <a:spcAft>
+                <a:spcPts val="0"/>
+              </a:spcAft>
+              <a:defRPr sz="1400" b="0">
+                <a:solidFill>
+                  <a:srgbClr val="FFFFFF"/>
+                </a:solidFill>
+                <a:latin typeface="DejaVu Sans Mono"/>
+              </a:defRPr>
+            </a:pPr>
             <a:r>
               <a:t>        &lt;/geometry&gt;</a:t>
             </a:r>
-            <a:br/>
+          </a:p>
+          <a:p>
+            <a:pPr algn="l">
+              <a:spcAft>
+                <a:spcPts val="0"/>
+              </a:spcAft>
+              <a:defRPr sz="1400" b="0">
+                <a:solidFill>
+                  <a:srgbClr val="FFFFFF"/>
+                </a:solidFill>
+                <a:latin typeface="DejaVu Sans Mono"/>
+              </a:defRPr>
+            </a:pPr>
             <a:r>
               <a:t>      &lt;/visual&gt;</a:t>
             </a:r>
-            <a:br/>
+          </a:p>
+          <a:p>
+            <a:pPr algn="l">
+              <a:spcAft>
+                <a:spcPts val="0"/>
+              </a:spcAft>
+              <a:defRPr sz="1400" b="0">
+                <a:solidFill>
+                  <a:srgbClr val="FFFFFF"/>
+                </a:solidFill>
+                <a:latin typeface="DejaVu Sans Mono"/>
+              </a:defRPr>
+            </a:pPr>
             <a:r>
               <a:t>      &lt;collision name="wheel_collision"&gt;</a:t>
             </a:r>
-            <a:br/>
+          </a:p>
+          <a:p>
+            <a:pPr algn="l">
+              <a:spcAft>
+                <a:spcPts val="0"/>
+              </a:spcAft>
+              <a:defRPr sz="1400" b="0">
+                <a:solidFill>
+                  <a:srgbClr val="FFFFFF"/>
+                </a:solidFill>
+                <a:latin typeface="DejaVu Sans Mono"/>
+              </a:defRPr>
+            </a:pPr>
             <a:r>
               <a:t>        &lt;geometry&gt;</a:t>
             </a:r>
@@ -19185,7 +20375,7 @@
           </a:fontRef>
         </p:style>
         <p:txBody>
-          <a:bodyPr rtlCol="0" anchor="ctr" wrap="square" lIns="164592" rIns="164592" tIns="109728" bIns="36576"/>
+          <a:bodyPr rtlCol="0" anchor="ctr" wrap="square" lIns="164592" rIns="164592" tIns="109728" bIns="73152"/>
           <a:lstStyle/>
           <a:p>
             <a:pPr algn="l">
@@ -19202,47 +20392,179 @@
             <a:r>
               <a:t>          &lt;cylinder&gt;</a:t>
             </a:r>
-            <a:br/>
+          </a:p>
+          <a:p>
+            <a:pPr algn="l">
+              <a:spcAft>
+                <a:spcPts val="0"/>
+              </a:spcAft>
+              <a:defRPr sz="1400" b="0">
+                <a:solidFill>
+                  <a:srgbClr val="FFFFFF"/>
+                </a:solidFill>
+                <a:latin typeface="DejaVu Sans Mono"/>
+              </a:defRPr>
+            </a:pPr>
             <a:r>
               <a:t>            &lt;radius&gt;0.08&lt;/radius&gt;</a:t>
             </a:r>
-            <a:br/>
+          </a:p>
+          <a:p>
+            <a:pPr algn="l">
+              <a:spcAft>
+                <a:spcPts val="0"/>
+              </a:spcAft>
+              <a:defRPr sz="1400" b="0">
+                <a:solidFill>
+                  <a:srgbClr val="FFFFFF"/>
+                </a:solidFill>
+                <a:latin typeface="DejaVu Sans Mono"/>
+              </a:defRPr>
+            </a:pPr>
             <a:r>
               <a:t>            &lt;length&gt;0.05&lt;/length&gt;</a:t>
             </a:r>
-            <a:br/>
+          </a:p>
+          <a:p>
+            <a:pPr algn="l">
+              <a:spcAft>
+                <a:spcPts val="0"/>
+              </a:spcAft>
+              <a:defRPr sz="1400" b="0">
+                <a:solidFill>
+                  <a:srgbClr val="FFFFFF"/>
+                </a:solidFill>
+                <a:latin typeface="DejaVu Sans Mono"/>
+              </a:defRPr>
+            </a:pPr>
             <a:r>
               <a:t>          &lt;/cylinder&gt;</a:t>
             </a:r>
-            <a:br/>
+          </a:p>
+          <a:p>
+            <a:pPr algn="l">
+              <a:spcAft>
+                <a:spcPts val="0"/>
+              </a:spcAft>
+              <a:defRPr sz="1400" b="0">
+                <a:solidFill>
+                  <a:srgbClr val="FFFFFF"/>
+                </a:solidFill>
+                <a:latin typeface="DejaVu Sans Mono"/>
+              </a:defRPr>
+            </a:pPr>
             <a:r>
               <a:t>        &lt;/geometry&gt;</a:t>
             </a:r>
-            <a:br/>
+          </a:p>
+          <a:p>
+            <a:pPr algn="l">
+              <a:spcAft>
+                <a:spcPts val="0"/>
+              </a:spcAft>
+              <a:defRPr sz="1400" b="0">
+                <a:solidFill>
+                  <a:srgbClr val="FFFFFF"/>
+                </a:solidFill>
+                <a:latin typeface="DejaVu Sans Mono"/>
+              </a:defRPr>
+            </a:pPr>
             <a:r>
               <a:t>        &lt;surface&gt;</a:t>
             </a:r>
-            <a:br/>
+          </a:p>
+          <a:p>
+            <a:pPr algn="l">
+              <a:spcAft>
+                <a:spcPts val="0"/>
+              </a:spcAft>
+              <a:defRPr sz="1400" b="0">
+                <a:solidFill>
+                  <a:srgbClr val="FFFFFF"/>
+                </a:solidFill>
+                <a:latin typeface="DejaVu Sans Mono"/>
+              </a:defRPr>
+            </a:pPr>
             <a:r>
               <a:t>          &lt;friction&gt;</a:t>
             </a:r>
-            <a:br/>
+          </a:p>
+          <a:p>
+            <a:pPr algn="l">
+              <a:spcAft>
+                <a:spcPts val="0"/>
+              </a:spcAft>
+              <a:defRPr sz="1400" b="0">
+                <a:solidFill>
+                  <a:srgbClr val="FFFFFF"/>
+                </a:solidFill>
+                <a:latin typeface="DejaVu Sans Mono"/>
+              </a:defRPr>
+            </a:pPr>
             <a:r>
               <a:t>            &lt;ode&gt;</a:t>
             </a:r>
-            <a:br/>
+          </a:p>
+          <a:p>
+            <a:pPr algn="l">
+              <a:spcAft>
+                <a:spcPts val="0"/>
+              </a:spcAft>
+              <a:defRPr sz="1400" b="0">
+                <a:solidFill>
+                  <a:srgbClr val="FFFFFF"/>
+                </a:solidFill>
+                <a:latin typeface="DejaVu Sans Mono"/>
+              </a:defRPr>
+            </a:pPr>
             <a:r>
               <a:t>              &lt;mu&gt;1.0&lt;/mu&gt;</a:t>
             </a:r>
-            <a:br/>
+          </a:p>
+          <a:p>
+            <a:pPr algn="l">
+              <a:spcAft>
+                <a:spcPts val="0"/>
+              </a:spcAft>
+              <a:defRPr sz="1400" b="0">
+                <a:solidFill>
+                  <a:srgbClr val="FFFFFF"/>
+                </a:solidFill>
+                <a:latin typeface="DejaVu Sans Mono"/>
+              </a:defRPr>
+            </a:pPr>
             <a:r>
               <a:t>              &lt;mu2&gt;1.0&lt;/mu2&gt;</a:t>
             </a:r>
-            <a:br/>
+          </a:p>
+          <a:p>
+            <a:pPr algn="l">
+              <a:spcAft>
+                <a:spcPts val="0"/>
+              </a:spcAft>
+              <a:defRPr sz="1400" b="0">
+                <a:solidFill>
+                  <a:srgbClr val="FFFFFF"/>
+                </a:solidFill>
+                <a:latin typeface="DejaVu Sans Mono"/>
+              </a:defRPr>
+            </a:pPr>
             <a:r>
               <a:t>            &lt;/ode&gt;</a:t>
             </a:r>
-            <a:br/>
+          </a:p>
+          <a:p>
+            <a:pPr algn="l">
+              <a:spcAft>
+                <a:spcPts val="0"/>
+              </a:spcAft>
+              <a:defRPr sz="1400" b="0">
+                <a:solidFill>
+                  <a:srgbClr val="FFFFFF"/>
+                </a:solidFill>
+                <a:latin typeface="DejaVu Sans Mono"/>
+              </a:defRPr>
+            </a:pPr>
             <a:r>
               <a:t>          &lt;/friction&gt;</a:t>
             </a:r>
@@ -19659,7 +20981,7 @@
           </a:fontRef>
         </p:style>
         <p:txBody>
-          <a:bodyPr rtlCol="0" anchor="ctr" wrap="square" lIns="164592" rIns="164592" tIns="109728" bIns="36576"/>
+          <a:bodyPr rtlCol="0" anchor="ctr" wrap="square" lIns="164592" rIns="164592" tIns="109728" bIns="73152"/>
           <a:lstStyle/>
           <a:p>
             <a:pPr algn="l">
@@ -19676,47 +20998,179 @@
             <a:r>
               <a:t>        &lt;/surface&gt;</a:t>
             </a:r>
-            <a:br/>
+          </a:p>
+          <a:p>
+            <a:pPr algn="l">
+              <a:spcAft>
+                <a:spcPts val="0"/>
+              </a:spcAft>
+              <a:defRPr sz="1400" b="0">
+                <a:solidFill>
+                  <a:srgbClr val="FFFFFF"/>
+                </a:solidFill>
+                <a:latin typeface="DejaVu Sans Mono"/>
+              </a:defRPr>
+            </a:pPr>
             <a:r>
               <a:t>      &lt;/collision&gt;</a:t>
             </a:r>
-            <a:br/>
+          </a:p>
+          <a:p>
+            <a:pPr algn="l">
+              <a:spcAft>
+                <a:spcPts val="0"/>
+              </a:spcAft>
+              <a:defRPr sz="1400" b="0">
+                <a:solidFill>
+                  <a:srgbClr val="FFFFFF"/>
+                </a:solidFill>
+                <a:latin typeface="DejaVu Sans Mono"/>
+              </a:defRPr>
+            </a:pPr>
             <a:r>
               <a:t>    &lt;/link&gt;</a:t>
             </a:r>
-            <a:br/>
+          </a:p>
+          <a:p>
+            <a:pPr algn="l">
+              <a:spcAft>
+                <a:spcPts val="0"/>
+              </a:spcAft>
+              <a:defRPr sz="1400" b="0">
+                <a:solidFill>
+                  <a:srgbClr val="FFFFFF"/>
+                </a:solidFill>
+                <a:latin typeface="DejaVu Sans Mono"/>
+              </a:defRPr>
+            </a:pPr>
             <a:r>
               <a:t>    &lt;joint name="left_wheel_joint" type="revolute"&gt;</a:t>
             </a:r>
-            <a:br/>
+          </a:p>
+          <a:p>
+            <a:pPr algn="l">
+              <a:spcAft>
+                <a:spcPts val="0"/>
+              </a:spcAft>
+              <a:defRPr sz="1400" b="0">
+                <a:solidFill>
+                  <a:srgbClr val="FFFFFF"/>
+                </a:solidFill>
+                <a:latin typeface="DejaVu Sans Mono"/>
+              </a:defRPr>
+            </a:pPr>
             <a:r>
               <a:t>      &lt;parent&gt;base_link&lt;/parent&gt;</a:t>
             </a:r>
-            <a:br/>
+          </a:p>
+          <a:p>
+            <a:pPr algn="l">
+              <a:spcAft>
+                <a:spcPts val="0"/>
+              </a:spcAft>
+              <a:defRPr sz="1400" b="0">
+                <a:solidFill>
+                  <a:srgbClr val="FFFFFF"/>
+                </a:solidFill>
+                <a:latin typeface="DejaVu Sans Mono"/>
+              </a:defRPr>
+            </a:pPr>
             <a:r>
               <a:t>      &lt;child&gt;left_wheel_link&lt;/child&gt;</a:t>
             </a:r>
-            <a:br/>
+          </a:p>
+          <a:p>
+            <a:pPr algn="l">
+              <a:spcAft>
+                <a:spcPts val="0"/>
+              </a:spcAft>
+              <a:defRPr sz="1400" b="0">
+                <a:solidFill>
+                  <a:srgbClr val="FFFFFF"/>
+                </a:solidFill>
+                <a:latin typeface="DejaVu Sans Mono"/>
+              </a:defRPr>
+            </a:pPr>
             <a:r>
               <a:t>      &lt;axis&gt;</a:t>
             </a:r>
-            <a:br/>
+          </a:p>
+          <a:p>
+            <a:pPr algn="l">
+              <a:spcAft>
+                <a:spcPts val="0"/>
+              </a:spcAft>
+              <a:defRPr sz="1400" b="0">
+                <a:solidFill>
+                  <a:srgbClr val="FFFFFF"/>
+                </a:solidFill>
+                <a:latin typeface="DejaVu Sans Mono"/>
+              </a:defRPr>
+            </a:pPr>
             <a:r>
               <a:t>        &lt;xyz&gt;0 1 0&lt;/xyz&gt;</a:t>
             </a:r>
-            <a:br/>
+          </a:p>
+          <a:p>
+            <a:pPr algn="l">
+              <a:spcAft>
+                <a:spcPts val="0"/>
+              </a:spcAft>
+              <a:defRPr sz="1400" b="0">
+                <a:solidFill>
+                  <a:srgbClr val="FFFFFF"/>
+                </a:solidFill>
+                <a:latin typeface="DejaVu Sans Mono"/>
+              </a:defRPr>
+            </a:pPr>
             <a:r>
               <a:t>        &lt;limit&gt;</a:t>
             </a:r>
-            <a:br/>
+          </a:p>
+          <a:p>
+            <a:pPr algn="l">
+              <a:spcAft>
+                <a:spcPts val="0"/>
+              </a:spcAft>
+              <a:defRPr sz="1400" b="0">
+                <a:solidFill>
+                  <a:srgbClr val="FFFFFF"/>
+                </a:solidFill>
+                <a:latin typeface="DejaVu Sans Mono"/>
+              </a:defRPr>
+            </a:pPr>
             <a:r>
               <a:t>          &lt;lower&gt;-1e16&lt;/lower&gt;</a:t>
             </a:r>
-            <a:br/>
+          </a:p>
+          <a:p>
+            <a:pPr algn="l">
+              <a:spcAft>
+                <a:spcPts val="0"/>
+              </a:spcAft>
+              <a:defRPr sz="1400" b="0">
+                <a:solidFill>
+                  <a:srgbClr val="FFFFFF"/>
+                </a:solidFill>
+                <a:latin typeface="DejaVu Sans Mono"/>
+              </a:defRPr>
+            </a:pPr>
             <a:r>
               <a:t>          &lt;upper&gt;1e16&lt;/upper&gt;</a:t>
             </a:r>
-            <a:br/>
+          </a:p>
+          <a:p>
+            <a:pPr algn="l">
+              <a:spcAft>
+                <a:spcPts val="0"/>
+              </a:spcAft>
+              <a:defRPr sz="1400" b="0">
+                <a:solidFill>
+                  <a:srgbClr val="FFFFFF"/>
+                </a:solidFill>
+                <a:latin typeface="DejaVu Sans Mono"/>
+              </a:defRPr>
+            </a:pPr>
             <a:r>
               <a:t>        &lt;/limit&gt;</a:t>
             </a:r>
@@ -20133,7 +21587,7 @@
           </a:fontRef>
         </p:style>
         <p:txBody>
-          <a:bodyPr rtlCol="0" anchor="ctr" wrap="square" lIns="164592" rIns="164592" tIns="109728" bIns="36576"/>
+          <a:bodyPr rtlCol="0" anchor="ctr" wrap="square" lIns="164592" rIns="164592" tIns="109728" bIns="73152"/>
           <a:lstStyle/>
           <a:p>
             <a:pPr algn="l">
@@ -20150,47 +21604,179 @@
             <a:r>
               <a:t>      &lt;/axis&gt;</a:t>
             </a:r>
-            <a:br/>
+          </a:p>
+          <a:p>
+            <a:pPr algn="l">
+              <a:spcAft>
+                <a:spcPts val="0"/>
+              </a:spcAft>
+              <a:defRPr sz="1400" b="0">
+                <a:solidFill>
+                  <a:srgbClr val="FFFFFF"/>
+                </a:solidFill>
+                <a:latin typeface="DejaVu Sans Mono"/>
+              </a:defRPr>
+            </a:pPr>
             <a:r>
               <a:t>    &lt;/joint&gt;</a:t>
             </a:r>
-            <a:br/>
+          </a:p>
+          <a:p>
+            <a:pPr algn="l">
+              <a:spcAft>
+                <a:spcPts val="0"/>
+              </a:spcAft>
+              <a:defRPr sz="1400" b="0">
+                <a:solidFill>
+                  <a:srgbClr val="FFFFFF"/>
+                </a:solidFill>
+                <a:latin typeface="DejaVu Sans Mono"/>
+              </a:defRPr>
+            </a:pPr>
             <a:r>
               <a:t>    &lt;joint name="right_wheel_joint" type="revolute"&gt;</a:t>
             </a:r>
-            <a:br/>
+          </a:p>
+          <a:p>
+            <a:pPr algn="l">
+              <a:spcAft>
+                <a:spcPts val="0"/>
+              </a:spcAft>
+              <a:defRPr sz="1400" b="0">
+                <a:solidFill>
+                  <a:srgbClr val="FFFFFF"/>
+                </a:solidFill>
+                <a:latin typeface="DejaVu Sans Mono"/>
+              </a:defRPr>
+            </a:pPr>
             <a:r>
               <a:t>      &lt;parent&gt;base_link&lt;/parent&gt;</a:t>
             </a:r>
-            <a:br/>
+          </a:p>
+          <a:p>
+            <a:pPr algn="l">
+              <a:spcAft>
+                <a:spcPts val="0"/>
+              </a:spcAft>
+              <a:defRPr sz="1400" b="0">
+                <a:solidFill>
+                  <a:srgbClr val="FFFFFF"/>
+                </a:solidFill>
+                <a:latin typeface="DejaVu Sans Mono"/>
+              </a:defRPr>
+            </a:pPr>
             <a:r>
               <a:t>      &lt;child&gt;right_wheel_link&lt;/child&gt;</a:t>
             </a:r>
-            <a:br/>
+          </a:p>
+          <a:p>
+            <a:pPr algn="l">
+              <a:spcAft>
+                <a:spcPts val="0"/>
+              </a:spcAft>
+              <a:defRPr sz="1400" b="0">
+                <a:solidFill>
+                  <a:srgbClr val="FFFFFF"/>
+                </a:solidFill>
+                <a:latin typeface="DejaVu Sans Mono"/>
+              </a:defRPr>
+            </a:pPr>
             <a:r>
               <a:t>      &lt;axis&gt;</a:t>
             </a:r>
-            <a:br/>
+          </a:p>
+          <a:p>
+            <a:pPr algn="l">
+              <a:spcAft>
+                <a:spcPts val="0"/>
+              </a:spcAft>
+              <a:defRPr sz="1400" b="0">
+                <a:solidFill>
+                  <a:srgbClr val="FFFFFF"/>
+                </a:solidFill>
+                <a:latin typeface="DejaVu Sans Mono"/>
+              </a:defRPr>
+            </a:pPr>
             <a:r>
               <a:t>        &lt;xyz&gt;0 1 0&lt;/xyz&gt;</a:t>
             </a:r>
-            <a:br/>
+          </a:p>
+          <a:p>
+            <a:pPr algn="l">
+              <a:spcAft>
+                <a:spcPts val="0"/>
+              </a:spcAft>
+              <a:defRPr sz="1400" b="0">
+                <a:solidFill>
+                  <a:srgbClr val="FFFFFF"/>
+                </a:solidFill>
+                <a:latin typeface="DejaVu Sans Mono"/>
+              </a:defRPr>
+            </a:pPr>
             <a:r>
               <a:t>        &lt;limit&gt;</a:t>
             </a:r>
-            <a:br/>
+          </a:p>
+          <a:p>
+            <a:pPr algn="l">
+              <a:spcAft>
+                <a:spcPts val="0"/>
+              </a:spcAft>
+              <a:defRPr sz="1400" b="0">
+                <a:solidFill>
+                  <a:srgbClr val="FFFFFF"/>
+                </a:solidFill>
+                <a:latin typeface="DejaVu Sans Mono"/>
+              </a:defRPr>
+            </a:pPr>
             <a:r>
               <a:t>          &lt;lower&gt;-1e16&lt;/lower&gt;</a:t>
             </a:r>
-            <a:br/>
+          </a:p>
+          <a:p>
+            <a:pPr algn="l">
+              <a:spcAft>
+                <a:spcPts val="0"/>
+              </a:spcAft>
+              <a:defRPr sz="1400" b="0">
+                <a:solidFill>
+                  <a:srgbClr val="FFFFFF"/>
+                </a:solidFill>
+                <a:latin typeface="DejaVu Sans Mono"/>
+              </a:defRPr>
+            </a:pPr>
             <a:r>
               <a:t>          &lt;upper&gt;1e16&lt;/upper&gt;</a:t>
             </a:r>
-            <a:br/>
+          </a:p>
+          <a:p>
+            <a:pPr algn="l">
+              <a:spcAft>
+                <a:spcPts val="0"/>
+              </a:spcAft>
+              <a:defRPr sz="1400" b="0">
+                <a:solidFill>
+                  <a:srgbClr val="FFFFFF"/>
+                </a:solidFill>
+                <a:latin typeface="DejaVu Sans Mono"/>
+              </a:defRPr>
+            </a:pPr>
             <a:r>
               <a:t>        &lt;/limit&gt;</a:t>
             </a:r>
-            <a:br/>
+          </a:p>
+          <a:p>
+            <a:pPr algn="l">
+              <a:spcAft>
+                <a:spcPts val="0"/>
+              </a:spcAft>
+              <a:defRPr sz="1400" b="0">
+                <a:solidFill>
+                  <a:srgbClr val="FFFFFF"/>
+                </a:solidFill>
+                <a:latin typeface="DejaVu Sans Mono"/>
+              </a:defRPr>
+            </a:pPr>
             <a:r>
               <a:t>      &lt;/axis&gt;</a:t>
             </a:r>
@@ -21026,7 +22612,7 @@
           </a:fontRef>
         </p:style>
         <p:txBody>
-          <a:bodyPr rtlCol="0" anchor="ctr" wrap="square" lIns="164592" rIns="164592" tIns="109728" bIns="36576"/>
+          <a:bodyPr rtlCol="0" anchor="ctr" wrap="square" lIns="164592" rIns="164592" tIns="109728" bIns="73152"/>
           <a:lstStyle/>
           <a:p>
             <a:pPr algn="l">
@@ -21043,11 +22629,35 @@
             <a:r>
               <a:t>    &lt;/joint&gt;</a:t>
             </a:r>
-            <a:br/>
+          </a:p>
+          <a:p>
+            <a:pPr algn="l">
+              <a:spcAft>
+                <a:spcPts val="0"/>
+              </a:spcAft>
+              <a:defRPr sz="1400" b="0">
+                <a:solidFill>
+                  <a:srgbClr val="FFFFFF"/>
+                </a:solidFill>
+                <a:latin typeface="DejaVu Sans Mono"/>
+              </a:defRPr>
+            </a:pPr>
             <a:r>
               <a:t>  &lt;/model&gt;</a:t>
             </a:r>
-            <a:br/>
+          </a:p>
+          <a:p>
+            <a:pPr algn="l">
+              <a:spcAft>
+                <a:spcPts val="0"/>
+              </a:spcAft>
+              <a:defRPr sz="1400" b="0">
+                <a:solidFill>
+                  <a:srgbClr val="FFFFFF"/>
+                </a:solidFill>
+                <a:latin typeface="DejaVu Sans Mono"/>
+              </a:defRPr>
+            </a:pPr>
             <a:r>
               <a:t>&lt;/sdf&gt;</a:t>
             </a:r>
@@ -21519,7 +23129,7 @@
           </a:fontRef>
         </p:style>
         <p:txBody>
-          <a:bodyPr rtlCol="0" anchor="ctr" wrap="square" lIns="73152" rIns="73152" tIns="36576" bIns="36576"/>
+          <a:bodyPr rtlCol="0" anchor="ctr" wrap="square" lIns="109728" rIns="109728" tIns="73152" bIns="73152"/>
           <a:lstStyle/>
           <a:p>
             <a:pPr algn="l">
@@ -21536,7 +23146,19 @@
             <a:r>
               <a:t>mkdir -p ~/ros2_curri/my_agv_ws/src/agv_description/curriculum_stages/M08</a:t>
             </a:r>
-            <a:br/>
+          </a:p>
+          <a:p>
+            <a:pPr algn="l">
+              <a:spcAft>
+                <a:spcPts val="0"/>
+              </a:spcAft>
+              <a:defRPr sz="1600" b="0">
+                <a:solidFill>
+                  <a:srgbClr val="FFFFFF"/>
+                </a:solidFill>
+                <a:latin typeface="DejaVu Sans Mono"/>
+              </a:defRPr>
+            </a:pPr>
             <a:r>
               <a:t>nano ~/ros2_curri/my_agv_ws/src/agv_description/curriculum_stages/M08/warehouse.sdf</a:t>
             </a:r>
@@ -24363,7 +25985,7 @@
           </a:fontRef>
         </p:style>
         <p:txBody>
-          <a:bodyPr rtlCol="0" anchor="ctr" wrap="square" lIns="164592" rIns="164592" tIns="109728" bIns="36576"/>
+          <a:bodyPr rtlCol="0" anchor="ctr" wrap="square" lIns="164592" rIns="164592" tIns="109728" bIns="73152"/>
           <a:lstStyle/>
           <a:p>
             <a:pPr algn="l">
@@ -24380,47 +26002,179 @@
             <a:r>
               <a:t>&lt;?xml version="1.0" ?&gt;</a:t>
             </a:r>
-            <a:br/>
+          </a:p>
+          <a:p>
+            <a:pPr algn="l">
+              <a:spcAft>
+                <a:spcPts val="0"/>
+              </a:spcAft>
+              <a:defRPr sz="1400" b="0">
+                <a:solidFill>
+                  <a:srgbClr val="FFFFFF"/>
+                </a:solidFill>
+                <a:latin typeface="DejaVu Sans Mono"/>
+              </a:defRPr>
+            </a:pPr>
             <a:r>
               <a:t>&lt;sdf version="1.10"&gt;</a:t>
             </a:r>
-            <a:br/>
+          </a:p>
+          <a:p>
+            <a:pPr algn="l">
+              <a:spcAft>
+                <a:spcPts val="0"/>
+              </a:spcAft>
+              <a:defRPr sz="1400" b="0">
+                <a:solidFill>
+                  <a:srgbClr val="FFFFFF"/>
+                </a:solidFill>
+                <a:latin typeface="DejaVu Sans Mono"/>
+              </a:defRPr>
+            </a:pPr>
             <a:r>
               <a:t>  &lt;world name="warehouse_m08"&gt;</a:t>
             </a:r>
-            <a:br/>
+          </a:p>
+          <a:p>
+            <a:pPr algn="l">
+              <a:spcAft>
+                <a:spcPts val="0"/>
+              </a:spcAft>
+              <a:defRPr sz="1400" b="0">
+                <a:solidFill>
+                  <a:srgbClr val="FFFFFF"/>
+                </a:solidFill>
+                <a:latin typeface="DejaVu Sans Mono"/>
+              </a:defRPr>
+            </a:pPr>
             <a:r>
               <a:t>    &lt;gravity&gt;0 0 -9.8&lt;/gravity&gt;</a:t>
             </a:r>
-            <a:br/>
+          </a:p>
+          <a:p>
+            <a:pPr algn="l">
+              <a:spcAft>
+                <a:spcPts val="0"/>
+              </a:spcAft>
+              <a:defRPr sz="1400" b="0">
+                <a:solidFill>
+                  <a:srgbClr val="FFFFFF"/>
+                </a:solidFill>
+                <a:latin typeface="DejaVu Sans Mono"/>
+              </a:defRPr>
+            </a:pPr>
             <a:r>
               <a:t>    &lt;plugin filename="gz-sim-physics-system" name="gz::sim::systems::Physics"/&gt;</a:t>
             </a:r>
-            <a:br/>
+          </a:p>
+          <a:p>
+            <a:pPr algn="l">
+              <a:spcAft>
+                <a:spcPts val="0"/>
+              </a:spcAft>
+              <a:defRPr sz="1400" b="0">
+                <a:solidFill>
+                  <a:srgbClr val="FFFFFF"/>
+                </a:solidFill>
+                <a:latin typeface="DejaVu Sans Mono"/>
+              </a:defRPr>
+            </a:pPr>
             <a:r>
               <a:t>    &lt;plugin filename="gz-sim-user-commands-system"</a:t>
             </a:r>
-            <a:br/>
+          </a:p>
+          <a:p>
+            <a:pPr algn="l">
+              <a:spcAft>
+                <a:spcPts val="0"/>
+              </a:spcAft>
+              <a:defRPr sz="1400" b="0">
+                <a:solidFill>
+                  <a:srgbClr val="FFFFFF"/>
+                </a:solidFill>
+                <a:latin typeface="DejaVu Sans Mono"/>
+              </a:defRPr>
+            </a:pPr>
             <a:r>
               <a:t>      name="gz::sim::systems::UserCommands"/&gt;</a:t>
             </a:r>
-            <a:br/>
+          </a:p>
+          <a:p>
+            <a:pPr algn="l">
+              <a:spcAft>
+                <a:spcPts val="0"/>
+              </a:spcAft>
+              <a:defRPr sz="1400" b="0">
+                <a:solidFill>
+                  <a:srgbClr val="FFFFFF"/>
+                </a:solidFill>
+                <a:latin typeface="DejaVu Sans Mono"/>
+              </a:defRPr>
+            </a:pPr>
             <a:r>
               <a:t>    &lt;plugin filename="gz-sim-scene-broadcaster-system"</a:t>
             </a:r>
-            <a:br/>
+          </a:p>
+          <a:p>
+            <a:pPr algn="l">
+              <a:spcAft>
+                <a:spcPts val="0"/>
+              </a:spcAft>
+              <a:defRPr sz="1400" b="0">
+                <a:solidFill>
+                  <a:srgbClr val="FFFFFF"/>
+                </a:solidFill>
+                <a:latin typeface="DejaVu Sans Mono"/>
+              </a:defRPr>
+            </a:pPr>
             <a:r>
               <a:t>      name="gz::sim::systems::SceneBroadcaster"/&gt;</a:t>
             </a:r>
-            <a:br/>
+          </a:p>
+          <a:p>
+            <a:pPr algn="l">
+              <a:spcAft>
+                <a:spcPts val="0"/>
+              </a:spcAft>
+              <a:defRPr sz="1400" b="0">
+                <a:solidFill>
+                  <a:srgbClr val="FFFFFF"/>
+                </a:solidFill>
+                <a:latin typeface="DejaVu Sans Mono"/>
+              </a:defRPr>
+            </a:pPr>
             <a:r>
               <a:t>    &lt;light type="directional" name="sun"&gt;</a:t>
             </a:r>
-            <a:br/>
+          </a:p>
+          <a:p>
+            <a:pPr algn="l">
+              <a:spcAft>
+                <a:spcPts val="0"/>
+              </a:spcAft>
+              <a:defRPr sz="1400" b="0">
+                <a:solidFill>
+                  <a:srgbClr val="FFFFFF"/>
+                </a:solidFill>
+                <a:latin typeface="DejaVu Sans Mono"/>
+              </a:defRPr>
+            </a:pPr>
             <a:r>
               <a:t>      &lt;pose&gt;0 0 10 0 0 0&lt;/pose&gt;</a:t>
             </a:r>
-            <a:br/>
+          </a:p>
+          <a:p>
+            <a:pPr algn="l">
+              <a:spcAft>
+                <a:spcPts val="0"/>
+              </a:spcAft>
+              <a:defRPr sz="1400" b="0">
+                <a:solidFill>
+                  <a:srgbClr val="FFFFFF"/>
+                </a:solidFill>
+                <a:latin typeface="DejaVu Sans Mono"/>
+              </a:defRPr>
+            </a:pPr>
             <a:r>
               <a:t>    &lt;/light&gt;</a:t>
             </a:r>
@@ -24837,7 +26591,7 @@
           </a:fontRef>
         </p:style>
         <p:txBody>
-          <a:bodyPr rtlCol="0" anchor="ctr" wrap="square" lIns="164592" rIns="164592" tIns="109728" bIns="36576"/>
+          <a:bodyPr rtlCol="0" anchor="ctr" wrap="square" lIns="164592" rIns="164592" tIns="109728" bIns="73152"/>
           <a:lstStyle/>
           <a:p>
             <a:pPr algn="l">
@@ -24854,47 +26608,179 @@
             <a:r>
               <a:t>    &lt;model name="ground"&gt;</a:t>
             </a:r>
-            <a:br/>
+          </a:p>
+          <a:p>
+            <a:pPr algn="l">
+              <a:spcAft>
+                <a:spcPts val="0"/>
+              </a:spcAft>
+              <a:defRPr sz="1400" b="0">
+                <a:solidFill>
+                  <a:srgbClr val="FFFFFF"/>
+                </a:solidFill>
+                <a:latin typeface="DejaVu Sans Mono"/>
+              </a:defRPr>
+            </a:pPr>
             <a:r>
               <a:t>      &lt;static&gt;true&lt;/static&gt;</a:t>
             </a:r>
-            <a:br/>
+          </a:p>
+          <a:p>
+            <a:pPr algn="l">
+              <a:spcAft>
+                <a:spcPts val="0"/>
+              </a:spcAft>
+              <a:defRPr sz="1400" b="0">
+                <a:solidFill>
+                  <a:srgbClr val="FFFFFF"/>
+                </a:solidFill>
+                <a:latin typeface="DejaVu Sans Mono"/>
+              </a:defRPr>
+            </a:pPr>
             <a:r>
               <a:t>      &lt;link name="link"&gt;</a:t>
             </a:r>
-            <a:br/>
+          </a:p>
+          <a:p>
+            <a:pPr algn="l">
+              <a:spcAft>
+                <a:spcPts val="0"/>
+              </a:spcAft>
+              <a:defRPr sz="1400" b="0">
+                <a:solidFill>
+                  <a:srgbClr val="FFFFFF"/>
+                </a:solidFill>
+                <a:latin typeface="DejaVu Sans Mono"/>
+              </a:defRPr>
+            </a:pPr>
             <a:r>
               <a:t>        &lt;collision name="collision"&gt;</a:t>
             </a:r>
-            <a:br/>
+          </a:p>
+          <a:p>
+            <a:pPr algn="l">
+              <a:spcAft>
+                <a:spcPts val="0"/>
+              </a:spcAft>
+              <a:defRPr sz="1400" b="0">
+                <a:solidFill>
+                  <a:srgbClr val="FFFFFF"/>
+                </a:solidFill>
+                <a:latin typeface="DejaVu Sans Mono"/>
+              </a:defRPr>
+            </a:pPr>
             <a:r>
               <a:t>          &lt;geometry&gt;</a:t>
             </a:r>
-            <a:br/>
+          </a:p>
+          <a:p>
+            <a:pPr algn="l">
+              <a:spcAft>
+                <a:spcPts val="0"/>
+              </a:spcAft>
+              <a:defRPr sz="1400" b="0">
+                <a:solidFill>
+                  <a:srgbClr val="FFFFFF"/>
+                </a:solidFill>
+                <a:latin typeface="DejaVu Sans Mono"/>
+              </a:defRPr>
+            </a:pPr>
             <a:r>
               <a:t>            &lt;plane&gt;</a:t>
             </a:r>
-            <a:br/>
+          </a:p>
+          <a:p>
+            <a:pPr algn="l">
+              <a:spcAft>
+                <a:spcPts val="0"/>
+              </a:spcAft>
+              <a:defRPr sz="1400" b="0">
+                <a:solidFill>
+                  <a:srgbClr val="FFFFFF"/>
+                </a:solidFill>
+                <a:latin typeface="DejaVu Sans Mono"/>
+              </a:defRPr>
+            </a:pPr>
             <a:r>
               <a:t>              &lt;normal&gt;0 0 1&lt;/normal&gt;</a:t>
             </a:r>
-            <a:br/>
+          </a:p>
+          <a:p>
+            <a:pPr algn="l">
+              <a:spcAft>
+                <a:spcPts val="0"/>
+              </a:spcAft>
+              <a:defRPr sz="1400" b="0">
+                <a:solidFill>
+                  <a:srgbClr val="FFFFFF"/>
+                </a:solidFill>
+                <a:latin typeface="DejaVu Sans Mono"/>
+              </a:defRPr>
+            </a:pPr>
             <a:r>
               <a:t>              &lt;size&gt;30 30&lt;/size&gt;</a:t>
             </a:r>
-            <a:br/>
+          </a:p>
+          <a:p>
+            <a:pPr algn="l">
+              <a:spcAft>
+                <a:spcPts val="0"/>
+              </a:spcAft>
+              <a:defRPr sz="1400" b="0">
+                <a:solidFill>
+                  <a:srgbClr val="FFFFFF"/>
+                </a:solidFill>
+                <a:latin typeface="DejaVu Sans Mono"/>
+              </a:defRPr>
+            </a:pPr>
             <a:r>
               <a:t>            &lt;/plane&gt;</a:t>
             </a:r>
-            <a:br/>
+          </a:p>
+          <a:p>
+            <a:pPr algn="l">
+              <a:spcAft>
+                <a:spcPts val="0"/>
+              </a:spcAft>
+              <a:defRPr sz="1400" b="0">
+                <a:solidFill>
+                  <a:srgbClr val="FFFFFF"/>
+                </a:solidFill>
+                <a:latin typeface="DejaVu Sans Mono"/>
+              </a:defRPr>
+            </a:pPr>
             <a:r>
               <a:t>          &lt;/geometry&gt;</a:t>
             </a:r>
-            <a:br/>
+          </a:p>
+          <a:p>
+            <a:pPr algn="l">
+              <a:spcAft>
+                <a:spcPts val="0"/>
+              </a:spcAft>
+              <a:defRPr sz="1400" b="0">
+                <a:solidFill>
+                  <a:srgbClr val="FFFFFF"/>
+                </a:solidFill>
+                <a:latin typeface="DejaVu Sans Mono"/>
+              </a:defRPr>
+            </a:pPr>
             <a:r>
               <a:t>        &lt;/collision&gt;</a:t>
             </a:r>
-            <a:br/>
+          </a:p>
+          <a:p>
+            <a:pPr algn="l">
+              <a:spcAft>
+                <a:spcPts val="0"/>
+              </a:spcAft>
+              <a:defRPr sz="1400" b="0">
+                <a:solidFill>
+                  <a:srgbClr val="FFFFFF"/>
+                </a:solidFill>
+                <a:latin typeface="DejaVu Sans Mono"/>
+              </a:defRPr>
+            </a:pPr>
             <a:r>
               <a:t>        &lt;visual name="visual"&gt;</a:t>
             </a:r>
@@ -25311,7 +27197,7 @@
           </a:fontRef>
         </p:style>
         <p:txBody>
-          <a:bodyPr rtlCol="0" anchor="ctr" wrap="square" lIns="164592" rIns="164592" tIns="109728" bIns="36576"/>
+          <a:bodyPr rtlCol="0" anchor="ctr" wrap="square" lIns="164592" rIns="164592" tIns="109728" bIns="73152"/>
           <a:lstStyle/>
           <a:p>
             <a:pPr algn="l">
@@ -25328,47 +27214,179 @@
             <a:r>
               <a:t>          &lt;geometry&gt;</a:t>
             </a:r>
-            <a:br/>
+          </a:p>
+          <a:p>
+            <a:pPr algn="l">
+              <a:spcAft>
+                <a:spcPts val="0"/>
+              </a:spcAft>
+              <a:defRPr sz="1400" b="0">
+                <a:solidFill>
+                  <a:srgbClr val="FFFFFF"/>
+                </a:solidFill>
+                <a:latin typeface="DejaVu Sans Mono"/>
+              </a:defRPr>
+            </a:pPr>
             <a:r>
               <a:t>            &lt;plane&gt;</a:t>
             </a:r>
-            <a:br/>
+          </a:p>
+          <a:p>
+            <a:pPr algn="l">
+              <a:spcAft>
+                <a:spcPts val="0"/>
+              </a:spcAft>
+              <a:defRPr sz="1400" b="0">
+                <a:solidFill>
+                  <a:srgbClr val="FFFFFF"/>
+                </a:solidFill>
+                <a:latin typeface="DejaVu Sans Mono"/>
+              </a:defRPr>
+            </a:pPr>
             <a:r>
               <a:t>              &lt;normal&gt;0 0 1&lt;/normal&gt;</a:t>
             </a:r>
-            <a:br/>
+          </a:p>
+          <a:p>
+            <a:pPr algn="l">
+              <a:spcAft>
+                <a:spcPts val="0"/>
+              </a:spcAft>
+              <a:defRPr sz="1400" b="0">
+                <a:solidFill>
+                  <a:srgbClr val="FFFFFF"/>
+                </a:solidFill>
+                <a:latin typeface="DejaVu Sans Mono"/>
+              </a:defRPr>
+            </a:pPr>
             <a:r>
               <a:t>              &lt;size&gt;30 30&lt;/size&gt;</a:t>
             </a:r>
-            <a:br/>
+          </a:p>
+          <a:p>
+            <a:pPr algn="l">
+              <a:spcAft>
+                <a:spcPts val="0"/>
+              </a:spcAft>
+              <a:defRPr sz="1400" b="0">
+                <a:solidFill>
+                  <a:srgbClr val="FFFFFF"/>
+                </a:solidFill>
+                <a:latin typeface="DejaVu Sans Mono"/>
+              </a:defRPr>
+            </a:pPr>
             <a:r>
               <a:t>            &lt;/plane&gt;</a:t>
             </a:r>
-            <a:br/>
+          </a:p>
+          <a:p>
+            <a:pPr algn="l">
+              <a:spcAft>
+                <a:spcPts val="0"/>
+              </a:spcAft>
+              <a:defRPr sz="1400" b="0">
+                <a:solidFill>
+                  <a:srgbClr val="FFFFFF"/>
+                </a:solidFill>
+                <a:latin typeface="DejaVu Sans Mono"/>
+              </a:defRPr>
+            </a:pPr>
             <a:r>
               <a:t>          &lt;/geometry&gt;</a:t>
             </a:r>
-            <a:br/>
+          </a:p>
+          <a:p>
+            <a:pPr algn="l">
+              <a:spcAft>
+                <a:spcPts val="0"/>
+              </a:spcAft>
+              <a:defRPr sz="1400" b="0">
+                <a:solidFill>
+                  <a:srgbClr val="FFFFFF"/>
+                </a:solidFill>
+                <a:latin typeface="DejaVu Sans Mono"/>
+              </a:defRPr>
+            </a:pPr>
             <a:r>
               <a:t>        &lt;/visual&gt;</a:t>
             </a:r>
-            <a:br/>
+          </a:p>
+          <a:p>
+            <a:pPr algn="l">
+              <a:spcAft>
+                <a:spcPts val="0"/>
+              </a:spcAft>
+              <a:defRPr sz="1400" b="0">
+                <a:solidFill>
+                  <a:srgbClr val="FFFFFF"/>
+                </a:solidFill>
+                <a:latin typeface="DejaVu Sans Mono"/>
+              </a:defRPr>
+            </a:pPr>
             <a:r>
               <a:t>      &lt;/link&gt;</a:t>
             </a:r>
-            <a:br/>
+          </a:p>
+          <a:p>
+            <a:pPr algn="l">
+              <a:spcAft>
+                <a:spcPts val="0"/>
+              </a:spcAft>
+              <a:defRPr sz="1400" b="0">
+                <a:solidFill>
+                  <a:srgbClr val="FFFFFF"/>
+                </a:solidFill>
+                <a:latin typeface="DejaVu Sans Mono"/>
+              </a:defRPr>
+            </a:pPr>
             <a:r>
               <a:t>    &lt;/model&gt;</a:t>
             </a:r>
-            <a:br/>
+          </a:p>
+          <a:p>
+            <a:pPr algn="l">
+              <a:spcAft>
+                <a:spcPts val="0"/>
+              </a:spcAft>
+              <a:defRPr sz="1400" b="0">
+                <a:solidFill>
+                  <a:srgbClr val="FFFFFF"/>
+                </a:solidFill>
+                <a:latin typeface="DejaVu Sans Mono"/>
+              </a:defRPr>
+            </a:pPr>
             <a:r>
               <a:t>    &lt;include&gt;</a:t>
             </a:r>
-            <a:br/>
+          </a:p>
+          <a:p>
+            <a:pPr algn="l">
+              <a:spcAft>
+                <a:spcPts val="0"/>
+              </a:spcAft>
+              <a:defRPr sz="1400" b="0">
+                <a:solidFill>
+                  <a:srgbClr val="FFFFFF"/>
+                </a:solidFill>
+                <a:latin typeface="DejaVu Sans Mono"/>
+              </a:defRPr>
+            </a:pPr>
             <a:r>
               <a:t>      &lt;uri&gt;model://agv&lt;/uri&gt;</a:t>
             </a:r>
-            <a:br/>
+          </a:p>
+          <a:p>
+            <a:pPr algn="l">
+              <a:spcAft>
+                <a:spcPts val="0"/>
+              </a:spcAft>
+              <a:defRPr sz="1400" b="0">
+                <a:solidFill>
+                  <a:srgbClr val="FFFFFF"/>
+                </a:solidFill>
+                <a:latin typeface="DejaVu Sans Mono"/>
+              </a:defRPr>
+            </a:pPr>
             <a:r>
               <a:t>      &lt;name&gt;agv&lt;/name&gt;</a:t>
             </a:r>
@@ -25785,7 +27803,7 @@
           </a:fontRef>
         </p:style>
         <p:txBody>
-          <a:bodyPr rtlCol="0" anchor="ctr" wrap="square" lIns="164592" rIns="164592" tIns="109728" bIns="36576"/>
+          <a:bodyPr rtlCol="0" anchor="ctr" wrap="square" lIns="164592" rIns="164592" tIns="109728" bIns="73152"/>
           <a:lstStyle/>
           <a:p>
             <a:pPr algn="l">
@@ -25802,15 +27820,51 @@
             <a:r>
               <a:t>      &lt;pose&gt;0 0 0.08 0 0 0&lt;/pose&gt;</a:t>
             </a:r>
-            <a:br/>
+          </a:p>
+          <a:p>
+            <a:pPr algn="l">
+              <a:spcAft>
+                <a:spcPts val="0"/>
+              </a:spcAft>
+              <a:defRPr sz="1400" b="0">
+                <a:solidFill>
+                  <a:srgbClr val="FFFFFF"/>
+                </a:solidFill>
+                <a:latin typeface="DejaVu Sans Mono"/>
+              </a:defRPr>
+            </a:pPr>
             <a:r>
               <a:t>    &lt;/include&gt;</a:t>
             </a:r>
-            <a:br/>
+          </a:p>
+          <a:p>
+            <a:pPr algn="l">
+              <a:spcAft>
+                <a:spcPts val="0"/>
+              </a:spcAft>
+              <a:defRPr sz="1400" b="0">
+                <a:solidFill>
+                  <a:srgbClr val="FFFFFF"/>
+                </a:solidFill>
+                <a:latin typeface="DejaVu Sans Mono"/>
+              </a:defRPr>
+            </a:pPr>
             <a:r>
               <a:t>  &lt;/world&gt;</a:t>
             </a:r>
-            <a:br/>
+          </a:p>
+          <a:p>
+            <a:pPr algn="l">
+              <a:spcAft>
+                <a:spcPts val="0"/>
+              </a:spcAft>
+              <a:defRPr sz="1400" b="0">
+                <a:solidFill>
+                  <a:srgbClr val="FFFFFF"/>
+                </a:solidFill>
+                <a:latin typeface="DejaVu Sans Mono"/>
+              </a:defRPr>
+            </a:pPr>
             <a:r>
               <a:t>&lt;/sdf&gt;</a:t>
             </a:r>
@@ -26083,7 +28137,7 @@
               </a:defRPr>
             </a:pPr>
             <a:r>
-              <a:t>현재 단계 실행 1/2    |    현재 폴더 ~/ros2_curri/my_agv_ws    |    현재 터미널</a:t>
+              <a:t>현재 단계 실행 1/2    |    현재 폴더 ~/ros2_curri/my_agv_ws    |    터미널 1</a:t>
             </a:r>
           </a:p>
         </p:txBody>
@@ -26096,25 +28150,25 @@
         </p:nvSpPr>
         <p:spPr>
           <a:xfrm>
-            <a:off x="676656" y="1764792"/>
-            <a:ext cx="1828800" cy="347472"/>
-          </a:xfrm>
-          <a:prstGeom prst="rect">
-            <a:avLst/>
-          </a:prstGeom>
-          <a:noFill/>
-        </p:spPr>
-        <p:txBody>
-          <a:bodyPr wrap="square" lIns="73152" rIns="73152" tIns="36576" bIns="36576">
-            <a:spAutoFit/>
-          </a:bodyPr>
-          <a:lstStyle/>
-          <a:p>
-            <a:pPr algn="l">
-              <a:spcAft>
-                <a:spcPts val="0"/>
-              </a:spcAft>
-              <a:defRPr sz="1800" b="1">
+            <a:off x="676656" y="1719072"/>
+            <a:ext cx="1691640" cy="274320"/>
+          </a:xfrm>
+          <a:prstGeom prst="rect">
+            <a:avLst/>
+          </a:prstGeom>
+          <a:noFill/>
+        </p:spPr>
+        <p:txBody>
+          <a:bodyPr wrap="square" lIns="73152" rIns="73152" tIns="36576" bIns="36576">
+            <a:spAutoFit/>
+          </a:bodyPr>
+          <a:lstStyle/>
+          <a:p>
+            <a:pPr algn="l">
+              <a:spcAft>
+                <a:spcPts val="0"/>
+              </a:spcAft>
+              <a:defRPr sz="1700" b="1">
                 <a:solidFill>
                   <a:srgbClr val="225B9B"/>
                 </a:solidFill>
@@ -26122,7 +28176,7 @@
               </a:defRPr>
             </a:pPr>
             <a:r>
-              <a:t>왜 하는가</a:t>
+              <a:t>명령의 목적</a:t>
             </a:r>
           </a:p>
         </p:txBody>
@@ -26135,7 +28189,7 @@
         </p:nvSpPr>
         <p:spPr>
           <a:xfrm>
-            <a:off x="676656" y="2103120"/>
+            <a:off x="676656" y="2002536"/>
             <a:ext cx="10789920" cy="512064"/>
           </a:xfrm>
           <a:prstGeom prst="rect">
@@ -26153,7 +28207,7 @@
               <a:spcAft>
                 <a:spcPts val="0"/>
               </a:spcAft>
-              <a:defRPr sz="2000" b="0">
+              <a:defRPr sz="1800" b="0">
                 <a:solidFill>
                   <a:srgbClr val="122C4E"/>
                 </a:solidFill>
@@ -26168,14 +28222,53 @@
       </p:sp>
       <p:sp>
         <p:nvSpPr>
-          <p:cNvPr id="9" name="Rounded Rectangle 8"/>
+          <p:cNvPr id="9" name="TextBox 8"/>
+          <p:cNvSpPr txBox="1"/>
+          <p:nvPr/>
+        </p:nvSpPr>
+        <p:spPr>
+          <a:xfrm>
+            <a:off x="676656" y="2816352"/>
+            <a:ext cx="10835640" cy="256032"/>
+          </a:xfrm>
+          <a:prstGeom prst="rect">
+            <a:avLst/>
+          </a:prstGeom>
+          <a:noFill/>
+        </p:spPr>
+        <p:txBody>
+          <a:bodyPr wrap="square" lIns="73152" rIns="73152" tIns="36576" bIns="36576">
+            <a:spAutoFit/>
+          </a:bodyPr>
+          <a:lstStyle/>
+          <a:p>
+            <a:pPr algn="ctr">
+              <a:spcAft>
+                <a:spcPts val="0"/>
+              </a:spcAft>
+              <a:defRPr sz="1600" b="1">
+                <a:solidFill>
+                  <a:srgbClr val="225B9B"/>
+                </a:solidFill>
+                <a:latin typeface="Noto Sans CJK KR"/>
+              </a:defRPr>
+            </a:pPr>
+            <a:r>
+              <a:t>터미널 1 — 아래 검은 블록은 명령만 복사합니다.</a:t>
+            </a:r>
+          </a:p>
+        </p:txBody>
+      </p:sp>
+      <p:sp>
+        <p:nvSpPr>
+          <p:cNvPr id="10" name="Rounded Rectangle 9"/>
           <p:cNvSpPr/>
           <p:nvPr/>
         </p:nvSpPr>
         <p:spPr>
           <a:xfrm>
-            <a:off x="676656" y="2871216"/>
-            <a:ext cx="10835640" cy="2331720"/>
+            <a:off x="676656" y="3154680"/>
+            <a:ext cx="10835640" cy="1938528"/>
           </a:xfrm>
           <a:prstGeom prst="roundRect">
             <a:avLst/>
@@ -26204,7 +28297,7 @@
           </a:fontRef>
         </p:style>
         <p:txBody>
-          <a:bodyPr rtlCol="0" anchor="ctr" wrap="square" lIns="73152" rIns="73152" tIns="36576" bIns="36576"/>
+          <a:bodyPr rtlCol="0" anchor="ctr" wrap="square" lIns="109728" rIns="109728" tIns="73152" bIns="73152"/>
           <a:lstStyle/>
           <a:p>
             <a:pPr algn="l">
@@ -26221,11 +28314,35 @@
             <a:r>
               <a:t>cd ~/ros2_curri/my_agv_ws</a:t>
             </a:r>
-            <a:br/>
+          </a:p>
+          <a:p>
+            <a:pPr algn="l">
+              <a:spcAft>
+                <a:spcPts val="0"/>
+              </a:spcAft>
+              <a:defRPr sz="1600" b="0">
+                <a:solidFill>
+                  <a:srgbClr val="FFFFFF"/>
+                </a:solidFill>
+                <a:latin typeface="DejaVu Sans Mono"/>
+              </a:defRPr>
+            </a:pPr>
             <a:r>
               <a:t>gz sdf -k src/agv_description/curriculum_stages/M08/model.sdf</a:t>
             </a:r>
-            <a:br/>
+          </a:p>
+          <a:p>
+            <a:pPr algn="l">
+              <a:spcAft>
+                <a:spcPts val="0"/>
+              </a:spcAft>
+              <a:defRPr sz="1600" b="0">
+                <a:solidFill>
+                  <a:srgbClr val="FFFFFF"/>
+                </a:solidFill>
+                <a:latin typeface="DejaVu Sans Mono"/>
+              </a:defRPr>
+            </a:pPr>
             <a:r>
               <a:t>rg -n 'model://agv|&lt;world name=' src/agv_description/curriculum_stages/M08/warehouse.sdf</a:t>
             </a:r>
@@ -26234,31 +28351,31 @@
       </p:sp>
       <p:sp>
         <p:nvSpPr>
-          <p:cNvPr id="10" name="TextBox 9"/>
-          <p:cNvSpPr txBox="1"/>
-          <p:nvPr/>
-        </p:nvSpPr>
-        <p:spPr>
-          <a:xfrm>
-            <a:off x="768096" y="5468112"/>
-            <a:ext cx="1143000" cy="256032"/>
-          </a:xfrm>
-          <a:prstGeom prst="rect">
-            <a:avLst/>
-          </a:prstGeom>
-          <a:noFill/>
-        </p:spPr>
-        <p:txBody>
-          <a:bodyPr wrap="square" lIns="73152" rIns="73152" tIns="36576" bIns="36576">
-            <a:spAutoFit/>
-          </a:bodyPr>
-          <a:lstStyle/>
-          <a:p>
-            <a:pPr algn="l">
-              <a:spcAft>
-                <a:spcPts val="0"/>
-              </a:spcAft>
-              <a:defRPr sz="1800" b="1">
+          <p:cNvPr id="11" name="TextBox 10"/>
+          <p:cNvSpPr txBox="1"/>
+          <p:nvPr/>
+        </p:nvSpPr>
+        <p:spPr>
+          <a:xfrm>
+            <a:off x="768096" y="5276088"/>
+            <a:ext cx="10561320" cy="384048"/>
+          </a:xfrm>
+          <a:prstGeom prst="rect">
+            <a:avLst/>
+          </a:prstGeom>
+          <a:noFill/>
+        </p:spPr>
+        <p:txBody>
+          <a:bodyPr wrap="square" lIns="73152" rIns="73152" tIns="36576" bIns="36576">
+            <a:spAutoFit/>
+          </a:bodyPr>
+          <a:lstStyle/>
+          <a:p>
+            <a:pPr algn="ctr">
+              <a:spcAft>
+                <a:spcPts val="0"/>
+              </a:spcAft>
+              <a:defRPr sz="1500" b="1">
                 <a:solidFill>
                   <a:srgbClr val="2A8B5A"/>
                 </a:solidFill>
@@ -26266,38 +28383,38 @@
               </a:defRPr>
             </a:pPr>
             <a:r>
-              <a:t>확인</a:t>
-            </a:r>
-          </a:p>
-        </p:txBody>
-      </p:sp>
-      <p:sp>
-        <p:nvSpPr>
-          <p:cNvPr id="11" name="TextBox 10"/>
-          <p:cNvSpPr txBox="1"/>
-          <p:nvPr/>
-        </p:nvSpPr>
-        <p:spPr>
-          <a:xfrm>
-            <a:off x="768096" y="5742432"/>
-            <a:ext cx="10561320" cy="347472"/>
-          </a:xfrm>
-          <a:prstGeom prst="rect">
-            <a:avLst/>
-          </a:prstGeom>
-          <a:noFill/>
-        </p:spPr>
-        <p:txBody>
-          <a:bodyPr wrap="square" lIns="73152" rIns="73152" tIns="36576" bIns="36576">
-            <a:spAutoFit/>
-          </a:bodyPr>
-          <a:lstStyle/>
-          <a:p>
-            <a:pPr algn="l">
-              <a:spcAft>
-                <a:spcPts val="0"/>
-              </a:spcAft>
-              <a:defRPr sz="1800" b="0">
+              <a:t>터미널 1 역할: 터미널 1에서 이 명령만 그대로 복사해 실행합니다.</a:t>
+            </a:r>
+          </a:p>
+        </p:txBody>
+      </p:sp>
+      <p:sp>
+        <p:nvSpPr>
+          <p:cNvPr id="12" name="TextBox 11"/>
+          <p:cNvSpPr txBox="1"/>
+          <p:nvPr/>
+        </p:nvSpPr>
+        <p:spPr>
+          <a:xfrm>
+            <a:off x="768096" y="5916168"/>
+            <a:ext cx="10561320" cy="292608"/>
+          </a:xfrm>
+          <a:prstGeom prst="rect">
+            <a:avLst/>
+          </a:prstGeom>
+          <a:noFill/>
+        </p:spPr>
+        <p:txBody>
+          <a:bodyPr wrap="square" lIns="73152" rIns="73152" tIns="36576" bIns="36576">
+            <a:spAutoFit/>
+          </a:bodyPr>
+          <a:lstStyle/>
+          <a:p>
+            <a:pPr algn="ctr">
+              <a:spcAft>
+                <a:spcPts val="0"/>
+              </a:spcAft>
+              <a:defRPr sz="1500" b="1">
                 <a:solidFill>
                   <a:srgbClr val="122C4E"/>
                 </a:solidFill>
@@ -26305,7 +28422,7 @@
               </a:defRPr>
             </a:pPr>
             <a:r>
-              <a:t>출력에서 topic·frame·파일 이름 또는 성공 메시지를 찾고, 맞지 않으면 다음 파일로 가지 않습니다.</a:t>
+              <a:t>확인: 출력에서 topic·frame·파일 이름 또는 성공 메시지를 찾고, 맞지 않으면 다음 파일로 가지 않습니다.</a:t>
             </a:r>
           </a:p>
         </p:txBody>
@@ -26870,7 +28987,7 @@
               </a:defRPr>
             </a:pPr>
             <a:r>
-              <a:t>현재 단계 실행 2/2    |    현재 폴더 ~/ros2_curri/my_agv_ws    |    현재 터미널</a:t>
+              <a:t>현재 단계 실행 2/2    |    현재 폴더 ~/ros2_curri/my_agv_ws    |    터미널 1</a:t>
             </a:r>
           </a:p>
         </p:txBody>
@@ -26883,25 +29000,25 @@
         </p:nvSpPr>
         <p:spPr>
           <a:xfrm>
-            <a:off x="676656" y="1764792"/>
-            <a:ext cx="1828800" cy="347472"/>
-          </a:xfrm>
-          <a:prstGeom prst="rect">
-            <a:avLst/>
-          </a:prstGeom>
-          <a:noFill/>
-        </p:spPr>
-        <p:txBody>
-          <a:bodyPr wrap="square" lIns="73152" rIns="73152" tIns="36576" bIns="36576">
-            <a:spAutoFit/>
-          </a:bodyPr>
-          <a:lstStyle/>
-          <a:p>
-            <a:pPr algn="l">
-              <a:spcAft>
-                <a:spcPts val="0"/>
-              </a:spcAft>
-              <a:defRPr sz="1800" b="1">
+            <a:off x="676656" y="1719072"/>
+            <a:ext cx="1691640" cy="274320"/>
+          </a:xfrm>
+          <a:prstGeom prst="rect">
+            <a:avLst/>
+          </a:prstGeom>
+          <a:noFill/>
+        </p:spPr>
+        <p:txBody>
+          <a:bodyPr wrap="square" lIns="73152" rIns="73152" tIns="36576" bIns="36576">
+            <a:spAutoFit/>
+          </a:bodyPr>
+          <a:lstStyle/>
+          <a:p>
+            <a:pPr algn="l">
+              <a:spcAft>
+                <a:spcPts val="0"/>
+              </a:spcAft>
+              <a:defRPr sz="1700" b="1">
                 <a:solidFill>
                   <a:srgbClr val="225B9B"/>
                 </a:solidFill>
@@ -26909,7 +29026,7 @@
               </a:defRPr>
             </a:pPr>
             <a:r>
-              <a:t>왜 하는가</a:t>
+              <a:t>명령의 목적</a:t>
             </a:r>
           </a:p>
         </p:txBody>
@@ -26922,7 +29039,7 @@
         </p:nvSpPr>
         <p:spPr>
           <a:xfrm>
-            <a:off x="676656" y="2103120"/>
+            <a:off x="676656" y="2002536"/>
             <a:ext cx="10789920" cy="512064"/>
           </a:xfrm>
           <a:prstGeom prst="rect">
@@ -26940,7 +29057,7 @@
               <a:spcAft>
                 <a:spcPts val="0"/>
               </a:spcAft>
-              <a:defRPr sz="2000" b="0">
+              <a:defRPr sz="1800" b="0">
                 <a:solidFill>
                   <a:srgbClr val="122C4E"/>
                 </a:solidFill>
@@ -26955,14 +29072,53 @@
       </p:sp>
       <p:sp>
         <p:nvSpPr>
-          <p:cNvPr id="9" name="Rounded Rectangle 8"/>
+          <p:cNvPr id="9" name="TextBox 8"/>
+          <p:cNvSpPr txBox="1"/>
+          <p:nvPr/>
+        </p:nvSpPr>
+        <p:spPr>
+          <a:xfrm>
+            <a:off x="676656" y="2816352"/>
+            <a:ext cx="10835640" cy="256032"/>
+          </a:xfrm>
+          <a:prstGeom prst="rect">
+            <a:avLst/>
+          </a:prstGeom>
+          <a:noFill/>
+        </p:spPr>
+        <p:txBody>
+          <a:bodyPr wrap="square" lIns="73152" rIns="73152" tIns="36576" bIns="36576">
+            <a:spAutoFit/>
+          </a:bodyPr>
+          <a:lstStyle/>
+          <a:p>
+            <a:pPr algn="ctr">
+              <a:spcAft>
+                <a:spcPts val="0"/>
+              </a:spcAft>
+              <a:defRPr sz="1600" b="1">
+                <a:solidFill>
+                  <a:srgbClr val="225B9B"/>
+                </a:solidFill>
+                <a:latin typeface="Noto Sans CJK KR"/>
+              </a:defRPr>
+            </a:pPr>
+            <a:r>
+              <a:t>터미널 1 — 아래 검은 블록은 명령만 복사합니다.</a:t>
+            </a:r>
+          </a:p>
+        </p:txBody>
+      </p:sp>
+      <p:sp>
+        <p:nvSpPr>
+          <p:cNvPr id="10" name="Rounded Rectangle 9"/>
           <p:cNvSpPr/>
           <p:nvPr/>
         </p:nvSpPr>
         <p:spPr>
           <a:xfrm>
-            <a:off x="676656" y="2871216"/>
-            <a:ext cx="10835640" cy="2331720"/>
+            <a:off x="676656" y="3154680"/>
+            <a:ext cx="10835640" cy="1938528"/>
           </a:xfrm>
           <a:prstGeom prst="roundRect">
             <a:avLst/>
@@ -26991,7 +29147,7 @@
           </a:fontRef>
         </p:style>
         <p:txBody>
-          <a:bodyPr rtlCol="0" anchor="ctr" wrap="square" lIns="73152" rIns="73152" tIns="36576" bIns="36576"/>
+          <a:bodyPr rtlCol="0" anchor="ctr" wrap="square" lIns="109728" rIns="109728" tIns="73152" bIns="73152"/>
           <a:lstStyle/>
           <a:p>
             <a:pPr algn="l">
@@ -27008,40 +29164,36 @@
             <a:r>
               <a:t>gz sim -r src/agv_description/curriculum_stages/M08/warehouse.sdf</a:t>
             </a:r>
-            <a:br/>
-            <a:r>
-              <a:t># 이 단계에는 ROS bridge와 구동 topic이 없다.</a:t>
-            </a:r>
-          </a:p>
-        </p:txBody>
-      </p:sp>
-      <p:sp>
-        <p:nvSpPr>
-          <p:cNvPr id="10" name="TextBox 9"/>
-          <p:cNvSpPr txBox="1"/>
-          <p:nvPr/>
-        </p:nvSpPr>
-        <p:spPr>
-          <a:xfrm>
-            <a:off x="768096" y="5468112"/>
-            <a:ext cx="1143000" cy="256032"/>
-          </a:xfrm>
-          <a:prstGeom prst="rect">
-            <a:avLst/>
-          </a:prstGeom>
-          <a:noFill/>
-        </p:spPr>
-        <p:txBody>
-          <a:bodyPr wrap="square" lIns="73152" rIns="73152" tIns="36576" bIns="36576">
-            <a:spAutoFit/>
-          </a:bodyPr>
-          <a:lstStyle/>
-          <a:p>
-            <a:pPr algn="l">
-              <a:spcAft>
-                <a:spcPts val="0"/>
-              </a:spcAft>
-              <a:defRPr sz="1800" b="1">
+          </a:p>
+        </p:txBody>
+      </p:sp>
+      <p:sp>
+        <p:nvSpPr>
+          <p:cNvPr id="11" name="TextBox 10"/>
+          <p:cNvSpPr txBox="1"/>
+          <p:nvPr/>
+        </p:nvSpPr>
+        <p:spPr>
+          <a:xfrm>
+            <a:off x="768096" y="5276088"/>
+            <a:ext cx="10561320" cy="384048"/>
+          </a:xfrm>
+          <a:prstGeom prst="rect">
+            <a:avLst/>
+          </a:prstGeom>
+          <a:noFill/>
+        </p:spPr>
+        <p:txBody>
+          <a:bodyPr wrap="square" lIns="73152" rIns="73152" tIns="36576" bIns="36576">
+            <a:spAutoFit/>
+          </a:bodyPr>
+          <a:lstStyle/>
+          <a:p>
+            <a:pPr algn="ctr">
+              <a:spcAft>
+                <a:spcPts val="0"/>
+              </a:spcAft>
+              <a:defRPr sz="1500" b="1">
                 <a:solidFill>
                   <a:srgbClr val="2A8B5A"/>
                 </a:solidFill>
@@ -27049,38 +29201,38 @@
               </a:defRPr>
             </a:pPr>
             <a:r>
-              <a:t>확인</a:t>
-            </a:r>
-          </a:p>
-        </p:txBody>
-      </p:sp>
-      <p:sp>
-        <p:nvSpPr>
-          <p:cNvPr id="11" name="TextBox 10"/>
-          <p:cNvSpPr txBox="1"/>
-          <p:nvPr/>
-        </p:nvSpPr>
-        <p:spPr>
-          <a:xfrm>
-            <a:off x="768096" y="5742432"/>
-            <a:ext cx="10561320" cy="347472"/>
-          </a:xfrm>
-          <a:prstGeom prst="rect">
-            <a:avLst/>
-          </a:prstGeom>
-          <a:noFill/>
-        </p:spPr>
-        <p:txBody>
-          <a:bodyPr wrap="square" lIns="73152" rIns="73152" tIns="36576" bIns="36576">
-            <a:spAutoFit/>
-          </a:bodyPr>
-          <a:lstStyle/>
-          <a:p>
-            <a:pPr algn="l">
-              <a:spcAft>
-                <a:spcPts val="0"/>
-              </a:spcAft>
-              <a:defRPr sz="1800" b="0">
+              <a:t>터미널 1 역할: 터미널 1에서 이 명령만 그대로 복사해 실행합니다.</a:t>
+            </a:r>
+          </a:p>
+        </p:txBody>
+      </p:sp>
+      <p:sp>
+        <p:nvSpPr>
+          <p:cNvPr id="12" name="TextBox 11"/>
+          <p:cNvSpPr txBox="1"/>
+          <p:nvPr/>
+        </p:nvSpPr>
+        <p:spPr>
+          <a:xfrm>
+            <a:off x="768096" y="5916168"/>
+            <a:ext cx="10561320" cy="292608"/>
+          </a:xfrm>
+          <a:prstGeom prst="rect">
+            <a:avLst/>
+          </a:prstGeom>
+          <a:noFill/>
+        </p:spPr>
+        <p:txBody>
+          <a:bodyPr wrap="square" lIns="73152" rIns="73152" tIns="36576" bIns="36576">
+            <a:spAutoFit/>
+          </a:bodyPr>
+          <a:lstStyle/>
+          <a:p>
+            <a:pPr algn="ctr">
+              <a:spcAft>
+                <a:spcPts val="0"/>
+              </a:spcAft>
+              <a:defRPr sz="1500" b="1">
                 <a:solidFill>
                   <a:srgbClr val="122C4E"/>
                 </a:solidFill>
@@ -27088,7 +29240,7 @@
               </a:defRPr>
             </a:pPr>
             <a:r>
-              <a:t>출력에서 topic·frame·파일 이름 또는 성공 메시지를 찾고, 맞지 않으면 다음 파일로 가지 않습니다.</a:t>
+              <a:t>확인: 출력에서 topic·frame·파일 이름 또는 성공 메시지를 찾고, 맞지 않으면 다음 파일로 가지 않습니다.</a:t>
             </a:r>
           </a:p>
         </p:txBody>
@@ -27320,21 +29472,138 @@
               </a:defRPr>
             </a:pPr>
             <a:r>
-              <a:t>현재 단계 실행    |    현재 폴더 ~/ros2_curri/my_agv_ws    |    현재 터미널</a:t>
-            </a:r>
-          </a:p>
-        </p:txBody>
-      </p:sp>
-      <p:sp>
-        <p:nvSpPr>
-          <p:cNvPr id="7" name="Rounded Rectangle 6"/>
+              <a:t>현재 단계 실행    |    현재 폴더 ~/ros2_curri/my_agv_ws    |    터미널 1</a:t>
+            </a:r>
+          </a:p>
+        </p:txBody>
+      </p:sp>
+      <p:sp>
+        <p:nvSpPr>
+          <p:cNvPr id="7" name="TextBox 6"/>
+          <p:cNvSpPr txBox="1"/>
+          <p:nvPr/>
+        </p:nvSpPr>
+        <p:spPr>
+          <a:xfrm>
+            <a:off x="676656" y="1719072"/>
+            <a:ext cx="1691640" cy="274320"/>
+          </a:xfrm>
+          <a:prstGeom prst="rect">
+            <a:avLst/>
+          </a:prstGeom>
+          <a:noFill/>
+        </p:spPr>
+        <p:txBody>
+          <a:bodyPr wrap="square" lIns="73152" rIns="73152" tIns="36576" bIns="36576">
+            <a:spAutoFit/>
+          </a:bodyPr>
+          <a:lstStyle/>
+          <a:p>
+            <a:pPr algn="l">
+              <a:spcAft>
+                <a:spcPts val="0"/>
+              </a:spcAft>
+              <a:defRPr sz="1700" b="1">
+                <a:solidFill>
+                  <a:srgbClr val="225B9B"/>
+                </a:solidFill>
+                <a:latin typeface="Noto Sans CJK KR"/>
+              </a:defRPr>
+            </a:pPr>
+            <a:r>
+              <a:t>명령의 목적</a:t>
+            </a:r>
+          </a:p>
+        </p:txBody>
+      </p:sp>
+      <p:sp>
+        <p:nvSpPr>
+          <p:cNvPr id="8" name="TextBox 7"/>
+          <p:cNvSpPr txBox="1"/>
+          <p:nvPr/>
+        </p:nvSpPr>
+        <p:spPr>
+          <a:xfrm>
+            <a:off x="676656" y="2002536"/>
+            <a:ext cx="10789920" cy="512064"/>
+          </a:xfrm>
+          <a:prstGeom prst="rect">
+            <a:avLst/>
+          </a:prstGeom>
+          <a:noFill/>
+        </p:spPr>
+        <p:txBody>
+          <a:bodyPr wrap="square" lIns="73152" rIns="73152" tIns="36576" bIns="36576">
+            <a:spAutoFit/>
+          </a:bodyPr>
+          <a:lstStyle/>
+          <a:p>
+            <a:pPr algn="l">
+              <a:spcAft>
+                <a:spcPts val="0"/>
+              </a:spcAft>
+              <a:defRPr sz="1800" b="0">
+                <a:solidFill>
+                  <a:srgbClr val="122C4E"/>
+                </a:solidFill>
+                <a:latin typeface="Noto Sans CJK KR"/>
+              </a:defRPr>
+            </a:pPr>
+            <a:r>
+              <a:t>명령 순서를 바꾸지 않습니다. build가 끝난 뒤 source하고, 마지막 명령으로 node·Gazebo·RViz를 실행합니다.</a:t>
+            </a:r>
+          </a:p>
+        </p:txBody>
+      </p:sp>
+      <p:sp>
+        <p:nvSpPr>
+          <p:cNvPr id="9" name="TextBox 8"/>
+          <p:cNvSpPr txBox="1"/>
+          <p:nvPr/>
+        </p:nvSpPr>
+        <p:spPr>
+          <a:xfrm>
+            <a:off x="676656" y="2816352"/>
+            <a:ext cx="10835640" cy="256032"/>
+          </a:xfrm>
+          <a:prstGeom prst="rect">
+            <a:avLst/>
+          </a:prstGeom>
+          <a:noFill/>
+        </p:spPr>
+        <p:txBody>
+          <a:bodyPr wrap="square" lIns="73152" rIns="73152" tIns="36576" bIns="36576">
+            <a:spAutoFit/>
+          </a:bodyPr>
+          <a:lstStyle/>
+          <a:p>
+            <a:pPr algn="ctr">
+              <a:spcAft>
+                <a:spcPts val="0"/>
+              </a:spcAft>
+              <a:defRPr sz="1600" b="1">
+                <a:solidFill>
+                  <a:srgbClr val="225B9B"/>
+                </a:solidFill>
+                <a:latin typeface="Noto Sans CJK KR"/>
+              </a:defRPr>
+            </a:pPr>
+            <a:r>
+              <a:t>터미널 1 — 아래 검은 블록은 명령만 복사합니다.</a:t>
+            </a:r>
+          </a:p>
+        </p:txBody>
+      </p:sp>
+      <p:sp>
+        <p:nvSpPr>
+          <p:cNvPr id="10" name="Rounded Rectangle 9"/>
           <p:cNvSpPr/>
           <p:nvPr/>
         </p:nvSpPr>
         <p:spPr>
           <a:xfrm>
-            <a:off x="658368" y="1700784"/>
-            <a:ext cx="10972800" cy="3182112"/>
+            <a:off x="676656" y="3154680"/>
+            <a:ext cx="10835640" cy="1938528"/>
           </a:xfrm>
           <a:prstGeom prst="roundRect">
             <a:avLst/>
@@ -27363,7 +29632,7 @@
           </a:fontRef>
         </p:style>
         <p:txBody>
-          <a:bodyPr rtlCol="0" anchor="ctr" wrap="square" lIns="73152" rIns="73152" tIns="36576" bIns="36576"/>
+          <a:bodyPr rtlCol="0" anchor="ctr" wrap="square" lIns="109728" rIns="109728" tIns="73152" bIns="73152"/>
           <a:lstStyle/>
           <a:p>
             <a:pPr algn="l">
@@ -27380,7 +29649,19 @@
             <a:r>
               <a:t>cd ~/ros2_curri/my_agv_ws</a:t>
             </a:r>
-            <a:br/>
+          </a:p>
+          <a:p>
+            <a:pPr algn="l">
+              <a:spcAft>
+                <a:spcPts val="0"/>
+              </a:spcAft>
+              <a:defRPr sz="1600" b="0">
+                <a:solidFill>
+                  <a:srgbClr val="FFFFFF"/>
+                </a:solidFill>
+                <a:latin typeface="DejaVu Sans Mono"/>
+              </a:defRPr>
+            </a:pPr>
             <a:r>
               <a:t>gz sim -r src/agv_description/curriculum_stages/M08/warehouse.sdf</a:t>
             </a:r>
@@ -27389,31 +29670,31 @@
       </p:sp>
       <p:sp>
         <p:nvSpPr>
-          <p:cNvPr id="8" name="TextBox 7"/>
-          <p:cNvSpPr txBox="1"/>
-          <p:nvPr/>
-        </p:nvSpPr>
-        <p:spPr>
-          <a:xfrm>
-            <a:off x="786384" y="5239512"/>
-            <a:ext cx="1261872" cy="237744"/>
-          </a:xfrm>
-          <a:prstGeom prst="rect">
-            <a:avLst/>
-          </a:prstGeom>
-          <a:noFill/>
-        </p:spPr>
-        <p:txBody>
-          <a:bodyPr wrap="square" lIns="73152" rIns="73152" tIns="36576" bIns="36576">
-            <a:spAutoFit/>
-          </a:bodyPr>
-          <a:lstStyle/>
-          <a:p>
-            <a:pPr algn="l">
-              <a:spcAft>
-                <a:spcPts val="0"/>
-              </a:spcAft>
-              <a:defRPr sz="1800" b="1">
+          <p:cNvPr id="11" name="TextBox 10"/>
+          <p:cNvSpPr txBox="1"/>
+          <p:nvPr/>
+        </p:nvSpPr>
+        <p:spPr>
+          <a:xfrm>
+            <a:off x="768096" y="5276088"/>
+            <a:ext cx="10561320" cy="384048"/>
+          </a:xfrm>
+          <a:prstGeom prst="rect">
+            <a:avLst/>
+          </a:prstGeom>
+          <a:noFill/>
+        </p:spPr>
+        <p:txBody>
+          <a:bodyPr wrap="square" lIns="73152" rIns="73152" tIns="36576" bIns="36576">
+            <a:spAutoFit/>
+          </a:bodyPr>
+          <a:lstStyle/>
+          <a:p>
+            <a:pPr algn="ctr">
+              <a:spcAft>
+                <a:spcPts val="0"/>
+              </a:spcAft>
+              <a:defRPr sz="1500" b="1">
                 <a:solidFill>
                   <a:srgbClr val="2A8B5A"/>
                 </a:solidFill>
@@ -27421,38 +29702,38 @@
               </a:defRPr>
             </a:pPr>
             <a:r>
-              <a:t>확인 기준</a:t>
-            </a:r>
-          </a:p>
-        </p:txBody>
-      </p:sp>
-      <p:sp>
-        <p:nvSpPr>
-          <p:cNvPr id="9" name="TextBox 8"/>
-          <p:cNvSpPr txBox="1"/>
-          <p:nvPr/>
-        </p:nvSpPr>
-        <p:spPr>
-          <a:xfrm>
-            <a:off x="786384" y="5532120"/>
-            <a:ext cx="10469880" cy="420624"/>
-          </a:xfrm>
-          <a:prstGeom prst="rect">
-            <a:avLst/>
-          </a:prstGeom>
-          <a:noFill/>
-        </p:spPr>
-        <p:txBody>
-          <a:bodyPr wrap="square" lIns="73152" rIns="73152" tIns="36576" bIns="36576">
-            <a:spAutoFit/>
-          </a:bodyPr>
-          <a:lstStyle/>
-          <a:p>
-            <a:pPr algn="l">
-              <a:spcAft>
-                <a:spcPts val="0"/>
-              </a:spcAft>
-              <a:defRPr sz="1800" b="0">
+              <a:t>터미널 1 역할: 터미널 1에서 이 명령만 그대로 복사해 실행합니다.</a:t>
+            </a:r>
+          </a:p>
+        </p:txBody>
+      </p:sp>
+      <p:sp>
+        <p:nvSpPr>
+          <p:cNvPr id="12" name="TextBox 11"/>
+          <p:cNvSpPr txBox="1"/>
+          <p:nvPr/>
+        </p:nvSpPr>
+        <p:spPr>
+          <a:xfrm>
+            <a:off x="768096" y="5916168"/>
+            <a:ext cx="10561320" cy="292608"/>
+          </a:xfrm>
+          <a:prstGeom prst="rect">
+            <a:avLst/>
+          </a:prstGeom>
+          <a:noFill/>
+        </p:spPr>
+        <p:txBody>
+          <a:bodyPr wrap="square" lIns="73152" rIns="73152" tIns="36576" bIns="36576">
+            <a:spAutoFit/>
+          </a:bodyPr>
+          <a:lstStyle/>
+          <a:p>
+            <a:pPr algn="ctr">
+              <a:spcAft>
+                <a:spcPts val="0"/>
+              </a:spcAft>
+              <a:defRPr sz="1500" b="1">
                 <a:solidFill>
                   <a:srgbClr val="122C4E"/>
                 </a:solidFill>
@@ -27460,7 +29741,7 @@
               </a:defRPr>
             </a:pPr>
             <a:r>
-              <a:t>ground·벽·박스가 있는 World에 AGV가 spawn되어 있는 Gazebo 화면을 확인한다.</a:t>
+              <a:t>확인: ground·벽·박스가 있는 World에 AGV가 spawn되어 있는 Gazebo 화면을 확인한다.</a:t>
             </a:r>
           </a:p>
         </p:txBody>
@@ -27556,7 +29837,7 @@
               </a:defRPr>
             </a:pPr>
             <a:r>
-              <a:t>실제 ROS 2 환경의 파일·패키지·구성 검증 로그</a:t>
+              <a:t>실제 terminal: World 이름과 model://agv include·spawn pose</a:t>
             </a:r>
           </a:p>
         </p:txBody>
@@ -27641,7 +29922,7 @@
       </p:sp>
       <p:pic>
         <p:nvPicPr>
-          <p:cNvPr id="6" name="Picture 5" descr="validation_terminal.png"/>
+          <p:cNvPr id="6" name="Picture 5" descr="05_m08_world_terminal_actual.png"/>
           <p:cNvPicPr>
             <a:picLocks noChangeAspect="1"/>
           </p:cNvPicPr>
@@ -27655,8 +29936,8 @@
         </p:blipFill>
         <p:spPr>
           <a:xfrm>
-            <a:off x="790956" y="1884338"/>
-            <a:ext cx="10607040" cy="3738546"/>
+            <a:off x="2789770" y="1353312"/>
+            <a:ext cx="6609411" cy="4800600"/>
           </a:xfrm>
           <a:prstGeom prst="rect">
             <a:avLst/>
@@ -27697,7 +29978,7 @@
               </a:defRPr>
             </a:pPr>
             <a:r>
-              <a:t>화면에서 확인: ① 명령/설정  ② 정상 출력 또는 화면  ③ 다음 검증 명령으로 재확인</a:t>
+              <a:t>화면에서 확인: warehouse_m08, model://agv, pose 세 항목을 순서대로 찾습니다.</a:t>
             </a:r>
           </a:p>
         </p:txBody>
@@ -27754,7 +30035,7 @@
               </a:defRPr>
             </a:pPr>
             <a:r>
-              <a:t>객관적 검증 명령으로 완료를 확인한다</a:t>
+              <a:t>정상 결과: 실제 환경에서 확인한 출력</a:t>
             </a:r>
           </a:p>
         </p:txBody>
@@ -27793,7 +30074,7 @@
               </a:defRPr>
             </a:pPr>
             <a:r>
-              <a:t>화면만 보지 말고 topic·frame·파일·parameter를 다시 확인합니다.</a:t>
+              <a:t>실제 Gazebo Sim: warehouse World와 Entity Tree에 보이는 AGV</a:t>
             </a:r>
           </a:p>
         </p:txBody>
@@ -27876,172 +30157,57 @@
           </a:p>
         </p:txBody>
       </p:sp>
-      <p:sp>
-        <p:nvSpPr>
-          <p:cNvPr id="6" name="Rectangle 5"/>
-          <p:cNvSpPr/>
-          <p:nvPr/>
-        </p:nvSpPr>
-        <p:spPr>
-          <a:xfrm>
-            <a:off x="566928" y="1188720"/>
-            <a:ext cx="11064240" cy="347472"/>
-          </a:xfrm>
-          <a:prstGeom prst="rect">
-            <a:avLst/>
-          </a:prstGeom>
-          <a:solidFill>
-            <a:srgbClr val="F4F7FB"/>
-          </a:solidFill>
-          <a:ln>
-            <a:solidFill>
-              <a:srgbClr val="F4F7FB"/>
-            </a:solidFill>
-          </a:ln>
-        </p:spPr>
-        <p:style>
-          <a:lnRef idx="1">
-            <a:schemeClr val="accent1"/>
-          </a:lnRef>
-          <a:fillRef idx="3">
-            <a:schemeClr val="accent1"/>
-          </a:fillRef>
-          <a:effectRef idx="2">
-            <a:schemeClr val="accent1"/>
-          </a:effectRef>
-          <a:fontRef idx="minor">
-            <a:schemeClr val="lt1"/>
-          </a:fontRef>
-        </p:style>
-        <p:txBody>
-          <a:bodyPr rtlCol="0" anchor="ctr" wrap="square" lIns="73152" rIns="73152" tIns="36576" bIns="36576"/>
-          <a:lstStyle/>
-          <a:p>
-            <a:pPr algn="l">
-              <a:spcAft>
-                <a:spcPts val="0"/>
-              </a:spcAft>
-              <a:defRPr sz="1300" b="1">
-                <a:solidFill>
-                  <a:srgbClr val="122C4E"/>
-                </a:solidFill>
-                <a:latin typeface="Noto Sans CJK KR"/>
-              </a:defRPr>
-            </a:pPr>
-            <a:r>
-              <a:t>현재 단계 검증    |    현재 폴더 ~/ros2_curri/my_agv_ws    |    현재 터미널</a:t>
-            </a:r>
-          </a:p>
-        </p:txBody>
-      </p:sp>
-      <p:sp>
-        <p:nvSpPr>
-          <p:cNvPr id="7" name="Rounded Rectangle 6"/>
-          <p:cNvSpPr/>
-          <p:nvPr/>
-        </p:nvSpPr>
-        <p:spPr>
-          <a:xfrm>
-            <a:off x="658368" y="1755648"/>
-            <a:ext cx="10972800" cy="2148840"/>
-          </a:xfrm>
-          <a:prstGeom prst="roundRect">
-            <a:avLst/>
-          </a:prstGeom>
-          <a:solidFill>
-            <a:srgbClr val="1D232D"/>
-          </a:solidFill>
-          <a:ln>
-            <a:solidFill>
-              <a:srgbClr val="1D232D"/>
-            </a:solidFill>
-          </a:ln>
-        </p:spPr>
-        <p:style>
-          <a:lnRef idx="1">
-            <a:schemeClr val="accent1"/>
-          </a:lnRef>
-          <a:fillRef idx="3">
-            <a:schemeClr val="accent1"/>
-          </a:fillRef>
-          <a:effectRef idx="2">
-            <a:schemeClr val="accent1"/>
-          </a:effectRef>
-          <a:fontRef idx="minor">
-            <a:schemeClr val="lt1"/>
-          </a:fontRef>
-        </p:style>
-        <p:txBody>
-          <a:bodyPr rtlCol="0" anchor="ctr" wrap="square" lIns="73152" rIns="73152" tIns="36576" bIns="36576"/>
-          <a:lstStyle/>
-          <a:p>
-            <a:pPr algn="l">
-              <a:spcAft>
-                <a:spcPts val="0"/>
-              </a:spcAft>
-              <a:defRPr sz="1600" b="0">
-                <a:solidFill>
-                  <a:srgbClr val="FFFFFF"/>
-                </a:solidFill>
-                <a:latin typeface="DejaVu Sans Mono"/>
-              </a:defRPr>
-            </a:pPr>
-            <a:r>
-              <a:t>gz sdf -k ~/ros2_curri/my_agv_ws/src/agv_description/curriculum_stages/M08/model.sdf</a:t>
-            </a:r>
-            <a:br/>
-            <a:r>
-              <a:t>rg -n '&lt;sensor|DiffDrive|/cmd_vel|/odom' ~/ros2_curri/my_agv_ws/src/agv_description/curriculum_stages/M08/model.sdf</a:t>
-            </a:r>
-          </a:p>
-        </p:txBody>
-      </p:sp>
-      <p:sp>
-        <p:nvSpPr>
-          <p:cNvPr id="8" name="Rounded Rectangle 7"/>
-          <p:cNvSpPr/>
-          <p:nvPr/>
-        </p:nvSpPr>
-        <p:spPr>
-          <a:xfrm>
-            <a:off x="658368" y="4206240"/>
-            <a:ext cx="10972800" cy="1554480"/>
-          </a:xfrm>
-          <a:prstGeom prst="roundRect">
-            <a:avLst/>
-          </a:prstGeom>
-          <a:solidFill>
-            <a:srgbClr val="F4F7FB"/>
-          </a:solidFill>
-          <a:ln>
-            <a:solidFill>
-              <a:srgbClr val="D1DFD5"/>
-            </a:solidFill>
-          </a:ln>
-        </p:spPr>
-        <p:style>
-          <a:lnRef idx="1">
-            <a:schemeClr val="accent1"/>
-          </a:lnRef>
-          <a:fillRef idx="3">
-            <a:schemeClr val="accent1"/>
-          </a:fillRef>
-          <a:effectRef idx="2">
-            <a:schemeClr val="accent1"/>
-          </a:effectRef>
-          <a:fontRef idx="minor">
-            <a:schemeClr val="lt1"/>
-          </a:fontRef>
-        </p:style>
-        <p:txBody>
-          <a:bodyPr rtlCol="0" anchor="ctr" wrap="square" lIns="73152" rIns="73152" tIns="36576" bIns="36576"/>
-          <a:lstStyle/>
-          <a:p>
-            <a:pPr algn="l">
-              <a:spcAft>
-                <a:spcPts val="0"/>
-              </a:spcAft>
-              <a:defRPr sz="1800" b="1">
+      <p:pic>
+        <p:nvPicPr>
+          <p:cNvPr id="6" name="Picture 5" descr="gazebo_agv_actual.png"/>
+          <p:cNvPicPr>
+            <a:picLocks noChangeAspect="1"/>
+          </p:cNvPicPr>
+          <p:nvPr/>
+        </p:nvPicPr>
+        <p:blipFill>
+          <a:blip r:embed="rId2"/>
+          <a:stretch>
+            <a:fillRect/>
+          </a:stretch>
+        </p:blipFill>
+        <p:spPr>
+          <a:xfrm>
+            <a:off x="3385904" y="1353312"/>
+            <a:ext cx="5417142" cy="4800600"/>
+          </a:xfrm>
+          <a:prstGeom prst="rect">
+            <a:avLst/>
+          </a:prstGeom>
+        </p:spPr>
+      </p:pic>
+      <p:sp>
+        <p:nvSpPr>
+          <p:cNvPr id="7" name="TextBox 6"/>
+          <p:cNvSpPr txBox="1"/>
+          <p:nvPr/>
+        </p:nvSpPr>
+        <p:spPr>
+          <a:xfrm>
+            <a:off x="777240" y="6144768"/>
+            <a:ext cx="10607040" cy="310896"/>
+          </a:xfrm>
+          <a:prstGeom prst="rect">
+            <a:avLst/>
+          </a:prstGeom>
+          <a:noFill/>
+        </p:spPr>
+        <p:txBody>
+          <a:bodyPr wrap="square" lIns="73152" rIns="73152" tIns="36576" bIns="36576">
+            <a:spAutoFit/>
+          </a:bodyPr>
+          <a:lstStyle/>
+          <a:p>
+            <a:pPr algn="ctr">
+              <a:spcAft>
+                <a:spcPts val="0"/>
+              </a:spcAft>
+              <a:defRPr sz="1100" b="1">
                 <a:solidFill>
                   <a:srgbClr val="2A8B5A"/>
                 </a:solidFill>
@@ -28049,58 +30215,7 @@
               </a:defRPr>
             </a:pPr>
             <a:r>
-              <a:t>완료 체크</a:t>
-            </a:r>
-            <a:br/>
-            <a:r>
-              <a:t>□ 명령이 오류 없이 실행된다.</a:t>
-            </a:r>
-            <a:br/>
-            <a:r>
-              <a:t>□ 기대한 파일·topic·frame·parameter 이름이 보인다.</a:t>
-            </a:r>
-            <a:br/>
-            <a:r>
-              <a:t>□ 값의 단위와 방향을 한 문장으로 설명할 수 있다.</a:t>
-            </a:r>
-          </a:p>
-        </p:txBody>
-      </p:sp>
-      <p:sp>
-        <p:nvSpPr>
-          <p:cNvPr id="9" name="TextBox 8"/>
-          <p:cNvSpPr txBox="1"/>
-          <p:nvPr/>
-        </p:nvSpPr>
-        <p:spPr>
-          <a:xfrm>
-            <a:off x="731520" y="5989320"/>
-            <a:ext cx="10789920" cy="237744"/>
-          </a:xfrm>
-          <a:prstGeom prst="rect">
-            <a:avLst/>
-          </a:prstGeom>
-          <a:noFill/>
-        </p:spPr>
-        <p:txBody>
-          <a:bodyPr wrap="square" lIns="73152" rIns="73152" tIns="36576" bIns="36576">
-            <a:spAutoFit/>
-          </a:bodyPr>
-          <a:lstStyle/>
-          <a:p>
-            <a:pPr algn="l">
-              <a:spcAft>
-                <a:spcPts val="0"/>
-              </a:spcAft>
-              <a:defRPr sz="1500" b="1">
-                <a:solidFill>
-                  <a:srgbClr val="122C4E"/>
-                </a:solidFill>
-                <a:latin typeface="Noto Sans CJK KR"/>
-              </a:defRPr>
-            </a:pPr>
-            <a:r>
-              <a:t>완료 조건: ground·벽·박스가 있는 World에 AGV가 spawn되어 있는 Gazebo 화면을 확인한다.</a:t>
+              <a:t>화면에서 확인: 오른쪽 Entity Tree에서 ground·wall·target·agv가 따로 생성됐는지, 왼쪽 World에 파란 AGV가 놓였는지 확인합니다.</a:t>
             </a:r>
           </a:p>
         </p:txBody>
@@ -28157,7 +30272,7 @@
               </a:defRPr>
             </a:pPr>
             <a:r>
-              <a:t>막히면: 증상 → 우선 확인 → 재검증</a:t>
+              <a:t>정상 결과: 실제 환경에서 확인한 출력</a:t>
             </a:r>
           </a:p>
         </p:txBody>
@@ -28196,7 +30311,7 @@
               </a:defRPr>
             </a:pPr>
             <a:r>
-              <a:t>오류 메시지를 숨기지 않고 같은 순서로 점검합니다.</a:t>
+              <a:t>실제 ROS 2 환경의 파일·패키지·구성 검증 로그</a:t>
             </a:r>
           </a:p>
         </p:txBody>
@@ -28279,328 +30394,40 @@
           </a:p>
         </p:txBody>
       </p:sp>
-      <p:sp>
-        <p:nvSpPr>
-          <p:cNvPr id="6" name="Rectangle 5"/>
-          <p:cNvSpPr/>
-          <p:nvPr/>
-        </p:nvSpPr>
-        <p:spPr>
-          <a:xfrm>
-            <a:off x="566928" y="1188720"/>
-            <a:ext cx="11064240" cy="347472"/>
-          </a:xfrm>
-          <a:prstGeom prst="rect">
-            <a:avLst/>
-          </a:prstGeom>
-          <a:solidFill>
-            <a:srgbClr val="F4F7FB"/>
-          </a:solidFill>
-          <a:ln>
-            <a:solidFill>
-              <a:srgbClr val="F4F7FB"/>
-            </a:solidFill>
-          </a:ln>
-        </p:spPr>
-        <p:style>
-          <a:lnRef idx="1">
-            <a:schemeClr val="accent1"/>
-          </a:lnRef>
-          <a:fillRef idx="3">
-            <a:schemeClr val="accent1"/>
-          </a:fillRef>
-          <a:effectRef idx="2">
-            <a:schemeClr val="accent1"/>
-          </a:effectRef>
-          <a:fontRef idx="minor">
-            <a:schemeClr val="lt1"/>
-          </a:fontRef>
-        </p:style>
-        <p:txBody>
-          <a:bodyPr rtlCol="0" anchor="ctr" wrap="square" lIns="73152" rIns="73152" tIns="36576" bIns="36576"/>
-          <a:lstStyle/>
-          <a:p>
-            <a:pPr algn="l">
-              <a:spcAft>
-                <a:spcPts val="0"/>
-              </a:spcAft>
-              <a:defRPr sz="1300" b="1">
-                <a:solidFill>
-                  <a:srgbClr val="122C4E"/>
-                </a:solidFill>
-                <a:latin typeface="Noto Sans CJK KR"/>
-              </a:defRPr>
-            </a:pPr>
-            <a:r>
-              <a:t>현재 단계 오류 대응    |    현재 폴더 ~/ros2_curri/my_agv_ws    |    현재 터미널</a:t>
-            </a:r>
-          </a:p>
-        </p:txBody>
-      </p:sp>
-      <p:sp>
-        <p:nvSpPr>
-          <p:cNvPr id="7" name="Rounded Rectangle 6"/>
-          <p:cNvSpPr/>
-          <p:nvPr/>
-        </p:nvSpPr>
-        <p:spPr>
-          <a:xfrm>
-            <a:off x="694944" y="1755648"/>
-            <a:ext cx="10972800" cy="1115568"/>
-          </a:xfrm>
-          <a:prstGeom prst="roundRect">
-            <a:avLst/>
-          </a:prstGeom>
-          <a:solidFill>
-            <a:srgbClr val="FFF7F4"/>
-          </a:solidFill>
-          <a:ln>
-            <a:solidFill>
-              <a:srgbClr val="EDBEB4"/>
-            </a:solidFill>
-          </a:ln>
-        </p:spPr>
-        <p:style>
-          <a:lnRef idx="1">
-            <a:schemeClr val="accent1"/>
-          </a:lnRef>
-          <a:fillRef idx="3">
-            <a:schemeClr val="accent1"/>
-          </a:fillRef>
-          <a:effectRef idx="2">
-            <a:schemeClr val="accent1"/>
-          </a:effectRef>
-          <a:fontRef idx="minor">
-            <a:schemeClr val="lt1"/>
-          </a:fontRef>
-        </p:style>
-        <p:txBody>
-          <a:bodyPr rtlCol="0" anchor="ctr"/>
-          <a:lstStyle/>
-          <a:p>
-            <a:pPr algn="ctr"/>
-          </a:p>
-        </p:txBody>
-      </p:sp>
-      <p:sp>
-        <p:nvSpPr>
-          <p:cNvPr id="8" name="TextBox 7"/>
-          <p:cNvSpPr txBox="1"/>
-          <p:nvPr/>
-        </p:nvSpPr>
-        <p:spPr>
-          <a:xfrm>
-            <a:off x="896112" y="1901952"/>
-            <a:ext cx="2926080" cy="274320"/>
-          </a:xfrm>
-          <a:prstGeom prst="rect">
-            <a:avLst/>
-          </a:prstGeom>
-          <a:noFill/>
-        </p:spPr>
-        <p:txBody>
-          <a:bodyPr wrap="square" lIns="73152" rIns="73152" tIns="36576" bIns="36576">
-            <a:spAutoFit/>
-          </a:bodyPr>
-          <a:lstStyle/>
-          <a:p>
-            <a:pPr algn="l">
-              <a:spcAft>
-                <a:spcPts val="0"/>
-              </a:spcAft>
-              <a:defRPr sz="1800" b="1">
-                <a:solidFill>
-                  <a:srgbClr val="BE3B3B"/>
-                </a:solidFill>
-                <a:latin typeface="Noto Sans CJK KR"/>
-              </a:defRPr>
-            </a:pPr>
-            <a:r>
-              <a:t>증상 1: world 파일을 못 찾음</a:t>
-            </a:r>
-          </a:p>
-        </p:txBody>
-      </p:sp>
-      <p:sp>
-        <p:nvSpPr>
-          <p:cNvPr id="9" name="TextBox 8"/>
-          <p:cNvSpPr txBox="1"/>
-          <p:nvPr/>
-        </p:nvSpPr>
-        <p:spPr>
-          <a:xfrm>
-            <a:off x="3794760" y="1883664"/>
-            <a:ext cx="7543800" cy="621792"/>
-          </a:xfrm>
-          <a:prstGeom prst="rect">
-            <a:avLst/>
-          </a:prstGeom>
-          <a:noFill/>
-        </p:spPr>
-        <p:txBody>
-          <a:bodyPr wrap="square" lIns="73152" rIns="73152" tIns="36576" bIns="36576">
-            <a:spAutoFit/>
-          </a:bodyPr>
-          <a:lstStyle/>
-          <a:p>
-            <a:pPr algn="l">
-              <a:spcAft>
-                <a:spcPts val="0"/>
-              </a:spcAft>
-              <a:defRPr sz="1600" b="0">
-                <a:solidFill>
-                  <a:srgbClr val="122C4E"/>
-                </a:solidFill>
-                <a:latin typeface="Noto Sans CJK KR"/>
-              </a:defRPr>
-            </a:pPr>
-            <a:r>
-              <a:t>우선 확인: launch의 package share path와 install data_files를 확인한다.</a:t>
-            </a:r>
-            <a:br/>
-            <a:r>
-              <a:t>수정 후: gz sdf -k ~/ros2_curri/my_agv_ws/src/agv_description/curriculum_stages/M08/model.sdf</a:t>
-            </a:r>
-          </a:p>
-        </p:txBody>
-      </p:sp>
-      <p:sp>
-        <p:nvSpPr>
-          <p:cNvPr id="10" name="Rounded Rectangle 9"/>
-          <p:cNvSpPr/>
-          <p:nvPr/>
-        </p:nvSpPr>
-        <p:spPr>
-          <a:xfrm>
-            <a:off x="694944" y="3172968"/>
-            <a:ext cx="10972800" cy="1115568"/>
-          </a:xfrm>
-          <a:prstGeom prst="roundRect">
-            <a:avLst/>
-          </a:prstGeom>
-          <a:solidFill>
-            <a:srgbClr val="FFF7F4"/>
-          </a:solidFill>
-          <a:ln>
-            <a:solidFill>
-              <a:srgbClr val="EDBEB4"/>
-            </a:solidFill>
-          </a:ln>
-        </p:spPr>
-        <p:style>
-          <a:lnRef idx="1">
-            <a:schemeClr val="accent1"/>
-          </a:lnRef>
-          <a:fillRef idx="3">
-            <a:schemeClr val="accent1"/>
-          </a:fillRef>
-          <a:effectRef idx="2">
-            <a:schemeClr val="accent1"/>
-          </a:effectRef>
-          <a:fontRef idx="minor">
-            <a:schemeClr val="lt1"/>
-          </a:fontRef>
-        </p:style>
-        <p:txBody>
-          <a:bodyPr rtlCol="0" anchor="ctr"/>
-          <a:lstStyle/>
-          <a:p>
-            <a:pPr algn="ctr"/>
-          </a:p>
-        </p:txBody>
-      </p:sp>
-      <p:sp>
-        <p:nvSpPr>
-          <p:cNvPr id="11" name="TextBox 10"/>
-          <p:cNvSpPr txBox="1"/>
-          <p:nvPr/>
-        </p:nvSpPr>
-        <p:spPr>
-          <a:xfrm>
-            <a:off x="896112" y="3319272"/>
-            <a:ext cx="2926080" cy="274320"/>
-          </a:xfrm>
-          <a:prstGeom prst="rect">
-            <a:avLst/>
-          </a:prstGeom>
-          <a:noFill/>
-        </p:spPr>
-        <p:txBody>
-          <a:bodyPr wrap="square" lIns="73152" rIns="73152" tIns="36576" bIns="36576">
-            <a:spAutoFit/>
-          </a:bodyPr>
-          <a:lstStyle/>
-          <a:p>
-            <a:pPr algn="l">
-              <a:spcAft>
-                <a:spcPts val="0"/>
-              </a:spcAft>
-              <a:defRPr sz="1800" b="1">
-                <a:solidFill>
-                  <a:srgbClr val="BE3B3B"/>
-                </a:solidFill>
-                <a:latin typeface="Noto Sans CJK KR"/>
-              </a:defRPr>
-            </a:pPr>
-            <a:r>
-              <a:t>증상 2: 모델이 공중/바닥 아래</a:t>
-            </a:r>
-          </a:p>
-        </p:txBody>
-      </p:sp>
-      <p:sp>
-        <p:nvSpPr>
-          <p:cNvPr id="12" name="TextBox 11"/>
-          <p:cNvSpPr txBox="1"/>
-          <p:nvPr/>
-        </p:nvSpPr>
-        <p:spPr>
-          <a:xfrm>
-            <a:off x="3794760" y="3300984"/>
-            <a:ext cx="7543800" cy="621792"/>
-          </a:xfrm>
-          <a:prstGeom prst="rect">
-            <a:avLst/>
-          </a:prstGeom>
-          <a:noFill/>
-        </p:spPr>
-        <p:txBody>
-          <a:bodyPr wrap="square" lIns="73152" rIns="73152" tIns="36576" bIns="36576">
-            <a:spAutoFit/>
-          </a:bodyPr>
-          <a:lstStyle/>
-          <a:p>
-            <a:pPr algn="l">
-              <a:spcAft>
-                <a:spcPts val="0"/>
-              </a:spcAft>
-              <a:defRPr sz="1600" b="0">
-                <a:solidFill>
-                  <a:srgbClr val="122C4E"/>
-                </a:solidFill>
-                <a:latin typeface="Noto Sans CJK KR"/>
-              </a:defRPr>
-            </a:pPr>
-            <a:r>
-              <a:t>우선 확인: 초기 z·collision origin·geometry 크기를 확인한다.</a:t>
-            </a:r>
-            <a:br/>
-            <a:r>
-              <a:t>수정 후: gz sdf -k ~/ros2_curri/my_agv_ws/src/agv_description/curriculum_stages/M08/model.sdf</a:t>
-            </a:r>
-          </a:p>
-        </p:txBody>
-      </p:sp>
-      <p:sp>
-        <p:nvSpPr>
-          <p:cNvPr id="13" name="TextBox 12"/>
-          <p:cNvSpPr txBox="1"/>
-          <p:nvPr/>
-        </p:nvSpPr>
-        <p:spPr>
-          <a:xfrm>
-            <a:off x="822960" y="5102352"/>
-            <a:ext cx="10607040" cy="402336"/>
+      <p:pic>
+        <p:nvPicPr>
+          <p:cNvPr id="6" name="Picture 5" descr="validation_terminal.png"/>
+          <p:cNvPicPr>
+            <a:picLocks noChangeAspect="1"/>
+          </p:cNvPicPr>
+          <p:nvPr/>
+        </p:nvPicPr>
+        <p:blipFill>
+          <a:blip r:embed="rId2"/>
+          <a:stretch>
+            <a:fillRect/>
+          </a:stretch>
+        </p:blipFill>
+        <p:spPr>
+          <a:xfrm>
+            <a:off x="790956" y="1884338"/>
+            <a:ext cx="10607040" cy="3738546"/>
+          </a:xfrm>
+          <a:prstGeom prst="rect">
+            <a:avLst/>
+          </a:prstGeom>
+        </p:spPr>
+      </p:pic>
+      <p:sp>
+        <p:nvSpPr>
+          <p:cNvPr id="7" name="TextBox 6"/>
+          <p:cNvSpPr txBox="1"/>
+          <p:nvPr/>
+        </p:nvSpPr>
+        <p:spPr>
+          <a:xfrm>
+            <a:off x="777240" y="6144768"/>
+            <a:ext cx="10607040" cy="310896"/>
           </a:xfrm>
           <a:prstGeom prst="rect">
             <a:avLst/>
@@ -28617,15 +30444,15 @@
               <a:spcAft>
                 <a:spcPts val="0"/>
               </a:spcAft>
-              <a:defRPr sz="1800" b="1">
-                <a:solidFill>
-                  <a:srgbClr val="DB7E22"/>
-                </a:solidFill>
-                <a:latin typeface="Noto Sans CJK KR"/>
-              </a:defRPr>
-            </a:pPr>
-            <a:r>
-              <a:t>공통 순서: ① 현재 폴더 ② source ③ 파일 경로 ④ 이름/타입/단위 ⑤ build·source 후 재실행</a:t>
+              <a:defRPr sz="1100" b="1">
+                <a:solidFill>
+                  <a:srgbClr val="2A8B5A"/>
+                </a:solidFill>
+                <a:latin typeface="Noto Sans CJK KR"/>
+              </a:defRPr>
+            </a:pPr>
+            <a:r>
+              <a:t>화면에서 확인: ① 명령/설정  ② 정상 출력 또는 화면  ③ 다음 검증 명령으로 재확인</a:t>
             </a:r>
           </a:p>
         </p:txBody>
@@ -28682,7 +30509,7 @@
               </a:defRPr>
             </a:pPr>
             <a:r>
-              <a:t>막혔을 때만: Complete를 복구용으로 사용한다</a:t>
+              <a:t>객관적 검증 명령으로 완료를 확인한다</a:t>
             </a:r>
           </a:p>
         </p:txBody>
@@ -28721,7 +30548,7 @@
               </a:defRPr>
             </a:pPr>
             <a:r>
-              <a:t>이 슬라이드가 먼저가 아닙니다. 직접 입력·실행을 시도한 뒤에만 내 파일과 Complete를 비교합니다.</a:t>
+              <a:t>화면만 보지 말고 topic·frame·파일·parameter를 다시 확인합니다.</a:t>
             </a:r>
           </a:p>
         </p:txBody>
@@ -28857,60 +30684,21 @@
               </a:defRPr>
             </a:pPr>
             <a:r>
-              <a:t>현재 단계 복구용 Complete    |    현재 폴더 ~/ros2_curri    |    현재 터미널</a:t>
-            </a:r>
-          </a:p>
-        </p:txBody>
-      </p:sp>
-      <p:sp>
-        <p:nvSpPr>
-          <p:cNvPr id="7" name="TextBox 6"/>
-          <p:cNvSpPr txBox="1"/>
-          <p:nvPr/>
-        </p:nvSpPr>
-        <p:spPr>
-          <a:xfrm>
-            <a:off x="713232" y="1664208"/>
-            <a:ext cx="10698480" cy="402336"/>
-          </a:xfrm>
-          <a:prstGeom prst="rect">
-            <a:avLst/>
-          </a:prstGeom>
-          <a:noFill/>
-        </p:spPr>
-        <p:txBody>
-          <a:bodyPr wrap="square" lIns="73152" rIns="73152" tIns="36576" bIns="36576">
-            <a:spAutoFit/>
-          </a:bodyPr>
-          <a:lstStyle/>
-          <a:p>
-            <a:pPr algn="ctr">
-              <a:spcAft>
-                <a:spcPts val="0"/>
-              </a:spcAft>
-              <a:defRPr sz="1800" b="1">
-                <a:solidFill>
-                  <a:srgbClr val="DB7E22"/>
-                </a:solidFill>
-                <a:latin typeface="Noto Sans CJK KR"/>
-              </a:defRPr>
-            </a:pPr>
-            <a:r>
-              <a:t>권장 순서: ① 내 오류를 확인  ② Complete와 diff  ③ 꼭 필요할 때만 backup 후 복사</a:t>
-            </a:r>
-          </a:p>
-        </p:txBody>
-      </p:sp>
-      <p:sp>
-        <p:nvSpPr>
-          <p:cNvPr id="8" name="Rounded Rectangle 7"/>
+              <a:t>현재 단계 검증    |    현재 폴더 ~/ros2_curri/my_agv_ws    |    현재 터미널</a:t>
+            </a:r>
+          </a:p>
+        </p:txBody>
+      </p:sp>
+      <p:sp>
+        <p:nvSpPr>
+          <p:cNvPr id="7" name="Rounded Rectangle 6"/>
           <p:cNvSpPr/>
           <p:nvPr/>
         </p:nvSpPr>
         <p:spPr>
           <a:xfrm>
-            <a:off x="676656" y="2423160"/>
-            <a:ext cx="10881360" cy="2606040"/>
+            <a:off x="658368" y="1755648"/>
+            <a:ext cx="10972800" cy="2148840"/>
           </a:xfrm>
           <a:prstGeom prst="roundRect">
             <a:avLst/>
@@ -28939,6 +30727,80 @@
           </a:fontRef>
         </p:style>
         <p:txBody>
+          <a:bodyPr rtlCol="0" anchor="ctr" wrap="square" lIns="109728" rIns="109728" tIns="73152" bIns="73152"/>
+          <a:lstStyle/>
+          <a:p>
+            <a:pPr algn="l">
+              <a:spcAft>
+                <a:spcPts val="0"/>
+              </a:spcAft>
+              <a:defRPr sz="1600" b="0">
+                <a:solidFill>
+                  <a:srgbClr val="FFFFFF"/>
+                </a:solidFill>
+                <a:latin typeface="DejaVu Sans Mono"/>
+              </a:defRPr>
+            </a:pPr>
+            <a:r>
+              <a:t>gz sdf -k ~/ros2_curri/my_agv_ws/src/agv_description/curriculum_stages/M08/model.sdf</a:t>
+            </a:r>
+          </a:p>
+          <a:p>
+            <a:pPr algn="l">
+              <a:spcAft>
+                <a:spcPts val="0"/>
+              </a:spcAft>
+              <a:defRPr sz="1600" b="0">
+                <a:solidFill>
+                  <a:srgbClr val="FFFFFF"/>
+                </a:solidFill>
+                <a:latin typeface="DejaVu Sans Mono"/>
+              </a:defRPr>
+            </a:pPr>
+            <a:r>
+              <a:t>rg -n '&lt;sensor|DiffDrive|/cmd_vel|/odom' ~/ros2_curri/my_agv_ws/src/agv_description/curriculum_stages/M08/model.sdf</a:t>
+            </a:r>
+          </a:p>
+        </p:txBody>
+      </p:sp>
+      <p:sp>
+        <p:nvSpPr>
+          <p:cNvPr id="8" name="Rounded Rectangle 7"/>
+          <p:cNvSpPr/>
+          <p:nvPr/>
+        </p:nvSpPr>
+        <p:spPr>
+          <a:xfrm>
+            <a:off x="658368" y="4206240"/>
+            <a:ext cx="10972800" cy="1554480"/>
+          </a:xfrm>
+          <a:prstGeom prst="roundRect">
+            <a:avLst/>
+          </a:prstGeom>
+          <a:solidFill>
+            <a:srgbClr val="F4F7FB"/>
+          </a:solidFill>
+          <a:ln>
+            <a:solidFill>
+              <a:srgbClr val="D1DFD5"/>
+            </a:solidFill>
+          </a:ln>
+        </p:spPr>
+        <p:style>
+          <a:lnRef idx="1">
+            <a:schemeClr val="accent1"/>
+          </a:lnRef>
+          <a:fillRef idx="3">
+            <a:schemeClr val="accent1"/>
+          </a:fillRef>
+          <a:effectRef idx="2">
+            <a:schemeClr val="accent1"/>
+          </a:effectRef>
+          <a:fontRef idx="minor">
+            <a:schemeClr val="lt1"/>
+          </a:fontRef>
+        </p:style>
+        <p:txBody>
           <a:bodyPr rtlCol="0" anchor="ctr" wrap="square" lIns="73152" rIns="73152" tIns="36576" bIns="36576"/>
           <a:lstStyle/>
           <a:p>
@@ -28946,31 +30808,27 @@
               <a:spcAft>
                 <a:spcPts val="0"/>
               </a:spcAft>
-              <a:defRPr sz="1400" b="0">
-                <a:solidFill>
-                  <a:srgbClr val="FFFFFF"/>
-                </a:solidFill>
-                <a:latin typeface="DejaVu Sans Mono"/>
-              </a:defRPr>
-            </a:pPr>
-            <a:r>
-              <a:t>cd ~/ros2_curri</a:t>
+              <a:defRPr sz="1800" b="1">
+                <a:solidFill>
+                  <a:srgbClr val="2A8B5A"/>
+                </a:solidFill>
+                <a:latin typeface="Noto Sans CJK KR"/>
+              </a:defRPr>
+            </a:pPr>
+            <a:r>
+              <a:t>완료 체크</a:t>
             </a:r>
             <a:br/>
             <a:r>
-              <a:t>diff -ru my_agv_ws/src blocks/B_robot_build/M08_gazebo_world_spawn/complete/agv_ws/src || true</a:t>
+              <a:t>□ 명령이 오류 없이 실행된다.</a:t>
             </a:r>
             <a:br/>
             <a:r>
-              <a:t>cp -a my_agv_ws/src my_agv_ws/src_before_M08</a:t>
+              <a:t>□ 기대한 파일·topic·frame·parameter 이름이 보인다.</a:t>
             </a:r>
             <a:br/>
             <a:r>
-              <a:t>cp -a blocks/B_robot_build/M08_gazebo_world_spawn/complete/agv_ws/src/. my_agv_ws/src/</a:t>
-            </a:r>
-            <a:br/>
-            <a:r>
-              <a:t>cd my_agv_ws &amp;&amp; colcon build --symlink-install &amp;&amp; source install/setup.bash</a:t>
+              <a:t>□ 값의 단위와 방향을 한 문장으로 설명할 수 있다.</a:t>
             </a:r>
           </a:p>
         </p:txBody>
@@ -28983,33 +30841,33 @@
         </p:nvSpPr>
         <p:spPr>
           <a:xfrm>
-            <a:off x="786384" y="5413248"/>
-            <a:ext cx="10424160" cy="429768"/>
-          </a:xfrm>
-          <a:prstGeom prst="rect">
-            <a:avLst/>
-          </a:prstGeom>
-          <a:noFill/>
-        </p:spPr>
-        <p:txBody>
-          <a:bodyPr wrap="square" lIns="73152" rIns="73152" tIns="36576" bIns="36576">
-            <a:spAutoFit/>
-          </a:bodyPr>
-          <a:lstStyle/>
-          <a:p>
-            <a:pPr algn="ctr">
-              <a:spcAft>
-                <a:spcPts val="0"/>
-              </a:spcAft>
-              <a:defRPr sz="1700" b="1">
-                <a:solidFill>
-                  <a:srgbClr val="2A8B5A"/>
-                </a:solidFill>
-                <a:latin typeface="Noto Sans CJK KR"/>
-              </a:defRPr>
-            </a:pPr>
-            <a:r>
-              <a:t>복구 뒤에는 끝내지 말고, 내 파일과 Complete의 차이를 한 줄씩 설명한 뒤 다시 직접 입력해 봅니다.</a:t>
+            <a:off x="731520" y="5989320"/>
+            <a:ext cx="10789920" cy="237744"/>
+          </a:xfrm>
+          <a:prstGeom prst="rect">
+            <a:avLst/>
+          </a:prstGeom>
+          <a:noFill/>
+        </p:spPr>
+        <p:txBody>
+          <a:bodyPr wrap="square" lIns="73152" rIns="73152" tIns="36576" bIns="36576">
+            <a:spAutoFit/>
+          </a:bodyPr>
+          <a:lstStyle/>
+          <a:p>
+            <a:pPr algn="l">
+              <a:spcAft>
+                <a:spcPts val="0"/>
+              </a:spcAft>
+              <a:defRPr sz="1500" b="1">
+                <a:solidFill>
+                  <a:srgbClr val="122C4E"/>
+                </a:solidFill>
+                <a:latin typeface="Noto Sans CJK KR"/>
+              </a:defRPr>
+            </a:pPr>
+            <a:r>
+              <a:t>완료 조건: ground·벽·박스가 있는 World에 AGV가 spawn되어 있는 Gazebo 화면을 확인한다.</a:t>
             </a:r>
           </a:p>
         </p:txBody>
@@ -29066,7 +30924,7 @@
               </a:defRPr>
             </a:pPr>
             <a:r>
-              <a:t>미니 실습: 값 하나를 바꾸고 결과를 비교한다</a:t>
+              <a:t>막히면: 증상 → 우선 확인 → 재검증</a:t>
             </a:r>
           </a:p>
         </p:txBody>
@@ -29105,7 +30963,7 @@
               </a:defRPr>
             </a:pPr>
             <a:r>
-              <a:t>정상 결과를 만든 뒤에는 한 번에 하나의 값만 바꿉니다.</a:t>
+              <a:t>오류 메시지를 숨기지 않고 같은 순서로 점검합니다.</a:t>
             </a:r>
           </a:p>
         </p:txBody>
@@ -29241,7 +31099,7 @@
               </a:defRPr>
             </a:pPr>
             <a:r>
-              <a:t>현재 단계 미니 실습    |    현재 폴더 ~/ros2_curri/my_agv_ws    |    현재 터미널</a:t>
+              <a:t>현재 단계 오류 대응    |    현재 폴더 ~/ros2_curri/my_agv_ws    |    현재 터미널</a:t>
             </a:r>
           </a:p>
         </p:txBody>
@@ -29254,18 +31112,18 @@
         </p:nvSpPr>
         <p:spPr>
           <a:xfrm>
-            <a:off x="749808" y="1874519"/>
-            <a:ext cx="10652760" cy="1993392"/>
+            <a:off x="694944" y="1755648"/>
+            <a:ext cx="10972800" cy="1115568"/>
           </a:xfrm>
           <a:prstGeom prst="roundRect">
             <a:avLst/>
           </a:prstGeom>
           <a:solidFill>
-            <a:srgbClr val="FFF8EB"/>
+            <a:srgbClr val="FFF7F4"/>
           </a:solidFill>
           <a:ln>
             <a:solidFill>
-              <a:srgbClr val="ECC680"/>
+              <a:srgbClr val="EDBEB4"/>
             </a:solidFill>
           </a:ln>
         </p:spPr>
@@ -29284,53 +31142,249 @@
           </a:fontRef>
         </p:style>
         <p:txBody>
-          <a:bodyPr rtlCol="0" anchor="ctr" wrap="square" lIns="73152" rIns="73152" tIns="36576" bIns="36576"/>
+          <a:bodyPr rtlCol="0" anchor="ctr"/>
+          <a:lstStyle/>
+          <a:p>
+            <a:pPr algn="ctr"/>
+          </a:p>
+        </p:txBody>
+      </p:sp>
+      <p:sp>
+        <p:nvSpPr>
+          <p:cNvPr id="8" name="TextBox 7"/>
+          <p:cNvSpPr txBox="1"/>
+          <p:nvPr/>
+        </p:nvSpPr>
+        <p:spPr>
+          <a:xfrm>
+            <a:off x="896112" y="1901952"/>
+            <a:ext cx="2926080" cy="274320"/>
+          </a:xfrm>
+          <a:prstGeom prst="rect">
+            <a:avLst/>
+          </a:prstGeom>
+          <a:noFill/>
+        </p:spPr>
+        <p:txBody>
+          <a:bodyPr wrap="square" lIns="73152" rIns="73152" tIns="36576" bIns="36576">
+            <a:spAutoFit/>
+          </a:bodyPr>
+          <a:lstStyle/>
+          <a:p>
+            <a:pPr algn="l">
+              <a:spcAft>
+                <a:spcPts val="0"/>
+              </a:spcAft>
+              <a:defRPr sz="1800" b="1">
+                <a:solidFill>
+                  <a:srgbClr val="BE3B3B"/>
+                </a:solidFill>
+                <a:latin typeface="Noto Sans CJK KR"/>
+              </a:defRPr>
+            </a:pPr>
+            <a:r>
+              <a:t>증상 1: world 파일을 못 찾음</a:t>
+            </a:r>
+          </a:p>
+        </p:txBody>
+      </p:sp>
+      <p:sp>
+        <p:nvSpPr>
+          <p:cNvPr id="9" name="TextBox 8"/>
+          <p:cNvSpPr txBox="1"/>
+          <p:nvPr/>
+        </p:nvSpPr>
+        <p:spPr>
+          <a:xfrm>
+            <a:off x="3794760" y="1883664"/>
+            <a:ext cx="7543800" cy="621792"/>
+          </a:xfrm>
+          <a:prstGeom prst="rect">
+            <a:avLst/>
+          </a:prstGeom>
+          <a:noFill/>
+        </p:spPr>
+        <p:txBody>
+          <a:bodyPr wrap="square" lIns="73152" rIns="73152" tIns="36576" bIns="36576">
+            <a:spAutoFit/>
+          </a:bodyPr>
+          <a:lstStyle/>
+          <a:p>
+            <a:pPr algn="l">
+              <a:spcAft>
+                <a:spcPts val="0"/>
+              </a:spcAft>
+              <a:defRPr sz="1600" b="0">
+                <a:solidFill>
+                  <a:srgbClr val="122C4E"/>
+                </a:solidFill>
+                <a:latin typeface="Noto Sans CJK KR"/>
+              </a:defRPr>
+            </a:pPr>
+            <a:r>
+              <a:t>우선 확인: launch의 package share path와 install data_files를 확인한다.</a:t>
+            </a:r>
+            <a:br/>
+            <a:r>
+              <a:t>수정 후: gz sdf -k ~/ros2_curri/my_agv_ws/src/agv_description/curriculum_stages/M08/model.sdf</a:t>
+            </a:r>
+          </a:p>
+        </p:txBody>
+      </p:sp>
+      <p:sp>
+        <p:nvSpPr>
+          <p:cNvPr id="10" name="Rounded Rectangle 9"/>
+          <p:cNvSpPr/>
+          <p:nvPr/>
+        </p:nvSpPr>
+        <p:spPr>
+          <a:xfrm>
+            <a:off x="694944" y="3172968"/>
+            <a:ext cx="10972800" cy="1115568"/>
+          </a:xfrm>
+          <a:prstGeom prst="roundRect">
+            <a:avLst/>
+          </a:prstGeom>
+          <a:solidFill>
+            <a:srgbClr val="FFF7F4"/>
+          </a:solidFill>
+          <a:ln>
+            <a:solidFill>
+              <a:srgbClr val="EDBEB4"/>
+            </a:solidFill>
+          </a:ln>
+        </p:spPr>
+        <p:style>
+          <a:lnRef idx="1">
+            <a:schemeClr val="accent1"/>
+          </a:lnRef>
+          <a:fillRef idx="3">
+            <a:schemeClr val="accent1"/>
+          </a:fillRef>
+          <a:effectRef idx="2">
+            <a:schemeClr val="accent1"/>
+          </a:effectRef>
+          <a:fontRef idx="minor">
+            <a:schemeClr val="lt1"/>
+          </a:fontRef>
+        </p:style>
+        <p:txBody>
+          <a:bodyPr rtlCol="0" anchor="ctr"/>
+          <a:lstStyle/>
+          <a:p>
+            <a:pPr algn="ctr"/>
+          </a:p>
+        </p:txBody>
+      </p:sp>
+      <p:sp>
+        <p:nvSpPr>
+          <p:cNvPr id="11" name="TextBox 10"/>
+          <p:cNvSpPr txBox="1"/>
+          <p:nvPr/>
+        </p:nvSpPr>
+        <p:spPr>
+          <a:xfrm>
+            <a:off x="896112" y="3319272"/>
+            <a:ext cx="2926080" cy="274320"/>
+          </a:xfrm>
+          <a:prstGeom prst="rect">
+            <a:avLst/>
+          </a:prstGeom>
+          <a:noFill/>
+        </p:spPr>
+        <p:txBody>
+          <a:bodyPr wrap="square" lIns="73152" rIns="73152" tIns="36576" bIns="36576">
+            <a:spAutoFit/>
+          </a:bodyPr>
+          <a:lstStyle/>
+          <a:p>
+            <a:pPr algn="l">
+              <a:spcAft>
+                <a:spcPts val="0"/>
+              </a:spcAft>
+              <a:defRPr sz="1800" b="1">
+                <a:solidFill>
+                  <a:srgbClr val="BE3B3B"/>
+                </a:solidFill>
+                <a:latin typeface="Noto Sans CJK KR"/>
+              </a:defRPr>
+            </a:pPr>
+            <a:r>
+              <a:t>증상 2: 모델이 공중/바닥 아래</a:t>
+            </a:r>
+          </a:p>
+        </p:txBody>
+      </p:sp>
+      <p:sp>
+        <p:nvSpPr>
+          <p:cNvPr id="12" name="TextBox 11"/>
+          <p:cNvSpPr txBox="1"/>
+          <p:nvPr/>
+        </p:nvSpPr>
+        <p:spPr>
+          <a:xfrm>
+            <a:off x="3794760" y="3300984"/>
+            <a:ext cx="7543800" cy="621792"/>
+          </a:xfrm>
+          <a:prstGeom prst="rect">
+            <a:avLst/>
+          </a:prstGeom>
+          <a:noFill/>
+        </p:spPr>
+        <p:txBody>
+          <a:bodyPr wrap="square" lIns="73152" rIns="73152" tIns="36576" bIns="36576">
+            <a:spAutoFit/>
+          </a:bodyPr>
+          <a:lstStyle/>
+          <a:p>
+            <a:pPr algn="l">
+              <a:spcAft>
+                <a:spcPts val="0"/>
+              </a:spcAft>
+              <a:defRPr sz="1600" b="0">
+                <a:solidFill>
+                  <a:srgbClr val="122C4E"/>
+                </a:solidFill>
+                <a:latin typeface="Noto Sans CJK KR"/>
+              </a:defRPr>
+            </a:pPr>
+            <a:r>
+              <a:t>우선 확인: 초기 z·collision origin·geometry 크기를 확인한다.</a:t>
+            </a:r>
+            <a:br/>
+            <a:r>
+              <a:t>수정 후: gz sdf -k ~/ros2_curri/my_agv_ws/src/agv_description/curriculum_stages/M08/model.sdf</a:t>
+            </a:r>
+          </a:p>
+        </p:txBody>
+      </p:sp>
+      <p:sp>
+        <p:nvSpPr>
+          <p:cNvPr id="13" name="TextBox 12"/>
+          <p:cNvSpPr txBox="1"/>
+          <p:nvPr/>
+        </p:nvSpPr>
+        <p:spPr>
+          <a:xfrm>
+            <a:off x="822960" y="5102352"/>
+            <a:ext cx="10607040" cy="402336"/>
+          </a:xfrm>
+          <a:prstGeom prst="rect">
+            <a:avLst/>
+          </a:prstGeom>
+          <a:noFill/>
+        </p:spPr>
+        <p:txBody>
+          <a:bodyPr wrap="square" lIns="73152" rIns="73152" tIns="36576" bIns="36576">
+            <a:spAutoFit/>
+          </a:bodyPr>
           <a:lstStyle/>
           <a:p>
             <a:pPr algn="ctr">
               <a:spcAft>
                 <a:spcPts val="0"/>
               </a:spcAft>
-              <a:defRPr sz="2300" b="1">
-                <a:solidFill>
-                  <a:srgbClr val="122C4E"/>
-                </a:solidFill>
-                <a:latin typeface="Noto Sans CJK KR"/>
-              </a:defRPr>
-            </a:pPr>
-            <a:r>
-              <a:t>World의 box pose x 좌표를 1 m 바꾼 후 저장·재실행하여 top-view 위치 변화를 확인한다.</a:t>
-            </a:r>
-          </a:p>
-        </p:txBody>
-      </p:sp>
-      <p:sp>
-        <p:nvSpPr>
-          <p:cNvPr id="8" name="TextBox 7"/>
-          <p:cNvSpPr txBox="1"/>
-          <p:nvPr/>
-        </p:nvSpPr>
-        <p:spPr>
-          <a:xfrm>
-            <a:off x="877824" y="4590288"/>
-            <a:ext cx="10241280" cy="594360"/>
-          </a:xfrm>
-          <a:prstGeom prst="rect">
-            <a:avLst/>
-          </a:prstGeom>
-          <a:noFill/>
-        </p:spPr>
-        <p:txBody>
-          <a:bodyPr wrap="square" lIns="73152" rIns="73152" tIns="36576" bIns="36576">
-            <a:spAutoFit/>
-          </a:bodyPr>
-          <a:lstStyle/>
-          <a:p>
-            <a:pPr algn="ctr">
-              <a:spcAft>
-                <a:spcPts val="0"/>
-              </a:spcAft>
-              <a:defRPr sz="1900" b="1">
+              <a:defRPr sz="1800" b="1">
                 <a:solidFill>
                   <a:srgbClr val="DB7E22"/>
                 </a:solidFill>
@@ -29338,7 +31392,7 @@
               </a:defRPr>
             </a:pPr>
             <a:r>
-              <a:t>기록할 것: 바꾼 값(단위) · 기대한 변화 · 실제 출력/화면 · 원래 값으로 되돌린 결과</a:t>
+              <a:t>공통 순서: ① 현재 폴더 ② source ③ 파일 경로 ④ 이름/타입/단위 ⑤ build·source 후 재실행</a:t>
             </a:r>
           </a:p>
         </p:txBody>
@@ -29395,7 +31449,7 @@
               </a:defRPr>
             </a:pPr>
             <a:r>
-              <a:t>내 프로젝트 체크포인트를 저장하고 다음 모듈로 넘긴다</a:t>
+              <a:t>막혔을 때만: Complete를 복구용으로 사용한다</a:t>
             </a:r>
           </a:p>
         </p:txBody>
@@ -29434,7 +31488,7 @@
               </a:defRPr>
             </a:pPr>
             <a:r>
-              <a:t>Complete는 복구용 비교 기준이고, 다음 단계는 내가 직접 만든 workspace에서 계속합니다.</a:t>
+              <a:t>이 슬라이드가 먼저가 아닙니다. 직접 입력·실행을 시도한 뒤에만 내 파일과 Complete를 비교합니다.</a:t>
             </a:r>
           </a:p>
         </p:txBody>
@@ -29570,31 +31624,70 @@
               </a:defRPr>
             </a:pPr>
             <a:r>
-              <a:t>현재 단계 체크포인트    |    현재 폴더 ~/ros2_curri/my_agv_ws    |    현재 터미널</a:t>
-            </a:r>
-          </a:p>
-        </p:txBody>
-      </p:sp>
-      <p:sp>
-        <p:nvSpPr>
-          <p:cNvPr id="7" name="Rounded Rectangle 6"/>
+              <a:t>현재 단계 복구용 Complete    |    현재 폴더 ~/ros2_curri    |    현재 터미널</a:t>
+            </a:r>
+          </a:p>
+        </p:txBody>
+      </p:sp>
+      <p:sp>
+        <p:nvSpPr>
+          <p:cNvPr id="7" name="TextBox 6"/>
+          <p:cNvSpPr txBox="1"/>
+          <p:nvPr/>
+        </p:nvSpPr>
+        <p:spPr>
+          <a:xfrm>
+            <a:off x="713232" y="1664208"/>
+            <a:ext cx="10698480" cy="402336"/>
+          </a:xfrm>
+          <a:prstGeom prst="rect">
+            <a:avLst/>
+          </a:prstGeom>
+          <a:noFill/>
+        </p:spPr>
+        <p:txBody>
+          <a:bodyPr wrap="square" lIns="73152" rIns="73152" tIns="36576" bIns="36576">
+            <a:spAutoFit/>
+          </a:bodyPr>
+          <a:lstStyle/>
+          <a:p>
+            <a:pPr algn="ctr">
+              <a:spcAft>
+                <a:spcPts val="0"/>
+              </a:spcAft>
+              <a:defRPr sz="1800" b="1">
+                <a:solidFill>
+                  <a:srgbClr val="DB7E22"/>
+                </a:solidFill>
+                <a:latin typeface="Noto Sans CJK KR"/>
+              </a:defRPr>
+            </a:pPr>
+            <a:r>
+              <a:t>권장 순서: ① 내 오류를 확인  ② Complete와 diff  ③ 꼭 필요할 때만 backup 후 복사</a:t>
+            </a:r>
+          </a:p>
+        </p:txBody>
+      </p:sp>
+      <p:sp>
+        <p:nvSpPr>
+          <p:cNvPr id="8" name="Rounded Rectangle 7"/>
           <p:cNvSpPr/>
           <p:nvPr/>
         </p:nvSpPr>
         <p:spPr>
           <a:xfrm>
-            <a:off x="685800" y="1737360"/>
-            <a:ext cx="10972800" cy="3611880"/>
+            <a:off x="676656" y="2423160"/>
+            <a:ext cx="10881360" cy="2606040"/>
           </a:xfrm>
           <a:prstGeom prst="roundRect">
             <a:avLst/>
           </a:prstGeom>
           <a:solidFill>
-            <a:srgbClr val="F4F7FB"/>
+            <a:srgbClr val="1D232D"/>
           </a:solidFill>
           <a:ln>
             <a:solidFill>
-              <a:srgbClr val="D2DCE8"/>
+              <a:srgbClr val="1D232D"/>
             </a:solidFill>
           </a:ln>
         </p:spPr>
@@ -29613,112 +31706,86 @@
           </a:fontRef>
         </p:style>
         <p:txBody>
-          <a:bodyPr rtlCol="0" anchor="ctr"/>
-          <a:lstStyle/>
-          <a:p>
-            <a:pPr algn="ctr"/>
-          </a:p>
-        </p:txBody>
-      </p:sp>
-      <p:sp>
-        <p:nvSpPr>
-          <p:cNvPr id="8" name="TextBox 7"/>
-          <p:cNvSpPr txBox="1"/>
-          <p:nvPr/>
-        </p:nvSpPr>
-        <p:spPr>
-          <a:xfrm>
-            <a:off x="896112" y="1993392"/>
-            <a:ext cx="10332720" cy="2971800"/>
-          </a:xfrm>
-          <a:prstGeom prst="rect">
-            <a:avLst/>
-          </a:prstGeom>
-          <a:noFill/>
-        </p:spPr>
-        <p:txBody>
-          <a:bodyPr wrap="square" lIns="109728" rIns="109728">
-            <a:spAutoFit/>
-          </a:bodyPr>
-          <a:lstStyle/>
-          <a:p>
-            <a:pPr>
-              <a:spcAft>
-                <a:spcPts val="800"/>
-              </a:spcAft>
-              <a:defRPr sz="1800">
-                <a:solidFill>
-                  <a:srgbClr val="122C4E"/>
-                </a:solidFill>
-                <a:latin typeface="Noto Sans CJK KR"/>
-              </a:defRPr>
-            </a:pPr>
-            <a:r>
-              <a:t>• □ 완료 화면: ground·벽·박스가 있는 World에 AGV가 spawn되어 있는 Gazebo 화면을 확인한다.</a:t>
-            </a:r>
-          </a:p>
-          <a:p>
-            <a:pPr>
-              <a:spcAft>
-                <a:spcPts val="800"/>
-              </a:spcAft>
-              <a:defRPr sz="1800">
-                <a:solidFill>
-                  <a:srgbClr val="122C4E"/>
-                </a:solidFill>
-                <a:latin typeface="Noto Sans CJK KR"/>
-              </a:defRPr>
-            </a:pPr>
-            <a:r>
-              <a:t>• □ 막혔을 때 비교할 Complete: blocks/B_robot_build/M08_gazebo_world_spawn/complete/</a:t>
-            </a:r>
-          </a:p>
-          <a:p>
-            <a:pPr>
-              <a:spcAft>
-                <a:spcPts val="800"/>
-              </a:spcAft>
-              <a:defRPr sz="1800">
-                <a:solidFill>
-                  <a:srgbClr val="122C4E"/>
-                </a:solidFill>
-                <a:latin typeface="Noto Sans CJK KR"/>
-              </a:defRPr>
-            </a:pPr>
-            <a:r>
-              <a:t>• □ 정상 로그·캡처: logs/validation.log, screenshots/validation_terminal.png</a:t>
-            </a:r>
-          </a:p>
-          <a:p>
-            <a:pPr>
-              <a:spcAft>
-                <a:spcPts val="800"/>
-              </a:spcAft>
-              <a:defRPr sz="1800">
-                <a:solidFill>
-                  <a:srgbClr val="122C4E"/>
-                </a:solidFill>
-                <a:latin typeface="Noto Sans CJK KR"/>
-              </a:defRPr>
-            </a:pPr>
-            <a:r>
-              <a:t>• □ 버전 식별: CHECKSUM_or_TAG.txt의 SHA-256 manifest</a:t>
-            </a:r>
-          </a:p>
-          <a:p>
-            <a:pPr>
-              <a:spcAft>
-                <a:spcPts val="800"/>
-              </a:spcAft>
-              <a:defRPr sz="1800">
-                <a:solidFill>
-                  <a:srgbClr val="122C4E"/>
-                </a:solidFill>
-                <a:latin typeface="Noto Sans CJK KR"/>
-              </a:defRPr>
-            </a:pPr>
-            <a:r>
-              <a:t>• □ 다음 시작 조건: M09 Differential Drive</a:t>
+          <a:bodyPr rtlCol="0" anchor="ctr" wrap="square" lIns="109728" rIns="109728" tIns="73152" bIns="73152"/>
+          <a:lstStyle/>
+          <a:p>
+            <a:pPr algn="l">
+              <a:spcAft>
+                <a:spcPts val="0"/>
+              </a:spcAft>
+              <a:defRPr sz="1400" b="0">
+                <a:solidFill>
+                  <a:srgbClr val="FFFFFF"/>
+                </a:solidFill>
+                <a:latin typeface="DejaVu Sans Mono"/>
+              </a:defRPr>
+            </a:pPr>
+            <a:r>
+              <a:t>cd ~/ros2_curri</a:t>
+            </a:r>
+          </a:p>
+          <a:p>
+            <a:pPr algn="l">
+              <a:spcAft>
+                <a:spcPts val="0"/>
+              </a:spcAft>
+              <a:defRPr sz="1400" b="0">
+                <a:solidFill>
+                  <a:srgbClr val="FFFFFF"/>
+                </a:solidFill>
+                <a:latin typeface="DejaVu Sans Mono"/>
+              </a:defRPr>
+            </a:pPr>
+            <a:r>
+              <a:t>diff -ru my_agv_ws/src blocks/B_robot_build/M08_gazebo_world_spawn/complete/agv_ws/src || true</a:t>
+            </a:r>
+          </a:p>
+          <a:p>
+            <a:pPr algn="l">
+              <a:spcAft>
+                <a:spcPts val="0"/>
+              </a:spcAft>
+              <a:defRPr sz="1400" b="0">
+                <a:solidFill>
+                  <a:srgbClr val="FFFFFF"/>
+                </a:solidFill>
+                <a:latin typeface="DejaVu Sans Mono"/>
+              </a:defRPr>
+            </a:pPr>
+            <a:r>
+              <a:t>cp -a my_agv_ws/src my_agv_ws/src_before_M08</a:t>
+            </a:r>
+          </a:p>
+          <a:p>
+            <a:pPr algn="l">
+              <a:spcAft>
+                <a:spcPts val="0"/>
+              </a:spcAft>
+              <a:defRPr sz="1400" b="0">
+                <a:solidFill>
+                  <a:srgbClr val="FFFFFF"/>
+                </a:solidFill>
+                <a:latin typeface="DejaVu Sans Mono"/>
+              </a:defRPr>
+            </a:pPr>
+            <a:r>
+              <a:t>cp -a blocks/B_robot_build/M08_gazebo_world_spawn/complete/agv_ws/src/. my_agv_ws/src/</a:t>
+            </a:r>
+          </a:p>
+          <a:p>
+            <a:pPr algn="l">
+              <a:spcAft>
+                <a:spcPts val="0"/>
+              </a:spcAft>
+              <a:defRPr sz="1400" b="0">
+                <a:solidFill>
+                  <a:srgbClr val="FFFFFF"/>
+                </a:solidFill>
+                <a:latin typeface="DejaVu Sans Mono"/>
+              </a:defRPr>
+            </a:pPr>
+            <a:r>
+              <a:t>cd my_agv_ws &amp;&amp; colcon build --symlink-install &amp;&amp; source install/setup.bash</a:t>
             </a:r>
           </a:p>
         </p:txBody>
@@ -29731,8 +31798,8 @@
         </p:nvSpPr>
         <p:spPr>
           <a:xfrm>
-            <a:off x="868680" y="5596128"/>
-            <a:ext cx="10515600" cy="338328"/>
+            <a:off x="786384" y="5413248"/>
+            <a:ext cx="10424160" cy="429768"/>
           </a:xfrm>
           <a:prstGeom prst="rect">
             <a:avLst/>
@@ -29757,7 +31824,7 @@
               </a:defRPr>
             </a:pPr>
             <a:r>
-              <a:t>다음 모듈을 시작하기 전, 내 src의 변경사항을 저장하고 현재 완료 조건을 다시 확인합니다.</a:t>
+              <a:t>복구 뒤에는 끝내지 말고, 내 파일과 Complete의 차이를 한 줄씩 설명한 뒤 다시 직접 입력해 봅니다.</a:t>
             </a:r>
           </a:p>
         </p:txBody>
@@ -29814,7 +31881,7 @@
               </a:defRPr>
             </a:pPr>
             <a:r>
-              <a:t>공식 참고 자료</a:t>
+              <a:t>미니 실습: 값 하나를 바꾸고 결과를 비교한다</a:t>
             </a:r>
           </a:p>
         </p:txBody>
@@ -29853,7 +31920,7 @@
               </a:defRPr>
             </a:pPr>
             <a:r>
-              <a:t>본문 단계는 링크를 열지 않아도 완료할 수 있으며, 링크는 개념을 더 확인할 때만 사용합니다.</a:t>
+              <a:t>정상 결과를 만든 뒤에는 한 번에 하나의 값만 바꿉니다.</a:t>
             </a:r>
           </a:p>
         </p:txBody>
@@ -29938,16 +32005,16 @@
       </p:sp>
       <p:sp>
         <p:nvSpPr>
-          <p:cNvPr id="6" name="Rounded Rectangle 5"/>
+          <p:cNvPr id="6" name="Rectangle 5"/>
           <p:cNvSpPr/>
           <p:nvPr/>
         </p:nvSpPr>
         <p:spPr>
           <a:xfrm>
-            <a:off x="658368" y="1554480"/>
-            <a:ext cx="10972800" cy="4526280"/>
-          </a:xfrm>
-          <a:prstGeom prst="roundRect">
+            <a:off x="566928" y="1188720"/>
+            <a:ext cx="11064240" cy="347472"/>
+          </a:xfrm>
+          <a:prstGeom prst="rect">
             <a:avLst/>
           </a:prstGeom>
           <a:solidFill>
@@ -29955,7 +32022,7 @@
           </a:solidFill>
           <a:ln>
             <a:solidFill>
-              <a:srgbClr val="D7DFE9"/>
+              <a:srgbClr val="F4F7FB"/>
             </a:solidFill>
           </a:ln>
         </p:spPr>
@@ -29974,6 +32041,393 @@
           </a:fontRef>
         </p:style>
         <p:txBody>
+          <a:bodyPr rtlCol="0" anchor="ctr" wrap="square" lIns="73152" rIns="73152" tIns="36576" bIns="36576"/>
+          <a:lstStyle/>
+          <a:p>
+            <a:pPr algn="l">
+              <a:spcAft>
+                <a:spcPts val="0"/>
+              </a:spcAft>
+              <a:defRPr sz="1300" b="1">
+                <a:solidFill>
+                  <a:srgbClr val="122C4E"/>
+                </a:solidFill>
+                <a:latin typeface="Noto Sans CJK KR"/>
+              </a:defRPr>
+            </a:pPr>
+            <a:r>
+              <a:t>현재 단계 미니 실습    |    현재 폴더 ~/ros2_curri/my_agv_ws    |    현재 터미널</a:t>
+            </a:r>
+          </a:p>
+        </p:txBody>
+      </p:sp>
+      <p:sp>
+        <p:nvSpPr>
+          <p:cNvPr id="7" name="Rounded Rectangle 6"/>
+          <p:cNvSpPr/>
+          <p:nvPr/>
+        </p:nvSpPr>
+        <p:spPr>
+          <a:xfrm>
+            <a:off x="749808" y="1874519"/>
+            <a:ext cx="10652760" cy="1993392"/>
+          </a:xfrm>
+          <a:prstGeom prst="roundRect">
+            <a:avLst/>
+          </a:prstGeom>
+          <a:solidFill>
+            <a:srgbClr val="FFF8EB"/>
+          </a:solidFill>
+          <a:ln>
+            <a:solidFill>
+              <a:srgbClr val="ECC680"/>
+            </a:solidFill>
+          </a:ln>
+        </p:spPr>
+        <p:style>
+          <a:lnRef idx="1">
+            <a:schemeClr val="accent1"/>
+          </a:lnRef>
+          <a:fillRef idx="3">
+            <a:schemeClr val="accent1"/>
+          </a:fillRef>
+          <a:effectRef idx="2">
+            <a:schemeClr val="accent1"/>
+          </a:effectRef>
+          <a:fontRef idx="minor">
+            <a:schemeClr val="lt1"/>
+          </a:fontRef>
+        </p:style>
+        <p:txBody>
+          <a:bodyPr rtlCol="0" anchor="ctr" wrap="square" lIns="73152" rIns="73152" tIns="36576" bIns="36576"/>
+          <a:lstStyle/>
+          <a:p>
+            <a:pPr algn="ctr">
+              <a:spcAft>
+                <a:spcPts val="0"/>
+              </a:spcAft>
+              <a:defRPr sz="2300" b="1">
+                <a:solidFill>
+                  <a:srgbClr val="122C4E"/>
+                </a:solidFill>
+                <a:latin typeface="Noto Sans CJK KR"/>
+              </a:defRPr>
+            </a:pPr>
+            <a:r>
+              <a:t>World의 box pose x 좌표를 1 m 바꾼 후 저장·재실행하여 top-view 위치 변화를 확인한다.</a:t>
+            </a:r>
+          </a:p>
+        </p:txBody>
+      </p:sp>
+      <p:sp>
+        <p:nvSpPr>
+          <p:cNvPr id="8" name="TextBox 7"/>
+          <p:cNvSpPr txBox="1"/>
+          <p:nvPr/>
+        </p:nvSpPr>
+        <p:spPr>
+          <a:xfrm>
+            <a:off x="877824" y="4590288"/>
+            <a:ext cx="10241280" cy="594360"/>
+          </a:xfrm>
+          <a:prstGeom prst="rect">
+            <a:avLst/>
+          </a:prstGeom>
+          <a:noFill/>
+        </p:spPr>
+        <p:txBody>
+          <a:bodyPr wrap="square" lIns="73152" rIns="73152" tIns="36576" bIns="36576">
+            <a:spAutoFit/>
+          </a:bodyPr>
+          <a:lstStyle/>
+          <a:p>
+            <a:pPr algn="ctr">
+              <a:spcAft>
+                <a:spcPts val="0"/>
+              </a:spcAft>
+              <a:defRPr sz="1900" b="1">
+                <a:solidFill>
+                  <a:srgbClr val="DB7E22"/>
+                </a:solidFill>
+                <a:latin typeface="Noto Sans CJK KR"/>
+              </a:defRPr>
+            </a:pPr>
+            <a:r>
+              <a:t>기록할 것: 바꾼 값(단위) · 기대한 변화 · 실제 출력/화면 · 원래 값으로 되돌린 결과</a:t>
+            </a:r>
+          </a:p>
+        </p:txBody>
+      </p:sp>
+    </p:spTree>
+  </p:cSld>
+  <p:clrMapOvr>
+    <a:masterClrMapping/>
+  </p:clrMapOvr>
+</p:sld>
+</file>
+
+<file path=ppt/slides/slide49.xml><?xml version="1.0" encoding="utf-8"?>
+<p:sld xmlns:a="http://schemas.openxmlformats.org/drawingml/2006/main" xmlns:p="http://schemas.openxmlformats.org/presentationml/2006/main" xmlns:r="http://schemas.openxmlformats.org/officeDocument/2006/relationships">
+  <p:cSld>
+    <p:spTree>
+      <p:nvGrpSpPr>
+        <p:cNvPr id="1" name=""/>
+        <p:cNvGrpSpPr/>
+        <p:nvPr/>
+      </p:nvGrpSpPr>
+      <p:grpSpPr/>
+      <p:sp>
+        <p:nvSpPr>
+          <p:cNvPr id="2" name="TextBox 1"/>
+          <p:cNvSpPr txBox="1"/>
+          <p:nvPr/>
+        </p:nvSpPr>
+        <p:spPr>
+          <a:xfrm>
+            <a:off x="566928" y="347472"/>
+            <a:ext cx="10881360" cy="438912"/>
+          </a:xfrm>
+          <a:prstGeom prst="rect">
+            <a:avLst/>
+          </a:prstGeom>
+          <a:noFill/>
+        </p:spPr>
+        <p:txBody>
+          <a:bodyPr wrap="square" lIns="73152" rIns="73152" tIns="36576" bIns="36576">
+            <a:spAutoFit/>
+          </a:bodyPr>
+          <a:lstStyle/>
+          <a:p>
+            <a:pPr algn="l">
+              <a:spcAft>
+                <a:spcPts val="0"/>
+              </a:spcAft>
+              <a:defRPr sz="3200" b="1">
+                <a:solidFill>
+                  <a:srgbClr val="122C4E"/>
+                </a:solidFill>
+                <a:latin typeface="Noto Sans CJK KR"/>
+              </a:defRPr>
+            </a:pPr>
+            <a:r>
+              <a:t>내 프로젝트 체크포인트를 저장하고 다음 모듈로 넘긴다</a:t>
+            </a:r>
+          </a:p>
+        </p:txBody>
+      </p:sp>
+      <p:sp>
+        <p:nvSpPr>
+          <p:cNvPr id="3" name="TextBox 2"/>
+          <p:cNvSpPr txBox="1"/>
+          <p:nvPr/>
+        </p:nvSpPr>
+        <p:spPr>
+          <a:xfrm>
+            <a:off x="603504" y="859536"/>
+            <a:ext cx="10698480" cy="292608"/>
+          </a:xfrm>
+          <a:prstGeom prst="rect">
+            <a:avLst/>
+          </a:prstGeom>
+          <a:noFill/>
+        </p:spPr>
+        <p:txBody>
+          <a:bodyPr wrap="square" lIns="73152" rIns="73152" tIns="36576" bIns="36576">
+            <a:spAutoFit/>
+          </a:bodyPr>
+          <a:lstStyle/>
+          <a:p>
+            <a:pPr algn="l">
+              <a:spcAft>
+                <a:spcPts val="0"/>
+              </a:spcAft>
+              <a:defRPr sz="1700" b="0">
+                <a:solidFill>
+                  <a:srgbClr val="5C6672"/>
+                </a:solidFill>
+                <a:latin typeface="Noto Sans CJK KR"/>
+              </a:defRPr>
+            </a:pPr>
+            <a:r>
+              <a:t>Complete는 복구용 비교 기준이고, 다음 단계는 내가 직접 만든 workspace에서 계속합니다.</a:t>
+            </a:r>
+          </a:p>
+        </p:txBody>
+      </p:sp>
+      <p:sp>
+        <p:nvSpPr>
+          <p:cNvPr id="4" name="TextBox 3"/>
+          <p:cNvSpPr txBox="1"/>
+          <p:nvPr/>
+        </p:nvSpPr>
+        <p:spPr>
+          <a:xfrm>
+            <a:off x="530352" y="6510528"/>
+            <a:ext cx="7772400" cy="201168"/>
+          </a:xfrm>
+          <a:prstGeom prst="rect">
+            <a:avLst/>
+          </a:prstGeom>
+          <a:noFill/>
+        </p:spPr>
+        <p:txBody>
+          <a:bodyPr wrap="square" lIns="73152" rIns="73152" tIns="36576" bIns="36576">
+            <a:spAutoFit/>
+          </a:bodyPr>
+          <a:lstStyle/>
+          <a:p>
+            <a:pPr algn="l">
+              <a:spcAft>
+                <a:spcPts val="0"/>
+              </a:spcAft>
+              <a:defRPr sz="900" b="0">
+                <a:solidFill>
+                  <a:srgbClr val="5C6672"/>
+                </a:solidFill>
+                <a:latin typeface="Noto Sans CJK KR"/>
+              </a:defRPr>
+            </a:pPr>
+            <a:r>
+              <a:t>ROS 2 기반 AGV End-to-End 개발 커리큘럼 · M08 · Block B</a:t>
+            </a:r>
+          </a:p>
+        </p:txBody>
+      </p:sp>
+      <p:sp>
+        <p:nvSpPr>
+          <p:cNvPr id="5" name="TextBox 4"/>
+          <p:cNvSpPr txBox="1"/>
+          <p:nvPr/>
+        </p:nvSpPr>
+        <p:spPr>
+          <a:xfrm>
+            <a:off x="9144000" y="6510528"/>
+            <a:ext cx="2468880" cy="201168"/>
+          </a:xfrm>
+          <a:prstGeom prst="rect">
+            <a:avLst/>
+          </a:prstGeom>
+          <a:noFill/>
+        </p:spPr>
+        <p:txBody>
+          <a:bodyPr wrap="square" lIns="73152" rIns="73152" tIns="36576" bIns="36576">
+            <a:spAutoFit/>
+          </a:bodyPr>
+          <a:lstStyle/>
+          <a:p>
+            <a:pPr algn="r">
+              <a:spcAft>
+                <a:spcPts val="0"/>
+              </a:spcAft>
+              <a:defRPr sz="1000" b="0">
+                <a:solidFill>
+                  <a:srgbClr val="5C6672"/>
+                </a:solidFill>
+                <a:latin typeface="Noto Sans CJK KR"/>
+              </a:defRPr>
+            </a:pPr>
+            <a:r>
+              <a:t>명령·파일 경로는 슬라이드에서 복사 가능</a:t>
+            </a:r>
+          </a:p>
+        </p:txBody>
+      </p:sp>
+      <p:sp>
+        <p:nvSpPr>
+          <p:cNvPr id="6" name="Rectangle 5"/>
+          <p:cNvSpPr/>
+          <p:nvPr/>
+        </p:nvSpPr>
+        <p:spPr>
+          <a:xfrm>
+            <a:off x="566928" y="1188720"/>
+            <a:ext cx="11064240" cy="347472"/>
+          </a:xfrm>
+          <a:prstGeom prst="rect">
+            <a:avLst/>
+          </a:prstGeom>
+          <a:solidFill>
+            <a:srgbClr val="F4F7FB"/>
+          </a:solidFill>
+          <a:ln>
+            <a:solidFill>
+              <a:srgbClr val="F4F7FB"/>
+            </a:solidFill>
+          </a:ln>
+        </p:spPr>
+        <p:style>
+          <a:lnRef idx="1">
+            <a:schemeClr val="accent1"/>
+          </a:lnRef>
+          <a:fillRef idx="3">
+            <a:schemeClr val="accent1"/>
+          </a:fillRef>
+          <a:effectRef idx="2">
+            <a:schemeClr val="accent1"/>
+          </a:effectRef>
+          <a:fontRef idx="minor">
+            <a:schemeClr val="lt1"/>
+          </a:fontRef>
+        </p:style>
+        <p:txBody>
+          <a:bodyPr rtlCol="0" anchor="ctr" wrap="square" lIns="73152" rIns="73152" tIns="36576" bIns="36576"/>
+          <a:lstStyle/>
+          <a:p>
+            <a:pPr algn="l">
+              <a:spcAft>
+                <a:spcPts val="0"/>
+              </a:spcAft>
+              <a:defRPr sz="1300" b="1">
+                <a:solidFill>
+                  <a:srgbClr val="122C4E"/>
+                </a:solidFill>
+                <a:latin typeface="Noto Sans CJK KR"/>
+              </a:defRPr>
+            </a:pPr>
+            <a:r>
+              <a:t>현재 단계 체크포인트    |    현재 폴더 ~/ros2_curri/my_agv_ws    |    현재 터미널</a:t>
+            </a:r>
+          </a:p>
+        </p:txBody>
+      </p:sp>
+      <p:sp>
+        <p:nvSpPr>
+          <p:cNvPr id="7" name="Rounded Rectangle 6"/>
+          <p:cNvSpPr/>
+          <p:nvPr/>
+        </p:nvSpPr>
+        <p:spPr>
+          <a:xfrm>
+            <a:off x="685800" y="1737360"/>
+            <a:ext cx="10972800" cy="3611880"/>
+          </a:xfrm>
+          <a:prstGeom prst="roundRect">
+            <a:avLst/>
+          </a:prstGeom>
+          <a:solidFill>
+            <a:srgbClr val="F4F7FB"/>
+          </a:solidFill>
+          <a:ln>
+            <a:solidFill>
+              <a:srgbClr val="D2DCE8"/>
+            </a:solidFill>
+          </a:ln>
+        </p:spPr>
+        <p:style>
+          <a:lnRef idx="1">
+            <a:schemeClr val="accent1"/>
+          </a:lnRef>
+          <a:fillRef idx="3">
+            <a:schemeClr val="accent1"/>
+          </a:fillRef>
+          <a:effectRef idx="2">
+            <a:schemeClr val="accent1"/>
+          </a:effectRef>
+          <a:fontRef idx="minor">
+            <a:schemeClr val="lt1"/>
+          </a:fontRef>
+        </p:style>
+        <p:txBody>
           <a:bodyPr rtlCol="0" anchor="ctr"/>
           <a:lstStyle/>
           <a:p>
@@ -29983,312 +32437,142 @@
       </p:sp>
       <p:sp>
         <p:nvSpPr>
-          <p:cNvPr id="7" name="TextBox 6"/>
-          <p:cNvSpPr txBox="1"/>
-          <p:nvPr/>
-        </p:nvSpPr>
-        <p:spPr>
-          <a:xfrm>
-            <a:off x="914400" y="1773936"/>
-            <a:ext cx="3840480" cy="256032"/>
-          </a:xfrm>
-          <a:prstGeom prst="rect">
-            <a:avLst/>
-          </a:prstGeom>
-          <a:noFill/>
-        </p:spPr>
-        <p:txBody>
-          <a:bodyPr wrap="square" lIns="73152" rIns="73152" tIns="36576" bIns="36576">
-            <a:spAutoFit/>
-          </a:bodyPr>
-          <a:lstStyle/>
-          <a:p>
-            <a:pPr algn="l">
+          <p:cNvPr id="8" name="TextBox 7"/>
+          <p:cNvSpPr txBox="1"/>
+          <p:nvPr/>
+        </p:nvSpPr>
+        <p:spPr>
+          <a:xfrm>
+            <a:off x="896112" y="1993392"/>
+            <a:ext cx="10332720" cy="2971800"/>
+          </a:xfrm>
+          <a:prstGeom prst="rect">
+            <a:avLst/>
+          </a:prstGeom>
+          <a:noFill/>
+        </p:spPr>
+        <p:txBody>
+          <a:bodyPr wrap="square" lIns="109728" rIns="109728">
+            <a:spAutoFit/>
+          </a:bodyPr>
+          <a:lstStyle/>
+          <a:p>
+            <a:pPr>
+              <a:spcAft>
+                <a:spcPts val="800"/>
+              </a:spcAft>
+              <a:defRPr sz="1800">
+                <a:solidFill>
+                  <a:srgbClr val="122C4E"/>
+                </a:solidFill>
+                <a:latin typeface="Noto Sans CJK KR"/>
+              </a:defRPr>
+            </a:pPr>
+            <a:r>
+              <a:t>• □ 완료 화면: ground·벽·박스가 있는 World에 AGV가 spawn되어 있는 Gazebo 화면을 확인한다.</a:t>
+            </a:r>
+          </a:p>
+          <a:p>
+            <a:pPr>
+              <a:spcAft>
+                <a:spcPts val="800"/>
+              </a:spcAft>
+              <a:defRPr sz="1800">
+                <a:solidFill>
+                  <a:srgbClr val="122C4E"/>
+                </a:solidFill>
+                <a:latin typeface="Noto Sans CJK KR"/>
+              </a:defRPr>
+            </a:pPr>
+            <a:r>
+              <a:t>• □ 막혔을 때 비교할 Complete: blocks/B_robot_build/M08_gazebo_world_spawn/complete/</a:t>
+            </a:r>
+          </a:p>
+          <a:p>
+            <a:pPr>
+              <a:spcAft>
+                <a:spcPts val="800"/>
+              </a:spcAft>
+              <a:defRPr sz="1800">
+                <a:solidFill>
+                  <a:srgbClr val="122C4E"/>
+                </a:solidFill>
+                <a:latin typeface="Noto Sans CJK KR"/>
+              </a:defRPr>
+            </a:pPr>
+            <a:r>
+              <a:t>• □ 정상 로그·캡처: logs/validation.log, screenshots/validation_terminal.png</a:t>
+            </a:r>
+          </a:p>
+          <a:p>
+            <a:pPr>
+              <a:spcAft>
+                <a:spcPts val="800"/>
+              </a:spcAft>
+              <a:defRPr sz="1800">
+                <a:solidFill>
+                  <a:srgbClr val="122C4E"/>
+                </a:solidFill>
+                <a:latin typeface="Noto Sans CJK KR"/>
+              </a:defRPr>
+            </a:pPr>
+            <a:r>
+              <a:t>• □ 버전 식별: CHECKSUM_or_TAG.txt의 SHA-256 manifest</a:t>
+            </a:r>
+          </a:p>
+          <a:p>
+            <a:pPr>
+              <a:spcAft>
+                <a:spcPts val="800"/>
+              </a:spcAft>
+              <a:defRPr sz="1800">
+                <a:solidFill>
+                  <a:srgbClr val="122C4E"/>
+                </a:solidFill>
+                <a:latin typeface="Noto Sans CJK KR"/>
+              </a:defRPr>
+            </a:pPr>
+            <a:r>
+              <a:t>• □ 다음 시작 조건: M09 Differential Drive</a:t>
+            </a:r>
+          </a:p>
+        </p:txBody>
+      </p:sp>
+      <p:sp>
+        <p:nvSpPr>
+          <p:cNvPr id="9" name="TextBox 8"/>
+          <p:cNvSpPr txBox="1"/>
+          <p:nvPr/>
+        </p:nvSpPr>
+        <p:spPr>
+          <a:xfrm>
+            <a:off x="868680" y="5596128"/>
+            <a:ext cx="10515600" cy="338328"/>
+          </a:xfrm>
+          <a:prstGeom prst="rect">
+            <a:avLst/>
+          </a:prstGeom>
+          <a:noFill/>
+        </p:spPr>
+        <p:txBody>
+          <a:bodyPr wrap="square" lIns="73152" rIns="73152" tIns="36576" bIns="36576">
+            <a:spAutoFit/>
+          </a:bodyPr>
+          <a:lstStyle/>
+          <a:p>
+            <a:pPr algn="ctr">
               <a:spcAft>
                 <a:spcPts val="0"/>
               </a:spcAft>
               <a:defRPr sz="1700" b="1">
                 <a:solidFill>
-                  <a:srgbClr val="122C4E"/>
-                </a:solidFill>
-                <a:latin typeface="Noto Sans CJK KR"/>
-              </a:defRPr>
-            </a:pPr>
-            <a:r>
-              <a:t>ROS 2 Jazzy — Gazebo Simulation</a:t>
-            </a:r>
-          </a:p>
-        </p:txBody>
-      </p:sp>
-      <p:sp>
-        <p:nvSpPr>
-          <p:cNvPr id="8" name="TextBox 7"/>
-          <p:cNvSpPr txBox="1"/>
-          <p:nvPr/>
-        </p:nvSpPr>
-        <p:spPr>
-          <a:xfrm>
-            <a:off x="914400" y="2048255"/>
-            <a:ext cx="9966960" cy="475488"/>
-          </a:xfrm>
-          <a:prstGeom prst="rect">
-            <a:avLst/>
-          </a:prstGeom>
-          <a:noFill/>
-        </p:spPr>
-        <p:txBody>
-          <a:bodyPr wrap="square" lIns="73152" rIns="73152" tIns="36576" bIns="36576">
-            <a:spAutoFit/>
-          </a:bodyPr>
-          <a:lstStyle/>
-          <a:p>
-            <a:pPr algn="l">
-              <a:spcAft>
-                <a:spcPts val="0"/>
-              </a:spcAft>
-              <a:defRPr sz="1000" b="0">
-                <a:solidFill>
-                  <a:srgbClr val="225B9B"/>
-                </a:solidFill>
-                <a:latin typeface="DejaVu Sans Mono"/>
-              </a:defRPr>
-            </a:pPr>
-            <a:r>
-              <a:t>https://docs.ros.org/en/jazzy/Tutorials/Advanced/Simulators/Gazebo/Simulation-Gazebo.html</a:t>
-            </a:r>
-          </a:p>
-        </p:txBody>
-      </p:sp>
-      <p:sp>
-        <p:nvSpPr>
-          <p:cNvPr id="9" name="TextBox 8"/>
-          <p:cNvSpPr txBox="1"/>
-          <p:nvPr/>
-        </p:nvSpPr>
-        <p:spPr>
-          <a:xfrm>
-            <a:off x="914400" y="2852928"/>
-            <a:ext cx="3840480" cy="256032"/>
-          </a:xfrm>
-          <a:prstGeom prst="rect">
-            <a:avLst/>
-          </a:prstGeom>
-          <a:noFill/>
-        </p:spPr>
-        <p:txBody>
-          <a:bodyPr wrap="square" lIns="73152" rIns="73152" tIns="36576" bIns="36576">
-            <a:spAutoFit/>
-          </a:bodyPr>
-          <a:lstStyle/>
-          <a:p>
-            <a:pPr algn="l">
-              <a:spcAft>
-                <a:spcPts val="0"/>
-              </a:spcAft>
-              <a:defRPr sz="1700" b="1">
-                <a:solidFill>
-                  <a:srgbClr val="122C4E"/>
-                </a:solidFill>
-                <a:latin typeface="Noto Sans CJK KR"/>
-              </a:defRPr>
-            </a:pPr>
-            <a:r>
-              <a:t>ROS 2 Jazzy — URDF / robot_state_publisher</a:t>
-            </a:r>
-          </a:p>
-        </p:txBody>
-      </p:sp>
-      <p:sp>
-        <p:nvSpPr>
-          <p:cNvPr id="10" name="TextBox 9"/>
-          <p:cNvSpPr txBox="1"/>
-          <p:nvPr/>
-        </p:nvSpPr>
-        <p:spPr>
-          <a:xfrm>
-            <a:off x="914400" y="3127248"/>
-            <a:ext cx="9966960" cy="475488"/>
-          </a:xfrm>
-          <a:prstGeom prst="rect">
-            <a:avLst/>
-          </a:prstGeom>
-          <a:noFill/>
-        </p:spPr>
-        <p:txBody>
-          <a:bodyPr wrap="square" lIns="73152" rIns="73152" tIns="36576" bIns="36576">
-            <a:spAutoFit/>
-          </a:bodyPr>
-          <a:lstStyle/>
-          <a:p>
-            <a:pPr algn="l">
-              <a:spcAft>
-                <a:spcPts val="0"/>
-              </a:spcAft>
-              <a:defRPr sz="1000" b="0">
-                <a:solidFill>
-                  <a:srgbClr val="225B9B"/>
-                </a:solidFill>
-                <a:latin typeface="DejaVu Sans Mono"/>
-              </a:defRPr>
-            </a:pPr>
-            <a:r>
-              <a:t>https://docs.ros.org/en/jazzy/Tutorials/Intermediate/URDF/Using-URDF-with-Robot-State-Publisher-py.html</a:t>
-            </a:r>
-          </a:p>
-        </p:txBody>
-      </p:sp>
-      <p:sp>
-        <p:nvSpPr>
-          <p:cNvPr id="11" name="TextBox 10"/>
-          <p:cNvSpPr txBox="1"/>
-          <p:nvPr/>
-        </p:nvSpPr>
-        <p:spPr>
-          <a:xfrm>
-            <a:off x="914400" y="3931920"/>
-            <a:ext cx="3840480" cy="256032"/>
-          </a:xfrm>
-          <a:prstGeom prst="rect">
-            <a:avLst/>
-          </a:prstGeom>
-          <a:noFill/>
-        </p:spPr>
-        <p:txBody>
-          <a:bodyPr wrap="square" lIns="73152" rIns="73152" tIns="36576" bIns="36576">
-            <a:spAutoFit/>
-          </a:bodyPr>
-          <a:lstStyle/>
-          <a:p>
-            <a:pPr algn="l">
-              <a:spcAft>
-                <a:spcPts val="0"/>
-              </a:spcAft>
-              <a:defRPr sz="1700" b="1">
-                <a:solidFill>
-                  <a:srgbClr val="122C4E"/>
-                </a:solidFill>
-                <a:latin typeface="Noto Sans CJK KR"/>
-              </a:defRPr>
-            </a:pPr>
-            <a:r>
-              <a:t>Gazebo — ROS 2 Integration / ros_gz_bridge</a:t>
-            </a:r>
-          </a:p>
-        </p:txBody>
-      </p:sp>
-      <p:sp>
-        <p:nvSpPr>
-          <p:cNvPr id="12" name="TextBox 11"/>
-          <p:cNvSpPr txBox="1"/>
-          <p:nvPr/>
-        </p:nvSpPr>
-        <p:spPr>
-          <a:xfrm>
-            <a:off x="914400" y="4206240"/>
-            <a:ext cx="9966960" cy="475488"/>
-          </a:xfrm>
-          <a:prstGeom prst="rect">
-            <a:avLst/>
-          </a:prstGeom>
-          <a:noFill/>
-        </p:spPr>
-        <p:txBody>
-          <a:bodyPr wrap="square" lIns="73152" rIns="73152" tIns="36576" bIns="36576">
-            <a:spAutoFit/>
-          </a:bodyPr>
-          <a:lstStyle/>
-          <a:p>
-            <a:pPr algn="l">
-              <a:spcAft>
-                <a:spcPts val="0"/>
-              </a:spcAft>
-              <a:defRPr sz="1000" b="0">
-                <a:solidFill>
-                  <a:srgbClr val="225B9B"/>
-                </a:solidFill>
-                <a:latin typeface="DejaVu Sans Mono"/>
-              </a:defRPr>
-            </a:pPr>
-            <a:r>
-              <a:t>https://gazebosim.org/docs/latest/ros2_integration/</a:t>
-            </a:r>
-          </a:p>
-        </p:txBody>
-      </p:sp>
-      <p:sp>
-        <p:nvSpPr>
-          <p:cNvPr id="13" name="TextBox 12"/>
-          <p:cNvSpPr txBox="1"/>
-          <p:nvPr/>
-        </p:nvSpPr>
-        <p:spPr>
-          <a:xfrm>
-            <a:off x="914400" y="5010912"/>
-            <a:ext cx="3840480" cy="256032"/>
-          </a:xfrm>
-          <a:prstGeom prst="rect">
-            <a:avLst/>
-          </a:prstGeom>
-          <a:noFill/>
-        </p:spPr>
-        <p:txBody>
-          <a:bodyPr wrap="square" lIns="73152" rIns="73152" tIns="36576" bIns="36576">
-            <a:spAutoFit/>
-          </a:bodyPr>
-          <a:lstStyle/>
-          <a:p>
-            <a:pPr algn="l">
-              <a:spcAft>
-                <a:spcPts val="0"/>
-              </a:spcAft>
-              <a:defRPr sz="1700" b="1">
-                <a:solidFill>
-                  <a:srgbClr val="122C4E"/>
-                </a:solidFill>
-                <a:latin typeface="Noto Sans CJK KR"/>
-              </a:defRPr>
-            </a:pPr>
-            <a:r>
-              <a:t>ROS 2 Jazzy — rosbag2 Recording and Playback</a:t>
-            </a:r>
-          </a:p>
-        </p:txBody>
-      </p:sp>
-      <p:sp>
-        <p:nvSpPr>
-          <p:cNvPr id="14" name="TextBox 13"/>
-          <p:cNvSpPr txBox="1"/>
-          <p:nvPr/>
-        </p:nvSpPr>
-        <p:spPr>
-          <a:xfrm>
-            <a:off x="914400" y="5285232"/>
-            <a:ext cx="9966960" cy="475488"/>
-          </a:xfrm>
-          <a:prstGeom prst="rect">
-            <a:avLst/>
-          </a:prstGeom>
-          <a:noFill/>
-        </p:spPr>
-        <p:txBody>
-          <a:bodyPr wrap="square" lIns="73152" rIns="73152" tIns="36576" bIns="36576">
-            <a:spAutoFit/>
-          </a:bodyPr>
-          <a:lstStyle/>
-          <a:p>
-            <a:pPr algn="l">
-              <a:spcAft>
-                <a:spcPts val="0"/>
-              </a:spcAft>
-              <a:defRPr sz="1000" b="0">
-                <a:solidFill>
-                  <a:srgbClr val="225B9B"/>
-                </a:solidFill>
-                <a:latin typeface="DejaVu Sans Mono"/>
-              </a:defRPr>
-            </a:pPr>
-            <a:r>
-              <a:t>https://docs.ros.org/en/jazzy/Tutorials/Beginner-CLI-Tools/Recording-And-Playing-Back-Data/Recording-And-Playing-Back-Data.html</a:t>
+                  <a:srgbClr val="2A8B5A"/>
+                </a:solidFill>
+                <a:latin typeface="Noto Sans CJK KR"/>
+              </a:defRPr>
+            </a:pPr>
+            <a:r>
+              <a:t>다음 모듈을 시작하기 전, 내 src의 변경사항을 저장하고 현재 완료 조건을 다시 확인합니다.</a:t>
             </a:r>
           </a:p>
         </p:txBody>
@@ -30941,6 +33225,537 @@
 </p:sld>
 </file>
 
+<file path=ppt/slides/slide50.xml><?xml version="1.0" encoding="utf-8"?>
+<p:sld xmlns:a="http://schemas.openxmlformats.org/drawingml/2006/main" xmlns:p="http://schemas.openxmlformats.org/presentationml/2006/main" xmlns:r="http://schemas.openxmlformats.org/officeDocument/2006/relationships">
+  <p:cSld>
+    <p:spTree>
+      <p:nvGrpSpPr>
+        <p:cNvPr id="1" name=""/>
+        <p:cNvGrpSpPr/>
+        <p:nvPr/>
+      </p:nvGrpSpPr>
+      <p:grpSpPr/>
+      <p:sp>
+        <p:nvSpPr>
+          <p:cNvPr id="2" name="TextBox 1"/>
+          <p:cNvSpPr txBox="1"/>
+          <p:nvPr/>
+        </p:nvSpPr>
+        <p:spPr>
+          <a:xfrm>
+            <a:off x="566928" y="347472"/>
+            <a:ext cx="10881360" cy="438912"/>
+          </a:xfrm>
+          <a:prstGeom prst="rect">
+            <a:avLst/>
+          </a:prstGeom>
+          <a:noFill/>
+        </p:spPr>
+        <p:txBody>
+          <a:bodyPr wrap="square" lIns="73152" rIns="73152" tIns="36576" bIns="36576">
+            <a:spAutoFit/>
+          </a:bodyPr>
+          <a:lstStyle/>
+          <a:p>
+            <a:pPr algn="l">
+              <a:spcAft>
+                <a:spcPts val="0"/>
+              </a:spcAft>
+              <a:defRPr sz="3200" b="1">
+                <a:solidFill>
+                  <a:srgbClr val="122C4E"/>
+                </a:solidFill>
+                <a:latin typeface="Noto Sans CJK KR"/>
+              </a:defRPr>
+            </a:pPr>
+            <a:r>
+              <a:t>공식 참고 자료</a:t>
+            </a:r>
+          </a:p>
+        </p:txBody>
+      </p:sp>
+      <p:sp>
+        <p:nvSpPr>
+          <p:cNvPr id="3" name="TextBox 2"/>
+          <p:cNvSpPr txBox="1"/>
+          <p:nvPr/>
+        </p:nvSpPr>
+        <p:spPr>
+          <a:xfrm>
+            <a:off x="603504" y="859536"/>
+            <a:ext cx="10698480" cy="292608"/>
+          </a:xfrm>
+          <a:prstGeom prst="rect">
+            <a:avLst/>
+          </a:prstGeom>
+          <a:noFill/>
+        </p:spPr>
+        <p:txBody>
+          <a:bodyPr wrap="square" lIns="73152" rIns="73152" tIns="36576" bIns="36576">
+            <a:spAutoFit/>
+          </a:bodyPr>
+          <a:lstStyle/>
+          <a:p>
+            <a:pPr algn="l">
+              <a:spcAft>
+                <a:spcPts val="0"/>
+              </a:spcAft>
+              <a:defRPr sz="1700" b="0">
+                <a:solidFill>
+                  <a:srgbClr val="5C6672"/>
+                </a:solidFill>
+                <a:latin typeface="Noto Sans CJK KR"/>
+              </a:defRPr>
+            </a:pPr>
+            <a:r>
+              <a:t>본문 단계는 링크를 열지 않아도 완료할 수 있으며, 링크는 개념을 더 확인할 때만 사용합니다.</a:t>
+            </a:r>
+          </a:p>
+        </p:txBody>
+      </p:sp>
+      <p:sp>
+        <p:nvSpPr>
+          <p:cNvPr id="4" name="TextBox 3"/>
+          <p:cNvSpPr txBox="1"/>
+          <p:nvPr/>
+        </p:nvSpPr>
+        <p:spPr>
+          <a:xfrm>
+            <a:off x="530352" y="6510528"/>
+            <a:ext cx="7772400" cy="201168"/>
+          </a:xfrm>
+          <a:prstGeom prst="rect">
+            <a:avLst/>
+          </a:prstGeom>
+          <a:noFill/>
+        </p:spPr>
+        <p:txBody>
+          <a:bodyPr wrap="square" lIns="73152" rIns="73152" tIns="36576" bIns="36576">
+            <a:spAutoFit/>
+          </a:bodyPr>
+          <a:lstStyle/>
+          <a:p>
+            <a:pPr algn="l">
+              <a:spcAft>
+                <a:spcPts val="0"/>
+              </a:spcAft>
+              <a:defRPr sz="900" b="0">
+                <a:solidFill>
+                  <a:srgbClr val="5C6672"/>
+                </a:solidFill>
+                <a:latin typeface="Noto Sans CJK KR"/>
+              </a:defRPr>
+            </a:pPr>
+            <a:r>
+              <a:t>ROS 2 기반 AGV End-to-End 개발 커리큘럼 · M08 · Block B</a:t>
+            </a:r>
+          </a:p>
+        </p:txBody>
+      </p:sp>
+      <p:sp>
+        <p:nvSpPr>
+          <p:cNvPr id="5" name="TextBox 4"/>
+          <p:cNvSpPr txBox="1"/>
+          <p:nvPr/>
+        </p:nvSpPr>
+        <p:spPr>
+          <a:xfrm>
+            <a:off x="9144000" y="6510528"/>
+            <a:ext cx="2468880" cy="201168"/>
+          </a:xfrm>
+          <a:prstGeom prst="rect">
+            <a:avLst/>
+          </a:prstGeom>
+          <a:noFill/>
+        </p:spPr>
+        <p:txBody>
+          <a:bodyPr wrap="square" lIns="73152" rIns="73152" tIns="36576" bIns="36576">
+            <a:spAutoFit/>
+          </a:bodyPr>
+          <a:lstStyle/>
+          <a:p>
+            <a:pPr algn="r">
+              <a:spcAft>
+                <a:spcPts val="0"/>
+              </a:spcAft>
+              <a:defRPr sz="1000" b="0">
+                <a:solidFill>
+                  <a:srgbClr val="5C6672"/>
+                </a:solidFill>
+                <a:latin typeface="Noto Sans CJK KR"/>
+              </a:defRPr>
+            </a:pPr>
+            <a:r>
+              <a:t>명령·파일 경로는 슬라이드에서 복사 가능</a:t>
+            </a:r>
+          </a:p>
+        </p:txBody>
+      </p:sp>
+      <p:sp>
+        <p:nvSpPr>
+          <p:cNvPr id="6" name="Rounded Rectangle 5"/>
+          <p:cNvSpPr/>
+          <p:nvPr/>
+        </p:nvSpPr>
+        <p:spPr>
+          <a:xfrm>
+            <a:off x="658368" y="1554480"/>
+            <a:ext cx="10972800" cy="4526280"/>
+          </a:xfrm>
+          <a:prstGeom prst="roundRect">
+            <a:avLst/>
+          </a:prstGeom>
+          <a:solidFill>
+            <a:srgbClr val="F4F7FB"/>
+          </a:solidFill>
+          <a:ln>
+            <a:solidFill>
+              <a:srgbClr val="D7DFE9"/>
+            </a:solidFill>
+          </a:ln>
+        </p:spPr>
+        <p:style>
+          <a:lnRef idx="1">
+            <a:schemeClr val="accent1"/>
+          </a:lnRef>
+          <a:fillRef idx="3">
+            <a:schemeClr val="accent1"/>
+          </a:fillRef>
+          <a:effectRef idx="2">
+            <a:schemeClr val="accent1"/>
+          </a:effectRef>
+          <a:fontRef idx="minor">
+            <a:schemeClr val="lt1"/>
+          </a:fontRef>
+        </p:style>
+        <p:txBody>
+          <a:bodyPr rtlCol="0" anchor="ctr"/>
+          <a:lstStyle/>
+          <a:p>
+            <a:pPr algn="ctr"/>
+          </a:p>
+        </p:txBody>
+      </p:sp>
+      <p:sp>
+        <p:nvSpPr>
+          <p:cNvPr id="7" name="TextBox 6"/>
+          <p:cNvSpPr txBox="1"/>
+          <p:nvPr/>
+        </p:nvSpPr>
+        <p:spPr>
+          <a:xfrm>
+            <a:off x="914400" y="1773936"/>
+            <a:ext cx="3840480" cy="256032"/>
+          </a:xfrm>
+          <a:prstGeom prst="rect">
+            <a:avLst/>
+          </a:prstGeom>
+          <a:noFill/>
+        </p:spPr>
+        <p:txBody>
+          <a:bodyPr wrap="square" lIns="73152" rIns="73152" tIns="36576" bIns="36576">
+            <a:spAutoFit/>
+          </a:bodyPr>
+          <a:lstStyle/>
+          <a:p>
+            <a:pPr algn="l">
+              <a:spcAft>
+                <a:spcPts val="0"/>
+              </a:spcAft>
+              <a:defRPr sz="1700" b="1">
+                <a:solidFill>
+                  <a:srgbClr val="122C4E"/>
+                </a:solidFill>
+                <a:latin typeface="Noto Sans CJK KR"/>
+              </a:defRPr>
+            </a:pPr>
+            <a:r>
+              <a:t>ROS 2 Jazzy — Gazebo Simulation</a:t>
+            </a:r>
+          </a:p>
+        </p:txBody>
+      </p:sp>
+      <p:sp>
+        <p:nvSpPr>
+          <p:cNvPr id="8" name="TextBox 7"/>
+          <p:cNvSpPr txBox="1"/>
+          <p:nvPr/>
+        </p:nvSpPr>
+        <p:spPr>
+          <a:xfrm>
+            <a:off x="914400" y="2048255"/>
+            <a:ext cx="9966960" cy="475488"/>
+          </a:xfrm>
+          <a:prstGeom prst="rect">
+            <a:avLst/>
+          </a:prstGeom>
+          <a:noFill/>
+        </p:spPr>
+        <p:txBody>
+          <a:bodyPr wrap="square" lIns="73152" rIns="73152" tIns="36576" bIns="36576">
+            <a:spAutoFit/>
+          </a:bodyPr>
+          <a:lstStyle/>
+          <a:p>
+            <a:pPr algn="l">
+              <a:spcAft>
+                <a:spcPts val="0"/>
+              </a:spcAft>
+              <a:defRPr sz="1000" b="0">
+                <a:solidFill>
+                  <a:srgbClr val="225B9B"/>
+                </a:solidFill>
+                <a:latin typeface="DejaVu Sans Mono"/>
+              </a:defRPr>
+            </a:pPr>
+            <a:r>
+              <a:t>https://docs.ros.org/en/jazzy/Tutorials/Advanced/Simulators/Gazebo/Simulation-Gazebo.html</a:t>
+            </a:r>
+          </a:p>
+        </p:txBody>
+      </p:sp>
+      <p:sp>
+        <p:nvSpPr>
+          <p:cNvPr id="9" name="TextBox 8"/>
+          <p:cNvSpPr txBox="1"/>
+          <p:nvPr/>
+        </p:nvSpPr>
+        <p:spPr>
+          <a:xfrm>
+            <a:off x="914400" y="2852928"/>
+            <a:ext cx="3840480" cy="256032"/>
+          </a:xfrm>
+          <a:prstGeom prst="rect">
+            <a:avLst/>
+          </a:prstGeom>
+          <a:noFill/>
+        </p:spPr>
+        <p:txBody>
+          <a:bodyPr wrap="square" lIns="73152" rIns="73152" tIns="36576" bIns="36576">
+            <a:spAutoFit/>
+          </a:bodyPr>
+          <a:lstStyle/>
+          <a:p>
+            <a:pPr algn="l">
+              <a:spcAft>
+                <a:spcPts val="0"/>
+              </a:spcAft>
+              <a:defRPr sz="1700" b="1">
+                <a:solidFill>
+                  <a:srgbClr val="122C4E"/>
+                </a:solidFill>
+                <a:latin typeface="Noto Sans CJK KR"/>
+              </a:defRPr>
+            </a:pPr>
+            <a:r>
+              <a:t>ROS 2 Jazzy — URDF / robot_state_publisher</a:t>
+            </a:r>
+          </a:p>
+        </p:txBody>
+      </p:sp>
+      <p:sp>
+        <p:nvSpPr>
+          <p:cNvPr id="10" name="TextBox 9"/>
+          <p:cNvSpPr txBox="1"/>
+          <p:nvPr/>
+        </p:nvSpPr>
+        <p:spPr>
+          <a:xfrm>
+            <a:off x="914400" y="3127248"/>
+            <a:ext cx="9966960" cy="475488"/>
+          </a:xfrm>
+          <a:prstGeom prst="rect">
+            <a:avLst/>
+          </a:prstGeom>
+          <a:noFill/>
+        </p:spPr>
+        <p:txBody>
+          <a:bodyPr wrap="square" lIns="73152" rIns="73152" tIns="36576" bIns="36576">
+            <a:spAutoFit/>
+          </a:bodyPr>
+          <a:lstStyle/>
+          <a:p>
+            <a:pPr algn="l">
+              <a:spcAft>
+                <a:spcPts val="0"/>
+              </a:spcAft>
+              <a:defRPr sz="1000" b="0">
+                <a:solidFill>
+                  <a:srgbClr val="225B9B"/>
+                </a:solidFill>
+                <a:latin typeface="DejaVu Sans Mono"/>
+              </a:defRPr>
+            </a:pPr>
+            <a:r>
+              <a:t>https://docs.ros.org/en/jazzy/Tutorials/Intermediate/URDF/Using-URDF-with-Robot-State-Publisher-py.html</a:t>
+            </a:r>
+          </a:p>
+        </p:txBody>
+      </p:sp>
+      <p:sp>
+        <p:nvSpPr>
+          <p:cNvPr id="11" name="TextBox 10"/>
+          <p:cNvSpPr txBox="1"/>
+          <p:nvPr/>
+        </p:nvSpPr>
+        <p:spPr>
+          <a:xfrm>
+            <a:off x="914400" y="3931920"/>
+            <a:ext cx="3840480" cy="256032"/>
+          </a:xfrm>
+          <a:prstGeom prst="rect">
+            <a:avLst/>
+          </a:prstGeom>
+          <a:noFill/>
+        </p:spPr>
+        <p:txBody>
+          <a:bodyPr wrap="square" lIns="73152" rIns="73152" tIns="36576" bIns="36576">
+            <a:spAutoFit/>
+          </a:bodyPr>
+          <a:lstStyle/>
+          <a:p>
+            <a:pPr algn="l">
+              <a:spcAft>
+                <a:spcPts val="0"/>
+              </a:spcAft>
+              <a:defRPr sz="1700" b="1">
+                <a:solidFill>
+                  <a:srgbClr val="122C4E"/>
+                </a:solidFill>
+                <a:latin typeface="Noto Sans CJK KR"/>
+              </a:defRPr>
+            </a:pPr>
+            <a:r>
+              <a:t>Gazebo — ROS 2 Integration / ros_gz_bridge</a:t>
+            </a:r>
+          </a:p>
+        </p:txBody>
+      </p:sp>
+      <p:sp>
+        <p:nvSpPr>
+          <p:cNvPr id="12" name="TextBox 11"/>
+          <p:cNvSpPr txBox="1"/>
+          <p:nvPr/>
+        </p:nvSpPr>
+        <p:spPr>
+          <a:xfrm>
+            <a:off x="914400" y="4206240"/>
+            <a:ext cx="9966960" cy="475488"/>
+          </a:xfrm>
+          <a:prstGeom prst="rect">
+            <a:avLst/>
+          </a:prstGeom>
+          <a:noFill/>
+        </p:spPr>
+        <p:txBody>
+          <a:bodyPr wrap="square" lIns="73152" rIns="73152" tIns="36576" bIns="36576">
+            <a:spAutoFit/>
+          </a:bodyPr>
+          <a:lstStyle/>
+          <a:p>
+            <a:pPr algn="l">
+              <a:spcAft>
+                <a:spcPts val="0"/>
+              </a:spcAft>
+              <a:defRPr sz="1000" b="0">
+                <a:solidFill>
+                  <a:srgbClr val="225B9B"/>
+                </a:solidFill>
+                <a:latin typeface="DejaVu Sans Mono"/>
+              </a:defRPr>
+            </a:pPr>
+            <a:r>
+              <a:t>https://gazebosim.org/docs/latest/ros2_integration/</a:t>
+            </a:r>
+          </a:p>
+        </p:txBody>
+      </p:sp>
+      <p:sp>
+        <p:nvSpPr>
+          <p:cNvPr id="13" name="TextBox 12"/>
+          <p:cNvSpPr txBox="1"/>
+          <p:nvPr/>
+        </p:nvSpPr>
+        <p:spPr>
+          <a:xfrm>
+            <a:off x="914400" y="5010912"/>
+            <a:ext cx="3840480" cy="256032"/>
+          </a:xfrm>
+          <a:prstGeom prst="rect">
+            <a:avLst/>
+          </a:prstGeom>
+          <a:noFill/>
+        </p:spPr>
+        <p:txBody>
+          <a:bodyPr wrap="square" lIns="73152" rIns="73152" tIns="36576" bIns="36576">
+            <a:spAutoFit/>
+          </a:bodyPr>
+          <a:lstStyle/>
+          <a:p>
+            <a:pPr algn="l">
+              <a:spcAft>
+                <a:spcPts val="0"/>
+              </a:spcAft>
+              <a:defRPr sz="1700" b="1">
+                <a:solidFill>
+                  <a:srgbClr val="122C4E"/>
+                </a:solidFill>
+                <a:latin typeface="Noto Sans CJK KR"/>
+              </a:defRPr>
+            </a:pPr>
+            <a:r>
+              <a:t>ROS 2 Jazzy — rosbag2 Recording and Playback</a:t>
+            </a:r>
+          </a:p>
+        </p:txBody>
+      </p:sp>
+      <p:sp>
+        <p:nvSpPr>
+          <p:cNvPr id="14" name="TextBox 13"/>
+          <p:cNvSpPr txBox="1"/>
+          <p:nvPr/>
+        </p:nvSpPr>
+        <p:spPr>
+          <a:xfrm>
+            <a:off x="914400" y="5285232"/>
+            <a:ext cx="9966960" cy="475488"/>
+          </a:xfrm>
+          <a:prstGeom prst="rect">
+            <a:avLst/>
+          </a:prstGeom>
+          <a:noFill/>
+        </p:spPr>
+        <p:txBody>
+          <a:bodyPr wrap="square" lIns="73152" rIns="73152" tIns="36576" bIns="36576">
+            <a:spAutoFit/>
+          </a:bodyPr>
+          <a:lstStyle/>
+          <a:p>
+            <a:pPr algn="l">
+              <a:spcAft>
+                <a:spcPts val="0"/>
+              </a:spcAft>
+              <a:defRPr sz="1000" b="0">
+                <a:solidFill>
+                  <a:srgbClr val="225B9B"/>
+                </a:solidFill>
+                <a:latin typeface="DejaVu Sans Mono"/>
+              </a:defRPr>
+            </a:pPr>
+            <a:r>
+              <a:t>https://docs.ros.org/en/jazzy/Tutorials/Beginner-CLI-Tools/Recording-And-Playing-Back-Data/Recording-And-Playing-Back-Data.html</a:t>
+            </a:r>
+          </a:p>
+        </p:txBody>
+      </p:sp>
+    </p:spTree>
+  </p:cSld>
+  <p:clrMapOvr>
+    <a:masterClrMapping/>
+  </p:clrMapOvr>
+</p:sld>
+</file>
+
 <file path=ppt/slides/slide6.xml><?xml version="1.0" encoding="utf-8"?>
 <p:sld xmlns:a="http://schemas.openxmlformats.org/drawingml/2006/main" xmlns:p="http://schemas.openxmlformats.org/presentationml/2006/main" xmlns:r="http://schemas.openxmlformats.org/officeDocument/2006/relationships">
   <p:cSld>
@@ -31346,7 +34161,7 @@
       </p:sp>
       <p:pic>
         <p:nvPicPr>
-          <p:cNvPr id="6" name="Picture 5" descr="01_gazebo_world_spawn_actual.png"/>
+          <p:cNvPr id="6" name="Picture 5" descr="gazebo_agv_actual.png"/>
           <p:cNvPicPr>
             <a:picLocks noChangeAspect="1"/>
           </p:cNvPicPr>
@@ -31360,8 +34175,8 @@
         </p:blipFill>
         <p:spPr>
           <a:xfrm>
-            <a:off x="3335044" y="1389888"/>
-            <a:ext cx="5518863" cy="4663440"/>
+            <a:off x="3463292" y="1389888"/>
+            <a:ext cx="5262366" cy="4663440"/>
           </a:xfrm>
           <a:prstGeom prst="rect">
             <a:avLst/>
@@ -31402,7 +34217,7 @@
               </a:defRPr>
             </a:pPr>
             <a:r>
-              <a:t>목표 화면: 실제 Gazebo Sim: warehouse World와 Entity Tree에 보이는 AGV  |  나중에 확인할 것: 오른쪽 Entity Tree에서 ground·wall·target·agv가 따로 생성됐는지 확인합니다.</a:t>
+              <a:t>목표 화면: 실제 Gazebo Sim: warehouse World와 Entity Tree에 보이는 AGV  |  나중에 확인할 것: 오른쪽 Entity Tree에서 ground·wall·target·agv가 따로 생성됐는지, 왼쪽 World에 파란 AGV가 놓였는지 확인합니다.</a:t>
             </a:r>
           </a:p>
         </p:txBody>
